--- a/docs/slides/slides.pptx
+++ b/docs/slides/slides.pptx
@@ -3471,7 +3471,7 @@
               <a:defRPr sz="2000"/>
             </a:pPr>
             <a:r>
-              <a:t>Trained on 30 utterances, validated on 20</a:t>
+              <a:t>Trained on 25380 utterances, validated on 24844</a:t>
             </a:r>
           </a:p>
           <a:p>
@@ -3479,7 +3479,7 @@
               <a:defRPr sz="2000"/>
             </a:pPr>
             <a:r>
-              <a:t>Dev accuracy: 100.0%</a:t>
+              <a:t>Dev accuracy: 92.3%</a:t>
             </a:r>
           </a:p>
           <a:p>
@@ -3487,7 +3487,7 @@
               <a:defRPr sz="2000"/>
             </a:pPr>
             <a:r>
-              <a:t>Dev precision: 100.0% | recall: 100.0% | F1: 100.0%</a:t>
+              <a:t>Dev precision: 92.3% | recall: 99.8% | F1: 95.9%</a:t>
             </a:r>
           </a:p>
         </p:txBody>

--- a/docs/slides/slides.pptx
+++ b/docs/slides/slides.pptx
@@ -3479,7 +3479,7 @@
               <a:defRPr sz="2000"/>
             </a:pPr>
             <a:r>
-              <a:t>Dev accuracy: 92.3%</a:t>
+              <a:t>Dev accuracy: 90.7%</a:t>
             </a:r>
           </a:p>
           <a:p>
@@ -3487,7 +3487,7 @@
               <a:defRPr sz="2000"/>
             </a:pPr>
             <a:r>
-              <a:t>Dev precision: 92.3% | recall: 99.8% | F1: 95.9%</a:t>
+              <a:t>Dev precision: 98.8% | recall: 90.7% | F1: 94.6%</a:t>
             </a:r>
           </a:p>
         </p:txBody>

--- a/docs/slides/slides.pptx
+++ b/docs/slides/slides.pptx
@@ -12,8 +12,14 @@
     <p:sldId id="260" r:id="rId11"/>
     <p:sldId id="261" r:id="rId12"/>
     <p:sldId id="262" r:id="rId13"/>
+    <p:sldId id="263" r:id="rId14"/>
+    <p:sldId id="264" r:id="rId15"/>
+    <p:sldId id="265" r:id="rId16"/>
+    <p:sldId id="266" r:id="rId17"/>
+    <p:sldId id="267" r:id="rId18"/>
+    <p:sldId id="268" r:id="rId19"/>
   </p:sldIdLst>
-  <p:sldSz cx="9144000" cy="6858000" type="screen4x3"/>
+  <p:sldSz cx="12191695" cy="6858000" type="screen4x3"/>
   <p:notesSz cx="6858000" cy="9144000"/>
   <p:defaultTextStyle>
     <a:defPPr>
@@ -3087,6 +3093,14 @@
 <file path=ppt/slides/slide1.xml><?xml version="1.0" encoding="utf-8"?>
 <p:sld xmlns:a="http://schemas.openxmlformats.org/drawingml/2006/main" xmlns:p="http://schemas.openxmlformats.org/presentationml/2006/main" xmlns:r="http://schemas.openxmlformats.org/officeDocument/2006/relationships">
   <p:cSld>
+    <p:bg>
+      <p:bgPr>
+        <a:solidFill>
+          <a:srgbClr val="F7F9FB"/>
+        </a:solidFill>
+        <a:effectLst/>
+      </p:bgPr>
+    </p:bg>
     <p:spTree>
       <p:nvGrpSpPr>
         <p:cNvPr id="1" name=""/>
@@ -3096,19 +3110,122 @@
       <p:grpSpPr/>
       <p:sp>
         <p:nvSpPr>
-          <p:cNvPr id="2" name="Title 1"/>
-          <p:cNvSpPr>
-            <a:spLocks noGrp="1"/>
-          </p:cNvSpPr>
-          <p:nvPr>
-            <p:ph type="ctrTitle"/>
-          </p:nvPr>
-        </p:nvSpPr>
-        <p:spPr/>
-        <p:txBody>
-          <a:bodyPr/>
-          <a:lstStyle/>
-          <a:p>
+          <p:cNvPr id="2" name="Rectangle 1"/>
+          <p:cNvSpPr/>
+          <p:nvPr/>
+        </p:nvSpPr>
+        <p:spPr>
+          <a:xfrm>
+            <a:off x="0" y="0"/>
+            <a:ext cx="12191695" cy="6858000"/>
+          </a:xfrm>
+          <a:prstGeom prst="rect">
+            <a:avLst/>
+          </a:prstGeom>
+          <a:solidFill>
+            <a:srgbClr val="0F2942"/>
+          </a:solidFill>
+          <a:ln>
+            <a:noFill/>
+          </a:ln>
+          <a:effectLst/>
+        </p:spPr>
+        <p:style>
+          <a:lnRef idx="1">
+            <a:schemeClr val="accent1"/>
+          </a:lnRef>
+          <a:fillRef idx="3">
+            <a:schemeClr val="accent1"/>
+          </a:fillRef>
+          <a:effectRef idx="2">
+            <a:schemeClr val="accent1"/>
+          </a:effectRef>
+          <a:fontRef idx="minor">
+            <a:schemeClr val="lt1"/>
+          </a:fontRef>
+        </p:style>
+        <p:txBody>
+          <a:bodyPr rtlCol="0" anchor="ctr"/>
+          <a:lstStyle/>
+          <a:p>
+            <a:pPr algn="ctr"/>
+          </a:p>
+        </p:txBody>
+      </p:sp>
+      <p:sp>
+        <p:nvSpPr>
+          <p:cNvPr id="3" name="Rectangle 2"/>
+          <p:cNvSpPr/>
+          <p:nvPr/>
+        </p:nvSpPr>
+        <p:spPr>
+          <a:xfrm>
+            <a:off x="0" y="3977639"/>
+            <a:ext cx="12191695" cy="63500"/>
+          </a:xfrm>
+          <a:prstGeom prst="rect">
+            <a:avLst/>
+          </a:prstGeom>
+          <a:solidFill>
+            <a:srgbClr val="0D9488"/>
+          </a:solidFill>
+          <a:ln>
+            <a:noFill/>
+          </a:ln>
+          <a:effectLst/>
+        </p:spPr>
+        <p:style>
+          <a:lnRef idx="1">
+            <a:schemeClr val="accent1"/>
+          </a:lnRef>
+          <a:fillRef idx="3">
+            <a:schemeClr val="accent1"/>
+          </a:fillRef>
+          <a:effectRef idx="2">
+            <a:schemeClr val="accent1"/>
+          </a:effectRef>
+          <a:fontRef idx="minor">
+            <a:schemeClr val="lt1"/>
+          </a:fontRef>
+        </p:style>
+        <p:txBody>
+          <a:bodyPr rtlCol="0" anchor="ctr"/>
+          <a:lstStyle/>
+          <a:p>
+            <a:pPr algn="ctr"/>
+          </a:p>
+        </p:txBody>
+      </p:sp>
+      <p:sp>
+        <p:nvSpPr>
+          <p:cNvPr id="4" name="TextBox 3"/>
+          <p:cNvSpPr txBox="1"/>
+          <p:nvPr/>
+        </p:nvSpPr>
+        <p:spPr>
+          <a:xfrm>
+            <a:off x="914400" y="2468880"/>
+            <a:ext cx="10332720" cy="1097280"/>
+          </a:xfrm>
+          <a:prstGeom prst="rect">
+            <a:avLst/>
+          </a:prstGeom>
+          <a:noFill/>
+        </p:spPr>
+        <p:txBody>
+          <a:bodyPr wrap="square">
+            <a:spAutoFit/>
+          </a:bodyPr>
+          <a:lstStyle/>
+          <a:p>
+            <a:pPr algn="l">
+              <a:defRPr sz="4400" b="1">
+                <a:solidFill>
+                  <a:srgbClr val="FFFFFF"/>
+                </a:solidFill>
+                <a:latin typeface="Calibri"/>
+              </a:defRPr>
+            </a:pPr>
             <a:r>
               <a:t>Human-or-AI Voice Detector</a:t>
             </a:r>
@@ -3117,21 +3234,1241 @@
       </p:sp>
       <p:sp>
         <p:nvSpPr>
-          <p:cNvPr id="3" name="Subtitle 2"/>
-          <p:cNvSpPr>
-            <a:spLocks noGrp="1"/>
-          </p:cNvSpPr>
-          <p:nvPr>
-            <p:ph type="subTitle" idx="1"/>
-          </p:nvPr>
-        </p:nvSpPr>
-        <p:spPr/>
-        <p:txBody>
-          <a:bodyPr/>
-          <a:lstStyle/>
-          <a:p>
-            <a:r>
-              <a:t>BIU Big Data and AI course project — ASVspoof2019 (LA)</a:t>
+          <p:cNvPr id="5" name="TextBox 4"/>
+          <p:cNvSpPr txBox="1"/>
+          <p:nvPr/>
+        </p:nvSpPr>
+        <p:spPr>
+          <a:xfrm>
+            <a:off x="914400" y="3429000"/>
+            <a:ext cx="10332720" cy="548640"/>
+          </a:xfrm>
+          <a:prstGeom prst="rect">
+            <a:avLst/>
+          </a:prstGeom>
+          <a:noFill/>
+        </p:spPr>
+        <p:txBody>
+          <a:bodyPr wrap="square">
+            <a:spAutoFit/>
+          </a:bodyPr>
+          <a:lstStyle/>
+          <a:p>
+            <a:pPr algn="l">
+              <a:defRPr sz="1800" b="0">
+                <a:solidFill>
+                  <a:srgbClr val="CBD5E1"/>
+                </a:solidFill>
+                <a:latin typeface="Calibri"/>
+              </a:defRPr>
+            </a:pPr>
+            <a:r>
+              <a:t>BIU Big Data and AI course project — ASVspoof2019 (Logical Access)</a:t>
+            </a:r>
+          </a:p>
+        </p:txBody>
+      </p:sp>
+      <p:sp>
+        <p:nvSpPr>
+          <p:cNvPr id="6" name="TextBox 5"/>
+          <p:cNvSpPr txBox="1"/>
+          <p:nvPr/>
+        </p:nvSpPr>
+        <p:spPr>
+          <a:xfrm>
+            <a:off x="914400" y="4251960"/>
+            <a:ext cx="10332720" cy="457200"/>
+          </a:xfrm>
+          <a:prstGeom prst="rect">
+            <a:avLst/>
+          </a:prstGeom>
+          <a:noFill/>
+        </p:spPr>
+        <p:txBody>
+          <a:bodyPr wrap="square">
+            <a:spAutoFit/>
+          </a:bodyPr>
+          <a:lstStyle/>
+          <a:p>
+            <a:pPr algn="l">
+              <a:defRPr sz="1400" b="0">
+                <a:solidFill>
+                  <a:srgbClr val="0D9488"/>
+                </a:solidFill>
+                <a:latin typeface="Calibri"/>
+              </a:defRPr>
+            </a:pPr>
+            <a:r>
+              <a:t>MinIO · Apache Spark · Apache Kafka · Elasticsearch · scikit-learn · Flask</a:t>
+            </a:r>
+          </a:p>
+        </p:txBody>
+      </p:sp>
+    </p:spTree>
+  </p:cSld>
+  <p:clrMapOvr>
+    <a:masterClrMapping/>
+  </p:clrMapOvr>
+</p:sld>
+</file>
+
+<file path=ppt/slides/slide10.xml><?xml version="1.0" encoding="utf-8"?>
+<p:sld xmlns:a="http://schemas.openxmlformats.org/drawingml/2006/main" xmlns:p="http://schemas.openxmlformats.org/presentationml/2006/main" xmlns:r="http://schemas.openxmlformats.org/officeDocument/2006/relationships">
+  <p:cSld>
+    <p:bg>
+      <p:bgPr>
+        <a:solidFill>
+          <a:srgbClr val="F7F9FB"/>
+        </a:solidFill>
+        <a:effectLst/>
+      </p:bgPr>
+    </p:bg>
+    <p:spTree>
+      <p:nvGrpSpPr>
+        <p:cNvPr id="1" name=""/>
+        <p:cNvGrpSpPr/>
+        <p:nvPr/>
+      </p:nvGrpSpPr>
+      <p:grpSpPr/>
+      <p:sp>
+        <p:nvSpPr>
+          <p:cNvPr id="2" name="Rectangle 1"/>
+          <p:cNvSpPr/>
+          <p:nvPr/>
+        </p:nvSpPr>
+        <p:spPr>
+          <a:xfrm>
+            <a:off x="0" y="0"/>
+            <a:ext cx="12191695" cy="1051560"/>
+          </a:xfrm>
+          <a:prstGeom prst="rect">
+            <a:avLst/>
+          </a:prstGeom>
+          <a:solidFill>
+            <a:srgbClr val="0F2942"/>
+          </a:solidFill>
+          <a:ln>
+            <a:noFill/>
+          </a:ln>
+          <a:effectLst/>
+        </p:spPr>
+        <p:style>
+          <a:lnRef idx="1">
+            <a:schemeClr val="accent1"/>
+          </a:lnRef>
+          <a:fillRef idx="3">
+            <a:schemeClr val="accent1"/>
+          </a:fillRef>
+          <a:effectRef idx="2">
+            <a:schemeClr val="accent1"/>
+          </a:effectRef>
+          <a:fontRef idx="minor">
+            <a:schemeClr val="lt1"/>
+          </a:fontRef>
+        </p:style>
+        <p:txBody>
+          <a:bodyPr rtlCol="0" anchor="ctr"/>
+          <a:lstStyle/>
+          <a:p>
+            <a:pPr algn="ctr"/>
+          </a:p>
+        </p:txBody>
+      </p:sp>
+      <p:sp>
+        <p:nvSpPr>
+          <p:cNvPr id="3" name="Rectangle 2"/>
+          <p:cNvSpPr/>
+          <p:nvPr/>
+        </p:nvSpPr>
+        <p:spPr>
+          <a:xfrm>
+            <a:off x="0" y="1051560"/>
+            <a:ext cx="2103120" cy="63500"/>
+          </a:xfrm>
+          <a:prstGeom prst="rect">
+            <a:avLst/>
+          </a:prstGeom>
+          <a:solidFill>
+            <a:srgbClr val="0D9488"/>
+          </a:solidFill>
+          <a:ln>
+            <a:noFill/>
+          </a:ln>
+          <a:effectLst/>
+        </p:spPr>
+        <p:style>
+          <a:lnRef idx="1">
+            <a:schemeClr val="accent1"/>
+          </a:lnRef>
+          <a:fillRef idx="3">
+            <a:schemeClr val="accent1"/>
+          </a:fillRef>
+          <a:effectRef idx="2">
+            <a:schemeClr val="accent1"/>
+          </a:effectRef>
+          <a:fontRef idx="minor">
+            <a:schemeClr val="lt1"/>
+          </a:fontRef>
+        </p:style>
+        <p:txBody>
+          <a:bodyPr rtlCol="0" anchor="ctr"/>
+          <a:lstStyle/>
+          <a:p>
+            <a:pPr algn="ctr"/>
+          </a:p>
+        </p:txBody>
+      </p:sp>
+      <p:sp>
+        <p:nvSpPr>
+          <p:cNvPr id="4" name="TextBox 3"/>
+          <p:cNvSpPr txBox="1"/>
+          <p:nvPr/>
+        </p:nvSpPr>
+        <p:spPr>
+          <a:xfrm>
+            <a:off x="548640" y="146304"/>
+            <a:ext cx="11094415" cy="640080"/>
+          </a:xfrm>
+          <a:prstGeom prst="rect">
+            <a:avLst/>
+          </a:prstGeom>
+          <a:noFill/>
+        </p:spPr>
+        <p:txBody>
+          <a:bodyPr wrap="square">
+            <a:spAutoFit/>
+          </a:bodyPr>
+          <a:lstStyle/>
+          <a:p>
+            <a:pPr>
+              <a:defRPr sz="3000" b="1">
+                <a:solidFill>
+                  <a:srgbClr val="FFFFFF"/>
+                </a:solidFill>
+                <a:latin typeface="Calibri"/>
+              </a:defRPr>
+            </a:pPr>
+            <a:r>
+              <a:t>AI capability 3 — streaming enrichment</a:t>
+            </a:r>
+          </a:p>
+        </p:txBody>
+      </p:sp>
+      <p:sp>
+        <p:nvSpPr>
+          <p:cNvPr id="5" name="TextBox 4"/>
+          <p:cNvSpPr txBox="1"/>
+          <p:nvPr/>
+        </p:nvSpPr>
+        <p:spPr>
+          <a:xfrm>
+            <a:off x="548640" y="658368"/>
+            <a:ext cx="11094415" cy="365760"/>
+          </a:xfrm>
+          <a:prstGeom prst="rect">
+            <a:avLst/>
+          </a:prstGeom>
+          <a:noFill/>
+        </p:spPr>
+        <p:txBody>
+          <a:bodyPr wrap="none">
+            <a:spAutoFit/>
+          </a:bodyPr>
+          <a:lstStyle/>
+          <a:p>
+            <a:pPr>
+              <a:defRPr sz="1300">
+                <a:solidFill>
+                  <a:srgbClr val="CBD5E1"/>
+                </a:solidFill>
+                <a:latin typeface="Calibri"/>
+              </a:defRPr>
+            </a:pPr>
+            <a:r>
+              <a:t>Kafka producer/consumer, near-real-time scoring</a:t>
+            </a:r>
+          </a:p>
+        </p:txBody>
+      </p:sp>
+      <p:sp>
+        <p:nvSpPr>
+          <p:cNvPr id="6" name="TextBox 5"/>
+          <p:cNvSpPr txBox="1"/>
+          <p:nvPr/>
+        </p:nvSpPr>
+        <p:spPr>
+          <a:xfrm>
+            <a:off x="11368735" y="6473952"/>
+            <a:ext cx="548640" cy="292608"/>
+          </a:xfrm>
+          <a:prstGeom prst="rect">
+            <a:avLst/>
+          </a:prstGeom>
+          <a:noFill/>
+        </p:spPr>
+        <p:txBody>
+          <a:bodyPr wrap="square">
+            <a:spAutoFit/>
+          </a:bodyPr>
+          <a:lstStyle/>
+          <a:p>
+            <a:pPr algn="r">
+              <a:defRPr sz="1100" b="0">
+                <a:solidFill>
+                  <a:srgbClr val="64748B"/>
+                </a:solidFill>
+                <a:latin typeface="Calibri"/>
+              </a:defRPr>
+            </a:pPr>
+            <a:r>
+              <a:t>9</a:t>
+            </a:r>
+          </a:p>
+        </p:txBody>
+      </p:sp>
+      <p:sp>
+        <p:nvSpPr>
+          <p:cNvPr id="7" name="TextBox 6"/>
+          <p:cNvSpPr txBox="1"/>
+          <p:nvPr/>
+        </p:nvSpPr>
+        <p:spPr>
+          <a:xfrm>
+            <a:off x="548640" y="1417320"/>
+            <a:ext cx="11094415" cy="4983480"/>
+          </a:xfrm>
+          <a:prstGeom prst="rect">
+            <a:avLst/>
+          </a:prstGeom>
+          <a:noFill/>
+        </p:spPr>
+        <p:txBody>
+          <a:bodyPr wrap="square">
+            <a:spAutoFit/>
+          </a:bodyPr>
+          <a:lstStyle/>
+          <a:p>
+            <a:pPr>
+              <a:spcAft>
+                <a:spcPts val="1000"/>
+              </a:spcAft>
+              <a:defRPr sz="1900">
+                <a:solidFill>
+                  <a:srgbClr val="1A202C"/>
+                </a:solidFill>
+                <a:latin typeface="Calibri"/>
+              </a:defRPr>
+            </a:pPr>
+            <a:r>
+              <a:t>•  Producer replays eval-set utterance events (a MinIO key, not the audio itself)</a:t>
+            </a:r>
+          </a:p>
+          <a:p>
+            <a:pPr>
+              <a:spcAft>
+                <a:spcPts val="1000"/>
+              </a:spcAft>
+              <a:defRPr sz="1900">
+                <a:solidFill>
+                  <a:srgbClr val="1A202C"/>
+                </a:solidFill>
+                <a:latin typeface="Calibri"/>
+              </a:defRPr>
+            </a:pPr>
+            <a:r>
+              <a:t>•  Consumer fetches the clip, extracts features, scores it at the deployed EER threshold,</a:t>
+            </a:r>
+          </a:p>
+          <a:p>
+            <a:pPr lvl="1">
+              <a:spcAft>
+                <a:spcPts val="1000"/>
+              </a:spcAft>
+              <a:defRPr sz="1600">
+                <a:solidFill>
+                  <a:srgbClr val="64748B"/>
+                </a:solidFill>
+                <a:latin typeface="Calibri"/>
+              </a:defRPr>
+            </a:pPr>
+            <a:r>
+              <a:t>–  and writes an enriched prediction to Elasticsearch — one document per utterance, live</a:t>
+            </a:r>
+          </a:p>
+          <a:p>
+            <a:pPr>
+              <a:spcAft>
+                <a:spcPts val="1000"/>
+              </a:spcAft>
+              <a:defRPr sz="1900">
+                <a:solidFill>
+                  <a:srgbClr val="1A202C"/>
+                </a:solidFill>
+                <a:latin typeface="Calibri"/>
+              </a:defRPr>
+            </a:pPr>
+            <a:r>
+              <a:t>•  Same feature-extraction and model code as the batch job and the web app — one</a:t>
+            </a:r>
+          </a:p>
+          <a:p>
+            <a:pPr lvl="1">
+              <a:spcAft>
+                <a:spcPts val="1000"/>
+              </a:spcAft>
+              <a:defRPr sz="1600">
+                <a:solidFill>
+                  <a:srgbClr val="64748B"/>
+                </a:solidFill>
+                <a:latin typeface="Calibri"/>
+              </a:defRPr>
+            </a:pPr>
+            <a:r>
+              <a:t>–  implementation applied three ways, not three separate things to maintain and defend</a:t>
+            </a:r>
+          </a:p>
+          <a:p>
+            <a:pPr>
+              <a:spcAft>
+                <a:spcPts val="1000"/>
+              </a:spcAft>
+              <a:defRPr sz="1900">
+                <a:solidFill>
+                  <a:srgbClr val="1A202C"/>
+                </a:solidFill>
+                <a:latin typeface="Calibri"/>
+              </a:defRPr>
+            </a:pPr>
+            <a:r>
+              <a:t>•  A named consumer group tracks offset, so re-running resumes instead of re-scoring</a:t>
+            </a:r>
+          </a:p>
+        </p:txBody>
+      </p:sp>
+    </p:spTree>
+  </p:cSld>
+  <p:clrMapOvr>
+    <a:masterClrMapping/>
+  </p:clrMapOvr>
+</p:sld>
+</file>
+
+<file path=ppt/slides/slide11.xml><?xml version="1.0" encoding="utf-8"?>
+<p:sld xmlns:a="http://schemas.openxmlformats.org/drawingml/2006/main" xmlns:p="http://schemas.openxmlformats.org/presentationml/2006/main" xmlns:r="http://schemas.openxmlformats.org/officeDocument/2006/relationships">
+  <p:cSld>
+    <p:bg>
+      <p:bgPr>
+        <a:solidFill>
+          <a:srgbClr val="F7F9FB"/>
+        </a:solidFill>
+        <a:effectLst/>
+      </p:bgPr>
+    </p:bg>
+    <p:spTree>
+      <p:nvGrpSpPr>
+        <p:cNvPr id="1" name=""/>
+        <p:cNvGrpSpPr/>
+        <p:nvPr/>
+      </p:nvGrpSpPr>
+      <p:grpSpPr/>
+      <p:sp>
+        <p:nvSpPr>
+          <p:cNvPr id="2" name="Rectangle 1"/>
+          <p:cNvSpPr/>
+          <p:nvPr/>
+        </p:nvSpPr>
+        <p:spPr>
+          <a:xfrm>
+            <a:off x="0" y="0"/>
+            <a:ext cx="12191695" cy="1051560"/>
+          </a:xfrm>
+          <a:prstGeom prst="rect">
+            <a:avLst/>
+          </a:prstGeom>
+          <a:solidFill>
+            <a:srgbClr val="0F2942"/>
+          </a:solidFill>
+          <a:ln>
+            <a:noFill/>
+          </a:ln>
+          <a:effectLst/>
+        </p:spPr>
+        <p:style>
+          <a:lnRef idx="1">
+            <a:schemeClr val="accent1"/>
+          </a:lnRef>
+          <a:fillRef idx="3">
+            <a:schemeClr val="accent1"/>
+          </a:fillRef>
+          <a:effectRef idx="2">
+            <a:schemeClr val="accent1"/>
+          </a:effectRef>
+          <a:fontRef idx="minor">
+            <a:schemeClr val="lt1"/>
+          </a:fontRef>
+        </p:style>
+        <p:txBody>
+          <a:bodyPr rtlCol="0" anchor="ctr"/>
+          <a:lstStyle/>
+          <a:p>
+            <a:pPr algn="ctr"/>
+          </a:p>
+        </p:txBody>
+      </p:sp>
+      <p:sp>
+        <p:nvSpPr>
+          <p:cNvPr id="3" name="Rectangle 2"/>
+          <p:cNvSpPr/>
+          <p:nvPr/>
+        </p:nvSpPr>
+        <p:spPr>
+          <a:xfrm>
+            <a:off x="0" y="1051560"/>
+            <a:ext cx="2103120" cy="63500"/>
+          </a:xfrm>
+          <a:prstGeom prst="rect">
+            <a:avLst/>
+          </a:prstGeom>
+          <a:solidFill>
+            <a:srgbClr val="0D9488"/>
+          </a:solidFill>
+          <a:ln>
+            <a:noFill/>
+          </a:ln>
+          <a:effectLst/>
+        </p:spPr>
+        <p:style>
+          <a:lnRef idx="1">
+            <a:schemeClr val="accent1"/>
+          </a:lnRef>
+          <a:fillRef idx="3">
+            <a:schemeClr val="accent1"/>
+          </a:fillRef>
+          <a:effectRef idx="2">
+            <a:schemeClr val="accent1"/>
+          </a:effectRef>
+          <a:fontRef idx="minor">
+            <a:schemeClr val="lt1"/>
+          </a:fontRef>
+        </p:style>
+        <p:txBody>
+          <a:bodyPr rtlCol="0" anchor="ctr"/>
+          <a:lstStyle/>
+          <a:p>
+            <a:pPr algn="ctr"/>
+          </a:p>
+        </p:txBody>
+      </p:sp>
+      <p:sp>
+        <p:nvSpPr>
+          <p:cNvPr id="4" name="TextBox 3"/>
+          <p:cNvSpPr txBox="1"/>
+          <p:nvPr/>
+        </p:nvSpPr>
+        <p:spPr>
+          <a:xfrm>
+            <a:off x="548640" y="146304"/>
+            <a:ext cx="11094415" cy="640080"/>
+          </a:xfrm>
+          <a:prstGeom prst="rect">
+            <a:avLst/>
+          </a:prstGeom>
+          <a:noFill/>
+        </p:spPr>
+        <p:txBody>
+          <a:bodyPr wrap="square">
+            <a:spAutoFit/>
+          </a:bodyPr>
+          <a:lstStyle/>
+          <a:p>
+            <a:pPr>
+              <a:defRPr sz="3000" b="1">
+                <a:solidFill>
+                  <a:srgbClr val="FFFFFF"/>
+                </a:solidFill>
+                <a:latin typeface="Calibri"/>
+              </a:defRPr>
+            </a:pPr>
+            <a:r>
+              <a:t>Live demo</a:t>
+            </a:r>
+          </a:p>
+        </p:txBody>
+      </p:sp>
+      <p:sp>
+        <p:nvSpPr>
+          <p:cNvPr id="5" name="TextBox 4"/>
+          <p:cNvSpPr txBox="1"/>
+          <p:nvPr/>
+        </p:nvSpPr>
+        <p:spPr>
+          <a:xfrm>
+            <a:off x="11368735" y="6473952"/>
+            <a:ext cx="548640" cy="292608"/>
+          </a:xfrm>
+          <a:prstGeom prst="rect">
+            <a:avLst/>
+          </a:prstGeom>
+          <a:noFill/>
+        </p:spPr>
+        <p:txBody>
+          <a:bodyPr wrap="square">
+            <a:spAutoFit/>
+          </a:bodyPr>
+          <a:lstStyle/>
+          <a:p>
+            <a:pPr algn="r">
+              <a:defRPr sz="1100" b="0">
+                <a:solidFill>
+                  <a:srgbClr val="64748B"/>
+                </a:solidFill>
+                <a:latin typeface="Calibri"/>
+              </a:defRPr>
+            </a:pPr>
+            <a:r>
+              <a:t>10</a:t>
+            </a:r>
+          </a:p>
+        </p:txBody>
+      </p:sp>
+      <p:sp>
+        <p:nvSpPr>
+          <p:cNvPr id="6" name="TextBox 5"/>
+          <p:cNvSpPr txBox="1"/>
+          <p:nvPr/>
+        </p:nvSpPr>
+        <p:spPr>
+          <a:xfrm>
+            <a:off x="548640" y="1417320"/>
+            <a:ext cx="11094415" cy="4983480"/>
+          </a:xfrm>
+          <a:prstGeom prst="rect">
+            <a:avLst/>
+          </a:prstGeom>
+          <a:noFill/>
+        </p:spPr>
+        <p:txBody>
+          <a:bodyPr wrap="square">
+            <a:spAutoFit/>
+          </a:bodyPr>
+          <a:lstStyle/>
+          <a:p>
+            <a:pPr>
+              <a:spcAft>
+                <a:spcPts val="1000"/>
+              </a:spcAft>
+              <a:defRPr sz="1900">
+                <a:solidFill>
+                  <a:srgbClr val="1A202C"/>
+                </a:solidFill>
+                <a:latin typeface="Calibri"/>
+              </a:defRPr>
+            </a:pPr>
+            <a:r>
+              <a:t>•  /classify — upload a clip or record live from the microphone (captured via the Web</a:t>
+            </a:r>
+          </a:p>
+          <a:p>
+            <a:pPr lvl="1">
+              <a:spcAft>
+                <a:spcPts val="1000"/>
+              </a:spcAft>
+              <a:defRPr sz="1600">
+                <a:solidFill>
+                  <a:srgbClr val="64748B"/>
+                </a:solidFill>
+                <a:latin typeface="Calibri"/>
+              </a:defRPr>
+            </a:pPr>
+            <a:r>
+              <a:t>–  Audio API, encoded to WAV client-side — no server changes needed for live recording)</a:t>
+            </a:r>
+          </a:p>
+          <a:p>
+            <a:pPr>
+              <a:spcAft>
+                <a:spcPts val="1000"/>
+              </a:spcAft>
+              <a:defRPr sz="1900">
+                <a:solidFill>
+                  <a:srgbClr val="1A202C"/>
+                </a:solidFill>
+                <a:latin typeface="Calibri"/>
+              </a:defRPr>
+            </a:pPr>
+            <a:r>
+              <a:t>•  Returns Human / AI-generated + confidence, plus the 5 most similar training clips —</a:t>
+            </a:r>
+          </a:p>
+          <a:p>
+            <a:pPr lvl="1">
+              <a:spcAft>
+                <a:spcPts val="1000"/>
+              </a:spcAft>
+              <a:defRPr sz="1600">
+                <a:solidFill>
+                  <a:srgbClr val="64748B"/>
+                </a:solidFill>
+                <a:latin typeface="Calibri"/>
+              </a:defRPr>
+            </a:pPr>
+            <a:r>
+              <a:t>–  each one playable right in the results, so you can hear what "similar" sounds like</a:t>
+            </a:r>
+          </a:p>
+          <a:p>
+            <a:pPr>
+              <a:spcAft>
+                <a:spcPts val="1000"/>
+              </a:spcAft>
+              <a:defRPr sz="1900">
+                <a:solidFill>
+                  <a:srgbClr val="1A202C"/>
+                </a:solidFill>
+                <a:latin typeface="Calibri"/>
+              </a:defRPr>
+            </a:pPr>
+            <a:r>
+              <a:t>•  /dashboard — live Elasticsearch aggregations: model comparison, threshold trade-off,</a:t>
+            </a:r>
+          </a:p>
+          <a:p>
+            <a:pPr lvl="1">
+              <a:spcAft>
+                <a:spcPts val="1000"/>
+              </a:spcAft>
+              <a:defRPr sz="1600">
+                <a:solidFill>
+                  <a:srgbClr val="64748B"/>
+                </a:solidFill>
+                <a:latin typeface="Calibri"/>
+              </a:defRPr>
+            </a:pPr>
+            <a:r>
+              <a:t>–  ROC curve, confusion matrix, feature importance, confidence calibration</a:t>
+            </a:r>
+          </a:p>
+        </p:txBody>
+      </p:sp>
+    </p:spTree>
+  </p:cSld>
+  <p:clrMapOvr>
+    <a:masterClrMapping/>
+  </p:clrMapOvr>
+</p:sld>
+</file>
+
+<file path=ppt/slides/slide12.xml><?xml version="1.0" encoding="utf-8"?>
+<p:sld xmlns:a="http://schemas.openxmlformats.org/drawingml/2006/main" xmlns:p="http://schemas.openxmlformats.org/presentationml/2006/main" xmlns:r="http://schemas.openxmlformats.org/officeDocument/2006/relationships">
+  <p:cSld>
+    <p:bg>
+      <p:bgPr>
+        <a:solidFill>
+          <a:srgbClr val="F7F9FB"/>
+        </a:solidFill>
+        <a:effectLst/>
+      </p:bgPr>
+    </p:bg>
+    <p:spTree>
+      <p:nvGrpSpPr>
+        <p:cNvPr id="1" name=""/>
+        <p:cNvGrpSpPr/>
+        <p:nvPr/>
+      </p:nvGrpSpPr>
+      <p:grpSpPr/>
+      <p:sp>
+        <p:nvSpPr>
+          <p:cNvPr id="2" name="Rectangle 1"/>
+          <p:cNvSpPr/>
+          <p:nvPr/>
+        </p:nvSpPr>
+        <p:spPr>
+          <a:xfrm>
+            <a:off x="0" y="0"/>
+            <a:ext cx="12191695" cy="1051560"/>
+          </a:xfrm>
+          <a:prstGeom prst="rect">
+            <a:avLst/>
+          </a:prstGeom>
+          <a:solidFill>
+            <a:srgbClr val="0F2942"/>
+          </a:solidFill>
+          <a:ln>
+            <a:noFill/>
+          </a:ln>
+          <a:effectLst/>
+        </p:spPr>
+        <p:style>
+          <a:lnRef idx="1">
+            <a:schemeClr val="accent1"/>
+          </a:lnRef>
+          <a:fillRef idx="3">
+            <a:schemeClr val="accent1"/>
+          </a:fillRef>
+          <a:effectRef idx="2">
+            <a:schemeClr val="accent1"/>
+          </a:effectRef>
+          <a:fontRef idx="minor">
+            <a:schemeClr val="lt1"/>
+          </a:fontRef>
+        </p:style>
+        <p:txBody>
+          <a:bodyPr rtlCol="0" anchor="ctr"/>
+          <a:lstStyle/>
+          <a:p>
+            <a:pPr algn="ctr"/>
+          </a:p>
+        </p:txBody>
+      </p:sp>
+      <p:sp>
+        <p:nvSpPr>
+          <p:cNvPr id="3" name="Rectangle 2"/>
+          <p:cNvSpPr/>
+          <p:nvPr/>
+        </p:nvSpPr>
+        <p:spPr>
+          <a:xfrm>
+            <a:off x="0" y="1051560"/>
+            <a:ext cx="2103120" cy="63500"/>
+          </a:xfrm>
+          <a:prstGeom prst="rect">
+            <a:avLst/>
+          </a:prstGeom>
+          <a:solidFill>
+            <a:srgbClr val="0D9488"/>
+          </a:solidFill>
+          <a:ln>
+            <a:noFill/>
+          </a:ln>
+          <a:effectLst/>
+        </p:spPr>
+        <p:style>
+          <a:lnRef idx="1">
+            <a:schemeClr val="accent1"/>
+          </a:lnRef>
+          <a:fillRef idx="3">
+            <a:schemeClr val="accent1"/>
+          </a:fillRef>
+          <a:effectRef idx="2">
+            <a:schemeClr val="accent1"/>
+          </a:effectRef>
+          <a:fontRef idx="minor">
+            <a:schemeClr val="lt1"/>
+          </a:fontRef>
+        </p:style>
+        <p:txBody>
+          <a:bodyPr rtlCol="0" anchor="ctr"/>
+          <a:lstStyle/>
+          <a:p>
+            <a:pPr algn="ctr"/>
+          </a:p>
+        </p:txBody>
+      </p:sp>
+      <p:sp>
+        <p:nvSpPr>
+          <p:cNvPr id="4" name="TextBox 3"/>
+          <p:cNvSpPr txBox="1"/>
+          <p:nvPr/>
+        </p:nvSpPr>
+        <p:spPr>
+          <a:xfrm>
+            <a:off x="548640" y="146304"/>
+            <a:ext cx="11094415" cy="640080"/>
+          </a:xfrm>
+          <a:prstGeom prst="rect">
+            <a:avLst/>
+          </a:prstGeom>
+          <a:noFill/>
+        </p:spPr>
+        <p:txBody>
+          <a:bodyPr wrap="square">
+            <a:spAutoFit/>
+          </a:bodyPr>
+          <a:lstStyle/>
+          <a:p>
+            <a:pPr>
+              <a:defRPr sz="3000" b="1">
+                <a:solidFill>
+                  <a:srgbClr val="FFFFFF"/>
+                </a:solidFill>
+                <a:latin typeface="Calibri"/>
+              </a:defRPr>
+            </a:pPr>
+            <a:r>
+              <a:t>Challenges &amp; trade-offs</a:t>
+            </a:r>
+          </a:p>
+        </p:txBody>
+      </p:sp>
+      <p:sp>
+        <p:nvSpPr>
+          <p:cNvPr id="5" name="TextBox 4"/>
+          <p:cNvSpPr txBox="1"/>
+          <p:nvPr/>
+        </p:nvSpPr>
+        <p:spPr>
+          <a:xfrm>
+            <a:off x="11368735" y="6473952"/>
+            <a:ext cx="548640" cy="292608"/>
+          </a:xfrm>
+          <a:prstGeom prst="rect">
+            <a:avLst/>
+          </a:prstGeom>
+          <a:noFill/>
+        </p:spPr>
+        <p:txBody>
+          <a:bodyPr wrap="square">
+            <a:spAutoFit/>
+          </a:bodyPr>
+          <a:lstStyle/>
+          <a:p>
+            <a:pPr algn="r">
+              <a:defRPr sz="1100" b="0">
+                <a:solidFill>
+                  <a:srgbClr val="64748B"/>
+                </a:solidFill>
+                <a:latin typeface="Calibri"/>
+              </a:defRPr>
+            </a:pPr>
+            <a:r>
+              <a:t>11</a:t>
+            </a:r>
+          </a:p>
+        </p:txBody>
+      </p:sp>
+      <p:sp>
+        <p:nvSpPr>
+          <p:cNvPr id="6" name="TextBox 5"/>
+          <p:cNvSpPr txBox="1"/>
+          <p:nvPr/>
+        </p:nvSpPr>
+        <p:spPr>
+          <a:xfrm>
+            <a:off x="548640" y="1417320"/>
+            <a:ext cx="11094415" cy="4983480"/>
+          </a:xfrm>
+          <a:prstGeom prst="rect">
+            <a:avLst/>
+          </a:prstGeom>
+          <a:noFill/>
+        </p:spPr>
+        <p:txBody>
+          <a:bodyPr wrap="square">
+            <a:spAutoFit/>
+          </a:bodyPr>
+          <a:lstStyle/>
+          <a:p>
+            <a:pPr>
+              <a:spcAft>
+                <a:spcPts val="1000"/>
+              </a:spcAft>
+              <a:defRPr sz="1700">
+                <a:solidFill>
+                  <a:srgbClr val="1A202C"/>
+                </a:solidFill>
+                <a:latin typeface="Calibri"/>
+              </a:defRPr>
+            </a:pPr>
+            <a:r>
+              <a:t>•  Windows + Spark: worker Python resolution, path-with-spaces, and a Docker Desktop</a:t>
+            </a:r>
+          </a:p>
+          <a:p>
+            <a:pPr lvl="1">
+              <a:spcAft>
+                <a:spcPts val="1000"/>
+              </a:spcAft>
+              <a:defRPr sz="1400">
+                <a:solidFill>
+                  <a:srgbClr val="64748B"/>
+                </a:solidFill>
+                <a:latin typeface="Calibri"/>
+              </a:defRPr>
+            </a:pPr>
+            <a:r>
+              <a:t>–  networking quirk all broke Spark's driver↔executor RPC — diagnosed and fixed, not hidden</a:t>
+            </a:r>
+          </a:p>
+          <a:p>
+            <a:pPr>
+              <a:spcAft>
+                <a:spcPts val="1000"/>
+              </a:spcAft>
+              <a:defRPr sz="1700">
+                <a:solidFill>
+                  <a:srgbClr val="1A202C"/>
+                </a:solidFill>
+                <a:latin typeface="Calibri"/>
+              </a:defRPr>
+            </a:pPr>
+            <a:r>
+              <a:t>•  The EER threshold trades some spoof recall for bonafide recall — a deliberate choice,</a:t>
+            </a:r>
+          </a:p>
+          <a:p>
+            <a:pPr lvl="1">
+              <a:spcAft>
+                <a:spcPts val="1000"/>
+              </a:spcAft>
+              <a:defRPr sz="1400">
+                <a:solidFill>
+                  <a:srgbClr val="64748B"/>
+                </a:solidFill>
+                <a:latin typeface="Calibri"/>
+              </a:defRPr>
+            </a:pPr>
+            <a:r>
+              <a:t>–  not a free win: no single threshold maximizes both on an imbalanced dataset</a:t>
+            </a:r>
+          </a:p>
+          <a:p>
+            <a:pPr>
+              <a:spcAft>
+                <a:spcPts val="1000"/>
+              </a:spcAft>
+              <a:defRPr sz="1700">
+                <a:solidFill>
+                  <a:srgbClr val="1A202C"/>
+                </a:solidFill>
+                <a:latin typeface="Calibri"/>
+              </a:defRPr>
+            </a:pPr>
+            <a:r>
+              <a:t>•  Embedding is the classifier's own feature vector, not a separate pretrained audio</a:t>
+            </a:r>
+          </a:p>
+          <a:p>
+            <a:pPr lvl="1">
+              <a:spcAft>
+                <a:spcPts val="1000"/>
+              </a:spcAft>
+              <a:defRPr sz="1400">
+                <a:solidFill>
+                  <a:srgbClr val="64748B"/>
+                </a:solidFill>
+                <a:latin typeface="Calibri"/>
+              </a:defRPr>
+            </a:pPr>
+            <a:r>
+              <a:t>–  embedding model — keeps the semantic-search capability fully self-contained</a:t>
+            </a:r>
+          </a:p>
+          <a:p>
+            <a:pPr>
+              <a:spcAft>
+                <a:spcPts val="1000"/>
+              </a:spcAft>
+              <a:defRPr sz="1700">
+                <a:solidFill>
+                  <a:srgbClr val="1A202C"/>
+                </a:solidFill>
+                <a:latin typeface="Calibri"/>
+              </a:defRPr>
+            </a:pPr>
+            <a:r>
+              <a:t>•  Kept Python end-to-end (not Scala) since the feature-extraction library is Python-only</a:t>
+            </a:r>
+          </a:p>
+          <a:p>
+            <a:pPr>
+              <a:spcAft>
+                <a:spcPts val="1000"/>
+              </a:spcAft>
+              <a:defRPr sz="1700">
+                <a:solidFill>
+                  <a:srgbClr val="1A202C"/>
+                </a:solidFill>
+                <a:latin typeface="Calibri"/>
+              </a:defRPr>
+            </a:pPr>
+            <a:r>
+              <a:t>•  Speaker-disjoint train/dev split (not random) to avoid inflating accuracy via leakage</a:t>
+            </a:r>
+          </a:p>
+        </p:txBody>
+      </p:sp>
+    </p:spTree>
+  </p:cSld>
+  <p:clrMapOvr>
+    <a:masterClrMapping/>
+  </p:clrMapOvr>
+</p:sld>
+</file>
+
+<file path=ppt/slides/slide13.xml><?xml version="1.0" encoding="utf-8"?>
+<p:sld xmlns:a="http://schemas.openxmlformats.org/drawingml/2006/main" xmlns:p="http://schemas.openxmlformats.org/presentationml/2006/main" xmlns:r="http://schemas.openxmlformats.org/officeDocument/2006/relationships">
+  <p:cSld>
+    <p:bg>
+      <p:bgPr>
+        <a:solidFill>
+          <a:srgbClr val="F7F9FB"/>
+        </a:solidFill>
+        <a:effectLst/>
+      </p:bgPr>
+    </p:bg>
+    <p:spTree>
+      <p:nvGrpSpPr>
+        <p:cNvPr id="1" name=""/>
+        <p:cNvGrpSpPr/>
+        <p:nvPr/>
+      </p:nvGrpSpPr>
+      <p:grpSpPr/>
+      <p:sp>
+        <p:nvSpPr>
+          <p:cNvPr id="2" name="Rectangle 1"/>
+          <p:cNvSpPr/>
+          <p:nvPr/>
+        </p:nvSpPr>
+        <p:spPr>
+          <a:xfrm>
+            <a:off x="0" y="0"/>
+            <a:ext cx="12191695" cy="6858000"/>
+          </a:xfrm>
+          <a:prstGeom prst="rect">
+            <a:avLst/>
+          </a:prstGeom>
+          <a:solidFill>
+            <a:srgbClr val="0F2942"/>
+          </a:solidFill>
+          <a:ln>
+            <a:noFill/>
+          </a:ln>
+          <a:effectLst/>
+        </p:spPr>
+        <p:style>
+          <a:lnRef idx="1">
+            <a:schemeClr val="accent1"/>
+          </a:lnRef>
+          <a:fillRef idx="3">
+            <a:schemeClr val="accent1"/>
+          </a:fillRef>
+          <a:effectRef idx="2">
+            <a:schemeClr val="accent1"/>
+          </a:effectRef>
+          <a:fontRef idx="minor">
+            <a:schemeClr val="lt1"/>
+          </a:fontRef>
+        </p:style>
+        <p:txBody>
+          <a:bodyPr rtlCol="0" anchor="ctr"/>
+          <a:lstStyle/>
+          <a:p>
+            <a:pPr algn="ctr"/>
+          </a:p>
+        </p:txBody>
+      </p:sp>
+      <p:sp>
+        <p:nvSpPr>
+          <p:cNvPr id="3" name="Rectangle 2"/>
+          <p:cNvSpPr/>
+          <p:nvPr/>
+        </p:nvSpPr>
+        <p:spPr>
+          <a:xfrm>
+            <a:off x="0" y="3383280"/>
+            <a:ext cx="12191695" cy="63500"/>
+          </a:xfrm>
+          <a:prstGeom prst="rect">
+            <a:avLst/>
+          </a:prstGeom>
+          <a:solidFill>
+            <a:srgbClr val="0D9488"/>
+          </a:solidFill>
+          <a:ln>
+            <a:noFill/>
+          </a:ln>
+          <a:effectLst/>
+        </p:spPr>
+        <p:style>
+          <a:lnRef idx="1">
+            <a:schemeClr val="accent1"/>
+          </a:lnRef>
+          <a:fillRef idx="3">
+            <a:schemeClr val="accent1"/>
+          </a:fillRef>
+          <a:effectRef idx="2">
+            <a:schemeClr val="accent1"/>
+          </a:effectRef>
+          <a:fontRef idx="minor">
+            <a:schemeClr val="lt1"/>
+          </a:fontRef>
+        </p:style>
+        <p:txBody>
+          <a:bodyPr rtlCol="0" anchor="ctr"/>
+          <a:lstStyle/>
+          <a:p>
+            <a:pPr algn="ctr"/>
+          </a:p>
+        </p:txBody>
+      </p:sp>
+      <p:sp>
+        <p:nvSpPr>
+          <p:cNvPr id="4" name="TextBox 3"/>
+          <p:cNvSpPr txBox="1"/>
+          <p:nvPr/>
+        </p:nvSpPr>
+        <p:spPr>
+          <a:xfrm>
+            <a:off x="914400" y="2651760"/>
+            <a:ext cx="10332720" cy="914400"/>
+          </a:xfrm>
+          <a:prstGeom prst="rect">
+            <a:avLst/>
+          </a:prstGeom>
+          <a:noFill/>
+        </p:spPr>
+        <p:txBody>
+          <a:bodyPr wrap="square">
+            <a:spAutoFit/>
+          </a:bodyPr>
+          <a:lstStyle/>
+          <a:p>
+            <a:pPr algn="l">
+              <a:defRPr sz="4000" b="1">
+                <a:solidFill>
+                  <a:srgbClr val="FFFFFF"/>
+                </a:solidFill>
+                <a:latin typeface="Calibri"/>
+              </a:defRPr>
+            </a:pPr>
+            <a:r>
+              <a:t>Questions?</a:t>
+            </a:r>
+          </a:p>
+        </p:txBody>
+      </p:sp>
+      <p:sp>
+        <p:nvSpPr>
+          <p:cNvPr id="5" name="TextBox 4"/>
+          <p:cNvSpPr txBox="1"/>
+          <p:nvPr/>
+        </p:nvSpPr>
+        <p:spPr>
+          <a:xfrm>
+            <a:off x="914400" y="3566160"/>
+            <a:ext cx="10332720" cy="457200"/>
+          </a:xfrm>
+          <a:prstGeom prst="rect">
+            <a:avLst/>
+          </a:prstGeom>
+          <a:noFill/>
+        </p:spPr>
+        <p:txBody>
+          <a:bodyPr wrap="square">
+            <a:spAutoFit/>
+          </a:bodyPr>
+          <a:lstStyle/>
+          <a:p>
+            <a:pPr algn="l">
+              <a:defRPr sz="1600" b="0">
+                <a:solidFill>
+                  <a:srgbClr val="CBD5E1"/>
+                </a:solidFill>
+                <a:latin typeface="Calibri"/>
+              </a:defRPr>
+            </a:pPr>
+            <a:r>
+              <a:t>github.com/HadarBaum/asvspoof-voice-ai</a:t>
             </a:r>
           </a:p>
         </p:txBody>
@@ -3147,6 +4484,14 @@
 <file path=ppt/slides/slide2.xml><?xml version="1.0" encoding="utf-8"?>
 <p:sld xmlns:a="http://schemas.openxmlformats.org/drawingml/2006/main" xmlns:p="http://schemas.openxmlformats.org/presentationml/2006/main" xmlns:r="http://schemas.openxmlformats.org/officeDocument/2006/relationships">
   <p:cSld>
+    <p:bg>
+      <p:bgPr>
+        <a:solidFill>
+          <a:srgbClr val="F7F9FB"/>
+        </a:solidFill>
+        <a:effectLst/>
+      </p:bgPr>
+    </p:bg>
     <p:spTree>
       <p:nvGrpSpPr>
         <p:cNvPr id="1" name=""/>
@@ -3156,19 +4501,122 @@
       <p:grpSpPr/>
       <p:sp>
         <p:nvSpPr>
-          <p:cNvPr id="2" name="Title 1"/>
-          <p:cNvSpPr>
-            <a:spLocks noGrp="1"/>
-          </p:cNvSpPr>
-          <p:nvPr>
-            <p:ph type="title"/>
-          </p:nvPr>
-        </p:nvSpPr>
-        <p:spPr/>
-        <p:txBody>
-          <a:bodyPr/>
-          <a:lstStyle/>
-          <a:p>
+          <p:cNvPr id="2" name="Rectangle 1"/>
+          <p:cNvSpPr/>
+          <p:nvPr/>
+        </p:nvSpPr>
+        <p:spPr>
+          <a:xfrm>
+            <a:off x="0" y="0"/>
+            <a:ext cx="12191695" cy="1051560"/>
+          </a:xfrm>
+          <a:prstGeom prst="rect">
+            <a:avLst/>
+          </a:prstGeom>
+          <a:solidFill>
+            <a:srgbClr val="0F2942"/>
+          </a:solidFill>
+          <a:ln>
+            <a:noFill/>
+          </a:ln>
+          <a:effectLst/>
+        </p:spPr>
+        <p:style>
+          <a:lnRef idx="1">
+            <a:schemeClr val="accent1"/>
+          </a:lnRef>
+          <a:fillRef idx="3">
+            <a:schemeClr val="accent1"/>
+          </a:fillRef>
+          <a:effectRef idx="2">
+            <a:schemeClr val="accent1"/>
+          </a:effectRef>
+          <a:fontRef idx="minor">
+            <a:schemeClr val="lt1"/>
+          </a:fontRef>
+        </p:style>
+        <p:txBody>
+          <a:bodyPr rtlCol="0" anchor="ctr"/>
+          <a:lstStyle/>
+          <a:p>
+            <a:pPr algn="ctr"/>
+          </a:p>
+        </p:txBody>
+      </p:sp>
+      <p:sp>
+        <p:nvSpPr>
+          <p:cNvPr id="3" name="Rectangle 2"/>
+          <p:cNvSpPr/>
+          <p:nvPr/>
+        </p:nvSpPr>
+        <p:spPr>
+          <a:xfrm>
+            <a:off x="0" y="1051560"/>
+            <a:ext cx="2103120" cy="63500"/>
+          </a:xfrm>
+          <a:prstGeom prst="rect">
+            <a:avLst/>
+          </a:prstGeom>
+          <a:solidFill>
+            <a:srgbClr val="0D9488"/>
+          </a:solidFill>
+          <a:ln>
+            <a:noFill/>
+          </a:ln>
+          <a:effectLst/>
+        </p:spPr>
+        <p:style>
+          <a:lnRef idx="1">
+            <a:schemeClr val="accent1"/>
+          </a:lnRef>
+          <a:fillRef idx="3">
+            <a:schemeClr val="accent1"/>
+          </a:fillRef>
+          <a:effectRef idx="2">
+            <a:schemeClr val="accent1"/>
+          </a:effectRef>
+          <a:fontRef idx="minor">
+            <a:schemeClr val="lt1"/>
+          </a:fontRef>
+        </p:style>
+        <p:txBody>
+          <a:bodyPr rtlCol="0" anchor="ctr"/>
+          <a:lstStyle/>
+          <a:p>
+            <a:pPr algn="ctr"/>
+          </a:p>
+        </p:txBody>
+      </p:sp>
+      <p:sp>
+        <p:nvSpPr>
+          <p:cNvPr id="4" name="TextBox 3"/>
+          <p:cNvSpPr txBox="1"/>
+          <p:nvPr/>
+        </p:nvSpPr>
+        <p:spPr>
+          <a:xfrm>
+            <a:off x="548640" y="146304"/>
+            <a:ext cx="11094415" cy="640080"/>
+          </a:xfrm>
+          <a:prstGeom prst="rect">
+            <a:avLst/>
+          </a:prstGeom>
+          <a:noFill/>
+        </p:spPr>
+        <p:txBody>
+          <a:bodyPr wrap="square">
+            <a:spAutoFit/>
+          </a:bodyPr>
+          <a:lstStyle/>
+          <a:p>
+            <a:pPr>
+              <a:defRPr sz="3000" b="1">
+                <a:solidFill>
+                  <a:srgbClr val="FFFFFF"/>
+                </a:solidFill>
+                <a:latin typeface="Calibri"/>
+              </a:defRPr>
+            </a:pPr>
             <a:r>
               <a:t>Problem &amp; dataset</a:t>
             </a:r>
@@ -3177,48 +4625,123 @@
       </p:sp>
       <p:sp>
         <p:nvSpPr>
-          <p:cNvPr id="3" name="Content Placeholder 2"/>
-          <p:cNvSpPr>
-            <a:spLocks noGrp="1"/>
-          </p:cNvSpPr>
-          <p:nvPr>
-            <p:ph idx="1"/>
-          </p:nvPr>
-        </p:nvSpPr>
-        <p:spPr/>
-        <p:txBody>
-          <a:bodyPr/>
+          <p:cNvPr id="5" name="TextBox 4"/>
+          <p:cNvSpPr txBox="1"/>
+          <p:nvPr/>
+        </p:nvSpPr>
+        <p:spPr>
+          <a:xfrm>
+            <a:off x="11368735" y="6473952"/>
+            <a:ext cx="548640" cy="292608"/>
+          </a:xfrm>
+          <a:prstGeom prst="rect">
+            <a:avLst/>
+          </a:prstGeom>
+          <a:noFill/>
+        </p:spPr>
+        <p:txBody>
+          <a:bodyPr wrap="square">
+            <a:spAutoFit/>
+          </a:bodyPr>
+          <a:lstStyle/>
+          <a:p>
+            <a:pPr algn="r">
+              <a:defRPr sz="1100" b="0">
+                <a:solidFill>
+                  <a:srgbClr val="64748B"/>
+                </a:solidFill>
+                <a:latin typeface="Calibri"/>
+              </a:defRPr>
+            </a:pPr>
+            <a:r>
+              <a:t>1</a:t>
+            </a:r>
+          </a:p>
+        </p:txBody>
+      </p:sp>
+      <p:sp>
+        <p:nvSpPr>
+          <p:cNvPr id="6" name="TextBox 5"/>
+          <p:cNvSpPr txBox="1"/>
+          <p:nvPr/>
+        </p:nvSpPr>
+        <p:spPr>
+          <a:xfrm>
+            <a:off x="548640" y="1417320"/>
+            <a:ext cx="11094415" cy="4983480"/>
+          </a:xfrm>
+          <a:prstGeom prst="rect">
+            <a:avLst/>
+          </a:prstGeom>
+          <a:noFill/>
+        </p:spPr>
+        <p:txBody>
+          <a:bodyPr wrap="square">
+            <a:spAutoFit/>
+          </a:bodyPr>
           <a:lstStyle/>
           <a:p>
             <a:pPr>
-              <a:defRPr sz="2000"/>
-            </a:pPr>
-            <a:r>
-              <a:t>Can we tell real human speech apart from AI-generated (TTS / voice-conversion) speech?</a:t>
+              <a:spcAft>
+                <a:spcPts val="1000"/>
+              </a:spcAft>
+              <a:defRPr sz="1900">
+                <a:solidFill>
+                  <a:srgbClr val="1A202C"/>
+                </a:solidFill>
+                <a:latin typeface="Calibri"/>
+              </a:defRPr>
+            </a:pPr>
+            <a:r>
+              <a:t>•  Can we tell real human speech apart from AI-generated (TTS / voice-conversion) speech?</a:t>
             </a:r>
           </a:p>
           <a:p>
             <a:pPr>
-              <a:defRPr sz="2000"/>
-            </a:pPr>
-            <a:r>
-              <a:t>ASVspoof2019 Logical Access partition: bonafide vs. spoofed utterances,</a:t>
+              <a:spcAft>
+                <a:spcPts val="1000"/>
+              </a:spcAft>
+              <a:defRPr sz="1900">
+                <a:solidFill>
+                  <a:srgbClr val="1A202C"/>
+                </a:solidFill>
+                <a:latin typeface="Calibri"/>
+              </a:defRPr>
+            </a:pPr>
+            <a:r>
+              <a:t>•  ASVspoof2019 Logical Access partition: bonafide vs. spoofed utterances</a:t>
             </a:r>
           </a:p>
           <a:p>
             <a:pPr>
-              <a:defRPr sz="2000"/>
-            </a:pPr>
-            <a:r>
-              <a:t>~121k labeled flac clips across train / dev / eval, speaker-disjoint splits.</a:t>
+              <a:spcAft>
+                <a:spcPts val="1000"/>
+              </a:spcAft>
+              <a:defRPr sz="1900">
+                <a:solidFill>
+                  <a:srgbClr val="1A202C"/>
+                </a:solidFill>
+                <a:latin typeface="Calibri"/>
+              </a:defRPr>
+            </a:pPr>
+            <a:r>
+              <a:t>•  ~121k labeled flac clips across train / dev / eval, speaker-disjoint splits</a:t>
             </a:r>
           </a:p>
           <a:p>
             <a:pPr>
-              <a:defRPr sz="2000"/>
-            </a:pPr>
-            <a:r>
-              <a:t>PA (replay-attack) partition intentionally excluded — not AI-generated speech.</a:t>
+              <a:spcAft>
+                <a:spcPts val="1000"/>
+              </a:spcAft>
+              <a:defRPr sz="1900">
+                <a:solidFill>
+                  <a:srgbClr val="1A202C"/>
+                </a:solidFill>
+                <a:latin typeface="Calibri"/>
+              </a:defRPr>
+            </a:pPr>
+            <a:r>
+              <a:t>•  PA (replay-attack) partition intentionally excluded — not AI-generated speech</a:t>
             </a:r>
           </a:p>
         </p:txBody>
@@ -3234,6 +4757,14 @@
 <file path=ppt/slides/slide3.xml><?xml version="1.0" encoding="utf-8"?>
 <p:sld xmlns:a="http://schemas.openxmlformats.org/drawingml/2006/main" xmlns:p="http://schemas.openxmlformats.org/presentationml/2006/main" xmlns:r="http://schemas.openxmlformats.org/officeDocument/2006/relationships">
   <p:cSld>
+    <p:bg>
+      <p:bgPr>
+        <a:solidFill>
+          <a:srgbClr val="F7F9FB"/>
+        </a:solidFill>
+        <a:effectLst/>
+      </p:bgPr>
+    </p:bg>
     <p:spTree>
       <p:nvGrpSpPr>
         <p:cNvPr id="1" name=""/>
@@ -3243,19 +4774,122 @@
       <p:grpSpPr/>
       <p:sp>
         <p:nvSpPr>
-          <p:cNvPr id="2" name="Title 1"/>
-          <p:cNvSpPr>
-            <a:spLocks noGrp="1"/>
-          </p:cNvSpPr>
-          <p:nvPr>
-            <p:ph type="title"/>
-          </p:nvPr>
-        </p:nvSpPr>
-        <p:spPr/>
-        <p:txBody>
-          <a:bodyPr/>
-          <a:lstStyle/>
-          <a:p>
+          <p:cNvPr id="2" name="Rectangle 1"/>
+          <p:cNvSpPr/>
+          <p:nvPr/>
+        </p:nvSpPr>
+        <p:spPr>
+          <a:xfrm>
+            <a:off x="0" y="0"/>
+            <a:ext cx="12191695" cy="1051560"/>
+          </a:xfrm>
+          <a:prstGeom prst="rect">
+            <a:avLst/>
+          </a:prstGeom>
+          <a:solidFill>
+            <a:srgbClr val="0F2942"/>
+          </a:solidFill>
+          <a:ln>
+            <a:noFill/>
+          </a:ln>
+          <a:effectLst/>
+        </p:spPr>
+        <p:style>
+          <a:lnRef idx="1">
+            <a:schemeClr val="accent1"/>
+          </a:lnRef>
+          <a:fillRef idx="3">
+            <a:schemeClr val="accent1"/>
+          </a:fillRef>
+          <a:effectRef idx="2">
+            <a:schemeClr val="accent1"/>
+          </a:effectRef>
+          <a:fontRef idx="minor">
+            <a:schemeClr val="lt1"/>
+          </a:fontRef>
+        </p:style>
+        <p:txBody>
+          <a:bodyPr rtlCol="0" anchor="ctr"/>
+          <a:lstStyle/>
+          <a:p>
+            <a:pPr algn="ctr"/>
+          </a:p>
+        </p:txBody>
+      </p:sp>
+      <p:sp>
+        <p:nvSpPr>
+          <p:cNvPr id="3" name="Rectangle 2"/>
+          <p:cNvSpPr/>
+          <p:nvPr/>
+        </p:nvSpPr>
+        <p:spPr>
+          <a:xfrm>
+            <a:off x="0" y="1051560"/>
+            <a:ext cx="2103120" cy="63500"/>
+          </a:xfrm>
+          <a:prstGeom prst="rect">
+            <a:avLst/>
+          </a:prstGeom>
+          <a:solidFill>
+            <a:srgbClr val="0D9488"/>
+          </a:solidFill>
+          <a:ln>
+            <a:noFill/>
+          </a:ln>
+          <a:effectLst/>
+        </p:spPr>
+        <p:style>
+          <a:lnRef idx="1">
+            <a:schemeClr val="accent1"/>
+          </a:lnRef>
+          <a:fillRef idx="3">
+            <a:schemeClr val="accent1"/>
+          </a:fillRef>
+          <a:effectRef idx="2">
+            <a:schemeClr val="accent1"/>
+          </a:effectRef>
+          <a:fontRef idx="minor">
+            <a:schemeClr val="lt1"/>
+          </a:fontRef>
+        </p:style>
+        <p:txBody>
+          <a:bodyPr rtlCol="0" anchor="ctr"/>
+          <a:lstStyle/>
+          <a:p>
+            <a:pPr algn="ctr"/>
+          </a:p>
+        </p:txBody>
+      </p:sp>
+      <p:sp>
+        <p:nvSpPr>
+          <p:cNvPr id="4" name="TextBox 3"/>
+          <p:cNvSpPr txBox="1"/>
+          <p:nvPr/>
+        </p:nvSpPr>
+        <p:spPr>
+          <a:xfrm>
+            <a:off x="548640" y="146304"/>
+            <a:ext cx="11094415" cy="640080"/>
+          </a:xfrm>
+          <a:prstGeom prst="rect">
+            <a:avLst/>
+          </a:prstGeom>
+          <a:noFill/>
+        </p:spPr>
+        <p:txBody>
+          <a:bodyPr wrap="square">
+            <a:spAutoFit/>
+          </a:bodyPr>
+          <a:lstStyle/>
+          <a:p>
+            <a:pPr>
+              <a:defRPr sz="3000" b="1">
+                <a:solidFill>
+                  <a:srgbClr val="FFFFFF"/>
+                </a:solidFill>
+                <a:latin typeface="Calibri"/>
+              </a:defRPr>
+            </a:pPr>
             <a:r>
               <a:t>Architecture</a:t>
             </a:r>
@@ -3264,64 +4898,191 @@
       </p:sp>
       <p:sp>
         <p:nvSpPr>
-          <p:cNvPr id="3" name="Content Placeholder 2"/>
-          <p:cNvSpPr>
-            <a:spLocks noGrp="1"/>
-          </p:cNvSpPr>
-          <p:nvPr>
-            <p:ph idx="1"/>
-          </p:nvPr>
-        </p:nvSpPr>
-        <p:spPr/>
-        <p:txBody>
-          <a:bodyPr/>
+          <p:cNvPr id="5" name="TextBox 4"/>
+          <p:cNvSpPr txBox="1"/>
+          <p:nvPr/>
+        </p:nvSpPr>
+        <p:spPr>
+          <a:xfrm>
+            <a:off x="548640" y="658368"/>
+            <a:ext cx="11094415" cy="365760"/>
+          </a:xfrm>
+          <a:prstGeom prst="rect">
+            <a:avLst/>
+          </a:prstGeom>
+          <a:noFill/>
+        </p:spPr>
+        <p:txBody>
+          <a:bodyPr wrap="none">
+            <a:spAutoFit/>
+          </a:bodyPr>
           <a:lstStyle/>
           <a:p>
             <a:pPr>
-              <a:defRPr sz="2000"/>
-            </a:pPr>
-            <a:r>
-              <a:t>MinIO (object store) holds the raw audio corpus</a:t>
-            </a:r>
-          </a:p>
+              <a:defRPr sz="1300">
+                <a:solidFill>
+                  <a:srgbClr val="CBD5E1"/>
+                </a:solidFill>
+                <a:latin typeface="Calibri"/>
+              </a:defRPr>
+            </a:pPr>
+            <a:r>
+              <a:t>Object store → Spark → model → streaming → Elasticsearch → Flask</a:t>
+            </a:r>
+          </a:p>
+        </p:txBody>
+      </p:sp>
+      <p:sp>
+        <p:nvSpPr>
+          <p:cNvPr id="6" name="TextBox 5"/>
+          <p:cNvSpPr txBox="1"/>
+          <p:nvPr/>
+        </p:nvSpPr>
+        <p:spPr>
+          <a:xfrm>
+            <a:off x="11368735" y="6473952"/>
+            <a:ext cx="548640" cy="292608"/>
+          </a:xfrm>
+          <a:prstGeom prst="rect">
+            <a:avLst/>
+          </a:prstGeom>
+          <a:noFill/>
+        </p:spPr>
+        <p:txBody>
+          <a:bodyPr wrap="square">
+            <a:spAutoFit/>
+          </a:bodyPr>
+          <a:lstStyle/>
+          <a:p>
+            <a:pPr algn="r">
+              <a:defRPr sz="1100" b="0">
+                <a:solidFill>
+                  <a:srgbClr val="64748B"/>
+                </a:solidFill>
+                <a:latin typeface="Calibri"/>
+              </a:defRPr>
+            </a:pPr>
+            <a:r>
+              <a:t>2</a:t>
+            </a:r>
+          </a:p>
+        </p:txBody>
+      </p:sp>
+      <p:sp>
+        <p:nvSpPr>
+          <p:cNvPr id="7" name="TextBox 6"/>
+          <p:cNvSpPr txBox="1"/>
+          <p:nvPr/>
+        </p:nvSpPr>
+        <p:spPr>
+          <a:xfrm>
+            <a:off x="548640" y="1417320"/>
+            <a:ext cx="11094415" cy="4983480"/>
+          </a:xfrm>
+          <a:prstGeom prst="rect">
+            <a:avLst/>
+          </a:prstGeom>
+          <a:noFill/>
+        </p:spPr>
+        <p:txBody>
+          <a:bodyPr wrap="square">
+            <a:spAutoFit/>
+          </a:bodyPr>
+          <a:lstStyle/>
           <a:p>
             <a:pPr>
-              <a:defRPr sz="2000"/>
-            </a:pPr>
-            <a:r>
-              <a:t>Spark (batch, parallel) extracts acoustic features from every clip</a:t>
+              <a:spcAft>
+                <a:spcPts val="1000"/>
+              </a:spcAft>
+              <a:defRPr sz="1900">
+                <a:solidFill>
+                  <a:srgbClr val="1A202C"/>
+                </a:solidFill>
+                <a:latin typeface="Calibri"/>
+              </a:defRPr>
+            </a:pPr>
+            <a:r>
+              <a:t>•  MinIO (object store) holds the raw audio corpus</a:t>
             </a:r>
           </a:p>
           <a:p>
             <a:pPr>
-              <a:defRPr sz="2000"/>
-            </a:pPr>
-            <a:r>
-              <a:t>Elasticsearch (NoSQL) stores features, training results, and live predictions</a:t>
+              <a:spcAft>
+                <a:spcPts val="1000"/>
+              </a:spcAft>
+              <a:defRPr sz="1900">
+                <a:solidFill>
+                  <a:srgbClr val="1A202C"/>
+                </a:solidFill>
+                <a:latin typeface="Calibri"/>
+              </a:defRPr>
+            </a:pPr>
+            <a:r>
+              <a:t>•  Spark (batch, parallel across cores) extracts acoustic features from every clip</a:t>
             </a:r>
           </a:p>
           <a:p>
             <a:pPr>
-              <a:defRPr sz="2000"/>
-            </a:pPr>
-            <a:r>
-              <a:t>Kafka streams simulated incoming audio events</a:t>
+              <a:spcAft>
+                <a:spcPts val="1000"/>
+              </a:spcAft>
+              <a:defRPr sz="1900">
+                <a:solidFill>
+                  <a:srgbClr val="1A202C"/>
+                </a:solidFill>
+                <a:latin typeface="Calibri"/>
+              </a:defRPr>
+            </a:pPr>
+            <a:r>
+              <a:t>•  Two models trained and compared — the better one (by EER) is deployed</a:t>
             </a:r>
           </a:p>
           <a:p>
             <a:pPr>
-              <a:defRPr sz="2000"/>
-            </a:pPr>
-            <a:r>
-              <a:t>A Kafka consumer scores each event in near-real-time with the trained model</a:t>
+              <a:spcAft>
+                <a:spcPts val="1000"/>
+              </a:spcAft>
+              <a:defRPr sz="1900">
+                <a:solidFill>
+                  <a:srgbClr val="1A202C"/>
+                </a:solidFill>
+                <a:latin typeface="Calibri"/>
+              </a:defRPr>
+            </a:pPr>
+            <a:r>
+              <a:t>•  Elasticsearch (NoSQL): features + embeddings, training results, live predictions</a:t>
             </a:r>
           </a:p>
           <a:p>
             <a:pPr>
-              <a:defRPr sz="2000"/>
-            </a:pPr>
-            <a:r>
-              <a:t>Flask app: /classify (live demo) and /dashboard (insights)</a:t>
+              <a:spcAft>
+                <a:spcPts val="1000"/>
+              </a:spcAft>
+              <a:defRPr sz="1900">
+                <a:solidFill>
+                  <a:srgbClr val="1A202C"/>
+                </a:solidFill>
+                <a:latin typeface="Calibri"/>
+              </a:defRPr>
+            </a:pPr>
+            <a:r>
+              <a:t>•  Kafka streams simulated incoming audio; a consumer scores each event in near-real-time</a:t>
+            </a:r>
+          </a:p>
+          <a:p>
+            <a:pPr>
+              <a:spcAft>
+                <a:spcPts val="1000"/>
+              </a:spcAft>
+              <a:defRPr sz="1900">
+                <a:solidFill>
+                  <a:srgbClr val="1A202C"/>
+                </a:solidFill>
+                <a:latin typeface="Calibri"/>
+              </a:defRPr>
+            </a:pPr>
+            <a:r>
+              <a:t>•  Flask app: /classify (upload or record live, + similar-clip search) and /dashboard (insights)</a:t>
             </a:r>
           </a:p>
         </p:txBody>
@@ -3337,6 +5098,14 @@
 <file path=ppt/slides/slide4.xml><?xml version="1.0" encoding="utf-8"?>
 <p:sld xmlns:a="http://schemas.openxmlformats.org/drawingml/2006/main" xmlns:p="http://schemas.openxmlformats.org/presentationml/2006/main" xmlns:r="http://schemas.openxmlformats.org/officeDocument/2006/relationships">
   <p:cSld>
+    <p:bg>
+      <p:bgPr>
+        <a:solidFill>
+          <a:srgbClr val="F7F9FB"/>
+        </a:solidFill>
+        <a:effectLst/>
+      </p:bgPr>
+    </p:bg>
     <p:spTree>
       <p:nvGrpSpPr>
         <p:cNvPr id="1" name=""/>
@@ -3346,69 +5115,609 @@
       <p:grpSpPr/>
       <p:sp>
         <p:nvSpPr>
-          <p:cNvPr id="2" name="Title 1"/>
-          <p:cNvSpPr>
-            <a:spLocks noGrp="1"/>
-          </p:cNvSpPr>
-          <p:nvPr>
-            <p:ph type="title"/>
-          </p:nvPr>
-        </p:nvSpPr>
-        <p:spPr/>
-        <p:txBody>
-          <a:bodyPr/>
-          <a:lstStyle/>
-          <a:p>
-            <a:r>
-              <a:t>AI capability</a:t>
-            </a:r>
-          </a:p>
-        </p:txBody>
-      </p:sp>
-      <p:sp>
-        <p:nvSpPr>
-          <p:cNvPr id="3" name="Content Placeholder 2"/>
-          <p:cNvSpPr>
-            <a:spLocks noGrp="1"/>
-          </p:cNvSpPr>
-          <p:nvPr>
-            <p:ph idx="1"/>
-          </p:nvPr>
-        </p:nvSpPr>
-        <p:spPr/>
-        <p:txBody>
-          <a:bodyPr/>
+          <p:cNvPr id="2" name="Rectangle 1"/>
+          <p:cNvSpPr/>
+          <p:nvPr/>
+        </p:nvSpPr>
+        <p:spPr>
+          <a:xfrm>
+            <a:off x="0" y="0"/>
+            <a:ext cx="12191695" cy="1051560"/>
+          </a:xfrm>
+          <a:prstGeom prst="rect">
+            <a:avLst/>
+          </a:prstGeom>
+          <a:solidFill>
+            <a:srgbClr val="0F2942"/>
+          </a:solidFill>
+          <a:ln>
+            <a:noFill/>
+          </a:ln>
+          <a:effectLst/>
+        </p:spPr>
+        <p:style>
+          <a:lnRef idx="1">
+            <a:schemeClr val="accent1"/>
+          </a:lnRef>
+          <a:fillRef idx="3">
+            <a:schemeClr val="accent1"/>
+          </a:fillRef>
+          <a:effectRef idx="2">
+            <a:schemeClr val="accent1"/>
+          </a:effectRef>
+          <a:fontRef idx="minor">
+            <a:schemeClr val="lt1"/>
+          </a:fontRef>
+        </p:style>
+        <p:txBody>
+          <a:bodyPr rtlCol="0" anchor="ctr"/>
+          <a:lstStyle/>
+          <a:p>
+            <a:pPr algn="ctr"/>
+          </a:p>
+        </p:txBody>
+      </p:sp>
+      <p:sp>
+        <p:nvSpPr>
+          <p:cNvPr id="3" name="Rectangle 2"/>
+          <p:cNvSpPr/>
+          <p:nvPr/>
+        </p:nvSpPr>
+        <p:spPr>
+          <a:xfrm>
+            <a:off x="0" y="1051560"/>
+            <a:ext cx="2103120" cy="63500"/>
+          </a:xfrm>
+          <a:prstGeom prst="rect">
+            <a:avLst/>
+          </a:prstGeom>
+          <a:solidFill>
+            <a:srgbClr val="0D9488"/>
+          </a:solidFill>
+          <a:ln>
+            <a:noFill/>
+          </a:ln>
+          <a:effectLst/>
+        </p:spPr>
+        <p:style>
+          <a:lnRef idx="1">
+            <a:schemeClr val="accent1"/>
+          </a:lnRef>
+          <a:fillRef idx="3">
+            <a:schemeClr val="accent1"/>
+          </a:fillRef>
+          <a:effectRef idx="2">
+            <a:schemeClr val="accent1"/>
+          </a:effectRef>
+          <a:fontRef idx="minor">
+            <a:schemeClr val="lt1"/>
+          </a:fontRef>
+        </p:style>
+        <p:txBody>
+          <a:bodyPr rtlCol="0" anchor="ctr"/>
+          <a:lstStyle/>
+          <a:p>
+            <a:pPr algn="ctr"/>
+          </a:p>
+        </p:txBody>
+      </p:sp>
+      <p:sp>
+        <p:nvSpPr>
+          <p:cNvPr id="4" name="TextBox 3"/>
+          <p:cNvSpPr txBox="1"/>
+          <p:nvPr/>
+        </p:nvSpPr>
+        <p:spPr>
+          <a:xfrm>
+            <a:off x="548640" y="146304"/>
+            <a:ext cx="11094415" cy="640080"/>
+          </a:xfrm>
+          <a:prstGeom prst="rect">
+            <a:avLst/>
+          </a:prstGeom>
+          <a:noFill/>
+        </p:spPr>
+        <p:txBody>
+          <a:bodyPr wrap="square">
+            <a:spAutoFit/>
+          </a:bodyPr>
           <a:lstStyle/>
           <a:p>
             <a:pPr>
-              <a:defRPr sz="2000"/>
-            </a:pPr>
-            <a:r>
-              <a:t>Random Forest classifier on acoustic summary features (MFCC, spectral, pitch, energy)</a:t>
-            </a:r>
-          </a:p>
+              <a:defRPr sz="3000" b="1">
+                <a:solidFill>
+                  <a:srgbClr val="FFFFFF"/>
+                </a:solidFill>
+                <a:latin typeface="Calibri"/>
+              </a:defRPr>
+            </a:pPr>
+            <a:r>
+              <a:t>AI capability 1 — classification</a:t>
+            </a:r>
+          </a:p>
+        </p:txBody>
+      </p:sp>
+      <p:sp>
+        <p:nvSpPr>
+          <p:cNvPr id="5" name="TextBox 4"/>
+          <p:cNvSpPr txBox="1"/>
+          <p:nvPr/>
+        </p:nvSpPr>
+        <p:spPr>
+          <a:xfrm>
+            <a:off x="548640" y="658368"/>
+            <a:ext cx="11094415" cy="365760"/>
+          </a:xfrm>
+          <a:prstGeom prst="rect">
+            <a:avLst/>
+          </a:prstGeom>
+          <a:noFill/>
+        </p:spPr>
+        <p:txBody>
+          <a:bodyPr wrap="none">
+            <a:spAutoFit/>
+          </a:bodyPr>
+          <a:lstStyle/>
           <a:p>
             <a:pPr>
-              <a:defRPr sz="2000"/>
-            </a:pPr>
-            <a:r>
-              <a:t>Trained on the dataset's own speaker-disjoint train/dev split</a:t>
-            </a:r>
-          </a:p>
+              <a:defRPr sz="1300">
+                <a:solidFill>
+                  <a:srgbClr val="CBD5E1"/>
+                </a:solidFill>
+                <a:latin typeface="Calibri"/>
+              </a:defRPr>
+            </a:pPr>
+            <a:r>
+              <a:t>Random Forest vs. Gradient Boosting, picked by EER</a:t>
+            </a:r>
+          </a:p>
+        </p:txBody>
+      </p:sp>
+      <p:sp>
+        <p:nvSpPr>
+          <p:cNvPr id="6" name="TextBox 5"/>
+          <p:cNvSpPr txBox="1"/>
+          <p:nvPr/>
+        </p:nvSpPr>
+        <p:spPr>
+          <a:xfrm>
+            <a:off x="11368735" y="6473952"/>
+            <a:ext cx="548640" cy="292608"/>
+          </a:xfrm>
+          <a:prstGeom prst="rect">
+            <a:avLst/>
+          </a:prstGeom>
+          <a:noFill/>
+        </p:spPr>
+        <p:txBody>
+          <a:bodyPr wrap="square">
+            <a:spAutoFit/>
+          </a:bodyPr>
+          <a:lstStyle/>
+          <a:p>
+            <a:pPr algn="r">
+              <a:defRPr sz="1100" b="0">
+                <a:solidFill>
+                  <a:srgbClr val="64748B"/>
+                </a:solidFill>
+                <a:latin typeface="Calibri"/>
+              </a:defRPr>
+            </a:pPr>
+            <a:r>
+              <a:t>3</a:t>
+            </a:r>
+          </a:p>
+        </p:txBody>
+      </p:sp>
+      <p:sp>
+        <p:nvSpPr>
+          <p:cNvPr id="7" name="TextBox 6"/>
+          <p:cNvSpPr txBox="1"/>
+          <p:nvPr/>
+        </p:nvSpPr>
+        <p:spPr>
+          <a:xfrm>
+            <a:off x="548640" y="1371600"/>
+            <a:ext cx="11094415" cy="5029200"/>
+          </a:xfrm>
+          <a:prstGeom prst="rect">
+            <a:avLst/>
+          </a:prstGeom>
+          <a:noFill/>
+        </p:spPr>
+        <p:txBody>
+          <a:bodyPr wrap="square">
+            <a:spAutoFit/>
+          </a:bodyPr>
+          <a:lstStyle/>
           <a:p>
             <a:pPr>
-              <a:defRPr sz="2000"/>
-            </a:pPr>
-            <a:r>
-              <a:t>Applied both offline (batch validation) and online (streaming enrichment)</a:t>
-            </a:r>
-          </a:p>
+              <a:spcAft>
+                <a:spcPts val="1000"/>
+              </a:spcAft>
+              <a:defRPr sz="1600">
+                <a:solidFill>
+                  <a:srgbClr val="1A202C"/>
+                </a:solidFill>
+                <a:latin typeface="Calibri"/>
+              </a:defRPr>
+            </a:pPr>
+            <a:r>
+              <a:t>•  Both models reweighted for the ~9:1 spoof/bonafide imbalance in training data, then compared on dev:</a:t>
+            </a:r>
+          </a:p>
+        </p:txBody>
+      </p:sp>
+      <p:graphicFrame>
+        <p:nvGraphicFramePr>
+          <p:cNvPr id="8" name="Table 7"/>
+          <p:cNvGraphicFramePr>
+            <a:graphicFrameLocks noGrp="1"/>
+          </p:cNvGraphicFramePr>
+          <p:nvPr/>
+        </p:nvGraphicFramePr>
+        <p:xfrm>
+          <a:off x="548640" y="1965960"/>
+          <a:ext cx="11094414" cy="1508760"/>
+        </p:xfrm>
+        <a:graphic>
+          <a:graphicData uri="http://schemas.openxmlformats.org/drawingml/2006/table">
+            <a:tbl>
+              <a:tblPr firstRow="1" bandRow="1">
+                <a:tableStyleId>{5C22544A-7EE6-4342-B048-85BDC9FD1C3A}</a:tableStyleId>
+              </a:tblPr>
+              <a:tblGrid>
+                <a:gridCol w="3962291"/>
+                <a:gridCol w="2641527"/>
+                <a:gridCol w="2641527"/>
+                <a:gridCol w="1849069"/>
+              </a:tblGrid>
+              <a:tr h="502920">
+                <a:tc>
+                  <a:txBody>
+                    <a:bodyPr/>
+                    <a:lstStyle/>
+                    <a:p>
+                      <a:pPr>
+                        <a:defRPr sz="1400" b="1">
+                          <a:solidFill>
+                            <a:srgbClr val="FFFFFF"/>
+                          </a:solidFill>
+                          <a:latin typeface="Calibri"/>
+                        </a:defRPr>
+                      </a:pPr>
+                      <a:r>
+                        <a:t>Model</a:t>
+                      </a:r>
+                    </a:p>
+                  </a:txBody>
+                  <a:tcPr anchor="ctr" marL="109728" marR="109728">
+                    <a:solidFill>
+                      <a:srgbClr val="0F2942"/>
+                    </a:solidFill>
+                  </a:tcPr>
+                </a:tc>
+                <a:tc>
+                  <a:txBody>
+                    <a:bodyPr/>
+                    <a:lstStyle/>
+                    <a:p>
+                      <a:pPr>
+                        <a:defRPr sz="1400" b="1">
+                          <a:solidFill>
+                            <a:srgbClr val="FFFFFF"/>
+                          </a:solidFill>
+                          <a:latin typeface="Calibri"/>
+                        </a:defRPr>
+                      </a:pPr>
+                      <a:r>
+                        <a:t>EER (lower is better)</a:t>
+                      </a:r>
+                    </a:p>
+                  </a:txBody>
+                  <a:tcPr anchor="ctr" marL="109728" marR="109728">
+                    <a:solidFill>
+                      <a:srgbClr val="0F2942"/>
+                    </a:solidFill>
+                  </a:tcPr>
+                </a:tc>
+                <a:tc>
+                  <a:txBody>
+                    <a:bodyPr/>
+                    <a:lstStyle/>
+                    <a:p>
+                      <a:pPr>
+                        <a:defRPr sz="1400" b="1">
+                          <a:solidFill>
+                            <a:srgbClr val="FFFFFF"/>
+                          </a:solidFill>
+                          <a:latin typeface="Calibri"/>
+                        </a:defRPr>
+                      </a:pPr>
+                      <a:r>
+                        <a:t>ROC-AUC</a:t>
+                      </a:r>
+                    </a:p>
+                  </a:txBody>
+                  <a:tcPr anchor="ctr" marL="109728" marR="109728">
+                    <a:solidFill>
+                      <a:srgbClr val="0F2942"/>
+                    </a:solidFill>
+                  </a:tcPr>
+                </a:tc>
+                <a:tc>
+                  <a:txBody>
+                    <a:bodyPr/>
+                    <a:lstStyle/>
+                    <a:p>
+                      <a:pPr>
+                        <a:defRPr sz="1400" b="1">
+                          <a:solidFill>
+                            <a:srgbClr val="FFFFFF"/>
+                          </a:solidFill>
+                          <a:latin typeface="Calibri"/>
+                        </a:defRPr>
+                      </a:pPr>
+                      <a:r>
+                        <a:t>Deployed</a:t>
+                      </a:r>
+                    </a:p>
+                  </a:txBody>
+                  <a:tcPr anchor="ctr" marL="109728" marR="109728">
+                    <a:solidFill>
+                      <a:srgbClr val="0F2942"/>
+                    </a:solidFill>
+                  </a:tcPr>
+                </a:tc>
+              </a:tr>
+              <a:tr h="502920">
+                <a:tc>
+                  <a:txBody>
+                    <a:bodyPr/>
+                    <a:lstStyle/>
+                    <a:p>
+                      <a:pPr>
+                        <a:defRPr sz="1500" b="0">
+                          <a:solidFill>
+                            <a:srgbClr val="1A202C"/>
+                          </a:solidFill>
+                          <a:latin typeface="Calibri"/>
+                        </a:defRPr>
+                      </a:pPr>
+                      <a:r>
+                        <a:t>Random Forest</a:t>
+                      </a:r>
+                    </a:p>
+                  </a:txBody>
+                  <a:tcPr anchor="ctr" marL="109728" marR="109728">
+                    <a:solidFill>
+                      <a:srgbClr val="FFFFFF"/>
+                    </a:solidFill>
+                  </a:tcPr>
+                </a:tc>
+                <a:tc>
+                  <a:txBody>
+                    <a:bodyPr/>
+                    <a:lstStyle/>
+                    <a:p>
+                      <a:pPr>
+                        <a:defRPr sz="1500" b="0">
+                          <a:solidFill>
+                            <a:srgbClr val="1A202C"/>
+                          </a:solidFill>
+                          <a:latin typeface="Calibri"/>
+                        </a:defRPr>
+                      </a:pPr>
+                      <a:r>
+                        <a:t>12.31%</a:t>
+                      </a:r>
+                    </a:p>
+                  </a:txBody>
+                  <a:tcPr anchor="ctr" marL="109728" marR="109728">
+                    <a:solidFill>
+                      <a:srgbClr val="FFFFFF"/>
+                    </a:solidFill>
+                  </a:tcPr>
+                </a:tc>
+                <a:tc>
+                  <a:txBody>
+                    <a:bodyPr/>
+                    <a:lstStyle/>
+                    <a:p>
+                      <a:pPr>
+                        <a:defRPr sz="1500" b="0">
+                          <a:solidFill>
+                            <a:srgbClr val="1A202C"/>
+                          </a:solidFill>
+                          <a:latin typeface="Calibri"/>
+                        </a:defRPr>
+                      </a:pPr>
+                      <a:r>
+                        <a:t>0.951</a:t>
+                      </a:r>
+                    </a:p>
+                  </a:txBody>
+                  <a:tcPr anchor="ctr" marL="109728" marR="109728">
+                    <a:solidFill>
+                      <a:srgbClr val="FFFFFF"/>
+                    </a:solidFill>
+                  </a:tcPr>
+                </a:tc>
+                <a:tc>
+                  <a:txBody>
+                    <a:bodyPr/>
+                    <a:lstStyle/>
+                    <a:p>
+                      <a:pPr>
+                        <a:defRPr sz="1500" b="0">
+                          <a:solidFill>
+                            <a:srgbClr val="1A202C"/>
+                          </a:solidFill>
+                          <a:latin typeface="Calibri"/>
+                        </a:defRPr>
+                      </a:pPr>
+                    </a:p>
+                  </a:txBody>
+                  <a:tcPr anchor="ctr" marL="109728" marR="109728">
+                    <a:solidFill>
+                      <a:srgbClr val="FFFFFF"/>
+                    </a:solidFill>
+                  </a:tcPr>
+                </a:tc>
+              </a:tr>
+              <a:tr h="502920">
+                <a:tc>
+                  <a:txBody>
+                    <a:bodyPr/>
+                    <a:lstStyle/>
+                    <a:p>
+                      <a:pPr>
+                        <a:defRPr sz="1500" b="1">
+                          <a:solidFill>
+                            <a:srgbClr val="0D9488"/>
+                          </a:solidFill>
+                          <a:latin typeface="Calibri"/>
+                        </a:defRPr>
+                      </a:pPr>
+                      <a:r>
+                        <a:t>Gradient Boosting</a:t>
+                      </a:r>
+                    </a:p>
+                  </a:txBody>
+                  <a:tcPr anchor="ctr" marL="109728" marR="109728">
+                    <a:solidFill>
+                      <a:srgbClr val="E6FFFA"/>
+                    </a:solidFill>
+                  </a:tcPr>
+                </a:tc>
+                <a:tc>
+                  <a:txBody>
+                    <a:bodyPr/>
+                    <a:lstStyle/>
+                    <a:p>
+                      <a:pPr>
+                        <a:defRPr sz="1500" b="1">
+                          <a:solidFill>
+                            <a:srgbClr val="0D9488"/>
+                          </a:solidFill>
+                          <a:latin typeface="Calibri"/>
+                        </a:defRPr>
+                      </a:pPr>
+                      <a:r>
+                        <a:t>9.26%</a:t>
+                      </a:r>
+                    </a:p>
+                  </a:txBody>
+                  <a:tcPr anchor="ctr" marL="109728" marR="109728">
+                    <a:solidFill>
+                      <a:srgbClr val="E6FFFA"/>
+                    </a:solidFill>
+                  </a:tcPr>
+                </a:tc>
+                <a:tc>
+                  <a:txBody>
+                    <a:bodyPr/>
+                    <a:lstStyle/>
+                    <a:p>
+                      <a:pPr>
+                        <a:defRPr sz="1500" b="1">
+                          <a:solidFill>
+                            <a:srgbClr val="0D9488"/>
+                          </a:solidFill>
+                          <a:latin typeface="Calibri"/>
+                        </a:defRPr>
+                      </a:pPr>
+                      <a:r>
+                        <a:t>0.970</a:t>
+                      </a:r>
+                    </a:p>
+                  </a:txBody>
+                  <a:tcPr anchor="ctr" marL="109728" marR="109728">
+                    <a:solidFill>
+                      <a:srgbClr val="E6FFFA"/>
+                    </a:solidFill>
+                  </a:tcPr>
+                </a:tc>
+                <a:tc>
+                  <a:txBody>
+                    <a:bodyPr/>
+                    <a:lstStyle/>
+                    <a:p>
+                      <a:pPr>
+                        <a:defRPr sz="1500" b="1">
+                          <a:solidFill>
+                            <a:srgbClr val="0D9488"/>
+                          </a:solidFill>
+                          <a:latin typeface="Calibri"/>
+                        </a:defRPr>
+                      </a:pPr>
+                      <a:r>
+                        <a:t>✓</a:t>
+                      </a:r>
+                    </a:p>
+                  </a:txBody>
+                  <a:tcPr anchor="ctr" marL="109728" marR="109728">
+                    <a:solidFill>
+                      <a:srgbClr val="E6FFFA"/>
+                    </a:solidFill>
+                  </a:tcPr>
+                </a:tc>
+              </a:tr>
+            </a:tbl>
+          </a:graphicData>
+        </a:graphic>
+      </p:graphicFrame>
+      <p:sp>
+        <p:nvSpPr>
+          <p:cNvPr id="9" name="TextBox 8"/>
+          <p:cNvSpPr txBox="1"/>
+          <p:nvPr/>
+        </p:nvSpPr>
+        <p:spPr>
+          <a:xfrm>
+            <a:off x="548640" y="3657600"/>
+            <a:ext cx="11094415" cy="2743200"/>
+          </a:xfrm>
+          <a:prstGeom prst="rect">
+            <a:avLst/>
+          </a:prstGeom>
+          <a:noFill/>
+        </p:spPr>
+        <p:txBody>
+          <a:bodyPr wrap="square">
+            <a:spAutoFit/>
+          </a:bodyPr>
+          <a:lstStyle/>
           <a:p>
             <a:pPr>
-              <a:defRPr sz="2000"/>
-            </a:pPr>
-            <a:r>
-              <a:t>Same model backs the live web demo — one implementation, not three</a:t>
+              <a:spcAft>
+                <a:spcPts val="1000"/>
+              </a:spcAft>
+              <a:defRPr sz="1600">
+                <a:solidFill>
+                  <a:srgbClr val="1A202C"/>
+                </a:solidFill>
+                <a:latin typeface="Calibri"/>
+              </a:defRPr>
+            </a:pPr>
+            <a:r>
+              <a:t>•  Selection metric is EER — the metric the ASVspoof challenge itself is scored on, not raw</a:t>
+            </a:r>
+          </a:p>
+          <a:p>
+            <a:pPr lvl="1">
+              <a:spcAft>
+                <a:spcPts val="1000"/>
+              </a:spcAft>
+              <a:defRPr sz="1300">
+                <a:solidFill>
+                  <a:srgbClr val="64748B"/>
+                </a:solidFill>
+                <a:latin typeface="Calibri"/>
+              </a:defRPr>
+            </a:pPr>
+            <a:r>
+              <a:t>–  accuracy, which looked strong while quietly failing bonafide clips (next slide)</a:t>
             </a:r>
           </a:p>
         </p:txBody>
@@ -3424,6 +5733,14 @@
 <file path=ppt/slides/slide5.xml><?xml version="1.0" encoding="utf-8"?>
 <p:sld xmlns:a="http://schemas.openxmlformats.org/drawingml/2006/main" xmlns:p="http://schemas.openxmlformats.org/presentationml/2006/main" xmlns:r="http://schemas.openxmlformats.org/officeDocument/2006/relationships">
   <p:cSld>
+    <p:bg>
+      <p:bgPr>
+        <a:solidFill>
+          <a:srgbClr val="F7F9FB"/>
+        </a:solidFill>
+        <a:effectLst/>
+      </p:bgPr>
+    </p:bg>
     <p:spTree>
       <p:nvGrpSpPr>
         <p:cNvPr id="1" name=""/>
@@ -3433,61 +5750,678 @@
       <p:grpSpPr/>
       <p:sp>
         <p:nvSpPr>
-          <p:cNvPr id="2" name="Title 1"/>
-          <p:cNvSpPr>
-            <a:spLocks noGrp="1"/>
-          </p:cNvSpPr>
-          <p:nvPr>
-            <p:ph type="title"/>
-          </p:nvPr>
-        </p:nvSpPr>
-        <p:spPr/>
-        <p:txBody>
-          <a:bodyPr/>
-          <a:lstStyle/>
-          <a:p>
-            <a:r>
-              <a:t>Results</a:t>
-            </a:r>
-          </a:p>
-        </p:txBody>
-      </p:sp>
-      <p:sp>
-        <p:nvSpPr>
-          <p:cNvPr id="3" name="Content Placeholder 2"/>
-          <p:cNvSpPr>
-            <a:spLocks noGrp="1"/>
-          </p:cNvSpPr>
-          <p:nvPr>
-            <p:ph idx="1"/>
-          </p:nvPr>
-        </p:nvSpPr>
-        <p:spPr/>
-        <p:txBody>
-          <a:bodyPr/>
+          <p:cNvPr id="2" name="Rectangle 1"/>
+          <p:cNvSpPr/>
+          <p:nvPr/>
+        </p:nvSpPr>
+        <p:spPr>
+          <a:xfrm>
+            <a:off x="0" y="0"/>
+            <a:ext cx="12191695" cy="1051560"/>
+          </a:xfrm>
+          <a:prstGeom prst="rect">
+            <a:avLst/>
+          </a:prstGeom>
+          <a:solidFill>
+            <a:srgbClr val="0F2942"/>
+          </a:solidFill>
+          <a:ln>
+            <a:noFill/>
+          </a:ln>
+          <a:effectLst/>
+        </p:spPr>
+        <p:style>
+          <a:lnRef idx="1">
+            <a:schemeClr val="accent1"/>
+          </a:lnRef>
+          <a:fillRef idx="3">
+            <a:schemeClr val="accent1"/>
+          </a:fillRef>
+          <a:effectRef idx="2">
+            <a:schemeClr val="accent1"/>
+          </a:effectRef>
+          <a:fontRef idx="minor">
+            <a:schemeClr val="lt1"/>
+          </a:fontRef>
+        </p:style>
+        <p:txBody>
+          <a:bodyPr rtlCol="0" anchor="ctr"/>
+          <a:lstStyle/>
+          <a:p>
+            <a:pPr algn="ctr"/>
+          </a:p>
+        </p:txBody>
+      </p:sp>
+      <p:sp>
+        <p:nvSpPr>
+          <p:cNvPr id="3" name="Rectangle 2"/>
+          <p:cNvSpPr/>
+          <p:nvPr/>
+        </p:nvSpPr>
+        <p:spPr>
+          <a:xfrm>
+            <a:off x="0" y="1051560"/>
+            <a:ext cx="2103120" cy="63500"/>
+          </a:xfrm>
+          <a:prstGeom prst="rect">
+            <a:avLst/>
+          </a:prstGeom>
+          <a:solidFill>
+            <a:srgbClr val="0D9488"/>
+          </a:solidFill>
+          <a:ln>
+            <a:noFill/>
+          </a:ln>
+          <a:effectLst/>
+        </p:spPr>
+        <p:style>
+          <a:lnRef idx="1">
+            <a:schemeClr val="accent1"/>
+          </a:lnRef>
+          <a:fillRef idx="3">
+            <a:schemeClr val="accent1"/>
+          </a:fillRef>
+          <a:effectRef idx="2">
+            <a:schemeClr val="accent1"/>
+          </a:effectRef>
+          <a:fontRef idx="minor">
+            <a:schemeClr val="lt1"/>
+          </a:fontRef>
+        </p:style>
+        <p:txBody>
+          <a:bodyPr rtlCol="0" anchor="ctr"/>
+          <a:lstStyle/>
+          <a:p>
+            <a:pPr algn="ctr"/>
+          </a:p>
+        </p:txBody>
+      </p:sp>
+      <p:sp>
+        <p:nvSpPr>
+          <p:cNvPr id="4" name="TextBox 3"/>
+          <p:cNvSpPr txBox="1"/>
+          <p:nvPr/>
+        </p:nvSpPr>
+        <p:spPr>
+          <a:xfrm>
+            <a:off x="548640" y="146304"/>
+            <a:ext cx="11094415" cy="640080"/>
+          </a:xfrm>
+          <a:prstGeom prst="rect">
+            <a:avLst/>
+          </a:prstGeom>
+          <a:noFill/>
+        </p:spPr>
+        <p:txBody>
+          <a:bodyPr wrap="square">
+            <a:spAutoFit/>
+          </a:bodyPr>
           <a:lstStyle/>
           <a:p>
             <a:pPr>
-              <a:defRPr sz="2000"/>
-            </a:pPr>
-            <a:r>
-              <a:t>Trained on 25380 utterances, validated on 24844</a:t>
-            </a:r>
-          </a:p>
+              <a:defRPr sz="3000" b="1">
+                <a:solidFill>
+                  <a:srgbClr val="FFFFFF"/>
+                </a:solidFill>
+                <a:latin typeface="Calibri"/>
+              </a:defRPr>
+            </a:pPr>
+            <a:r>
+              <a:t>Results — the accuracy paradox, found and fixed</a:t>
+            </a:r>
+          </a:p>
+        </p:txBody>
+      </p:sp>
+      <p:sp>
+        <p:nvSpPr>
+          <p:cNvPr id="5" name="TextBox 4"/>
+          <p:cNvSpPr txBox="1"/>
+          <p:nvPr/>
+        </p:nvSpPr>
+        <p:spPr>
+          <a:xfrm>
+            <a:off x="11368735" y="6473952"/>
+            <a:ext cx="548640" cy="292608"/>
+          </a:xfrm>
+          <a:prstGeom prst="rect">
+            <a:avLst/>
+          </a:prstGeom>
+          <a:noFill/>
+        </p:spPr>
+        <p:txBody>
+          <a:bodyPr wrap="square">
+            <a:spAutoFit/>
+          </a:bodyPr>
+          <a:lstStyle/>
+          <a:p>
+            <a:pPr algn="r">
+              <a:defRPr sz="1100" b="0">
+                <a:solidFill>
+                  <a:srgbClr val="64748B"/>
+                </a:solidFill>
+                <a:latin typeface="Calibri"/>
+              </a:defRPr>
+            </a:pPr>
+            <a:r>
+              <a:t>4</a:t>
+            </a:r>
+          </a:p>
+        </p:txBody>
+      </p:sp>
+      <p:sp>
+        <p:nvSpPr>
+          <p:cNvPr id="6" name="Rounded Rectangle 5"/>
+          <p:cNvSpPr/>
+          <p:nvPr/>
+        </p:nvSpPr>
+        <p:spPr>
+          <a:xfrm>
+            <a:off x="548640" y="1417320"/>
+            <a:ext cx="3515258" cy="1554480"/>
+          </a:xfrm>
+          <a:prstGeom prst="roundRect">
+            <a:avLst>
+              <a:gd name="adj" fmla="val 6000"/>
+            </a:avLst>
+          </a:prstGeom>
+          <a:solidFill>
+            <a:srgbClr val="FFFFFF"/>
+          </a:solidFill>
+          <a:ln w="12700">
+            <a:solidFill>
+              <a:srgbClr val="E2E8F0"/>
+            </a:solidFill>
+          </a:ln>
+          <a:effectLst/>
+        </p:spPr>
+        <p:style>
+          <a:lnRef idx="1">
+            <a:schemeClr val="accent1"/>
+          </a:lnRef>
+          <a:fillRef idx="3">
+            <a:schemeClr val="accent1"/>
+          </a:fillRef>
+          <a:effectRef idx="2">
+            <a:schemeClr val="accent1"/>
+          </a:effectRef>
+          <a:fontRef idx="minor">
+            <a:schemeClr val="lt1"/>
+          </a:fontRef>
+        </p:style>
+        <p:txBody>
+          <a:bodyPr rtlCol="0" anchor="ctr"/>
+          <a:lstStyle/>
+          <a:p>
+            <a:pPr algn="ctr"/>
+          </a:p>
+        </p:txBody>
+      </p:sp>
+      <p:sp>
+        <p:nvSpPr>
+          <p:cNvPr id="7" name="TextBox 6"/>
+          <p:cNvSpPr txBox="1"/>
+          <p:nvPr/>
+        </p:nvSpPr>
+        <p:spPr>
+          <a:xfrm>
+            <a:off x="548640" y="1618488"/>
+            <a:ext cx="3515258" cy="731520"/>
+          </a:xfrm>
+          <a:prstGeom prst="rect">
+            <a:avLst/>
+          </a:prstGeom>
+          <a:noFill/>
+        </p:spPr>
+        <p:txBody>
+          <a:bodyPr wrap="none">
+            <a:spAutoFit/>
+          </a:bodyPr>
+          <a:lstStyle/>
+          <a:p>
+            <a:pPr algn="ctr">
+              <a:defRPr sz="3400" b="1">
+                <a:solidFill>
+                  <a:srgbClr val="DC2626"/>
+                </a:solidFill>
+                <a:latin typeface="Calibri"/>
+              </a:defRPr>
+            </a:pPr>
+            <a:r>
+              <a:t>80%</a:t>
+            </a:r>
+          </a:p>
+        </p:txBody>
+      </p:sp>
+      <p:sp>
+        <p:nvSpPr>
+          <p:cNvPr id="8" name="TextBox 7"/>
+          <p:cNvSpPr txBox="1"/>
+          <p:nvPr/>
+        </p:nvSpPr>
+        <p:spPr>
+          <a:xfrm>
+            <a:off x="640080" y="2377440"/>
+            <a:ext cx="3332378" cy="548640"/>
+          </a:xfrm>
+          <a:prstGeom prst="rect">
+            <a:avLst/>
+          </a:prstGeom>
+          <a:noFill/>
+        </p:spPr>
+        <p:txBody>
+          <a:bodyPr wrap="square">
+            <a:spAutoFit/>
+          </a:bodyPr>
+          <a:lstStyle/>
+          <a:p>
+            <a:pPr algn="ctr">
+              <a:defRPr sz="1200">
+                <a:solidFill>
+                  <a:srgbClr val="64748B"/>
+                </a:solidFill>
+                <a:latin typeface="Calibri"/>
+              </a:defRPr>
+            </a:pPr>
+            <a:r>
+              <a:t>Bonafide recall</a:t>
+            </a:r>
+          </a:p>
+          <a:p>
+            <a:pPr algn="ctr">
+              <a:defRPr sz="1200">
+                <a:solidFill>
+                  <a:srgbClr val="64748B"/>
+                </a:solidFill>
+                <a:latin typeface="Calibri"/>
+              </a:defRPr>
+            </a:pPr>
+            <a:r>
+              <a:t>at default 0.5 threshold</a:t>
+            </a:r>
+          </a:p>
+        </p:txBody>
+      </p:sp>
+      <p:sp>
+        <p:nvSpPr>
+          <p:cNvPr id="9" name="Rounded Rectangle 8"/>
+          <p:cNvSpPr/>
+          <p:nvPr/>
+        </p:nvSpPr>
+        <p:spPr>
+          <a:xfrm>
+            <a:off x="4338218" y="1417320"/>
+            <a:ext cx="3515258" cy="1554480"/>
+          </a:xfrm>
+          <a:prstGeom prst="roundRect">
+            <a:avLst>
+              <a:gd name="adj" fmla="val 6000"/>
+            </a:avLst>
+          </a:prstGeom>
+          <a:solidFill>
+            <a:srgbClr val="FFFFFF"/>
+          </a:solidFill>
+          <a:ln w="12700">
+            <a:solidFill>
+              <a:srgbClr val="E2E8F0"/>
+            </a:solidFill>
+          </a:ln>
+          <a:effectLst/>
+        </p:spPr>
+        <p:style>
+          <a:lnRef idx="1">
+            <a:schemeClr val="accent1"/>
+          </a:lnRef>
+          <a:fillRef idx="3">
+            <a:schemeClr val="accent1"/>
+          </a:fillRef>
+          <a:effectRef idx="2">
+            <a:schemeClr val="accent1"/>
+          </a:effectRef>
+          <a:fontRef idx="minor">
+            <a:schemeClr val="lt1"/>
+          </a:fontRef>
+        </p:style>
+        <p:txBody>
+          <a:bodyPr rtlCol="0" anchor="ctr"/>
+          <a:lstStyle/>
+          <a:p>
+            <a:pPr algn="ctr"/>
+          </a:p>
+        </p:txBody>
+      </p:sp>
+      <p:sp>
+        <p:nvSpPr>
+          <p:cNvPr id="10" name="TextBox 9"/>
+          <p:cNvSpPr txBox="1"/>
+          <p:nvPr/>
+        </p:nvSpPr>
+        <p:spPr>
+          <a:xfrm>
+            <a:off x="4338218" y="1618488"/>
+            <a:ext cx="3515258" cy="731520"/>
+          </a:xfrm>
+          <a:prstGeom prst="rect">
+            <a:avLst/>
+          </a:prstGeom>
+          <a:noFill/>
+        </p:spPr>
+        <p:txBody>
+          <a:bodyPr wrap="none">
+            <a:spAutoFit/>
+          </a:bodyPr>
+          <a:lstStyle/>
+          <a:p>
+            <a:pPr algn="ctr">
+              <a:defRPr sz="3400" b="1">
+                <a:solidFill>
+                  <a:srgbClr val="0D9488"/>
+                </a:solidFill>
+                <a:latin typeface="Calibri"/>
+              </a:defRPr>
+            </a:pPr>
+            <a:r>
+              <a:t>91%</a:t>
+            </a:r>
+          </a:p>
+        </p:txBody>
+      </p:sp>
+      <p:sp>
+        <p:nvSpPr>
+          <p:cNvPr id="11" name="TextBox 10"/>
+          <p:cNvSpPr txBox="1"/>
+          <p:nvPr/>
+        </p:nvSpPr>
+        <p:spPr>
+          <a:xfrm>
+            <a:off x="4429658" y="2377440"/>
+            <a:ext cx="3332378" cy="548640"/>
+          </a:xfrm>
+          <a:prstGeom prst="rect">
+            <a:avLst/>
+          </a:prstGeom>
+          <a:noFill/>
+        </p:spPr>
+        <p:txBody>
+          <a:bodyPr wrap="square">
+            <a:spAutoFit/>
+          </a:bodyPr>
+          <a:lstStyle/>
+          <a:p>
+            <a:pPr algn="ctr">
+              <a:defRPr sz="1200">
+                <a:solidFill>
+                  <a:srgbClr val="64748B"/>
+                </a:solidFill>
+                <a:latin typeface="Calibri"/>
+              </a:defRPr>
+            </a:pPr>
+            <a:r>
+              <a:t>Bonafide recall</a:t>
+            </a:r>
+          </a:p>
+          <a:p>
+            <a:pPr algn="ctr">
+              <a:defRPr sz="1200">
+                <a:solidFill>
+                  <a:srgbClr val="64748B"/>
+                </a:solidFill>
+                <a:latin typeface="Calibri"/>
+              </a:defRPr>
+            </a:pPr>
+            <a:r>
+              <a:t>at deployed EER threshold</a:t>
+            </a:r>
+          </a:p>
+        </p:txBody>
+      </p:sp>
+      <p:sp>
+        <p:nvSpPr>
+          <p:cNvPr id="12" name="Rounded Rectangle 11"/>
+          <p:cNvSpPr/>
+          <p:nvPr/>
+        </p:nvSpPr>
+        <p:spPr>
+          <a:xfrm>
+            <a:off x="8127796" y="1417320"/>
+            <a:ext cx="3515258" cy="1554480"/>
+          </a:xfrm>
+          <a:prstGeom prst="roundRect">
+            <a:avLst>
+              <a:gd name="adj" fmla="val 6000"/>
+            </a:avLst>
+          </a:prstGeom>
+          <a:solidFill>
+            <a:srgbClr val="FFFFFF"/>
+          </a:solidFill>
+          <a:ln w="12700">
+            <a:solidFill>
+              <a:srgbClr val="E2E8F0"/>
+            </a:solidFill>
+          </a:ln>
+          <a:effectLst/>
+        </p:spPr>
+        <p:style>
+          <a:lnRef idx="1">
+            <a:schemeClr val="accent1"/>
+          </a:lnRef>
+          <a:fillRef idx="3">
+            <a:schemeClr val="accent1"/>
+          </a:fillRef>
+          <a:effectRef idx="2">
+            <a:schemeClr val="accent1"/>
+          </a:effectRef>
+          <a:fontRef idx="minor">
+            <a:schemeClr val="lt1"/>
+          </a:fontRef>
+        </p:style>
+        <p:txBody>
+          <a:bodyPr rtlCol="0" anchor="ctr"/>
+          <a:lstStyle/>
+          <a:p>
+            <a:pPr algn="ctr"/>
+          </a:p>
+        </p:txBody>
+      </p:sp>
+      <p:sp>
+        <p:nvSpPr>
+          <p:cNvPr id="13" name="TextBox 12"/>
+          <p:cNvSpPr txBox="1"/>
+          <p:nvPr/>
+        </p:nvSpPr>
+        <p:spPr>
+          <a:xfrm>
+            <a:off x="8127796" y="1618488"/>
+            <a:ext cx="3515258" cy="731520"/>
+          </a:xfrm>
+          <a:prstGeom prst="rect">
+            <a:avLst/>
+          </a:prstGeom>
+          <a:noFill/>
+        </p:spPr>
+        <p:txBody>
+          <a:bodyPr wrap="none">
+            <a:spAutoFit/>
+          </a:bodyPr>
+          <a:lstStyle/>
+          <a:p>
+            <a:pPr algn="ctr">
+              <a:defRPr sz="3400" b="1">
+                <a:solidFill>
+                  <a:srgbClr val="2B6CB0"/>
+                </a:solidFill>
+                <a:latin typeface="Calibri"/>
+              </a:defRPr>
+            </a:pPr>
+            <a:r>
+              <a:t>9.3%</a:t>
+            </a:r>
+          </a:p>
+        </p:txBody>
+      </p:sp>
+      <p:sp>
+        <p:nvSpPr>
+          <p:cNvPr id="14" name="TextBox 13"/>
+          <p:cNvSpPr txBox="1"/>
+          <p:nvPr/>
+        </p:nvSpPr>
+        <p:spPr>
+          <a:xfrm>
+            <a:off x="8219236" y="2377440"/>
+            <a:ext cx="3332378" cy="548640"/>
+          </a:xfrm>
+          <a:prstGeom prst="rect">
+            <a:avLst/>
+          </a:prstGeom>
+          <a:noFill/>
+        </p:spPr>
+        <p:txBody>
+          <a:bodyPr wrap="square">
+            <a:spAutoFit/>
+          </a:bodyPr>
+          <a:lstStyle/>
+          <a:p>
+            <a:pPr algn="ctr">
+              <a:defRPr sz="1200">
+                <a:solidFill>
+                  <a:srgbClr val="64748B"/>
+                </a:solidFill>
+                <a:latin typeface="Calibri"/>
+              </a:defRPr>
+            </a:pPr>
+            <a:r>
+              <a:t>Equal Error Rate</a:t>
+            </a:r>
+          </a:p>
+          <a:p>
+            <a:pPr algn="ctr">
+              <a:defRPr sz="1200">
+                <a:solidFill>
+                  <a:srgbClr val="64748B"/>
+                </a:solidFill>
+                <a:latin typeface="Calibri"/>
+              </a:defRPr>
+            </a:pPr>
+            <a:r>
+              <a:t>(ASVspoof's own metric)</a:t>
+            </a:r>
+          </a:p>
+        </p:txBody>
+      </p:sp>
+      <p:sp>
+        <p:nvSpPr>
+          <p:cNvPr id="15" name="TextBox 14"/>
+          <p:cNvSpPr txBox="1"/>
+          <p:nvPr/>
+        </p:nvSpPr>
+        <p:spPr>
+          <a:xfrm>
+            <a:off x="548640" y="3246120"/>
+            <a:ext cx="11094415" cy="3154680"/>
+          </a:xfrm>
+          <a:prstGeom prst="rect">
+            <a:avLst/>
+          </a:prstGeom>
+          <a:noFill/>
+        </p:spPr>
+        <p:txBody>
+          <a:bodyPr wrap="square">
+            <a:spAutoFit/>
+          </a:bodyPr>
+          <a:lstStyle/>
           <a:p>
             <a:pPr>
-              <a:defRPr sz="2000"/>
-            </a:pPr>
-            <a:r>
-              <a:t>Dev accuracy: 90.7%</a:t>
+              <a:spcAft>
+                <a:spcPts val="1000"/>
+              </a:spcAft>
+              <a:defRPr sz="1600">
+                <a:solidFill>
+                  <a:srgbClr val="1A202C"/>
+                </a:solidFill>
+                <a:latin typeface="Calibri"/>
+              </a:defRPr>
+            </a:pPr>
+            <a:r>
+              <a:t>•  Dev accuracy at the default threshold (94.3%) looked strong — but the model was quietly</a:t>
+            </a:r>
+          </a:p>
+          <a:p>
+            <a:pPr lvl="1">
+              <a:spcAft>
+                <a:spcPts val="1000"/>
+              </a:spcAft>
+              <a:defRPr sz="1300">
+                <a:solidFill>
+                  <a:srgbClr val="64748B"/>
+                </a:solidFill>
+                <a:latin typeface="Calibri"/>
+              </a:defRPr>
+            </a:pPr>
+            <a:r>
+              <a:t>–  biased toward the majority class: it caught spoof reliably, bonafide much less so</a:t>
             </a:r>
           </a:p>
           <a:p>
             <a:pPr>
-              <a:defRPr sz="2000"/>
-            </a:pPr>
-            <a:r>
-              <a:t>Dev precision: 98.8% | recall: 90.7% | F1: 94.6%</a:t>
+              <a:spcAft>
+                <a:spcPts val="1000"/>
+              </a:spcAft>
+              <a:defRPr sz="1600">
+                <a:solidFill>
+                  <a:srgbClr val="1A202C"/>
+                </a:solidFill>
+                <a:latin typeface="Calibri"/>
+              </a:defRPr>
+            </a:pPr>
+            <a:r>
+              <a:t>•  Fix: the model artifact now stores its own EER-optimal decision threshold, used</a:t>
+            </a:r>
+          </a:p>
+          <a:p>
+            <a:pPr lvl="1">
+              <a:spcAft>
+                <a:spcPts val="1000"/>
+              </a:spcAft>
+              <a:defRPr sz="1300">
+                <a:solidFill>
+                  <a:srgbClr val="64748B"/>
+                </a:solidFill>
+                <a:latin typeface="Calibri"/>
+              </a:defRPr>
+            </a:pPr>
+            <a:r>
+              <a:t>–  everywhere (streaming consumer, web app) instead of scikit-learn's default 0.5</a:t>
+            </a:r>
+          </a:p>
+          <a:p>
+            <a:pPr>
+              <a:spcAft>
+                <a:spcPts val="1000"/>
+              </a:spcAft>
+              <a:defRPr sz="1600">
+                <a:solidFill>
+                  <a:srgbClr val="1A202C"/>
+                </a:solidFill>
+                <a:latin typeface="Calibri"/>
+              </a:defRPr>
+            </a:pPr>
+            <a:r>
+              <a:t>•  Independently re-confirmed on live Kafka-streamed eval data, not just the dev set</a:t>
+            </a:r>
+          </a:p>
+          <a:p>
+            <a:pPr lvl="1">
+              <a:spcAft>
+                <a:spcPts val="1000"/>
+              </a:spcAft>
+              <a:defRPr sz="1300">
+                <a:solidFill>
+                  <a:srgbClr val="64748B"/>
+                </a:solidFill>
+                <a:latin typeface="Calibri"/>
+              </a:defRPr>
+            </a:pPr>
+            <a:r>
+              <a:t>–  it was tuned on — bonafide accuracy went 29.7% → 91.5% on the streamed sample too</a:t>
             </a:r>
           </a:p>
         </p:txBody>
@@ -3503,6 +6437,14 @@
 <file path=ppt/slides/slide6.xml><?xml version="1.0" encoding="utf-8"?>
 <p:sld xmlns:a="http://schemas.openxmlformats.org/drawingml/2006/main" xmlns:p="http://schemas.openxmlformats.org/presentationml/2006/main" xmlns:r="http://schemas.openxmlformats.org/officeDocument/2006/relationships">
   <p:cSld>
+    <p:bg>
+      <p:bgPr>
+        <a:solidFill>
+          <a:srgbClr val="F7F9FB"/>
+        </a:solidFill>
+        <a:effectLst/>
+      </p:bgPr>
+    </p:bg>
     <p:spTree>
       <p:nvGrpSpPr>
         <p:cNvPr id="1" name=""/>
@@ -3512,28 +6454,167 @@
       <p:grpSpPr/>
       <p:sp>
         <p:nvSpPr>
-          <p:cNvPr id="2" name="Title 1"/>
-          <p:cNvSpPr>
-            <a:spLocks noGrp="1"/>
-          </p:cNvSpPr>
-          <p:nvPr>
-            <p:ph type="title"/>
-          </p:nvPr>
-        </p:nvSpPr>
-        <p:spPr/>
-        <p:txBody>
-          <a:bodyPr/>
-          <a:lstStyle/>
-          <a:p>
-            <a:r>
-              <a:t>Detection accuracy by attack type</a:t>
+          <p:cNvPr id="2" name="Rectangle 1"/>
+          <p:cNvSpPr/>
+          <p:nvPr/>
+        </p:nvSpPr>
+        <p:spPr>
+          <a:xfrm>
+            <a:off x="0" y="0"/>
+            <a:ext cx="12191695" cy="1051560"/>
+          </a:xfrm>
+          <a:prstGeom prst="rect">
+            <a:avLst/>
+          </a:prstGeom>
+          <a:solidFill>
+            <a:srgbClr val="0F2942"/>
+          </a:solidFill>
+          <a:ln>
+            <a:noFill/>
+          </a:ln>
+          <a:effectLst/>
+        </p:spPr>
+        <p:style>
+          <a:lnRef idx="1">
+            <a:schemeClr val="accent1"/>
+          </a:lnRef>
+          <a:fillRef idx="3">
+            <a:schemeClr val="accent1"/>
+          </a:fillRef>
+          <a:effectRef idx="2">
+            <a:schemeClr val="accent1"/>
+          </a:effectRef>
+          <a:fontRef idx="minor">
+            <a:schemeClr val="lt1"/>
+          </a:fontRef>
+        </p:style>
+        <p:txBody>
+          <a:bodyPr rtlCol="0" anchor="ctr"/>
+          <a:lstStyle/>
+          <a:p>
+            <a:pPr algn="ctr"/>
+          </a:p>
+        </p:txBody>
+      </p:sp>
+      <p:sp>
+        <p:nvSpPr>
+          <p:cNvPr id="3" name="Rectangle 2"/>
+          <p:cNvSpPr/>
+          <p:nvPr/>
+        </p:nvSpPr>
+        <p:spPr>
+          <a:xfrm>
+            <a:off x="0" y="1051560"/>
+            <a:ext cx="2103120" cy="63500"/>
+          </a:xfrm>
+          <a:prstGeom prst="rect">
+            <a:avLst/>
+          </a:prstGeom>
+          <a:solidFill>
+            <a:srgbClr val="0D9488"/>
+          </a:solidFill>
+          <a:ln>
+            <a:noFill/>
+          </a:ln>
+          <a:effectLst/>
+        </p:spPr>
+        <p:style>
+          <a:lnRef idx="1">
+            <a:schemeClr val="accent1"/>
+          </a:lnRef>
+          <a:fillRef idx="3">
+            <a:schemeClr val="accent1"/>
+          </a:fillRef>
+          <a:effectRef idx="2">
+            <a:schemeClr val="accent1"/>
+          </a:effectRef>
+          <a:fontRef idx="minor">
+            <a:schemeClr val="lt1"/>
+          </a:fontRef>
+        </p:style>
+        <p:txBody>
+          <a:bodyPr rtlCol="0" anchor="ctr"/>
+          <a:lstStyle/>
+          <a:p>
+            <a:pPr algn="ctr"/>
+          </a:p>
+        </p:txBody>
+      </p:sp>
+      <p:sp>
+        <p:nvSpPr>
+          <p:cNvPr id="4" name="TextBox 3"/>
+          <p:cNvSpPr txBox="1"/>
+          <p:nvPr/>
+        </p:nvSpPr>
+        <p:spPr>
+          <a:xfrm>
+            <a:off x="548640" y="146304"/>
+            <a:ext cx="11094415" cy="640080"/>
+          </a:xfrm>
+          <a:prstGeom prst="rect">
+            <a:avLst/>
+          </a:prstGeom>
+          <a:noFill/>
+        </p:spPr>
+        <p:txBody>
+          <a:bodyPr wrap="square">
+            <a:spAutoFit/>
+          </a:bodyPr>
+          <a:lstStyle/>
+          <a:p>
+            <a:pPr>
+              <a:defRPr sz="3000" b="1">
+                <a:solidFill>
+                  <a:srgbClr val="FFFFFF"/>
+                </a:solidFill>
+                <a:latin typeface="Calibri"/>
+              </a:defRPr>
+            </a:pPr>
+            <a:r>
+              <a:t>Results — ROC curve &amp; confusion matrix</a:t>
+            </a:r>
+          </a:p>
+        </p:txBody>
+      </p:sp>
+      <p:sp>
+        <p:nvSpPr>
+          <p:cNvPr id="5" name="TextBox 4"/>
+          <p:cNvSpPr txBox="1"/>
+          <p:nvPr/>
+        </p:nvSpPr>
+        <p:spPr>
+          <a:xfrm>
+            <a:off x="11368735" y="6473952"/>
+            <a:ext cx="548640" cy="292608"/>
+          </a:xfrm>
+          <a:prstGeom prst="rect">
+            <a:avLst/>
+          </a:prstGeom>
+          <a:noFill/>
+        </p:spPr>
+        <p:txBody>
+          <a:bodyPr wrap="square">
+            <a:spAutoFit/>
+          </a:bodyPr>
+          <a:lstStyle/>
+          <a:p>
+            <a:pPr algn="r">
+              <a:defRPr sz="1100" b="0">
+                <a:solidFill>
+                  <a:srgbClr val="64748B"/>
+                </a:solidFill>
+                <a:latin typeface="Calibri"/>
+              </a:defRPr>
+            </a:pPr>
+            <a:r>
+              <a:t>5</a:t>
             </a:r>
           </a:p>
         </p:txBody>
       </p:sp>
       <p:pic>
         <p:nvPicPr>
-          <p:cNvPr id="3" name="Picture 2" descr="accuracy_by_attack.png"/>
+          <p:cNvPr id="6" name="Picture 5" descr="roc_curve.png"/>
           <p:cNvPicPr>
             <a:picLocks noChangeAspect="1"/>
           </p:cNvPicPr>
@@ -3547,14 +6628,74 @@
         </p:blipFill>
         <p:spPr>
           <a:xfrm>
-            <a:off x="914400" y="1371600"/>
-            <a:ext cx="7315200" cy="3657600"/>
+            <a:off x="807643" y="1417320"/>
+            <a:ext cx="4892040" cy="4892040"/>
           </a:xfrm>
           <a:prstGeom prst="rect">
             <a:avLst/>
           </a:prstGeom>
         </p:spPr>
       </p:pic>
+      <p:pic>
+        <p:nvPicPr>
+          <p:cNvPr id="7" name="Picture 6" descr="confusion_matrix.png"/>
+          <p:cNvPicPr>
+            <a:picLocks noChangeAspect="1"/>
+          </p:cNvPicPr>
+          <p:nvPr/>
+        </p:nvPicPr>
+        <p:blipFill>
+          <a:blip r:embed="rId3"/>
+          <a:stretch>
+            <a:fillRect/>
+          </a:stretch>
+        </p:blipFill>
+        <p:spPr>
+          <a:xfrm>
+            <a:off x="6492010" y="1417320"/>
+            <a:ext cx="4892040" cy="4892040"/>
+          </a:xfrm>
+          <a:prstGeom prst="rect">
+            <a:avLst/>
+          </a:prstGeom>
+        </p:spPr>
+      </p:pic>
+      <p:sp>
+        <p:nvSpPr>
+          <p:cNvPr id="8" name="TextBox 7"/>
+          <p:cNvSpPr txBox="1"/>
+          <p:nvPr/>
+        </p:nvSpPr>
+        <p:spPr>
+          <a:xfrm>
+            <a:off x="548640" y="6400800"/>
+            <a:ext cx="11094415" cy="365760"/>
+          </a:xfrm>
+          <a:prstGeom prst="rect">
+            <a:avLst/>
+          </a:prstGeom>
+          <a:noFill/>
+        </p:spPr>
+        <p:txBody>
+          <a:bodyPr wrap="square">
+            <a:spAutoFit/>
+          </a:bodyPr>
+          <a:lstStyle/>
+          <a:p>
+            <a:pPr algn="ctr">
+              <a:defRPr sz="1200" b="0">
+                <a:solidFill>
+                  <a:srgbClr val="64748B"/>
+                </a:solidFill>
+                <a:latin typeface="Calibri"/>
+              </a:defRPr>
+            </a:pPr>
+            <a:r>
+              <a:t>Left: both candidate models, deployed model's EER point marked. Right: streamed eval predictions.</a:t>
+            </a:r>
+          </a:p>
+        </p:txBody>
+      </p:sp>
     </p:spTree>
   </p:cSld>
   <p:clrMapOvr>
@@ -3566,6 +6707,14 @@
 <file path=ppt/slides/slide7.xml><?xml version="1.0" encoding="utf-8"?>
 <p:sld xmlns:a="http://schemas.openxmlformats.org/drawingml/2006/main" xmlns:p="http://schemas.openxmlformats.org/presentationml/2006/main" xmlns:r="http://schemas.openxmlformats.org/officeDocument/2006/relationships">
   <p:cSld>
+    <p:bg>
+      <p:bgPr>
+        <a:solidFill>
+          <a:srgbClr val="F7F9FB"/>
+        </a:solidFill>
+        <a:effectLst/>
+      </p:bgPr>
+    </p:bg>
     <p:spTree>
       <p:nvGrpSpPr>
         <p:cNvPr id="1" name=""/>
@@ -3575,77 +6724,811 @@
       <p:grpSpPr/>
       <p:sp>
         <p:nvSpPr>
-          <p:cNvPr id="2" name="Title 1"/>
-          <p:cNvSpPr>
-            <a:spLocks noGrp="1"/>
-          </p:cNvSpPr>
-          <p:nvPr>
-            <p:ph type="title"/>
-          </p:nvPr>
-        </p:nvSpPr>
-        <p:spPr/>
-        <p:txBody>
-          <a:bodyPr/>
-          <a:lstStyle/>
-          <a:p>
-            <a:r>
-              <a:t>Challenges &amp; trade-offs</a:t>
-            </a:r>
-          </a:p>
-        </p:txBody>
-      </p:sp>
-      <p:sp>
-        <p:nvSpPr>
-          <p:cNvPr id="3" name="Content Placeholder 2"/>
-          <p:cNvSpPr>
-            <a:spLocks noGrp="1"/>
-          </p:cNvSpPr>
-          <p:nvPr>
-            <p:ph idx="1"/>
-          </p:nvPr>
-        </p:nvSpPr>
-        <p:spPr/>
-        <p:txBody>
-          <a:bodyPr/>
+          <p:cNvPr id="2" name="Rectangle 1"/>
+          <p:cNvSpPr/>
+          <p:nvPr/>
+        </p:nvSpPr>
+        <p:spPr>
+          <a:xfrm>
+            <a:off x="0" y="0"/>
+            <a:ext cx="12191695" cy="1051560"/>
+          </a:xfrm>
+          <a:prstGeom prst="rect">
+            <a:avLst/>
+          </a:prstGeom>
+          <a:solidFill>
+            <a:srgbClr val="0F2942"/>
+          </a:solidFill>
+          <a:ln>
+            <a:noFill/>
+          </a:ln>
+          <a:effectLst/>
+        </p:spPr>
+        <p:style>
+          <a:lnRef idx="1">
+            <a:schemeClr val="accent1"/>
+          </a:lnRef>
+          <a:fillRef idx="3">
+            <a:schemeClr val="accent1"/>
+          </a:fillRef>
+          <a:effectRef idx="2">
+            <a:schemeClr val="accent1"/>
+          </a:effectRef>
+          <a:fontRef idx="minor">
+            <a:schemeClr val="lt1"/>
+          </a:fontRef>
+        </p:style>
+        <p:txBody>
+          <a:bodyPr rtlCol="0" anchor="ctr"/>
+          <a:lstStyle/>
+          <a:p>
+            <a:pPr algn="ctr"/>
+          </a:p>
+        </p:txBody>
+      </p:sp>
+      <p:sp>
+        <p:nvSpPr>
+          <p:cNvPr id="3" name="Rectangle 2"/>
+          <p:cNvSpPr/>
+          <p:nvPr/>
+        </p:nvSpPr>
+        <p:spPr>
+          <a:xfrm>
+            <a:off x="0" y="1051560"/>
+            <a:ext cx="2103120" cy="63500"/>
+          </a:xfrm>
+          <a:prstGeom prst="rect">
+            <a:avLst/>
+          </a:prstGeom>
+          <a:solidFill>
+            <a:srgbClr val="0D9488"/>
+          </a:solidFill>
+          <a:ln>
+            <a:noFill/>
+          </a:ln>
+          <a:effectLst/>
+        </p:spPr>
+        <p:style>
+          <a:lnRef idx="1">
+            <a:schemeClr val="accent1"/>
+          </a:lnRef>
+          <a:fillRef idx="3">
+            <a:schemeClr val="accent1"/>
+          </a:fillRef>
+          <a:effectRef idx="2">
+            <a:schemeClr val="accent1"/>
+          </a:effectRef>
+          <a:fontRef idx="minor">
+            <a:schemeClr val="lt1"/>
+          </a:fontRef>
+        </p:style>
+        <p:txBody>
+          <a:bodyPr rtlCol="0" anchor="ctr"/>
+          <a:lstStyle/>
+          <a:p>
+            <a:pPr algn="ctr"/>
+          </a:p>
+        </p:txBody>
+      </p:sp>
+      <p:sp>
+        <p:nvSpPr>
+          <p:cNvPr id="4" name="TextBox 3"/>
+          <p:cNvSpPr txBox="1"/>
+          <p:nvPr/>
+        </p:nvSpPr>
+        <p:spPr>
+          <a:xfrm>
+            <a:off x="548640" y="146304"/>
+            <a:ext cx="11094415" cy="640080"/>
+          </a:xfrm>
+          <a:prstGeom prst="rect">
+            <a:avLst/>
+          </a:prstGeom>
+          <a:noFill/>
+        </p:spPr>
+        <p:txBody>
+          <a:bodyPr wrap="square">
+            <a:spAutoFit/>
+          </a:bodyPr>
           <a:lstStyle/>
           <a:p>
             <a:pPr>
-              <a:defRPr sz="2000"/>
-            </a:pPr>
-            <a:r>
-              <a:t>Windows + Spark: worker Python subprocess resolution breaks under paths with spaces</a:t>
-            </a:r>
-          </a:p>
+              <a:defRPr sz="3000" b="1">
+                <a:solidFill>
+                  <a:srgbClr val="FFFFFF"/>
+                </a:solidFill>
+                <a:latin typeface="Calibri"/>
+              </a:defRPr>
+            </a:pPr>
+            <a:r>
+              <a:t>Results — what the model learned, and how sure it is</a:t>
+            </a:r>
+          </a:p>
+        </p:txBody>
+      </p:sp>
+      <p:sp>
+        <p:nvSpPr>
+          <p:cNvPr id="5" name="TextBox 4"/>
+          <p:cNvSpPr txBox="1"/>
+          <p:nvPr/>
+        </p:nvSpPr>
+        <p:spPr>
+          <a:xfrm>
+            <a:off x="11368735" y="6473952"/>
+            <a:ext cx="548640" cy="292608"/>
+          </a:xfrm>
+          <a:prstGeom prst="rect">
+            <a:avLst/>
+          </a:prstGeom>
+          <a:noFill/>
+        </p:spPr>
+        <p:txBody>
+          <a:bodyPr wrap="square">
+            <a:spAutoFit/>
+          </a:bodyPr>
+          <a:lstStyle/>
+          <a:p>
+            <a:pPr algn="r">
+              <a:defRPr sz="1100" b="0">
+                <a:solidFill>
+                  <a:srgbClr val="64748B"/>
+                </a:solidFill>
+                <a:latin typeface="Calibri"/>
+              </a:defRPr>
+            </a:pPr>
+            <a:r>
+              <a:t>6</a:t>
+            </a:r>
+          </a:p>
+        </p:txBody>
+      </p:sp>
+      <p:pic>
+        <p:nvPicPr>
+          <p:cNvPr id="6" name="Picture 5" descr="feature_importance.png"/>
+          <p:cNvPicPr>
+            <a:picLocks noChangeAspect="1"/>
+          </p:cNvPicPr>
+          <p:nvPr/>
+        </p:nvPicPr>
+        <p:blipFill>
+          <a:blip r:embed="rId2"/>
+          <a:stretch>
+            <a:fillRect/>
+          </a:stretch>
+        </p:blipFill>
+        <p:spPr>
+          <a:xfrm>
+            <a:off x="548640" y="2059991"/>
+            <a:ext cx="5410047" cy="3606698"/>
+          </a:xfrm>
+          <a:prstGeom prst="rect">
+            <a:avLst/>
+          </a:prstGeom>
+        </p:spPr>
+      </p:pic>
+      <p:pic>
+        <p:nvPicPr>
+          <p:cNvPr id="7" name="Picture 6" descr="confidence_histogram.png"/>
+          <p:cNvPicPr>
+            <a:picLocks noChangeAspect="1"/>
+          </p:cNvPicPr>
+          <p:nvPr/>
+        </p:nvPicPr>
+        <p:blipFill>
+          <a:blip r:embed="rId3"/>
+          <a:stretch>
+            <a:fillRect/>
+          </a:stretch>
+        </p:blipFill>
+        <p:spPr>
+          <a:xfrm>
+            <a:off x="6233007" y="2059991"/>
+            <a:ext cx="5410047" cy="3606698"/>
+          </a:xfrm>
+          <a:prstGeom prst="rect">
+            <a:avLst/>
+          </a:prstGeom>
+        </p:spPr>
+      </p:pic>
+      <p:sp>
+        <p:nvSpPr>
+          <p:cNvPr id="8" name="TextBox 7"/>
+          <p:cNvSpPr txBox="1"/>
+          <p:nvPr/>
+        </p:nvSpPr>
+        <p:spPr>
+          <a:xfrm>
+            <a:off x="548640" y="6400800"/>
+            <a:ext cx="11094415" cy="365760"/>
+          </a:xfrm>
+          <a:prstGeom prst="rect">
+            <a:avLst/>
+          </a:prstGeom>
+          <a:noFill/>
+        </p:spPr>
+        <p:txBody>
+          <a:bodyPr wrap="square">
+            <a:spAutoFit/>
+          </a:bodyPr>
+          <a:lstStyle/>
+          <a:p>
+            <a:pPr algn="ctr">
+              <a:defRPr sz="1200" b="0">
+                <a:solidFill>
+                  <a:srgbClr val="64748B"/>
+                </a:solidFill>
+                <a:latin typeface="Calibri"/>
+              </a:defRPr>
+            </a:pPr>
+            <a:r>
+              <a:t>Left: top acoustic features (MFCC variance dominates). Right: confidence, correct vs. incorrect calls.</a:t>
+            </a:r>
+          </a:p>
+        </p:txBody>
+      </p:sp>
+    </p:spTree>
+  </p:cSld>
+  <p:clrMapOvr>
+    <a:masterClrMapping/>
+  </p:clrMapOvr>
+</p:sld>
+</file>
+
+<file path=ppt/slides/slide8.xml><?xml version="1.0" encoding="utf-8"?>
+<p:sld xmlns:a="http://schemas.openxmlformats.org/drawingml/2006/main" xmlns:p="http://schemas.openxmlformats.org/presentationml/2006/main" xmlns:r="http://schemas.openxmlformats.org/officeDocument/2006/relationships">
+  <p:cSld>
+    <p:bg>
+      <p:bgPr>
+        <a:solidFill>
+          <a:srgbClr val="F7F9FB"/>
+        </a:solidFill>
+        <a:effectLst/>
+      </p:bgPr>
+    </p:bg>
+    <p:spTree>
+      <p:nvGrpSpPr>
+        <p:cNvPr id="1" name=""/>
+        <p:cNvGrpSpPr/>
+        <p:nvPr/>
+      </p:nvGrpSpPr>
+      <p:grpSpPr/>
+      <p:sp>
+        <p:nvSpPr>
+          <p:cNvPr id="2" name="Rectangle 1"/>
+          <p:cNvSpPr/>
+          <p:nvPr/>
+        </p:nvSpPr>
+        <p:spPr>
+          <a:xfrm>
+            <a:off x="0" y="0"/>
+            <a:ext cx="12191695" cy="1051560"/>
+          </a:xfrm>
+          <a:prstGeom prst="rect">
+            <a:avLst/>
+          </a:prstGeom>
+          <a:solidFill>
+            <a:srgbClr val="0F2942"/>
+          </a:solidFill>
+          <a:ln>
+            <a:noFill/>
+          </a:ln>
+          <a:effectLst/>
+        </p:spPr>
+        <p:style>
+          <a:lnRef idx="1">
+            <a:schemeClr val="accent1"/>
+          </a:lnRef>
+          <a:fillRef idx="3">
+            <a:schemeClr val="accent1"/>
+          </a:fillRef>
+          <a:effectRef idx="2">
+            <a:schemeClr val="accent1"/>
+          </a:effectRef>
+          <a:fontRef idx="minor">
+            <a:schemeClr val="lt1"/>
+          </a:fontRef>
+        </p:style>
+        <p:txBody>
+          <a:bodyPr rtlCol="0" anchor="ctr"/>
+          <a:lstStyle/>
+          <a:p>
+            <a:pPr algn="ctr"/>
+          </a:p>
+        </p:txBody>
+      </p:sp>
+      <p:sp>
+        <p:nvSpPr>
+          <p:cNvPr id="3" name="Rectangle 2"/>
+          <p:cNvSpPr/>
+          <p:nvPr/>
+        </p:nvSpPr>
+        <p:spPr>
+          <a:xfrm>
+            <a:off x="0" y="1051560"/>
+            <a:ext cx="2103120" cy="63500"/>
+          </a:xfrm>
+          <a:prstGeom prst="rect">
+            <a:avLst/>
+          </a:prstGeom>
+          <a:solidFill>
+            <a:srgbClr val="0D9488"/>
+          </a:solidFill>
+          <a:ln>
+            <a:noFill/>
+          </a:ln>
+          <a:effectLst/>
+        </p:spPr>
+        <p:style>
+          <a:lnRef idx="1">
+            <a:schemeClr val="accent1"/>
+          </a:lnRef>
+          <a:fillRef idx="3">
+            <a:schemeClr val="accent1"/>
+          </a:fillRef>
+          <a:effectRef idx="2">
+            <a:schemeClr val="accent1"/>
+          </a:effectRef>
+          <a:fontRef idx="minor">
+            <a:schemeClr val="lt1"/>
+          </a:fontRef>
+        </p:style>
+        <p:txBody>
+          <a:bodyPr rtlCol="0" anchor="ctr"/>
+          <a:lstStyle/>
+          <a:p>
+            <a:pPr algn="ctr"/>
+          </a:p>
+        </p:txBody>
+      </p:sp>
+      <p:sp>
+        <p:nvSpPr>
+          <p:cNvPr id="4" name="TextBox 3"/>
+          <p:cNvSpPr txBox="1"/>
+          <p:nvPr/>
+        </p:nvSpPr>
+        <p:spPr>
+          <a:xfrm>
+            <a:off x="548640" y="146304"/>
+            <a:ext cx="11094415" cy="640080"/>
+          </a:xfrm>
+          <a:prstGeom prst="rect">
+            <a:avLst/>
+          </a:prstGeom>
+          <a:noFill/>
+        </p:spPr>
+        <p:txBody>
+          <a:bodyPr wrap="square">
+            <a:spAutoFit/>
+          </a:bodyPr>
+          <a:lstStyle/>
           <a:p>
             <a:pPr>
-              <a:defRPr sz="2000"/>
-            </a:pPr>
-            <a:r>
-              <a:t>Chose a plain Kafka consumer over Spark Structured Streaming for the enrichment step</a:t>
-            </a:r>
-          </a:p>
+              <a:defRPr sz="3000" b="1">
+                <a:solidFill>
+                  <a:srgbClr val="FFFFFF"/>
+                </a:solidFill>
+                <a:latin typeface="Calibri"/>
+              </a:defRPr>
+            </a:pPr>
+            <a:r>
+              <a:t>Results — accuracy by attack type</a:t>
+            </a:r>
+          </a:p>
+        </p:txBody>
+      </p:sp>
+      <p:sp>
+        <p:nvSpPr>
+          <p:cNvPr id="5" name="TextBox 4"/>
+          <p:cNvSpPr txBox="1"/>
+          <p:nvPr/>
+        </p:nvSpPr>
+        <p:spPr>
+          <a:xfrm>
+            <a:off x="548640" y="658368"/>
+            <a:ext cx="11094415" cy="365760"/>
+          </a:xfrm>
+          <a:prstGeom prst="rect">
+            <a:avLst/>
+          </a:prstGeom>
+          <a:noFill/>
+        </p:spPr>
+        <p:txBody>
+          <a:bodyPr wrap="none">
+            <a:spAutoFit/>
+          </a:bodyPr>
+          <a:lstStyle/>
           <a:p>
             <a:pPr>
-              <a:defRPr sz="2000"/>
-            </a:pPr>
-            <a:r>
-              <a:t>  (avoids the spark-sql-kafka connector for a comparatively light per-message workload)</a:t>
-            </a:r>
-          </a:p>
+              <a:defRPr sz="1300">
+                <a:solidFill>
+                  <a:srgbClr val="CBD5E1"/>
+                </a:solidFill>
+                <a:latin typeface="Calibri"/>
+              </a:defRPr>
+            </a:pPr>
+            <a:r>
+              <a:t>Streamed eval predictions, near-perfect on most TTS/VC systems</a:t>
+            </a:r>
+          </a:p>
+        </p:txBody>
+      </p:sp>
+      <p:sp>
+        <p:nvSpPr>
+          <p:cNvPr id="6" name="TextBox 5"/>
+          <p:cNvSpPr txBox="1"/>
+          <p:nvPr/>
+        </p:nvSpPr>
+        <p:spPr>
+          <a:xfrm>
+            <a:off x="11368735" y="6473952"/>
+            <a:ext cx="548640" cy="292608"/>
+          </a:xfrm>
+          <a:prstGeom prst="rect">
+            <a:avLst/>
+          </a:prstGeom>
+          <a:noFill/>
+        </p:spPr>
+        <p:txBody>
+          <a:bodyPr wrap="square">
+            <a:spAutoFit/>
+          </a:bodyPr>
+          <a:lstStyle/>
+          <a:p>
+            <a:pPr algn="r">
+              <a:defRPr sz="1100" b="0">
+                <a:solidFill>
+                  <a:srgbClr val="64748B"/>
+                </a:solidFill>
+                <a:latin typeface="Calibri"/>
+              </a:defRPr>
+            </a:pPr>
+            <a:r>
+              <a:t>7</a:t>
+            </a:r>
+          </a:p>
+        </p:txBody>
+      </p:sp>
+      <p:pic>
+        <p:nvPicPr>
+          <p:cNvPr id="7" name="Picture 6" descr="accuracy_by_attack.png"/>
+          <p:cNvPicPr>
+            <a:picLocks noChangeAspect="1"/>
+          </p:cNvPicPr>
+          <p:nvPr/>
+        </p:nvPicPr>
+        <p:blipFill>
+          <a:blip r:embed="rId2"/>
+          <a:stretch>
+            <a:fillRect/>
+          </a:stretch>
+        </p:blipFill>
+        <p:spPr>
+          <a:xfrm>
+            <a:off x="1203807" y="1417320"/>
+            <a:ext cx="9784080" cy="4892040"/>
+          </a:xfrm>
+          <a:prstGeom prst="rect">
+            <a:avLst/>
+          </a:prstGeom>
+        </p:spPr>
+      </p:pic>
+    </p:spTree>
+  </p:cSld>
+  <p:clrMapOvr>
+    <a:masterClrMapping/>
+  </p:clrMapOvr>
+</p:sld>
+</file>
+
+<file path=ppt/slides/slide9.xml><?xml version="1.0" encoding="utf-8"?>
+<p:sld xmlns:a="http://schemas.openxmlformats.org/drawingml/2006/main" xmlns:p="http://schemas.openxmlformats.org/presentationml/2006/main" xmlns:r="http://schemas.openxmlformats.org/officeDocument/2006/relationships">
+  <p:cSld>
+    <p:bg>
+      <p:bgPr>
+        <a:solidFill>
+          <a:srgbClr val="F7F9FB"/>
+        </a:solidFill>
+        <a:effectLst/>
+      </p:bgPr>
+    </p:bg>
+    <p:spTree>
+      <p:nvGrpSpPr>
+        <p:cNvPr id="1" name=""/>
+        <p:cNvGrpSpPr/>
+        <p:nvPr/>
+      </p:nvGrpSpPr>
+      <p:grpSpPr/>
+      <p:sp>
+        <p:nvSpPr>
+          <p:cNvPr id="2" name="Rectangle 1"/>
+          <p:cNvSpPr/>
+          <p:nvPr/>
+        </p:nvSpPr>
+        <p:spPr>
+          <a:xfrm>
+            <a:off x="0" y="0"/>
+            <a:ext cx="12191695" cy="1051560"/>
+          </a:xfrm>
+          <a:prstGeom prst="rect">
+            <a:avLst/>
+          </a:prstGeom>
+          <a:solidFill>
+            <a:srgbClr val="0F2942"/>
+          </a:solidFill>
+          <a:ln>
+            <a:noFill/>
+          </a:ln>
+          <a:effectLst/>
+        </p:spPr>
+        <p:style>
+          <a:lnRef idx="1">
+            <a:schemeClr val="accent1"/>
+          </a:lnRef>
+          <a:fillRef idx="3">
+            <a:schemeClr val="accent1"/>
+          </a:fillRef>
+          <a:effectRef idx="2">
+            <a:schemeClr val="accent1"/>
+          </a:effectRef>
+          <a:fontRef idx="minor">
+            <a:schemeClr val="lt1"/>
+          </a:fontRef>
+        </p:style>
+        <p:txBody>
+          <a:bodyPr rtlCol="0" anchor="ctr"/>
+          <a:lstStyle/>
+          <a:p>
+            <a:pPr algn="ctr"/>
+          </a:p>
+        </p:txBody>
+      </p:sp>
+      <p:sp>
+        <p:nvSpPr>
+          <p:cNvPr id="3" name="Rectangle 2"/>
+          <p:cNvSpPr/>
+          <p:nvPr/>
+        </p:nvSpPr>
+        <p:spPr>
+          <a:xfrm>
+            <a:off x="0" y="1051560"/>
+            <a:ext cx="2103120" cy="63500"/>
+          </a:xfrm>
+          <a:prstGeom prst="rect">
+            <a:avLst/>
+          </a:prstGeom>
+          <a:solidFill>
+            <a:srgbClr val="0D9488"/>
+          </a:solidFill>
+          <a:ln>
+            <a:noFill/>
+          </a:ln>
+          <a:effectLst/>
+        </p:spPr>
+        <p:style>
+          <a:lnRef idx="1">
+            <a:schemeClr val="accent1"/>
+          </a:lnRef>
+          <a:fillRef idx="3">
+            <a:schemeClr val="accent1"/>
+          </a:fillRef>
+          <a:effectRef idx="2">
+            <a:schemeClr val="accent1"/>
+          </a:effectRef>
+          <a:fontRef idx="minor">
+            <a:schemeClr val="lt1"/>
+          </a:fontRef>
+        </p:style>
+        <p:txBody>
+          <a:bodyPr rtlCol="0" anchor="ctr"/>
+          <a:lstStyle/>
+          <a:p>
+            <a:pPr algn="ctr"/>
+          </a:p>
+        </p:txBody>
+      </p:sp>
+      <p:sp>
+        <p:nvSpPr>
+          <p:cNvPr id="4" name="TextBox 3"/>
+          <p:cNvSpPr txBox="1"/>
+          <p:nvPr/>
+        </p:nvSpPr>
+        <p:spPr>
+          <a:xfrm>
+            <a:off x="548640" y="146304"/>
+            <a:ext cx="11094415" cy="640080"/>
+          </a:xfrm>
+          <a:prstGeom prst="rect">
+            <a:avLst/>
+          </a:prstGeom>
+          <a:noFill/>
+        </p:spPr>
+        <p:txBody>
+          <a:bodyPr wrap="square">
+            <a:spAutoFit/>
+          </a:bodyPr>
+          <a:lstStyle/>
           <a:p>
             <a:pPr>
-              <a:defRPr sz="2000"/>
-            </a:pPr>
-            <a:r>
-              <a:t>Kept Python end-to-end (not Scala) since the feature-extraction library is Python-only</a:t>
-            </a:r>
-          </a:p>
+              <a:defRPr sz="3000" b="1">
+                <a:solidFill>
+                  <a:srgbClr val="FFFFFF"/>
+                </a:solidFill>
+                <a:latin typeface="Calibri"/>
+              </a:defRPr>
+            </a:pPr>
+            <a:r>
+              <a:t>AI capability 2 — embeddings &amp; semantic search</a:t>
+            </a:r>
+          </a:p>
+        </p:txBody>
+      </p:sp>
+      <p:sp>
+        <p:nvSpPr>
+          <p:cNvPr id="5" name="TextBox 4"/>
+          <p:cNvSpPr txBox="1"/>
+          <p:nvPr/>
+        </p:nvSpPr>
+        <p:spPr>
+          <a:xfrm>
+            <a:off x="11368735" y="6473952"/>
+            <a:ext cx="548640" cy="292608"/>
+          </a:xfrm>
+          <a:prstGeom prst="rect">
+            <a:avLst/>
+          </a:prstGeom>
+          <a:noFill/>
+        </p:spPr>
+        <p:txBody>
+          <a:bodyPr wrap="square">
+            <a:spAutoFit/>
+          </a:bodyPr>
+          <a:lstStyle/>
+          <a:p>
+            <a:pPr algn="r">
+              <a:defRPr sz="1100" b="0">
+                <a:solidFill>
+                  <a:srgbClr val="64748B"/>
+                </a:solidFill>
+                <a:latin typeface="Calibri"/>
+              </a:defRPr>
+            </a:pPr>
+            <a:r>
+              <a:t>8</a:t>
+            </a:r>
+          </a:p>
+        </p:txBody>
+      </p:sp>
+      <p:sp>
+        <p:nvSpPr>
+          <p:cNvPr id="6" name="TextBox 5"/>
+          <p:cNvSpPr txBox="1"/>
+          <p:nvPr/>
+        </p:nvSpPr>
+        <p:spPr>
+          <a:xfrm>
+            <a:off x="548640" y="1417320"/>
+            <a:ext cx="11094415" cy="4983480"/>
+          </a:xfrm>
+          <a:prstGeom prst="rect">
+            <a:avLst/>
+          </a:prstGeom>
+          <a:noFill/>
+        </p:spPr>
+        <p:txBody>
+          <a:bodyPr wrap="square">
+            <a:spAutoFit/>
+          </a:bodyPr>
+          <a:lstStyle/>
           <a:p>
             <a:pPr>
-              <a:defRPr sz="2000"/>
-            </a:pPr>
-            <a:r>
-              <a:t>Speaker-disjoint train/dev split (not random) to avoid inflating accuracy via leakage</a:t>
+              <a:spcAft>
+                <a:spcPts val="1000"/>
+              </a:spcAft>
+              <a:defRPr sz="1900">
+                <a:solidFill>
+                  <a:srgbClr val="1A202C"/>
+                </a:solidFill>
+                <a:latin typeface="Calibri"/>
+              </a:defRPr>
+            </a:pPr>
+            <a:r>
+              <a:t>•  The same acoustic feature vectors double as embeddings — no separate embedding model</a:t>
+            </a:r>
+          </a:p>
+          <a:p>
+            <a:pPr>
+              <a:spcAft>
+                <a:spcPts val="1000"/>
+              </a:spcAft>
+              <a:defRPr sz="1900">
+                <a:solidFill>
+                  <a:srgbClr val="1A202C"/>
+                </a:solidFill>
+                <a:latin typeface="Calibri"/>
+              </a:defRPr>
+            </a:pPr>
+            <a:r>
+              <a:t>•  Standardized (zero mean, unit variance) so cosine similarity isn't dominated by whichever</a:t>
+            </a:r>
+          </a:p>
+          <a:p>
+            <a:pPr lvl="1">
+              <a:spcAft>
+                <a:spcPts val="1000"/>
+              </a:spcAft>
+              <a:defRPr sz="1600">
+                <a:solidFill>
+                  <a:srgbClr val="64748B"/>
+                </a:solidFill>
+                <a:latin typeface="Calibri"/>
+              </a:defRPr>
+            </a:pPr>
+            <a:r>
+              <a:t>–  feature happens to have the largest raw scale</a:t>
+            </a:r>
+          </a:p>
+          <a:p>
+            <a:pPr>
+              <a:spcAft>
+                <a:spcPts val="1000"/>
+              </a:spcAft>
+              <a:defRPr sz="1900">
+                <a:solidFill>
+                  <a:srgbClr val="1A202C"/>
+                </a:solidFill>
+                <a:latin typeface="Calibri"/>
+              </a:defRPr>
+            </a:pPr>
+            <a:r>
+              <a:t>•  Indexed into Elasticsearch as dense_vector fields, added to the existing index in place</a:t>
+            </a:r>
+          </a:p>
+          <a:p>
+            <a:pPr lvl="1">
+              <a:spcAft>
+                <a:spcPts val="1000"/>
+              </a:spcAft>
+              <a:defRPr sz="1600">
+                <a:solidFill>
+                  <a:srgbClr val="64748B"/>
+                </a:solidFill>
+                <a:latin typeface="Calibri"/>
+              </a:defRPr>
+            </a:pPr>
+            <a:r>
+              <a:t>–  (a mapping update, not a reindex — the 50k+ documents were already there)</a:t>
+            </a:r>
+          </a:p>
+          <a:p>
+            <a:pPr>
+              <a:spcAft>
+                <a:spcPts val="1000"/>
+              </a:spcAft>
+              <a:defRPr sz="1900">
+                <a:solidFill>
+                  <a:srgbClr val="1A202C"/>
+                </a:solidFill>
+                <a:latin typeface="Calibri"/>
+              </a:defRPr>
+            </a:pPr>
+            <a:r>
+              <a:t>•  Powers /classify's "most acoustically similar training clips" — k-NN search, playable</a:t>
+            </a:r>
+          </a:p>
+          <a:p>
+            <a:pPr lvl="1">
+              <a:spcAft>
+                <a:spcPts val="1000"/>
+              </a:spcAft>
+              <a:defRPr sz="1600">
+                <a:solidFill>
+                  <a:srgbClr val="64748B"/>
+                </a:solidFill>
+                <a:latin typeface="Calibri"/>
+              </a:defRPr>
+            </a:pPr>
+            <a:r>
+              <a:t>–  in the browser, replacing a keyword match with genuine semantic search</a:t>
             </a:r>
           </a:p>
         </p:txBody>

--- a/docs/slides/slides.pptx
+++ b/docs/slides/slides.pptx
@@ -18,6 +18,7 @@
     <p:sldId id="266" r:id="rId17"/>
     <p:sldId id="267" r:id="rId18"/>
     <p:sldId id="268" r:id="rId19"/>
+    <p:sldId id="269" r:id="rId20"/>
   </p:sldIdLst>
   <p:sldSz cx="12191695" cy="6858000" type="screen4x3"/>
   <p:notesSz cx="6858000" cy="9144000"/>
@@ -3449,7 +3450,7 @@
               </a:defRPr>
             </a:pPr>
             <a:r>
-              <a:t>AI capability 3 — streaming enrichment</a:t>
+              <a:t>AI capability 2 — embeddings &amp; semantic search</a:t>
             </a:r>
           </a:p>
         </p:txBody>
@@ -3457,42 +3458,6 @@
       <p:sp>
         <p:nvSpPr>
           <p:cNvPr id="5" name="TextBox 4"/>
-          <p:cNvSpPr txBox="1"/>
-          <p:nvPr/>
-        </p:nvSpPr>
-        <p:spPr>
-          <a:xfrm>
-            <a:off x="548640" y="658368"/>
-            <a:ext cx="11094415" cy="365760"/>
-          </a:xfrm>
-          <a:prstGeom prst="rect">
-            <a:avLst/>
-          </a:prstGeom>
-          <a:noFill/>
-        </p:spPr>
-        <p:txBody>
-          <a:bodyPr wrap="none">
-            <a:spAutoFit/>
-          </a:bodyPr>
-          <a:lstStyle/>
-          <a:p>
-            <a:pPr>
-              <a:defRPr sz="1300">
-                <a:solidFill>
-                  <a:srgbClr val="CBD5E1"/>
-                </a:solidFill>
-                <a:latin typeface="Calibri"/>
-              </a:defRPr>
-            </a:pPr>
-            <a:r>
-              <a:t>Kafka producer/consumer, near-real-time scoring</a:t>
-            </a:r>
-          </a:p>
-        </p:txBody>
-      </p:sp>
-      <p:sp>
-        <p:nvSpPr>
-          <p:cNvPr id="6" name="TextBox 5"/>
           <p:cNvSpPr txBox="1"/>
           <p:nvPr/>
         </p:nvSpPr>
@@ -3528,7 +3493,7 @@
       </p:sp>
       <p:sp>
         <p:nvSpPr>
-          <p:cNvPr id="7" name="TextBox 6"/>
+          <p:cNvPr id="6" name="TextBox 5"/>
           <p:cNvSpPr txBox="1"/>
           <p:nvPr/>
         </p:nvSpPr>
@@ -3550,7 +3515,7 @@
           <a:p>
             <a:pPr>
               <a:spcAft>
-                <a:spcPts val="1000"/>
+                <a:spcPts val="1200"/>
               </a:spcAft>
               <a:defRPr sz="1900">
                 <a:solidFill>
@@ -3560,13 +3525,13 @@
               </a:defRPr>
             </a:pPr>
             <a:r>
-              <a:t>•  Producer replays eval-set utterance events (a MinIO key, not the audio itself)</a:t>
+              <a:t>•  The same acoustic feature vectors double as embeddings — no separate embedding model needed.</a:t>
             </a:r>
           </a:p>
           <a:p>
             <a:pPr>
               <a:spcAft>
-                <a:spcPts val="1000"/>
+                <a:spcPts val="1200"/>
               </a:spcAft>
               <a:defRPr sz="1900">
                 <a:solidFill>
@@ -3576,29 +3541,13 @@
               </a:defRPr>
             </a:pPr>
             <a:r>
-              <a:t>•  Consumer fetches the clip, extracts features, scores it at the deployed EER threshold,</a:t>
-            </a:r>
-          </a:p>
-          <a:p>
-            <a:pPr lvl="1">
-              <a:spcAft>
-                <a:spcPts val="1000"/>
-              </a:spcAft>
-              <a:defRPr sz="1600">
-                <a:solidFill>
-                  <a:srgbClr val="64748B"/>
-                </a:solidFill>
-                <a:latin typeface="Calibri"/>
-              </a:defRPr>
-            </a:pPr>
-            <a:r>
-              <a:t>–  and writes an enriched prediction to Elasticsearch — one document per utterance, live</a:t>
+              <a:t>•  Standardized (zero mean, unit variance) so cosine similarity isn't dominated by whichever feature happens to have the largest raw scale.</a:t>
             </a:r>
           </a:p>
           <a:p>
             <a:pPr>
               <a:spcAft>
-                <a:spcPts val="1000"/>
+                <a:spcPts val="1200"/>
               </a:spcAft>
               <a:defRPr sz="1900">
                 <a:solidFill>
@@ -3608,29 +3557,13 @@
               </a:defRPr>
             </a:pPr>
             <a:r>
-              <a:t>•  Same feature-extraction and model code as the batch job and the web app — one</a:t>
-            </a:r>
-          </a:p>
-          <a:p>
-            <a:pPr lvl="1">
-              <a:spcAft>
-                <a:spcPts val="1000"/>
-              </a:spcAft>
-              <a:defRPr sz="1600">
-                <a:solidFill>
-                  <a:srgbClr val="64748B"/>
-                </a:solidFill>
-                <a:latin typeface="Calibri"/>
-              </a:defRPr>
-            </a:pPr>
-            <a:r>
-              <a:t>–  implementation applied three ways, not three separate things to maintain and defend</a:t>
+              <a:t>•  Indexed into Elasticsearch as dense_vector fields, added to the existing index in place (a mapping update, not a reindex — the 50k+ documents were already there).</a:t>
             </a:r>
           </a:p>
           <a:p>
             <a:pPr>
               <a:spcAft>
-                <a:spcPts val="1000"/>
+                <a:spcPts val="1200"/>
               </a:spcAft>
               <a:defRPr sz="1900">
                 <a:solidFill>
@@ -3640,7 +3573,7 @@
               </a:defRPr>
             </a:pPr>
             <a:r>
-              <a:t>•  A named consumer group tracks offset, so re-running resumes instead of re-scoring</a:t>
+              <a:t>•  Powers /classify's "most acoustically similar training clips" — k-NN search, playable in the browser, replacing a keyword match with genuine semantic search.</a:t>
             </a:r>
           </a:p>
         </p:txBody>
@@ -3790,7 +3723,7 @@
               </a:defRPr>
             </a:pPr>
             <a:r>
-              <a:t>Live demo</a:t>
+              <a:t>AI capability 3 — streaming enrichment</a:t>
             </a:r>
           </a:p>
         </p:txBody>
@@ -3798,6 +3731,42 @@
       <p:sp>
         <p:nvSpPr>
           <p:cNvPr id="5" name="TextBox 4"/>
+          <p:cNvSpPr txBox="1"/>
+          <p:nvPr/>
+        </p:nvSpPr>
+        <p:spPr>
+          <a:xfrm>
+            <a:off x="548640" y="658368"/>
+            <a:ext cx="11094415" cy="365760"/>
+          </a:xfrm>
+          <a:prstGeom prst="rect">
+            <a:avLst/>
+          </a:prstGeom>
+          <a:noFill/>
+        </p:spPr>
+        <p:txBody>
+          <a:bodyPr wrap="none">
+            <a:spAutoFit/>
+          </a:bodyPr>
+          <a:lstStyle/>
+          <a:p>
+            <a:pPr>
+              <a:defRPr sz="1300">
+                <a:solidFill>
+                  <a:srgbClr val="CBD5E1"/>
+                </a:solidFill>
+                <a:latin typeface="Calibri"/>
+              </a:defRPr>
+            </a:pPr>
+            <a:r>
+              <a:t>Kafka producer/consumer, near-real-time scoring</a:t>
+            </a:r>
+          </a:p>
+        </p:txBody>
+      </p:sp>
+      <p:sp>
+        <p:nvSpPr>
+          <p:cNvPr id="6" name="TextBox 5"/>
           <p:cNvSpPr txBox="1"/>
           <p:nvPr/>
         </p:nvSpPr>
@@ -3833,7 +3802,7 @@
       </p:sp>
       <p:sp>
         <p:nvSpPr>
-          <p:cNvPr id="6" name="TextBox 5"/>
+          <p:cNvPr id="7" name="TextBox 6"/>
           <p:cNvSpPr txBox="1"/>
           <p:nvPr/>
         </p:nvSpPr>
@@ -3855,7 +3824,7 @@
           <a:p>
             <a:pPr>
               <a:spcAft>
-                <a:spcPts val="1000"/>
+                <a:spcPts val="1200"/>
               </a:spcAft>
               <a:defRPr sz="1900">
                 <a:solidFill>
@@ -3865,29 +3834,13 @@
               </a:defRPr>
             </a:pPr>
             <a:r>
-              <a:t>•  /classify — upload a clip or record live from the microphone (captured via the Web</a:t>
-            </a:r>
-          </a:p>
-          <a:p>
-            <a:pPr lvl="1">
-              <a:spcAft>
-                <a:spcPts val="1000"/>
-              </a:spcAft>
-              <a:defRPr sz="1600">
-                <a:solidFill>
-                  <a:srgbClr val="64748B"/>
-                </a:solidFill>
-                <a:latin typeface="Calibri"/>
-              </a:defRPr>
-            </a:pPr>
-            <a:r>
-              <a:t>–  Audio API, encoded to WAV client-side — no server changes needed for live recording)</a:t>
+              <a:t>•  Producer replays eval-set utterance events (a MinIO key, not the audio itself).</a:t>
             </a:r>
           </a:p>
           <a:p>
             <a:pPr>
               <a:spcAft>
-                <a:spcPts val="1000"/>
+                <a:spcPts val="1200"/>
               </a:spcAft>
               <a:defRPr sz="1900">
                 <a:solidFill>
@@ -3897,29 +3850,13 @@
               </a:defRPr>
             </a:pPr>
             <a:r>
-              <a:t>•  Returns Human / AI-generated + confidence, plus the 5 most similar training clips —</a:t>
-            </a:r>
-          </a:p>
-          <a:p>
-            <a:pPr lvl="1">
-              <a:spcAft>
-                <a:spcPts val="1000"/>
-              </a:spcAft>
-              <a:defRPr sz="1600">
-                <a:solidFill>
-                  <a:srgbClr val="64748B"/>
-                </a:solidFill>
-                <a:latin typeface="Calibri"/>
-              </a:defRPr>
-            </a:pPr>
-            <a:r>
-              <a:t>–  each one playable right in the results, so you can hear what "similar" sounds like</a:t>
+              <a:t>•  Consumer fetches the clip, extracts features, scores it at the deployed EER threshold, and writes an enriched prediction to Elasticsearch — one document per utterance, live.</a:t>
             </a:r>
           </a:p>
           <a:p>
             <a:pPr>
               <a:spcAft>
-                <a:spcPts val="1000"/>
+                <a:spcPts val="1200"/>
               </a:spcAft>
               <a:defRPr sz="1900">
                 <a:solidFill>
@@ -3929,23 +3866,23 @@
               </a:defRPr>
             </a:pPr>
             <a:r>
-              <a:t>•  /dashboard — live Elasticsearch aggregations: model comparison, threshold trade-off,</a:t>
-            </a:r>
-          </a:p>
-          <a:p>
-            <a:pPr lvl="1">
+              <a:t>•  Same feature-extraction and model code as the batch job and the web app — one implementation applied three ways, not three separate things to maintain and defend.</a:t>
+            </a:r>
+          </a:p>
+          <a:p>
+            <a:pPr>
               <a:spcAft>
-                <a:spcPts val="1000"/>
+                <a:spcPts val="1200"/>
               </a:spcAft>
-              <a:defRPr sz="1600">
-                <a:solidFill>
-                  <a:srgbClr val="64748B"/>
-                </a:solidFill>
-                <a:latin typeface="Calibri"/>
-              </a:defRPr>
-            </a:pPr>
-            <a:r>
-              <a:t>–  ROC curve, confusion matrix, feature importance, confidence calibration</a:t>
+              <a:defRPr sz="1900">
+                <a:solidFill>
+                  <a:srgbClr val="1A202C"/>
+                </a:solidFill>
+                <a:latin typeface="Calibri"/>
+              </a:defRPr>
+            </a:pPr>
+            <a:r>
+              <a:t>•  A named consumer group tracks offset, so re-running resumes instead of re-scoring.</a:t>
             </a:r>
           </a:p>
         </p:txBody>
@@ -4095,7 +4032,7 @@
               </a:defRPr>
             </a:pPr>
             <a:r>
-              <a:t>Challenges &amp; trade-offs</a:t>
+              <a:t>Live demo</a:t>
             </a:r>
           </a:p>
         </p:txBody>
@@ -4160,9 +4097,9 @@
           <a:p>
             <a:pPr>
               <a:spcAft>
-                <a:spcPts val="1000"/>
+                <a:spcPts val="1200"/>
               </a:spcAft>
-              <a:defRPr sz="1700">
+              <a:defRPr sz="1800">
                 <a:solidFill>
                   <a:srgbClr val="1A202C"/>
                 </a:solidFill>
@@ -4170,31 +4107,15 @@
               </a:defRPr>
             </a:pPr>
             <a:r>
-              <a:t>•  Windows + Spark: worker Python resolution, path-with-spaces, and a Docker Desktop</a:t>
-            </a:r>
-          </a:p>
-          <a:p>
-            <a:pPr lvl="1">
-              <a:spcAft>
-                <a:spcPts val="1000"/>
-              </a:spcAft>
-              <a:defRPr sz="1400">
-                <a:solidFill>
-                  <a:srgbClr val="64748B"/>
-                </a:solidFill>
-                <a:latin typeface="Calibri"/>
-              </a:defRPr>
-            </a:pPr>
-            <a:r>
-              <a:t>–  networking quirk all broke Spark's driver↔executor RPC — diagnosed and fixed, not hidden</a:t>
+              <a:t>•  /classify — upload a clip or record live from the microphone (captured via the Web Audio API, encoded to WAV client-side — no server changes needed for live recording).</a:t>
             </a:r>
           </a:p>
           <a:p>
             <a:pPr>
               <a:spcAft>
-                <a:spcPts val="1000"/>
+                <a:spcPts val="1200"/>
               </a:spcAft>
-              <a:defRPr sz="1700">
+              <a:defRPr sz="1800">
                 <a:solidFill>
                   <a:srgbClr val="1A202C"/>
                 </a:solidFill>
@@ -4202,31 +4123,15 @@
               </a:defRPr>
             </a:pPr>
             <a:r>
-              <a:t>•  The EER threshold trades some spoof recall for bonafide recall — a deliberate choice,</a:t>
-            </a:r>
-          </a:p>
-          <a:p>
-            <a:pPr lvl="1">
-              <a:spcAft>
-                <a:spcPts val="1000"/>
-              </a:spcAft>
-              <a:defRPr sz="1400">
-                <a:solidFill>
-                  <a:srgbClr val="64748B"/>
-                </a:solidFill>
-                <a:latin typeface="Calibri"/>
-              </a:defRPr>
-            </a:pPr>
-            <a:r>
-              <a:t>–  not a free win: no single threshold maximizes both on an imbalanced dataset</a:t>
+              <a:t>•  Returns Human / AI-generated + confidence, plus the 5 most similar training clips, each one playable right in the results, so you can hear what "similar" sounds like.</a:t>
             </a:r>
           </a:p>
           <a:p>
             <a:pPr>
               <a:spcAft>
-                <a:spcPts val="1000"/>
+                <a:spcPts val="1200"/>
               </a:spcAft>
-              <a:defRPr sz="1700">
+              <a:defRPr sz="1800">
                 <a:solidFill>
                   <a:srgbClr val="1A202C"/>
                 </a:solidFill>
@@ -4234,15 +4139,151 @@
               </a:defRPr>
             </a:pPr>
             <a:r>
-              <a:t>•  Embedding is the classifier's own feature vector, not a separate pretrained audio</a:t>
-            </a:r>
-          </a:p>
-          <a:p>
-            <a:pPr lvl="1">
-              <a:spcAft>
-                <a:spcPts val="1000"/>
-              </a:spcAft>
-              <a:defRPr sz="1400">
+              <a:t>•  /dashboard — live Elasticsearch aggregations: model comparison, threshold trade-off, ROC curve, confusion matrix, feature importance, confidence calibration.</a:t>
+            </a:r>
+          </a:p>
+        </p:txBody>
+      </p:sp>
+      <p:sp>
+        <p:nvSpPr>
+          <p:cNvPr id="7" name="Rounded Rectangle 6">
+            <a:hlinkClick r:id="rId2"/>
+          </p:cNvPr>
+          <p:cNvSpPr/>
+          <p:nvPr/>
+        </p:nvSpPr>
+        <p:spPr>
+          <a:xfrm>
+            <a:off x="548640" y="5257800"/>
+            <a:ext cx="3291840" cy="594360"/>
+          </a:xfrm>
+          <a:prstGeom prst="roundRect">
+            <a:avLst>
+              <a:gd name="adj" fmla="val 6000"/>
+            </a:avLst>
+          </a:prstGeom>
+          <a:solidFill>
+            <a:srgbClr val="0D9488"/>
+          </a:solidFill>
+          <a:ln>
+            <a:noFill/>
+          </a:ln>
+          <a:effectLst/>
+        </p:spPr>
+        <p:style>
+          <a:lnRef idx="1">
+            <a:schemeClr val="accent1"/>
+          </a:lnRef>
+          <a:fillRef idx="3">
+            <a:schemeClr val="accent1"/>
+          </a:fillRef>
+          <a:effectRef idx="2">
+            <a:schemeClr val="accent1"/>
+          </a:effectRef>
+          <a:fontRef idx="minor">
+            <a:schemeClr val="lt1"/>
+          </a:fontRef>
+        </p:style>
+        <p:txBody>
+          <a:bodyPr rtlCol="0" anchor="ctr" wrap="square"/>
+          <a:lstStyle/>
+          <a:p>
+            <a:pPr algn="ctr">
+              <a:defRPr sz="1700" b="1">
+                <a:solidFill>
+                  <a:srgbClr val="FFFFFF"/>
+                </a:solidFill>
+                <a:latin typeface="Calibri"/>
+              </a:defRPr>
+            </a:pPr>
+            <a:r>
+              <a:t>▶  Open /classify</a:t>
+            </a:r>
+          </a:p>
+        </p:txBody>
+      </p:sp>
+      <p:sp>
+        <p:nvSpPr>
+          <p:cNvPr id="8" name="Rounded Rectangle 7">
+            <a:hlinkClick r:id="rId3"/>
+          </p:cNvPr>
+          <p:cNvSpPr/>
+          <p:nvPr/>
+        </p:nvSpPr>
+        <p:spPr>
+          <a:xfrm>
+            <a:off x="4114800" y="5257800"/>
+            <a:ext cx="3291840" cy="594360"/>
+          </a:xfrm>
+          <a:prstGeom prst="roundRect">
+            <a:avLst>
+              <a:gd name="adj" fmla="val 6000"/>
+            </a:avLst>
+          </a:prstGeom>
+          <a:solidFill>
+            <a:srgbClr val="2B6CB0"/>
+          </a:solidFill>
+          <a:ln>
+            <a:noFill/>
+          </a:ln>
+          <a:effectLst/>
+        </p:spPr>
+        <p:style>
+          <a:lnRef idx="1">
+            <a:schemeClr val="accent1"/>
+          </a:lnRef>
+          <a:fillRef idx="3">
+            <a:schemeClr val="accent1"/>
+          </a:fillRef>
+          <a:effectRef idx="2">
+            <a:schemeClr val="accent1"/>
+          </a:effectRef>
+          <a:fontRef idx="minor">
+            <a:schemeClr val="lt1"/>
+          </a:fontRef>
+        </p:style>
+        <p:txBody>
+          <a:bodyPr rtlCol="0" anchor="ctr" wrap="square"/>
+          <a:lstStyle/>
+          <a:p>
+            <a:pPr algn="ctr">
+              <a:defRPr sz="1700" b="1">
+                <a:solidFill>
+                  <a:srgbClr val="FFFFFF"/>
+                </a:solidFill>
+                <a:latin typeface="Calibri"/>
+              </a:defRPr>
+            </a:pPr>
+            <a:r>
+              <a:t>▶  Open /dashboard</a:t>
+            </a:r>
+          </a:p>
+        </p:txBody>
+      </p:sp>
+      <p:sp>
+        <p:nvSpPr>
+          <p:cNvPr id="9" name="TextBox 8"/>
+          <p:cNvSpPr txBox="1"/>
+          <p:nvPr/>
+        </p:nvSpPr>
+        <p:spPr>
+          <a:xfrm>
+            <a:off x="548640" y="5989320"/>
+            <a:ext cx="11094415" cy="365760"/>
+          </a:xfrm>
+          <a:prstGeom prst="rect">
+            <a:avLst/>
+          </a:prstGeom>
+          <a:noFill/>
+        </p:spPr>
+        <p:txBody>
+          <a:bodyPr wrap="square">
+            <a:spAutoFit/>
+          </a:bodyPr>
+          <a:lstStyle/>
+          <a:p>
+            <a:pPr algn="l">
+              <a:defRPr sz="1100" b="0">
                 <a:solidFill>
                   <a:srgbClr val="64748B"/>
                 </a:solidFill>
@@ -4250,39 +4291,7 @@
               </a:defRPr>
             </a:pPr>
             <a:r>
-              <a:t>–  embedding model — keeps the semantic-search capability fully self-contained</a:t>
-            </a:r>
-          </a:p>
-          <a:p>
-            <a:pPr>
-              <a:spcAft>
-                <a:spcPts val="1000"/>
-              </a:spcAft>
-              <a:defRPr sz="1700">
-                <a:solidFill>
-                  <a:srgbClr val="1A202C"/>
-                </a:solidFill>
-                <a:latin typeface="Calibri"/>
-              </a:defRPr>
-            </a:pPr>
-            <a:r>
-              <a:t>•  Kept Python end-to-end (not Scala) since the feature-extraction library is Python-only</a:t>
-            </a:r>
-          </a:p>
-          <a:p>
-            <a:pPr>
-              <a:spcAft>
-                <a:spcPts val="1000"/>
-              </a:spcAft>
-              <a:defRPr sz="1700">
-                <a:solidFill>
-                  <a:srgbClr val="1A202C"/>
-                </a:solidFill>
-                <a:latin typeface="Calibri"/>
-              </a:defRPr>
-            </a:pPr>
-            <a:r>
-              <a:t>•  Speaker-disjoint train/dev split (not random) to avoid inflating accuracy via leakage</a:t>
+              <a:t>Links open localhost:5000 — click while presenting from the machine running the app (see README.md).</a:t>
             </a:r>
           </a:p>
         </p:txBody>
@@ -4322,7 +4331,7 @@
         <p:spPr>
           <a:xfrm>
             <a:off x="0" y="0"/>
-            <a:ext cx="12191695" cy="6858000"/>
+            <a:ext cx="12191695" cy="1051560"/>
           </a:xfrm>
           <a:prstGeom prst="rect">
             <a:avLst/>
@@ -4365,8 +4374,8 @@
         </p:nvSpPr>
         <p:spPr>
           <a:xfrm>
-            <a:off x="0" y="3383280"/>
-            <a:ext cx="12191695" cy="63500"/>
+            <a:off x="0" y="1051560"/>
+            <a:ext cx="2103120" cy="63500"/>
           </a:xfrm>
           <a:prstGeom prst="rect">
             <a:avLst/>
@@ -4409,8 +4418,8 @@
         </p:nvSpPr>
         <p:spPr>
           <a:xfrm>
-            <a:off x="914400" y="2651760"/>
-            <a:ext cx="10332720" cy="914400"/>
+            <a:off x="548640" y="146304"/>
+            <a:ext cx="11094415" cy="640080"/>
           </a:xfrm>
           <a:prstGeom prst="rect">
             <a:avLst/>
@@ -4423,8 +4432,8 @@
           </a:bodyPr>
           <a:lstStyle/>
           <a:p>
-            <a:pPr algn="l">
-              <a:defRPr sz="4000" b="1">
+            <a:pPr>
+              <a:defRPr sz="3000" b="1">
                 <a:solidFill>
                   <a:srgbClr val="FFFFFF"/>
                 </a:solidFill>
@@ -4432,7 +4441,7 @@
               </a:defRPr>
             </a:pPr>
             <a:r>
-              <a:t>Questions?</a:t>
+              <a:t>Challenges &amp; trade-offs</a:t>
             </a:r>
           </a:p>
         </p:txBody>
@@ -4445,8 +4454,8 @@
         </p:nvSpPr>
         <p:spPr>
           <a:xfrm>
-            <a:off x="914400" y="3566160"/>
-            <a:ext cx="10332720" cy="457200"/>
+            <a:off x="11368735" y="6473952"/>
+            <a:ext cx="548640" cy="292608"/>
           </a:xfrm>
           <a:prstGeom prst="rect">
             <a:avLst/>
@@ -4459,8 +4468,297 @@
           </a:bodyPr>
           <a:lstStyle/>
           <a:p>
+            <a:pPr algn="r">
+              <a:defRPr sz="1100" b="0">
+                <a:solidFill>
+                  <a:srgbClr val="64748B"/>
+                </a:solidFill>
+                <a:latin typeface="Calibri"/>
+              </a:defRPr>
+            </a:pPr>
+            <a:r>
+              <a:t>12</a:t>
+            </a:r>
+          </a:p>
+        </p:txBody>
+      </p:sp>
+      <p:sp>
+        <p:nvSpPr>
+          <p:cNvPr id="6" name="TextBox 5"/>
+          <p:cNvSpPr txBox="1"/>
+          <p:nvPr/>
+        </p:nvSpPr>
+        <p:spPr>
+          <a:xfrm>
+            <a:off x="548640" y="1417320"/>
+            <a:ext cx="11094415" cy="4983480"/>
+          </a:xfrm>
+          <a:prstGeom prst="rect">
+            <a:avLst/>
+          </a:prstGeom>
+          <a:noFill/>
+        </p:spPr>
+        <p:txBody>
+          <a:bodyPr wrap="square">
+            <a:spAutoFit/>
+          </a:bodyPr>
+          <a:lstStyle/>
+          <a:p>
+            <a:pPr>
+              <a:spcAft>
+                <a:spcPts val="1200"/>
+              </a:spcAft>
+              <a:defRPr sz="1800">
+                <a:solidFill>
+                  <a:srgbClr val="1A202C"/>
+                </a:solidFill>
+                <a:latin typeface="Calibri"/>
+              </a:defRPr>
+            </a:pPr>
+            <a:r>
+              <a:t>•  Windows + Spark: worker Python resolution, path-with-spaces, and a Docker Desktop networking quirk all broke Spark's driver↔executor RPC — diagnosed and fixed, not hidden.</a:t>
+            </a:r>
+          </a:p>
+          <a:p>
+            <a:pPr>
+              <a:spcAft>
+                <a:spcPts val="1200"/>
+              </a:spcAft>
+              <a:defRPr sz="1800">
+                <a:solidFill>
+                  <a:srgbClr val="1A202C"/>
+                </a:solidFill>
+                <a:latin typeface="Calibri"/>
+              </a:defRPr>
+            </a:pPr>
+            <a:r>
+              <a:t>•  The EER threshold trades some spoof recall for bonafide recall — a deliberate choice, not a free win: no single threshold maximizes both on an imbalanced dataset.</a:t>
+            </a:r>
+          </a:p>
+          <a:p>
+            <a:pPr>
+              <a:spcAft>
+                <a:spcPts val="1200"/>
+              </a:spcAft>
+              <a:defRPr sz="1800">
+                <a:solidFill>
+                  <a:srgbClr val="1A202C"/>
+                </a:solidFill>
+                <a:latin typeface="Calibri"/>
+              </a:defRPr>
+            </a:pPr>
+            <a:r>
+              <a:t>•  Embedding is the classifier's own feature vector, not a separate pretrained audio embedding model — keeps the semantic-search capability fully self-contained.</a:t>
+            </a:r>
+          </a:p>
+          <a:p>
+            <a:pPr>
+              <a:spcAft>
+                <a:spcPts val="1200"/>
+              </a:spcAft>
+              <a:defRPr sz="1800">
+                <a:solidFill>
+                  <a:srgbClr val="1A202C"/>
+                </a:solidFill>
+                <a:latin typeface="Calibri"/>
+              </a:defRPr>
+            </a:pPr>
+            <a:r>
+              <a:t>•  Kept Python end-to-end (not Scala) since the feature-extraction library is Python-only.</a:t>
+            </a:r>
+          </a:p>
+          <a:p>
+            <a:pPr>
+              <a:spcAft>
+                <a:spcPts val="1200"/>
+              </a:spcAft>
+              <a:defRPr sz="1800">
+                <a:solidFill>
+                  <a:srgbClr val="1A202C"/>
+                </a:solidFill>
+                <a:latin typeface="Calibri"/>
+              </a:defRPr>
+            </a:pPr>
+            <a:r>
+              <a:t>•  Speaker-disjoint train/dev split (not random) to avoid inflating accuracy via leakage.</a:t>
+            </a:r>
+          </a:p>
+        </p:txBody>
+      </p:sp>
+    </p:spTree>
+  </p:cSld>
+  <p:clrMapOvr>
+    <a:masterClrMapping/>
+  </p:clrMapOvr>
+</p:sld>
+</file>
+
+<file path=ppt/slides/slide14.xml><?xml version="1.0" encoding="utf-8"?>
+<p:sld xmlns:a="http://schemas.openxmlformats.org/drawingml/2006/main" xmlns:p="http://schemas.openxmlformats.org/presentationml/2006/main" xmlns:r="http://schemas.openxmlformats.org/officeDocument/2006/relationships">
+  <p:cSld>
+    <p:bg>
+      <p:bgPr>
+        <a:solidFill>
+          <a:srgbClr val="F7F9FB"/>
+        </a:solidFill>
+        <a:effectLst/>
+      </p:bgPr>
+    </p:bg>
+    <p:spTree>
+      <p:nvGrpSpPr>
+        <p:cNvPr id="1" name=""/>
+        <p:cNvGrpSpPr/>
+        <p:nvPr/>
+      </p:nvGrpSpPr>
+      <p:grpSpPr/>
+      <p:sp>
+        <p:nvSpPr>
+          <p:cNvPr id="2" name="Rectangle 1"/>
+          <p:cNvSpPr/>
+          <p:nvPr/>
+        </p:nvSpPr>
+        <p:spPr>
+          <a:xfrm>
+            <a:off x="0" y="0"/>
+            <a:ext cx="12191695" cy="6858000"/>
+          </a:xfrm>
+          <a:prstGeom prst="rect">
+            <a:avLst/>
+          </a:prstGeom>
+          <a:solidFill>
+            <a:srgbClr val="0F2942"/>
+          </a:solidFill>
+          <a:ln>
+            <a:noFill/>
+          </a:ln>
+          <a:effectLst/>
+        </p:spPr>
+        <p:style>
+          <a:lnRef idx="1">
+            <a:schemeClr val="accent1"/>
+          </a:lnRef>
+          <a:fillRef idx="3">
+            <a:schemeClr val="accent1"/>
+          </a:fillRef>
+          <a:effectRef idx="2">
+            <a:schemeClr val="accent1"/>
+          </a:effectRef>
+          <a:fontRef idx="minor">
+            <a:schemeClr val="lt1"/>
+          </a:fontRef>
+        </p:style>
+        <p:txBody>
+          <a:bodyPr rtlCol="0" anchor="ctr"/>
+          <a:lstStyle/>
+          <a:p>
+            <a:pPr algn="ctr"/>
+          </a:p>
+        </p:txBody>
+      </p:sp>
+      <p:sp>
+        <p:nvSpPr>
+          <p:cNvPr id="3" name="Rectangle 2"/>
+          <p:cNvSpPr/>
+          <p:nvPr/>
+        </p:nvSpPr>
+        <p:spPr>
+          <a:xfrm>
+            <a:off x="0" y="3383280"/>
+            <a:ext cx="12191695" cy="63500"/>
+          </a:xfrm>
+          <a:prstGeom prst="rect">
+            <a:avLst/>
+          </a:prstGeom>
+          <a:solidFill>
+            <a:srgbClr val="0D9488"/>
+          </a:solidFill>
+          <a:ln>
+            <a:noFill/>
+          </a:ln>
+          <a:effectLst/>
+        </p:spPr>
+        <p:style>
+          <a:lnRef idx="1">
+            <a:schemeClr val="accent1"/>
+          </a:lnRef>
+          <a:fillRef idx="3">
+            <a:schemeClr val="accent1"/>
+          </a:fillRef>
+          <a:effectRef idx="2">
+            <a:schemeClr val="accent1"/>
+          </a:effectRef>
+          <a:fontRef idx="minor">
+            <a:schemeClr val="lt1"/>
+          </a:fontRef>
+        </p:style>
+        <p:txBody>
+          <a:bodyPr rtlCol="0" anchor="ctr"/>
+          <a:lstStyle/>
+          <a:p>
+            <a:pPr algn="ctr"/>
+          </a:p>
+        </p:txBody>
+      </p:sp>
+      <p:sp>
+        <p:nvSpPr>
+          <p:cNvPr id="4" name="TextBox 3"/>
+          <p:cNvSpPr txBox="1"/>
+          <p:nvPr/>
+        </p:nvSpPr>
+        <p:spPr>
+          <a:xfrm>
+            <a:off x="914400" y="2286000"/>
+            <a:ext cx="10332720" cy="914400"/>
+          </a:xfrm>
+          <a:prstGeom prst="rect">
+            <a:avLst/>
+          </a:prstGeom>
+          <a:noFill/>
+        </p:spPr>
+        <p:txBody>
+          <a:bodyPr wrap="square">
+            <a:spAutoFit/>
+          </a:bodyPr>
+          <a:lstStyle/>
+          <a:p>
             <a:pPr algn="l">
-              <a:defRPr sz="1600" b="0">
+              <a:defRPr sz="4000" b="1">
+                <a:solidFill>
+                  <a:srgbClr val="FFFFFF"/>
+                </a:solidFill>
+                <a:latin typeface="Calibri"/>
+              </a:defRPr>
+            </a:pPr>
+            <a:r>
+              <a:t>Questions?</a:t>
+            </a:r>
+          </a:p>
+        </p:txBody>
+      </p:sp>
+      <p:sp>
+        <p:nvSpPr>
+          <p:cNvPr id="5" name="TextBox 4"/>
+          <p:cNvSpPr txBox="1"/>
+          <p:nvPr/>
+        </p:nvSpPr>
+        <p:spPr>
+          <a:xfrm>
+            <a:off x="914400" y="3246120"/>
+            <a:ext cx="7315200" cy="457200"/>
+          </a:xfrm>
+          <a:prstGeom prst="rect">
+            <a:avLst/>
+          </a:prstGeom>
+          <a:noFill/>
+        </p:spPr>
+        <p:txBody>
+          <a:bodyPr wrap="none">
+            <a:spAutoFit/>
+          </a:bodyPr>
+          <a:lstStyle/>
+          <a:p>
+            <a:pPr>
+              <a:defRPr sz="1600">
                 <a:solidFill>
                   <a:srgbClr val="CBD5E1"/>
                 </a:solidFill>
@@ -4468,7 +4766,68 @@
               </a:defRPr>
             </a:pPr>
             <a:r>
+              <a:rPr>
+                <a:hlinkClick r:id="rId2"/>
+              </a:rPr>
               <a:t>github.com/HadarBaum/asvspoof-voice-ai</a:t>
+            </a:r>
+          </a:p>
+        </p:txBody>
+      </p:sp>
+      <p:sp>
+        <p:nvSpPr>
+          <p:cNvPr id="6" name="Rounded Rectangle 5">
+            <a:hlinkClick r:id="rId3"/>
+          </p:cNvPr>
+          <p:cNvSpPr/>
+          <p:nvPr/>
+        </p:nvSpPr>
+        <p:spPr>
+          <a:xfrm>
+            <a:off x="914400" y="3931920"/>
+            <a:ext cx="3291840" cy="594360"/>
+          </a:xfrm>
+          <a:prstGeom prst="roundRect">
+            <a:avLst>
+              <a:gd name="adj" fmla="val 6000"/>
+            </a:avLst>
+          </a:prstGeom>
+          <a:solidFill>
+            <a:srgbClr val="0D9488"/>
+          </a:solidFill>
+          <a:ln>
+            <a:noFill/>
+          </a:ln>
+          <a:effectLst/>
+        </p:spPr>
+        <p:style>
+          <a:lnRef idx="1">
+            <a:schemeClr val="accent1"/>
+          </a:lnRef>
+          <a:fillRef idx="3">
+            <a:schemeClr val="accent1"/>
+          </a:fillRef>
+          <a:effectRef idx="2">
+            <a:schemeClr val="accent1"/>
+          </a:effectRef>
+          <a:fontRef idx="minor">
+            <a:schemeClr val="lt1"/>
+          </a:fontRef>
+        </p:style>
+        <p:txBody>
+          <a:bodyPr rtlCol="0" anchor="ctr" wrap="square"/>
+          <a:lstStyle/>
+          <a:p>
+            <a:pPr algn="ctr">
+              <a:defRPr sz="1700" b="1">
+                <a:solidFill>
+                  <a:srgbClr val="FFFFFF"/>
+                </a:solidFill>
+                <a:latin typeface="Calibri"/>
+              </a:defRPr>
+            </a:pPr>
+            <a:r>
+              <a:t>▶  Open the live demo</a:t>
             </a:r>
           </a:p>
         </p:txBody>
@@ -4683,7 +5042,7 @@
           <a:p>
             <a:pPr>
               <a:spcAft>
-                <a:spcPts val="1000"/>
+                <a:spcPts val="1200"/>
               </a:spcAft>
               <a:defRPr sz="1900">
                 <a:solidFill>
@@ -4699,7 +5058,7 @@
           <a:p>
             <a:pPr>
               <a:spcAft>
-                <a:spcPts val="1000"/>
+                <a:spcPts val="1200"/>
               </a:spcAft>
               <a:defRPr sz="1900">
                 <a:solidFill>
@@ -4715,7 +5074,7 @@
           <a:p>
             <a:pPr>
               <a:spcAft>
-                <a:spcPts val="1000"/>
+                <a:spcPts val="1200"/>
               </a:spcAft>
               <a:defRPr sz="1900">
                 <a:solidFill>
@@ -4731,7 +5090,7 @@
           <a:p>
             <a:pPr>
               <a:spcAft>
-                <a:spcPts val="1000"/>
+                <a:spcPts val="1200"/>
               </a:spcAft>
               <a:defRPr sz="1900">
                 <a:solidFill>
@@ -4992,7 +5351,7 @@
           <a:p>
             <a:pPr>
               <a:spcAft>
-                <a:spcPts val="1000"/>
+                <a:spcPts val="1200"/>
               </a:spcAft>
               <a:defRPr sz="1900">
                 <a:solidFill>
@@ -5008,7 +5367,7 @@
           <a:p>
             <a:pPr>
               <a:spcAft>
-                <a:spcPts val="1000"/>
+                <a:spcPts val="1200"/>
               </a:spcAft>
               <a:defRPr sz="1900">
                 <a:solidFill>
@@ -5024,7 +5383,7 @@
           <a:p>
             <a:pPr>
               <a:spcAft>
-                <a:spcPts val="1000"/>
+                <a:spcPts val="1200"/>
               </a:spcAft>
               <a:defRPr sz="1900">
                 <a:solidFill>
@@ -5040,7 +5399,7 @@
           <a:p>
             <a:pPr>
               <a:spcAft>
-                <a:spcPts val="1000"/>
+                <a:spcPts val="1200"/>
               </a:spcAft>
               <a:defRPr sz="1900">
                 <a:solidFill>
@@ -5056,7 +5415,7 @@
           <a:p>
             <a:pPr>
               <a:spcAft>
-                <a:spcPts val="1000"/>
+                <a:spcPts val="1200"/>
               </a:spcAft>
               <a:defRPr sz="1900">
                 <a:solidFill>
@@ -5072,7 +5431,7 @@
           <a:p>
             <a:pPr>
               <a:spcAft>
-                <a:spcPts val="1000"/>
+                <a:spcPts val="1200"/>
               </a:spcAft>
               <a:defRPr sz="1900">
                 <a:solidFill>
@@ -5333,7 +5692,7 @@
           <a:p>
             <a:pPr>
               <a:spcAft>
-                <a:spcPts val="1000"/>
+                <a:spcPts val="1200"/>
               </a:spcAft>
               <a:defRPr sz="1600">
                 <a:solidFill>
@@ -5691,7 +6050,7 @@
           <a:p>
             <a:pPr>
               <a:spcAft>
-                <a:spcPts val="1000"/>
+                <a:spcPts val="1200"/>
               </a:spcAft>
               <a:defRPr sz="1600">
                 <a:solidFill>
@@ -5701,23 +6060,7 @@
               </a:defRPr>
             </a:pPr>
             <a:r>
-              <a:t>•  Selection metric is EER — the metric the ASVspoof challenge itself is scored on, not raw</a:t>
-            </a:r>
-          </a:p>
-          <a:p>
-            <a:pPr lvl="1">
-              <a:spcAft>
-                <a:spcPts val="1000"/>
-              </a:spcAft>
-              <a:defRPr sz="1300">
-                <a:solidFill>
-                  <a:srgbClr val="64748B"/>
-                </a:solidFill>
-                <a:latin typeface="Calibri"/>
-              </a:defRPr>
-            </a:pPr>
-            <a:r>
-              <a:t>–  accuracy, which looked strong while quietly failing bonafide clips (next slide)</a:t>
+              <a:t>•  Selection metric is EER — the metric the ASVspoof challenge itself is scored on, not raw accuracy, which looked strong while quietly failing bonafide clips (see the next two slides).</a:t>
             </a:r>
           </a:p>
         </p:txBody>
@@ -5867,7 +6210,7 @@
               </a:defRPr>
             </a:pPr>
             <a:r>
-              <a:t>Results — the accuracy paradox, found and fixed</a:t>
+              <a:t>How EER is calculated</a:t>
             </a:r>
           </a:p>
         </p:txBody>
@@ -5875,6 +6218,42 @@
       <p:sp>
         <p:nvSpPr>
           <p:cNvPr id="5" name="TextBox 4"/>
+          <p:cNvSpPr txBox="1"/>
+          <p:nvPr/>
+        </p:nvSpPr>
+        <p:spPr>
+          <a:xfrm>
+            <a:off x="548640" y="658368"/>
+            <a:ext cx="11094415" cy="365760"/>
+          </a:xfrm>
+          <a:prstGeom prst="rect">
+            <a:avLst/>
+          </a:prstGeom>
+          <a:noFill/>
+        </p:spPr>
+        <p:txBody>
+          <a:bodyPr wrap="none">
+            <a:spAutoFit/>
+          </a:bodyPr>
+          <a:lstStyle/>
+          <a:p>
+            <a:pPr>
+              <a:defRPr sz="1300">
+                <a:solidFill>
+                  <a:srgbClr val="CBD5E1"/>
+                </a:solidFill>
+                <a:latin typeface="Calibri"/>
+              </a:defRPr>
+            </a:pPr>
+            <a:r>
+              <a:t>The metric the ASVspoof challenge itself is scored on</a:t>
+            </a:r>
+          </a:p>
+        </p:txBody>
+      </p:sp>
+      <p:sp>
+        <p:nvSpPr>
+          <p:cNvPr id="6" name="TextBox 5"/>
           <p:cNvSpPr txBox="1"/>
           <p:nvPr/>
         </p:nvSpPr>
@@ -5910,14 +6289,117 @@
       </p:sp>
       <p:sp>
         <p:nvSpPr>
-          <p:cNvPr id="6" name="Rounded Rectangle 5"/>
+          <p:cNvPr id="7" name="TextBox 6"/>
+          <p:cNvSpPr txBox="1"/>
+          <p:nvPr/>
+        </p:nvSpPr>
+        <p:spPr>
+          <a:xfrm>
+            <a:off x="548640" y="1417320"/>
+            <a:ext cx="11094415" cy="4983480"/>
+          </a:xfrm>
+          <a:prstGeom prst="rect">
+            <a:avLst/>
+          </a:prstGeom>
+          <a:noFill/>
+        </p:spPr>
+        <p:txBody>
+          <a:bodyPr wrap="square">
+            <a:spAutoFit/>
+          </a:bodyPr>
+          <a:lstStyle/>
+          <a:p>
+            <a:pPr>
+              <a:spcAft>
+                <a:spcPts val="1200"/>
+              </a:spcAft>
+              <a:defRPr sz="1700">
+                <a:solidFill>
+                  <a:srgbClr val="1A202C"/>
+                </a:solidFill>
+                <a:latin typeface="Calibri"/>
+              </a:defRPr>
+            </a:pPr>
+            <a:r>
+              <a:t>•  Score every dev utterance with the model, giving each one a P(spoof) between 0 and 1.</a:t>
+            </a:r>
+          </a:p>
+          <a:p>
+            <a:pPr>
+              <a:spcAft>
+                <a:spcPts val="1200"/>
+              </a:spcAft>
+              <a:defRPr sz="1700">
+                <a:solidFill>
+                  <a:srgbClr val="1A202C"/>
+                </a:solidFill>
+                <a:latin typeface="Calibri"/>
+              </a:defRPr>
+            </a:pPr>
+            <a:r>
+              <a:t>•  Sweep every possible decision threshold and, at each one, compute two error rates: the false-acceptance rate (bonafide clips wrongly called spoof) and the false-rejection rate (spoof clips wrongly called bonafide).</a:t>
+            </a:r>
+          </a:p>
+          <a:p>
+            <a:pPr>
+              <a:spcAft>
+                <a:spcPts val="1200"/>
+              </a:spcAft>
+              <a:defRPr sz="1700">
+                <a:solidFill>
+                  <a:srgbClr val="1A202C"/>
+                </a:solidFill>
+                <a:latin typeface="Calibri"/>
+              </a:defRPr>
+            </a:pPr>
+            <a:r>
+              <a:t>•  As the threshold moves, one error rate goes up while the other goes down — the Equal Error Rate is the threshold where the two curves cross, i.e. where both error rates are equal.</a:t>
+            </a:r>
+          </a:p>
+          <a:p>
+            <a:pPr>
+              <a:spcAft>
+                <a:spcPts val="1200"/>
+              </a:spcAft>
+              <a:defRPr sz="1700">
+                <a:solidFill>
+                  <a:srgbClr val="1A202C"/>
+                </a:solidFill>
+                <a:latin typeface="Calibri"/>
+              </a:defRPr>
+            </a:pPr>
+            <a:r>
+              <a:t>•  EER itself is that shared error rate at the crossing point; the threshold at that point is what actually gets deployed (see the model artifact in common/model.py).</a:t>
+            </a:r>
+          </a:p>
+          <a:p>
+            <a:pPr>
+              <a:spcAft>
+                <a:spcPts val="1200"/>
+              </a:spcAft>
+              <a:defRPr sz="1700">
+                <a:solidFill>
+                  <a:srgbClr val="1A202C"/>
+                </a:solidFill>
+                <a:latin typeface="Calibri"/>
+              </a:defRPr>
+            </a:pPr>
+            <a:r>
+              <a:t>•  Lower EER = better separation between the two classes. 0% would mean a threshold exists with zero errors of either kind; this project's deployed model scores 9.26%.</a:t>
+            </a:r>
+          </a:p>
+        </p:txBody>
+      </p:sp>
+      <p:sp>
+        <p:nvSpPr>
+          <p:cNvPr id="8" name="Rounded Rectangle 7"/>
           <p:cNvSpPr/>
           <p:nvPr/>
         </p:nvSpPr>
         <p:spPr>
           <a:xfrm>
-            <a:off x="548640" y="1417320"/>
-            <a:ext cx="3515258" cy="1554480"/>
+            <a:off x="548640" y="5349240"/>
+            <a:ext cx="11094415" cy="1051560"/>
           </a:xfrm>
           <a:prstGeom prst="roundRect">
             <a:avLst>
@@ -5958,50 +6440,14 @@
       </p:sp>
       <p:sp>
         <p:nvSpPr>
-          <p:cNvPr id="7" name="TextBox 6"/>
+          <p:cNvPr id="9" name="TextBox 8"/>
           <p:cNvSpPr txBox="1"/>
           <p:nvPr/>
         </p:nvSpPr>
         <p:spPr>
           <a:xfrm>
-            <a:off x="548640" y="1618488"/>
-            <a:ext cx="3515258" cy="731520"/>
-          </a:xfrm>
-          <a:prstGeom prst="rect">
-            <a:avLst/>
-          </a:prstGeom>
-          <a:noFill/>
-        </p:spPr>
-        <p:txBody>
-          <a:bodyPr wrap="none">
-            <a:spAutoFit/>
-          </a:bodyPr>
-          <a:lstStyle/>
-          <a:p>
-            <a:pPr algn="ctr">
-              <a:defRPr sz="3400" b="1">
-                <a:solidFill>
-                  <a:srgbClr val="DC2626"/>
-                </a:solidFill>
-                <a:latin typeface="Calibri"/>
-              </a:defRPr>
-            </a:pPr>
-            <a:r>
-              <a:t>80%</a:t>
-            </a:r>
-          </a:p>
-        </p:txBody>
-      </p:sp>
-      <p:sp>
-        <p:nvSpPr>
-          <p:cNvPr id="8" name="TextBox 7"/>
-          <p:cNvSpPr txBox="1"/>
-          <p:nvPr/>
-        </p:nvSpPr>
-        <p:spPr>
-          <a:xfrm>
-            <a:off x="640080" y="2377440"/>
-            <a:ext cx="3332378" cy="548640"/>
+            <a:off x="777240" y="5468112"/>
+            <a:ext cx="10637215" cy="868680"/>
           </a:xfrm>
           <a:prstGeom prst="rect">
             <a:avLst/>
@@ -6014,414 +6460,55 @@
           </a:bodyPr>
           <a:lstStyle/>
           <a:p>
-            <a:pPr algn="ctr">
-              <a:defRPr sz="1200">
-                <a:solidFill>
-                  <a:srgbClr val="64748B"/>
-                </a:solidFill>
-                <a:latin typeface="Calibri"/>
-              </a:defRPr>
-            </a:pPr>
-            <a:r>
-              <a:t>Bonafide recall</a:t>
-            </a:r>
-          </a:p>
-          <a:p>
-            <a:pPr algn="ctr">
-              <a:defRPr sz="1200">
-                <a:solidFill>
-                  <a:srgbClr val="64748B"/>
-                </a:solidFill>
-                <a:latin typeface="Calibri"/>
-              </a:defRPr>
-            </a:pPr>
-            <a:r>
-              <a:t>at default 0.5 threshold</a:t>
-            </a:r>
-          </a:p>
-        </p:txBody>
-      </p:sp>
-      <p:sp>
-        <p:nvSpPr>
-          <p:cNvPr id="9" name="Rounded Rectangle 8"/>
-          <p:cNvSpPr/>
-          <p:nvPr/>
-        </p:nvSpPr>
-        <p:spPr>
-          <a:xfrm>
-            <a:off x="4338218" y="1417320"/>
-            <a:ext cx="3515258" cy="1554480"/>
-          </a:xfrm>
-          <a:prstGeom prst="roundRect">
-            <a:avLst>
-              <a:gd name="adj" fmla="val 6000"/>
-            </a:avLst>
-          </a:prstGeom>
-          <a:solidFill>
-            <a:srgbClr val="FFFFFF"/>
-          </a:solidFill>
-          <a:ln w="12700">
-            <a:solidFill>
-              <a:srgbClr val="E2E8F0"/>
-            </a:solidFill>
-          </a:ln>
-          <a:effectLst/>
-        </p:spPr>
-        <p:style>
-          <a:lnRef idx="1">
-            <a:schemeClr val="accent1"/>
-          </a:lnRef>
-          <a:fillRef idx="3">
-            <a:schemeClr val="accent1"/>
-          </a:fillRef>
-          <a:effectRef idx="2">
-            <a:schemeClr val="accent1"/>
-          </a:effectRef>
-          <a:fontRef idx="minor">
-            <a:schemeClr val="lt1"/>
-          </a:fontRef>
-        </p:style>
-        <p:txBody>
-          <a:bodyPr rtlCol="0" anchor="ctr"/>
-          <a:lstStyle/>
-          <a:p>
-            <a:pPr algn="ctr"/>
-          </a:p>
-        </p:txBody>
-      </p:sp>
-      <p:sp>
-        <p:nvSpPr>
-          <p:cNvPr id="10" name="TextBox 9"/>
-          <p:cNvSpPr txBox="1"/>
-          <p:nvPr/>
-        </p:nvSpPr>
-        <p:spPr>
-          <a:xfrm>
-            <a:off x="4338218" y="1618488"/>
-            <a:ext cx="3515258" cy="731520"/>
-          </a:xfrm>
-          <a:prstGeom prst="rect">
-            <a:avLst/>
-          </a:prstGeom>
-          <a:noFill/>
-        </p:spPr>
-        <p:txBody>
-          <a:bodyPr wrap="none">
-            <a:spAutoFit/>
-          </a:bodyPr>
-          <a:lstStyle/>
-          <a:p>
-            <a:pPr algn="ctr">
-              <a:defRPr sz="3400" b="1">
-                <a:solidFill>
-                  <a:srgbClr val="0D9488"/>
-                </a:solidFill>
-                <a:latin typeface="Calibri"/>
-              </a:defRPr>
-            </a:pPr>
-            <a:r>
-              <a:t>91%</a:t>
-            </a:r>
-          </a:p>
-        </p:txBody>
-      </p:sp>
-      <p:sp>
-        <p:nvSpPr>
-          <p:cNvPr id="11" name="TextBox 10"/>
-          <p:cNvSpPr txBox="1"/>
-          <p:nvPr/>
-        </p:nvSpPr>
-        <p:spPr>
-          <a:xfrm>
-            <a:off x="4429658" y="2377440"/>
-            <a:ext cx="3332378" cy="548640"/>
-          </a:xfrm>
-          <a:prstGeom prst="rect">
-            <a:avLst/>
-          </a:prstGeom>
-          <a:noFill/>
-        </p:spPr>
-        <p:txBody>
-          <a:bodyPr wrap="square">
-            <a:spAutoFit/>
-          </a:bodyPr>
-          <a:lstStyle/>
-          <a:p>
-            <a:pPr algn="ctr">
-              <a:defRPr sz="1200">
-                <a:solidFill>
-                  <a:srgbClr val="64748B"/>
-                </a:solidFill>
-                <a:latin typeface="Calibri"/>
-              </a:defRPr>
-            </a:pPr>
-            <a:r>
-              <a:t>Bonafide recall</a:t>
-            </a:r>
-          </a:p>
-          <a:p>
-            <a:pPr algn="ctr">
-              <a:defRPr sz="1200">
-                <a:solidFill>
-                  <a:srgbClr val="64748B"/>
-                </a:solidFill>
-                <a:latin typeface="Calibri"/>
-              </a:defRPr>
-            </a:pPr>
-            <a:r>
-              <a:t>at deployed EER threshold</a:t>
-            </a:r>
-          </a:p>
-        </p:txBody>
-      </p:sp>
-      <p:sp>
-        <p:nvSpPr>
-          <p:cNvPr id="12" name="Rounded Rectangle 11"/>
-          <p:cNvSpPr/>
-          <p:nvPr/>
-        </p:nvSpPr>
-        <p:spPr>
-          <a:xfrm>
-            <a:off x="8127796" y="1417320"/>
-            <a:ext cx="3515258" cy="1554480"/>
-          </a:xfrm>
-          <a:prstGeom prst="roundRect">
-            <a:avLst>
-              <a:gd name="adj" fmla="val 6000"/>
-            </a:avLst>
-          </a:prstGeom>
-          <a:solidFill>
-            <a:srgbClr val="FFFFFF"/>
-          </a:solidFill>
-          <a:ln w="12700">
-            <a:solidFill>
-              <a:srgbClr val="E2E8F0"/>
-            </a:solidFill>
-          </a:ln>
-          <a:effectLst/>
-        </p:spPr>
-        <p:style>
-          <a:lnRef idx="1">
-            <a:schemeClr val="accent1"/>
-          </a:lnRef>
-          <a:fillRef idx="3">
-            <a:schemeClr val="accent1"/>
-          </a:fillRef>
-          <a:effectRef idx="2">
-            <a:schemeClr val="accent1"/>
-          </a:effectRef>
-          <a:fontRef idx="minor">
-            <a:schemeClr val="lt1"/>
-          </a:fontRef>
-        </p:style>
-        <p:txBody>
-          <a:bodyPr rtlCol="0" anchor="ctr"/>
-          <a:lstStyle/>
-          <a:p>
-            <a:pPr algn="ctr"/>
-          </a:p>
-        </p:txBody>
-      </p:sp>
-      <p:sp>
-        <p:nvSpPr>
-          <p:cNvPr id="13" name="TextBox 12"/>
-          <p:cNvSpPr txBox="1"/>
-          <p:nvPr/>
-        </p:nvSpPr>
-        <p:spPr>
-          <a:xfrm>
-            <a:off x="8127796" y="1618488"/>
-            <a:ext cx="3515258" cy="731520"/>
-          </a:xfrm>
-          <a:prstGeom prst="rect">
-            <a:avLst/>
-          </a:prstGeom>
-          <a:noFill/>
-        </p:spPr>
-        <p:txBody>
-          <a:bodyPr wrap="none">
-            <a:spAutoFit/>
-          </a:bodyPr>
-          <a:lstStyle/>
-          <a:p>
-            <a:pPr algn="ctr">
-              <a:defRPr sz="3400" b="1">
-                <a:solidFill>
-                  <a:srgbClr val="2B6CB0"/>
-                </a:solidFill>
-                <a:latin typeface="Calibri"/>
-              </a:defRPr>
-            </a:pPr>
-            <a:r>
-              <a:t>9.3%</a:t>
-            </a:r>
-          </a:p>
-        </p:txBody>
-      </p:sp>
-      <p:sp>
-        <p:nvSpPr>
-          <p:cNvPr id="14" name="TextBox 13"/>
-          <p:cNvSpPr txBox="1"/>
-          <p:nvPr/>
-        </p:nvSpPr>
-        <p:spPr>
-          <a:xfrm>
-            <a:off x="8219236" y="2377440"/>
-            <a:ext cx="3332378" cy="548640"/>
-          </a:xfrm>
-          <a:prstGeom prst="rect">
-            <a:avLst/>
-          </a:prstGeom>
-          <a:noFill/>
-        </p:spPr>
-        <p:txBody>
-          <a:bodyPr wrap="square">
-            <a:spAutoFit/>
-          </a:bodyPr>
-          <a:lstStyle/>
-          <a:p>
-            <a:pPr algn="ctr">
-              <a:defRPr sz="1200">
-                <a:solidFill>
-                  <a:srgbClr val="64748B"/>
-                </a:solidFill>
-                <a:latin typeface="Calibri"/>
-              </a:defRPr>
-            </a:pPr>
-            <a:r>
-              <a:t>Equal Error Rate</a:t>
-            </a:r>
-          </a:p>
-          <a:p>
-            <a:pPr algn="ctr">
-              <a:defRPr sz="1200">
-                <a:solidFill>
-                  <a:srgbClr val="64748B"/>
-                </a:solidFill>
-                <a:latin typeface="Calibri"/>
-              </a:defRPr>
-            </a:pPr>
-            <a:r>
-              <a:t>(ASVspoof's own metric)</a:t>
-            </a:r>
-          </a:p>
-        </p:txBody>
-      </p:sp>
-      <p:sp>
-        <p:nvSpPr>
-          <p:cNvPr id="15" name="TextBox 14"/>
-          <p:cNvSpPr txBox="1"/>
-          <p:nvPr/>
-        </p:nvSpPr>
-        <p:spPr>
-          <a:xfrm>
-            <a:off x="548640" y="3246120"/>
-            <a:ext cx="11094415" cy="3154680"/>
-          </a:xfrm>
-          <a:prstGeom prst="rect">
-            <a:avLst/>
-          </a:prstGeom>
-          <a:noFill/>
-        </p:spPr>
-        <p:txBody>
-          <a:bodyPr wrap="square">
-            <a:spAutoFit/>
-          </a:bodyPr>
-          <a:lstStyle/>
-          <a:p>
             <a:pPr>
-              <a:spcAft>
-                <a:spcPts val="1000"/>
-              </a:spcAft>
-              <a:defRPr sz="1600">
-                <a:solidFill>
-                  <a:srgbClr val="1A202C"/>
-                </a:solidFill>
-                <a:latin typeface="Calibri"/>
-              </a:defRPr>
-            </a:pPr>
-            <a:r>
-              <a:t>•  Dev accuracy at the default threshold (94.3%) looked strong — but the model was quietly</a:t>
-            </a:r>
-          </a:p>
-          <a:p>
-            <a:pPr lvl="1">
-              <a:spcAft>
-                <a:spcPts val="1000"/>
-              </a:spcAft>
               <a:defRPr sz="1300">
                 <a:solidFill>
-                  <a:srgbClr val="64748B"/>
-                </a:solidFill>
-                <a:latin typeface="Calibri"/>
-              </a:defRPr>
-            </a:pPr>
-            <a:r>
-              <a:t>–  biased toward the majority class: it caught spoof reliably, bonafide much less so</a:t>
+                  <a:srgbClr val="0F2942"/>
+                </a:solidFill>
+                <a:latin typeface="Consolas"/>
+              </a:defRPr>
+            </a:pPr>
+            <a:r>
+              <a:t>fpr, tpr, thresholds = roc_curve(y_true_spoof, y_score_spoof)</a:t>
             </a:r>
           </a:p>
           <a:p>
             <a:pPr>
-              <a:spcAft>
-                <a:spcPts val="1000"/>
-              </a:spcAft>
-              <a:defRPr sz="1600">
-                <a:solidFill>
-                  <a:srgbClr val="1A202C"/>
-                </a:solidFill>
-                <a:latin typeface="Calibri"/>
-              </a:defRPr>
-            </a:pPr>
-            <a:r>
-              <a:t>•  Fix: the model artifact now stores its own EER-optimal decision threshold, used</a:t>
-            </a:r>
-          </a:p>
-          <a:p>
-            <a:pPr lvl="1">
-              <a:spcAft>
-                <a:spcPts val="1000"/>
-              </a:spcAft>
               <a:defRPr sz="1300">
                 <a:solidFill>
-                  <a:srgbClr val="64748B"/>
-                </a:solidFill>
-                <a:latin typeface="Calibri"/>
-              </a:defRPr>
-            </a:pPr>
-            <a:r>
-              <a:t>–  everywhere (streaming consumer, web app) instead of scikit-learn's default 0.5</a:t>
+                  <a:srgbClr val="0F2942"/>
+                </a:solidFill>
+                <a:latin typeface="Consolas"/>
+              </a:defRPr>
+            </a:pPr>
+            <a:r>
+              <a:t>fnr = 1 - tpr</a:t>
             </a:r>
           </a:p>
           <a:p>
             <a:pPr>
-              <a:spcAft>
-                <a:spcPts val="1000"/>
-              </a:spcAft>
-              <a:defRPr sz="1600">
-                <a:solidFill>
-                  <a:srgbClr val="1A202C"/>
-                </a:solidFill>
-                <a:latin typeface="Calibri"/>
-              </a:defRPr>
-            </a:pPr>
-            <a:r>
-              <a:t>•  Independently re-confirmed on live Kafka-streamed eval data, not just the dev set</a:t>
-            </a:r>
-          </a:p>
-          <a:p>
-            <a:pPr lvl="1">
-              <a:spcAft>
-                <a:spcPts val="1000"/>
-              </a:spcAft>
               <a:defRPr sz="1300">
                 <a:solidFill>
-                  <a:srgbClr val="64748B"/>
-                </a:solidFill>
-                <a:latin typeface="Calibri"/>
-              </a:defRPr>
-            </a:pPr>
-            <a:r>
-              <a:t>–  it was tuned on — bonafide accuracy went 29.7% → 91.5% on the streamed sample too</a:t>
+                  <a:srgbClr val="0F2942"/>
+                </a:solidFill>
+                <a:latin typeface="Consolas"/>
+              </a:defRPr>
+            </a:pPr>
+            <a:r>
+              <a:t>eer_idx = argmin(abs(fnr - fpr))   # where the two curves are closest</a:t>
+            </a:r>
+          </a:p>
+          <a:p>
+            <a:pPr>
+              <a:defRPr sz="1300">
+                <a:solidFill>
+                  <a:srgbClr val="0F2942"/>
+                </a:solidFill>
+                <a:latin typeface="Consolas"/>
+              </a:defRPr>
+            </a:pPr>
+            <a:r>
+              <a:t>eer, threshold = (fpr[eer_idx] + fnr[eer_idx]) / 2,  thresholds[eer_idx]</a:t>
             </a:r>
           </a:p>
         </p:txBody>
@@ -6571,7 +6658,7 @@
               </a:defRPr>
             </a:pPr>
             <a:r>
-              <a:t>Results — ROC curve &amp; confusion matrix</a:t>
+              <a:t>Results — the accuracy paradox, found and fixed</a:t>
             </a:r>
           </a:p>
         </p:txBody>
@@ -6612,54 +6699,90 @@
           </a:p>
         </p:txBody>
       </p:sp>
-      <p:pic>
-        <p:nvPicPr>
-          <p:cNvPr id="6" name="Picture 5" descr="roc_curve.png"/>
-          <p:cNvPicPr>
-            <a:picLocks noChangeAspect="1"/>
-          </p:cNvPicPr>
-          <p:nvPr/>
-        </p:nvPicPr>
-        <p:blipFill>
-          <a:blip r:embed="rId2"/>
-          <a:stretch>
-            <a:fillRect/>
-          </a:stretch>
-        </p:blipFill>
-        <p:spPr>
-          <a:xfrm>
-            <a:off x="807643" y="1417320"/>
-            <a:ext cx="4892040" cy="4892040"/>
-          </a:xfrm>
-          <a:prstGeom prst="rect">
-            <a:avLst/>
-          </a:prstGeom>
-        </p:spPr>
-      </p:pic>
-      <p:pic>
-        <p:nvPicPr>
-          <p:cNvPr id="7" name="Picture 6" descr="confusion_matrix.png"/>
-          <p:cNvPicPr>
-            <a:picLocks noChangeAspect="1"/>
-          </p:cNvPicPr>
-          <p:nvPr/>
-        </p:nvPicPr>
-        <p:blipFill>
-          <a:blip r:embed="rId3"/>
-          <a:stretch>
-            <a:fillRect/>
-          </a:stretch>
-        </p:blipFill>
-        <p:spPr>
-          <a:xfrm>
-            <a:off x="6492010" y="1417320"/>
-            <a:ext cx="4892040" cy="4892040"/>
-          </a:xfrm>
-          <a:prstGeom prst="rect">
-            <a:avLst/>
-          </a:prstGeom>
-        </p:spPr>
-      </p:pic>
+      <p:sp>
+        <p:nvSpPr>
+          <p:cNvPr id="6" name="Rounded Rectangle 5"/>
+          <p:cNvSpPr/>
+          <p:nvPr/>
+        </p:nvSpPr>
+        <p:spPr>
+          <a:xfrm>
+            <a:off x="548640" y="1417320"/>
+            <a:ext cx="3515258" cy="1554480"/>
+          </a:xfrm>
+          <a:prstGeom prst="roundRect">
+            <a:avLst>
+              <a:gd name="adj" fmla="val 6000"/>
+            </a:avLst>
+          </a:prstGeom>
+          <a:solidFill>
+            <a:srgbClr val="FFFFFF"/>
+          </a:solidFill>
+          <a:ln w="12700">
+            <a:solidFill>
+              <a:srgbClr val="E2E8F0"/>
+            </a:solidFill>
+          </a:ln>
+          <a:effectLst/>
+        </p:spPr>
+        <p:style>
+          <a:lnRef idx="1">
+            <a:schemeClr val="accent1"/>
+          </a:lnRef>
+          <a:fillRef idx="3">
+            <a:schemeClr val="accent1"/>
+          </a:fillRef>
+          <a:effectRef idx="2">
+            <a:schemeClr val="accent1"/>
+          </a:effectRef>
+          <a:fontRef idx="minor">
+            <a:schemeClr val="lt1"/>
+          </a:fontRef>
+        </p:style>
+        <p:txBody>
+          <a:bodyPr rtlCol="0" anchor="ctr"/>
+          <a:lstStyle/>
+          <a:p>
+            <a:pPr algn="ctr"/>
+          </a:p>
+        </p:txBody>
+      </p:sp>
+      <p:sp>
+        <p:nvSpPr>
+          <p:cNvPr id="7" name="TextBox 6"/>
+          <p:cNvSpPr txBox="1"/>
+          <p:nvPr/>
+        </p:nvSpPr>
+        <p:spPr>
+          <a:xfrm>
+            <a:off x="548640" y="1618488"/>
+            <a:ext cx="3515258" cy="731520"/>
+          </a:xfrm>
+          <a:prstGeom prst="rect">
+            <a:avLst/>
+          </a:prstGeom>
+          <a:noFill/>
+        </p:spPr>
+        <p:txBody>
+          <a:bodyPr wrap="none">
+            <a:spAutoFit/>
+          </a:bodyPr>
+          <a:lstStyle/>
+          <a:p>
+            <a:pPr algn="ctr">
+              <a:defRPr sz="3400" b="1">
+                <a:solidFill>
+                  <a:srgbClr val="DC2626"/>
+                </a:solidFill>
+                <a:latin typeface="Calibri"/>
+              </a:defRPr>
+            </a:pPr>
+            <a:r>
+              <a:t>80%</a:t>
+            </a:r>
+          </a:p>
+        </p:txBody>
+      </p:sp>
       <p:sp>
         <p:nvSpPr>
           <p:cNvPr id="8" name="TextBox 7"/>
@@ -6668,8 +6791,8 @@
         </p:nvSpPr>
         <p:spPr>
           <a:xfrm>
-            <a:off x="548640" y="6400800"/>
-            <a:ext cx="11094415" cy="365760"/>
+            <a:off x="640080" y="2377440"/>
+            <a:ext cx="3332378" cy="548640"/>
           </a:xfrm>
           <a:prstGeom prst="rect">
             <a:avLst/>
@@ -6683,7 +6806,7 @@
           <a:lstStyle/>
           <a:p>
             <a:pPr algn="ctr">
-              <a:defRPr sz="1200" b="0">
+              <a:defRPr sz="1200">
                 <a:solidFill>
                   <a:srgbClr val="64748B"/>
                 </a:solidFill>
@@ -6691,7 +6814,357 @@
               </a:defRPr>
             </a:pPr>
             <a:r>
-              <a:t>Left: both candidate models, deployed model's EER point marked. Right: streamed eval predictions.</a:t>
+              <a:t>Bonafide recall</a:t>
+            </a:r>
+          </a:p>
+          <a:p>
+            <a:pPr algn="ctr">
+              <a:defRPr sz="1200">
+                <a:solidFill>
+                  <a:srgbClr val="64748B"/>
+                </a:solidFill>
+                <a:latin typeface="Calibri"/>
+              </a:defRPr>
+            </a:pPr>
+            <a:r>
+              <a:t>at default 0.5 threshold</a:t>
+            </a:r>
+          </a:p>
+        </p:txBody>
+      </p:sp>
+      <p:sp>
+        <p:nvSpPr>
+          <p:cNvPr id="9" name="Rounded Rectangle 8"/>
+          <p:cNvSpPr/>
+          <p:nvPr/>
+        </p:nvSpPr>
+        <p:spPr>
+          <a:xfrm>
+            <a:off x="4338218" y="1417320"/>
+            <a:ext cx="3515258" cy="1554480"/>
+          </a:xfrm>
+          <a:prstGeom prst="roundRect">
+            <a:avLst>
+              <a:gd name="adj" fmla="val 6000"/>
+            </a:avLst>
+          </a:prstGeom>
+          <a:solidFill>
+            <a:srgbClr val="FFFFFF"/>
+          </a:solidFill>
+          <a:ln w="12700">
+            <a:solidFill>
+              <a:srgbClr val="E2E8F0"/>
+            </a:solidFill>
+          </a:ln>
+          <a:effectLst/>
+        </p:spPr>
+        <p:style>
+          <a:lnRef idx="1">
+            <a:schemeClr val="accent1"/>
+          </a:lnRef>
+          <a:fillRef idx="3">
+            <a:schemeClr val="accent1"/>
+          </a:fillRef>
+          <a:effectRef idx="2">
+            <a:schemeClr val="accent1"/>
+          </a:effectRef>
+          <a:fontRef idx="minor">
+            <a:schemeClr val="lt1"/>
+          </a:fontRef>
+        </p:style>
+        <p:txBody>
+          <a:bodyPr rtlCol="0" anchor="ctr"/>
+          <a:lstStyle/>
+          <a:p>
+            <a:pPr algn="ctr"/>
+          </a:p>
+        </p:txBody>
+      </p:sp>
+      <p:sp>
+        <p:nvSpPr>
+          <p:cNvPr id="10" name="TextBox 9"/>
+          <p:cNvSpPr txBox="1"/>
+          <p:nvPr/>
+        </p:nvSpPr>
+        <p:spPr>
+          <a:xfrm>
+            <a:off x="4338218" y="1618488"/>
+            <a:ext cx="3515258" cy="731520"/>
+          </a:xfrm>
+          <a:prstGeom prst="rect">
+            <a:avLst/>
+          </a:prstGeom>
+          <a:noFill/>
+        </p:spPr>
+        <p:txBody>
+          <a:bodyPr wrap="none">
+            <a:spAutoFit/>
+          </a:bodyPr>
+          <a:lstStyle/>
+          <a:p>
+            <a:pPr algn="ctr">
+              <a:defRPr sz="3400" b="1">
+                <a:solidFill>
+                  <a:srgbClr val="0D9488"/>
+                </a:solidFill>
+                <a:latin typeface="Calibri"/>
+              </a:defRPr>
+            </a:pPr>
+            <a:r>
+              <a:t>91%</a:t>
+            </a:r>
+          </a:p>
+        </p:txBody>
+      </p:sp>
+      <p:sp>
+        <p:nvSpPr>
+          <p:cNvPr id="11" name="TextBox 10"/>
+          <p:cNvSpPr txBox="1"/>
+          <p:nvPr/>
+        </p:nvSpPr>
+        <p:spPr>
+          <a:xfrm>
+            <a:off x="4429658" y="2377440"/>
+            <a:ext cx="3332378" cy="548640"/>
+          </a:xfrm>
+          <a:prstGeom prst="rect">
+            <a:avLst/>
+          </a:prstGeom>
+          <a:noFill/>
+        </p:spPr>
+        <p:txBody>
+          <a:bodyPr wrap="square">
+            <a:spAutoFit/>
+          </a:bodyPr>
+          <a:lstStyle/>
+          <a:p>
+            <a:pPr algn="ctr">
+              <a:defRPr sz="1200">
+                <a:solidFill>
+                  <a:srgbClr val="64748B"/>
+                </a:solidFill>
+                <a:latin typeface="Calibri"/>
+              </a:defRPr>
+            </a:pPr>
+            <a:r>
+              <a:t>Bonafide recall</a:t>
+            </a:r>
+          </a:p>
+          <a:p>
+            <a:pPr algn="ctr">
+              <a:defRPr sz="1200">
+                <a:solidFill>
+                  <a:srgbClr val="64748B"/>
+                </a:solidFill>
+                <a:latin typeface="Calibri"/>
+              </a:defRPr>
+            </a:pPr>
+            <a:r>
+              <a:t>at deployed EER threshold</a:t>
+            </a:r>
+          </a:p>
+        </p:txBody>
+      </p:sp>
+      <p:sp>
+        <p:nvSpPr>
+          <p:cNvPr id="12" name="Rounded Rectangle 11"/>
+          <p:cNvSpPr/>
+          <p:nvPr/>
+        </p:nvSpPr>
+        <p:spPr>
+          <a:xfrm>
+            <a:off x="8127796" y="1417320"/>
+            <a:ext cx="3515258" cy="1554480"/>
+          </a:xfrm>
+          <a:prstGeom prst="roundRect">
+            <a:avLst>
+              <a:gd name="adj" fmla="val 6000"/>
+            </a:avLst>
+          </a:prstGeom>
+          <a:solidFill>
+            <a:srgbClr val="FFFFFF"/>
+          </a:solidFill>
+          <a:ln w="12700">
+            <a:solidFill>
+              <a:srgbClr val="E2E8F0"/>
+            </a:solidFill>
+          </a:ln>
+          <a:effectLst/>
+        </p:spPr>
+        <p:style>
+          <a:lnRef idx="1">
+            <a:schemeClr val="accent1"/>
+          </a:lnRef>
+          <a:fillRef idx="3">
+            <a:schemeClr val="accent1"/>
+          </a:fillRef>
+          <a:effectRef idx="2">
+            <a:schemeClr val="accent1"/>
+          </a:effectRef>
+          <a:fontRef idx="minor">
+            <a:schemeClr val="lt1"/>
+          </a:fontRef>
+        </p:style>
+        <p:txBody>
+          <a:bodyPr rtlCol="0" anchor="ctr"/>
+          <a:lstStyle/>
+          <a:p>
+            <a:pPr algn="ctr"/>
+          </a:p>
+        </p:txBody>
+      </p:sp>
+      <p:sp>
+        <p:nvSpPr>
+          <p:cNvPr id="13" name="TextBox 12"/>
+          <p:cNvSpPr txBox="1"/>
+          <p:nvPr/>
+        </p:nvSpPr>
+        <p:spPr>
+          <a:xfrm>
+            <a:off x="8127796" y="1618488"/>
+            <a:ext cx="3515258" cy="731520"/>
+          </a:xfrm>
+          <a:prstGeom prst="rect">
+            <a:avLst/>
+          </a:prstGeom>
+          <a:noFill/>
+        </p:spPr>
+        <p:txBody>
+          <a:bodyPr wrap="none">
+            <a:spAutoFit/>
+          </a:bodyPr>
+          <a:lstStyle/>
+          <a:p>
+            <a:pPr algn="ctr">
+              <a:defRPr sz="3400" b="1">
+                <a:solidFill>
+                  <a:srgbClr val="2B6CB0"/>
+                </a:solidFill>
+                <a:latin typeface="Calibri"/>
+              </a:defRPr>
+            </a:pPr>
+            <a:r>
+              <a:t>9.3%</a:t>
+            </a:r>
+          </a:p>
+        </p:txBody>
+      </p:sp>
+      <p:sp>
+        <p:nvSpPr>
+          <p:cNvPr id="14" name="TextBox 13"/>
+          <p:cNvSpPr txBox="1"/>
+          <p:nvPr/>
+        </p:nvSpPr>
+        <p:spPr>
+          <a:xfrm>
+            <a:off x="8219236" y="2377440"/>
+            <a:ext cx="3332378" cy="548640"/>
+          </a:xfrm>
+          <a:prstGeom prst="rect">
+            <a:avLst/>
+          </a:prstGeom>
+          <a:noFill/>
+        </p:spPr>
+        <p:txBody>
+          <a:bodyPr wrap="square">
+            <a:spAutoFit/>
+          </a:bodyPr>
+          <a:lstStyle/>
+          <a:p>
+            <a:pPr algn="ctr">
+              <a:defRPr sz="1200">
+                <a:solidFill>
+                  <a:srgbClr val="64748B"/>
+                </a:solidFill>
+                <a:latin typeface="Calibri"/>
+              </a:defRPr>
+            </a:pPr>
+            <a:r>
+              <a:t>Equal Error Rate</a:t>
+            </a:r>
+          </a:p>
+          <a:p>
+            <a:pPr algn="ctr">
+              <a:defRPr sz="1200">
+                <a:solidFill>
+                  <a:srgbClr val="64748B"/>
+                </a:solidFill>
+                <a:latin typeface="Calibri"/>
+              </a:defRPr>
+            </a:pPr>
+            <a:r>
+              <a:t>(ASVspoof's own metric)</a:t>
+            </a:r>
+          </a:p>
+        </p:txBody>
+      </p:sp>
+      <p:sp>
+        <p:nvSpPr>
+          <p:cNvPr id="15" name="TextBox 14"/>
+          <p:cNvSpPr txBox="1"/>
+          <p:nvPr/>
+        </p:nvSpPr>
+        <p:spPr>
+          <a:xfrm>
+            <a:off x="548640" y="3246120"/>
+            <a:ext cx="11094415" cy="3154680"/>
+          </a:xfrm>
+          <a:prstGeom prst="rect">
+            <a:avLst/>
+          </a:prstGeom>
+          <a:noFill/>
+        </p:spPr>
+        <p:txBody>
+          <a:bodyPr wrap="square">
+            <a:spAutoFit/>
+          </a:bodyPr>
+          <a:lstStyle/>
+          <a:p>
+            <a:pPr>
+              <a:spcAft>
+                <a:spcPts val="1200"/>
+              </a:spcAft>
+              <a:defRPr sz="1600">
+                <a:solidFill>
+                  <a:srgbClr val="1A202C"/>
+                </a:solidFill>
+                <a:latin typeface="Calibri"/>
+              </a:defRPr>
+            </a:pPr>
+            <a:r>
+              <a:t>•  Dev accuracy at the default threshold (94.3%) looked strong, but the model was quietly biased toward the majority class: it caught spoof reliably, bonafide much less so.</a:t>
+            </a:r>
+          </a:p>
+          <a:p>
+            <a:pPr>
+              <a:spcAft>
+                <a:spcPts val="1200"/>
+              </a:spcAft>
+              <a:defRPr sz="1600">
+                <a:solidFill>
+                  <a:srgbClr val="1A202C"/>
+                </a:solidFill>
+                <a:latin typeface="Calibri"/>
+              </a:defRPr>
+            </a:pPr>
+            <a:r>
+              <a:t>•  Fix: the model artifact now stores its own EER-optimal decision threshold, used everywhere (streaming consumer, web app) instead of scikit-learn's default 0.5.</a:t>
+            </a:r>
+          </a:p>
+          <a:p>
+            <a:pPr>
+              <a:spcAft>
+                <a:spcPts val="1200"/>
+              </a:spcAft>
+              <a:defRPr sz="1600">
+                <a:solidFill>
+                  <a:srgbClr val="1A202C"/>
+                </a:solidFill>
+                <a:latin typeface="Calibri"/>
+              </a:defRPr>
+            </a:pPr>
+            <a:r>
+              <a:t>•  Independently re-confirmed on live Kafka-streamed eval data, not just the dev set it was tuned on — bonafide accuracy went 29.7% → 91.5% on the streamed sample too.</a:t>
             </a:r>
           </a:p>
         </p:txBody>
@@ -6841,7 +7314,7 @@
               </a:defRPr>
             </a:pPr>
             <a:r>
-              <a:t>Results — what the model learned, and how sure it is</a:t>
+              <a:t>Results — ROC curve &amp; confusion matrix</a:t>
             </a:r>
           </a:p>
         </p:txBody>
@@ -6884,7 +7357,7 @@
       </p:sp>
       <p:pic>
         <p:nvPicPr>
-          <p:cNvPr id="6" name="Picture 5" descr="feature_importance.png"/>
+          <p:cNvPr id="6" name="Picture 5" descr="roc_curve.png"/>
           <p:cNvPicPr>
             <a:picLocks noChangeAspect="1"/>
           </p:cNvPicPr>
@@ -6898,8 +7371,8 @@
         </p:blipFill>
         <p:spPr>
           <a:xfrm>
-            <a:off x="548640" y="2059991"/>
-            <a:ext cx="5410047" cy="3606698"/>
+            <a:off x="807643" y="1417320"/>
+            <a:ext cx="4892040" cy="4892040"/>
           </a:xfrm>
           <a:prstGeom prst="rect">
             <a:avLst/>
@@ -6908,7 +7381,7 @@
       </p:pic>
       <p:pic>
         <p:nvPicPr>
-          <p:cNvPr id="7" name="Picture 6" descr="confidence_histogram.png"/>
+          <p:cNvPr id="7" name="Picture 6" descr="confusion_matrix.png"/>
           <p:cNvPicPr>
             <a:picLocks noChangeAspect="1"/>
           </p:cNvPicPr>
@@ -6922,8 +7395,8 @@
         </p:blipFill>
         <p:spPr>
           <a:xfrm>
-            <a:off x="6233007" y="2059991"/>
-            <a:ext cx="5410047" cy="3606698"/>
+            <a:off x="6492010" y="1417320"/>
+            <a:ext cx="4892040" cy="4892040"/>
           </a:xfrm>
           <a:prstGeom prst="rect">
             <a:avLst/>
@@ -6961,7 +7434,7 @@
               </a:defRPr>
             </a:pPr>
             <a:r>
-              <a:t>Left: top acoustic features (MFCC variance dominates). Right: confidence, correct vs. incorrect calls.</a:t>
+              <a:t>Left: both candidate models, deployed model's EER point marked. Right: streamed eval predictions.</a:t>
             </a:r>
           </a:p>
         </p:txBody>
@@ -7111,7 +7584,7 @@
               </a:defRPr>
             </a:pPr>
             <a:r>
-              <a:t>Results — accuracy by attack type</a:t>
+              <a:t>Results — what the model learned, and how sure it is</a:t>
             </a:r>
           </a:p>
         </p:txBody>
@@ -7119,42 +7592,6 @@
       <p:sp>
         <p:nvSpPr>
           <p:cNvPr id="5" name="TextBox 4"/>
-          <p:cNvSpPr txBox="1"/>
-          <p:nvPr/>
-        </p:nvSpPr>
-        <p:spPr>
-          <a:xfrm>
-            <a:off x="548640" y="658368"/>
-            <a:ext cx="11094415" cy="365760"/>
-          </a:xfrm>
-          <a:prstGeom prst="rect">
-            <a:avLst/>
-          </a:prstGeom>
-          <a:noFill/>
-        </p:spPr>
-        <p:txBody>
-          <a:bodyPr wrap="none">
-            <a:spAutoFit/>
-          </a:bodyPr>
-          <a:lstStyle/>
-          <a:p>
-            <a:pPr>
-              <a:defRPr sz="1300">
-                <a:solidFill>
-                  <a:srgbClr val="CBD5E1"/>
-                </a:solidFill>
-                <a:latin typeface="Calibri"/>
-              </a:defRPr>
-            </a:pPr>
-            <a:r>
-              <a:t>Streamed eval predictions, near-perfect on most TTS/VC systems</a:t>
-            </a:r>
-          </a:p>
-        </p:txBody>
-      </p:sp>
-      <p:sp>
-        <p:nvSpPr>
-          <p:cNvPr id="6" name="TextBox 5"/>
           <p:cNvSpPr txBox="1"/>
           <p:nvPr/>
         </p:nvSpPr>
@@ -7190,7 +7627,7 @@
       </p:sp>
       <p:pic>
         <p:nvPicPr>
-          <p:cNvPr id="7" name="Picture 6" descr="accuracy_by_attack.png"/>
+          <p:cNvPr id="6" name="Picture 5" descr="feature_importance.png"/>
           <p:cNvPicPr>
             <a:picLocks noChangeAspect="1"/>
           </p:cNvPicPr>
@@ -7204,14 +7641,74 @@
         </p:blipFill>
         <p:spPr>
           <a:xfrm>
-            <a:off x="1203807" y="1417320"/>
-            <a:ext cx="9784080" cy="4892040"/>
+            <a:off x="548640" y="2059991"/>
+            <a:ext cx="5410047" cy="3606698"/>
           </a:xfrm>
           <a:prstGeom prst="rect">
             <a:avLst/>
           </a:prstGeom>
         </p:spPr>
       </p:pic>
+      <p:pic>
+        <p:nvPicPr>
+          <p:cNvPr id="7" name="Picture 6" descr="confidence_histogram.png"/>
+          <p:cNvPicPr>
+            <a:picLocks noChangeAspect="1"/>
+          </p:cNvPicPr>
+          <p:nvPr/>
+        </p:nvPicPr>
+        <p:blipFill>
+          <a:blip r:embed="rId3"/>
+          <a:stretch>
+            <a:fillRect/>
+          </a:stretch>
+        </p:blipFill>
+        <p:spPr>
+          <a:xfrm>
+            <a:off x="6233007" y="2059991"/>
+            <a:ext cx="5410047" cy="3606698"/>
+          </a:xfrm>
+          <a:prstGeom prst="rect">
+            <a:avLst/>
+          </a:prstGeom>
+        </p:spPr>
+      </p:pic>
+      <p:sp>
+        <p:nvSpPr>
+          <p:cNvPr id="8" name="TextBox 7"/>
+          <p:cNvSpPr txBox="1"/>
+          <p:nvPr/>
+        </p:nvSpPr>
+        <p:spPr>
+          <a:xfrm>
+            <a:off x="548640" y="6400800"/>
+            <a:ext cx="11094415" cy="365760"/>
+          </a:xfrm>
+          <a:prstGeom prst="rect">
+            <a:avLst/>
+          </a:prstGeom>
+          <a:noFill/>
+        </p:spPr>
+        <p:txBody>
+          <a:bodyPr wrap="square">
+            <a:spAutoFit/>
+          </a:bodyPr>
+          <a:lstStyle/>
+          <a:p>
+            <a:pPr algn="ctr">
+              <a:defRPr sz="1200" b="0">
+                <a:solidFill>
+                  <a:srgbClr val="64748B"/>
+                </a:solidFill>
+                <a:latin typeface="Calibri"/>
+              </a:defRPr>
+            </a:pPr>
+            <a:r>
+              <a:t>Left: top acoustic features (MFCC variance dominates). Right: confidence, correct vs. incorrect calls.</a:t>
+            </a:r>
+          </a:p>
+        </p:txBody>
+      </p:sp>
     </p:spTree>
   </p:cSld>
   <p:clrMapOvr>
@@ -7357,7 +7854,7 @@
               </a:defRPr>
             </a:pPr>
             <a:r>
-              <a:t>AI capability 2 — embeddings &amp; semantic search</a:t>
+              <a:t>Results — accuracy by attack type</a:t>
             </a:r>
           </a:p>
         </p:txBody>
@@ -7365,6 +7862,42 @@
       <p:sp>
         <p:nvSpPr>
           <p:cNvPr id="5" name="TextBox 4"/>
+          <p:cNvSpPr txBox="1"/>
+          <p:nvPr/>
+        </p:nvSpPr>
+        <p:spPr>
+          <a:xfrm>
+            <a:off x="548640" y="658368"/>
+            <a:ext cx="11094415" cy="365760"/>
+          </a:xfrm>
+          <a:prstGeom prst="rect">
+            <a:avLst/>
+          </a:prstGeom>
+          <a:noFill/>
+        </p:spPr>
+        <p:txBody>
+          <a:bodyPr wrap="none">
+            <a:spAutoFit/>
+          </a:bodyPr>
+          <a:lstStyle/>
+          <a:p>
+            <a:pPr>
+              <a:defRPr sz="1300">
+                <a:solidFill>
+                  <a:srgbClr val="CBD5E1"/>
+                </a:solidFill>
+                <a:latin typeface="Calibri"/>
+              </a:defRPr>
+            </a:pPr>
+            <a:r>
+              <a:t>Streamed eval predictions, near-perfect on most TTS/VC systems</a:t>
+            </a:r>
+          </a:p>
+        </p:txBody>
+      </p:sp>
+      <p:sp>
+        <p:nvSpPr>
+          <p:cNvPr id="6" name="TextBox 5"/>
           <p:cNvSpPr txBox="1"/>
           <p:nvPr/>
         </p:nvSpPr>
@@ -7398,141 +7931,30 @@
           </a:p>
         </p:txBody>
       </p:sp>
-      <p:sp>
-        <p:nvSpPr>
-          <p:cNvPr id="6" name="TextBox 5"/>
-          <p:cNvSpPr txBox="1"/>
-          <p:nvPr/>
-        </p:nvSpPr>
-        <p:spPr>
-          <a:xfrm>
-            <a:off x="548640" y="1417320"/>
-            <a:ext cx="11094415" cy="4983480"/>
-          </a:xfrm>
-          <a:prstGeom prst="rect">
-            <a:avLst/>
-          </a:prstGeom>
-          <a:noFill/>
-        </p:spPr>
-        <p:txBody>
-          <a:bodyPr wrap="square">
-            <a:spAutoFit/>
-          </a:bodyPr>
-          <a:lstStyle/>
-          <a:p>
-            <a:pPr>
-              <a:spcAft>
-                <a:spcPts val="1000"/>
-              </a:spcAft>
-              <a:defRPr sz="1900">
-                <a:solidFill>
-                  <a:srgbClr val="1A202C"/>
-                </a:solidFill>
-                <a:latin typeface="Calibri"/>
-              </a:defRPr>
-            </a:pPr>
-            <a:r>
-              <a:t>•  The same acoustic feature vectors double as embeddings — no separate embedding model</a:t>
-            </a:r>
-          </a:p>
-          <a:p>
-            <a:pPr>
-              <a:spcAft>
-                <a:spcPts val="1000"/>
-              </a:spcAft>
-              <a:defRPr sz="1900">
-                <a:solidFill>
-                  <a:srgbClr val="1A202C"/>
-                </a:solidFill>
-                <a:latin typeface="Calibri"/>
-              </a:defRPr>
-            </a:pPr>
-            <a:r>
-              <a:t>•  Standardized (zero mean, unit variance) so cosine similarity isn't dominated by whichever</a:t>
-            </a:r>
-          </a:p>
-          <a:p>
-            <a:pPr lvl="1">
-              <a:spcAft>
-                <a:spcPts val="1000"/>
-              </a:spcAft>
-              <a:defRPr sz="1600">
-                <a:solidFill>
-                  <a:srgbClr val="64748B"/>
-                </a:solidFill>
-                <a:latin typeface="Calibri"/>
-              </a:defRPr>
-            </a:pPr>
-            <a:r>
-              <a:t>–  feature happens to have the largest raw scale</a:t>
-            </a:r>
-          </a:p>
-          <a:p>
-            <a:pPr>
-              <a:spcAft>
-                <a:spcPts val="1000"/>
-              </a:spcAft>
-              <a:defRPr sz="1900">
-                <a:solidFill>
-                  <a:srgbClr val="1A202C"/>
-                </a:solidFill>
-                <a:latin typeface="Calibri"/>
-              </a:defRPr>
-            </a:pPr>
-            <a:r>
-              <a:t>•  Indexed into Elasticsearch as dense_vector fields, added to the existing index in place</a:t>
-            </a:r>
-          </a:p>
-          <a:p>
-            <a:pPr lvl="1">
-              <a:spcAft>
-                <a:spcPts val="1000"/>
-              </a:spcAft>
-              <a:defRPr sz="1600">
-                <a:solidFill>
-                  <a:srgbClr val="64748B"/>
-                </a:solidFill>
-                <a:latin typeface="Calibri"/>
-              </a:defRPr>
-            </a:pPr>
-            <a:r>
-              <a:t>–  (a mapping update, not a reindex — the 50k+ documents were already there)</a:t>
-            </a:r>
-          </a:p>
-          <a:p>
-            <a:pPr>
-              <a:spcAft>
-                <a:spcPts val="1000"/>
-              </a:spcAft>
-              <a:defRPr sz="1900">
-                <a:solidFill>
-                  <a:srgbClr val="1A202C"/>
-                </a:solidFill>
-                <a:latin typeface="Calibri"/>
-              </a:defRPr>
-            </a:pPr>
-            <a:r>
-              <a:t>•  Powers /classify's "most acoustically similar training clips" — k-NN search, playable</a:t>
-            </a:r>
-          </a:p>
-          <a:p>
-            <a:pPr lvl="1">
-              <a:spcAft>
-                <a:spcPts val="1000"/>
-              </a:spcAft>
-              <a:defRPr sz="1600">
-                <a:solidFill>
-                  <a:srgbClr val="64748B"/>
-                </a:solidFill>
-                <a:latin typeface="Calibri"/>
-              </a:defRPr>
-            </a:pPr>
-            <a:r>
-              <a:t>–  in the browser, replacing a keyword match with genuine semantic search</a:t>
-            </a:r>
-          </a:p>
-        </p:txBody>
-      </p:sp>
+      <p:pic>
+        <p:nvPicPr>
+          <p:cNvPr id="7" name="Picture 6" descr="accuracy_by_attack.png"/>
+          <p:cNvPicPr>
+            <a:picLocks noChangeAspect="1"/>
+          </p:cNvPicPr>
+          <p:nvPr/>
+        </p:nvPicPr>
+        <p:blipFill>
+          <a:blip r:embed="rId2"/>
+          <a:stretch>
+            <a:fillRect/>
+          </a:stretch>
+        </p:blipFill>
+        <p:spPr>
+          <a:xfrm>
+            <a:off x="1203807" y="1417320"/>
+            <a:ext cx="9784080" cy="4892040"/>
+          </a:xfrm>
+          <a:prstGeom prst="rect">
+            <a:avLst/>
+          </a:prstGeom>
+        </p:spPr>
+      </p:pic>
     </p:spTree>
   </p:cSld>
   <p:clrMapOvr>

--- a/docs/slides/slides.pptx
+++ b/docs/slides/slides.pptx
@@ -19,6 +19,12 @@
     <p:sldId id="267" r:id="rId18"/>
     <p:sldId id="268" r:id="rId19"/>
     <p:sldId id="269" r:id="rId20"/>
+    <p:sldId id="270" r:id="rId21"/>
+    <p:sldId id="271" r:id="rId22"/>
+    <p:sldId id="272" r:id="rId23"/>
+    <p:sldId id="273" r:id="rId24"/>
+    <p:sldId id="274" r:id="rId25"/>
+    <p:sldId id="275" r:id="rId26"/>
   </p:sldIdLst>
   <p:sldSz cx="12191695" cy="6858000" type="screen4x3"/>
   <p:notesSz cx="6858000" cy="9144000"/>
@@ -3450,7 +3456,7 @@
               </a:defRPr>
             </a:pPr>
             <a:r>
-              <a:t>AI capability 2 — embeddings &amp; semantic search</a:t>
+              <a:t>How EER is calculated</a:t>
             </a:r>
           </a:p>
         </p:txBody>
@@ -3458,6 +3464,42 @@
       <p:sp>
         <p:nvSpPr>
           <p:cNvPr id="5" name="TextBox 4"/>
+          <p:cNvSpPr txBox="1"/>
+          <p:nvPr/>
+        </p:nvSpPr>
+        <p:spPr>
+          <a:xfrm>
+            <a:off x="548640" y="658368"/>
+            <a:ext cx="11094415" cy="365760"/>
+          </a:xfrm>
+          <a:prstGeom prst="rect">
+            <a:avLst/>
+          </a:prstGeom>
+          <a:noFill/>
+        </p:spPr>
+        <p:txBody>
+          <a:bodyPr wrap="none">
+            <a:spAutoFit/>
+          </a:bodyPr>
+          <a:lstStyle/>
+          <a:p>
+            <a:pPr>
+              <a:defRPr sz="1300">
+                <a:solidFill>
+                  <a:srgbClr val="CBD5E1"/>
+                </a:solidFill>
+                <a:latin typeface="Calibri"/>
+              </a:defRPr>
+            </a:pPr>
+            <a:r>
+              <a:t>The metric the ASVspoof challenge itself is scored on</a:t>
+            </a:r>
+          </a:p>
+        </p:txBody>
+      </p:sp>
+      <p:sp>
+        <p:nvSpPr>
+          <p:cNvPr id="6" name="TextBox 5"/>
           <p:cNvSpPr txBox="1"/>
           <p:nvPr/>
         </p:nvSpPr>
@@ -3493,7 +3535,7 @@
       </p:sp>
       <p:sp>
         <p:nvSpPr>
-          <p:cNvPr id="6" name="TextBox 5"/>
+          <p:cNvPr id="7" name="TextBox 6"/>
           <p:cNvSpPr txBox="1"/>
           <p:nvPr/>
         </p:nvSpPr>
@@ -3517,7 +3559,7 @@
               <a:spcAft>
                 <a:spcPts val="1200"/>
               </a:spcAft>
-              <a:defRPr sz="1900">
+              <a:defRPr sz="1700">
                 <a:solidFill>
                   <a:srgbClr val="1A202C"/>
                 </a:solidFill>
@@ -3525,7 +3567,7 @@
               </a:defRPr>
             </a:pPr>
             <a:r>
-              <a:t>•  The same acoustic feature vectors double as embeddings — no separate embedding model needed.</a:t>
+              <a:t>•  Score every dev utterance with the model, giving each one a P(spoof) between 0 and 1.</a:t>
             </a:r>
           </a:p>
           <a:p>
@@ -3533,7 +3575,7 @@
               <a:spcAft>
                 <a:spcPts val="1200"/>
               </a:spcAft>
-              <a:defRPr sz="1900">
+              <a:defRPr sz="1700">
                 <a:solidFill>
                   <a:srgbClr val="1A202C"/>
                 </a:solidFill>
@@ -3541,7 +3583,7 @@
               </a:defRPr>
             </a:pPr>
             <a:r>
-              <a:t>•  Standardized (zero mean, unit variance) so cosine similarity isn't dominated by whichever feature happens to have the largest raw scale.</a:t>
+              <a:t>•  Sweep every possible decision threshold and, at each one, compute two error rates: the false-acceptance rate (bonafide clips wrongly called spoof) and the false-rejection rate (spoof clips wrongly called bonafide).</a:t>
             </a:r>
           </a:p>
           <a:p>
@@ -3549,7 +3591,7 @@
               <a:spcAft>
                 <a:spcPts val="1200"/>
               </a:spcAft>
-              <a:defRPr sz="1900">
+              <a:defRPr sz="1700">
                 <a:solidFill>
                   <a:srgbClr val="1A202C"/>
                 </a:solidFill>
@@ -3557,7 +3599,7 @@
               </a:defRPr>
             </a:pPr>
             <a:r>
-              <a:t>•  Indexed into Elasticsearch as dense_vector fields, added to the existing index in place (a mapping update, not a reindex — the 50k+ documents were already there).</a:t>
+              <a:t>•  As the threshold moves, one error rate goes up while the other goes down — the Equal Error Rate is the threshold where the two curves cross, i.e. where both error rates are equal.</a:t>
             </a:r>
           </a:p>
           <a:p>
@@ -3565,7 +3607,7 @@
               <a:spcAft>
                 <a:spcPts val="1200"/>
               </a:spcAft>
-              <a:defRPr sz="1900">
+              <a:defRPr sz="1700">
                 <a:solidFill>
                   <a:srgbClr val="1A202C"/>
                 </a:solidFill>
@@ -3573,7 +3615,146 @@
               </a:defRPr>
             </a:pPr>
             <a:r>
-              <a:t>•  Powers /classify's "most acoustically similar training clips" — k-NN search, playable in the browser, replacing a keyword match with genuine semantic search.</a:t>
+              <a:t>•  EER itself is that shared error rate at the crossing point; the threshold at that point is what actually gets deployed (see the model artifact in common/model.py).</a:t>
+            </a:r>
+          </a:p>
+          <a:p>
+            <a:pPr>
+              <a:spcAft>
+                <a:spcPts val="1200"/>
+              </a:spcAft>
+              <a:defRPr sz="1700">
+                <a:solidFill>
+                  <a:srgbClr val="1A202C"/>
+                </a:solidFill>
+                <a:latin typeface="Calibri"/>
+              </a:defRPr>
+            </a:pPr>
+            <a:r>
+              <a:t>•  Lower EER = better separation between the two classes. 0% would mean a threshold exists with zero errors of either kind; this project's deployed model scores 9.26%.</a:t>
+            </a:r>
+          </a:p>
+        </p:txBody>
+      </p:sp>
+      <p:sp>
+        <p:nvSpPr>
+          <p:cNvPr id="8" name="Rounded Rectangle 7"/>
+          <p:cNvSpPr/>
+          <p:nvPr/>
+        </p:nvSpPr>
+        <p:spPr>
+          <a:xfrm>
+            <a:off x="548640" y="5349240"/>
+            <a:ext cx="11094415" cy="1051560"/>
+          </a:xfrm>
+          <a:prstGeom prst="roundRect">
+            <a:avLst>
+              <a:gd name="adj" fmla="val 6000"/>
+            </a:avLst>
+          </a:prstGeom>
+          <a:solidFill>
+            <a:srgbClr val="FFFFFF"/>
+          </a:solidFill>
+          <a:ln w="12700">
+            <a:solidFill>
+              <a:srgbClr val="E2E8F0"/>
+            </a:solidFill>
+          </a:ln>
+          <a:effectLst/>
+        </p:spPr>
+        <p:style>
+          <a:lnRef idx="1">
+            <a:schemeClr val="accent1"/>
+          </a:lnRef>
+          <a:fillRef idx="3">
+            <a:schemeClr val="accent1"/>
+          </a:fillRef>
+          <a:effectRef idx="2">
+            <a:schemeClr val="accent1"/>
+          </a:effectRef>
+          <a:fontRef idx="minor">
+            <a:schemeClr val="lt1"/>
+          </a:fontRef>
+        </p:style>
+        <p:txBody>
+          <a:bodyPr rtlCol="0" anchor="ctr"/>
+          <a:lstStyle/>
+          <a:p>
+            <a:pPr algn="ctr"/>
+          </a:p>
+        </p:txBody>
+      </p:sp>
+      <p:sp>
+        <p:nvSpPr>
+          <p:cNvPr id="9" name="TextBox 8"/>
+          <p:cNvSpPr txBox="1"/>
+          <p:nvPr/>
+        </p:nvSpPr>
+        <p:spPr>
+          <a:xfrm>
+            <a:off x="777240" y="5468112"/>
+            <a:ext cx="10637215" cy="868680"/>
+          </a:xfrm>
+          <a:prstGeom prst="rect">
+            <a:avLst/>
+          </a:prstGeom>
+          <a:noFill/>
+        </p:spPr>
+        <p:txBody>
+          <a:bodyPr wrap="square">
+            <a:spAutoFit/>
+          </a:bodyPr>
+          <a:lstStyle/>
+          <a:p>
+            <a:pPr>
+              <a:defRPr sz="1300">
+                <a:solidFill>
+                  <a:srgbClr val="0F2942"/>
+                </a:solidFill>
+                <a:latin typeface="Consolas"/>
+              </a:defRPr>
+            </a:pPr>
+            <a:r>
+              <a:t>fpr, tpr, thresholds = roc_curve(y_true_spoof, y_score_spoof)</a:t>
+            </a:r>
+          </a:p>
+          <a:p>
+            <a:pPr>
+              <a:defRPr sz="1300">
+                <a:solidFill>
+                  <a:srgbClr val="0F2942"/>
+                </a:solidFill>
+                <a:latin typeface="Consolas"/>
+              </a:defRPr>
+            </a:pPr>
+            <a:r>
+              <a:t>fnr = 1 - tpr</a:t>
+            </a:r>
+          </a:p>
+          <a:p>
+            <a:pPr>
+              <a:defRPr sz="1300">
+                <a:solidFill>
+                  <a:srgbClr val="0F2942"/>
+                </a:solidFill>
+                <a:latin typeface="Consolas"/>
+              </a:defRPr>
+            </a:pPr>
+            <a:r>
+              <a:t>eer_idx = argmin(abs(fnr - fpr))   # where the two curves are closest</a:t>
+            </a:r>
+          </a:p>
+          <a:p>
+            <a:pPr>
+              <a:defRPr sz="1300">
+                <a:solidFill>
+                  <a:srgbClr val="0F2942"/>
+                </a:solidFill>
+                <a:latin typeface="Consolas"/>
+              </a:defRPr>
+            </a:pPr>
+            <a:r>
+              <a:t>eer, threshold = (fpr[eer_idx] + fnr[eer_idx]) / 2,  thresholds[eer_idx]</a:t>
             </a:r>
           </a:p>
         </p:txBody>
@@ -3723,7 +3904,7 @@
               </a:defRPr>
             </a:pPr>
             <a:r>
-              <a:t>AI capability 3 — streaming enrichment</a:t>
+              <a:t>Results — the accuracy paradox, found and fixed</a:t>
             </a:r>
           </a:p>
         </p:txBody>
@@ -3736,8 +3917,92 @@
         </p:nvSpPr>
         <p:spPr>
           <a:xfrm>
-            <a:off x="548640" y="658368"/>
-            <a:ext cx="11094415" cy="365760"/>
+            <a:off x="11368735" y="6473952"/>
+            <a:ext cx="548640" cy="292608"/>
+          </a:xfrm>
+          <a:prstGeom prst="rect">
+            <a:avLst/>
+          </a:prstGeom>
+          <a:noFill/>
+        </p:spPr>
+        <p:txBody>
+          <a:bodyPr wrap="square">
+            <a:spAutoFit/>
+          </a:bodyPr>
+          <a:lstStyle/>
+          <a:p>
+            <a:pPr algn="r">
+              <a:defRPr sz="1100" b="0">
+                <a:solidFill>
+                  <a:srgbClr val="64748B"/>
+                </a:solidFill>
+                <a:latin typeface="Calibri"/>
+              </a:defRPr>
+            </a:pPr>
+            <a:r>
+              <a:t>10</a:t>
+            </a:r>
+          </a:p>
+        </p:txBody>
+      </p:sp>
+      <p:sp>
+        <p:nvSpPr>
+          <p:cNvPr id="6" name="Rounded Rectangle 5"/>
+          <p:cNvSpPr/>
+          <p:nvPr/>
+        </p:nvSpPr>
+        <p:spPr>
+          <a:xfrm>
+            <a:off x="548640" y="1417320"/>
+            <a:ext cx="3515258" cy="1554480"/>
+          </a:xfrm>
+          <a:prstGeom prst="roundRect">
+            <a:avLst>
+              <a:gd name="adj" fmla="val 6000"/>
+            </a:avLst>
+          </a:prstGeom>
+          <a:solidFill>
+            <a:srgbClr val="FFFFFF"/>
+          </a:solidFill>
+          <a:ln w="12700">
+            <a:solidFill>
+              <a:srgbClr val="E2E8F0"/>
+            </a:solidFill>
+          </a:ln>
+          <a:effectLst/>
+        </p:spPr>
+        <p:style>
+          <a:lnRef idx="1">
+            <a:schemeClr val="accent1"/>
+          </a:lnRef>
+          <a:fillRef idx="3">
+            <a:schemeClr val="accent1"/>
+          </a:fillRef>
+          <a:effectRef idx="2">
+            <a:schemeClr val="accent1"/>
+          </a:effectRef>
+          <a:fontRef idx="minor">
+            <a:schemeClr val="lt1"/>
+          </a:fontRef>
+        </p:style>
+        <p:txBody>
+          <a:bodyPr rtlCol="0" anchor="ctr"/>
+          <a:lstStyle/>
+          <a:p>
+            <a:pPr algn="ctr"/>
+          </a:p>
+        </p:txBody>
+      </p:sp>
+      <p:sp>
+        <p:nvSpPr>
+          <p:cNvPr id="7" name="TextBox 6"/>
+          <p:cNvSpPr txBox="1"/>
+          <p:nvPr/>
+        </p:nvSpPr>
+        <p:spPr>
+          <a:xfrm>
+            <a:off x="548640" y="1618488"/>
+            <a:ext cx="3515258" cy="731520"/>
           </a:xfrm>
           <a:prstGeom prst="rect">
             <a:avLst/>
@@ -3750,30 +4015,30 @@
           </a:bodyPr>
           <a:lstStyle/>
           <a:p>
-            <a:pPr>
-              <a:defRPr sz="1300">
-                <a:solidFill>
-                  <a:srgbClr val="CBD5E1"/>
-                </a:solidFill>
-                <a:latin typeface="Calibri"/>
-              </a:defRPr>
-            </a:pPr>
-            <a:r>
-              <a:t>Kafka producer/consumer, near-real-time scoring</a:t>
-            </a:r>
-          </a:p>
-        </p:txBody>
-      </p:sp>
-      <p:sp>
-        <p:nvSpPr>
-          <p:cNvPr id="6" name="TextBox 5"/>
+            <a:pPr algn="ctr">
+              <a:defRPr sz="3400" b="1">
+                <a:solidFill>
+                  <a:srgbClr val="DC2626"/>
+                </a:solidFill>
+                <a:latin typeface="Calibri"/>
+              </a:defRPr>
+            </a:pPr>
+            <a:r>
+              <a:t>80%</a:t>
+            </a:r>
+          </a:p>
+        </p:txBody>
+      </p:sp>
+      <p:sp>
+        <p:nvSpPr>
+          <p:cNvPr id="8" name="TextBox 7"/>
           <p:cNvSpPr txBox="1"/>
           <p:nvPr/>
         </p:nvSpPr>
         <p:spPr>
           <a:xfrm>
-            <a:off x="11368735" y="6473952"/>
-            <a:ext cx="548640" cy="292608"/>
+            <a:off x="640080" y="2377440"/>
+            <a:ext cx="3332378" cy="548640"/>
           </a:xfrm>
           <a:prstGeom prst="rect">
             <a:avLst/>
@@ -3786,8 +4051,8 @@
           </a:bodyPr>
           <a:lstStyle/>
           <a:p>
-            <a:pPr algn="r">
-              <a:defRPr sz="1100" b="0">
+            <a:pPr algn="ctr">
+              <a:defRPr sz="1200">
                 <a:solidFill>
                   <a:srgbClr val="64748B"/>
                 </a:solidFill>
@@ -3795,21 +4060,300 @@
               </a:defRPr>
             </a:pPr>
             <a:r>
-              <a:t>10</a:t>
-            </a:r>
-          </a:p>
-        </p:txBody>
-      </p:sp>
-      <p:sp>
-        <p:nvSpPr>
-          <p:cNvPr id="7" name="TextBox 6"/>
+              <a:t>Bonafide recall</a:t>
+            </a:r>
+          </a:p>
+          <a:p>
+            <a:pPr algn="ctr">
+              <a:defRPr sz="1200">
+                <a:solidFill>
+                  <a:srgbClr val="64748B"/>
+                </a:solidFill>
+                <a:latin typeface="Calibri"/>
+              </a:defRPr>
+            </a:pPr>
+            <a:r>
+              <a:t>at default 0.5 threshold</a:t>
+            </a:r>
+          </a:p>
+        </p:txBody>
+      </p:sp>
+      <p:sp>
+        <p:nvSpPr>
+          <p:cNvPr id="9" name="Rounded Rectangle 8"/>
+          <p:cNvSpPr/>
+          <p:nvPr/>
+        </p:nvSpPr>
+        <p:spPr>
+          <a:xfrm>
+            <a:off x="4338218" y="1417320"/>
+            <a:ext cx="3515258" cy="1554480"/>
+          </a:xfrm>
+          <a:prstGeom prst="roundRect">
+            <a:avLst>
+              <a:gd name="adj" fmla="val 6000"/>
+            </a:avLst>
+          </a:prstGeom>
+          <a:solidFill>
+            <a:srgbClr val="FFFFFF"/>
+          </a:solidFill>
+          <a:ln w="12700">
+            <a:solidFill>
+              <a:srgbClr val="E2E8F0"/>
+            </a:solidFill>
+          </a:ln>
+          <a:effectLst/>
+        </p:spPr>
+        <p:style>
+          <a:lnRef idx="1">
+            <a:schemeClr val="accent1"/>
+          </a:lnRef>
+          <a:fillRef idx="3">
+            <a:schemeClr val="accent1"/>
+          </a:fillRef>
+          <a:effectRef idx="2">
+            <a:schemeClr val="accent1"/>
+          </a:effectRef>
+          <a:fontRef idx="minor">
+            <a:schemeClr val="lt1"/>
+          </a:fontRef>
+        </p:style>
+        <p:txBody>
+          <a:bodyPr rtlCol="0" anchor="ctr"/>
+          <a:lstStyle/>
+          <a:p>
+            <a:pPr algn="ctr"/>
+          </a:p>
+        </p:txBody>
+      </p:sp>
+      <p:sp>
+        <p:nvSpPr>
+          <p:cNvPr id="10" name="TextBox 9"/>
           <p:cNvSpPr txBox="1"/>
           <p:nvPr/>
         </p:nvSpPr>
         <p:spPr>
           <a:xfrm>
-            <a:off x="548640" y="1417320"/>
-            <a:ext cx="11094415" cy="4983480"/>
+            <a:off x="4338218" y="1618488"/>
+            <a:ext cx="3515258" cy="731520"/>
+          </a:xfrm>
+          <a:prstGeom prst="rect">
+            <a:avLst/>
+          </a:prstGeom>
+          <a:noFill/>
+        </p:spPr>
+        <p:txBody>
+          <a:bodyPr wrap="none">
+            <a:spAutoFit/>
+          </a:bodyPr>
+          <a:lstStyle/>
+          <a:p>
+            <a:pPr algn="ctr">
+              <a:defRPr sz="3400" b="1">
+                <a:solidFill>
+                  <a:srgbClr val="0D9488"/>
+                </a:solidFill>
+                <a:latin typeface="Calibri"/>
+              </a:defRPr>
+            </a:pPr>
+            <a:r>
+              <a:t>91%</a:t>
+            </a:r>
+          </a:p>
+        </p:txBody>
+      </p:sp>
+      <p:sp>
+        <p:nvSpPr>
+          <p:cNvPr id="11" name="TextBox 10"/>
+          <p:cNvSpPr txBox="1"/>
+          <p:nvPr/>
+        </p:nvSpPr>
+        <p:spPr>
+          <a:xfrm>
+            <a:off x="4429658" y="2377440"/>
+            <a:ext cx="3332378" cy="548640"/>
+          </a:xfrm>
+          <a:prstGeom prst="rect">
+            <a:avLst/>
+          </a:prstGeom>
+          <a:noFill/>
+        </p:spPr>
+        <p:txBody>
+          <a:bodyPr wrap="square">
+            <a:spAutoFit/>
+          </a:bodyPr>
+          <a:lstStyle/>
+          <a:p>
+            <a:pPr algn="ctr">
+              <a:defRPr sz="1200">
+                <a:solidFill>
+                  <a:srgbClr val="64748B"/>
+                </a:solidFill>
+                <a:latin typeface="Calibri"/>
+              </a:defRPr>
+            </a:pPr>
+            <a:r>
+              <a:t>Bonafide recall</a:t>
+            </a:r>
+          </a:p>
+          <a:p>
+            <a:pPr algn="ctr">
+              <a:defRPr sz="1200">
+                <a:solidFill>
+                  <a:srgbClr val="64748B"/>
+                </a:solidFill>
+                <a:latin typeface="Calibri"/>
+              </a:defRPr>
+            </a:pPr>
+            <a:r>
+              <a:t>at deployed EER threshold</a:t>
+            </a:r>
+          </a:p>
+        </p:txBody>
+      </p:sp>
+      <p:sp>
+        <p:nvSpPr>
+          <p:cNvPr id="12" name="Rounded Rectangle 11"/>
+          <p:cNvSpPr/>
+          <p:nvPr/>
+        </p:nvSpPr>
+        <p:spPr>
+          <a:xfrm>
+            <a:off x="8127796" y="1417320"/>
+            <a:ext cx="3515258" cy="1554480"/>
+          </a:xfrm>
+          <a:prstGeom prst="roundRect">
+            <a:avLst>
+              <a:gd name="adj" fmla="val 6000"/>
+            </a:avLst>
+          </a:prstGeom>
+          <a:solidFill>
+            <a:srgbClr val="FFFFFF"/>
+          </a:solidFill>
+          <a:ln w="12700">
+            <a:solidFill>
+              <a:srgbClr val="E2E8F0"/>
+            </a:solidFill>
+          </a:ln>
+          <a:effectLst/>
+        </p:spPr>
+        <p:style>
+          <a:lnRef idx="1">
+            <a:schemeClr val="accent1"/>
+          </a:lnRef>
+          <a:fillRef idx="3">
+            <a:schemeClr val="accent1"/>
+          </a:fillRef>
+          <a:effectRef idx="2">
+            <a:schemeClr val="accent1"/>
+          </a:effectRef>
+          <a:fontRef idx="minor">
+            <a:schemeClr val="lt1"/>
+          </a:fontRef>
+        </p:style>
+        <p:txBody>
+          <a:bodyPr rtlCol="0" anchor="ctr"/>
+          <a:lstStyle/>
+          <a:p>
+            <a:pPr algn="ctr"/>
+          </a:p>
+        </p:txBody>
+      </p:sp>
+      <p:sp>
+        <p:nvSpPr>
+          <p:cNvPr id="13" name="TextBox 12"/>
+          <p:cNvSpPr txBox="1"/>
+          <p:nvPr/>
+        </p:nvSpPr>
+        <p:spPr>
+          <a:xfrm>
+            <a:off x="8127796" y="1618488"/>
+            <a:ext cx="3515258" cy="731520"/>
+          </a:xfrm>
+          <a:prstGeom prst="rect">
+            <a:avLst/>
+          </a:prstGeom>
+          <a:noFill/>
+        </p:spPr>
+        <p:txBody>
+          <a:bodyPr wrap="none">
+            <a:spAutoFit/>
+          </a:bodyPr>
+          <a:lstStyle/>
+          <a:p>
+            <a:pPr algn="ctr">
+              <a:defRPr sz="3400" b="1">
+                <a:solidFill>
+                  <a:srgbClr val="2B6CB0"/>
+                </a:solidFill>
+                <a:latin typeface="Calibri"/>
+              </a:defRPr>
+            </a:pPr>
+            <a:r>
+              <a:t>9.3%</a:t>
+            </a:r>
+          </a:p>
+        </p:txBody>
+      </p:sp>
+      <p:sp>
+        <p:nvSpPr>
+          <p:cNvPr id="14" name="TextBox 13"/>
+          <p:cNvSpPr txBox="1"/>
+          <p:nvPr/>
+        </p:nvSpPr>
+        <p:spPr>
+          <a:xfrm>
+            <a:off x="8219236" y="2377440"/>
+            <a:ext cx="3332378" cy="548640"/>
+          </a:xfrm>
+          <a:prstGeom prst="rect">
+            <a:avLst/>
+          </a:prstGeom>
+          <a:noFill/>
+        </p:spPr>
+        <p:txBody>
+          <a:bodyPr wrap="square">
+            <a:spAutoFit/>
+          </a:bodyPr>
+          <a:lstStyle/>
+          <a:p>
+            <a:pPr algn="ctr">
+              <a:defRPr sz="1200">
+                <a:solidFill>
+                  <a:srgbClr val="64748B"/>
+                </a:solidFill>
+                <a:latin typeface="Calibri"/>
+              </a:defRPr>
+            </a:pPr>
+            <a:r>
+              <a:t>Equal Error Rate</a:t>
+            </a:r>
+          </a:p>
+          <a:p>
+            <a:pPr algn="ctr">
+              <a:defRPr sz="1200">
+                <a:solidFill>
+                  <a:srgbClr val="64748B"/>
+                </a:solidFill>
+                <a:latin typeface="Calibri"/>
+              </a:defRPr>
+            </a:pPr>
+            <a:r>
+              <a:t>(ASVspoof's own metric)</a:t>
+            </a:r>
+          </a:p>
+        </p:txBody>
+      </p:sp>
+      <p:sp>
+        <p:nvSpPr>
+          <p:cNvPr id="15" name="TextBox 14"/>
+          <p:cNvSpPr txBox="1"/>
+          <p:nvPr/>
+        </p:nvSpPr>
+        <p:spPr>
+          <a:xfrm>
+            <a:off x="548640" y="3246120"/>
+            <a:ext cx="11094415" cy="3154680"/>
           </a:xfrm>
           <a:prstGeom prst="rect">
             <a:avLst/>
@@ -3826,7 +4370,7 @@
               <a:spcAft>
                 <a:spcPts val="1200"/>
               </a:spcAft>
-              <a:defRPr sz="1900">
+              <a:defRPr sz="1600">
                 <a:solidFill>
                   <a:srgbClr val="1A202C"/>
                 </a:solidFill>
@@ -3834,7 +4378,7 @@
               </a:defRPr>
             </a:pPr>
             <a:r>
-              <a:t>•  Producer replays eval-set utterance events (a MinIO key, not the audio itself).</a:t>
+              <a:t>•  Dev accuracy at the default threshold (94.3%) looked strong, but the model was quietly biased toward the majority class: it caught spoof reliably, bonafide much less so.</a:t>
             </a:r>
           </a:p>
           <a:p>
@@ -3842,7 +4386,7 @@
               <a:spcAft>
                 <a:spcPts val="1200"/>
               </a:spcAft>
-              <a:defRPr sz="1900">
+              <a:defRPr sz="1600">
                 <a:solidFill>
                   <a:srgbClr val="1A202C"/>
                 </a:solidFill>
@@ -3850,7 +4394,7 @@
               </a:defRPr>
             </a:pPr>
             <a:r>
-              <a:t>•  Consumer fetches the clip, extracts features, scores it at the deployed EER threshold, and writes an enriched prediction to Elasticsearch — one document per utterance, live.</a:t>
+              <a:t>•  Fix: the model artifact now stores its own EER-optimal decision threshold, used everywhere (streaming consumer, web app) instead of scikit-learn's default 0.5.</a:t>
             </a:r>
           </a:p>
           <a:p>
@@ -3858,7 +4402,7 @@
               <a:spcAft>
                 <a:spcPts val="1200"/>
               </a:spcAft>
-              <a:defRPr sz="1900">
+              <a:defRPr sz="1600">
                 <a:solidFill>
                   <a:srgbClr val="1A202C"/>
                 </a:solidFill>
@@ -3866,23 +4410,7 @@
               </a:defRPr>
             </a:pPr>
             <a:r>
-              <a:t>•  Same feature-extraction and model code as the batch job and the web app — one implementation applied three ways, not three separate things to maintain and defend.</a:t>
-            </a:r>
-          </a:p>
-          <a:p>
-            <a:pPr>
-              <a:spcAft>
-                <a:spcPts val="1200"/>
-              </a:spcAft>
-              <a:defRPr sz="1900">
-                <a:solidFill>
-                  <a:srgbClr val="1A202C"/>
-                </a:solidFill>
-                <a:latin typeface="Calibri"/>
-              </a:defRPr>
-            </a:pPr>
-            <a:r>
-              <a:t>•  A named consumer group tracks offset, so re-running resumes instead of re-scoring.</a:t>
+              <a:t>•  Independently re-confirmed on live Kafka-streamed eval data, not just the dev set it was tuned on — bonafide accuracy went 29.7% → 91.5% on the streamed sample too.</a:t>
             </a:r>
           </a:p>
         </p:txBody>
@@ -4032,7 +4560,7 @@
               </a:defRPr>
             </a:pPr>
             <a:r>
-              <a:t>Live demo</a:t>
+              <a:t>Pipeline stage 5 - Insights</a:t>
             </a:r>
           </a:p>
         </p:txBody>
@@ -4040,6 +4568,42 @@
       <p:sp>
         <p:nvSpPr>
           <p:cNvPr id="5" name="TextBox 4"/>
+          <p:cNvSpPr txBox="1"/>
+          <p:nvPr/>
+        </p:nvSpPr>
+        <p:spPr>
+          <a:xfrm>
+            <a:off x="548640" y="658368"/>
+            <a:ext cx="11094415" cy="365760"/>
+          </a:xfrm>
+          <a:prstGeom prst="rect">
+            <a:avLst/>
+          </a:prstGeom>
+          <a:noFill/>
+        </p:spPr>
+        <p:txBody>
+          <a:bodyPr wrap="none">
+            <a:spAutoFit/>
+          </a:bodyPr>
+          <a:lstStyle/>
+          <a:p>
+            <a:pPr>
+              <a:defRPr sz="1300">
+                <a:solidFill>
+                  <a:srgbClr val="CBD5E1"/>
+                </a:solidFill>
+                <a:latin typeface="Calibri"/>
+              </a:defRPr>
+            </a:pPr>
+            <a:r>
+              <a:t>insights.py — Elasticsearch aggregations -&gt; charts + RESULTS.md</a:t>
+            </a:r>
+          </a:p>
+        </p:txBody>
+      </p:sp>
+      <p:sp>
+        <p:nvSpPr>
+          <p:cNvPr id="6" name="TextBox 5"/>
           <p:cNvSpPr txBox="1"/>
           <p:nvPr/>
         </p:nvSpPr>
@@ -4075,7 +4639,7 @@
       </p:sp>
       <p:sp>
         <p:nvSpPr>
-          <p:cNvPr id="6" name="TextBox 5"/>
+          <p:cNvPr id="7" name="TextBox 6"/>
           <p:cNvSpPr txBox="1"/>
           <p:nvPr/>
         </p:nvSpPr>
@@ -4099,7 +4663,7 @@
               <a:spcAft>
                 <a:spcPts val="1200"/>
               </a:spcAft>
-              <a:defRPr sz="1800">
+              <a:defRPr sz="1700">
                 <a:solidFill>
                   <a:srgbClr val="1A202C"/>
                 </a:solidFill>
@@ -4107,7 +4671,7 @@
               </a:defRPr>
             </a:pPr>
             <a:r>
-              <a:t>•  /classify — upload a clip or record live from the microphone (captured via the Web Audio API, encoded to WAV client-side — no server changes needed for live recording).</a:t>
+              <a:t>•  Runs after the streaming consumer has written predictions — every number here is a live Elasticsearch aggregation query, nothing hand-typed or invented.</a:t>
             </a:r>
           </a:p>
           <a:p>
@@ -4115,7 +4679,7 @@
               <a:spcAft>
                 <a:spcPts val="1200"/>
               </a:spcAft>
-              <a:defRPr sz="1800">
+              <a:defRPr sz="1700">
                 <a:solidFill>
                   <a:srgbClr val="1A202C"/>
                 </a:solidFill>
@@ -4123,7 +4687,7 @@
               </a:defRPr>
             </a:pPr>
             <a:r>
-              <a:t>•  Returns Human / AI-generated + confidence, plus the 5 most similar training clips, each one playable right in the results, so you can hear what "similar" sounds like.</a:t>
+              <a:t>•  Computes overall and per-attack-type (A01–A19) detection accuracy, a confusion matrix, a confidence histogram, and class balance.</a:t>
             </a:r>
           </a:p>
           <a:p>
@@ -4131,7 +4695,7 @@
               <a:spcAft>
                 <a:spcPts val="1200"/>
               </a:spcAft>
-              <a:defRPr sz="1800">
+              <a:defRPr sz="1700">
                 <a:solidFill>
                   <a:srgbClr val="1A202C"/>
                 </a:solidFill>
@@ -4139,159 +4703,23 @@
               </a:defRPr>
             </a:pPr>
             <a:r>
-              <a:t>•  /dashboard — live Elasticsearch aggregations: model comparison, threshold trade-off, ROC curve, confusion matrix, feature importance, confidence calibration.</a:t>
-            </a:r>
-          </a:p>
-        </p:txBody>
-      </p:sp>
-      <p:sp>
-        <p:nvSpPr>
-          <p:cNvPr id="7" name="Rounded Rectangle 6">
-            <a:hlinkClick r:id="rId2"/>
-          </p:cNvPr>
-          <p:cNvSpPr/>
-          <p:nvPr/>
-        </p:nvSpPr>
-        <p:spPr>
-          <a:xfrm>
-            <a:off x="548640" y="5257800"/>
-            <a:ext cx="3291840" cy="594360"/>
-          </a:xfrm>
-          <a:prstGeom prst="roundRect">
-            <a:avLst>
-              <a:gd name="adj" fmla="val 6000"/>
-            </a:avLst>
-          </a:prstGeom>
-          <a:solidFill>
-            <a:srgbClr val="0D9488"/>
-          </a:solidFill>
-          <a:ln>
-            <a:noFill/>
-          </a:ln>
-          <a:effectLst/>
-        </p:spPr>
-        <p:style>
-          <a:lnRef idx="1">
-            <a:schemeClr val="accent1"/>
-          </a:lnRef>
-          <a:fillRef idx="3">
-            <a:schemeClr val="accent1"/>
-          </a:fillRef>
-          <a:effectRef idx="2">
-            <a:schemeClr val="accent1"/>
-          </a:effectRef>
-          <a:fontRef idx="minor">
-            <a:schemeClr val="lt1"/>
-          </a:fontRef>
-        </p:style>
-        <p:txBody>
-          <a:bodyPr rtlCol="0" anchor="ctr" wrap="square"/>
-          <a:lstStyle/>
-          <a:p>
-            <a:pPr algn="ctr">
-              <a:defRPr sz="1700" b="1">
-                <a:solidFill>
-                  <a:srgbClr val="FFFFFF"/>
-                </a:solidFill>
-                <a:latin typeface="Calibri"/>
-              </a:defRPr>
-            </a:pPr>
-            <a:r>
-              <a:t>▶  Open /classify</a:t>
-            </a:r>
-          </a:p>
-        </p:txBody>
-      </p:sp>
-      <p:sp>
-        <p:nvSpPr>
-          <p:cNvPr id="8" name="Rounded Rectangle 7">
-            <a:hlinkClick r:id="rId3"/>
-          </p:cNvPr>
-          <p:cNvSpPr/>
-          <p:nvPr/>
-        </p:nvSpPr>
-        <p:spPr>
-          <a:xfrm>
-            <a:off x="4114800" y="5257800"/>
-            <a:ext cx="3291840" cy="594360"/>
-          </a:xfrm>
-          <a:prstGeom prst="roundRect">
-            <a:avLst>
-              <a:gd name="adj" fmla="val 6000"/>
-            </a:avLst>
-          </a:prstGeom>
-          <a:solidFill>
-            <a:srgbClr val="2B6CB0"/>
-          </a:solidFill>
-          <a:ln>
-            <a:noFill/>
-          </a:ln>
-          <a:effectLst/>
-        </p:spPr>
-        <p:style>
-          <a:lnRef idx="1">
-            <a:schemeClr val="accent1"/>
-          </a:lnRef>
-          <a:fillRef idx="3">
-            <a:schemeClr val="accent1"/>
-          </a:fillRef>
-          <a:effectRef idx="2">
-            <a:schemeClr val="accent1"/>
-          </a:effectRef>
-          <a:fontRef idx="minor">
-            <a:schemeClr val="lt1"/>
-          </a:fontRef>
-        </p:style>
-        <p:txBody>
-          <a:bodyPr rtlCol="0" anchor="ctr" wrap="square"/>
-          <a:lstStyle/>
-          <a:p>
-            <a:pPr algn="ctr">
-              <a:defRPr sz="1700" b="1">
-                <a:solidFill>
-                  <a:srgbClr val="FFFFFF"/>
-                </a:solidFill>
-                <a:latin typeface="Calibri"/>
-              </a:defRPr>
-            </a:pPr>
-            <a:r>
-              <a:t>▶  Open /dashboard</a:t>
-            </a:r>
-          </a:p>
-        </p:txBody>
-      </p:sp>
-      <p:sp>
-        <p:nvSpPr>
-          <p:cNvPr id="9" name="TextBox 8"/>
-          <p:cNvSpPr txBox="1"/>
-          <p:nvPr/>
-        </p:nvSpPr>
-        <p:spPr>
-          <a:xfrm>
-            <a:off x="548640" y="5989320"/>
-            <a:ext cx="11094415" cy="365760"/>
-          </a:xfrm>
-          <a:prstGeom prst="rect">
-            <a:avLst/>
-          </a:prstGeom>
-          <a:noFill/>
-        </p:spPr>
-        <p:txBody>
-          <a:bodyPr wrap="square">
-            <a:spAutoFit/>
-          </a:bodyPr>
-          <a:lstStyle/>
-          <a:p>
-            <a:pPr algn="l">
-              <a:defRPr sz="1100" b="0">
-                <a:solidFill>
-                  <a:srgbClr val="64748B"/>
-                </a:solidFill>
-                <a:latin typeface="Calibri"/>
-              </a:defRPr>
-            </a:pPr>
-            <a:r>
-              <a:t>Links open localhost:5000 — click while presenting from the machine running the app (see README.md).</a:t>
+              <a:t>•  Writes both a markdown report (docs/RESULTS.md) and the PNG charts /dashboard reuses — safe to re-run any time after a pipeline run (sample or full-scale) to regenerate real results.</a:t>
+            </a:r>
+          </a:p>
+          <a:p>
+            <a:pPr>
+              <a:spcAft>
+                <a:spcPts val="1200"/>
+              </a:spcAft>
+              <a:defRPr sz="1700">
+                <a:solidFill>
+                  <a:srgbClr val="1A202C"/>
+                </a:solidFill>
+                <a:latin typeface="Calibri"/>
+              </a:defRPr>
+            </a:pPr>
+            <a:r>
+              <a:t>•  The confusion matrix, confidence histogram, and accuracy-by-attack charts on the next slides are this script's direct output, not hand-drawn.</a:t>
             </a:r>
           </a:p>
         </p:txBody>
@@ -4441,7 +4869,7 @@
               </a:defRPr>
             </a:pPr>
             <a:r>
-              <a:t>Challenges &amp; trade-offs</a:t>
+              <a:t>Results — ROC curve &amp; confusion matrix</a:t>
             </a:r>
           </a:p>
         </p:txBody>
@@ -4482,16 +4910,64 @@
           </a:p>
         </p:txBody>
       </p:sp>
-      <p:sp>
-        <p:nvSpPr>
-          <p:cNvPr id="6" name="TextBox 5"/>
+      <p:pic>
+        <p:nvPicPr>
+          <p:cNvPr id="6" name="Picture 5" descr="roc_curve.png"/>
+          <p:cNvPicPr>
+            <a:picLocks noChangeAspect="1"/>
+          </p:cNvPicPr>
+          <p:nvPr/>
+        </p:nvPicPr>
+        <p:blipFill>
+          <a:blip r:embed="rId2"/>
+          <a:stretch>
+            <a:fillRect/>
+          </a:stretch>
+        </p:blipFill>
+        <p:spPr>
+          <a:xfrm>
+            <a:off x="807643" y="1417320"/>
+            <a:ext cx="4892040" cy="4892040"/>
+          </a:xfrm>
+          <a:prstGeom prst="rect">
+            <a:avLst/>
+          </a:prstGeom>
+        </p:spPr>
+      </p:pic>
+      <p:pic>
+        <p:nvPicPr>
+          <p:cNvPr id="7" name="Picture 6" descr="confusion_matrix.png"/>
+          <p:cNvPicPr>
+            <a:picLocks noChangeAspect="1"/>
+          </p:cNvPicPr>
+          <p:nvPr/>
+        </p:nvPicPr>
+        <p:blipFill>
+          <a:blip r:embed="rId3"/>
+          <a:stretch>
+            <a:fillRect/>
+          </a:stretch>
+        </p:blipFill>
+        <p:spPr>
+          <a:xfrm>
+            <a:off x="6492010" y="1417320"/>
+            <a:ext cx="4892040" cy="4892040"/>
+          </a:xfrm>
+          <a:prstGeom prst="rect">
+            <a:avLst/>
+          </a:prstGeom>
+        </p:spPr>
+      </p:pic>
+      <p:sp>
+        <p:nvSpPr>
+          <p:cNvPr id="8" name="TextBox 7"/>
           <p:cNvSpPr txBox="1"/>
           <p:nvPr/>
         </p:nvSpPr>
         <p:spPr>
           <a:xfrm>
-            <a:off x="548640" y="1417320"/>
-            <a:ext cx="11094415" cy="4983480"/>
+            <a:off x="548640" y="6400800"/>
+            <a:ext cx="11094415" cy="365760"/>
           </a:xfrm>
           <a:prstGeom prst="rect">
             <a:avLst/>
@@ -4504,83 +4980,16 @@
           </a:bodyPr>
           <a:lstStyle/>
           <a:p>
-            <a:pPr>
-              <a:spcAft>
-                <a:spcPts val="1200"/>
-              </a:spcAft>
-              <a:defRPr sz="1800">
-                <a:solidFill>
-                  <a:srgbClr val="1A202C"/>
-                </a:solidFill>
-                <a:latin typeface="Calibri"/>
-              </a:defRPr>
-            </a:pPr>
-            <a:r>
-              <a:t>•  Windows + Spark: worker Python resolution, path-with-spaces, and a Docker Desktop networking quirk all broke Spark's driver↔executor RPC — diagnosed and fixed, not hidden.</a:t>
-            </a:r>
-          </a:p>
-          <a:p>
-            <a:pPr>
-              <a:spcAft>
-                <a:spcPts val="1200"/>
-              </a:spcAft>
-              <a:defRPr sz="1800">
-                <a:solidFill>
-                  <a:srgbClr val="1A202C"/>
-                </a:solidFill>
-                <a:latin typeface="Calibri"/>
-              </a:defRPr>
-            </a:pPr>
-            <a:r>
-              <a:t>•  The EER threshold trades some spoof recall for bonafide recall — a deliberate choice, not a free win: no single threshold maximizes both on an imbalanced dataset.</a:t>
-            </a:r>
-          </a:p>
-          <a:p>
-            <a:pPr>
-              <a:spcAft>
-                <a:spcPts val="1200"/>
-              </a:spcAft>
-              <a:defRPr sz="1800">
-                <a:solidFill>
-                  <a:srgbClr val="1A202C"/>
-                </a:solidFill>
-                <a:latin typeface="Calibri"/>
-              </a:defRPr>
-            </a:pPr>
-            <a:r>
-              <a:t>•  Embedding is the classifier's own feature vector, not a separate pretrained audio embedding model — keeps the semantic-search capability fully self-contained.</a:t>
-            </a:r>
-          </a:p>
-          <a:p>
-            <a:pPr>
-              <a:spcAft>
-                <a:spcPts val="1200"/>
-              </a:spcAft>
-              <a:defRPr sz="1800">
-                <a:solidFill>
-                  <a:srgbClr val="1A202C"/>
-                </a:solidFill>
-                <a:latin typeface="Calibri"/>
-              </a:defRPr>
-            </a:pPr>
-            <a:r>
-              <a:t>•  Kept Python end-to-end (not Scala) since the feature-extraction library is Python-only.</a:t>
-            </a:r>
-          </a:p>
-          <a:p>
-            <a:pPr>
-              <a:spcAft>
-                <a:spcPts val="1200"/>
-              </a:spcAft>
-              <a:defRPr sz="1800">
-                <a:solidFill>
-                  <a:srgbClr val="1A202C"/>
-                </a:solidFill>
-                <a:latin typeface="Calibri"/>
-              </a:defRPr>
-            </a:pPr>
-            <a:r>
-              <a:t>•  Speaker-disjoint train/dev split (not random) to avoid inflating accuracy via leakage.</a:t>
+            <a:pPr algn="ctr">
+              <a:defRPr sz="1200" b="0">
+                <a:solidFill>
+                  <a:srgbClr val="64748B"/>
+                </a:solidFill>
+                <a:latin typeface="Calibri"/>
+              </a:defRPr>
+            </a:pPr>
+            <a:r>
+              <a:t>Left: both candidate models, deployed model's EER point marked. Right: streamed eval predictions.</a:t>
             </a:r>
           </a:p>
         </p:txBody>
@@ -4620,7 +5029,7 @@
         <p:spPr>
           <a:xfrm>
             <a:off x="0" y="0"/>
-            <a:ext cx="12191695" cy="6858000"/>
+            <a:ext cx="12191695" cy="1051560"/>
           </a:xfrm>
           <a:prstGeom prst="rect">
             <a:avLst/>
@@ -4663,8 +5072,8 @@
         </p:nvSpPr>
         <p:spPr>
           <a:xfrm>
-            <a:off x="0" y="3383280"/>
-            <a:ext cx="12191695" cy="63500"/>
+            <a:off x="0" y="1051560"/>
+            <a:ext cx="2103120" cy="63500"/>
           </a:xfrm>
           <a:prstGeom prst="rect">
             <a:avLst/>
@@ -4707,8 +5116,8 @@
         </p:nvSpPr>
         <p:spPr>
           <a:xfrm>
-            <a:off x="914400" y="2286000"/>
-            <a:ext cx="10332720" cy="914400"/>
+            <a:off x="548640" y="146304"/>
+            <a:ext cx="11094415" cy="640080"/>
           </a:xfrm>
           <a:prstGeom prst="rect">
             <a:avLst/>
@@ -4721,8 +5130,8 @@
           </a:bodyPr>
           <a:lstStyle/>
           <a:p>
-            <a:pPr algn="l">
-              <a:defRPr sz="4000" b="1">
+            <a:pPr>
+              <a:defRPr sz="3000" b="1">
                 <a:solidFill>
                   <a:srgbClr val="FFFFFF"/>
                 </a:solidFill>
@@ -4730,7 +5139,7 @@
               </a:defRPr>
             </a:pPr>
             <a:r>
-              <a:t>Questions?</a:t>
+              <a:t>Results — what the model learned, and how sure it is</a:t>
             </a:r>
           </a:p>
         </p:txBody>
@@ -4743,8 +5152,8 @@
         </p:nvSpPr>
         <p:spPr>
           <a:xfrm>
-            <a:off x="914400" y="3246120"/>
-            <a:ext cx="7315200" cy="457200"/>
+            <a:off x="11368735" y="6473952"/>
+            <a:ext cx="548640" cy="292608"/>
           </a:xfrm>
           <a:prstGeom prst="rect">
             <a:avLst/>
@@ -4752,45 +5161,192 @@
           <a:noFill/>
         </p:spPr>
         <p:txBody>
-          <a:bodyPr wrap="none">
+          <a:bodyPr wrap="square">
             <a:spAutoFit/>
           </a:bodyPr>
           <a:lstStyle/>
           <a:p>
-            <a:pPr>
-              <a:defRPr sz="1600">
-                <a:solidFill>
-                  <a:srgbClr val="CBD5E1"/>
-                </a:solidFill>
-                <a:latin typeface="Calibri"/>
-              </a:defRPr>
-            </a:pPr>
-            <a:r>
-              <a:rPr>
-                <a:hlinkClick r:id="rId2"/>
-              </a:rPr>
-              <a:t>github.com/HadarBaum/asvspoof-voice-ai</a:t>
-            </a:r>
-          </a:p>
-        </p:txBody>
-      </p:sp>
-      <p:sp>
-        <p:nvSpPr>
-          <p:cNvPr id="6" name="Rounded Rectangle 5">
-            <a:hlinkClick r:id="rId3"/>
-          </p:cNvPr>
+            <a:pPr algn="r">
+              <a:defRPr sz="1100" b="0">
+                <a:solidFill>
+                  <a:srgbClr val="64748B"/>
+                </a:solidFill>
+                <a:latin typeface="Calibri"/>
+              </a:defRPr>
+            </a:pPr>
+            <a:r>
+              <a:t>13</a:t>
+            </a:r>
+          </a:p>
+        </p:txBody>
+      </p:sp>
+      <p:pic>
+        <p:nvPicPr>
+          <p:cNvPr id="6" name="Picture 5" descr="feature_importance.png"/>
+          <p:cNvPicPr>
+            <a:picLocks noChangeAspect="1"/>
+          </p:cNvPicPr>
+          <p:nvPr/>
+        </p:nvPicPr>
+        <p:blipFill>
+          <a:blip r:embed="rId2"/>
+          <a:stretch>
+            <a:fillRect/>
+          </a:stretch>
+        </p:blipFill>
+        <p:spPr>
+          <a:xfrm>
+            <a:off x="548640" y="2059991"/>
+            <a:ext cx="5410047" cy="3606698"/>
+          </a:xfrm>
+          <a:prstGeom prst="rect">
+            <a:avLst/>
+          </a:prstGeom>
+        </p:spPr>
+      </p:pic>
+      <p:pic>
+        <p:nvPicPr>
+          <p:cNvPr id="7" name="Picture 6" descr="confidence_histogram.png"/>
+          <p:cNvPicPr>
+            <a:picLocks noChangeAspect="1"/>
+          </p:cNvPicPr>
+          <p:nvPr/>
+        </p:nvPicPr>
+        <p:blipFill>
+          <a:blip r:embed="rId3"/>
+          <a:stretch>
+            <a:fillRect/>
+          </a:stretch>
+        </p:blipFill>
+        <p:spPr>
+          <a:xfrm>
+            <a:off x="6233007" y="2059991"/>
+            <a:ext cx="5410047" cy="3606698"/>
+          </a:xfrm>
+          <a:prstGeom prst="rect">
+            <a:avLst/>
+          </a:prstGeom>
+        </p:spPr>
+      </p:pic>
+      <p:sp>
+        <p:nvSpPr>
+          <p:cNvPr id="8" name="TextBox 7"/>
+          <p:cNvSpPr txBox="1"/>
+          <p:nvPr/>
+        </p:nvSpPr>
+        <p:spPr>
+          <a:xfrm>
+            <a:off x="548640" y="6400800"/>
+            <a:ext cx="11094415" cy="365760"/>
+          </a:xfrm>
+          <a:prstGeom prst="rect">
+            <a:avLst/>
+          </a:prstGeom>
+          <a:noFill/>
+        </p:spPr>
+        <p:txBody>
+          <a:bodyPr wrap="square">
+            <a:spAutoFit/>
+          </a:bodyPr>
+          <a:lstStyle/>
+          <a:p>
+            <a:pPr algn="ctr">
+              <a:defRPr sz="1200" b="0">
+                <a:solidFill>
+                  <a:srgbClr val="64748B"/>
+                </a:solidFill>
+                <a:latin typeface="Calibri"/>
+              </a:defRPr>
+            </a:pPr>
+            <a:r>
+              <a:t>Left: top acoustic features (MFCC variance dominates). Right: confidence, correct vs. incorrect calls.</a:t>
+            </a:r>
+          </a:p>
+        </p:txBody>
+      </p:sp>
+    </p:spTree>
+  </p:cSld>
+  <p:clrMapOvr>
+    <a:masterClrMapping/>
+  </p:clrMapOvr>
+</p:sld>
+</file>
+
+<file path=ppt/slides/slide15.xml><?xml version="1.0" encoding="utf-8"?>
+<p:sld xmlns:a="http://schemas.openxmlformats.org/drawingml/2006/main" xmlns:p="http://schemas.openxmlformats.org/presentationml/2006/main" xmlns:r="http://schemas.openxmlformats.org/officeDocument/2006/relationships">
+  <p:cSld>
+    <p:bg>
+      <p:bgPr>
+        <a:solidFill>
+          <a:srgbClr val="F7F9FB"/>
+        </a:solidFill>
+        <a:effectLst/>
+      </p:bgPr>
+    </p:bg>
+    <p:spTree>
+      <p:nvGrpSpPr>
+        <p:cNvPr id="1" name=""/>
+        <p:cNvGrpSpPr/>
+        <p:nvPr/>
+      </p:nvGrpSpPr>
+      <p:grpSpPr/>
+      <p:sp>
+        <p:nvSpPr>
+          <p:cNvPr id="2" name="Rectangle 1"/>
           <p:cNvSpPr/>
           <p:nvPr/>
         </p:nvSpPr>
         <p:spPr>
           <a:xfrm>
-            <a:off x="914400" y="3931920"/>
-            <a:ext cx="3291840" cy="594360"/>
-          </a:xfrm>
-          <a:prstGeom prst="roundRect">
-            <a:avLst>
-              <a:gd name="adj" fmla="val 6000"/>
-            </a:avLst>
+            <a:off x="0" y="0"/>
+            <a:ext cx="12191695" cy="1051560"/>
+          </a:xfrm>
+          <a:prstGeom prst="rect">
+            <a:avLst/>
+          </a:prstGeom>
+          <a:solidFill>
+            <a:srgbClr val="0F2942"/>
+          </a:solidFill>
+          <a:ln>
+            <a:noFill/>
+          </a:ln>
+          <a:effectLst/>
+        </p:spPr>
+        <p:style>
+          <a:lnRef idx="1">
+            <a:schemeClr val="accent1"/>
+          </a:lnRef>
+          <a:fillRef idx="3">
+            <a:schemeClr val="accent1"/>
+          </a:fillRef>
+          <a:effectRef idx="2">
+            <a:schemeClr val="accent1"/>
+          </a:effectRef>
+          <a:fontRef idx="minor">
+            <a:schemeClr val="lt1"/>
+          </a:fontRef>
+        </p:style>
+        <p:txBody>
+          <a:bodyPr rtlCol="0" anchor="ctr"/>
+          <a:lstStyle/>
+          <a:p>
+            <a:pPr algn="ctr"/>
+          </a:p>
+        </p:txBody>
+      </p:sp>
+      <p:sp>
+        <p:nvSpPr>
+          <p:cNvPr id="3" name="Rectangle 2"/>
+          <p:cNvSpPr/>
+          <p:nvPr/>
+        </p:nvSpPr>
+        <p:spPr>
+          <a:xfrm>
+            <a:off x="0" y="1051560"/>
+            <a:ext cx="2103120" cy="63500"/>
+          </a:xfrm>
+          <a:prstGeom prst="rect">
+            <a:avLst/>
           </a:prstGeom>
           <a:solidFill>
             <a:srgbClr val="0D9488"/>
@@ -4815,6 +5371,1025 @@
           </a:fontRef>
         </p:style>
         <p:txBody>
+          <a:bodyPr rtlCol="0" anchor="ctr"/>
+          <a:lstStyle/>
+          <a:p>
+            <a:pPr algn="ctr"/>
+          </a:p>
+        </p:txBody>
+      </p:sp>
+      <p:sp>
+        <p:nvSpPr>
+          <p:cNvPr id="4" name="TextBox 3"/>
+          <p:cNvSpPr txBox="1"/>
+          <p:nvPr/>
+        </p:nvSpPr>
+        <p:spPr>
+          <a:xfrm>
+            <a:off x="548640" y="146304"/>
+            <a:ext cx="11094415" cy="640080"/>
+          </a:xfrm>
+          <a:prstGeom prst="rect">
+            <a:avLst/>
+          </a:prstGeom>
+          <a:noFill/>
+        </p:spPr>
+        <p:txBody>
+          <a:bodyPr wrap="square">
+            <a:spAutoFit/>
+          </a:bodyPr>
+          <a:lstStyle/>
+          <a:p>
+            <a:pPr>
+              <a:defRPr sz="3000" b="1">
+                <a:solidFill>
+                  <a:srgbClr val="FFFFFF"/>
+                </a:solidFill>
+                <a:latin typeface="Calibri"/>
+              </a:defRPr>
+            </a:pPr>
+            <a:r>
+              <a:t>Results — accuracy by attack type</a:t>
+            </a:r>
+          </a:p>
+        </p:txBody>
+      </p:sp>
+      <p:sp>
+        <p:nvSpPr>
+          <p:cNvPr id="5" name="TextBox 4"/>
+          <p:cNvSpPr txBox="1"/>
+          <p:nvPr/>
+        </p:nvSpPr>
+        <p:spPr>
+          <a:xfrm>
+            <a:off x="548640" y="658368"/>
+            <a:ext cx="11094415" cy="365760"/>
+          </a:xfrm>
+          <a:prstGeom prst="rect">
+            <a:avLst/>
+          </a:prstGeom>
+          <a:noFill/>
+        </p:spPr>
+        <p:txBody>
+          <a:bodyPr wrap="none">
+            <a:spAutoFit/>
+          </a:bodyPr>
+          <a:lstStyle/>
+          <a:p>
+            <a:pPr>
+              <a:defRPr sz="1300">
+                <a:solidFill>
+                  <a:srgbClr val="CBD5E1"/>
+                </a:solidFill>
+                <a:latin typeface="Calibri"/>
+              </a:defRPr>
+            </a:pPr>
+            <a:r>
+              <a:t>Streamed eval predictions, near-perfect on most TTS/VC systems</a:t>
+            </a:r>
+          </a:p>
+        </p:txBody>
+      </p:sp>
+      <p:sp>
+        <p:nvSpPr>
+          <p:cNvPr id="6" name="TextBox 5"/>
+          <p:cNvSpPr txBox="1"/>
+          <p:nvPr/>
+        </p:nvSpPr>
+        <p:spPr>
+          <a:xfrm>
+            <a:off x="11368735" y="6473952"/>
+            <a:ext cx="548640" cy="292608"/>
+          </a:xfrm>
+          <a:prstGeom prst="rect">
+            <a:avLst/>
+          </a:prstGeom>
+          <a:noFill/>
+        </p:spPr>
+        <p:txBody>
+          <a:bodyPr wrap="square">
+            <a:spAutoFit/>
+          </a:bodyPr>
+          <a:lstStyle/>
+          <a:p>
+            <a:pPr algn="r">
+              <a:defRPr sz="1100" b="0">
+                <a:solidFill>
+                  <a:srgbClr val="64748B"/>
+                </a:solidFill>
+                <a:latin typeface="Calibri"/>
+              </a:defRPr>
+            </a:pPr>
+            <a:r>
+              <a:t>14</a:t>
+            </a:r>
+          </a:p>
+        </p:txBody>
+      </p:sp>
+      <p:pic>
+        <p:nvPicPr>
+          <p:cNvPr id="7" name="Picture 6" descr="accuracy_by_attack.png"/>
+          <p:cNvPicPr>
+            <a:picLocks noChangeAspect="1"/>
+          </p:cNvPicPr>
+          <p:nvPr/>
+        </p:nvPicPr>
+        <p:blipFill>
+          <a:blip r:embed="rId2"/>
+          <a:stretch>
+            <a:fillRect/>
+          </a:stretch>
+        </p:blipFill>
+        <p:spPr>
+          <a:xfrm>
+            <a:off x="1203807" y="1417320"/>
+            <a:ext cx="9784080" cy="4892040"/>
+          </a:xfrm>
+          <a:prstGeom prst="rect">
+            <a:avLst/>
+          </a:prstGeom>
+        </p:spPr>
+      </p:pic>
+    </p:spTree>
+  </p:cSld>
+  <p:clrMapOvr>
+    <a:masterClrMapping/>
+  </p:clrMapOvr>
+</p:sld>
+</file>
+
+<file path=ppt/slides/slide16.xml><?xml version="1.0" encoding="utf-8"?>
+<p:sld xmlns:a="http://schemas.openxmlformats.org/drawingml/2006/main" xmlns:p="http://schemas.openxmlformats.org/presentationml/2006/main" xmlns:r="http://schemas.openxmlformats.org/officeDocument/2006/relationships">
+  <p:cSld>
+    <p:bg>
+      <p:bgPr>
+        <a:solidFill>
+          <a:srgbClr val="F7F9FB"/>
+        </a:solidFill>
+        <a:effectLst/>
+      </p:bgPr>
+    </p:bg>
+    <p:spTree>
+      <p:nvGrpSpPr>
+        <p:cNvPr id="1" name=""/>
+        <p:cNvGrpSpPr/>
+        <p:nvPr/>
+      </p:nvGrpSpPr>
+      <p:grpSpPr/>
+      <p:sp>
+        <p:nvSpPr>
+          <p:cNvPr id="2" name="Rectangle 1"/>
+          <p:cNvSpPr/>
+          <p:nvPr/>
+        </p:nvSpPr>
+        <p:spPr>
+          <a:xfrm>
+            <a:off x="0" y="0"/>
+            <a:ext cx="12191695" cy="1051560"/>
+          </a:xfrm>
+          <a:prstGeom prst="rect">
+            <a:avLst/>
+          </a:prstGeom>
+          <a:solidFill>
+            <a:srgbClr val="0F2942"/>
+          </a:solidFill>
+          <a:ln>
+            <a:noFill/>
+          </a:ln>
+          <a:effectLst/>
+        </p:spPr>
+        <p:style>
+          <a:lnRef idx="1">
+            <a:schemeClr val="accent1"/>
+          </a:lnRef>
+          <a:fillRef idx="3">
+            <a:schemeClr val="accent1"/>
+          </a:fillRef>
+          <a:effectRef idx="2">
+            <a:schemeClr val="accent1"/>
+          </a:effectRef>
+          <a:fontRef idx="minor">
+            <a:schemeClr val="lt1"/>
+          </a:fontRef>
+        </p:style>
+        <p:txBody>
+          <a:bodyPr rtlCol="0" anchor="ctr"/>
+          <a:lstStyle/>
+          <a:p>
+            <a:pPr algn="ctr"/>
+          </a:p>
+        </p:txBody>
+      </p:sp>
+      <p:sp>
+        <p:nvSpPr>
+          <p:cNvPr id="3" name="Rectangle 2"/>
+          <p:cNvSpPr/>
+          <p:nvPr/>
+        </p:nvSpPr>
+        <p:spPr>
+          <a:xfrm>
+            <a:off x="0" y="1051560"/>
+            <a:ext cx="2103120" cy="63500"/>
+          </a:xfrm>
+          <a:prstGeom prst="rect">
+            <a:avLst/>
+          </a:prstGeom>
+          <a:solidFill>
+            <a:srgbClr val="0D9488"/>
+          </a:solidFill>
+          <a:ln>
+            <a:noFill/>
+          </a:ln>
+          <a:effectLst/>
+        </p:spPr>
+        <p:style>
+          <a:lnRef idx="1">
+            <a:schemeClr val="accent1"/>
+          </a:lnRef>
+          <a:fillRef idx="3">
+            <a:schemeClr val="accent1"/>
+          </a:fillRef>
+          <a:effectRef idx="2">
+            <a:schemeClr val="accent1"/>
+          </a:effectRef>
+          <a:fontRef idx="minor">
+            <a:schemeClr val="lt1"/>
+          </a:fontRef>
+        </p:style>
+        <p:txBody>
+          <a:bodyPr rtlCol="0" anchor="ctr"/>
+          <a:lstStyle/>
+          <a:p>
+            <a:pPr algn="ctr"/>
+          </a:p>
+        </p:txBody>
+      </p:sp>
+      <p:sp>
+        <p:nvSpPr>
+          <p:cNvPr id="4" name="TextBox 3"/>
+          <p:cNvSpPr txBox="1"/>
+          <p:nvPr/>
+        </p:nvSpPr>
+        <p:spPr>
+          <a:xfrm>
+            <a:off x="548640" y="146304"/>
+            <a:ext cx="11094415" cy="640080"/>
+          </a:xfrm>
+          <a:prstGeom prst="rect">
+            <a:avLst/>
+          </a:prstGeom>
+          <a:noFill/>
+        </p:spPr>
+        <p:txBody>
+          <a:bodyPr wrap="square">
+            <a:spAutoFit/>
+          </a:bodyPr>
+          <a:lstStyle/>
+          <a:p>
+            <a:pPr>
+              <a:defRPr sz="3000" b="1">
+                <a:solidFill>
+                  <a:srgbClr val="FFFFFF"/>
+                </a:solidFill>
+                <a:latin typeface="Calibri"/>
+              </a:defRPr>
+            </a:pPr>
+            <a:r>
+              <a:t>AI capability 2 — embeddings &amp; semantic search</a:t>
+            </a:r>
+          </a:p>
+        </p:txBody>
+      </p:sp>
+      <p:sp>
+        <p:nvSpPr>
+          <p:cNvPr id="5" name="TextBox 4"/>
+          <p:cNvSpPr txBox="1"/>
+          <p:nvPr/>
+        </p:nvSpPr>
+        <p:spPr>
+          <a:xfrm>
+            <a:off x="11368735" y="6473952"/>
+            <a:ext cx="548640" cy="292608"/>
+          </a:xfrm>
+          <a:prstGeom prst="rect">
+            <a:avLst/>
+          </a:prstGeom>
+          <a:noFill/>
+        </p:spPr>
+        <p:txBody>
+          <a:bodyPr wrap="square">
+            <a:spAutoFit/>
+          </a:bodyPr>
+          <a:lstStyle/>
+          <a:p>
+            <a:pPr algn="r">
+              <a:defRPr sz="1100" b="0">
+                <a:solidFill>
+                  <a:srgbClr val="64748B"/>
+                </a:solidFill>
+                <a:latin typeface="Calibri"/>
+              </a:defRPr>
+            </a:pPr>
+            <a:r>
+              <a:t>15</a:t>
+            </a:r>
+          </a:p>
+        </p:txBody>
+      </p:sp>
+      <p:sp>
+        <p:nvSpPr>
+          <p:cNvPr id="6" name="TextBox 5"/>
+          <p:cNvSpPr txBox="1"/>
+          <p:nvPr/>
+        </p:nvSpPr>
+        <p:spPr>
+          <a:xfrm>
+            <a:off x="548640" y="1417320"/>
+            <a:ext cx="11094415" cy="4983480"/>
+          </a:xfrm>
+          <a:prstGeom prst="rect">
+            <a:avLst/>
+          </a:prstGeom>
+          <a:noFill/>
+        </p:spPr>
+        <p:txBody>
+          <a:bodyPr wrap="square">
+            <a:spAutoFit/>
+          </a:bodyPr>
+          <a:lstStyle/>
+          <a:p>
+            <a:pPr>
+              <a:spcAft>
+                <a:spcPts val="1200"/>
+              </a:spcAft>
+              <a:defRPr sz="1900">
+                <a:solidFill>
+                  <a:srgbClr val="1A202C"/>
+                </a:solidFill>
+                <a:latin typeface="Calibri"/>
+              </a:defRPr>
+            </a:pPr>
+            <a:r>
+              <a:t>•  The same acoustic feature vectors double as embeddings — no separate embedding model needed.</a:t>
+            </a:r>
+          </a:p>
+          <a:p>
+            <a:pPr>
+              <a:spcAft>
+                <a:spcPts val="1200"/>
+              </a:spcAft>
+              <a:defRPr sz="1900">
+                <a:solidFill>
+                  <a:srgbClr val="1A202C"/>
+                </a:solidFill>
+                <a:latin typeface="Calibri"/>
+              </a:defRPr>
+            </a:pPr>
+            <a:r>
+              <a:t>•  Standardized (zero mean, unit variance) so cosine similarity isn't dominated by whichever feature happens to have the largest raw scale.</a:t>
+            </a:r>
+          </a:p>
+          <a:p>
+            <a:pPr>
+              <a:spcAft>
+                <a:spcPts val="1200"/>
+              </a:spcAft>
+              <a:defRPr sz="1900">
+                <a:solidFill>
+                  <a:srgbClr val="1A202C"/>
+                </a:solidFill>
+                <a:latin typeface="Calibri"/>
+              </a:defRPr>
+            </a:pPr>
+            <a:r>
+              <a:t>•  Indexed into Elasticsearch as dense_vector fields, added to the existing index in place (a mapping update, not a reindex — the 50k+ documents were already there).</a:t>
+            </a:r>
+          </a:p>
+          <a:p>
+            <a:pPr>
+              <a:spcAft>
+                <a:spcPts val="1200"/>
+              </a:spcAft>
+              <a:defRPr sz="1900">
+                <a:solidFill>
+                  <a:srgbClr val="1A202C"/>
+                </a:solidFill>
+                <a:latin typeface="Calibri"/>
+              </a:defRPr>
+            </a:pPr>
+            <a:r>
+              <a:t>•  Powers /classify's "most acoustically similar training clips" — k-NN search, playable in the browser, replacing a keyword match with genuine semantic search.</a:t>
+            </a:r>
+          </a:p>
+        </p:txBody>
+      </p:sp>
+    </p:spTree>
+  </p:cSld>
+  <p:clrMapOvr>
+    <a:masterClrMapping/>
+  </p:clrMapOvr>
+</p:sld>
+</file>
+
+<file path=ppt/slides/slide17.xml><?xml version="1.0" encoding="utf-8"?>
+<p:sld xmlns:a="http://schemas.openxmlformats.org/drawingml/2006/main" xmlns:p="http://schemas.openxmlformats.org/presentationml/2006/main" xmlns:r="http://schemas.openxmlformats.org/officeDocument/2006/relationships">
+  <p:cSld>
+    <p:bg>
+      <p:bgPr>
+        <a:solidFill>
+          <a:srgbClr val="F7F9FB"/>
+        </a:solidFill>
+        <a:effectLst/>
+      </p:bgPr>
+    </p:bg>
+    <p:spTree>
+      <p:nvGrpSpPr>
+        <p:cNvPr id="1" name=""/>
+        <p:cNvGrpSpPr/>
+        <p:nvPr/>
+      </p:nvGrpSpPr>
+      <p:grpSpPr/>
+      <p:sp>
+        <p:nvSpPr>
+          <p:cNvPr id="2" name="Rectangle 1"/>
+          <p:cNvSpPr/>
+          <p:nvPr/>
+        </p:nvSpPr>
+        <p:spPr>
+          <a:xfrm>
+            <a:off x="0" y="0"/>
+            <a:ext cx="12191695" cy="1051560"/>
+          </a:xfrm>
+          <a:prstGeom prst="rect">
+            <a:avLst/>
+          </a:prstGeom>
+          <a:solidFill>
+            <a:srgbClr val="0F2942"/>
+          </a:solidFill>
+          <a:ln>
+            <a:noFill/>
+          </a:ln>
+          <a:effectLst/>
+        </p:spPr>
+        <p:style>
+          <a:lnRef idx="1">
+            <a:schemeClr val="accent1"/>
+          </a:lnRef>
+          <a:fillRef idx="3">
+            <a:schemeClr val="accent1"/>
+          </a:fillRef>
+          <a:effectRef idx="2">
+            <a:schemeClr val="accent1"/>
+          </a:effectRef>
+          <a:fontRef idx="minor">
+            <a:schemeClr val="lt1"/>
+          </a:fontRef>
+        </p:style>
+        <p:txBody>
+          <a:bodyPr rtlCol="0" anchor="ctr"/>
+          <a:lstStyle/>
+          <a:p>
+            <a:pPr algn="ctr"/>
+          </a:p>
+        </p:txBody>
+      </p:sp>
+      <p:sp>
+        <p:nvSpPr>
+          <p:cNvPr id="3" name="Rectangle 2"/>
+          <p:cNvSpPr/>
+          <p:nvPr/>
+        </p:nvSpPr>
+        <p:spPr>
+          <a:xfrm>
+            <a:off x="0" y="1051560"/>
+            <a:ext cx="2103120" cy="63500"/>
+          </a:xfrm>
+          <a:prstGeom prst="rect">
+            <a:avLst/>
+          </a:prstGeom>
+          <a:solidFill>
+            <a:srgbClr val="0D9488"/>
+          </a:solidFill>
+          <a:ln>
+            <a:noFill/>
+          </a:ln>
+          <a:effectLst/>
+        </p:spPr>
+        <p:style>
+          <a:lnRef idx="1">
+            <a:schemeClr val="accent1"/>
+          </a:lnRef>
+          <a:fillRef idx="3">
+            <a:schemeClr val="accent1"/>
+          </a:fillRef>
+          <a:effectRef idx="2">
+            <a:schemeClr val="accent1"/>
+          </a:effectRef>
+          <a:fontRef idx="minor">
+            <a:schemeClr val="lt1"/>
+          </a:fontRef>
+        </p:style>
+        <p:txBody>
+          <a:bodyPr rtlCol="0" anchor="ctr"/>
+          <a:lstStyle/>
+          <a:p>
+            <a:pPr algn="ctr"/>
+          </a:p>
+        </p:txBody>
+      </p:sp>
+      <p:sp>
+        <p:nvSpPr>
+          <p:cNvPr id="4" name="TextBox 3"/>
+          <p:cNvSpPr txBox="1"/>
+          <p:nvPr/>
+        </p:nvSpPr>
+        <p:spPr>
+          <a:xfrm>
+            <a:off x="548640" y="146304"/>
+            <a:ext cx="11094415" cy="640080"/>
+          </a:xfrm>
+          <a:prstGeom prst="rect">
+            <a:avLst/>
+          </a:prstGeom>
+          <a:noFill/>
+        </p:spPr>
+        <p:txBody>
+          <a:bodyPr wrap="square">
+            <a:spAutoFit/>
+          </a:bodyPr>
+          <a:lstStyle/>
+          <a:p>
+            <a:pPr>
+              <a:defRPr sz="3000" b="1">
+                <a:solidFill>
+                  <a:srgbClr val="FFFFFF"/>
+                </a:solidFill>
+                <a:latin typeface="Calibri"/>
+              </a:defRPr>
+            </a:pPr>
+            <a:r>
+              <a:t>AI capability 3 — streaming enrichment</a:t>
+            </a:r>
+          </a:p>
+        </p:txBody>
+      </p:sp>
+      <p:sp>
+        <p:nvSpPr>
+          <p:cNvPr id="5" name="TextBox 4"/>
+          <p:cNvSpPr txBox="1"/>
+          <p:nvPr/>
+        </p:nvSpPr>
+        <p:spPr>
+          <a:xfrm>
+            <a:off x="548640" y="658368"/>
+            <a:ext cx="11094415" cy="365760"/>
+          </a:xfrm>
+          <a:prstGeom prst="rect">
+            <a:avLst/>
+          </a:prstGeom>
+          <a:noFill/>
+        </p:spPr>
+        <p:txBody>
+          <a:bodyPr wrap="none">
+            <a:spAutoFit/>
+          </a:bodyPr>
+          <a:lstStyle/>
+          <a:p>
+            <a:pPr>
+              <a:defRPr sz="1300">
+                <a:solidFill>
+                  <a:srgbClr val="CBD5E1"/>
+                </a:solidFill>
+                <a:latin typeface="Calibri"/>
+              </a:defRPr>
+            </a:pPr>
+            <a:r>
+              <a:t>Kafka producer/consumer, near-real-time scoring</a:t>
+            </a:r>
+          </a:p>
+        </p:txBody>
+      </p:sp>
+      <p:sp>
+        <p:nvSpPr>
+          <p:cNvPr id="6" name="TextBox 5"/>
+          <p:cNvSpPr txBox="1"/>
+          <p:nvPr/>
+        </p:nvSpPr>
+        <p:spPr>
+          <a:xfrm>
+            <a:off x="11368735" y="6473952"/>
+            <a:ext cx="548640" cy="292608"/>
+          </a:xfrm>
+          <a:prstGeom prst="rect">
+            <a:avLst/>
+          </a:prstGeom>
+          <a:noFill/>
+        </p:spPr>
+        <p:txBody>
+          <a:bodyPr wrap="square">
+            <a:spAutoFit/>
+          </a:bodyPr>
+          <a:lstStyle/>
+          <a:p>
+            <a:pPr algn="r">
+              <a:defRPr sz="1100" b="0">
+                <a:solidFill>
+                  <a:srgbClr val="64748B"/>
+                </a:solidFill>
+                <a:latin typeface="Calibri"/>
+              </a:defRPr>
+            </a:pPr>
+            <a:r>
+              <a:t>16</a:t>
+            </a:r>
+          </a:p>
+        </p:txBody>
+      </p:sp>
+      <p:sp>
+        <p:nvSpPr>
+          <p:cNvPr id="7" name="TextBox 6"/>
+          <p:cNvSpPr txBox="1"/>
+          <p:nvPr/>
+        </p:nvSpPr>
+        <p:spPr>
+          <a:xfrm>
+            <a:off x="548640" y="1417320"/>
+            <a:ext cx="11094415" cy="4983480"/>
+          </a:xfrm>
+          <a:prstGeom prst="rect">
+            <a:avLst/>
+          </a:prstGeom>
+          <a:noFill/>
+        </p:spPr>
+        <p:txBody>
+          <a:bodyPr wrap="square">
+            <a:spAutoFit/>
+          </a:bodyPr>
+          <a:lstStyle/>
+          <a:p>
+            <a:pPr>
+              <a:spcAft>
+                <a:spcPts val="1200"/>
+              </a:spcAft>
+              <a:defRPr sz="1900">
+                <a:solidFill>
+                  <a:srgbClr val="1A202C"/>
+                </a:solidFill>
+                <a:latin typeface="Calibri"/>
+              </a:defRPr>
+            </a:pPr>
+            <a:r>
+              <a:t>•  Producer replays eval-set utterance events (a MinIO key, not the audio itself).</a:t>
+            </a:r>
+          </a:p>
+          <a:p>
+            <a:pPr>
+              <a:spcAft>
+                <a:spcPts val="1200"/>
+              </a:spcAft>
+              <a:defRPr sz="1900">
+                <a:solidFill>
+                  <a:srgbClr val="1A202C"/>
+                </a:solidFill>
+                <a:latin typeface="Calibri"/>
+              </a:defRPr>
+            </a:pPr>
+            <a:r>
+              <a:t>•  Consumer fetches the clip, extracts features, scores it at the deployed EER threshold, and writes an enriched prediction to Elasticsearch — one document per utterance, live.</a:t>
+            </a:r>
+          </a:p>
+          <a:p>
+            <a:pPr>
+              <a:spcAft>
+                <a:spcPts val="1200"/>
+              </a:spcAft>
+              <a:defRPr sz="1900">
+                <a:solidFill>
+                  <a:srgbClr val="1A202C"/>
+                </a:solidFill>
+                <a:latin typeface="Calibri"/>
+              </a:defRPr>
+            </a:pPr>
+            <a:r>
+              <a:t>•  Same feature-extraction and model code as the batch job and the web app — one implementation applied three ways, not three separate things to maintain and defend.</a:t>
+            </a:r>
+          </a:p>
+          <a:p>
+            <a:pPr>
+              <a:spcAft>
+                <a:spcPts val="1200"/>
+              </a:spcAft>
+              <a:defRPr sz="1900">
+                <a:solidFill>
+                  <a:srgbClr val="1A202C"/>
+                </a:solidFill>
+                <a:latin typeface="Calibri"/>
+              </a:defRPr>
+            </a:pPr>
+            <a:r>
+              <a:t>•  A named consumer group tracks offset, so re-running resumes instead of re-scoring.</a:t>
+            </a:r>
+          </a:p>
+        </p:txBody>
+      </p:sp>
+    </p:spTree>
+  </p:cSld>
+  <p:clrMapOvr>
+    <a:masterClrMapping/>
+  </p:clrMapOvr>
+</p:sld>
+</file>
+
+<file path=ppt/slides/slide18.xml><?xml version="1.0" encoding="utf-8"?>
+<p:sld xmlns:a="http://schemas.openxmlformats.org/drawingml/2006/main" xmlns:p="http://schemas.openxmlformats.org/presentationml/2006/main" xmlns:r="http://schemas.openxmlformats.org/officeDocument/2006/relationships">
+  <p:cSld>
+    <p:bg>
+      <p:bgPr>
+        <a:solidFill>
+          <a:srgbClr val="F7F9FB"/>
+        </a:solidFill>
+        <a:effectLst/>
+      </p:bgPr>
+    </p:bg>
+    <p:spTree>
+      <p:nvGrpSpPr>
+        <p:cNvPr id="1" name=""/>
+        <p:cNvGrpSpPr/>
+        <p:nvPr/>
+      </p:nvGrpSpPr>
+      <p:grpSpPr/>
+      <p:sp>
+        <p:nvSpPr>
+          <p:cNvPr id="2" name="Rectangle 1"/>
+          <p:cNvSpPr/>
+          <p:nvPr/>
+        </p:nvSpPr>
+        <p:spPr>
+          <a:xfrm>
+            <a:off x="0" y="0"/>
+            <a:ext cx="12191695" cy="1051560"/>
+          </a:xfrm>
+          <a:prstGeom prst="rect">
+            <a:avLst/>
+          </a:prstGeom>
+          <a:solidFill>
+            <a:srgbClr val="0F2942"/>
+          </a:solidFill>
+          <a:ln>
+            <a:noFill/>
+          </a:ln>
+          <a:effectLst/>
+        </p:spPr>
+        <p:style>
+          <a:lnRef idx="1">
+            <a:schemeClr val="accent1"/>
+          </a:lnRef>
+          <a:fillRef idx="3">
+            <a:schemeClr val="accent1"/>
+          </a:fillRef>
+          <a:effectRef idx="2">
+            <a:schemeClr val="accent1"/>
+          </a:effectRef>
+          <a:fontRef idx="minor">
+            <a:schemeClr val="lt1"/>
+          </a:fontRef>
+        </p:style>
+        <p:txBody>
+          <a:bodyPr rtlCol="0" anchor="ctr"/>
+          <a:lstStyle/>
+          <a:p>
+            <a:pPr algn="ctr"/>
+          </a:p>
+        </p:txBody>
+      </p:sp>
+      <p:sp>
+        <p:nvSpPr>
+          <p:cNvPr id="3" name="Rectangle 2"/>
+          <p:cNvSpPr/>
+          <p:nvPr/>
+        </p:nvSpPr>
+        <p:spPr>
+          <a:xfrm>
+            <a:off x="0" y="1051560"/>
+            <a:ext cx="2103120" cy="63500"/>
+          </a:xfrm>
+          <a:prstGeom prst="rect">
+            <a:avLst/>
+          </a:prstGeom>
+          <a:solidFill>
+            <a:srgbClr val="0D9488"/>
+          </a:solidFill>
+          <a:ln>
+            <a:noFill/>
+          </a:ln>
+          <a:effectLst/>
+        </p:spPr>
+        <p:style>
+          <a:lnRef idx="1">
+            <a:schemeClr val="accent1"/>
+          </a:lnRef>
+          <a:fillRef idx="3">
+            <a:schemeClr val="accent1"/>
+          </a:fillRef>
+          <a:effectRef idx="2">
+            <a:schemeClr val="accent1"/>
+          </a:effectRef>
+          <a:fontRef idx="minor">
+            <a:schemeClr val="lt1"/>
+          </a:fontRef>
+        </p:style>
+        <p:txBody>
+          <a:bodyPr rtlCol="0" anchor="ctr"/>
+          <a:lstStyle/>
+          <a:p>
+            <a:pPr algn="ctr"/>
+          </a:p>
+        </p:txBody>
+      </p:sp>
+      <p:sp>
+        <p:nvSpPr>
+          <p:cNvPr id="4" name="TextBox 3"/>
+          <p:cNvSpPr txBox="1"/>
+          <p:nvPr/>
+        </p:nvSpPr>
+        <p:spPr>
+          <a:xfrm>
+            <a:off x="548640" y="146304"/>
+            <a:ext cx="11094415" cy="640080"/>
+          </a:xfrm>
+          <a:prstGeom prst="rect">
+            <a:avLst/>
+          </a:prstGeom>
+          <a:noFill/>
+        </p:spPr>
+        <p:txBody>
+          <a:bodyPr wrap="square">
+            <a:spAutoFit/>
+          </a:bodyPr>
+          <a:lstStyle/>
+          <a:p>
+            <a:pPr>
+              <a:defRPr sz="3000" b="1">
+                <a:solidFill>
+                  <a:srgbClr val="FFFFFF"/>
+                </a:solidFill>
+                <a:latin typeface="Calibri"/>
+              </a:defRPr>
+            </a:pPr>
+            <a:r>
+              <a:t>Live demo</a:t>
+            </a:r>
+          </a:p>
+        </p:txBody>
+      </p:sp>
+      <p:sp>
+        <p:nvSpPr>
+          <p:cNvPr id="5" name="TextBox 4"/>
+          <p:cNvSpPr txBox="1"/>
+          <p:nvPr/>
+        </p:nvSpPr>
+        <p:spPr>
+          <a:xfrm>
+            <a:off x="11368735" y="6473952"/>
+            <a:ext cx="548640" cy="292608"/>
+          </a:xfrm>
+          <a:prstGeom prst="rect">
+            <a:avLst/>
+          </a:prstGeom>
+          <a:noFill/>
+        </p:spPr>
+        <p:txBody>
+          <a:bodyPr wrap="square">
+            <a:spAutoFit/>
+          </a:bodyPr>
+          <a:lstStyle/>
+          <a:p>
+            <a:pPr algn="r">
+              <a:defRPr sz="1100" b="0">
+                <a:solidFill>
+                  <a:srgbClr val="64748B"/>
+                </a:solidFill>
+                <a:latin typeface="Calibri"/>
+              </a:defRPr>
+            </a:pPr>
+            <a:r>
+              <a:t>17</a:t>
+            </a:r>
+          </a:p>
+        </p:txBody>
+      </p:sp>
+      <p:sp>
+        <p:nvSpPr>
+          <p:cNvPr id="6" name="TextBox 5"/>
+          <p:cNvSpPr txBox="1"/>
+          <p:nvPr/>
+        </p:nvSpPr>
+        <p:spPr>
+          <a:xfrm>
+            <a:off x="548640" y="1417320"/>
+            <a:ext cx="11094415" cy="4983480"/>
+          </a:xfrm>
+          <a:prstGeom prst="rect">
+            <a:avLst/>
+          </a:prstGeom>
+          <a:noFill/>
+        </p:spPr>
+        <p:txBody>
+          <a:bodyPr wrap="square">
+            <a:spAutoFit/>
+          </a:bodyPr>
+          <a:lstStyle/>
+          <a:p>
+            <a:pPr>
+              <a:spcAft>
+                <a:spcPts val="1200"/>
+              </a:spcAft>
+              <a:defRPr sz="1800">
+                <a:solidFill>
+                  <a:srgbClr val="1A202C"/>
+                </a:solidFill>
+                <a:latin typeface="Calibri"/>
+              </a:defRPr>
+            </a:pPr>
+            <a:r>
+              <a:t>•  /classify — upload a clip or record live from the microphone (captured via the Web Audio API, encoded to WAV client-side — no server changes needed for live recording).</a:t>
+            </a:r>
+          </a:p>
+          <a:p>
+            <a:pPr>
+              <a:spcAft>
+                <a:spcPts val="1200"/>
+              </a:spcAft>
+              <a:defRPr sz="1800">
+                <a:solidFill>
+                  <a:srgbClr val="1A202C"/>
+                </a:solidFill>
+                <a:latin typeface="Calibri"/>
+              </a:defRPr>
+            </a:pPr>
+            <a:r>
+              <a:t>•  Returns Human / AI-generated + confidence, plus the 5 most similar training clips, each one playable right in the results, so you can hear what "similar" sounds like.</a:t>
+            </a:r>
+          </a:p>
+          <a:p>
+            <a:pPr>
+              <a:spcAft>
+                <a:spcPts val="1200"/>
+              </a:spcAft>
+              <a:defRPr sz="1800">
+                <a:solidFill>
+                  <a:srgbClr val="1A202C"/>
+                </a:solidFill>
+                <a:latin typeface="Calibri"/>
+              </a:defRPr>
+            </a:pPr>
+            <a:r>
+              <a:t>•  /dashboard — live Elasticsearch aggregations: model comparison, threshold trade-off, ROC curve, confusion matrix, feature importance, confidence calibration.</a:t>
+            </a:r>
+          </a:p>
+        </p:txBody>
+      </p:sp>
+      <p:sp>
+        <p:nvSpPr>
+          <p:cNvPr id="7" name="Rounded Rectangle 6">
+            <a:hlinkClick r:id="rId2"/>
+          </p:cNvPr>
+          <p:cNvSpPr/>
+          <p:nvPr/>
+        </p:nvSpPr>
+        <p:spPr>
+          <a:xfrm>
+            <a:off x="548640" y="5257800"/>
+            <a:ext cx="3291840" cy="594360"/>
+          </a:xfrm>
+          <a:prstGeom prst="roundRect">
+            <a:avLst>
+              <a:gd name="adj" fmla="val 6000"/>
+            </a:avLst>
+          </a:prstGeom>
+          <a:solidFill>
+            <a:srgbClr val="0D9488"/>
+          </a:solidFill>
+          <a:ln>
+            <a:noFill/>
+          </a:ln>
+          <a:effectLst/>
+        </p:spPr>
+        <p:style>
+          <a:lnRef idx="1">
+            <a:schemeClr val="accent1"/>
+          </a:lnRef>
+          <a:fillRef idx="3">
+            <a:schemeClr val="accent1"/>
+          </a:fillRef>
+          <a:effectRef idx="2">
+            <a:schemeClr val="accent1"/>
+          </a:effectRef>
+          <a:fontRef idx="minor">
+            <a:schemeClr val="lt1"/>
+          </a:fontRef>
+        </p:style>
+        <p:txBody>
           <a:bodyPr rtlCol="0" anchor="ctr" wrap="square"/>
           <a:lstStyle/>
           <a:p>
@@ -4827,7 +6402,390 @@
               </a:defRPr>
             </a:pPr>
             <a:r>
-              <a:t>▶  Open the live demo</a:t>
+              <a:t>▶  Open /classify</a:t>
+            </a:r>
+          </a:p>
+        </p:txBody>
+      </p:sp>
+      <p:sp>
+        <p:nvSpPr>
+          <p:cNvPr id="8" name="Rounded Rectangle 7">
+            <a:hlinkClick r:id="rId3"/>
+          </p:cNvPr>
+          <p:cNvSpPr/>
+          <p:nvPr/>
+        </p:nvSpPr>
+        <p:spPr>
+          <a:xfrm>
+            <a:off x="4114800" y="5257800"/>
+            <a:ext cx="3291840" cy="594360"/>
+          </a:xfrm>
+          <a:prstGeom prst="roundRect">
+            <a:avLst>
+              <a:gd name="adj" fmla="val 6000"/>
+            </a:avLst>
+          </a:prstGeom>
+          <a:solidFill>
+            <a:srgbClr val="2B6CB0"/>
+          </a:solidFill>
+          <a:ln>
+            <a:noFill/>
+          </a:ln>
+          <a:effectLst/>
+        </p:spPr>
+        <p:style>
+          <a:lnRef idx="1">
+            <a:schemeClr val="accent1"/>
+          </a:lnRef>
+          <a:fillRef idx="3">
+            <a:schemeClr val="accent1"/>
+          </a:fillRef>
+          <a:effectRef idx="2">
+            <a:schemeClr val="accent1"/>
+          </a:effectRef>
+          <a:fontRef idx="minor">
+            <a:schemeClr val="lt1"/>
+          </a:fontRef>
+        </p:style>
+        <p:txBody>
+          <a:bodyPr rtlCol="0" anchor="ctr" wrap="square"/>
+          <a:lstStyle/>
+          <a:p>
+            <a:pPr algn="ctr">
+              <a:defRPr sz="1700" b="1">
+                <a:solidFill>
+                  <a:srgbClr val="FFFFFF"/>
+                </a:solidFill>
+                <a:latin typeface="Calibri"/>
+              </a:defRPr>
+            </a:pPr>
+            <a:r>
+              <a:t>▶  Open /dashboard</a:t>
+            </a:r>
+          </a:p>
+        </p:txBody>
+      </p:sp>
+      <p:sp>
+        <p:nvSpPr>
+          <p:cNvPr id="9" name="TextBox 8"/>
+          <p:cNvSpPr txBox="1"/>
+          <p:nvPr/>
+        </p:nvSpPr>
+        <p:spPr>
+          <a:xfrm>
+            <a:off x="548640" y="5989320"/>
+            <a:ext cx="11094415" cy="365760"/>
+          </a:xfrm>
+          <a:prstGeom prst="rect">
+            <a:avLst/>
+          </a:prstGeom>
+          <a:noFill/>
+        </p:spPr>
+        <p:txBody>
+          <a:bodyPr wrap="square">
+            <a:spAutoFit/>
+          </a:bodyPr>
+          <a:lstStyle/>
+          <a:p>
+            <a:pPr algn="l">
+              <a:defRPr sz="1100" b="0">
+                <a:solidFill>
+                  <a:srgbClr val="64748B"/>
+                </a:solidFill>
+                <a:latin typeface="Calibri"/>
+              </a:defRPr>
+            </a:pPr>
+            <a:r>
+              <a:t>Links open localhost:5000 — click while presenting from the machine running the app (see README.md).</a:t>
+            </a:r>
+          </a:p>
+        </p:txBody>
+      </p:sp>
+    </p:spTree>
+  </p:cSld>
+  <p:clrMapOvr>
+    <a:masterClrMapping/>
+  </p:clrMapOvr>
+</p:sld>
+</file>
+
+<file path=ppt/slides/slide19.xml><?xml version="1.0" encoding="utf-8"?>
+<p:sld xmlns:a="http://schemas.openxmlformats.org/drawingml/2006/main" xmlns:p="http://schemas.openxmlformats.org/presentationml/2006/main" xmlns:r="http://schemas.openxmlformats.org/officeDocument/2006/relationships">
+  <p:cSld>
+    <p:bg>
+      <p:bgPr>
+        <a:solidFill>
+          <a:srgbClr val="F7F9FB"/>
+        </a:solidFill>
+        <a:effectLst/>
+      </p:bgPr>
+    </p:bg>
+    <p:spTree>
+      <p:nvGrpSpPr>
+        <p:cNvPr id="1" name=""/>
+        <p:cNvGrpSpPr/>
+        <p:nvPr/>
+      </p:nvGrpSpPr>
+      <p:grpSpPr/>
+      <p:sp>
+        <p:nvSpPr>
+          <p:cNvPr id="2" name="Rectangle 1"/>
+          <p:cNvSpPr/>
+          <p:nvPr/>
+        </p:nvSpPr>
+        <p:spPr>
+          <a:xfrm>
+            <a:off x="0" y="0"/>
+            <a:ext cx="12191695" cy="1051560"/>
+          </a:xfrm>
+          <a:prstGeom prst="rect">
+            <a:avLst/>
+          </a:prstGeom>
+          <a:solidFill>
+            <a:srgbClr val="0F2942"/>
+          </a:solidFill>
+          <a:ln>
+            <a:noFill/>
+          </a:ln>
+          <a:effectLst/>
+        </p:spPr>
+        <p:style>
+          <a:lnRef idx="1">
+            <a:schemeClr val="accent1"/>
+          </a:lnRef>
+          <a:fillRef idx="3">
+            <a:schemeClr val="accent1"/>
+          </a:fillRef>
+          <a:effectRef idx="2">
+            <a:schemeClr val="accent1"/>
+          </a:effectRef>
+          <a:fontRef idx="minor">
+            <a:schemeClr val="lt1"/>
+          </a:fontRef>
+        </p:style>
+        <p:txBody>
+          <a:bodyPr rtlCol="0" anchor="ctr"/>
+          <a:lstStyle/>
+          <a:p>
+            <a:pPr algn="ctr"/>
+          </a:p>
+        </p:txBody>
+      </p:sp>
+      <p:sp>
+        <p:nvSpPr>
+          <p:cNvPr id="3" name="Rectangle 2"/>
+          <p:cNvSpPr/>
+          <p:nvPr/>
+        </p:nvSpPr>
+        <p:spPr>
+          <a:xfrm>
+            <a:off x="0" y="1051560"/>
+            <a:ext cx="2103120" cy="63500"/>
+          </a:xfrm>
+          <a:prstGeom prst="rect">
+            <a:avLst/>
+          </a:prstGeom>
+          <a:solidFill>
+            <a:srgbClr val="0D9488"/>
+          </a:solidFill>
+          <a:ln>
+            <a:noFill/>
+          </a:ln>
+          <a:effectLst/>
+        </p:spPr>
+        <p:style>
+          <a:lnRef idx="1">
+            <a:schemeClr val="accent1"/>
+          </a:lnRef>
+          <a:fillRef idx="3">
+            <a:schemeClr val="accent1"/>
+          </a:fillRef>
+          <a:effectRef idx="2">
+            <a:schemeClr val="accent1"/>
+          </a:effectRef>
+          <a:fontRef idx="minor">
+            <a:schemeClr val="lt1"/>
+          </a:fontRef>
+        </p:style>
+        <p:txBody>
+          <a:bodyPr rtlCol="0" anchor="ctr"/>
+          <a:lstStyle/>
+          <a:p>
+            <a:pPr algn="ctr"/>
+          </a:p>
+        </p:txBody>
+      </p:sp>
+      <p:sp>
+        <p:nvSpPr>
+          <p:cNvPr id="4" name="TextBox 3"/>
+          <p:cNvSpPr txBox="1"/>
+          <p:nvPr/>
+        </p:nvSpPr>
+        <p:spPr>
+          <a:xfrm>
+            <a:off x="548640" y="146304"/>
+            <a:ext cx="11094415" cy="640080"/>
+          </a:xfrm>
+          <a:prstGeom prst="rect">
+            <a:avLst/>
+          </a:prstGeom>
+          <a:noFill/>
+        </p:spPr>
+        <p:txBody>
+          <a:bodyPr wrap="square">
+            <a:spAutoFit/>
+          </a:bodyPr>
+          <a:lstStyle/>
+          <a:p>
+            <a:pPr>
+              <a:defRPr sz="3000" b="1">
+                <a:solidFill>
+                  <a:srgbClr val="FFFFFF"/>
+                </a:solidFill>
+                <a:latin typeface="Calibri"/>
+              </a:defRPr>
+            </a:pPr>
+            <a:r>
+              <a:t>Challenges &amp; trade-offs</a:t>
+            </a:r>
+          </a:p>
+        </p:txBody>
+      </p:sp>
+      <p:sp>
+        <p:nvSpPr>
+          <p:cNvPr id="5" name="TextBox 4"/>
+          <p:cNvSpPr txBox="1"/>
+          <p:nvPr/>
+        </p:nvSpPr>
+        <p:spPr>
+          <a:xfrm>
+            <a:off x="11368735" y="6473952"/>
+            <a:ext cx="548640" cy="292608"/>
+          </a:xfrm>
+          <a:prstGeom prst="rect">
+            <a:avLst/>
+          </a:prstGeom>
+          <a:noFill/>
+        </p:spPr>
+        <p:txBody>
+          <a:bodyPr wrap="square">
+            <a:spAutoFit/>
+          </a:bodyPr>
+          <a:lstStyle/>
+          <a:p>
+            <a:pPr algn="r">
+              <a:defRPr sz="1100" b="0">
+                <a:solidFill>
+                  <a:srgbClr val="64748B"/>
+                </a:solidFill>
+                <a:latin typeface="Calibri"/>
+              </a:defRPr>
+            </a:pPr>
+            <a:r>
+              <a:t>18</a:t>
+            </a:r>
+          </a:p>
+        </p:txBody>
+      </p:sp>
+      <p:sp>
+        <p:nvSpPr>
+          <p:cNvPr id="6" name="TextBox 5"/>
+          <p:cNvSpPr txBox="1"/>
+          <p:nvPr/>
+        </p:nvSpPr>
+        <p:spPr>
+          <a:xfrm>
+            <a:off x="548640" y="1417320"/>
+            <a:ext cx="11094415" cy="4983480"/>
+          </a:xfrm>
+          <a:prstGeom prst="rect">
+            <a:avLst/>
+          </a:prstGeom>
+          <a:noFill/>
+        </p:spPr>
+        <p:txBody>
+          <a:bodyPr wrap="square">
+            <a:spAutoFit/>
+          </a:bodyPr>
+          <a:lstStyle/>
+          <a:p>
+            <a:pPr>
+              <a:spcAft>
+                <a:spcPts val="1200"/>
+              </a:spcAft>
+              <a:defRPr sz="1800">
+                <a:solidFill>
+                  <a:srgbClr val="1A202C"/>
+                </a:solidFill>
+                <a:latin typeface="Calibri"/>
+              </a:defRPr>
+            </a:pPr>
+            <a:r>
+              <a:t>•  Windows + Spark: worker Python resolution, path-with-spaces, and a Docker Desktop networking quirk all broke Spark's driver↔executor RPC — diagnosed and fixed, not hidden.</a:t>
+            </a:r>
+          </a:p>
+          <a:p>
+            <a:pPr>
+              <a:spcAft>
+                <a:spcPts val="1200"/>
+              </a:spcAft>
+              <a:defRPr sz="1800">
+                <a:solidFill>
+                  <a:srgbClr val="1A202C"/>
+                </a:solidFill>
+                <a:latin typeface="Calibri"/>
+              </a:defRPr>
+            </a:pPr>
+            <a:r>
+              <a:t>•  The EER threshold trades some spoof recall for bonafide recall — a deliberate choice, not a free win: no single threshold maximizes both on an imbalanced dataset.</a:t>
+            </a:r>
+          </a:p>
+          <a:p>
+            <a:pPr>
+              <a:spcAft>
+                <a:spcPts val="1200"/>
+              </a:spcAft>
+              <a:defRPr sz="1800">
+                <a:solidFill>
+                  <a:srgbClr val="1A202C"/>
+                </a:solidFill>
+                <a:latin typeface="Calibri"/>
+              </a:defRPr>
+            </a:pPr>
+            <a:r>
+              <a:t>•  Embedding is the classifier's own feature vector, not a separate pretrained audio embedding model — keeps the semantic-search capability fully self-contained.</a:t>
+            </a:r>
+          </a:p>
+          <a:p>
+            <a:pPr>
+              <a:spcAft>
+                <a:spcPts val="1200"/>
+              </a:spcAft>
+              <a:defRPr sz="1800">
+                <a:solidFill>
+                  <a:srgbClr val="1A202C"/>
+                </a:solidFill>
+                <a:latin typeface="Calibri"/>
+              </a:defRPr>
+            </a:pPr>
+            <a:r>
+              <a:t>•  Kept Python end-to-end (not Scala) since the feature-extraction library is Python-only.</a:t>
+            </a:r>
+          </a:p>
+          <a:p>
+            <a:pPr>
+              <a:spcAft>
+                <a:spcPts val="1200"/>
+              </a:spcAft>
+              <a:defRPr sz="1800">
+                <a:solidFill>
+                  <a:srgbClr val="1A202C"/>
+                </a:solidFill>
+                <a:latin typeface="Calibri"/>
+              </a:defRPr>
+            </a:pPr>
+            <a:r>
+              <a:t>•  Speaker-disjoint train/dev split (not random) to avoid inflating accuracy via leakage.</a:t>
             </a:r>
           </a:p>
         </p:txBody>
@@ -5113,6 +7071,253 @@
 </p:sld>
 </file>
 
+<file path=ppt/slides/slide20.xml><?xml version="1.0" encoding="utf-8"?>
+<p:sld xmlns:a="http://schemas.openxmlformats.org/drawingml/2006/main" xmlns:p="http://schemas.openxmlformats.org/presentationml/2006/main" xmlns:r="http://schemas.openxmlformats.org/officeDocument/2006/relationships">
+  <p:cSld>
+    <p:bg>
+      <p:bgPr>
+        <a:solidFill>
+          <a:srgbClr val="F7F9FB"/>
+        </a:solidFill>
+        <a:effectLst/>
+      </p:bgPr>
+    </p:bg>
+    <p:spTree>
+      <p:nvGrpSpPr>
+        <p:cNvPr id="1" name=""/>
+        <p:cNvGrpSpPr/>
+        <p:nvPr/>
+      </p:nvGrpSpPr>
+      <p:grpSpPr/>
+      <p:sp>
+        <p:nvSpPr>
+          <p:cNvPr id="2" name="Rectangle 1"/>
+          <p:cNvSpPr/>
+          <p:nvPr/>
+        </p:nvSpPr>
+        <p:spPr>
+          <a:xfrm>
+            <a:off x="0" y="0"/>
+            <a:ext cx="12191695" cy="6858000"/>
+          </a:xfrm>
+          <a:prstGeom prst="rect">
+            <a:avLst/>
+          </a:prstGeom>
+          <a:solidFill>
+            <a:srgbClr val="0F2942"/>
+          </a:solidFill>
+          <a:ln>
+            <a:noFill/>
+          </a:ln>
+          <a:effectLst/>
+        </p:spPr>
+        <p:style>
+          <a:lnRef idx="1">
+            <a:schemeClr val="accent1"/>
+          </a:lnRef>
+          <a:fillRef idx="3">
+            <a:schemeClr val="accent1"/>
+          </a:fillRef>
+          <a:effectRef idx="2">
+            <a:schemeClr val="accent1"/>
+          </a:effectRef>
+          <a:fontRef idx="minor">
+            <a:schemeClr val="lt1"/>
+          </a:fontRef>
+        </p:style>
+        <p:txBody>
+          <a:bodyPr rtlCol="0" anchor="ctr"/>
+          <a:lstStyle/>
+          <a:p>
+            <a:pPr algn="ctr"/>
+          </a:p>
+        </p:txBody>
+      </p:sp>
+      <p:sp>
+        <p:nvSpPr>
+          <p:cNvPr id="3" name="Rectangle 2"/>
+          <p:cNvSpPr/>
+          <p:nvPr/>
+        </p:nvSpPr>
+        <p:spPr>
+          <a:xfrm>
+            <a:off x="0" y="3383280"/>
+            <a:ext cx="12191695" cy="63500"/>
+          </a:xfrm>
+          <a:prstGeom prst="rect">
+            <a:avLst/>
+          </a:prstGeom>
+          <a:solidFill>
+            <a:srgbClr val="0D9488"/>
+          </a:solidFill>
+          <a:ln>
+            <a:noFill/>
+          </a:ln>
+          <a:effectLst/>
+        </p:spPr>
+        <p:style>
+          <a:lnRef idx="1">
+            <a:schemeClr val="accent1"/>
+          </a:lnRef>
+          <a:fillRef idx="3">
+            <a:schemeClr val="accent1"/>
+          </a:fillRef>
+          <a:effectRef idx="2">
+            <a:schemeClr val="accent1"/>
+          </a:effectRef>
+          <a:fontRef idx="minor">
+            <a:schemeClr val="lt1"/>
+          </a:fontRef>
+        </p:style>
+        <p:txBody>
+          <a:bodyPr rtlCol="0" anchor="ctr"/>
+          <a:lstStyle/>
+          <a:p>
+            <a:pPr algn="ctr"/>
+          </a:p>
+        </p:txBody>
+      </p:sp>
+      <p:sp>
+        <p:nvSpPr>
+          <p:cNvPr id="4" name="TextBox 3"/>
+          <p:cNvSpPr txBox="1"/>
+          <p:nvPr/>
+        </p:nvSpPr>
+        <p:spPr>
+          <a:xfrm>
+            <a:off x="914400" y="2286000"/>
+            <a:ext cx="10332720" cy="914400"/>
+          </a:xfrm>
+          <a:prstGeom prst="rect">
+            <a:avLst/>
+          </a:prstGeom>
+          <a:noFill/>
+        </p:spPr>
+        <p:txBody>
+          <a:bodyPr wrap="square">
+            <a:spAutoFit/>
+          </a:bodyPr>
+          <a:lstStyle/>
+          <a:p>
+            <a:pPr algn="l">
+              <a:defRPr sz="4000" b="1">
+                <a:solidFill>
+                  <a:srgbClr val="FFFFFF"/>
+                </a:solidFill>
+                <a:latin typeface="Calibri"/>
+              </a:defRPr>
+            </a:pPr>
+            <a:r>
+              <a:t>Questions?</a:t>
+            </a:r>
+          </a:p>
+        </p:txBody>
+      </p:sp>
+      <p:sp>
+        <p:nvSpPr>
+          <p:cNvPr id="5" name="TextBox 4"/>
+          <p:cNvSpPr txBox="1"/>
+          <p:nvPr/>
+        </p:nvSpPr>
+        <p:spPr>
+          <a:xfrm>
+            <a:off x="914400" y="3246120"/>
+            <a:ext cx="7315200" cy="457200"/>
+          </a:xfrm>
+          <a:prstGeom prst="rect">
+            <a:avLst/>
+          </a:prstGeom>
+          <a:noFill/>
+        </p:spPr>
+        <p:txBody>
+          <a:bodyPr wrap="none">
+            <a:spAutoFit/>
+          </a:bodyPr>
+          <a:lstStyle/>
+          <a:p>
+            <a:pPr>
+              <a:defRPr sz="1600">
+                <a:solidFill>
+                  <a:srgbClr val="CBD5E1"/>
+                </a:solidFill>
+                <a:latin typeface="Calibri"/>
+              </a:defRPr>
+            </a:pPr>
+            <a:r>
+              <a:rPr>
+                <a:hlinkClick r:id="rId2"/>
+              </a:rPr>
+              <a:t>github.com/HadarBaum/asvspoof-voice-ai</a:t>
+            </a:r>
+          </a:p>
+        </p:txBody>
+      </p:sp>
+      <p:sp>
+        <p:nvSpPr>
+          <p:cNvPr id="6" name="Rounded Rectangle 5">
+            <a:hlinkClick r:id="rId3"/>
+          </p:cNvPr>
+          <p:cNvSpPr/>
+          <p:nvPr/>
+        </p:nvSpPr>
+        <p:spPr>
+          <a:xfrm>
+            <a:off x="914400" y="3931920"/>
+            <a:ext cx="3291840" cy="594360"/>
+          </a:xfrm>
+          <a:prstGeom prst="roundRect">
+            <a:avLst>
+              <a:gd name="adj" fmla="val 6000"/>
+            </a:avLst>
+          </a:prstGeom>
+          <a:solidFill>
+            <a:srgbClr val="0D9488"/>
+          </a:solidFill>
+          <a:ln>
+            <a:noFill/>
+          </a:ln>
+          <a:effectLst/>
+        </p:spPr>
+        <p:style>
+          <a:lnRef idx="1">
+            <a:schemeClr val="accent1"/>
+          </a:lnRef>
+          <a:fillRef idx="3">
+            <a:schemeClr val="accent1"/>
+          </a:fillRef>
+          <a:effectRef idx="2">
+            <a:schemeClr val="accent1"/>
+          </a:effectRef>
+          <a:fontRef idx="minor">
+            <a:schemeClr val="lt1"/>
+          </a:fontRef>
+        </p:style>
+        <p:txBody>
+          <a:bodyPr rtlCol="0" anchor="ctr" wrap="square"/>
+          <a:lstStyle/>
+          <a:p>
+            <a:pPr algn="ctr">
+              <a:defRPr sz="1700" b="1">
+                <a:solidFill>
+                  <a:srgbClr val="FFFFFF"/>
+                </a:solidFill>
+                <a:latin typeface="Calibri"/>
+              </a:defRPr>
+            </a:pPr>
+            <a:r>
+              <a:t>▶  Open the live demo</a:t>
+            </a:r>
+          </a:p>
+        </p:txBody>
+      </p:sp>
+    </p:spTree>
+  </p:cSld>
+  <p:clrMapOvr>
+    <a:masterClrMapping/>
+  </p:clrMapOvr>
+</p:sld>
+</file>
+
 <file path=ppt/slides/slide3.xml><?xml version="1.0" encoding="utf-8"?>
 <p:sld xmlns:a="http://schemas.openxmlformats.org/drawingml/2006/main" xmlns:p="http://schemas.openxmlformats.org/presentationml/2006/main" xmlns:r="http://schemas.openxmlformats.org/officeDocument/2006/relationships">
   <p:cSld>
@@ -5591,7 +7796,7 @@
               </a:defRPr>
             </a:pPr>
             <a:r>
-              <a:t>AI capability 1 — classification</a:t>
+              <a:t>Architecture diagram</a:t>
             </a:r>
           </a:p>
         </p:txBody>
@@ -5627,7 +7832,7 @@
               </a:defRPr>
             </a:pPr>
             <a:r>
-              <a:t>Random Forest vs. Gradient Boosting, picked by EER</a:t>
+              <a:t>The full pipeline, end to end - object store to serving</a:t>
             </a:r>
           </a:p>
         </p:txBody>
@@ -5664,6 +7869,3201 @@
             </a:pPr>
             <a:r>
               <a:t>3</a:t>
+            </a:r>
+          </a:p>
+        </p:txBody>
+      </p:sp>
+      <p:sp>
+        <p:nvSpPr>
+          <p:cNvPr id="7" name="Rounded Rectangle 6"/>
+          <p:cNvSpPr/>
+          <p:nvPr/>
+        </p:nvSpPr>
+        <p:spPr>
+          <a:xfrm>
+            <a:off x="548640" y="1371600"/>
+            <a:ext cx="2602153" cy="868680"/>
+          </a:xfrm>
+          <a:prstGeom prst="roundRect">
+            <a:avLst>
+              <a:gd name="adj" fmla="val 6000"/>
+            </a:avLst>
+          </a:prstGeom>
+          <a:solidFill>
+            <a:srgbClr val="FFFFFF"/>
+          </a:solidFill>
+          <a:ln w="12700">
+            <a:solidFill>
+              <a:srgbClr val="2B6CB0"/>
+            </a:solidFill>
+          </a:ln>
+          <a:effectLst/>
+        </p:spPr>
+        <p:style>
+          <a:lnRef idx="1">
+            <a:schemeClr val="accent1"/>
+          </a:lnRef>
+          <a:fillRef idx="3">
+            <a:schemeClr val="accent1"/>
+          </a:fillRef>
+          <a:effectRef idx="2">
+            <a:schemeClr val="accent1"/>
+          </a:effectRef>
+          <a:fontRef idx="minor">
+            <a:schemeClr val="lt1"/>
+          </a:fontRef>
+        </p:style>
+        <p:txBody>
+          <a:bodyPr rtlCol="0" anchor="ctr" wrap="square" lIns="73152" rIns="73152"/>
+          <a:lstStyle/>
+          <a:p>
+            <a:pPr algn="ctr">
+              <a:defRPr sz="1250" b="1">
+                <a:solidFill>
+                  <a:srgbClr val="1A202C"/>
+                </a:solidFill>
+                <a:latin typeface="Calibri"/>
+              </a:defRPr>
+            </a:pPr>
+            <a:r>
+              <a:t>Kaggle: ASVspoof2019 LA</a:t>
+            </a:r>
+          </a:p>
+          <a:p>
+            <a:pPr algn="ctr">
+              <a:defRPr sz="950">
+                <a:solidFill>
+                  <a:srgbClr val="64748B"/>
+                </a:solidFill>
+                <a:latin typeface="Calibri"/>
+              </a:defRPr>
+            </a:pPr>
+            <a:r>
+              <a:t>download_dataset.py</a:t>
+            </a:r>
+          </a:p>
+        </p:txBody>
+      </p:sp>
+      <p:sp>
+        <p:nvSpPr>
+          <p:cNvPr id="8" name="Rounded Rectangle 7"/>
+          <p:cNvSpPr/>
+          <p:nvPr/>
+        </p:nvSpPr>
+        <p:spPr>
+          <a:xfrm>
+            <a:off x="3379393" y="1371600"/>
+            <a:ext cx="2602153" cy="868680"/>
+          </a:xfrm>
+          <a:prstGeom prst="roundRect">
+            <a:avLst>
+              <a:gd name="adj" fmla="val 6000"/>
+            </a:avLst>
+          </a:prstGeom>
+          <a:solidFill>
+            <a:srgbClr val="FFFFFF"/>
+          </a:solidFill>
+          <a:ln w="12700">
+            <a:solidFill>
+              <a:srgbClr val="2B6CB0"/>
+            </a:solidFill>
+          </a:ln>
+          <a:effectLst/>
+        </p:spPr>
+        <p:style>
+          <a:lnRef idx="1">
+            <a:schemeClr val="accent1"/>
+          </a:lnRef>
+          <a:fillRef idx="3">
+            <a:schemeClr val="accent1"/>
+          </a:fillRef>
+          <a:effectRef idx="2">
+            <a:schemeClr val="accent1"/>
+          </a:effectRef>
+          <a:fontRef idx="minor">
+            <a:schemeClr val="lt1"/>
+          </a:fontRef>
+        </p:style>
+        <p:txBody>
+          <a:bodyPr rtlCol="0" anchor="ctr" wrap="square" lIns="73152" rIns="73152"/>
+          <a:lstStyle/>
+          <a:p>
+            <a:pPr algn="ctr">
+              <a:defRPr sz="1250" b="1">
+                <a:solidFill>
+                  <a:srgbClr val="1A202C"/>
+                </a:solidFill>
+                <a:latin typeface="Calibri"/>
+              </a:defRPr>
+            </a:pPr>
+            <a:r>
+              <a:t>MinIO</a:t>
+            </a:r>
+          </a:p>
+          <a:p>
+            <a:pPr algn="ctr">
+              <a:defRPr sz="950">
+                <a:solidFill>
+                  <a:srgbClr val="64748B"/>
+                </a:solidFill>
+                <a:latin typeface="Calibri"/>
+              </a:defRPr>
+            </a:pPr>
+            <a:r>
+              <a:t>object store - raw audio</a:t>
+            </a:r>
+          </a:p>
+        </p:txBody>
+      </p:sp>
+      <p:sp>
+        <p:nvSpPr>
+          <p:cNvPr id="9" name="Rounded Rectangle 8"/>
+          <p:cNvSpPr/>
+          <p:nvPr/>
+        </p:nvSpPr>
+        <p:spPr>
+          <a:xfrm>
+            <a:off x="6210146" y="1371600"/>
+            <a:ext cx="2602153" cy="868680"/>
+          </a:xfrm>
+          <a:prstGeom prst="roundRect">
+            <a:avLst>
+              <a:gd name="adj" fmla="val 6000"/>
+            </a:avLst>
+          </a:prstGeom>
+          <a:solidFill>
+            <a:srgbClr val="FFFFFF"/>
+          </a:solidFill>
+          <a:ln w="12700">
+            <a:solidFill>
+              <a:srgbClr val="2B6CB0"/>
+            </a:solidFill>
+          </a:ln>
+          <a:effectLst/>
+        </p:spPr>
+        <p:style>
+          <a:lnRef idx="1">
+            <a:schemeClr val="accent1"/>
+          </a:lnRef>
+          <a:fillRef idx="3">
+            <a:schemeClr val="accent1"/>
+          </a:fillRef>
+          <a:effectRef idx="2">
+            <a:schemeClr val="accent1"/>
+          </a:effectRef>
+          <a:fontRef idx="minor">
+            <a:schemeClr val="lt1"/>
+          </a:fontRef>
+        </p:style>
+        <p:txBody>
+          <a:bodyPr rtlCol="0" anchor="ctr" wrap="square" lIns="73152" rIns="73152"/>
+          <a:lstStyle/>
+          <a:p>
+            <a:pPr algn="ctr">
+              <a:defRPr sz="1250" b="1">
+                <a:solidFill>
+                  <a:srgbClr val="1A202C"/>
+                </a:solidFill>
+                <a:latin typeface="Calibri"/>
+              </a:defRPr>
+            </a:pPr>
+            <a:r>
+              <a:t>Spark</a:t>
+            </a:r>
+          </a:p>
+          <a:p>
+            <a:pPr algn="ctr">
+              <a:defRPr sz="950">
+                <a:solidFill>
+                  <a:srgbClr val="64748B"/>
+                </a:solidFill>
+                <a:latin typeface="Calibri"/>
+              </a:defRPr>
+            </a:pPr>
+            <a:r>
+              <a:t>batch_feature_extraction.py</a:t>
+            </a:r>
+          </a:p>
+        </p:txBody>
+      </p:sp>
+      <p:sp>
+        <p:nvSpPr>
+          <p:cNvPr id="10" name="Rounded Rectangle 9"/>
+          <p:cNvSpPr/>
+          <p:nvPr/>
+        </p:nvSpPr>
+        <p:spPr>
+          <a:xfrm>
+            <a:off x="9040899" y="1371600"/>
+            <a:ext cx="2602153" cy="868680"/>
+          </a:xfrm>
+          <a:prstGeom prst="roundRect">
+            <a:avLst>
+              <a:gd name="adj" fmla="val 6000"/>
+            </a:avLst>
+          </a:prstGeom>
+          <a:solidFill>
+            <a:srgbClr val="FFFFFF"/>
+          </a:solidFill>
+          <a:ln w="12700">
+            <a:solidFill>
+              <a:srgbClr val="2B6CB0"/>
+            </a:solidFill>
+          </a:ln>
+          <a:effectLst/>
+        </p:spPr>
+        <p:style>
+          <a:lnRef idx="1">
+            <a:schemeClr val="accent1"/>
+          </a:lnRef>
+          <a:fillRef idx="3">
+            <a:schemeClr val="accent1"/>
+          </a:fillRef>
+          <a:effectRef idx="2">
+            <a:schemeClr val="accent1"/>
+          </a:effectRef>
+          <a:fontRef idx="minor">
+            <a:schemeClr val="lt1"/>
+          </a:fontRef>
+        </p:style>
+        <p:txBody>
+          <a:bodyPr rtlCol="0" anchor="ctr" wrap="square" lIns="73152" rIns="73152"/>
+          <a:lstStyle/>
+          <a:p>
+            <a:pPr algn="ctr">
+              <a:defRPr sz="1250" b="1">
+                <a:solidFill>
+                  <a:srgbClr val="1A202C"/>
+                </a:solidFill>
+                <a:latin typeface="Calibri"/>
+              </a:defRPr>
+            </a:pPr>
+            <a:r>
+              <a:t>Parquet +</a:t>
+            </a:r>
+          </a:p>
+          <a:p>
+            <a:pPr algn="ctr">
+              <a:defRPr sz="1250" b="1">
+                <a:solidFill>
+                  <a:srgbClr val="1A202C"/>
+                </a:solidFill>
+                <a:latin typeface="Calibri"/>
+              </a:defRPr>
+            </a:pPr>
+            <a:r>
+              <a:t>Elasticsearch</a:t>
+            </a:r>
+          </a:p>
+          <a:p>
+            <a:pPr algn="ctr">
+              <a:defRPr sz="950">
+                <a:solidFill>
+                  <a:srgbClr val="64748B"/>
+                </a:solidFill>
+                <a:latin typeface="Calibri"/>
+              </a:defRPr>
+            </a:pPr>
+            <a:r>
+              <a:t>feature table</a:t>
+            </a:r>
+          </a:p>
+        </p:txBody>
+      </p:sp>
+      <p:cxnSp>
+        <p:nvCxnSpPr>
+          <p:cNvPr id="11" name="Connector 10"/>
+          <p:cNvCxnSpPr/>
+          <p:nvPr/>
+        </p:nvCxnSpPr>
+        <p:spPr>
+          <a:xfrm>
+            <a:off x="3150793" y="1805940"/>
+            <a:ext cx="228600" cy="0"/>
+          </a:xfrm>
+          <a:prstGeom prst="line">
+            <a:avLst/>
+          </a:prstGeom>
+          <a:ln w="15875">
+            <a:solidFill>
+              <a:srgbClr val="64748B"/>
+            </a:solidFill>
+            <a:tailEnd type="triangle"/>
+          </a:ln>
+          <a:effectLst/>
+        </p:spPr>
+        <p:style>
+          <a:lnRef idx="2">
+            <a:schemeClr val="accent1"/>
+          </a:lnRef>
+          <a:fillRef idx="0">
+            <a:schemeClr val="accent1"/>
+          </a:fillRef>
+          <a:effectRef idx="1">
+            <a:schemeClr val="accent1"/>
+          </a:effectRef>
+          <a:fontRef idx="minor">
+            <a:schemeClr val="tx1"/>
+          </a:fontRef>
+        </p:style>
+      </p:cxnSp>
+      <p:cxnSp>
+        <p:nvCxnSpPr>
+          <p:cNvPr id="12" name="Connector 11"/>
+          <p:cNvCxnSpPr/>
+          <p:nvPr/>
+        </p:nvCxnSpPr>
+        <p:spPr>
+          <a:xfrm>
+            <a:off x="5981546" y="1805940"/>
+            <a:ext cx="228600" cy="0"/>
+          </a:xfrm>
+          <a:prstGeom prst="line">
+            <a:avLst/>
+          </a:prstGeom>
+          <a:ln w="15875">
+            <a:solidFill>
+              <a:srgbClr val="64748B"/>
+            </a:solidFill>
+            <a:tailEnd type="triangle"/>
+          </a:ln>
+          <a:effectLst/>
+        </p:spPr>
+        <p:style>
+          <a:lnRef idx="2">
+            <a:schemeClr val="accent1"/>
+          </a:lnRef>
+          <a:fillRef idx="0">
+            <a:schemeClr val="accent1"/>
+          </a:fillRef>
+          <a:effectRef idx="1">
+            <a:schemeClr val="accent1"/>
+          </a:effectRef>
+          <a:fontRef idx="minor">
+            <a:schemeClr val="tx1"/>
+          </a:fontRef>
+        </p:style>
+      </p:cxnSp>
+      <p:cxnSp>
+        <p:nvCxnSpPr>
+          <p:cNvPr id="13" name="Connector 12"/>
+          <p:cNvCxnSpPr/>
+          <p:nvPr/>
+        </p:nvCxnSpPr>
+        <p:spPr>
+          <a:xfrm>
+            <a:off x="8812299" y="1805940"/>
+            <a:ext cx="228600" cy="0"/>
+          </a:xfrm>
+          <a:prstGeom prst="line">
+            <a:avLst/>
+          </a:prstGeom>
+          <a:ln w="15875">
+            <a:solidFill>
+              <a:srgbClr val="64748B"/>
+            </a:solidFill>
+            <a:tailEnd type="triangle"/>
+          </a:ln>
+          <a:effectLst/>
+        </p:spPr>
+        <p:style>
+          <a:lnRef idx="2">
+            <a:schemeClr val="accent1"/>
+          </a:lnRef>
+          <a:fillRef idx="0">
+            <a:schemeClr val="accent1"/>
+          </a:fillRef>
+          <a:effectRef idx="1">
+            <a:schemeClr val="accent1"/>
+          </a:effectRef>
+          <a:fontRef idx="minor">
+            <a:schemeClr val="tx1"/>
+          </a:fontRef>
+        </p:style>
+      </p:cxnSp>
+      <p:sp>
+        <p:nvSpPr>
+          <p:cNvPr id="14" name="Rounded Rectangle 13"/>
+          <p:cNvSpPr/>
+          <p:nvPr/>
+        </p:nvSpPr>
+        <p:spPr>
+          <a:xfrm>
+            <a:off x="548640" y="2788920"/>
+            <a:ext cx="3515258" cy="960120"/>
+          </a:xfrm>
+          <a:prstGeom prst="roundRect">
+            <a:avLst>
+              <a:gd name="adj" fmla="val 6000"/>
+            </a:avLst>
+          </a:prstGeom>
+          <a:solidFill>
+            <a:srgbClr val="FFFFFF"/>
+          </a:solidFill>
+          <a:ln w="12700">
+            <a:solidFill>
+              <a:srgbClr val="0D9488"/>
+            </a:solidFill>
+          </a:ln>
+          <a:effectLst/>
+        </p:spPr>
+        <p:style>
+          <a:lnRef idx="1">
+            <a:schemeClr val="accent1"/>
+          </a:lnRef>
+          <a:fillRef idx="3">
+            <a:schemeClr val="accent1"/>
+          </a:fillRef>
+          <a:effectRef idx="2">
+            <a:schemeClr val="accent1"/>
+          </a:effectRef>
+          <a:fontRef idx="minor">
+            <a:schemeClr val="lt1"/>
+          </a:fontRef>
+        </p:style>
+        <p:txBody>
+          <a:bodyPr rtlCol="0" anchor="ctr" wrap="square" lIns="73152" rIns="73152"/>
+          <a:lstStyle/>
+          <a:p>
+            <a:pPr algn="ctr">
+              <a:defRPr sz="1250" b="1">
+                <a:solidFill>
+                  <a:srgbClr val="1A202C"/>
+                </a:solidFill>
+                <a:latin typeface="Calibri"/>
+              </a:defRPr>
+            </a:pPr>
+            <a:r>
+              <a:t>train_classifier.py</a:t>
+            </a:r>
+          </a:p>
+          <a:p>
+            <a:pPr algn="ctr">
+              <a:defRPr sz="950">
+                <a:solidFill>
+                  <a:srgbClr val="64748B"/>
+                </a:solidFill>
+                <a:latin typeface="Calibri"/>
+              </a:defRPr>
+            </a:pPr>
+            <a:r>
+              <a:t>RF vs Gradient Boosting -&gt;</a:t>
+            </a:r>
+          </a:p>
+          <a:p>
+            <a:pPr algn="ctr">
+              <a:defRPr sz="950">
+                <a:solidFill>
+                  <a:srgbClr val="64748B"/>
+                </a:solidFill>
+                <a:latin typeface="Calibri"/>
+              </a:defRPr>
+            </a:pPr>
+            <a:r>
+              <a:t>model + EER threshold</a:t>
+            </a:r>
+          </a:p>
+        </p:txBody>
+      </p:sp>
+      <p:sp>
+        <p:nvSpPr>
+          <p:cNvPr id="15" name="Rounded Rectangle 14"/>
+          <p:cNvSpPr/>
+          <p:nvPr/>
+        </p:nvSpPr>
+        <p:spPr>
+          <a:xfrm>
+            <a:off x="4338218" y="2788920"/>
+            <a:ext cx="3515258" cy="960120"/>
+          </a:xfrm>
+          <a:prstGeom prst="roundRect">
+            <a:avLst>
+              <a:gd name="adj" fmla="val 6000"/>
+            </a:avLst>
+          </a:prstGeom>
+          <a:solidFill>
+            <a:srgbClr val="FFFFFF"/>
+          </a:solidFill>
+          <a:ln w="12700">
+            <a:solidFill>
+              <a:srgbClr val="0D9488"/>
+            </a:solidFill>
+          </a:ln>
+          <a:effectLst/>
+        </p:spPr>
+        <p:style>
+          <a:lnRef idx="1">
+            <a:schemeClr val="accent1"/>
+          </a:lnRef>
+          <a:fillRef idx="3">
+            <a:schemeClr val="accent1"/>
+          </a:fillRef>
+          <a:effectRef idx="2">
+            <a:schemeClr val="accent1"/>
+          </a:effectRef>
+          <a:fontRef idx="minor">
+            <a:schemeClr val="lt1"/>
+          </a:fontRef>
+        </p:style>
+        <p:txBody>
+          <a:bodyPr rtlCol="0" anchor="ctr" wrap="square" lIns="73152" rIns="73152"/>
+          <a:lstStyle/>
+          <a:p>
+            <a:pPr algn="ctr">
+              <a:defRPr sz="1250" b="1">
+                <a:solidFill>
+                  <a:srgbClr val="1A202C"/>
+                </a:solidFill>
+                <a:latin typeface="Calibri"/>
+              </a:defRPr>
+            </a:pPr>
+            <a:r>
+              <a:t>index_embeddings.py</a:t>
+            </a:r>
+          </a:p>
+          <a:p>
+            <a:pPr algn="ctr">
+              <a:defRPr sz="950">
+                <a:solidFill>
+                  <a:srgbClr val="64748B"/>
+                </a:solidFill>
+                <a:latin typeface="Calibri"/>
+              </a:defRPr>
+            </a:pPr>
+            <a:r>
+              <a:t>standardize -&gt;</a:t>
+            </a:r>
+          </a:p>
+          <a:p>
+            <a:pPr algn="ctr">
+              <a:defRPr sz="950">
+                <a:solidFill>
+                  <a:srgbClr val="64748B"/>
+                </a:solidFill>
+                <a:latin typeface="Calibri"/>
+              </a:defRPr>
+            </a:pPr>
+            <a:r>
+              <a:t>k-NN embeddings</a:t>
+            </a:r>
+          </a:p>
+        </p:txBody>
+      </p:sp>
+      <p:sp>
+        <p:nvSpPr>
+          <p:cNvPr id="16" name="Rounded Rectangle 15"/>
+          <p:cNvSpPr/>
+          <p:nvPr/>
+        </p:nvSpPr>
+        <p:spPr>
+          <a:xfrm>
+            <a:off x="8127796" y="2788920"/>
+            <a:ext cx="3515258" cy="960120"/>
+          </a:xfrm>
+          <a:prstGeom prst="roundRect">
+            <a:avLst>
+              <a:gd name="adj" fmla="val 6000"/>
+            </a:avLst>
+          </a:prstGeom>
+          <a:solidFill>
+            <a:srgbClr val="FFFFFF"/>
+          </a:solidFill>
+          <a:ln w="12700">
+            <a:solidFill>
+              <a:srgbClr val="0D9488"/>
+            </a:solidFill>
+          </a:ln>
+          <a:effectLst/>
+        </p:spPr>
+        <p:style>
+          <a:lnRef idx="1">
+            <a:schemeClr val="accent1"/>
+          </a:lnRef>
+          <a:fillRef idx="3">
+            <a:schemeClr val="accent1"/>
+          </a:fillRef>
+          <a:effectRef idx="2">
+            <a:schemeClr val="accent1"/>
+          </a:effectRef>
+          <a:fontRef idx="minor">
+            <a:schemeClr val="lt1"/>
+          </a:fontRef>
+        </p:style>
+        <p:txBody>
+          <a:bodyPr rtlCol="0" anchor="ctr" wrap="square" lIns="73152" rIns="73152"/>
+          <a:lstStyle/>
+          <a:p>
+            <a:pPr algn="ctr">
+              <a:defRPr sz="1250" b="1">
+                <a:solidFill>
+                  <a:srgbClr val="1A202C"/>
+                </a:solidFill>
+                <a:latin typeface="Calibri"/>
+              </a:defRPr>
+            </a:pPr>
+            <a:r>
+              <a:t>kafka_producer.py -&gt;</a:t>
+            </a:r>
+          </a:p>
+          <a:p>
+            <a:pPr algn="ctr">
+              <a:defRPr sz="1250" b="1">
+                <a:solidFill>
+                  <a:srgbClr val="1A202C"/>
+                </a:solidFill>
+                <a:latin typeface="Calibri"/>
+              </a:defRPr>
+            </a:pPr>
+            <a:r>
+              <a:t>streaming_enrichment.py</a:t>
+            </a:r>
+          </a:p>
+          <a:p>
+            <a:pPr algn="ctr">
+              <a:defRPr sz="950">
+                <a:solidFill>
+                  <a:srgbClr val="64748B"/>
+                </a:solidFill>
+                <a:latin typeface="Calibri"/>
+              </a:defRPr>
+            </a:pPr>
+            <a:r>
+              <a:t>near-real-time scoring</a:t>
+            </a:r>
+          </a:p>
+        </p:txBody>
+      </p:sp>
+      <p:cxnSp>
+        <p:nvCxnSpPr>
+          <p:cNvPr id="17" name="Connector 16"/>
+          <p:cNvCxnSpPr/>
+          <p:nvPr/>
+        </p:nvCxnSpPr>
+        <p:spPr>
+          <a:xfrm flipH="1">
+            <a:off x="2306269" y="2240280"/>
+            <a:ext cx="8035706" cy="548640"/>
+          </a:xfrm>
+          <a:prstGeom prst="line">
+            <a:avLst/>
+          </a:prstGeom>
+          <a:ln w="15875">
+            <a:solidFill>
+              <a:srgbClr val="64748B"/>
+            </a:solidFill>
+            <a:tailEnd type="triangle"/>
+          </a:ln>
+          <a:effectLst/>
+        </p:spPr>
+        <p:style>
+          <a:lnRef idx="2">
+            <a:schemeClr val="accent1"/>
+          </a:lnRef>
+          <a:fillRef idx="0">
+            <a:schemeClr val="accent1"/>
+          </a:fillRef>
+          <a:effectRef idx="1">
+            <a:schemeClr val="accent1"/>
+          </a:effectRef>
+          <a:fontRef idx="minor">
+            <a:schemeClr val="tx1"/>
+          </a:fontRef>
+        </p:style>
+      </p:cxnSp>
+      <p:cxnSp>
+        <p:nvCxnSpPr>
+          <p:cNvPr id="18" name="Connector 17"/>
+          <p:cNvCxnSpPr/>
+          <p:nvPr/>
+        </p:nvCxnSpPr>
+        <p:spPr>
+          <a:xfrm flipH="1">
+            <a:off x="6095847" y="2240280"/>
+            <a:ext cx="4246128" cy="548640"/>
+          </a:xfrm>
+          <a:prstGeom prst="line">
+            <a:avLst/>
+          </a:prstGeom>
+          <a:ln w="15875">
+            <a:solidFill>
+              <a:srgbClr val="64748B"/>
+            </a:solidFill>
+            <a:tailEnd type="triangle"/>
+          </a:ln>
+          <a:effectLst/>
+        </p:spPr>
+        <p:style>
+          <a:lnRef idx="2">
+            <a:schemeClr val="accent1"/>
+          </a:lnRef>
+          <a:fillRef idx="0">
+            <a:schemeClr val="accent1"/>
+          </a:fillRef>
+          <a:effectRef idx="1">
+            <a:schemeClr val="accent1"/>
+          </a:effectRef>
+          <a:fontRef idx="minor">
+            <a:schemeClr val="tx1"/>
+          </a:fontRef>
+        </p:style>
+      </p:cxnSp>
+      <p:cxnSp>
+        <p:nvCxnSpPr>
+          <p:cNvPr id="19" name="Connector 18"/>
+          <p:cNvCxnSpPr/>
+          <p:nvPr/>
+        </p:nvCxnSpPr>
+        <p:spPr>
+          <a:xfrm flipH="1">
+            <a:off x="9885425" y="2240280"/>
+            <a:ext cx="456550" cy="548640"/>
+          </a:xfrm>
+          <a:prstGeom prst="line">
+            <a:avLst/>
+          </a:prstGeom>
+          <a:ln w="15875">
+            <a:solidFill>
+              <a:srgbClr val="64748B"/>
+            </a:solidFill>
+            <a:tailEnd type="triangle"/>
+          </a:ln>
+          <a:effectLst/>
+        </p:spPr>
+        <p:style>
+          <a:lnRef idx="2">
+            <a:schemeClr val="accent1"/>
+          </a:lnRef>
+          <a:fillRef idx="0">
+            <a:schemeClr val="accent1"/>
+          </a:fillRef>
+          <a:effectRef idx="1">
+            <a:schemeClr val="accent1"/>
+          </a:effectRef>
+          <a:fontRef idx="minor">
+            <a:schemeClr val="tx1"/>
+          </a:fontRef>
+        </p:style>
+      </p:cxnSp>
+      <p:sp>
+        <p:nvSpPr>
+          <p:cNvPr id="20" name="Rounded Rectangle 19"/>
+          <p:cNvSpPr/>
+          <p:nvPr/>
+        </p:nvSpPr>
+        <p:spPr>
+          <a:xfrm>
+            <a:off x="548640" y="4343400"/>
+            <a:ext cx="5410047" cy="777240"/>
+          </a:xfrm>
+          <a:prstGeom prst="roundRect">
+            <a:avLst>
+              <a:gd name="adj" fmla="val 6000"/>
+            </a:avLst>
+          </a:prstGeom>
+          <a:solidFill>
+            <a:srgbClr val="FFFFFF"/>
+          </a:solidFill>
+          <a:ln w="12700">
+            <a:solidFill>
+              <a:srgbClr val="DC2626"/>
+            </a:solidFill>
+          </a:ln>
+          <a:effectLst/>
+        </p:spPr>
+        <p:style>
+          <a:lnRef idx="1">
+            <a:schemeClr val="accent1"/>
+          </a:lnRef>
+          <a:fillRef idx="3">
+            <a:schemeClr val="accent1"/>
+          </a:fillRef>
+          <a:effectRef idx="2">
+            <a:schemeClr val="accent1"/>
+          </a:effectRef>
+          <a:fontRef idx="minor">
+            <a:schemeClr val="lt1"/>
+          </a:fontRef>
+        </p:style>
+        <p:txBody>
+          <a:bodyPr rtlCol="0" anchor="ctr" wrap="square" lIns="73152" rIns="73152"/>
+          <a:lstStyle/>
+          <a:p>
+            <a:pPr algn="ctr">
+              <a:defRPr sz="1250" b="1">
+                <a:solidFill>
+                  <a:srgbClr val="1A202C"/>
+                </a:solidFill>
+                <a:latin typeface="Calibri"/>
+              </a:defRPr>
+            </a:pPr>
+            <a:r>
+              <a:t>insights.py</a:t>
+            </a:r>
+          </a:p>
+          <a:p>
+            <a:pPr algn="ctr">
+              <a:defRPr sz="950">
+                <a:solidFill>
+                  <a:srgbClr val="64748B"/>
+                </a:solidFill>
+                <a:latin typeface="Calibri"/>
+              </a:defRPr>
+            </a:pPr>
+            <a:r>
+              <a:t>aggregations -&gt; charts + RESULTS.md</a:t>
+            </a:r>
+          </a:p>
+        </p:txBody>
+      </p:sp>
+      <p:sp>
+        <p:nvSpPr>
+          <p:cNvPr id="21" name="Rounded Rectangle 20"/>
+          <p:cNvSpPr/>
+          <p:nvPr/>
+        </p:nvSpPr>
+        <p:spPr>
+          <a:xfrm>
+            <a:off x="6233007" y="4343400"/>
+            <a:ext cx="5410047" cy="777240"/>
+          </a:xfrm>
+          <a:prstGeom prst="roundRect">
+            <a:avLst>
+              <a:gd name="adj" fmla="val 6000"/>
+            </a:avLst>
+          </a:prstGeom>
+          <a:solidFill>
+            <a:srgbClr val="FFFFFF"/>
+          </a:solidFill>
+          <a:ln w="12700">
+            <a:solidFill>
+              <a:srgbClr val="DC2626"/>
+            </a:solidFill>
+          </a:ln>
+          <a:effectLst/>
+        </p:spPr>
+        <p:style>
+          <a:lnRef idx="1">
+            <a:schemeClr val="accent1"/>
+          </a:lnRef>
+          <a:fillRef idx="3">
+            <a:schemeClr val="accent1"/>
+          </a:fillRef>
+          <a:effectRef idx="2">
+            <a:schemeClr val="accent1"/>
+          </a:effectRef>
+          <a:fontRef idx="minor">
+            <a:schemeClr val="lt1"/>
+          </a:fontRef>
+        </p:style>
+        <p:txBody>
+          <a:bodyPr rtlCol="0" anchor="ctr" wrap="square" lIns="73152" rIns="73152"/>
+          <a:lstStyle/>
+          <a:p>
+            <a:pPr algn="ctr">
+              <a:defRPr sz="1250" b="1">
+                <a:solidFill>
+                  <a:srgbClr val="1A202C"/>
+                </a:solidFill>
+                <a:latin typeface="Calibri"/>
+              </a:defRPr>
+            </a:pPr>
+            <a:r>
+              <a:t>Flask app</a:t>
+            </a:r>
+          </a:p>
+          <a:p>
+            <a:pPr algn="ctr">
+              <a:defRPr sz="950">
+                <a:solidFill>
+                  <a:srgbClr val="64748B"/>
+                </a:solidFill>
+                <a:latin typeface="Calibri"/>
+              </a:defRPr>
+            </a:pPr>
+            <a:r>
+              <a:t>/classify + /dashboard</a:t>
+            </a:r>
+          </a:p>
+        </p:txBody>
+      </p:sp>
+      <p:cxnSp>
+        <p:nvCxnSpPr>
+          <p:cNvPr id="22" name="Connector 21"/>
+          <p:cNvCxnSpPr/>
+          <p:nvPr/>
+        </p:nvCxnSpPr>
+        <p:spPr>
+          <a:xfrm>
+            <a:off x="2306269" y="3749040"/>
+            <a:ext cx="947394" cy="594360"/>
+          </a:xfrm>
+          <a:prstGeom prst="line">
+            <a:avLst/>
+          </a:prstGeom>
+          <a:ln w="15875">
+            <a:solidFill>
+              <a:srgbClr val="64748B"/>
+            </a:solidFill>
+            <a:tailEnd type="triangle"/>
+          </a:ln>
+          <a:effectLst/>
+        </p:spPr>
+        <p:style>
+          <a:lnRef idx="2">
+            <a:schemeClr val="accent1"/>
+          </a:lnRef>
+          <a:fillRef idx="0">
+            <a:schemeClr val="accent1"/>
+          </a:fillRef>
+          <a:effectRef idx="1">
+            <a:schemeClr val="accent1"/>
+          </a:effectRef>
+          <a:fontRef idx="minor">
+            <a:schemeClr val="tx1"/>
+          </a:fontRef>
+        </p:style>
+      </p:cxnSp>
+      <p:cxnSp>
+        <p:nvCxnSpPr>
+          <p:cNvPr id="23" name="Connector 22"/>
+          <p:cNvCxnSpPr/>
+          <p:nvPr/>
+        </p:nvCxnSpPr>
+        <p:spPr>
+          <a:xfrm>
+            <a:off x="2306269" y="3749040"/>
+            <a:ext cx="6631761" cy="594360"/>
+          </a:xfrm>
+          <a:prstGeom prst="line">
+            <a:avLst/>
+          </a:prstGeom>
+          <a:ln w="15875">
+            <a:solidFill>
+              <a:srgbClr val="64748B"/>
+            </a:solidFill>
+            <a:tailEnd type="triangle"/>
+          </a:ln>
+          <a:effectLst/>
+        </p:spPr>
+        <p:style>
+          <a:lnRef idx="2">
+            <a:schemeClr val="accent1"/>
+          </a:lnRef>
+          <a:fillRef idx="0">
+            <a:schemeClr val="accent1"/>
+          </a:fillRef>
+          <a:effectRef idx="1">
+            <a:schemeClr val="accent1"/>
+          </a:effectRef>
+          <a:fontRef idx="minor">
+            <a:schemeClr val="tx1"/>
+          </a:fontRef>
+        </p:style>
+      </p:cxnSp>
+      <p:cxnSp>
+        <p:nvCxnSpPr>
+          <p:cNvPr id="24" name="Connector 23"/>
+          <p:cNvCxnSpPr/>
+          <p:nvPr/>
+        </p:nvCxnSpPr>
+        <p:spPr>
+          <a:xfrm>
+            <a:off x="6095847" y="3749040"/>
+            <a:ext cx="2842183" cy="594360"/>
+          </a:xfrm>
+          <a:prstGeom prst="line">
+            <a:avLst/>
+          </a:prstGeom>
+          <a:ln w="15875">
+            <a:solidFill>
+              <a:srgbClr val="64748B"/>
+            </a:solidFill>
+            <a:tailEnd type="triangle"/>
+          </a:ln>
+          <a:effectLst/>
+        </p:spPr>
+        <p:style>
+          <a:lnRef idx="2">
+            <a:schemeClr val="accent1"/>
+          </a:lnRef>
+          <a:fillRef idx="0">
+            <a:schemeClr val="accent1"/>
+          </a:fillRef>
+          <a:effectRef idx="1">
+            <a:schemeClr val="accent1"/>
+          </a:effectRef>
+          <a:fontRef idx="minor">
+            <a:schemeClr val="tx1"/>
+          </a:fontRef>
+        </p:style>
+      </p:cxnSp>
+      <p:cxnSp>
+        <p:nvCxnSpPr>
+          <p:cNvPr id="25" name="Connector 24"/>
+          <p:cNvCxnSpPr/>
+          <p:nvPr/>
+        </p:nvCxnSpPr>
+        <p:spPr>
+          <a:xfrm flipH="1">
+            <a:off x="3253663" y="3749040"/>
+            <a:ext cx="6631762" cy="594360"/>
+          </a:xfrm>
+          <a:prstGeom prst="line">
+            <a:avLst/>
+          </a:prstGeom>
+          <a:ln w="15875">
+            <a:solidFill>
+              <a:srgbClr val="64748B"/>
+            </a:solidFill>
+            <a:tailEnd type="triangle"/>
+          </a:ln>
+          <a:effectLst/>
+        </p:spPr>
+        <p:style>
+          <a:lnRef idx="2">
+            <a:schemeClr val="accent1"/>
+          </a:lnRef>
+          <a:fillRef idx="0">
+            <a:schemeClr val="accent1"/>
+          </a:fillRef>
+          <a:effectRef idx="1">
+            <a:schemeClr val="accent1"/>
+          </a:effectRef>
+          <a:fontRef idx="minor">
+            <a:schemeClr val="tx1"/>
+          </a:fontRef>
+        </p:style>
+      </p:cxnSp>
+      <p:cxnSp>
+        <p:nvCxnSpPr>
+          <p:cNvPr id="26" name="Connector 25"/>
+          <p:cNvCxnSpPr/>
+          <p:nvPr/>
+        </p:nvCxnSpPr>
+        <p:spPr>
+          <a:xfrm flipH="1">
+            <a:off x="8938030" y="3749040"/>
+            <a:ext cx="947395" cy="594360"/>
+          </a:xfrm>
+          <a:prstGeom prst="line">
+            <a:avLst/>
+          </a:prstGeom>
+          <a:ln w="15875">
+            <a:solidFill>
+              <a:srgbClr val="64748B"/>
+            </a:solidFill>
+            <a:tailEnd type="triangle"/>
+          </a:ln>
+          <a:effectLst/>
+        </p:spPr>
+        <p:style>
+          <a:lnRef idx="2">
+            <a:schemeClr val="accent1"/>
+          </a:lnRef>
+          <a:fillRef idx="0">
+            <a:schemeClr val="accent1"/>
+          </a:fillRef>
+          <a:effectRef idx="1">
+            <a:schemeClr val="accent1"/>
+          </a:effectRef>
+          <a:fontRef idx="minor">
+            <a:schemeClr val="tx1"/>
+          </a:fontRef>
+        </p:style>
+      </p:cxnSp>
+      <p:sp>
+        <p:nvSpPr>
+          <p:cNvPr id="27" name="Rounded Rectangle 26">
+            <a:hlinkClick r:id="rId2"/>
+          </p:cNvPr>
+          <p:cNvSpPr/>
+          <p:nvPr/>
+        </p:nvSpPr>
+        <p:spPr>
+          <a:xfrm>
+            <a:off x="548640" y="5440680"/>
+            <a:ext cx="3931920" cy="457200"/>
+          </a:xfrm>
+          <a:prstGeom prst="roundRect">
+            <a:avLst>
+              <a:gd name="adj" fmla="val 6000"/>
+            </a:avLst>
+          </a:prstGeom>
+          <a:solidFill>
+            <a:srgbClr val="0F2942"/>
+          </a:solidFill>
+          <a:ln>
+            <a:noFill/>
+          </a:ln>
+          <a:effectLst/>
+        </p:spPr>
+        <p:style>
+          <a:lnRef idx="1">
+            <a:schemeClr val="accent1"/>
+          </a:lnRef>
+          <a:fillRef idx="3">
+            <a:schemeClr val="accent1"/>
+          </a:fillRef>
+          <a:effectRef idx="2">
+            <a:schemeClr val="accent1"/>
+          </a:effectRef>
+          <a:fontRef idx="minor">
+            <a:schemeClr val="lt1"/>
+          </a:fontRef>
+        </p:style>
+        <p:txBody>
+          <a:bodyPr rtlCol="0" anchor="ctr" wrap="square"/>
+          <a:lstStyle/>
+          <a:p>
+            <a:pPr algn="ctr">
+              <a:defRPr sz="1700" b="1">
+                <a:solidFill>
+                  <a:srgbClr val="FFFFFF"/>
+                </a:solidFill>
+                <a:latin typeface="Calibri"/>
+              </a:defRPr>
+            </a:pPr>
+            <a:r>
+              <a:t>View exact diagram in DESIGN.md</a:t>
+            </a:r>
+          </a:p>
+        </p:txBody>
+      </p:sp>
+      <p:sp>
+        <p:nvSpPr>
+          <p:cNvPr id="28" name="TextBox 27"/>
+          <p:cNvSpPr txBox="1"/>
+          <p:nvPr/>
+        </p:nvSpPr>
+        <p:spPr>
+          <a:xfrm>
+            <a:off x="4754880" y="5559552"/>
+            <a:ext cx="6888175" cy="365760"/>
+          </a:xfrm>
+          <a:prstGeom prst="rect">
+            <a:avLst/>
+          </a:prstGeom>
+          <a:noFill/>
+        </p:spPr>
+        <p:txBody>
+          <a:bodyPr wrap="square">
+            <a:spAutoFit/>
+          </a:bodyPr>
+          <a:lstStyle/>
+          <a:p>
+            <a:pPr algn="l">
+              <a:defRPr sz="1100" b="0">
+                <a:solidFill>
+                  <a:srgbClr val="64748B"/>
+                </a:solidFill>
+                <a:latin typeface="Calibri"/>
+              </a:defRPr>
+            </a:pPr>
+            <a:r>
+              <a:t>Same architecture as the Mermaid flowchart in docs/DESIGN.md, redrawn natively for the deck.</a:t>
+            </a:r>
+          </a:p>
+        </p:txBody>
+      </p:sp>
+    </p:spTree>
+  </p:cSld>
+  <p:clrMapOvr>
+    <a:masterClrMapping/>
+  </p:clrMapOvr>
+</p:sld>
+</file>
+
+<file path=ppt/slides/slide5.xml><?xml version="1.0" encoding="utf-8"?>
+<p:sld xmlns:a="http://schemas.openxmlformats.org/drawingml/2006/main" xmlns:p="http://schemas.openxmlformats.org/presentationml/2006/main" xmlns:r="http://schemas.openxmlformats.org/officeDocument/2006/relationships">
+  <p:cSld>
+    <p:bg>
+      <p:bgPr>
+        <a:solidFill>
+          <a:srgbClr val="F7F9FB"/>
+        </a:solidFill>
+        <a:effectLst/>
+      </p:bgPr>
+    </p:bg>
+    <p:spTree>
+      <p:nvGrpSpPr>
+        <p:cNvPr id="1" name=""/>
+        <p:cNvGrpSpPr/>
+        <p:nvPr/>
+      </p:nvGrpSpPr>
+      <p:grpSpPr/>
+      <p:sp>
+        <p:nvSpPr>
+          <p:cNvPr id="2" name="Rectangle 1"/>
+          <p:cNvSpPr/>
+          <p:nvPr/>
+        </p:nvSpPr>
+        <p:spPr>
+          <a:xfrm>
+            <a:off x="0" y="0"/>
+            <a:ext cx="12191695" cy="1051560"/>
+          </a:xfrm>
+          <a:prstGeom prst="rect">
+            <a:avLst/>
+          </a:prstGeom>
+          <a:solidFill>
+            <a:srgbClr val="0F2942"/>
+          </a:solidFill>
+          <a:ln>
+            <a:noFill/>
+          </a:ln>
+          <a:effectLst/>
+        </p:spPr>
+        <p:style>
+          <a:lnRef idx="1">
+            <a:schemeClr val="accent1"/>
+          </a:lnRef>
+          <a:fillRef idx="3">
+            <a:schemeClr val="accent1"/>
+          </a:fillRef>
+          <a:effectRef idx="2">
+            <a:schemeClr val="accent1"/>
+          </a:effectRef>
+          <a:fontRef idx="minor">
+            <a:schemeClr val="lt1"/>
+          </a:fontRef>
+        </p:style>
+        <p:txBody>
+          <a:bodyPr rtlCol="0" anchor="ctr"/>
+          <a:lstStyle/>
+          <a:p>
+            <a:pPr algn="ctr"/>
+          </a:p>
+        </p:txBody>
+      </p:sp>
+      <p:sp>
+        <p:nvSpPr>
+          <p:cNvPr id="3" name="Rectangle 2"/>
+          <p:cNvSpPr/>
+          <p:nvPr/>
+        </p:nvSpPr>
+        <p:spPr>
+          <a:xfrm>
+            <a:off x="0" y="1051560"/>
+            <a:ext cx="2103120" cy="63500"/>
+          </a:xfrm>
+          <a:prstGeom prst="rect">
+            <a:avLst/>
+          </a:prstGeom>
+          <a:solidFill>
+            <a:srgbClr val="0D9488"/>
+          </a:solidFill>
+          <a:ln>
+            <a:noFill/>
+          </a:ln>
+          <a:effectLst/>
+        </p:spPr>
+        <p:style>
+          <a:lnRef idx="1">
+            <a:schemeClr val="accent1"/>
+          </a:lnRef>
+          <a:fillRef idx="3">
+            <a:schemeClr val="accent1"/>
+          </a:fillRef>
+          <a:effectRef idx="2">
+            <a:schemeClr val="accent1"/>
+          </a:effectRef>
+          <a:fontRef idx="minor">
+            <a:schemeClr val="lt1"/>
+          </a:fontRef>
+        </p:style>
+        <p:txBody>
+          <a:bodyPr rtlCol="0" anchor="ctr"/>
+          <a:lstStyle/>
+          <a:p>
+            <a:pPr algn="ctr"/>
+          </a:p>
+        </p:txBody>
+      </p:sp>
+      <p:sp>
+        <p:nvSpPr>
+          <p:cNvPr id="4" name="TextBox 3"/>
+          <p:cNvSpPr txBox="1"/>
+          <p:nvPr/>
+        </p:nvSpPr>
+        <p:spPr>
+          <a:xfrm>
+            <a:off x="548640" y="146304"/>
+            <a:ext cx="11094415" cy="640080"/>
+          </a:xfrm>
+          <a:prstGeom prst="rect">
+            <a:avLst/>
+          </a:prstGeom>
+          <a:noFill/>
+        </p:spPr>
+        <p:txBody>
+          <a:bodyPr wrap="square">
+            <a:spAutoFit/>
+          </a:bodyPr>
+          <a:lstStyle/>
+          <a:p>
+            <a:pPr>
+              <a:defRPr sz="3000" b="1">
+                <a:solidFill>
+                  <a:srgbClr val="FFFFFF"/>
+                </a:solidFill>
+                <a:latin typeface="Calibri"/>
+              </a:defRPr>
+            </a:pPr>
+            <a:r>
+              <a:t>Pipeline stage 0-1 - Ingest</a:t>
+            </a:r>
+          </a:p>
+        </p:txBody>
+      </p:sp>
+      <p:sp>
+        <p:nvSpPr>
+          <p:cNvPr id="5" name="TextBox 4"/>
+          <p:cNvSpPr txBox="1"/>
+          <p:nvPr/>
+        </p:nvSpPr>
+        <p:spPr>
+          <a:xfrm>
+            <a:off x="548640" y="658368"/>
+            <a:ext cx="11094415" cy="365760"/>
+          </a:xfrm>
+          <a:prstGeom prst="rect">
+            <a:avLst/>
+          </a:prstGeom>
+          <a:noFill/>
+        </p:spPr>
+        <p:txBody>
+          <a:bodyPr wrap="none">
+            <a:spAutoFit/>
+          </a:bodyPr>
+          <a:lstStyle/>
+          <a:p>
+            <a:pPr>
+              <a:defRPr sz="1300">
+                <a:solidFill>
+                  <a:srgbClr val="CBD5E1"/>
+                </a:solidFill>
+                <a:latin typeface="Calibri"/>
+              </a:defRPr>
+            </a:pPr>
+            <a:r>
+              <a:t>Kaggle corpus -&gt; MinIO object store</a:t>
+            </a:r>
+          </a:p>
+        </p:txBody>
+      </p:sp>
+      <p:sp>
+        <p:nvSpPr>
+          <p:cNvPr id="6" name="TextBox 5"/>
+          <p:cNvSpPr txBox="1"/>
+          <p:nvPr/>
+        </p:nvSpPr>
+        <p:spPr>
+          <a:xfrm>
+            <a:off x="11368735" y="6473952"/>
+            <a:ext cx="548640" cy="292608"/>
+          </a:xfrm>
+          <a:prstGeom prst="rect">
+            <a:avLst/>
+          </a:prstGeom>
+          <a:noFill/>
+        </p:spPr>
+        <p:txBody>
+          <a:bodyPr wrap="square">
+            <a:spAutoFit/>
+          </a:bodyPr>
+          <a:lstStyle/>
+          <a:p>
+            <a:pPr algn="r">
+              <a:defRPr sz="1100" b="0">
+                <a:solidFill>
+                  <a:srgbClr val="64748B"/>
+                </a:solidFill>
+                <a:latin typeface="Calibri"/>
+              </a:defRPr>
+            </a:pPr>
+            <a:r>
+              <a:t>4</a:t>
+            </a:r>
+          </a:p>
+        </p:txBody>
+      </p:sp>
+      <p:sp>
+        <p:nvSpPr>
+          <p:cNvPr id="7" name="TextBox 6"/>
+          <p:cNvSpPr txBox="1"/>
+          <p:nvPr/>
+        </p:nvSpPr>
+        <p:spPr>
+          <a:xfrm>
+            <a:off x="548640" y="1417320"/>
+            <a:ext cx="11094415" cy="4983480"/>
+          </a:xfrm>
+          <a:prstGeom prst="rect">
+            <a:avLst/>
+          </a:prstGeom>
+          <a:noFill/>
+        </p:spPr>
+        <p:txBody>
+          <a:bodyPr wrap="square">
+            <a:spAutoFit/>
+          </a:bodyPr>
+          <a:lstStyle/>
+          <a:p>
+            <a:pPr>
+              <a:spcAft>
+                <a:spcPts val="1200"/>
+              </a:spcAft>
+              <a:defRPr sz="1700">
+                <a:solidFill>
+                  <a:srgbClr val="1A202C"/>
+                </a:solidFill>
+                <a:latin typeface="Calibri"/>
+              </a:defRPr>
+            </a:pPr>
+            <a:r>
+              <a:t>•  download_dataset.py pulls the ASVspoof2019 LA corpus (~121k flac files) from Kaggle via its API into data/raw/ — a one-time step, gated on a Kaggle API token.</a:t>
+            </a:r>
+          </a:p>
+          <a:p>
+            <a:pPr>
+              <a:spcAft>
+                <a:spcPts val="1200"/>
+              </a:spcAft>
+              <a:defRPr sz="1700">
+                <a:solidFill>
+                  <a:srgbClr val="1A202C"/>
+                </a:solidFill>
+                <a:latin typeface="Calibri"/>
+              </a:defRPr>
+            </a:pPr>
+            <a:r>
+              <a:t>•  ingest_to_minio.py uploads every labeled utterance into MinIO, an S3-compatible object store, keyed by partition and filename.</a:t>
+            </a:r>
+          </a:p>
+          <a:p>
+            <a:pPr>
+              <a:spcAft>
+                <a:spcPts val="1200"/>
+              </a:spcAft>
+              <a:defRPr sz="1700">
+                <a:solidFill>
+                  <a:srgbClr val="1A202C"/>
+                </a:solidFill>
+                <a:latin typeface="Calibri"/>
+              </a:defRPr>
+            </a:pPr>
+            <a:r>
+              <a:t>•  32 concurrent upload threads by default — this step is I/O-bound (many small files), so threading helps a lot even though Python threads don't parallelize CPU work.</a:t>
+            </a:r>
+          </a:p>
+          <a:p>
+            <a:pPr>
+              <a:spcAft>
+                <a:spcPts val="1200"/>
+              </a:spcAft>
+              <a:defRPr sz="1700">
+                <a:solidFill>
+                  <a:srgbClr val="1A202C"/>
+                </a:solidFill>
+                <a:latin typeface="Calibri"/>
+              </a:defRPr>
+            </a:pPr>
+            <a:r>
+              <a:t>•  Downstream steps (the Spark job, the streaming consumer, the Flask app) always fetch audio by key from MinIO, never the local filesystem — any worker, anywhere, can read a clip.</a:t>
+            </a:r>
+          </a:p>
+          <a:p>
+            <a:pPr>
+              <a:spcAft>
+                <a:spcPts val="1200"/>
+              </a:spcAft>
+              <a:defRPr sz="1700">
+                <a:solidFill>
+                  <a:srgbClr val="1A202C"/>
+                </a:solidFill>
+                <a:latin typeface="Calibri"/>
+              </a:defRPr>
+            </a:pPr>
+            <a:r>
+              <a:t>•  Protocol metadata (speaker id, attack id, bonafide/spoof label) stays in small local text files — only the audio bytes, the actually "big" unstructured data, go into the object store.</a:t>
+            </a:r>
+          </a:p>
+        </p:txBody>
+      </p:sp>
+    </p:spTree>
+  </p:cSld>
+  <p:clrMapOvr>
+    <a:masterClrMapping/>
+  </p:clrMapOvr>
+</p:sld>
+</file>
+
+<file path=ppt/slides/slide6.xml><?xml version="1.0" encoding="utf-8"?>
+<p:sld xmlns:a="http://schemas.openxmlformats.org/drawingml/2006/main" xmlns:p="http://schemas.openxmlformats.org/presentationml/2006/main" xmlns:r="http://schemas.openxmlformats.org/officeDocument/2006/relationships">
+  <p:cSld>
+    <p:bg>
+      <p:bgPr>
+        <a:solidFill>
+          <a:srgbClr val="F7F9FB"/>
+        </a:solidFill>
+        <a:effectLst/>
+      </p:bgPr>
+    </p:bg>
+    <p:spTree>
+      <p:nvGrpSpPr>
+        <p:cNvPr id="1" name=""/>
+        <p:cNvGrpSpPr/>
+        <p:nvPr/>
+      </p:nvGrpSpPr>
+      <p:grpSpPr/>
+      <p:sp>
+        <p:nvSpPr>
+          <p:cNvPr id="2" name="Rectangle 1"/>
+          <p:cNvSpPr/>
+          <p:nvPr/>
+        </p:nvSpPr>
+        <p:spPr>
+          <a:xfrm>
+            <a:off x="0" y="0"/>
+            <a:ext cx="12191695" cy="1051560"/>
+          </a:xfrm>
+          <a:prstGeom prst="rect">
+            <a:avLst/>
+          </a:prstGeom>
+          <a:solidFill>
+            <a:srgbClr val="0F2942"/>
+          </a:solidFill>
+          <a:ln>
+            <a:noFill/>
+          </a:ln>
+          <a:effectLst/>
+        </p:spPr>
+        <p:style>
+          <a:lnRef idx="1">
+            <a:schemeClr val="accent1"/>
+          </a:lnRef>
+          <a:fillRef idx="3">
+            <a:schemeClr val="accent1"/>
+          </a:fillRef>
+          <a:effectRef idx="2">
+            <a:schemeClr val="accent1"/>
+          </a:effectRef>
+          <a:fontRef idx="minor">
+            <a:schemeClr val="lt1"/>
+          </a:fontRef>
+        </p:style>
+        <p:txBody>
+          <a:bodyPr rtlCol="0" anchor="ctr"/>
+          <a:lstStyle/>
+          <a:p>
+            <a:pPr algn="ctr"/>
+          </a:p>
+        </p:txBody>
+      </p:sp>
+      <p:sp>
+        <p:nvSpPr>
+          <p:cNvPr id="3" name="Rectangle 2"/>
+          <p:cNvSpPr/>
+          <p:nvPr/>
+        </p:nvSpPr>
+        <p:spPr>
+          <a:xfrm>
+            <a:off x="0" y="1051560"/>
+            <a:ext cx="2103120" cy="63500"/>
+          </a:xfrm>
+          <a:prstGeom prst="rect">
+            <a:avLst/>
+          </a:prstGeom>
+          <a:solidFill>
+            <a:srgbClr val="0D9488"/>
+          </a:solidFill>
+          <a:ln>
+            <a:noFill/>
+          </a:ln>
+          <a:effectLst/>
+        </p:spPr>
+        <p:style>
+          <a:lnRef idx="1">
+            <a:schemeClr val="accent1"/>
+          </a:lnRef>
+          <a:fillRef idx="3">
+            <a:schemeClr val="accent1"/>
+          </a:fillRef>
+          <a:effectRef idx="2">
+            <a:schemeClr val="accent1"/>
+          </a:effectRef>
+          <a:fontRef idx="minor">
+            <a:schemeClr val="lt1"/>
+          </a:fontRef>
+        </p:style>
+        <p:txBody>
+          <a:bodyPr rtlCol="0" anchor="ctr"/>
+          <a:lstStyle/>
+          <a:p>
+            <a:pPr algn="ctr"/>
+          </a:p>
+        </p:txBody>
+      </p:sp>
+      <p:sp>
+        <p:nvSpPr>
+          <p:cNvPr id="4" name="TextBox 3"/>
+          <p:cNvSpPr txBox="1"/>
+          <p:nvPr/>
+        </p:nvSpPr>
+        <p:spPr>
+          <a:xfrm>
+            <a:off x="548640" y="146304"/>
+            <a:ext cx="11094415" cy="640080"/>
+          </a:xfrm>
+          <a:prstGeom prst="rect">
+            <a:avLst/>
+          </a:prstGeom>
+          <a:noFill/>
+        </p:spPr>
+        <p:txBody>
+          <a:bodyPr wrap="square">
+            <a:spAutoFit/>
+          </a:bodyPr>
+          <a:lstStyle/>
+          <a:p>
+            <a:pPr>
+              <a:defRPr sz="3000" b="1">
+                <a:solidFill>
+                  <a:srgbClr val="FFFFFF"/>
+                </a:solidFill>
+                <a:latin typeface="Calibri"/>
+              </a:defRPr>
+            </a:pPr>
+            <a:r>
+              <a:t>Pipeline stage 2 - Transform</a:t>
+            </a:r>
+          </a:p>
+        </p:txBody>
+      </p:sp>
+      <p:sp>
+        <p:nvSpPr>
+          <p:cNvPr id="5" name="TextBox 4"/>
+          <p:cNvSpPr txBox="1"/>
+          <p:nvPr/>
+        </p:nvSpPr>
+        <p:spPr>
+          <a:xfrm>
+            <a:off x="548640" y="658368"/>
+            <a:ext cx="11094415" cy="365760"/>
+          </a:xfrm>
+          <a:prstGeom prst="rect">
+            <a:avLst/>
+          </a:prstGeom>
+          <a:noFill/>
+        </p:spPr>
+        <p:txBody>
+          <a:bodyPr wrap="none">
+            <a:spAutoFit/>
+          </a:bodyPr>
+          <a:lstStyle/>
+          <a:p>
+            <a:pPr>
+              <a:defRPr sz="1300">
+                <a:solidFill>
+                  <a:srgbClr val="CBD5E1"/>
+                </a:solidFill>
+                <a:latin typeface="Calibri"/>
+              </a:defRPr>
+            </a:pPr>
+            <a:r>
+              <a:t>Spark batch feature extraction — the actual "big data" step</a:t>
+            </a:r>
+          </a:p>
+        </p:txBody>
+      </p:sp>
+      <p:sp>
+        <p:nvSpPr>
+          <p:cNvPr id="6" name="TextBox 5"/>
+          <p:cNvSpPr txBox="1"/>
+          <p:nvPr/>
+        </p:nvSpPr>
+        <p:spPr>
+          <a:xfrm>
+            <a:off x="11368735" y="6473952"/>
+            <a:ext cx="548640" cy="292608"/>
+          </a:xfrm>
+          <a:prstGeom prst="rect">
+            <a:avLst/>
+          </a:prstGeom>
+          <a:noFill/>
+        </p:spPr>
+        <p:txBody>
+          <a:bodyPr wrap="square">
+            <a:spAutoFit/>
+          </a:bodyPr>
+          <a:lstStyle/>
+          <a:p>
+            <a:pPr algn="r">
+              <a:defRPr sz="1100" b="0">
+                <a:solidFill>
+                  <a:srgbClr val="64748B"/>
+                </a:solidFill>
+                <a:latin typeface="Calibri"/>
+              </a:defRPr>
+            </a:pPr>
+            <a:r>
+              <a:t>5</a:t>
+            </a:r>
+          </a:p>
+        </p:txBody>
+      </p:sp>
+      <p:sp>
+        <p:nvSpPr>
+          <p:cNvPr id="7" name="TextBox 6"/>
+          <p:cNvSpPr txBox="1"/>
+          <p:nvPr/>
+        </p:nvSpPr>
+        <p:spPr>
+          <a:xfrm>
+            <a:off x="548640" y="1417320"/>
+            <a:ext cx="11094415" cy="4983480"/>
+          </a:xfrm>
+          <a:prstGeom prst="rect">
+            <a:avLst/>
+          </a:prstGeom>
+          <a:noFill/>
+        </p:spPr>
+        <p:txBody>
+          <a:bodyPr wrap="square">
+            <a:spAutoFit/>
+          </a:bodyPr>
+          <a:lstStyle/>
+          <a:p>
+            <a:pPr>
+              <a:spcAft>
+                <a:spcPts val="1200"/>
+              </a:spcAft>
+              <a:defRPr sz="1700">
+                <a:solidFill>
+                  <a:srgbClr val="1A202C"/>
+                </a:solidFill>
+                <a:latin typeface="Calibri"/>
+              </a:defRPr>
+            </a:pPr>
+            <a:r>
+              <a:t>•  batch_feature_extraction.py reads the train+dev protocol metadata and fans out across Spark executors, one task per partition of utterances.</a:t>
+            </a:r>
+          </a:p>
+          <a:p>
+            <a:pPr>
+              <a:spcAft>
+                <a:spcPts val="1200"/>
+              </a:spcAft>
+              <a:defRPr sz="1700">
+                <a:solidFill>
+                  <a:srgbClr val="1A202C"/>
+                </a:solidFill>
+                <a:latin typeface="Calibri"/>
+              </a:defRPr>
+            </a:pPr>
+            <a:r>
+              <a:t>•  Each executor fetches its share of clips' audio bytes from MinIO and computes a fixed-length acoustic feature vector (20 MFCCs + spectral/pitch/energy statistics) via common.features.extract_features — the same function used everywhere else in this project.</a:t>
+            </a:r>
+          </a:p>
+          <a:p>
+            <a:pPr>
+              <a:spcAft>
+                <a:spcPts val="1200"/>
+              </a:spcAft>
+              <a:defRPr sz="1700">
+                <a:solidFill>
+                  <a:srgbClr val="1A202C"/>
+                </a:solidFill>
+                <a:latin typeface="Calibri"/>
+              </a:defRPr>
+            </a:pPr>
+            <a:r>
+              <a:t>•  ~50k train+dev audio files decoded and feature-extracted in parallel across cores instead of one Python process working through them serially — this is the real "big data" step, not model training itself.</a:t>
+            </a:r>
+          </a:p>
+          <a:p>
+            <a:pPr>
+              <a:spcAft>
+                <a:spcPts val="1200"/>
+              </a:spcAft>
+              <a:defRPr sz="1700">
+                <a:solidFill>
+                  <a:srgbClr val="1A202C"/>
+                </a:solidFill>
+                <a:latin typeface="Calibri"/>
+              </a:defRPr>
+            </a:pPr>
+            <a:r>
+              <a:t>•  Driver and executors are both pinned to sys.executable so Spark workers resolve the same Python/venv as the driver, instead of whatever `python` happens to be on PATH.</a:t>
+            </a:r>
+          </a:p>
+        </p:txBody>
+      </p:sp>
+    </p:spTree>
+  </p:cSld>
+  <p:clrMapOvr>
+    <a:masterClrMapping/>
+  </p:clrMapOvr>
+</p:sld>
+</file>
+
+<file path=ppt/slides/slide7.xml><?xml version="1.0" encoding="utf-8"?>
+<p:sld xmlns:a="http://schemas.openxmlformats.org/drawingml/2006/main" xmlns:p="http://schemas.openxmlformats.org/presentationml/2006/main" xmlns:r="http://schemas.openxmlformats.org/officeDocument/2006/relationships">
+  <p:cSld>
+    <p:bg>
+      <p:bgPr>
+        <a:solidFill>
+          <a:srgbClr val="F7F9FB"/>
+        </a:solidFill>
+        <a:effectLst/>
+      </p:bgPr>
+    </p:bg>
+    <p:spTree>
+      <p:nvGrpSpPr>
+        <p:cNvPr id="1" name=""/>
+        <p:cNvGrpSpPr/>
+        <p:nvPr/>
+      </p:nvGrpSpPr>
+      <p:grpSpPr/>
+      <p:sp>
+        <p:nvSpPr>
+          <p:cNvPr id="2" name="Rectangle 1"/>
+          <p:cNvSpPr/>
+          <p:nvPr/>
+        </p:nvSpPr>
+        <p:spPr>
+          <a:xfrm>
+            <a:off x="0" y="0"/>
+            <a:ext cx="12191695" cy="1051560"/>
+          </a:xfrm>
+          <a:prstGeom prst="rect">
+            <a:avLst/>
+          </a:prstGeom>
+          <a:solidFill>
+            <a:srgbClr val="0F2942"/>
+          </a:solidFill>
+          <a:ln>
+            <a:noFill/>
+          </a:ln>
+          <a:effectLst/>
+        </p:spPr>
+        <p:style>
+          <a:lnRef idx="1">
+            <a:schemeClr val="accent1"/>
+          </a:lnRef>
+          <a:fillRef idx="3">
+            <a:schemeClr val="accent1"/>
+          </a:fillRef>
+          <a:effectRef idx="2">
+            <a:schemeClr val="accent1"/>
+          </a:effectRef>
+          <a:fontRef idx="minor">
+            <a:schemeClr val="lt1"/>
+          </a:fontRef>
+        </p:style>
+        <p:txBody>
+          <a:bodyPr rtlCol="0" anchor="ctr"/>
+          <a:lstStyle/>
+          <a:p>
+            <a:pPr algn="ctr"/>
+          </a:p>
+        </p:txBody>
+      </p:sp>
+      <p:sp>
+        <p:nvSpPr>
+          <p:cNvPr id="3" name="Rectangle 2"/>
+          <p:cNvSpPr/>
+          <p:nvPr/>
+        </p:nvSpPr>
+        <p:spPr>
+          <a:xfrm>
+            <a:off x="0" y="1051560"/>
+            <a:ext cx="2103120" cy="63500"/>
+          </a:xfrm>
+          <a:prstGeom prst="rect">
+            <a:avLst/>
+          </a:prstGeom>
+          <a:solidFill>
+            <a:srgbClr val="0D9488"/>
+          </a:solidFill>
+          <a:ln>
+            <a:noFill/>
+          </a:ln>
+          <a:effectLst/>
+        </p:spPr>
+        <p:style>
+          <a:lnRef idx="1">
+            <a:schemeClr val="accent1"/>
+          </a:lnRef>
+          <a:fillRef idx="3">
+            <a:schemeClr val="accent1"/>
+          </a:fillRef>
+          <a:effectRef idx="2">
+            <a:schemeClr val="accent1"/>
+          </a:effectRef>
+          <a:fontRef idx="minor">
+            <a:schemeClr val="lt1"/>
+          </a:fontRef>
+        </p:style>
+        <p:txBody>
+          <a:bodyPr rtlCol="0" anchor="ctr"/>
+          <a:lstStyle/>
+          <a:p>
+            <a:pPr algn="ctr"/>
+          </a:p>
+        </p:txBody>
+      </p:sp>
+      <p:sp>
+        <p:nvSpPr>
+          <p:cNvPr id="4" name="TextBox 3"/>
+          <p:cNvSpPr txBox="1"/>
+          <p:nvPr/>
+        </p:nvSpPr>
+        <p:spPr>
+          <a:xfrm>
+            <a:off x="548640" y="146304"/>
+            <a:ext cx="11094415" cy="640080"/>
+          </a:xfrm>
+          <a:prstGeom prst="rect">
+            <a:avLst/>
+          </a:prstGeom>
+          <a:noFill/>
+        </p:spPr>
+        <p:txBody>
+          <a:bodyPr wrap="square">
+            <a:spAutoFit/>
+          </a:bodyPr>
+          <a:lstStyle/>
+          <a:p>
+            <a:pPr>
+              <a:defRPr sz="3000" b="1">
+                <a:solidFill>
+                  <a:srgbClr val="FFFFFF"/>
+                </a:solidFill>
+                <a:latin typeface="Calibri"/>
+              </a:defRPr>
+            </a:pPr>
+            <a:r>
+              <a:t>What's in the feature vector</a:t>
+            </a:r>
+          </a:p>
+        </p:txBody>
+      </p:sp>
+      <p:sp>
+        <p:nvSpPr>
+          <p:cNvPr id="5" name="TextBox 4"/>
+          <p:cNvSpPr txBox="1"/>
+          <p:nvPr/>
+        </p:nvSpPr>
+        <p:spPr>
+          <a:xfrm>
+            <a:off x="548640" y="658368"/>
+            <a:ext cx="11094415" cy="365760"/>
+          </a:xfrm>
+          <a:prstGeom prst="rect">
+            <a:avLst/>
+          </a:prstGeom>
+          <a:noFill/>
+        </p:spPr>
+        <p:txBody>
+          <a:bodyPr wrap="none">
+            <a:spAutoFit/>
+          </a:bodyPr>
+          <a:lstStyle/>
+          <a:p>
+            <a:pPr>
+              <a:defRPr sz="1300">
+                <a:solidFill>
+                  <a:srgbClr val="CBD5E1"/>
+                </a:solidFill>
+                <a:latin typeface="Calibri"/>
+              </a:defRPr>
+            </a:pPr>
+            <a:r>
+              <a:t>53 numbers per clip — one shared function, one fixed shape</a:t>
+            </a:r>
+          </a:p>
+        </p:txBody>
+      </p:sp>
+      <p:sp>
+        <p:nvSpPr>
+          <p:cNvPr id="6" name="TextBox 5"/>
+          <p:cNvSpPr txBox="1"/>
+          <p:nvPr/>
+        </p:nvSpPr>
+        <p:spPr>
+          <a:xfrm>
+            <a:off x="11368735" y="6473952"/>
+            <a:ext cx="548640" cy="292608"/>
+          </a:xfrm>
+          <a:prstGeom prst="rect">
+            <a:avLst/>
+          </a:prstGeom>
+          <a:noFill/>
+        </p:spPr>
+        <p:txBody>
+          <a:bodyPr wrap="square">
+            <a:spAutoFit/>
+          </a:bodyPr>
+          <a:lstStyle/>
+          <a:p>
+            <a:pPr algn="r">
+              <a:defRPr sz="1100" b="0">
+                <a:solidFill>
+                  <a:srgbClr val="64748B"/>
+                </a:solidFill>
+                <a:latin typeface="Calibri"/>
+              </a:defRPr>
+            </a:pPr>
+            <a:r>
+              <a:t>6</a:t>
+            </a:r>
+          </a:p>
+        </p:txBody>
+      </p:sp>
+      <p:graphicFrame>
+        <p:nvGraphicFramePr>
+          <p:cNvPr id="7" name="Table 6"/>
+          <p:cNvGraphicFramePr>
+            <a:graphicFrameLocks noGrp="1"/>
+          </p:cNvGraphicFramePr>
+          <p:nvPr/>
+        </p:nvGraphicFramePr>
+        <p:xfrm>
+          <a:off x="548640" y="1371600"/>
+          <a:ext cx="11094413" cy="3520440"/>
+        </p:xfrm>
+        <a:graphic>
+          <a:graphicData uri="http://schemas.openxmlformats.org/drawingml/2006/table">
+            <a:tbl>
+              <a:tblPr firstRow="1" bandRow="1">
+                <a:tableStyleId>{5C22544A-7EE6-4342-B048-85BDC9FD1C3A}</a:tableStyleId>
+              </a:tblPr>
+              <a:tblGrid>
+                <a:gridCol w="3609026"/>
+                <a:gridCol w="935673"/>
+                <a:gridCol w="6549714"/>
+              </a:tblGrid>
+              <a:tr h="502920">
+                <a:tc>
+                  <a:txBody>
+                    <a:bodyPr/>
+                    <a:lstStyle/>
+                    <a:p>
+                      <a:pPr>
+                        <a:defRPr sz="1400" b="1">
+                          <a:solidFill>
+                            <a:srgbClr val="FFFFFF"/>
+                          </a:solidFill>
+                          <a:latin typeface="Calibri"/>
+                        </a:defRPr>
+                      </a:pPr>
+                      <a:r>
+                        <a:t>Group</a:t>
+                      </a:r>
+                    </a:p>
+                  </a:txBody>
+                  <a:tcPr anchor="ctr" marL="109728" marR="109728">
+                    <a:solidFill>
+                      <a:srgbClr val="0F2942"/>
+                    </a:solidFill>
+                  </a:tcPr>
+                </a:tc>
+                <a:tc>
+                  <a:txBody>
+                    <a:bodyPr/>
+                    <a:lstStyle/>
+                    <a:p>
+                      <a:pPr>
+                        <a:defRPr sz="1400" b="1">
+                          <a:solidFill>
+                            <a:srgbClr val="FFFFFF"/>
+                          </a:solidFill>
+                          <a:latin typeface="Calibri"/>
+                        </a:defRPr>
+                      </a:pPr>
+                      <a:r>
+                        <a:t>Count</a:t>
+                      </a:r>
+                    </a:p>
+                  </a:txBody>
+                  <a:tcPr anchor="ctr" marL="109728" marR="109728">
+                    <a:solidFill>
+                      <a:srgbClr val="0F2942"/>
+                    </a:solidFill>
+                  </a:tcPr>
+                </a:tc>
+                <a:tc>
+                  <a:txBody>
+                    <a:bodyPr/>
+                    <a:lstStyle/>
+                    <a:p>
+                      <a:pPr>
+                        <a:defRPr sz="1400" b="1">
+                          <a:solidFill>
+                            <a:srgbClr val="FFFFFF"/>
+                          </a:solidFill>
+                          <a:latin typeface="Calibri"/>
+                        </a:defRPr>
+                      </a:pPr>
+                      <a:r>
+                        <a:t>What it captures</a:t>
+                      </a:r>
+                    </a:p>
+                  </a:txBody>
+                  <a:tcPr anchor="ctr" marL="109728" marR="109728">
+                    <a:solidFill>
+                      <a:srgbClr val="0F2942"/>
+                    </a:solidFill>
+                  </a:tcPr>
+                </a:tc>
+              </a:tr>
+              <a:tr h="502920">
+                <a:tc>
+                  <a:txBody>
+                    <a:bodyPr/>
+                    <a:lstStyle/>
+                    <a:p>
+                      <a:pPr>
+                        <a:defRPr sz="1500" b="0">
+                          <a:solidFill>
+                            <a:srgbClr val="1A202C"/>
+                          </a:solidFill>
+                          <a:latin typeface="Calibri"/>
+                        </a:defRPr>
+                      </a:pPr>
+                      <a:r>
+                        <a:t>MFCCs (20 coeffs × mean/std)</a:t>
+                      </a:r>
+                    </a:p>
+                  </a:txBody>
+                  <a:tcPr anchor="ctr" marL="109728" marR="109728">
+                    <a:solidFill>
+                      <a:srgbClr val="FFFFFF"/>
+                    </a:solidFill>
+                  </a:tcPr>
+                </a:tc>
+                <a:tc>
+                  <a:txBody>
+                    <a:bodyPr/>
+                    <a:lstStyle/>
+                    <a:p>
+                      <a:pPr>
+                        <a:defRPr sz="1500" b="0">
+                          <a:solidFill>
+                            <a:srgbClr val="1A202C"/>
+                          </a:solidFill>
+                          <a:latin typeface="Calibri"/>
+                        </a:defRPr>
+                      </a:pPr>
+                      <a:r>
+                        <a:t>40</a:t>
+                      </a:r>
+                    </a:p>
+                  </a:txBody>
+                  <a:tcPr anchor="ctr" marL="109728" marR="109728">
+                    <a:solidFill>
+                      <a:srgbClr val="FFFFFF"/>
+                    </a:solidFill>
+                  </a:tcPr>
+                </a:tc>
+                <a:tc>
+                  <a:txBody>
+                    <a:bodyPr/>
+                    <a:lstStyle/>
+                    <a:p>
+                      <a:pPr>
+                        <a:defRPr sz="1500" b="0">
+                          <a:solidFill>
+                            <a:srgbClr val="1A202C"/>
+                          </a:solidFill>
+                          <a:latin typeface="Calibri"/>
+                        </a:defRPr>
+                      </a:pPr>
+                      <a:r>
+                        <a:t>Vocal-tract spectral envelope — timbre/voice quality, the model's top group</a:t>
+                      </a:r>
+                    </a:p>
+                  </a:txBody>
+                  <a:tcPr anchor="ctr" marL="109728" marR="109728">
+                    <a:solidFill>
+                      <a:srgbClr val="FFFFFF"/>
+                    </a:solidFill>
+                  </a:tcPr>
+                </a:tc>
+              </a:tr>
+              <a:tr h="502920">
+                <a:tc>
+                  <a:txBody>
+                    <a:bodyPr/>
+                    <a:lstStyle/>
+                    <a:p>
+                      <a:pPr>
+                        <a:defRPr sz="1500" b="0">
+                          <a:solidFill>
+                            <a:srgbClr val="1A202C"/>
+                          </a:solidFill>
+                          <a:latin typeface="Calibri"/>
+                        </a:defRPr>
+                      </a:pPr>
+                      <a:r>
+                        <a:t>Spectral shape (centroid/bandwidth/rolloff)</a:t>
+                      </a:r>
+                    </a:p>
+                  </a:txBody>
+                  <a:tcPr anchor="ctr" marL="109728" marR="109728">
+                    <a:solidFill>
+                      <a:srgbClr val="FFFFFF"/>
+                    </a:solidFill>
+                  </a:tcPr>
+                </a:tc>
+                <a:tc>
+                  <a:txBody>
+                    <a:bodyPr/>
+                    <a:lstStyle/>
+                    <a:p>
+                      <a:pPr>
+                        <a:defRPr sz="1500" b="0">
+                          <a:solidFill>
+                            <a:srgbClr val="1A202C"/>
+                          </a:solidFill>
+                          <a:latin typeface="Calibri"/>
+                        </a:defRPr>
+                      </a:pPr>
+                      <a:r>
+                        <a:t>6</a:t>
+                      </a:r>
+                    </a:p>
+                  </a:txBody>
+                  <a:tcPr anchor="ctr" marL="109728" marR="109728">
+                    <a:solidFill>
+                      <a:srgbClr val="FFFFFF"/>
+                    </a:solidFill>
+                  </a:tcPr>
+                </a:tc>
+                <a:tc>
+                  <a:txBody>
+                    <a:bodyPr/>
+                    <a:lstStyle/>
+                    <a:p>
+                      <a:pPr>
+                        <a:defRPr sz="1500" b="0">
+                          <a:solidFill>
+                            <a:srgbClr val="1A202C"/>
+                          </a:solidFill>
+                          <a:latin typeface="Calibri"/>
+                        </a:defRPr>
+                      </a:pPr>
+                      <a:r>
+                        <a:t>Brightness, spread, and energy roll-off of the spectrum</a:t>
+                      </a:r>
+                    </a:p>
+                  </a:txBody>
+                  <a:tcPr anchor="ctr" marL="109728" marR="109728">
+                    <a:solidFill>
+                      <a:srgbClr val="FFFFFF"/>
+                    </a:solidFill>
+                  </a:tcPr>
+                </a:tc>
+              </a:tr>
+              <a:tr h="502920">
+                <a:tc>
+                  <a:txBody>
+                    <a:bodyPr/>
+                    <a:lstStyle/>
+                    <a:p>
+                      <a:pPr>
+                        <a:defRPr sz="1500" b="0">
+                          <a:solidFill>
+                            <a:srgbClr val="1A202C"/>
+                          </a:solidFill>
+                          <a:latin typeface="Calibri"/>
+                        </a:defRPr>
+                      </a:pPr>
+                      <a:r>
+                        <a:t>Signal level (zero-crossing rate, RMS energy)</a:t>
+                      </a:r>
+                    </a:p>
+                  </a:txBody>
+                  <a:tcPr anchor="ctr" marL="109728" marR="109728">
+                    <a:solidFill>
+                      <a:srgbClr val="FFFFFF"/>
+                    </a:solidFill>
+                  </a:tcPr>
+                </a:tc>
+                <a:tc>
+                  <a:txBody>
+                    <a:bodyPr/>
+                    <a:lstStyle/>
+                    <a:p>
+                      <a:pPr>
+                        <a:defRPr sz="1500" b="0">
+                          <a:solidFill>
+                            <a:srgbClr val="1A202C"/>
+                          </a:solidFill>
+                          <a:latin typeface="Calibri"/>
+                        </a:defRPr>
+                      </a:pPr>
+                      <a:r>
+                        <a:t>4</a:t>
+                      </a:r>
+                    </a:p>
+                  </a:txBody>
+                  <a:tcPr anchor="ctr" marL="109728" marR="109728">
+                    <a:solidFill>
+                      <a:srgbClr val="FFFFFF"/>
+                    </a:solidFill>
+                  </a:tcPr>
+                </a:tc>
+                <a:tc>
+                  <a:txBody>
+                    <a:bodyPr/>
+                    <a:lstStyle/>
+                    <a:p>
+                      <a:pPr>
+                        <a:defRPr sz="1500" b="0">
+                          <a:solidFill>
+                            <a:srgbClr val="1A202C"/>
+                          </a:solidFill>
+                          <a:latin typeface="Calibri"/>
+                        </a:defRPr>
+                      </a:pPr>
+                      <a:r>
+                        <a:t>Noisiness and loudness over time</a:t>
+                      </a:r>
+                    </a:p>
+                  </a:txBody>
+                  <a:tcPr anchor="ctr" marL="109728" marR="109728">
+                    <a:solidFill>
+                      <a:srgbClr val="FFFFFF"/>
+                    </a:solidFill>
+                  </a:tcPr>
+                </a:tc>
+              </a:tr>
+              <a:tr h="502920">
+                <a:tc>
+                  <a:txBody>
+                    <a:bodyPr/>
+                    <a:lstStyle/>
+                    <a:p>
+                      <a:pPr>
+                        <a:defRPr sz="1500" b="0">
+                          <a:solidFill>
+                            <a:srgbClr val="1A202C"/>
+                          </a:solidFill>
+                          <a:latin typeface="Calibri"/>
+                        </a:defRPr>
+                      </a:pPr>
+                      <a:r>
+                        <a:t>Pitch (F0, 50-500Hz via librosa.yin)</a:t>
+                      </a:r>
+                    </a:p>
+                  </a:txBody>
+                  <a:tcPr anchor="ctr" marL="109728" marR="109728">
+                    <a:solidFill>
+                      <a:srgbClr val="FFFFFF"/>
+                    </a:solidFill>
+                  </a:tcPr>
+                </a:tc>
+                <a:tc>
+                  <a:txBody>
+                    <a:bodyPr/>
+                    <a:lstStyle/>
+                    <a:p>
+                      <a:pPr>
+                        <a:defRPr sz="1500" b="0">
+                          <a:solidFill>
+                            <a:srgbClr val="1A202C"/>
+                          </a:solidFill>
+                          <a:latin typeface="Calibri"/>
+                        </a:defRPr>
+                      </a:pPr>
+                      <a:r>
+                        <a:t>2</a:t>
+                      </a:r>
+                    </a:p>
+                  </a:txBody>
+                  <a:tcPr anchor="ctr" marL="109728" marR="109728">
+                    <a:solidFill>
+                      <a:srgbClr val="FFFFFF"/>
+                    </a:solidFill>
+                  </a:tcPr>
+                </a:tc>
+                <a:tc>
+                  <a:txBody>
+                    <a:bodyPr/>
+                    <a:lstStyle/>
+                    <a:p>
+                      <a:pPr>
+                        <a:defRPr sz="1500" b="0">
+                          <a:solidFill>
+                            <a:srgbClr val="1A202C"/>
+                          </a:solidFill>
+                          <a:latin typeface="Calibri"/>
+                        </a:defRPr>
+                      </a:pPr>
+                      <a:r>
+                        <a:t>Fundamental frequency mean/std, human vocal range</a:t>
+                      </a:r>
+                    </a:p>
+                  </a:txBody>
+                  <a:tcPr anchor="ctr" marL="109728" marR="109728">
+                    <a:solidFill>
+                      <a:srgbClr val="FFFFFF"/>
+                    </a:solidFill>
+                  </a:tcPr>
+                </a:tc>
+              </a:tr>
+              <a:tr h="502920">
+                <a:tc>
+                  <a:txBody>
+                    <a:bodyPr/>
+                    <a:lstStyle/>
+                    <a:p>
+                      <a:pPr>
+                        <a:defRPr sz="1500" b="0">
+                          <a:solidFill>
+                            <a:srgbClr val="1A202C"/>
+                          </a:solidFill>
+                          <a:latin typeface="Calibri"/>
+                        </a:defRPr>
+                      </a:pPr>
+                      <a:r>
+                        <a:t>Duration</a:t>
+                      </a:r>
+                    </a:p>
+                  </a:txBody>
+                  <a:tcPr anchor="ctr" marL="109728" marR="109728">
+                    <a:solidFill>
+                      <a:srgbClr val="FFFFFF"/>
+                    </a:solidFill>
+                  </a:tcPr>
+                </a:tc>
+                <a:tc>
+                  <a:txBody>
+                    <a:bodyPr/>
+                    <a:lstStyle/>
+                    <a:p>
+                      <a:pPr>
+                        <a:defRPr sz="1500" b="0">
+                          <a:solidFill>
+                            <a:srgbClr val="1A202C"/>
+                          </a:solidFill>
+                          <a:latin typeface="Calibri"/>
+                        </a:defRPr>
+                      </a:pPr>
+                      <a:r>
+                        <a:t>1</a:t>
+                      </a:r>
+                    </a:p>
+                  </a:txBody>
+                  <a:tcPr anchor="ctr" marL="109728" marR="109728">
+                    <a:solidFill>
+                      <a:srgbClr val="FFFFFF"/>
+                    </a:solidFill>
+                  </a:tcPr>
+                </a:tc>
+                <a:tc>
+                  <a:txBody>
+                    <a:bodyPr/>
+                    <a:lstStyle/>
+                    <a:p>
+                      <a:pPr>
+                        <a:defRPr sz="1500" b="0">
+                          <a:solidFill>
+                            <a:srgbClr val="1A202C"/>
+                          </a:solidFill>
+                          <a:latin typeface="Calibri"/>
+                        </a:defRPr>
+                      </a:pPr>
+                      <a:r>
+                        <a:t>Clip length in seconds</a:t>
+                      </a:r>
+                    </a:p>
+                  </a:txBody>
+                  <a:tcPr anchor="ctr" marL="109728" marR="109728">
+                    <a:solidFill>
+                      <a:srgbClr val="FFFFFF"/>
+                    </a:solidFill>
+                  </a:tcPr>
+                </a:tc>
+              </a:tr>
+              <a:tr h="502920">
+                <a:tc>
+                  <a:txBody>
+                    <a:bodyPr/>
+                    <a:lstStyle/>
+                    <a:p>
+                      <a:pPr>
+                        <a:defRPr sz="1500" b="1">
+                          <a:solidFill>
+                            <a:srgbClr val="0D9488"/>
+                          </a:solidFill>
+                          <a:latin typeface="Calibri"/>
+                        </a:defRPr>
+                      </a:pPr>
+                      <a:r>
+                        <a:t>Total</a:t>
+                      </a:r>
+                    </a:p>
+                  </a:txBody>
+                  <a:tcPr anchor="ctr" marL="109728" marR="109728">
+                    <a:solidFill>
+                      <a:srgbClr val="E6FFFA"/>
+                    </a:solidFill>
+                  </a:tcPr>
+                </a:tc>
+                <a:tc>
+                  <a:txBody>
+                    <a:bodyPr/>
+                    <a:lstStyle/>
+                    <a:p>
+                      <a:pPr>
+                        <a:defRPr sz="1500" b="1">
+                          <a:solidFill>
+                            <a:srgbClr val="0D9488"/>
+                          </a:solidFill>
+                          <a:latin typeface="Calibri"/>
+                        </a:defRPr>
+                      </a:pPr>
+                      <a:r>
+                        <a:t>53</a:t>
+                      </a:r>
+                    </a:p>
+                  </a:txBody>
+                  <a:tcPr anchor="ctr" marL="109728" marR="109728">
+                    <a:solidFill>
+                      <a:srgbClr val="E6FFFA"/>
+                    </a:solidFill>
+                  </a:tcPr>
+                </a:tc>
+                <a:tc>
+                  <a:txBody>
+                    <a:bodyPr/>
+                    <a:lstStyle/>
+                    <a:p>
+                      <a:pPr>
+                        <a:defRPr sz="1500" b="1">
+                          <a:solidFill>
+                            <a:srgbClr val="0D9488"/>
+                          </a:solidFill>
+                          <a:latin typeface="Calibri"/>
+                        </a:defRPr>
+                      </a:pPr>
+                      <a:r>
+                        <a:t>One fixed-length row per clip, any duration</a:t>
+                      </a:r>
+                    </a:p>
+                  </a:txBody>
+                  <a:tcPr anchor="ctr" marL="109728" marR="109728">
+                    <a:solidFill>
+                      <a:srgbClr val="E6FFFA"/>
+                    </a:solidFill>
+                  </a:tcPr>
+                </a:tc>
+              </a:tr>
+            </a:tbl>
+          </a:graphicData>
+        </a:graphic>
+      </p:graphicFrame>
+      <p:sp>
+        <p:nvSpPr>
+          <p:cNvPr id="8" name="TextBox 7"/>
+          <p:cNvSpPr txBox="1"/>
+          <p:nvPr/>
+        </p:nvSpPr>
+        <p:spPr>
+          <a:xfrm>
+            <a:off x="548640" y="5257800"/>
+            <a:ext cx="11094415" cy="1143000"/>
+          </a:xfrm>
+          <a:prstGeom prst="rect">
+            <a:avLst/>
+          </a:prstGeom>
+          <a:noFill/>
+        </p:spPr>
+        <p:txBody>
+          <a:bodyPr wrap="square">
+            <a:spAutoFit/>
+          </a:bodyPr>
+          <a:lstStyle/>
+          <a:p>
+            <a:pPr>
+              <a:spcAft>
+                <a:spcPts val="1200"/>
+              </a:spcAft>
+              <a:defRPr sz="1300">
+                <a:solidFill>
+                  <a:srgbClr val="1A202C"/>
+                </a:solidFill>
+                <a:latin typeface="Calibri"/>
+              </a:defRPr>
+            </a:pPr>
+            <a:r>
+              <a:t>•  Mean + std of frame-level features, not raw sequences — every clip, any length, maps to the same 53-column row a tabular classifier expects.</a:t>
+            </a:r>
+          </a:p>
+          <a:p>
+            <a:pPr>
+              <a:spcAft>
+                <a:spcPts val="1200"/>
+              </a:spcAft>
+              <a:defRPr sz="1300">
+                <a:solidFill>
+                  <a:srgbClr val="1A202C"/>
+                </a:solidFill>
+                <a:latin typeface="Calibri"/>
+              </a:defRPr>
+            </a:pPr>
+            <a:r>
+              <a:t>•  One function, common/features.py:extract_features(), computes this for the Spark batch job, the Kafka consumer, and the live /classify endpoint — training and inference match exactly.</a:t>
+            </a:r>
+          </a:p>
+          <a:p>
+            <a:pPr>
+              <a:spcAft>
+                <a:spcPts val="1200"/>
+              </a:spcAft>
+              <a:defRPr sz="1300">
+                <a:solidFill>
+                  <a:srgbClr val="1A202C"/>
+                </a:solidFill>
+                <a:latin typeface="Calibri"/>
+              </a:defRPr>
+            </a:pPr>
+            <a:r>
+              <a:t>•  Pitch uses plain librosa.yin, not pyin — pyin's HMM smoothing measured 2-9s/clip; across 50k+ clips, yin gets a comparable signal in ~0.02s.</a:t>
+            </a:r>
+          </a:p>
+        </p:txBody>
+      </p:sp>
+    </p:spTree>
+  </p:cSld>
+  <p:clrMapOvr>
+    <a:masterClrMapping/>
+  </p:clrMapOvr>
+</p:sld>
+</file>
+
+<file path=ppt/slides/slide8.xml><?xml version="1.0" encoding="utf-8"?>
+<p:sld xmlns:a="http://schemas.openxmlformats.org/drawingml/2006/main" xmlns:p="http://schemas.openxmlformats.org/presentationml/2006/main" xmlns:r="http://schemas.openxmlformats.org/officeDocument/2006/relationships">
+  <p:cSld>
+    <p:bg>
+      <p:bgPr>
+        <a:solidFill>
+          <a:srgbClr val="F7F9FB"/>
+        </a:solidFill>
+        <a:effectLst/>
+      </p:bgPr>
+    </p:bg>
+    <p:spTree>
+      <p:nvGrpSpPr>
+        <p:cNvPr id="1" name=""/>
+        <p:cNvGrpSpPr/>
+        <p:nvPr/>
+      </p:nvGrpSpPr>
+      <p:grpSpPr/>
+      <p:sp>
+        <p:nvSpPr>
+          <p:cNvPr id="2" name="Rectangle 1"/>
+          <p:cNvSpPr/>
+          <p:nvPr/>
+        </p:nvSpPr>
+        <p:spPr>
+          <a:xfrm>
+            <a:off x="0" y="0"/>
+            <a:ext cx="12191695" cy="1051560"/>
+          </a:xfrm>
+          <a:prstGeom prst="rect">
+            <a:avLst/>
+          </a:prstGeom>
+          <a:solidFill>
+            <a:srgbClr val="0F2942"/>
+          </a:solidFill>
+          <a:ln>
+            <a:noFill/>
+          </a:ln>
+          <a:effectLst/>
+        </p:spPr>
+        <p:style>
+          <a:lnRef idx="1">
+            <a:schemeClr val="accent1"/>
+          </a:lnRef>
+          <a:fillRef idx="3">
+            <a:schemeClr val="accent1"/>
+          </a:fillRef>
+          <a:effectRef idx="2">
+            <a:schemeClr val="accent1"/>
+          </a:effectRef>
+          <a:fontRef idx="minor">
+            <a:schemeClr val="lt1"/>
+          </a:fontRef>
+        </p:style>
+        <p:txBody>
+          <a:bodyPr rtlCol="0" anchor="ctr"/>
+          <a:lstStyle/>
+          <a:p>
+            <a:pPr algn="ctr"/>
+          </a:p>
+        </p:txBody>
+      </p:sp>
+      <p:sp>
+        <p:nvSpPr>
+          <p:cNvPr id="3" name="Rectangle 2"/>
+          <p:cNvSpPr/>
+          <p:nvPr/>
+        </p:nvSpPr>
+        <p:spPr>
+          <a:xfrm>
+            <a:off x="0" y="1051560"/>
+            <a:ext cx="2103120" cy="63500"/>
+          </a:xfrm>
+          <a:prstGeom prst="rect">
+            <a:avLst/>
+          </a:prstGeom>
+          <a:solidFill>
+            <a:srgbClr val="0D9488"/>
+          </a:solidFill>
+          <a:ln>
+            <a:noFill/>
+          </a:ln>
+          <a:effectLst/>
+        </p:spPr>
+        <p:style>
+          <a:lnRef idx="1">
+            <a:schemeClr val="accent1"/>
+          </a:lnRef>
+          <a:fillRef idx="3">
+            <a:schemeClr val="accent1"/>
+          </a:fillRef>
+          <a:effectRef idx="2">
+            <a:schemeClr val="accent1"/>
+          </a:effectRef>
+          <a:fontRef idx="minor">
+            <a:schemeClr val="lt1"/>
+          </a:fontRef>
+        </p:style>
+        <p:txBody>
+          <a:bodyPr rtlCol="0" anchor="ctr"/>
+          <a:lstStyle/>
+          <a:p>
+            <a:pPr algn="ctr"/>
+          </a:p>
+        </p:txBody>
+      </p:sp>
+      <p:sp>
+        <p:nvSpPr>
+          <p:cNvPr id="4" name="TextBox 3"/>
+          <p:cNvSpPr txBox="1"/>
+          <p:nvPr/>
+        </p:nvSpPr>
+        <p:spPr>
+          <a:xfrm>
+            <a:off x="548640" y="146304"/>
+            <a:ext cx="11094415" cy="640080"/>
+          </a:xfrm>
+          <a:prstGeom prst="rect">
+            <a:avLst/>
+          </a:prstGeom>
+          <a:noFill/>
+        </p:spPr>
+        <p:txBody>
+          <a:bodyPr wrap="square">
+            <a:spAutoFit/>
+          </a:bodyPr>
+          <a:lstStyle/>
+          <a:p>
+            <a:pPr>
+              <a:defRPr sz="3000" b="1">
+                <a:solidFill>
+                  <a:srgbClr val="FFFFFF"/>
+                </a:solidFill>
+                <a:latin typeface="Calibri"/>
+              </a:defRPr>
+            </a:pPr>
+            <a:r>
+              <a:t>Pipeline stage 2 - Load</a:t>
+            </a:r>
+          </a:p>
+        </p:txBody>
+      </p:sp>
+      <p:sp>
+        <p:nvSpPr>
+          <p:cNvPr id="5" name="TextBox 4"/>
+          <p:cNvSpPr txBox="1"/>
+          <p:nvPr/>
+        </p:nvSpPr>
+        <p:spPr>
+          <a:xfrm>
+            <a:off x="548640" y="658368"/>
+            <a:ext cx="11094415" cy="365760"/>
+          </a:xfrm>
+          <a:prstGeom prst="rect">
+            <a:avLst/>
+          </a:prstGeom>
+          <a:noFill/>
+        </p:spPr>
+        <p:txBody>
+          <a:bodyPr wrap="none">
+            <a:spAutoFit/>
+          </a:bodyPr>
+          <a:lstStyle/>
+          <a:p>
+            <a:pPr>
+              <a:defRPr sz="1300">
+                <a:solidFill>
+                  <a:srgbClr val="CBD5E1"/>
+                </a:solidFill>
+                <a:latin typeface="Calibri"/>
+              </a:defRPr>
+            </a:pPr>
+            <a:r>
+              <a:t>Feature table -&gt; Parquet + Elasticsearch</a:t>
+            </a:r>
+          </a:p>
+        </p:txBody>
+      </p:sp>
+      <p:sp>
+        <p:nvSpPr>
+          <p:cNvPr id="6" name="TextBox 5"/>
+          <p:cNvSpPr txBox="1"/>
+          <p:nvPr/>
+        </p:nvSpPr>
+        <p:spPr>
+          <a:xfrm>
+            <a:off x="11368735" y="6473952"/>
+            <a:ext cx="548640" cy="292608"/>
+          </a:xfrm>
+          <a:prstGeom prst="rect">
+            <a:avLst/>
+          </a:prstGeom>
+          <a:noFill/>
+        </p:spPr>
+        <p:txBody>
+          <a:bodyPr wrap="square">
+            <a:spAutoFit/>
+          </a:bodyPr>
+          <a:lstStyle/>
+          <a:p>
+            <a:pPr algn="r">
+              <a:defRPr sz="1100" b="0">
+                <a:solidFill>
+                  <a:srgbClr val="64748B"/>
+                </a:solidFill>
+                <a:latin typeface="Calibri"/>
+              </a:defRPr>
+            </a:pPr>
+            <a:r>
+              <a:t>7</a:t>
+            </a:r>
+          </a:p>
+        </p:txBody>
+      </p:sp>
+      <p:sp>
+        <p:nvSpPr>
+          <p:cNvPr id="7" name="TextBox 6"/>
+          <p:cNvSpPr txBox="1"/>
+          <p:nvPr/>
+        </p:nvSpPr>
+        <p:spPr>
+          <a:xfrm>
+            <a:off x="548640" y="1417320"/>
+            <a:ext cx="11094415" cy="4983480"/>
+          </a:xfrm>
+          <a:prstGeom prst="rect">
+            <a:avLst/>
+          </a:prstGeom>
+          <a:noFill/>
+        </p:spPr>
+        <p:txBody>
+          <a:bodyPr wrap="square">
+            <a:spAutoFit/>
+          </a:bodyPr>
+          <a:lstStyle/>
+          <a:p>
+            <a:pPr>
+              <a:spcAft>
+                <a:spcPts val="1200"/>
+              </a:spcAft>
+              <a:defRPr sz="1700">
+                <a:solidFill>
+                  <a:srgbClr val="1A202C"/>
+                </a:solidFill>
+                <a:latin typeface="Calibri"/>
+              </a:defRPr>
+            </a:pPr>
+            <a:r>
+              <a:t>•  Every feature row the Spark job computes is written to two places at once, in the same run.</a:t>
+            </a:r>
+          </a:p>
+          <a:p>
+            <a:pPr>
+              <a:spcAft>
+                <a:spcPts val="1200"/>
+              </a:spcAft>
+              <a:defRPr sz="1700">
+                <a:solidFill>
+                  <a:srgbClr val="1A202C"/>
+                </a:solidFill>
+                <a:latin typeface="Calibri"/>
+              </a:defRPr>
+            </a:pPr>
+            <a:r>
+              <a:t>•  Parquet (pipeline/features_train_dev.parquet) — the input train_classifier.py and index_embeddings.py train from.</a:t>
+            </a:r>
+          </a:p>
+          <a:p>
+            <a:pPr>
+              <a:spcAft>
+                <a:spcPts val="1200"/>
+              </a:spcAft>
+              <a:defRPr sz="1700">
+                <a:solidFill>
+                  <a:srgbClr val="1A202C"/>
+                </a:solidFill>
+                <a:latin typeface="Calibri"/>
+              </a:defRPr>
+            </a:pPr>
+            <a:r>
+              <a:t>•  Elasticsearch's asvspoof-training-features index — the same rows, so aggregations/insights can run without re-reading Parquet.</a:t>
+            </a:r>
+          </a:p>
+          <a:p>
+            <a:pPr>
+              <a:spcAft>
+                <a:spcPts val="1200"/>
+              </a:spcAft>
+              <a:defRPr sz="1700">
+                <a:solidFill>
+                  <a:srgbClr val="1A202C"/>
+                </a:solidFill>
+                <a:latin typeface="Calibri"/>
+              </a:defRPr>
+            </a:pPr>
+            <a:r>
+              <a:t>•  Elasticsearch (a NoSQL document store) goes on to hold training results, live streamed predictions, and — once standardized — dense_vector embeddings for k-NN search, all in the same cluster.</a:t>
+            </a:r>
+          </a:p>
+        </p:txBody>
+      </p:sp>
+    </p:spTree>
+  </p:cSld>
+  <p:clrMapOvr>
+    <a:masterClrMapping/>
+  </p:clrMapOvr>
+</p:sld>
+</file>
+
+<file path=ppt/slides/slide9.xml><?xml version="1.0" encoding="utf-8"?>
+<p:sld xmlns:a="http://schemas.openxmlformats.org/drawingml/2006/main" xmlns:p="http://schemas.openxmlformats.org/presentationml/2006/main" xmlns:r="http://schemas.openxmlformats.org/officeDocument/2006/relationships">
+  <p:cSld>
+    <p:bg>
+      <p:bgPr>
+        <a:solidFill>
+          <a:srgbClr val="F7F9FB"/>
+        </a:solidFill>
+        <a:effectLst/>
+      </p:bgPr>
+    </p:bg>
+    <p:spTree>
+      <p:nvGrpSpPr>
+        <p:cNvPr id="1" name=""/>
+        <p:cNvGrpSpPr/>
+        <p:nvPr/>
+      </p:nvGrpSpPr>
+      <p:grpSpPr/>
+      <p:sp>
+        <p:nvSpPr>
+          <p:cNvPr id="2" name="Rectangle 1"/>
+          <p:cNvSpPr/>
+          <p:nvPr/>
+        </p:nvSpPr>
+        <p:spPr>
+          <a:xfrm>
+            <a:off x="0" y="0"/>
+            <a:ext cx="12191695" cy="1051560"/>
+          </a:xfrm>
+          <a:prstGeom prst="rect">
+            <a:avLst/>
+          </a:prstGeom>
+          <a:solidFill>
+            <a:srgbClr val="0F2942"/>
+          </a:solidFill>
+          <a:ln>
+            <a:noFill/>
+          </a:ln>
+          <a:effectLst/>
+        </p:spPr>
+        <p:style>
+          <a:lnRef idx="1">
+            <a:schemeClr val="accent1"/>
+          </a:lnRef>
+          <a:fillRef idx="3">
+            <a:schemeClr val="accent1"/>
+          </a:fillRef>
+          <a:effectRef idx="2">
+            <a:schemeClr val="accent1"/>
+          </a:effectRef>
+          <a:fontRef idx="minor">
+            <a:schemeClr val="lt1"/>
+          </a:fontRef>
+        </p:style>
+        <p:txBody>
+          <a:bodyPr rtlCol="0" anchor="ctr"/>
+          <a:lstStyle/>
+          <a:p>
+            <a:pPr algn="ctr"/>
+          </a:p>
+        </p:txBody>
+      </p:sp>
+      <p:sp>
+        <p:nvSpPr>
+          <p:cNvPr id="3" name="Rectangle 2"/>
+          <p:cNvSpPr/>
+          <p:nvPr/>
+        </p:nvSpPr>
+        <p:spPr>
+          <a:xfrm>
+            <a:off x="0" y="1051560"/>
+            <a:ext cx="2103120" cy="63500"/>
+          </a:xfrm>
+          <a:prstGeom prst="rect">
+            <a:avLst/>
+          </a:prstGeom>
+          <a:solidFill>
+            <a:srgbClr val="0D9488"/>
+          </a:solidFill>
+          <a:ln>
+            <a:noFill/>
+          </a:ln>
+          <a:effectLst/>
+        </p:spPr>
+        <p:style>
+          <a:lnRef idx="1">
+            <a:schemeClr val="accent1"/>
+          </a:lnRef>
+          <a:fillRef idx="3">
+            <a:schemeClr val="accent1"/>
+          </a:fillRef>
+          <a:effectRef idx="2">
+            <a:schemeClr val="accent1"/>
+          </a:effectRef>
+          <a:fontRef idx="minor">
+            <a:schemeClr val="lt1"/>
+          </a:fontRef>
+        </p:style>
+        <p:txBody>
+          <a:bodyPr rtlCol="0" anchor="ctr"/>
+          <a:lstStyle/>
+          <a:p>
+            <a:pPr algn="ctr"/>
+          </a:p>
+        </p:txBody>
+      </p:sp>
+      <p:sp>
+        <p:nvSpPr>
+          <p:cNvPr id="4" name="TextBox 3"/>
+          <p:cNvSpPr txBox="1"/>
+          <p:nvPr/>
+        </p:nvSpPr>
+        <p:spPr>
+          <a:xfrm>
+            <a:off x="548640" y="146304"/>
+            <a:ext cx="11094415" cy="640080"/>
+          </a:xfrm>
+          <a:prstGeom prst="rect">
+            <a:avLst/>
+          </a:prstGeom>
+          <a:noFill/>
+        </p:spPr>
+        <p:txBody>
+          <a:bodyPr wrap="square">
+            <a:spAutoFit/>
+          </a:bodyPr>
+          <a:lstStyle/>
+          <a:p>
+            <a:pPr>
+              <a:defRPr sz="3000" b="1">
+                <a:solidFill>
+                  <a:srgbClr val="FFFFFF"/>
+                </a:solidFill>
+                <a:latin typeface="Calibri"/>
+              </a:defRPr>
+            </a:pPr>
+            <a:r>
+              <a:t>AI capability 1 — classification</a:t>
+            </a:r>
+          </a:p>
+        </p:txBody>
+      </p:sp>
+      <p:sp>
+        <p:nvSpPr>
+          <p:cNvPr id="5" name="TextBox 4"/>
+          <p:cNvSpPr txBox="1"/>
+          <p:nvPr/>
+        </p:nvSpPr>
+        <p:spPr>
+          <a:xfrm>
+            <a:off x="548640" y="658368"/>
+            <a:ext cx="11094415" cy="365760"/>
+          </a:xfrm>
+          <a:prstGeom prst="rect">
+            <a:avLst/>
+          </a:prstGeom>
+          <a:noFill/>
+        </p:spPr>
+        <p:txBody>
+          <a:bodyPr wrap="none">
+            <a:spAutoFit/>
+          </a:bodyPr>
+          <a:lstStyle/>
+          <a:p>
+            <a:pPr>
+              <a:defRPr sz="1300">
+                <a:solidFill>
+                  <a:srgbClr val="CBD5E1"/>
+                </a:solidFill>
+                <a:latin typeface="Calibri"/>
+              </a:defRPr>
+            </a:pPr>
+            <a:r>
+              <a:t>Random Forest vs. Gradient Boosting, picked by EER</a:t>
+            </a:r>
+          </a:p>
+        </p:txBody>
+      </p:sp>
+      <p:sp>
+        <p:nvSpPr>
+          <p:cNvPr id="6" name="TextBox 5"/>
+          <p:cNvSpPr txBox="1"/>
+          <p:nvPr/>
+        </p:nvSpPr>
+        <p:spPr>
+          <a:xfrm>
+            <a:off x="11368735" y="6473952"/>
+            <a:ext cx="548640" cy="292608"/>
+          </a:xfrm>
+          <a:prstGeom prst="rect">
+            <a:avLst/>
+          </a:prstGeom>
+          <a:noFill/>
+        </p:spPr>
+        <p:txBody>
+          <a:bodyPr wrap="square">
+            <a:spAutoFit/>
+          </a:bodyPr>
+          <a:lstStyle/>
+          <a:p>
+            <a:pPr algn="r">
+              <a:defRPr sz="1100" b="0">
+                <a:solidFill>
+                  <a:srgbClr val="64748B"/>
+                </a:solidFill>
+                <a:latin typeface="Calibri"/>
+              </a:defRPr>
+            </a:pPr>
+            <a:r>
+              <a:t>8</a:t>
             </a:r>
           </a:p>
         </p:txBody>
@@ -6065,1896 +11465,6 @@
           </a:p>
         </p:txBody>
       </p:sp>
-    </p:spTree>
-  </p:cSld>
-  <p:clrMapOvr>
-    <a:masterClrMapping/>
-  </p:clrMapOvr>
-</p:sld>
-</file>
-
-<file path=ppt/slides/slide5.xml><?xml version="1.0" encoding="utf-8"?>
-<p:sld xmlns:a="http://schemas.openxmlformats.org/drawingml/2006/main" xmlns:p="http://schemas.openxmlformats.org/presentationml/2006/main" xmlns:r="http://schemas.openxmlformats.org/officeDocument/2006/relationships">
-  <p:cSld>
-    <p:bg>
-      <p:bgPr>
-        <a:solidFill>
-          <a:srgbClr val="F7F9FB"/>
-        </a:solidFill>
-        <a:effectLst/>
-      </p:bgPr>
-    </p:bg>
-    <p:spTree>
-      <p:nvGrpSpPr>
-        <p:cNvPr id="1" name=""/>
-        <p:cNvGrpSpPr/>
-        <p:nvPr/>
-      </p:nvGrpSpPr>
-      <p:grpSpPr/>
-      <p:sp>
-        <p:nvSpPr>
-          <p:cNvPr id="2" name="Rectangle 1"/>
-          <p:cNvSpPr/>
-          <p:nvPr/>
-        </p:nvSpPr>
-        <p:spPr>
-          <a:xfrm>
-            <a:off x="0" y="0"/>
-            <a:ext cx="12191695" cy="1051560"/>
-          </a:xfrm>
-          <a:prstGeom prst="rect">
-            <a:avLst/>
-          </a:prstGeom>
-          <a:solidFill>
-            <a:srgbClr val="0F2942"/>
-          </a:solidFill>
-          <a:ln>
-            <a:noFill/>
-          </a:ln>
-          <a:effectLst/>
-        </p:spPr>
-        <p:style>
-          <a:lnRef idx="1">
-            <a:schemeClr val="accent1"/>
-          </a:lnRef>
-          <a:fillRef idx="3">
-            <a:schemeClr val="accent1"/>
-          </a:fillRef>
-          <a:effectRef idx="2">
-            <a:schemeClr val="accent1"/>
-          </a:effectRef>
-          <a:fontRef idx="minor">
-            <a:schemeClr val="lt1"/>
-          </a:fontRef>
-        </p:style>
-        <p:txBody>
-          <a:bodyPr rtlCol="0" anchor="ctr"/>
-          <a:lstStyle/>
-          <a:p>
-            <a:pPr algn="ctr"/>
-          </a:p>
-        </p:txBody>
-      </p:sp>
-      <p:sp>
-        <p:nvSpPr>
-          <p:cNvPr id="3" name="Rectangle 2"/>
-          <p:cNvSpPr/>
-          <p:nvPr/>
-        </p:nvSpPr>
-        <p:spPr>
-          <a:xfrm>
-            <a:off x="0" y="1051560"/>
-            <a:ext cx="2103120" cy="63500"/>
-          </a:xfrm>
-          <a:prstGeom prst="rect">
-            <a:avLst/>
-          </a:prstGeom>
-          <a:solidFill>
-            <a:srgbClr val="0D9488"/>
-          </a:solidFill>
-          <a:ln>
-            <a:noFill/>
-          </a:ln>
-          <a:effectLst/>
-        </p:spPr>
-        <p:style>
-          <a:lnRef idx="1">
-            <a:schemeClr val="accent1"/>
-          </a:lnRef>
-          <a:fillRef idx="3">
-            <a:schemeClr val="accent1"/>
-          </a:fillRef>
-          <a:effectRef idx="2">
-            <a:schemeClr val="accent1"/>
-          </a:effectRef>
-          <a:fontRef idx="minor">
-            <a:schemeClr val="lt1"/>
-          </a:fontRef>
-        </p:style>
-        <p:txBody>
-          <a:bodyPr rtlCol="0" anchor="ctr"/>
-          <a:lstStyle/>
-          <a:p>
-            <a:pPr algn="ctr"/>
-          </a:p>
-        </p:txBody>
-      </p:sp>
-      <p:sp>
-        <p:nvSpPr>
-          <p:cNvPr id="4" name="TextBox 3"/>
-          <p:cNvSpPr txBox="1"/>
-          <p:nvPr/>
-        </p:nvSpPr>
-        <p:spPr>
-          <a:xfrm>
-            <a:off x="548640" y="146304"/>
-            <a:ext cx="11094415" cy="640080"/>
-          </a:xfrm>
-          <a:prstGeom prst="rect">
-            <a:avLst/>
-          </a:prstGeom>
-          <a:noFill/>
-        </p:spPr>
-        <p:txBody>
-          <a:bodyPr wrap="square">
-            <a:spAutoFit/>
-          </a:bodyPr>
-          <a:lstStyle/>
-          <a:p>
-            <a:pPr>
-              <a:defRPr sz="3000" b="1">
-                <a:solidFill>
-                  <a:srgbClr val="FFFFFF"/>
-                </a:solidFill>
-                <a:latin typeface="Calibri"/>
-              </a:defRPr>
-            </a:pPr>
-            <a:r>
-              <a:t>How EER is calculated</a:t>
-            </a:r>
-          </a:p>
-        </p:txBody>
-      </p:sp>
-      <p:sp>
-        <p:nvSpPr>
-          <p:cNvPr id="5" name="TextBox 4"/>
-          <p:cNvSpPr txBox="1"/>
-          <p:nvPr/>
-        </p:nvSpPr>
-        <p:spPr>
-          <a:xfrm>
-            <a:off x="548640" y="658368"/>
-            <a:ext cx="11094415" cy="365760"/>
-          </a:xfrm>
-          <a:prstGeom prst="rect">
-            <a:avLst/>
-          </a:prstGeom>
-          <a:noFill/>
-        </p:spPr>
-        <p:txBody>
-          <a:bodyPr wrap="none">
-            <a:spAutoFit/>
-          </a:bodyPr>
-          <a:lstStyle/>
-          <a:p>
-            <a:pPr>
-              <a:defRPr sz="1300">
-                <a:solidFill>
-                  <a:srgbClr val="CBD5E1"/>
-                </a:solidFill>
-                <a:latin typeface="Calibri"/>
-              </a:defRPr>
-            </a:pPr>
-            <a:r>
-              <a:t>The metric the ASVspoof challenge itself is scored on</a:t>
-            </a:r>
-          </a:p>
-        </p:txBody>
-      </p:sp>
-      <p:sp>
-        <p:nvSpPr>
-          <p:cNvPr id="6" name="TextBox 5"/>
-          <p:cNvSpPr txBox="1"/>
-          <p:nvPr/>
-        </p:nvSpPr>
-        <p:spPr>
-          <a:xfrm>
-            <a:off x="11368735" y="6473952"/>
-            <a:ext cx="548640" cy="292608"/>
-          </a:xfrm>
-          <a:prstGeom prst="rect">
-            <a:avLst/>
-          </a:prstGeom>
-          <a:noFill/>
-        </p:spPr>
-        <p:txBody>
-          <a:bodyPr wrap="square">
-            <a:spAutoFit/>
-          </a:bodyPr>
-          <a:lstStyle/>
-          <a:p>
-            <a:pPr algn="r">
-              <a:defRPr sz="1100" b="0">
-                <a:solidFill>
-                  <a:srgbClr val="64748B"/>
-                </a:solidFill>
-                <a:latin typeface="Calibri"/>
-              </a:defRPr>
-            </a:pPr>
-            <a:r>
-              <a:t>4</a:t>
-            </a:r>
-          </a:p>
-        </p:txBody>
-      </p:sp>
-      <p:sp>
-        <p:nvSpPr>
-          <p:cNvPr id="7" name="TextBox 6"/>
-          <p:cNvSpPr txBox="1"/>
-          <p:nvPr/>
-        </p:nvSpPr>
-        <p:spPr>
-          <a:xfrm>
-            <a:off x="548640" y="1417320"/>
-            <a:ext cx="11094415" cy="4983480"/>
-          </a:xfrm>
-          <a:prstGeom prst="rect">
-            <a:avLst/>
-          </a:prstGeom>
-          <a:noFill/>
-        </p:spPr>
-        <p:txBody>
-          <a:bodyPr wrap="square">
-            <a:spAutoFit/>
-          </a:bodyPr>
-          <a:lstStyle/>
-          <a:p>
-            <a:pPr>
-              <a:spcAft>
-                <a:spcPts val="1200"/>
-              </a:spcAft>
-              <a:defRPr sz="1700">
-                <a:solidFill>
-                  <a:srgbClr val="1A202C"/>
-                </a:solidFill>
-                <a:latin typeface="Calibri"/>
-              </a:defRPr>
-            </a:pPr>
-            <a:r>
-              <a:t>•  Score every dev utterance with the model, giving each one a P(spoof) between 0 and 1.</a:t>
-            </a:r>
-          </a:p>
-          <a:p>
-            <a:pPr>
-              <a:spcAft>
-                <a:spcPts val="1200"/>
-              </a:spcAft>
-              <a:defRPr sz="1700">
-                <a:solidFill>
-                  <a:srgbClr val="1A202C"/>
-                </a:solidFill>
-                <a:latin typeface="Calibri"/>
-              </a:defRPr>
-            </a:pPr>
-            <a:r>
-              <a:t>•  Sweep every possible decision threshold and, at each one, compute two error rates: the false-acceptance rate (bonafide clips wrongly called spoof) and the false-rejection rate (spoof clips wrongly called bonafide).</a:t>
-            </a:r>
-          </a:p>
-          <a:p>
-            <a:pPr>
-              <a:spcAft>
-                <a:spcPts val="1200"/>
-              </a:spcAft>
-              <a:defRPr sz="1700">
-                <a:solidFill>
-                  <a:srgbClr val="1A202C"/>
-                </a:solidFill>
-                <a:latin typeface="Calibri"/>
-              </a:defRPr>
-            </a:pPr>
-            <a:r>
-              <a:t>•  As the threshold moves, one error rate goes up while the other goes down — the Equal Error Rate is the threshold where the two curves cross, i.e. where both error rates are equal.</a:t>
-            </a:r>
-          </a:p>
-          <a:p>
-            <a:pPr>
-              <a:spcAft>
-                <a:spcPts val="1200"/>
-              </a:spcAft>
-              <a:defRPr sz="1700">
-                <a:solidFill>
-                  <a:srgbClr val="1A202C"/>
-                </a:solidFill>
-                <a:latin typeface="Calibri"/>
-              </a:defRPr>
-            </a:pPr>
-            <a:r>
-              <a:t>•  EER itself is that shared error rate at the crossing point; the threshold at that point is what actually gets deployed (see the model artifact in common/model.py).</a:t>
-            </a:r>
-          </a:p>
-          <a:p>
-            <a:pPr>
-              <a:spcAft>
-                <a:spcPts val="1200"/>
-              </a:spcAft>
-              <a:defRPr sz="1700">
-                <a:solidFill>
-                  <a:srgbClr val="1A202C"/>
-                </a:solidFill>
-                <a:latin typeface="Calibri"/>
-              </a:defRPr>
-            </a:pPr>
-            <a:r>
-              <a:t>•  Lower EER = better separation between the two classes. 0% would mean a threshold exists with zero errors of either kind; this project's deployed model scores 9.26%.</a:t>
-            </a:r>
-          </a:p>
-        </p:txBody>
-      </p:sp>
-      <p:sp>
-        <p:nvSpPr>
-          <p:cNvPr id="8" name="Rounded Rectangle 7"/>
-          <p:cNvSpPr/>
-          <p:nvPr/>
-        </p:nvSpPr>
-        <p:spPr>
-          <a:xfrm>
-            <a:off x="548640" y="5349240"/>
-            <a:ext cx="11094415" cy="1051560"/>
-          </a:xfrm>
-          <a:prstGeom prst="roundRect">
-            <a:avLst>
-              <a:gd name="adj" fmla="val 6000"/>
-            </a:avLst>
-          </a:prstGeom>
-          <a:solidFill>
-            <a:srgbClr val="FFFFFF"/>
-          </a:solidFill>
-          <a:ln w="12700">
-            <a:solidFill>
-              <a:srgbClr val="E2E8F0"/>
-            </a:solidFill>
-          </a:ln>
-          <a:effectLst/>
-        </p:spPr>
-        <p:style>
-          <a:lnRef idx="1">
-            <a:schemeClr val="accent1"/>
-          </a:lnRef>
-          <a:fillRef idx="3">
-            <a:schemeClr val="accent1"/>
-          </a:fillRef>
-          <a:effectRef idx="2">
-            <a:schemeClr val="accent1"/>
-          </a:effectRef>
-          <a:fontRef idx="minor">
-            <a:schemeClr val="lt1"/>
-          </a:fontRef>
-        </p:style>
-        <p:txBody>
-          <a:bodyPr rtlCol="0" anchor="ctr"/>
-          <a:lstStyle/>
-          <a:p>
-            <a:pPr algn="ctr"/>
-          </a:p>
-        </p:txBody>
-      </p:sp>
-      <p:sp>
-        <p:nvSpPr>
-          <p:cNvPr id="9" name="TextBox 8"/>
-          <p:cNvSpPr txBox="1"/>
-          <p:nvPr/>
-        </p:nvSpPr>
-        <p:spPr>
-          <a:xfrm>
-            <a:off x="777240" y="5468112"/>
-            <a:ext cx="10637215" cy="868680"/>
-          </a:xfrm>
-          <a:prstGeom prst="rect">
-            <a:avLst/>
-          </a:prstGeom>
-          <a:noFill/>
-        </p:spPr>
-        <p:txBody>
-          <a:bodyPr wrap="square">
-            <a:spAutoFit/>
-          </a:bodyPr>
-          <a:lstStyle/>
-          <a:p>
-            <a:pPr>
-              <a:defRPr sz="1300">
-                <a:solidFill>
-                  <a:srgbClr val="0F2942"/>
-                </a:solidFill>
-                <a:latin typeface="Consolas"/>
-              </a:defRPr>
-            </a:pPr>
-            <a:r>
-              <a:t>fpr, tpr, thresholds = roc_curve(y_true_spoof, y_score_spoof)</a:t>
-            </a:r>
-          </a:p>
-          <a:p>
-            <a:pPr>
-              <a:defRPr sz="1300">
-                <a:solidFill>
-                  <a:srgbClr val="0F2942"/>
-                </a:solidFill>
-                <a:latin typeface="Consolas"/>
-              </a:defRPr>
-            </a:pPr>
-            <a:r>
-              <a:t>fnr = 1 - tpr</a:t>
-            </a:r>
-          </a:p>
-          <a:p>
-            <a:pPr>
-              <a:defRPr sz="1300">
-                <a:solidFill>
-                  <a:srgbClr val="0F2942"/>
-                </a:solidFill>
-                <a:latin typeface="Consolas"/>
-              </a:defRPr>
-            </a:pPr>
-            <a:r>
-              <a:t>eer_idx = argmin(abs(fnr - fpr))   # where the two curves are closest</a:t>
-            </a:r>
-          </a:p>
-          <a:p>
-            <a:pPr>
-              <a:defRPr sz="1300">
-                <a:solidFill>
-                  <a:srgbClr val="0F2942"/>
-                </a:solidFill>
-                <a:latin typeface="Consolas"/>
-              </a:defRPr>
-            </a:pPr>
-            <a:r>
-              <a:t>eer, threshold = (fpr[eer_idx] + fnr[eer_idx]) / 2,  thresholds[eer_idx]</a:t>
-            </a:r>
-          </a:p>
-        </p:txBody>
-      </p:sp>
-    </p:spTree>
-  </p:cSld>
-  <p:clrMapOvr>
-    <a:masterClrMapping/>
-  </p:clrMapOvr>
-</p:sld>
-</file>
-
-<file path=ppt/slides/slide6.xml><?xml version="1.0" encoding="utf-8"?>
-<p:sld xmlns:a="http://schemas.openxmlformats.org/drawingml/2006/main" xmlns:p="http://schemas.openxmlformats.org/presentationml/2006/main" xmlns:r="http://schemas.openxmlformats.org/officeDocument/2006/relationships">
-  <p:cSld>
-    <p:bg>
-      <p:bgPr>
-        <a:solidFill>
-          <a:srgbClr val="F7F9FB"/>
-        </a:solidFill>
-        <a:effectLst/>
-      </p:bgPr>
-    </p:bg>
-    <p:spTree>
-      <p:nvGrpSpPr>
-        <p:cNvPr id="1" name=""/>
-        <p:cNvGrpSpPr/>
-        <p:nvPr/>
-      </p:nvGrpSpPr>
-      <p:grpSpPr/>
-      <p:sp>
-        <p:nvSpPr>
-          <p:cNvPr id="2" name="Rectangle 1"/>
-          <p:cNvSpPr/>
-          <p:nvPr/>
-        </p:nvSpPr>
-        <p:spPr>
-          <a:xfrm>
-            <a:off x="0" y="0"/>
-            <a:ext cx="12191695" cy="1051560"/>
-          </a:xfrm>
-          <a:prstGeom prst="rect">
-            <a:avLst/>
-          </a:prstGeom>
-          <a:solidFill>
-            <a:srgbClr val="0F2942"/>
-          </a:solidFill>
-          <a:ln>
-            <a:noFill/>
-          </a:ln>
-          <a:effectLst/>
-        </p:spPr>
-        <p:style>
-          <a:lnRef idx="1">
-            <a:schemeClr val="accent1"/>
-          </a:lnRef>
-          <a:fillRef idx="3">
-            <a:schemeClr val="accent1"/>
-          </a:fillRef>
-          <a:effectRef idx="2">
-            <a:schemeClr val="accent1"/>
-          </a:effectRef>
-          <a:fontRef idx="minor">
-            <a:schemeClr val="lt1"/>
-          </a:fontRef>
-        </p:style>
-        <p:txBody>
-          <a:bodyPr rtlCol="0" anchor="ctr"/>
-          <a:lstStyle/>
-          <a:p>
-            <a:pPr algn="ctr"/>
-          </a:p>
-        </p:txBody>
-      </p:sp>
-      <p:sp>
-        <p:nvSpPr>
-          <p:cNvPr id="3" name="Rectangle 2"/>
-          <p:cNvSpPr/>
-          <p:nvPr/>
-        </p:nvSpPr>
-        <p:spPr>
-          <a:xfrm>
-            <a:off x="0" y="1051560"/>
-            <a:ext cx="2103120" cy="63500"/>
-          </a:xfrm>
-          <a:prstGeom prst="rect">
-            <a:avLst/>
-          </a:prstGeom>
-          <a:solidFill>
-            <a:srgbClr val="0D9488"/>
-          </a:solidFill>
-          <a:ln>
-            <a:noFill/>
-          </a:ln>
-          <a:effectLst/>
-        </p:spPr>
-        <p:style>
-          <a:lnRef idx="1">
-            <a:schemeClr val="accent1"/>
-          </a:lnRef>
-          <a:fillRef idx="3">
-            <a:schemeClr val="accent1"/>
-          </a:fillRef>
-          <a:effectRef idx="2">
-            <a:schemeClr val="accent1"/>
-          </a:effectRef>
-          <a:fontRef idx="minor">
-            <a:schemeClr val="lt1"/>
-          </a:fontRef>
-        </p:style>
-        <p:txBody>
-          <a:bodyPr rtlCol="0" anchor="ctr"/>
-          <a:lstStyle/>
-          <a:p>
-            <a:pPr algn="ctr"/>
-          </a:p>
-        </p:txBody>
-      </p:sp>
-      <p:sp>
-        <p:nvSpPr>
-          <p:cNvPr id="4" name="TextBox 3"/>
-          <p:cNvSpPr txBox="1"/>
-          <p:nvPr/>
-        </p:nvSpPr>
-        <p:spPr>
-          <a:xfrm>
-            <a:off x="548640" y="146304"/>
-            <a:ext cx="11094415" cy="640080"/>
-          </a:xfrm>
-          <a:prstGeom prst="rect">
-            <a:avLst/>
-          </a:prstGeom>
-          <a:noFill/>
-        </p:spPr>
-        <p:txBody>
-          <a:bodyPr wrap="square">
-            <a:spAutoFit/>
-          </a:bodyPr>
-          <a:lstStyle/>
-          <a:p>
-            <a:pPr>
-              <a:defRPr sz="3000" b="1">
-                <a:solidFill>
-                  <a:srgbClr val="FFFFFF"/>
-                </a:solidFill>
-                <a:latin typeface="Calibri"/>
-              </a:defRPr>
-            </a:pPr>
-            <a:r>
-              <a:t>Results — the accuracy paradox, found and fixed</a:t>
-            </a:r>
-          </a:p>
-        </p:txBody>
-      </p:sp>
-      <p:sp>
-        <p:nvSpPr>
-          <p:cNvPr id="5" name="TextBox 4"/>
-          <p:cNvSpPr txBox="1"/>
-          <p:nvPr/>
-        </p:nvSpPr>
-        <p:spPr>
-          <a:xfrm>
-            <a:off x="11368735" y="6473952"/>
-            <a:ext cx="548640" cy="292608"/>
-          </a:xfrm>
-          <a:prstGeom prst="rect">
-            <a:avLst/>
-          </a:prstGeom>
-          <a:noFill/>
-        </p:spPr>
-        <p:txBody>
-          <a:bodyPr wrap="square">
-            <a:spAutoFit/>
-          </a:bodyPr>
-          <a:lstStyle/>
-          <a:p>
-            <a:pPr algn="r">
-              <a:defRPr sz="1100" b="0">
-                <a:solidFill>
-                  <a:srgbClr val="64748B"/>
-                </a:solidFill>
-                <a:latin typeface="Calibri"/>
-              </a:defRPr>
-            </a:pPr>
-            <a:r>
-              <a:t>5</a:t>
-            </a:r>
-          </a:p>
-        </p:txBody>
-      </p:sp>
-      <p:sp>
-        <p:nvSpPr>
-          <p:cNvPr id="6" name="Rounded Rectangle 5"/>
-          <p:cNvSpPr/>
-          <p:nvPr/>
-        </p:nvSpPr>
-        <p:spPr>
-          <a:xfrm>
-            <a:off x="548640" y="1417320"/>
-            <a:ext cx="3515258" cy="1554480"/>
-          </a:xfrm>
-          <a:prstGeom prst="roundRect">
-            <a:avLst>
-              <a:gd name="adj" fmla="val 6000"/>
-            </a:avLst>
-          </a:prstGeom>
-          <a:solidFill>
-            <a:srgbClr val="FFFFFF"/>
-          </a:solidFill>
-          <a:ln w="12700">
-            <a:solidFill>
-              <a:srgbClr val="E2E8F0"/>
-            </a:solidFill>
-          </a:ln>
-          <a:effectLst/>
-        </p:spPr>
-        <p:style>
-          <a:lnRef idx="1">
-            <a:schemeClr val="accent1"/>
-          </a:lnRef>
-          <a:fillRef idx="3">
-            <a:schemeClr val="accent1"/>
-          </a:fillRef>
-          <a:effectRef idx="2">
-            <a:schemeClr val="accent1"/>
-          </a:effectRef>
-          <a:fontRef idx="minor">
-            <a:schemeClr val="lt1"/>
-          </a:fontRef>
-        </p:style>
-        <p:txBody>
-          <a:bodyPr rtlCol="0" anchor="ctr"/>
-          <a:lstStyle/>
-          <a:p>
-            <a:pPr algn="ctr"/>
-          </a:p>
-        </p:txBody>
-      </p:sp>
-      <p:sp>
-        <p:nvSpPr>
-          <p:cNvPr id="7" name="TextBox 6"/>
-          <p:cNvSpPr txBox="1"/>
-          <p:nvPr/>
-        </p:nvSpPr>
-        <p:spPr>
-          <a:xfrm>
-            <a:off x="548640" y="1618488"/>
-            <a:ext cx="3515258" cy="731520"/>
-          </a:xfrm>
-          <a:prstGeom prst="rect">
-            <a:avLst/>
-          </a:prstGeom>
-          <a:noFill/>
-        </p:spPr>
-        <p:txBody>
-          <a:bodyPr wrap="none">
-            <a:spAutoFit/>
-          </a:bodyPr>
-          <a:lstStyle/>
-          <a:p>
-            <a:pPr algn="ctr">
-              <a:defRPr sz="3400" b="1">
-                <a:solidFill>
-                  <a:srgbClr val="DC2626"/>
-                </a:solidFill>
-                <a:latin typeface="Calibri"/>
-              </a:defRPr>
-            </a:pPr>
-            <a:r>
-              <a:t>80%</a:t>
-            </a:r>
-          </a:p>
-        </p:txBody>
-      </p:sp>
-      <p:sp>
-        <p:nvSpPr>
-          <p:cNvPr id="8" name="TextBox 7"/>
-          <p:cNvSpPr txBox="1"/>
-          <p:nvPr/>
-        </p:nvSpPr>
-        <p:spPr>
-          <a:xfrm>
-            <a:off x="640080" y="2377440"/>
-            <a:ext cx="3332378" cy="548640"/>
-          </a:xfrm>
-          <a:prstGeom prst="rect">
-            <a:avLst/>
-          </a:prstGeom>
-          <a:noFill/>
-        </p:spPr>
-        <p:txBody>
-          <a:bodyPr wrap="square">
-            <a:spAutoFit/>
-          </a:bodyPr>
-          <a:lstStyle/>
-          <a:p>
-            <a:pPr algn="ctr">
-              <a:defRPr sz="1200">
-                <a:solidFill>
-                  <a:srgbClr val="64748B"/>
-                </a:solidFill>
-                <a:latin typeface="Calibri"/>
-              </a:defRPr>
-            </a:pPr>
-            <a:r>
-              <a:t>Bonafide recall</a:t>
-            </a:r>
-          </a:p>
-          <a:p>
-            <a:pPr algn="ctr">
-              <a:defRPr sz="1200">
-                <a:solidFill>
-                  <a:srgbClr val="64748B"/>
-                </a:solidFill>
-                <a:latin typeface="Calibri"/>
-              </a:defRPr>
-            </a:pPr>
-            <a:r>
-              <a:t>at default 0.5 threshold</a:t>
-            </a:r>
-          </a:p>
-        </p:txBody>
-      </p:sp>
-      <p:sp>
-        <p:nvSpPr>
-          <p:cNvPr id="9" name="Rounded Rectangle 8"/>
-          <p:cNvSpPr/>
-          <p:nvPr/>
-        </p:nvSpPr>
-        <p:spPr>
-          <a:xfrm>
-            <a:off x="4338218" y="1417320"/>
-            <a:ext cx="3515258" cy="1554480"/>
-          </a:xfrm>
-          <a:prstGeom prst="roundRect">
-            <a:avLst>
-              <a:gd name="adj" fmla="val 6000"/>
-            </a:avLst>
-          </a:prstGeom>
-          <a:solidFill>
-            <a:srgbClr val="FFFFFF"/>
-          </a:solidFill>
-          <a:ln w="12700">
-            <a:solidFill>
-              <a:srgbClr val="E2E8F0"/>
-            </a:solidFill>
-          </a:ln>
-          <a:effectLst/>
-        </p:spPr>
-        <p:style>
-          <a:lnRef idx="1">
-            <a:schemeClr val="accent1"/>
-          </a:lnRef>
-          <a:fillRef idx="3">
-            <a:schemeClr val="accent1"/>
-          </a:fillRef>
-          <a:effectRef idx="2">
-            <a:schemeClr val="accent1"/>
-          </a:effectRef>
-          <a:fontRef idx="minor">
-            <a:schemeClr val="lt1"/>
-          </a:fontRef>
-        </p:style>
-        <p:txBody>
-          <a:bodyPr rtlCol="0" anchor="ctr"/>
-          <a:lstStyle/>
-          <a:p>
-            <a:pPr algn="ctr"/>
-          </a:p>
-        </p:txBody>
-      </p:sp>
-      <p:sp>
-        <p:nvSpPr>
-          <p:cNvPr id="10" name="TextBox 9"/>
-          <p:cNvSpPr txBox="1"/>
-          <p:nvPr/>
-        </p:nvSpPr>
-        <p:spPr>
-          <a:xfrm>
-            <a:off x="4338218" y="1618488"/>
-            <a:ext cx="3515258" cy="731520"/>
-          </a:xfrm>
-          <a:prstGeom prst="rect">
-            <a:avLst/>
-          </a:prstGeom>
-          <a:noFill/>
-        </p:spPr>
-        <p:txBody>
-          <a:bodyPr wrap="none">
-            <a:spAutoFit/>
-          </a:bodyPr>
-          <a:lstStyle/>
-          <a:p>
-            <a:pPr algn="ctr">
-              <a:defRPr sz="3400" b="1">
-                <a:solidFill>
-                  <a:srgbClr val="0D9488"/>
-                </a:solidFill>
-                <a:latin typeface="Calibri"/>
-              </a:defRPr>
-            </a:pPr>
-            <a:r>
-              <a:t>91%</a:t>
-            </a:r>
-          </a:p>
-        </p:txBody>
-      </p:sp>
-      <p:sp>
-        <p:nvSpPr>
-          <p:cNvPr id="11" name="TextBox 10"/>
-          <p:cNvSpPr txBox="1"/>
-          <p:nvPr/>
-        </p:nvSpPr>
-        <p:spPr>
-          <a:xfrm>
-            <a:off x="4429658" y="2377440"/>
-            <a:ext cx="3332378" cy="548640"/>
-          </a:xfrm>
-          <a:prstGeom prst="rect">
-            <a:avLst/>
-          </a:prstGeom>
-          <a:noFill/>
-        </p:spPr>
-        <p:txBody>
-          <a:bodyPr wrap="square">
-            <a:spAutoFit/>
-          </a:bodyPr>
-          <a:lstStyle/>
-          <a:p>
-            <a:pPr algn="ctr">
-              <a:defRPr sz="1200">
-                <a:solidFill>
-                  <a:srgbClr val="64748B"/>
-                </a:solidFill>
-                <a:latin typeface="Calibri"/>
-              </a:defRPr>
-            </a:pPr>
-            <a:r>
-              <a:t>Bonafide recall</a:t>
-            </a:r>
-          </a:p>
-          <a:p>
-            <a:pPr algn="ctr">
-              <a:defRPr sz="1200">
-                <a:solidFill>
-                  <a:srgbClr val="64748B"/>
-                </a:solidFill>
-                <a:latin typeface="Calibri"/>
-              </a:defRPr>
-            </a:pPr>
-            <a:r>
-              <a:t>at deployed EER threshold</a:t>
-            </a:r>
-          </a:p>
-        </p:txBody>
-      </p:sp>
-      <p:sp>
-        <p:nvSpPr>
-          <p:cNvPr id="12" name="Rounded Rectangle 11"/>
-          <p:cNvSpPr/>
-          <p:nvPr/>
-        </p:nvSpPr>
-        <p:spPr>
-          <a:xfrm>
-            <a:off x="8127796" y="1417320"/>
-            <a:ext cx="3515258" cy="1554480"/>
-          </a:xfrm>
-          <a:prstGeom prst="roundRect">
-            <a:avLst>
-              <a:gd name="adj" fmla="val 6000"/>
-            </a:avLst>
-          </a:prstGeom>
-          <a:solidFill>
-            <a:srgbClr val="FFFFFF"/>
-          </a:solidFill>
-          <a:ln w="12700">
-            <a:solidFill>
-              <a:srgbClr val="E2E8F0"/>
-            </a:solidFill>
-          </a:ln>
-          <a:effectLst/>
-        </p:spPr>
-        <p:style>
-          <a:lnRef idx="1">
-            <a:schemeClr val="accent1"/>
-          </a:lnRef>
-          <a:fillRef idx="3">
-            <a:schemeClr val="accent1"/>
-          </a:fillRef>
-          <a:effectRef idx="2">
-            <a:schemeClr val="accent1"/>
-          </a:effectRef>
-          <a:fontRef idx="minor">
-            <a:schemeClr val="lt1"/>
-          </a:fontRef>
-        </p:style>
-        <p:txBody>
-          <a:bodyPr rtlCol="0" anchor="ctr"/>
-          <a:lstStyle/>
-          <a:p>
-            <a:pPr algn="ctr"/>
-          </a:p>
-        </p:txBody>
-      </p:sp>
-      <p:sp>
-        <p:nvSpPr>
-          <p:cNvPr id="13" name="TextBox 12"/>
-          <p:cNvSpPr txBox="1"/>
-          <p:nvPr/>
-        </p:nvSpPr>
-        <p:spPr>
-          <a:xfrm>
-            <a:off x="8127796" y="1618488"/>
-            <a:ext cx="3515258" cy="731520"/>
-          </a:xfrm>
-          <a:prstGeom prst="rect">
-            <a:avLst/>
-          </a:prstGeom>
-          <a:noFill/>
-        </p:spPr>
-        <p:txBody>
-          <a:bodyPr wrap="none">
-            <a:spAutoFit/>
-          </a:bodyPr>
-          <a:lstStyle/>
-          <a:p>
-            <a:pPr algn="ctr">
-              <a:defRPr sz="3400" b="1">
-                <a:solidFill>
-                  <a:srgbClr val="2B6CB0"/>
-                </a:solidFill>
-                <a:latin typeface="Calibri"/>
-              </a:defRPr>
-            </a:pPr>
-            <a:r>
-              <a:t>9.3%</a:t>
-            </a:r>
-          </a:p>
-        </p:txBody>
-      </p:sp>
-      <p:sp>
-        <p:nvSpPr>
-          <p:cNvPr id="14" name="TextBox 13"/>
-          <p:cNvSpPr txBox="1"/>
-          <p:nvPr/>
-        </p:nvSpPr>
-        <p:spPr>
-          <a:xfrm>
-            <a:off x="8219236" y="2377440"/>
-            <a:ext cx="3332378" cy="548640"/>
-          </a:xfrm>
-          <a:prstGeom prst="rect">
-            <a:avLst/>
-          </a:prstGeom>
-          <a:noFill/>
-        </p:spPr>
-        <p:txBody>
-          <a:bodyPr wrap="square">
-            <a:spAutoFit/>
-          </a:bodyPr>
-          <a:lstStyle/>
-          <a:p>
-            <a:pPr algn="ctr">
-              <a:defRPr sz="1200">
-                <a:solidFill>
-                  <a:srgbClr val="64748B"/>
-                </a:solidFill>
-                <a:latin typeface="Calibri"/>
-              </a:defRPr>
-            </a:pPr>
-            <a:r>
-              <a:t>Equal Error Rate</a:t>
-            </a:r>
-          </a:p>
-          <a:p>
-            <a:pPr algn="ctr">
-              <a:defRPr sz="1200">
-                <a:solidFill>
-                  <a:srgbClr val="64748B"/>
-                </a:solidFill>
-                <a:latin typeface="Calibri"/>
-              </a:defRPr>
-            </a:pPr>
-            <a:r>
-              <a:t>(ASVspoof's own metric)</a:t>
-            </a:r>
-          </a:p>
-        </p:txBody>
-      </p:sp>
-      <p:sp>
-        <p:nvSpPr>
-          <p:cNvPr id="15" name="TextBox 14"/>
-          <p:cNvSpPr txBox="1"/>
-          <p:nvPr/>
-        </p:nvSpPr>
-        <p:spPr>
-          <a:xfrm>
-            <a:off x="548640" y="3246120"/>
-            <a:ext cx="11094415" cy="3154680"/>
-          </a:xfrm>
-          <a:prstGeom prst="rect">
-            <a:avLst/>
-          </a:prstGeom>
-          <a:noFill/>
-        </p:spPr>
-        <p:txBody>
-          <a:bodyPr wrap="square">
-            <a:spAutoFit/>
-          </a:bodyPr>
-          <a:lstStyle/>
-          <a:p>
-            <a:pPr>
-              <a:spcAft>
-                <a:spcPts val="1200"/>
-              </a:spcAft>
-              <a:defRPr sz="1600">
-                <a:solidFill>
-                  <a:srgbClr val="1A202C"/>
-                </a:solidFill>
-                <a:latin typeface="Calibri"/>
-              </a:defRPr>
-            </a:pPr>
-            <a:r>
-              <a:t>•  Dev accuracy at the default threshold (94.3%) looked strong, but the model was quietly biased toward the majority class: it caught spoof reliably, bonafide much less so.</a:t>
-            </a:r>
-          </a:p>
-          <a:p>
-            <a:pPr>
-              <a:spcAft>
-                <a:spcPts val="1200"/>
-              </a:spcAft>
-              <a:defRPr sz="1600">
-                <a:solidFill>
-                  <a:srgbClr val="1A202C"/>
-                </a:solidFill>
-                <a:latin typeface="Calibri"/>
-              </a:defRPr>
-            </a:pPr>
-            <a:r>
-              <a:t>•  Fix: the model artifact now stores its own EER-optimal decision threshold, used everywhere (streaming consumer, web app) instead of scikit-learn's default 0.5.</a:t>
-            </a:r>
-          </a:p>
-          <a:p>
-            <a:pPr>
-              <a:spcAft>
-                <a:spcPts val="1200"/>
-              </a:spcAft>
-              <a:defRPr sz="1600">
-                <a:solidFill>
-                  <a:srgbClr val="1A202C"/>
-                </a:solidFill>
-                <a:latin typeface="Calibri"/>
-              </a:defRPr>
-            </a:pPr>
-            <a:r>
-              <a:t>•  Independently re-confirmed on live Kafka-streamed eval data, not just the dev set it was tuned on — bonafide accuracy went 29.7% → 91.5% on the streamed sample too.</a:t>
-            </a:r>
-          </a:p>
-        </p:txBody>
-      </p:sp>
-    </p:spTree>
-  </p:cSld>
-  <p:clrMapOvr>
-    <a:masterClrMapping/>
-  </p:clrMapOvr>
-</p:sld>
-</file>
-
-<file path=ppt/slides/slide7.xml><?xml version="1.0" encoding="utf-8"?>
-<p:sld xmlns:a="http://schemas.openxmlformats.org/drawingml/2006/main" xmlns:p="http://schemas.openxmlformats.org/presentationml/2006/main" xmlns:r="http://schemas.openxmlformats.org/officeDocument/2006/relationships">
-  <p:cSld>
-    <p:bg>
-      <p:bgPr>
-        <a:solidFill>
-          <a:srgbClr val="F7F9FB"/>
-        </a:solidFill>
-        <a:effectLst/>
-      </p:bgPr>
-    </p:bg>
-    <p:spTree>
-      <p:nvGrpSpPr>
-        <p:cNvPr id="1" name=""/>
-        <p:cNvGrpSpPr/>
-        <p:nvPr/>
-      </p:nvGrpSpPr>
-      <p:grpSpPr/>
-      <p:sp>
-        <p:nvSpPr>
-          <p:cNvPr id="2" name="Rectangle 1"/>
-          <p:cNvSpPr/>
-          <p:nvPr/>
-        </p:nvSpPr>
-        <p:spPr>
-          <a:xfrm>
-            <a:off x="0" y="0"/>
-            <a:ext cx="12191695" cy="1051560"/>
-          </a:xfrm>
-          <a:prstGeom prst="rect">
-            <a:avLst/>
-          </a:prstGeom>
-          <a:solidFill>
-            <a:srgbClr val="0F2942"/>
-          </a:solidFill>
-          <a:ln>
-            <a:noFill/>
-          </a:ln>
-          <a:effectLst/>
-        </p:spPr>
-        <p:style>
-          <a:lnRef idx="1">
-            <a:schemeClr val="accent1"/>
-          </a:lnRef>
-          <a:fillRef idx="3">
-            <a:schemeClr val="accent1"/>
-          </a:fillRef>
-          <a:effectRef idx="2">
-            <a:schemeClr val="accent1"/>
-          </a:effectRef>
-          <a:fontRef idx="minor">
-            <a:schemeClr val="lt1"/>
-          </a:fontRef>
-        </p:style>
-        <p:txBody>
-          <a:bodyPr rtlCol="0" anchor="ctr"/>
-          <a:lstStyle/>
-          <a:p>
-            <a:pPr algn="ctr"/>
-          </a:p>
-        </p:txBody>
-      </p:sp>
-      <p:sp>
-        <p:nvSpPr>
-          <p:cNvPr id="3" name="Rectangle 2"/>
-          <p:cNvSpPr/>
-          <p:nvPr/>
-        </p:nvSpPr>
-        <p:spPr>
-          <a:xfrm>
-            <a:off x="0" y="1051560"/>
-            <a:ext cx="2103120" cy="63500"/>
-          </a:xfrm>
-          <a:prstGeom prst="rect">
-            <a:avLst/>
-          </a:prstGeom>
-          <a:solidFill>
-            <a:srgbClr val="0D9488"/>
-          </a:solidFill>
-          <a:ln>
-            <a:noFill/>
-          </a:ln>
-          <a:effectLst/>
-        </p:spPr>
-        <p:style>
-          <a:lnRef idx="1">
-            <a:schemeClr val="accent1"/>
-          </a:lnRef>
-          <a:fillRef idx="3">
-            <a:schemeClr val="accent1"/>
-          </a:fillRef>
-          <a:effectRef idx="2">
-            <a:schemeClr val="accent1"/>
-          </a:effectRef>
-          <a:fontRef idx="minor">
-            <a:schemeClr val="lt1"/>
-          </a:fontRef>
-        </p:style>
-        <p:txBody>
-          <a:bodyPr rtlCol="0" anchor="ctr"/>
-          <a:lstStyle/>
-          <a:p>
-            <a:pPr algn="ctr"/>
-          </a:p>
-        </p:txBody>
-      </p:sp>
-      <p:sp>
-        <p:nvSpPr>
-          <p:cNvPr id="4" name="TextBox 3"/>
-          <p:cNvSpPr txBox="1"/>
-          <p:nvPr/>
-        </p:nvSpPr>
-        <p:spPr>
-          <a:xfrm>
-            <a:off x="548640" y="146304"/>
-            <a:ext cx="11094415" cy="640080"/>
-          </a:xfrm>
-          <a:prstGeom prst="rect">
-            <a:avLst/>
-          </a:prstGeom>
-          <a:noFill/>
-        </p:spPr>
-        <p:txBody>
-          <a:bodyPr wrap="square">
-            <a:spAutoFit/>
-          </a:bodyPr>
-          <a:lstStyle/>
-          <a:p>
-            <a:pPr>
-              <a:defRPr sz="3000" b="1">
-                <a:solidFill>
-                  <a:srgbClr val="FFFFFF"/>
-                </a:solidFill>
-                <a:latin typeface="Calibri"/>
-              </a:defRPr>
-            </a:pPr>
-            <a:r>
-              <a:t>Results — ROC curve &amp; confusion matrix</a:t>
-            </a:r>
-          </a:p>
-        </p:txBody>
-      </p:sp>
-      <p:sp>
-        <p:nvSpPr>
-          <p:cNvPr id="5" name="TextBox 4"/>
-          <p:cNvSpPr txBox="1"/>
-          <p:nvPr/>
-        </p:nvSpPr>
-        <p:spPr>
-          <a:xfrm>
-            <a:off x="11368735" y="6473952"/>
-            <a:ext cx="548640" cy="292608"/>
-          </a:xfrm>
-          <a:prstGeom prst="rect">
-            <a:avLst/>
-          </a:prstGeom>
-          <a:noFill/>
-        </p:spPr>
-        <p:txBody>
-          <a:bodyPr wrap="square">
-            <a:spAutoFit/>
-          </a:bodyPr>
-          <a:lstStyle/>
-          <a:p>
-            <a:pPr algn="r">
-              <a:defRPr sz="1100" b="0">
-                <a:solidFill>
-                  <a:srgbClr val="64748B"/>
-                </a:solidFill>
-                <a:latin typeface="Calibri"/>
-              </a:defRPr>
-            </a:pPr>
-            <a:r>
-              <a:t>6</a:t>
-            </a:r>
-          </a:p>
-        </p:txBody>
-      </p:sp>
-      <p:pic>
-        <p:nvPicPr>
-          <p:cNvPr id="6" name="Picture 5" descr="roc_curve.png"/>
-          <p:cNvPicPr>
-            <a:picLocks noChangeAspect="1"/>
-          </p:cNvPicPr>
-          <p:nvPr/>
-        </p:nvPicPr>
-        <p:blipFill>
-          <a:blip r:embed="rId2"/>
-          <a:stretch>
-            <a:fillRect/>
-          </a:stretch>
-        </p:blipFill>
-        <p:spPr>
-          <a:xfrm>
-            <a:off x="807643" y="1417320"/>
-            <a:ext cx="4892040" cy="4892040"/>
-          </a:xfrm>
-          <a:prstGeom prst="rect">
-            <a:avLst/>
-          </a:prstGeom>
-        </p:spPr>
-      </p:pic>
-      <p:pic>
-        <p:nvPicPr>
-          <p:cNvPr id="7" name="Picture 6" descr="confusion_matrix.png"/>
-          <p:cNvPicPr>
-            <a:picLocks noChangeAspect="1"/>
-          </p:cNvPicPr>
-          <p:nvPr/>
-        </p:nvPicPr>
-        <p:blipFill>
-          <a:blip r:embed="rId3"/>
-          <a:stretch>
-            <a:fillRect/>
-          </a:stretch>
-        </p:blipFill>
-        <p:spPr>
-          <a:xfrm>
-            <a:off x="6492010" y="1417320"/>
-            <a:ext cx="4892040" cy="4892040"/>
-          </a:xfrm>
-          <a:prstGeom prst="rect">
-            <a:avLst/>
-          </a:prstGeom>
-        </p:spPr>
-      </p:pic>
-      <p:sp>
-        <p:nvSpPr>
-          <p:cNvPr id="8" name="TextBox 7"/>
-          <p:cNvSpPr txBox="1"/>
-          <p:nvPr/>
-        </p:nvSpPr>
-        <p:spPr>
-          <a:xfrm>
-            <a:off x="548640" y="6400800"/>
-            <a:ext cx="11094415" cy="365760"/>
-          </a:xfrm>
-          <a:prstGeom prst="rect">
-            <a:avLst/>
-          </a:prstGeom>
-          <a:noFill/>
-        </p:spPr>
-        <p:txBody>
-          <a:bodyPr wrap="square">
-            <a:spAutoFit/>
-          </a:bodyPr>
-          <a:lstStyle/>
-          <a:p>
-            <a:pPr algn="ctr">
-              <a:defRPr sz="1200" b="0">
-                <a:solidFill>
-                  <a:srgbClr val="64748B"/>
-                </a:solidFill>
-                <a:latin typeface="Calibri"/>
-              </a:defRPr>
-            </a:pPr>
-            <a:r>
-              <a:t>Left: both candidate models, deployed model's EER point marked. Right: streamed eval predictions.</a:t>
-            </a:r>
-          </a:p>
-        </p:txBody>
-      </p:sp>
-    </p:spTree>
-  </p:cSld>
-  <p:clrMapOvr>
-    <a:masterClrMapping/>
-  </p:clrMapOvr>
-</p:sld>
-</file>
-
-<file path=ppt/slides/slide8.xml><?xml version="1.0" encoding="utf-8"?>
-<p:sld xmlns:a="http://schemas.openxmlformats.org/drawingml/2006/main" xmlns:p="http://schemas.openxmlformats.org/presentationml/2006/main" xmlns:r="http://schemas.openxmlformats.org/officeDocument/2006/relationships">
-  <p:cSld>
-    <p:bg>
-      <p:bgPr>
-        <a:solidFill>
-          <a:srgbClr val="F7F9FB"/>
-        </a:solidFill>
-        <a:effectLst/>
-      </p:bgPr>
-    </p:bg>
-    <p:spTree>
-      <p:nvGrpSpPr>
-        <p:cNvPr id="1" name=""/>
-        <p:cNvGrpSpPr/>
-        <p:nvPr/>
-      </p:nvGrpSpPr>
-      <p:grpSpPr/>
-      <p:sp>
-        <p:nvSpPr>
-          <p:cNvPr id="2" name="Rectangle 1"/>
-          <p:cNvSpPr/>
-          <p:nvPr/>
-        </p:nvSpPr>
-        <p:spPr>
-          <a:xfrm>
-            <a:off x="0" y="0"/>
-            <a:ext cx="12191695" cy="1051560"/>
-          </a:xfrm>
-          <a:prstGeom prst="rect">
-            <a:avLst/>
-          </a:prstGeom>
-          <a:solidFill>
-            <a:srgbClr val="0F2942"/>
-          </a:solidFill>
-          <a:ln>
-            <a:noFill/>
-          </a:ln>
-          <a:effectLst/>
-        </p:spPr>
-        <p:style>
-          <a:lnRef idx="1">
-            <a:schemeClr val="accent1"/>
-          </a:lnRef>
-          <a:fillRef idx="3">
-            <a:schemeClr val="accent1"/>
-          </a:fillRef>
-          <a:effectRef idx="2">
-            <a:schemeClr val="accent1"/>
-          </a:effectRef>
-          <a:fontRef idx="minor">
-            <a:schemeClr val="lt1"/>
-          </a:fontRef>
-        </p:style>
-        <p:txBody>
-          <a:bodyPr rtlCol="0" anchor="ctr"/>
-          <a:lstStyle/>
-          <a:p>
-            <a:pPr algn="ctr"/>
-          </a:p>
-        </p:txBody>
-      </p:sp>
-      <p:sp>
-        <p:nvSpPr>
-          <p:cNvPr id="3" name="Rectangle 2"/>
-          <p:cNvSpPr/>
-          <p:nvPr/>
-        </p:nvSpPr>
-        <p:spPr>
-          <a:xfrm>
-            <a:off x="0" y="1051560"/>
-            <a:ext cx="2103120" cy="63500"/>
-          </a:xfrm>
-          <a:prstGeom prst="rect">
-            <a:avLst/>
-          </a:prstGeom>
-          <a:solidFill>
-            <a:srgbClr val="0D9488"/>
-          </a:solidFill>
-          <a:ln>
-            <a:noFill/>
-          </a:ln>
-          <a:effectLst/>
-        </p:spPr>
-        <p:style>
-          <a:lnRef idx="1">
-            <a:schemeClr val="accent1"/>
-          </a:lnRef>
-          <a:fillRef idx="3">
-            <a:schemeClr val="accent1"/>
-          </a:fillRef>
-          <a:effectRef idx="2">
-            <a:schemeClr val="accent1"/>
-          </a:effectRef>
-          <a:fontRef idx="minor">
-            <a:schemeClr val="lt1"/>
-          </a:fontRef>
-        </p:style>
-        <p:txBody>
-          <a:bodyPr rtlCol="0" anchor="ctr"/>
-          <a:lstStyle/>
-          <a:p>
-            <a:pPr algn="ctr"/>
-          </a:p>
-        </p:txBody>
-      </p:sp>
-      <p:sp>
-        <p:nvSpPr>
-          <p:cNvPr id="4" name="TextBox 3"/>
-          <p:cNvSpPr txBox="1"/>
-          <p:nvPr/>
-        </p:nvSpPr>
-        <p:spPr>
-          <a:xfrm>
-            <a:off x="548640" y="146304"/>
-            <a:ext cx="11094415" cy="640080"/>
-          </a:xfrm>
-          <a:prstGeom prst="rect">
-            <a:avLst/>
-          </a:prstGeom>
-          <a:noFill/>
-        </p:spPr>
-        <p:txBody>
-          <a:bodyPr wrap="square">
-            <a:spAutoFit/>
-          </a:bodyPr>
-          <a:lstStyle/>
-          <a:p>
-            <a:pPr>
-              <a:defRPr sz="3000" b="1">
-                <a:solidFill>
-                  <a:srgbClr val="FFFFFF"/>
-                </a:solidFill>
-                <a:latin typeface="Calibri"/>
-              </a:defRPr>
-            </a:pPr>
-            <a:r>
-              <a:t>Results — what the model learned, and how sure it is</a:t>
-            </a:r>
-          </a:p>
-        </p:txBody>
-      </p:sp>
-      <p:sp>
-        <p:nvSpPr>
-          <p:cNvPr id="5" name="TextBox 4"/>
-          <p:cNvSpPr txBox="1"/>
-          <p:nvPr/>
-        </p:nvSpPr>
-        <p:spPr>
-          <a:xfrm>
-            <a:off x="11368735" y="6473952"/>
-            <a:ext cx="548640" cy="292608"/>
-          </a:xfrm>
-          <a:prstGeom prst="rect">
-            <a:avLst/>
-          </a:prstGeom>
-          <a:noFill/>
-        </p:spPr>
-        <p:txBody>
-          <a:bodyPr wrap="square">
-            <a:spAutoFit/>
-          </a:bodyPr>
-          <a:lstStyle/>
-          <a:p>
-            <a:pPr algn="r">
-              <a:defRPr sz="1100" b="0">
-                <a:solidFill>
-                  <a:srgbClr val="64748B"/>
-                </a:solidFill>
-                <a:latin typeface="Calibri"/>
-              </a:defRPr>
-            </a:pPr>
-            <a:r>
-              <a:t>7</a:t>
-            </a:r>
-          </a:p>
-        </p:txBody>
-      </p:sp>
-      <p:pic>
-        <p:nvPicPr>
-          <p:cNvPr id="6" name="Picture 5" descr="feature_importance.png"/>
-          <p:cNvPicPr>
-            <a:picLocks noChangeAspect="1"/>
-          </p:cNvPicPr>
-          <p:nvPr/>
-        </p:nvPicPr>
-        <p:blipFill>
-          <a:blip r:embed="rId2"/>
-          <a:stretch>
-            <a:fillRect/>
-          </a:stretch>
-        </p:blipFill>
-        <p:spPr>
-          <a:xfrm>
-            <a:off x="548640" y="2059991"/>
-            <a:ext cx="5410047" cy="3606698"/>
-          </a:xfrm>
-          <a:prstGeom prst="rect">
-            <a:avLst/>
-          </a:prstGeom>
-        </p:spPr>
-      </p:pic>
-      <p:pic>
-        <p:nvPicPr>
-          <p:cNvPr id="7" name="Picture 6" descr="confidence_histogram.png"/>
-          <p:cNvPicPr>
-            <a:picLocks noChangeAspect="1"/>
-          </p:cNvPicPr>
-          <p:nvPr/>
-        </p:nvPicPr>
-        <p:blipFill>
-          <a:blip r:embed="rId3"/>
-          <a:stretch>
-            <a:fillRect/>
-          </a:stretch>
-        </p:blipFill>
-        <p:spPr>
-          <a:xfrm>
-            <a:off x="6233007" y="2059991"/>
-            <a:ext cx="5410047" cy="3606698"/>
-          </a:xfrm>
-          <a:prstGeom prst="rect">
-            <a:avLst/>
-          </a:prstGeom>
-        </p:spPr>
-      </p:pic>
-      <p:sp>
-        <p:nvSpPr>
-          <p:cNvPr id="8" name="TextBox 7"/>
-          <p:cNvSpPr txBox="1"/>
-          <p:nvPr/>
-        </p:nvSpPr>
-        <p:spPr>
-          <a:xfrm>
-            <a:off x="548640" y="6400800"/>
-            <a:ext cx="11094415" cy="365760"/>
-          </a:xfrm>
-          <a:prstGeom prst="rect">
-            <a:avLst/>
-          </a:prstGeom>
-          <a:noFill/>
-        </p:spPr>
-        <p:txBody>
-          <a:bodyPr wrap="square">
-            <a:spAutoFit/>
-          </a:bodyPr>
-          <a:lstStyle/>
-          <a:p>
-            <a:pPr algn="ctr">
-              <a:defRPr sz="1200" b="0">
-                <a:solidFill>
-                  <a:srgbClr val="64748B"/>
-                </a:solidFill>
-                <a:latin typeface="Calibri"/>
-              </a:defRPr>
-            </a:pPr>
-            <a:r>
-              <a:t>Left: top acoustic features (MFCC variance dominates). Right: confidence, correct vs. incorrect calls.</a:t>
-            </a:r>
-          </a:p>
-        </p:txBody>
-      </p:sp>
-    </p:spTree>
-  </p:cSld>
-  <p:clrMapOvr>
-    <a:masterClrMapping/>
-  </p:clrMapOvr>
-</p:sld>
-</file>
-
-<file path=ppt/slides/slide9.xml><?xml version="1.0" encoding="utf-8"?>
-<p:sld xmlns:a="http://schemas.openxmlformats.org/drawingml/2006/main" xmlns:p="http://schemas.openxmlformats.org/presentationml/2006/main" xmlns:r="http://schemas.openxmlformats.org/officeDocument/2006/relationships">
-  <p:cSld>
-    <p:bg>
-      <p:bgPr>
-        <a:solidFill>
-          <a:srgbClr val="F7F9FB"/>
-        </a:solidFill>
-        <a:effectLst/>
-      </p:bgPr>
-    </p:bg>
-    <p:spTree>
-      <p:nvGrpSpPr>
-        <p:cNvPr id="1" name=""/>
-        <p:cNvGrpSpPr/>
-        <p:nvPr/>
-      </p:nvGrpSpPr>
-      <p:grpSpPr/>
-      <p:sp>
-        <p:nvSpPr>
-          <p:cNvPr id="2" name="Rectangle 1"/>
-          <p:cNvSpPr/>
-          <p:nvPr/>
-        </p:nvSpPr>
-        <p:spPr>
-          <a:xfrm>
-            <a:off x="0" y="0"/>
-            <a:ext cx="12191695" cy="1051560"/>
-          </a:xfrm>
-          <a:prstGeom prst="rect">
-            <a:avLst/>
-          </a:prstGeom>
-          <a:solidFill>
-            <a:srgbClr val="0F2942"/>
-          </a:solidFill>
-          <a:ln>
-            <a:noFill/>
-          </a:ln>
-          <a:effectLst/>
-        </p:spPr>
-        <p:style>
-          <a:lnRef idx="1">
-            <a:schemeClr val="accent1"/>
-          </a:lnRef>
-          <a:fillRef idx="3">
-            <a:schemeClr val="accent1"/>
-          </a:fillRef>
-          <a:effectRef idx="2">
-            <a:schemeClr val="accent1"/>
-          </a:effectRef>
-          <a:fontRef idx="minor">
-            <a:schemeClr val="lt1"/>
-          </a:fontRef>
-        </p:style>
-        <p:txBody>
-          <a:bodyPr rtlCol="0" anchor="ctr"/>
-          <a:lstStyle/>
-          <a:p>
-            <a:pPr algn="ctr"/>
-          </a:p>
-        </p:txBody>
-      </p:sp>
-      <p:sp>
-        <p:nvSpPr>
-          <p:cNvPr id="3" name="Rectangle 2"/>
-          <p:cNvSpPr/>
-          <p:nvPr/>
-        </p:nvSpPr>
-        <p:spPr>
-          <a:xfrm>
-            <a:off x="0" y="1051560"/>
-            <a:ext cx="2103120" cy="63500"/>
-          </a:xfrm>
-          <a:prstGeom prst="rect">
-            <a:avLst/>
-          </a:prstGeom>
-          <a:solidFill>
-            <a:srgbClr val="0D9488"/>
-          </a:solidFill>
-          <a:ln>
-            <a:noFill/>
-          </a:ln>
-          <a:effectLst/>
-        </p:spPr>
-        <p:style>
-          <a:lnRef idx="1">
-            <a:schemeClr val="accent1"/>
-          </a:lnRef>
-          <a:fillRef idx="3">
-            <a:schemeClr val="accent1"/>
-          </a:fillRef>
-          <a:effectRef idx="2">
-            <a:schemeClr val="accent1"/>
-          </a:effectRef>
-          <a:fontRef idx="minor">
-            <a:schemeClr val="lt1"/>
-          </a:fontRef>
-        </p:style>
-        <p:txBody>
-          <a:bodyPr rtlCol="0" anchor="ctr"/>
-          <a:lstStyle/>
-          <a:p>
-            <a:pPr algn="ctr"/>
-          </a:p>
-        </p:txBody>
-      </p:sp>
-      <p:sp>
-        <p:nvSpPr>
-          <p:cNvPr id="4" name="TextBox 3"/>
-          <p:cNvSpPr txBox="1"/>
-          <p:nvPr/>
-        </p:nvSpPr>
-        <p:spPr>
-          <a:xfrm>
-            <a:off x="548640" y="146304"/>
-            <a:ext cx="11094415" cy="640080"/>
-          </a:xfrm>
-          <a:prstGeom prst="rect">
-            <a:avLst/>
-          </a:prstGeom>
-          <a:noFill/>
-        </p:spPr>
-        <p:txBody>
-          <a:bodyPr wrap="square">
-            <a:spAutoFit/>
-          </a:bodyPr>
-          <a:lstStyle/>
-          <a:p>
-            <a:pPr>
-              <a:defRPr sz="3000" b="1">
-                <a:solidFill>
-                  <a:srgbClr val="FFFFFF"/>
-                </a:solidFill>
-                <a:latin typeface="Calibri"/>
-              </a:defRPr>
-            </a:pPr>
-            <a:r>
-              <a:t>Results — accuracy by attack type</a:t>
-            </a:r>
-          </a:p>
-        </p:txBody>
-      </p:sp>
-      <p:sp>
-        <p:nvSpPr>
-          <p:cNvPr id="5" name="TextBox 4"/>
-          <p:cNvSpPr txBox="1"/>
-          <p:nvPr/>
-        </p:nvSpPr>
-        <p:spPr>
-          <a:xfrm>
-            <a:off x="548640" y="658368"/>
-            <a:ext cx="11094415" cy="365760"/>
-          </a:xfrm>
-          <a:prstGeom prst="rect">
-            <a:avLst/>
-          </a:prstGeom>
-          <a:noFill/>
-        </p:spPr>
-        <p:txBody>
-          <a:bodyPr wrap="none">
-            <a:spAutoFit/>
-          </a:bodyPr>
-          <a:lstStyle/>
-          <a:p>
-            <a:pPr>
-              <a:defRPr sz="1300">
-                <a:solidFill>
-                  <a:srgbClr val="CBD5E1"/>
-                </a:solidFill>
-                <a:latin typeface="Calibri"/>
-              </a:defRPr>
-            </a:pPr>
-            <a:r>
-              <a:t>Streamed eval predictions, near-perfect on most TTS/VC systems</a:t>
-            </a:r>
-          </a:p>
-        </p:txBody>
-      </p:sp>
-      <p:sp>
-        <p:nvSpPr>
-          <p:cNvPr id="6" name="TextBox 5"/>
-          <p:cNvSpPr txBox="1"/>
-          <p:nvPr/>
-        </p:nvSpPr>
-        <p:spPr>
-          <a:xfrm>
-            <a:off x="11368735" y="6473952"/>
-            <a:ext cx="548640" cy="292608"/>
-          </a:xfrm>
-          <a:prstGeom prst="rect">
-            <a:avLst/>
-          </a:prstGeom>
-          <a:noFill/>
-        </p:spPr>
-        <p:txBody>
-          <a:bodyPr wrap="square">
-            <a:spAutoFit/>
-          </a:bodyPr>
-          <a:lstStyle/>
-          <a:p>
-            <a:pPr algn="r">
-              <a:defRPr sz="1100" b="0">
-                <a:solidFill>
-                  <a:srgbClr val="64748B"/>
-                </a:solidFill>
-                <a:latin typeface="Calibri"/>
-              </a:defRPr>
-            </a:pPr>
-            <a:r>
-              <a:t>8</a:t>
-            </a:r>
-          </a:p>
-        </p:txBody>
-      </p:sp>
-      <p:pic>
-        <p:nvPicPr>
-          <p:cNvPr id="7" name="Picture 6" descr="accuracy_by_attack.png"/>
-          <p:cNvPicPr>
-            <a:picLocks noChangeAspect="1"/>
-          </p:cNvPicPr>
-          <p:nvPr/>
-        </p:nvPicPr>
-        <p:blipFill>
-          <a:blip r:embed="rId2"/>
-          <a:stretch>
-            <a:fillRect/>
-          </a:stretch>
-        </p:blipFill>
-        <p:spPr>
-          <a:xfrm>
-            <a:off x="1203807" y="1417320"/>
-            <a:ext cx="9784080" cy="4892040"/>
-          </a:xfrm>
-          <a:prstGeom prst="rect">
-            <a:avLst/>
-          </a:prstGeom>
-        </p:spPr>
-      </p:pic>
     </p:spTree>
   </p:cSld>
   <p:clrMapOvr>

--- a/docs/slides/slides.pptx
+++ b/docs/slides/slides.pptx
@@ -3311,6 +3311,42 @@
           </a:p>
         </p:txBody>
       </p:sp>
+      <p:sp>
+        <p:nvSpPr>
+          <p:cNvPr id="7" name="TextBox 6"/>
+          <p:cNvSpPr txBox="1"/>
+          <p:nvPr/>
+        </p:nvSpPr>
+        <p:spPr>
+          <a:xfrm>
+            <a:off x="914400" y="5806440"/>
+            <a:ext cx="10332720" cy="457200"/>
+          </a:xfrm>
+          <a:prstGeom prst="rect">
+            <a:avLst/>
+          </a:prstGeom>
+          <a:noFill/>
+        </p:spPr>
+        <p:txBody>
+          <a:bodyPr wrap="square">
+            <a:spAutoFit/>
+          </a:bodyPr>
+          <a:lstStyle/>
+          <a:p>
+            <a:pPr algn="l">
+              <a:defRPr sz="1700" b="0">
+                <a:solidFill>
+                  <a:srgbClr val="FFFFFF"/>
+                </a:solidFill>
+                <a:latin typeface="Calibri"/>
+              </a:defRPr>
+            </a:pPr>
+            <a:r>
+              <a:t>Beny Rojanski  ·  Renana Chaba  ·  Hadar Baum</a:t>
+            </a:r>
+          </a:p>
+        </p:txBody>
+      </p:sp>
     </p:spTree>
   </p:cSld>
   <p:clrMapOvr>
@@ -3904,7 +3940,7 @@
               </a:defRPr>
             </a:pPr>
             <a:r>
-              <a:t>Results — the accuracy paradox, found and fixed</a:t>
+              <a:t>Results on dev — the accuracy paradox, found and fixed</a:t>
             </a:r>
           </a:p>
         </p:txBody>
@@ -4410,7 +4446,7 @@
               </a:defRPr>
             </a:pPr>
             <a:r>
-              <a:t>•  Independently re-confirmed on live Kafka-streamed eval data, not just the dev set it was tuned on — bonafide accuracy went 29.7% → 91.5% on the streamed sample too.</a:t>
+              <a:t>•  This same fix is re-confirmed further on, on live Kafka-streamed eval data — not only on the dev set the threshold was chosen from. See the streamed-eval results later in the deck.</a:t>
             </a:r>
           </a:p>
         </p:txBody>
@@ -4560,7 +4596,7 @@
               </a:defRPr>
             </a:pPr>
             <a:r>
-              <a:t>Pipeline stage 5 - Insights</a:t>
+              <a:t>Results on dev — ROC curve &amp; what the model learned</a:t>
             </a:r>
           </a:p>
         </p:txBody>
@@ -4568,42 +4604,6 @@
       <p:sp>
         <p:nvSpPr>
           <p:cNvPr id="5" name="TextBox 4"/>
-          <p:cNvSpPr txBox="1"/>
-          <p:nvPr/>
-        </p:nvSpPr>
-        <p:spPr>
-          <a:xfrm>
-            <a:off x="548640" y="658368"/>
-            <a:ext cx="11094415" cy="365760"/>
-          </a:xfrm>
-          <a:prstGeom prst="rect">
-            <a:avLst/>
-          </a:prstGeom>
-          <a:noFill/>
-        </p:spPr>
-        <p:txBody>
-          <a:bodyPr wrap="none">
-            <a:spAutoFit/>
-          </a:bodyPr>
-          <a:lstStyle/>
-          <a:p>
-            <a:pPr>
-              <a:defRPr sz="1300">
-                <a:solidFill>
-                  <a:srgbClr val="CBD5E1"/>
-                </a:solidFill>
-                <a:latin typeface="Calibri"/>
-              </a:defRPr>
-            </a:pPr>
-            <a:r>
-              <a:t>insights.py — Elasticsearch aggregations -&gt; charts + RESULTS.md</a:t>
-            </a:r>
-          </a:p>
-        </p:txBody>
-      </p:sp>
-      <p:sp>
-        <p:nvSpPr>
-          <p:cNvPr id="6" name="TextBox 5"/>
           <p:cNvSpPr txBox="1"/>
           <p:nvPr/>
         </p:nvSpPr>
@@ -4637,16 +4637,64 @@
           </a:p>
         </p:txBody>
       </p:sp>
-      <p:sp>
-        <p:nvSpPr>
-          <p:cNvPr id="7" name="TextBox 6"/>
+      <p:pic>
+        <p:nvPicPr>
+          <p:cNvPr id="6" name="Picture 5" descr="roc_curve.png"/>
+          <p:cNvPicPr>
+            <a:picLocks noChangeAspect="1"/>
+          </p:cNvPicPr>
+          <p:nvPr/>
+        </p:nvPicPr>
+        <p:blipFill>
+          <a:blip r:embed="rId2"/>
+          <a:stretch>
+            <a:fillRect/>
+          </a:stretch>
+        </p:blipFill>
+        <p:spPr>
+          <a:xfrm>
+            <a:off x="807643" y="1417320"/>
+            <a:ext cx="4892040" cy="4892040"/>
+          </a:xfrm>
+          <a:prstGeom prst="rect">
+            <a:avLst/>
+          </a:prstGeom>
+        </p:spPr>
+      </p:pic>
+      <p:pic>
+        <p:nvPicPr>
+          <p:cNvPr id="7" name="Picture 6" descr="feature_importance.png"/>
+          <p:cNvPicPr>
+            <a:picLocks noChangeAspect="1"/>
+          </p:cNvPicPr>
+          <p:nvPr/>
+        </p:nvPicPr>
+        <p:blipFill>
+          <a:blip r:embed="rId3"/>
+          <a:stretch>
+            <a:fillRect/>
+          </a:stretch>
+        </p:blipFill>
+        <p:spPr>
+          <a:xfrm>
+            <a:off x="6233007" y="2059991"/>
+            <a:ext cx="5410047" cy="3606698"/>
+          </a:xfrm>
+          <a:prstGeom prst="rect">
+            <a:avLst/>
+          </a:prstGeom>
+        </p:spPr>
+      </p:pic>
+      <p:sp>
+        <p:nvSpPr>
+          <p:cNvPr id="8" name="TextBox 7"/>
           <p:cNvSpPr txBox="1"/>
           <p:nvPr/>
         </p:nvSpPr>
         <p:spPr>
           <a:xfrm>
-            <a:off x="548640" y="1417320"/>
-            <a:ext cx="11094415" cy="4983480"/>
+            <a:off x="548640" y="6400800"/>
+            <a:ext cx="11094415" cy="365760"/>
           </a:xfrm>
           <a:prstGeom prst="rect">
             <a:avLst/>
@@ -4659,67 +4707,16 @@
           </a:bodyPr>
           <a:lstStyle/>
           <a:p>
-            <a:pPr>
-              <a:spcAft>
-                <a:spcPts val="1200"/>
-              </a:spcAft>
-              <a:defRPr sz="1700">
-                <a:solidFill>
-                  <a:srgbClr val="1A202C"/>
-                </a:solidFill>
-                <a:latin typeface="Calibri"/>
-              </a:defRPr>
-            </a:pPr>
-            <a:r>
-              <a:t>•  Runs after the streaming consumer has written predictions — every number here is a live Elasticsearch aggregation query, nothing hand-typed or invented.</a:t>
-            </a:r>
-          </a:p>
-          <a:p>
-            <a:pPr>
-              <a:spcAft>
-                <a:spcPts val="1200"/>
-              </a:spcAft>
-              <a:defRPr sz="1700">
-                <a:solidFill>
-                  <a:srgbClr val="1A202C"/>
-                </a:solidFill>
-                <a:latin typeface="Calibri"/>
-              </a:defRPr>
-            </a:pPr>
-            <a:r>
-              <a:t>•  Computes overall and per-attack-type (A01–A19) detection accuracy, a confusion matrix, a confidence histogram, and class balance.</a:t>
-            </a:r>
-          </a:p>
-          <a:p>
-            <a:pPr>
-              <a:spcAft>
-                <a:spcPts val="1200"/>
-              </a:spcAft>
-              <a:defRPr sz="1700">
-                <a:solidFill>
-                  <a:srgbClr val="1A202C"/>
-                </a:solidFill>
-                <a:latin typeface="Calibri"/>
-              </a:defRPr>
-            </a:pPr>
-            <a:r>
-              <a:t>•  Writes both a markdown report (docs/RESULTS.md) and the PNG charts /dashboard reuses — safe to re-run any time after a pipeline run (sample or full-scale) to regenerate real results.</a:t>
-            </a:r>
-          </a:p>
-          <a:p>
-            <a:pPr>
-              <a:spcAft>
-                <a:spcPts val="1200"/>
-              </a:spcAft>
-              <a:defRPr sz="1700">
-                <a:solidFill>
-                  <a:srgbClr val="1A202C"/>
-                </a:solidFill>
-                <a:latin typeface="Calibri"/>
-              </a:defRPr>
-            </a:pPr>
-            <a:r>
-              <a:t>•  The confusion matrix, confidence histogram, and accuracy-by-attack charts on the next slides are this script's direct output, not hand-drawn.</a:t>
+            <a:pPr algn="ctr">
+              <a:defRPr sz="1200" b="0">
+                <a:solidFill>
+                  <a:srgbClr val="64748B"/>
+                </a:solidFill>
+                <a:latin typeface="Calibri"/>
+              </a:defRPr>
+            </a:pPr>
+            <a:r>
+              <a:t>Both from the dev partition. Left: both candidate models, deployed model's EER point marked. Right: top acoustic features — MFCC variance dominates.</a:t>
             </a:r>
           </a:p>
         </p:txBody>
@@ -4869,7 +4866,7 @@
               </a:defRPr>
             </a:pPr>
             <a:r>
-              <a:t>Results — ROC curve &amp; confusion matrix</a:t>
+              <a:t>AI capability 2 — embeddings &amp; semantic search</a:t>
             </a:r>
           </a:p>
         </p:txBody>
@@ -4910,64 +4907,16 @@
           </a:p>
         </p:txBody>
       </p:sp>
-      <p:pic>
-        <p:nvPicPr>
-          <p:cNvPr id="6" name="Picture 5" descr="roc_curve.png"/>
-          <p:cNvPicPr>
-            <a:picLocks noChangeAspect="1"/>
-          </p:cNvPicPr>
-          <p:nvPr/>
-        </p:nvPicPr>
-        <p:blipFill>
-          <a:blip r:embed="rId2"/>
-          <a:stretch>
-            <a:fillRect/>
-          </a:stretch>
-        </p:blipFill>
-        <p:spPr>
-          <a:xfrm>
-            <a:off x="807643" y="1417320"/>
-            <a:ext cx="4892040" cy="4892040"/>
-          </a:xfrm>
-          <a:prstGeom prst="rect">
-            <a:avLst/>
-          </a:prstGeom>
-        </p:spPr>
-      </p:pic>
-      <p:pic>
-        <p:nvPicPr>
-          <p:cNvPr id="7" name="Picture 6" descr="confusion_matrix.png"/>
-          <p:cNvPicPr>
-            <a:picLocks noChangeAspect="1"/>
-          </p:cNvPicPr>
-          <p:nvPr/>
-        </p:nvPicPr>
-        <p:blipFill>
-          <a:blip r:embed="rId3"/>
-          <a:stretch>
-            <a:fillRect/>
-          </a:stretch>
-        </p:blipFill>
-        <p:spPr>
-          <a:xfrm>
-            <a:off x="6492010" y="1417320"/>
-            <a:ext cx="4892040" cy="4892040"/>
-          </a:xfrm>
-          <a:prstGeom prst="rect">
-            <a:avLst/>
-          </a:prstGeom>
-        </p:spPr>
-      </p:pic>
-      <p:sp>
-        <p:nvSpPr>
-          <p:cNvPr id="8" name="TextBox 7"/>
+      <p:sp>
+        <p:nvSpPr>
+          <p:cNvPr id="6" name="TextBox 5"/>
           <p:cNvSpPr txBox="1"/>
           <p:nvPr/>
         </p:nvSpPr>
         <p:spPr>
           <a:xfrm>
-            <a:off x="548640" y="6400800"/>
-            <a:ext cx="11094415" cy="365760"/>
+            <a:off x="548640" y="1417320"/>
+            <a:ext cx="11094415" cy="4983480"/>
           </a:xfrm>
           <a:prstGeom prst="rect">
             <a:avLst/>
@@ -4980,16 +4929,67 @@
           </a:bodyPr>
           <a:lstStyle/>
           <a:p>
-            <a:pPr algn="ctr">
-              <a:defRPr sz="1200" b="0">
-                <a:solidFill>
-                  <a:srgbClr val="64748B"/>
-                </a:solidFill>
-                <a:latin typeface="Calibri"/>
-              </a:defRPr>
-            </a:pPr>
-            <a:r>
-              <a:t>Left: both candidate models, deployed model's EER point marked. Right: streamed eval predictions.</a:t>
+            <a:pPr>
+              <a:spcAft>
+                <a:spcPts val="1200"/>
+              </a:spcAft>
+              <a:defRPr sz="1900">
+                <a:solidFill>
+                  <a:srgbClr val="1A202C"/>
+                </a:solidFill>
+                <a:latin typeface="Calibri"/>
+              </a:defRPr>
+            </a:pPr>
+            <a:r>
+              <a:t>•  The same acoustic feature vectors double as embeddings — no separate embedding model needed.</a:t>
+            </a:r>
+          </a:p>
+          <a:p>
+            <a:pPr>
+              <a:spcAft>
+                <a:spcPts val="1200"/>
+              </a:spcAft>
+              <a:defRPr sz="1900">
+                <a:solidFill>
+                  <a:srgbClr val="1A202C"/>
+                </a:solidFill>
+                <a:latin typeface="Calibri"/>
+              </a:defRPr>
+            </a:pPr>
+            <a:r>
+              <a:t>•  Standardized (zero mean, unit variance) so cosine similarity isn't dominated by whichever feature happens to have the largest raw scale.</a:t>
+            </a:r>
+          </a:p>
+          <a:p>
+            <a:pPr>
+              <a:spcAft>
+                <a:spcPts val="1200"/>
+              </a:spcAft>
+              <a:defRPr sz="1900">
+                <a:solidFill>
+                  <a:srgbClr val="1A202C"/>
+                </a:solidFill>
+                <a:latin typeface="Calibri"/>
+              </a:defRPr>
+            </a:pPr>
+            <a:r>
+              <a:t>•  Indexed into Elasticsearch as dense_vector fields, added to the existing index in place (a mapping update, not a reindex — the 50k+ documents were already there).</a:t>
+            </a:r>
+          </a:p>
+          <a:p>
+            <a:pPr>
+              <a:spcAft>
+                <a:spcPts val="1200"/>
+              </a:spcAft>
+              <a:defRPr sz="1900">
+                <a:solidFill>
+                  <a:srgbClr val="1A202C"/>
+                </a:solidFill>
+                <a:latin typeface="Calibri"/>
+              </a:defRPr>
+            </a:pPr>
+            <a:r>
+              <a:t>•  Powers /classify's "most acoustically similar training clips" — k-NN search, playable in the browser, replacing a keyword match with genuine semantic search.</a:t>
             </a:r>
           </a:p>
         </p:txBody>
@@ -5139,7 +5139,7 @@
               </a:defRPr>
             </a:pPr>
             <a:r>
-              <a:t>Results — what the model learned, and how sure it is</a:t>
+              <a:t>AI capability 3 — streaming enrichment</a:t>
             </a:r>
           </a:p>
         </p:txBody>
@@ -5147,6 +5147,42 @@
       <p:sp>
         <p:nvSpPr>
           <p:cNvPr id="5" name="TextBox 4"/>
+          <p:cNvSpPr txBox="1"/>
+          <p:nvPr/>
+        </p:nvSpPr>
+        <p:spPr>
+          <a:xfrm>
+            <a:off x="548640" y="658368"/>
+            <a:ext cx="11094415" cy="365760"/>
+          </a:xfrm>
+          <a:prstGeom prst="rect">
+            <a:avLst/>
+          </a:prstGeom>
+          <a:noFill/>
+        </p:spPr>
+        <p:txBody>
+          <a:bodyPr wrap="none">
+            <a:spAutoFit/>
+          </a:bodyPr>
+          <a:lstStyle/>
+          <a:p>
+            <a:pPr>
+              <a:defRPr sz="1300">
+                <a:solidFill>
+                  <a:srgbClr val="CBD5E1"/>
+                </a:solidFill>
+                <a:latin typeface="Calibri"/>
+              </a:defRPr>
+            </a:pPr>
+            <a:r>
+              <a:t>Kafka producer/consumer, near-real-time scoring</a:t>
+            </a:r>
+          </a:p>
+        </p:txBody>
+      </p:sp>
+      <p:sp>
+        <p:nvSpPr>
+          <p:cNvPr id="6" name="TextBox 5"/>
           <p:cNvSpPr txBox="1"/>
           <p:nvPr/>
         </p:nvSpPr>
@@ -5180,64 +5216,16 @@
           </a:p>
         </p:txBody>
       </p:sp>
-      <p:pic>
-        <p:nvPicPr>
-          <p:cNvPr id="6" name="Picture 5" descr="feature_importance.png"/>
-          <p:cNvPicPr>
-            <a:picLocks noChangeAspect="1"/>
-          </p:cNvPicPr>
-          <p:nvPr/>
-        </p:nvPicPr>
-        <p:blipFill>
-          <a:blip r:embed="rId2"/>
-          <a:stretch>
-            <a:fillRect/>
-          </a:stretch>
-        </p:blipFill>
-        <p:spPr>
-          <a:xfrm>
-            <a:off x="548640" y="2059991"/>
-            <a:ext cx="5410047" cy="3606698"/>
-          </a:xfrm>
-          <a:prstGeom prst="rect">
-            <a:avLst/>
-          </a:prstGeom>
-        </p:spPr>
-      </p:pic>
-      <p:pic>
-        <p:nvPicPr>
-          <p:cNvPr id="7" name="Picture 6" descr="confidence_histogram.png"/>
-          <p:cNvPicPr>
-            <a:picLocks noChangeAspect="1"/>
-          </p:cNvPicPr>
-          <p:nvPr/>
-        </p:nvPicPr>
-        <p:blipFill>
-          <a:blip r:embed="rId3"/>
-          <a:stretch>
-            <a:fillRect/>
-          </a:stretch>
-        </p:blipFill>
-        <p:spPr>
-          <a:xfrm>
-            <a:off x="6233007" y="2059991"/>
-            <a:ext cx="5410047" cy="3606698"/>
-          </a:xfrm>
-          <a:prstGeom prst="rect">
-            <a:avLst/>
-          </a:prstGeom>
-        </p:spPr>
-      </p:pic>
-      <p:sp>
-        <p:nvSpPr>
-          <p:cNvPr id="8" name="TextBox 7"/>
+      <p:sp>
+        <p:nvSpPr>
+          <p:cNvPr id="7" name="TextBox 6"/>
           <p:cNvSpPr txBox="1"/>
           <p:nvPr/>
         </p:nvSpPr>
         <p:spPr>
           <a:xfrm>
-            <a:off x="548640" y="6400800"/>
-            <a:ext cx="11094415" cy="365760"/>
+            <a:off x="548640" y="1417320"/>
+            <a:ext cx="11094415" cy="4983480"/>
           </a:xfrm>
           <a:prstGeom prst="rect">
             <a:avLst/>
@@ -5250,16 +5238,83 @@
           </a:bodyPr>
           <a:lstStyle/>
           <a:p>
-            <a:pPr algn="ctr">
-              <a:defRPr sz="1200" b="0">
-                <a:solidFill>
-                  <a:srgbClr val="64748B"/>
-                </a:solidFill>
-                <a:latin typeface="Calibri"/>
-              </a:defRPr>
-            </a:pPr>
-            <a:r>
-              <a:t>Left: top acoustic features (MFCC variance dominates). Right: confidence, correct vs. incorrect calls.</a:t>
+            <a:pPr>
+              <a:spcAft>
+                <a:spcPts val="1200"/>
+              </a:spcAft>
+              <a:defRPr sz="1900">
+                <a:solidFill>
+                  <a:srgbClr val="1A202C"/>
+                </a:solidFill>
+                <a:latin typeface="Calibri"/>
+              </a:defRPr>
+            </a:pPr>
+            <a:r>
+              <a:t>•  Producer replays eval-set utterance events (a MinIO key, not the audio itself).</a:t>
+            </a:r>
+          </a:p>
+          <a:p>
+            <a:pPr>
+              <a:spcAft>
+                <a:spcPts val="1200"/>
+              </a:spcAft>
+              <a:defRPr sz="1900">
+                <a:solidFill>
+                  <a:srgbClr val="1A202C"/>
+                </a:solidFill>
+                <a:latin typeface="Calibri"/>
+              </a:defRPr>
+            </a:pPr>
+            <a:r>
+              <a:t>•  Consumer fetches the clip, extracts features, scores it at the deployed EER threshold, and writes an enriched prediction to Elasticsearch — one document per utterance, live.</a:t>
+            </a:r>
+          </a:p>
+          <a:p>
+            <a:pPr>
+              <a:spcAft>
+                <a:spcPts val="1200"/>
+              </a:spcAft>
+              <a:defRPr sz="1900">
+                <a:solidFill>
+                  <a:srgbClr val="1A202C"/>
+                </a:solidFill>
+                <a:latin typeface="Calibri"/>
+              </a:defRPr>
+            </a:pPr>
+            <a:r>
+              <a:t>•  Same feature-extraction and model code as the batch job and the web app — one implementation applied three ways, not three separate things to maintain and defend.</a:t>
+            </a:r>
+          </a:p>
+          <a:p>
+            <a:pPr>
+              <a:spcAft>
+                <a:spcPts val="1200"/>
+              </a:spcAft>
+              <a:defRPr sz="1900">
+                <a:solidFill>
+                  <a:srgbClr val="1A202C"/>
+                </a:solidFill>
+                <a:latin typeface="Calibri"/>
+              </a:defRPr>
+            </a:pPr>
+            <a:r>
+              <a:t>•  A named consumer group tracks offset, so re-running resumes instead of re-scoring.</a:t>
+            </a:r>
+          </a:p>
+          <a:p>
+            <a:pPr>
+              <a:spcAft>
+                <a:spcPts val="1200"/>
+              </a:spcAft>
+              <a:defRPr sz="1900">
+                <a:solidFill>
+                  <a:srgbClr val="1A202C"/>
+                </a:solidFill>
+                <a:latin typeface="Calibri"/>
+              </a:defRPr>
+            </a:pPr>
+            <a:r>
+              <a:t>•  Everything on the next three slides is scored here, on the eval partition — attacks A07–A19, synthesis systems the model never saw during training.</a:t>
             </a:r>
           </a:p>
         </p:txBody>
@@ -5409,7 +5464,7 @@
               </a:defRPr>
             </a:pPr>
             <a:r>
-              <a:t>Results — accuracy by attack type</a:t>
+              <a:t>Pipeline stage 5 - Insights</a:t>
             </a:r>
           </a:p>
         </p:txBody>
@@ -5445,7 +5500,7 @@
               </a:defRPr>
             </a:pPr>
             <a:r>
-              <a:t>Streamed eval predictions, near-perfect on most TTS/VC systems</a:t>
+              <a:t>insights.py — Elasticsearch aggregations -&gt; charts + RESULTS.md</a:t>
             </a:r>
           </a:p>
         </p:txBody>
@@ -5486,30 +5541,93 @@
           </a:p>
         </p:txBody>
       </p:sp>
-      <p:pic>
-        <p:nvPicPr>
-          <p:cNvPr id="7" name="Picture 6" descr="accuracy_by_attack.png"/>
-          <p:cNvPicPr>
-            <a:picLocks noChangeAspect="1"/>
-          </p:cNvPicPr>
-          <p:nvPr/>
-        </p:nvPicPr>
-        <p:blipFill>
-          <a:blip r:embed="rId2"/>
-          <a:stretch>
-            <a:fillRect/>
-          </a:stretch>
-        </p:blipFill>
-        <p:spPr>
-          <a:xfrm>
-            <a:off x="1203807" y="1417320"/>
-            <a:ext cx="9784080" cy="4892040"/>
-          </a:xfrm>
-          <a:prstGeom prst="rect">
-            <a:avLst/>
-          </a:prstGeom>
-        </p:spPr>
-      </p:pic>
+      <p:sp>
+        <p:nvSpPr>
+          <p:cNvPr id="7" name="TextBox 6"/>
+          <p:cNvSpPr txBox="1"/>
+          <p:nvPr/>
+        </p:nvSpPr>
+        <p:spPr>
+          <a:xfrm>
+            <a:off x="548640" y="1417320"/>
+            <a:ext cx="11094415" cy="4983480"/>
+          </a:xfrm>
+          <a:prstGeom prst="rect">
+            <a:avLst/>
+          </a:prstGeom>
+          <a:noFill/>
+        </p:spPr>
+        <p:txBody>
+          <a:bodyPr wrap="square">
+            <a:spAutoFit/>
+          </a:bodyPr>
+          <a:lstStyle/>
+          <a:p>
+            <a:pPr>
+              <a:spcAft>
+                <a:spcPts val="1200"/>
+              </a:spcAft>
+              <a:defRPr sz="1700">
+                <a:solidFill>
+                  <a:srgbClr val="1A202C"/>
+                </a:solidFill>
+                <a:latin typeface="Calibri"/>
+              </a:defRPr>
+            </a:pPr>
+            <a:r>
+              <a:t>•  Runs after the streaming consumer has written predictions — every number here is a live Elasticsearch aggregation query, nothing hand-typed or invented.</a:t>
+            </a:r>
+          </a:p>
+          <a:p>
+            <a:pPr>
+              <a:spcAft>
+                <a:spcPts val="1200"/>
+              </a:spcAft>
+              <a:defRPr sz="1700">
+                <a:solidFill>
+                  <a:srgbClr val="1A202C"/>
+                </a:solidFill>
+                <a:latin typeface="Calibri"/>
+              </a:defRPr>
+            </a:pPr>
+            <a:r>
+              <a:t>•  Computes balanced and overall detection accuracy, per-attack-type accuracy, a confusion matrix, a confidence histogram, and class balance.</a:t>
+            </a:r>
+          </a:p>
+          <a:p>
+            <a:pPr>
+              <a:spcAft>
+                <a:spcPts val="1200"/>
+              </a:spcAft>
+              <a:defRPr sz="1700">
+                <a:solidFill>
+                  <a:srgbClr val="1A202C"/>
+                </a:solidFill>
+                <a:latin typeface="Calibri"/>
+              </a:defRPr>
+            </a:pPr>
+            <a:r>
+              <a:t>•  Writes both a markdown report (docs/RESULTS.md) and the PNG charts /dashboard reuses — safe to re-run any time after a pipeline run (sample or full-scale) to regenerate real results.</a:t>
+            </a:r>
+          </a:p>
+          <a:p>
+            <a:pPr>
+              <a:spcAft>
+                <a:spcPts val="1200"/>
+              </a:spcAft>
+              <a:defRPr sz="1700">
+                <a:solidFill>
+                  <a:srgbClr val="1A202C"/>
+                </a:solidFill>
+                <a:latin typeface="Calibri"/>
+              </a:defRPr>
+            </a:pPr>
+            <a:r>
+              <a:t>•  The confusion matrix, confidence histogram, and accuracy-by-attack charts on the next slides are this script's direct output, not hand-drawn. The ROC and feature-importance charts shown earlier come from train_classifier.py instead, since those need the model's own dev predictions.</a:t>
+            </a:r>
+          </a:p>
+        </p:txBody>
+      </p:sp>
     </p:spTree>
   </p:cSld>
   <p:clrMapOvr>
@@ -5655,7 +5773,7 @@
               </a:defRPr>
             </a:pPr>
             <a:r>
-              <a:t>AI capability 2 — embeddings &amp; semantic search</a:t>
+              <a:t>Results on streamed eval — confusion matrix &amp; confidence</a:t>
             </a:r>
           </a:p>
         </p:txBody>
@@ -5696,16 +5814,64 @@
           </a:p>
         </p:txBody>
       </p:sp>
-      <p:sp>
-        <p:nvSpPr>
-          <p:cNvPr id="6" name="TextBox 5"/>
+      <p:pic>
+        <p:nvPicPr>
+          <p:cNvPr id="6" name="Picture 5" descr="confusion_matrix.png"/>
+          <p:cNvPicPr>
+            <a:picLocks noChangeAspect="1"/>
+          </p:cNvPicPr>
+          <p:nvPr/>
+        </p:nvPicPr>
+        <p:blipFill>
+          <a:blip r:embed="rId2"/>
+          <a:stretch>
+            <a:fillRect/>
+          </a:stretch>
+        </p:blipFill>
+        <p:spPr>
+          <a:xfrm>
+            <a:off x="807643" y="1417320"/>
+            <a:ext cx="4892040" cy="4892040"/>
+          </a:xfrm>
+          <a:prstGeom prst="rect">
+            <a:avLst/>
+          </a:prstGeom>
+        </p:spPr>
+      </p:pic>
+      <p:pic>
+        <p:nvPicPr>
+          <p:cNvPr id="7" name="Picture 6" descr="confidence_histogram.png"/>
+          <p:cNvPicPr>
+            <a:picLocks noChangeAspect="1"/>
+          </p:cNvPicPr>
+          <p:nvPr/>
+        </p:nvPicPr>
+        <p:blipFill>
+          <a:blip r:embed="rId3"/>
+          <a:stretch>
+            <a:fillRect/>
+          </a:stretch>
+        </p:blipFill>
+        <p:spPr>
+          <a:xfrm>
+            <a:off x="6233007" y="2059991"/>
+            <a:ext cx="5410047" cy="3606698"/>
+          </a:xfrm>
+          <a:prstGeom prst="rect">
+            <a:avLst/>
+          </a:prstGeom>
+        </p:spPr>
+      </p:pic>
+      <p:sp>
+        <p:nvSpPr>
+          <p:cNvPr id="8" name="TextBox 7"/>
           <p:cNvSpPr txBox="1"/>
           <p:nvPr/>
         </p:nvSpPr>
         <p:spPr>
           <a:xfrm>
-            <a:off x="548640" y="1417320"/>
-            <a:ext cx="11094415" cy="4983480"/>
+            <a:off x="548640" y="6400800"/>
+            <a:ext cx="11094415" cy="365760"/>
           </a:xfrm>
           <a:prstGeom prst="rect">
             <a:avLst/>
@@ -5718,67 +5884,16 @@
           </a:bodyPr>
           <a:lstStyle/>
           <a:p>
-            <a:pPr>
-              <a:spcAft>
-                <a:spcPts val="1200"/>
-              </a:spcAft>
-              <a:defRPr sz="1900">
-                <a:solidFill>
-                  <a:srgbClr val="1A202C"/>
-                </a:solidFill>
-                <a:latin typeface="Calibri"/>
-              </a:defRPr>
-            </a:pPr>
-            <a:r>
-              <a:t>•  The same acoustic feature vectors double as embeddings — no separate embedding model needed.</a:t>
-            </a:r>
-          </a:p>
-          <a:p>
-            <a:pPr>
-              <a:spcAft>
-                <a:spcPts val="1200"/>
-              </a:spcAft>
-              <a:defRPr sz="1900">
-                <a:solidFill>
-                  <a:srgbClr val="1A202C"/>
-                </a:solidFill>
-                <a:latin typeface="Calibri"/>
-              </a:defRPr>
-            </a:pPr>
-            <a:r>
-              <a:t>•  Standardized (zero mean, unit variance) so cosine similarity isn't dominated by whichever feature happens to have the largest raw scale.</a:t>
-            </a:r>
-          </a:p>
-          <a:p>
-            <a:pPr>
-              <a:spcAft>
-                <a:spcPts val="1200"/>
-              </a:spcAft>
-              <a:defRPr sz="1900">
-                <a:solidFill>
-                  <a:srgbClr val="1A202C"/>
-                </a:solidFill>
-                <a:latin typeface="Calibri"/>
-              </a:defRPr>
-            </a:pPr>
-            <a:r>
-              <a:t>•  Indexed into Elasticsearch as dense_vector fields, added to the existing index in place (a mapping update, not a reindex — the 50k+ documents were already there).</a:t>
-            </a:r>
-          </a:p>
-          <a:p>
-            <a:pPr>
-              <a:spcAft>
-                <a:spcPts val="1200"/>
-              </a:spcAft>
-              <a:defRPr sz="1900">
-                <a:solidFill>
-                  <a:srgbClr val="1A202C"/>
-                </a:solidFill>
-                <a:latin typeface="Calibri"/>
-              </a:defRPr>
-            </a:pPr>
-            <a:r>
-              <a:t>•  Powers /classify's "most acoustically similar training clips" — k-NN search, playable in the browser, replacing a keyword match with genuine semantic search.</a:t>
+            <a:pPr algn="ctr">
+              <a:defRPr sz="1200" b="0">
+                <a:solidFill>
+                  <a:srgbClr val="64748B"/>
+                </a:solidFill>
+                <a:latin typeface="Calibri"/>
+              </a:defRPr>
+            </a:pPr>
+            <a:r>
+              <a:t>Both from the streamed eval predictions. Left: true vs. predicted counts. Right: confidence on correct vs. incorrect calls — some are confidently wrong.</a:t>
             </a:r>
           </a:p>
         </p:txBody>
@@ -5928,7 +6043,7 @@
               </a:defRPr>
             </a:pPr>
             <a:r>
-              <a:t>AI capability 3 — streaming enrichment</a:t>
+              <a:t>Results on streamed eval — accuracy by attack type</a:t>
             </a:r>
           </a:p>
         </p:txBody>
@@ -5964,7 +6079,7 @@
               </a:defRPr>
             </a:pPr>
             <a:r>
-              <a:t>Kafka producer/consumer, near-real-time scoring</a:t>
+              <a:t>Near-perfect on most TTS/VC systems; A17/A18/A19 are the hard ones</a:t>
             </a:r>
           </a:p>
         </p:txBody>
@@ -6007,14 +6122,98 @@
       </p:sp>
       <p:sp>
         <p:nvSpPr>
-          <p:cNvPr id="7" name="TextBox 6"/>
+          <p:cNvPr id="7" name="Rounded Rectangle 6"/>
+          <p:cNvSpPr/>
+          <p:nvPr/>
+        </p:nvSpPr>
+        <p:spPr>
+          <a:xfrm>
+            <a:off x="548640" y="1417320"/>
+            <a:ext cx="2567863" cy="1463040"/>
+          </a:xfrm>
+          <a:prstGeom prst="roundRect">
+            <a:avLst>
+              <a:gd name="adj" fmla="val 6000"/>
+            </a:avLst>
+          </a:prstGeom>
+          <a:solidFill>
+            <a:srgbClr val="FFFFFF"/>
+          </a:solidFill>
+          <a:ln w="12700">
+            <a:solidFill>
+              <a:srgbClr val="E2E8F0"/>
+            </a:solidFill>
+          </a:ln>
+          <a:effectLst/>
+        </p:spPr>
+        <p:style>
+          <a:lnRef idx="1">
+            <a:schemeClr val="accent1"/>
+          </a:lnRef>
+          <a:fillRef idx="3">
+            <a:schemeClr val="accent1"/>
+          </a:fillRef>
+          <a:effectRef idx="2">
+            <a:schemeClr val="accent1"/>
+          </a:effectRef>
+          <a:fontRef idx="minor">
+            <a:schemeClr val="lt1"/>
+          </a:fontRef>
+        </p:style>
+        <p:txBody>
+          <a:bodyPr rtlCol="0" anchor="ctr"/>
+          <a:lstStyle/>
+          <a:p>
+            <a:pPr algn="ctr"/>
+          </a:p>
+        </p:txBody>
+      </p:sp>
+      <p:sp>
+        <p:nvSpPr>
+          <p:cNvPr id="8" name="TextBox 7"/>
           <p:cNvSpPr txBox="1"/>
           <p:nvPr/>
         </p:nvSpPr>
         <p:spPr>
           <a:xfrm>
-            <a:off x="548640" y="1417320"/>
-            <a:ext cx="11094415" cy="4983480"/>
+            <a:off x="548640" y="1618488"/>
+            <a:ext cx="2567863" cy="731520"/>
+          </a:xfrm>
+          <a:prstGeom prst="rect">
+            <a:avLst/>
+          </a:prstGeom>
+          <a:noFill/>
+        </p:spPr>
+        <p:txBody>
+          <a:bodyPr wrap="none">
+            <a:spAutoFit/>
+          </a:bodyPr>
+          <a:lstStyle/>
+          <a:p>
+            <a:pPr algn="ctr">
+              <a:defRPr sz="3400" b="1">
+                <a:solidFill>
+                  <a:srgbClr val="0D9488"/>
+                </a:solidFill>
+                <a:latin typeface="Calibri"/>
+              </a:defRPr>
+            </a:pPr>
+            <a:r>
+              <a:t>89.3%</a:t>
+            </a:r>
+          </a:p>
+        </p:txBody>
+      </p:sp>
+      <p:sp>
+        <p:nvSpPr>
+          <p:cNvPr id="9" name="TextBox 8"/>
+          <p:cNvSpPr txBox="1"/>
+          <p:nvPr/>
+        </p:nvSpPr>
+        <p:spPr>
+          <a:xfrm>
+            <a:off x="640080" y="2377440"/>
+            <a:ext cx="2384983" cy="548640"/>
           </a:xfrm>
           <a:prstGeom prst="rect">
             <a:avLst/>
@@ -6027,67 +6226,488 @@
           </a:bodyPr>
           <a:lstStyle/>
           <a:p>
-            <a:pPr>
-              <a:spcAft>
-                <a:spcPts val="1200"/>
-              </a:spcAft>
-              <a:defRPr sz="1900">
-                <a:solidFill>
-                  <a:srgbClr val="1A202C"/>
-                </a:solidFill>
-                <a:latin typeface="Calibri"/>
-              </a:defRPr>
-            </a:pPr>
-            <a:r>
-              <a:t>•  Producer replays eval-set utterance events (a MinIO key, not the audio itself).</a:t>
-            </a:r>
-          </a:p>
-          <a:p>
-            <a:pPr>
-              <a:spcAft>
-                <a:spcPts val="1200"/>
-              </a:spcAft>
-              <a:defRPr sz="1900">
-                <a:solidFill>
-                  <a:srgbClr val="1A202C"/>
-                </a:solidFill>
-                <a:latin typeface="Calibri"/>
-              </a:defRPr>
-            </a:pPr>
-            <a:r>
-              <a:t>•  Consumer fetches the clip, extracts features, scores it at the deployed EER threshold, and writes an enriched prediction to Elasticsearch — one document per utterance, live.</a:t>
-            </a:r>
-          </a:p>
-          <a:p>
-            <a:pPr>
-              <a:spcAft>
-                <a:spcPts val="1200"/>
-              </a:spcAft>
-              <a:defRPr sz="1900">
-                <a:solidFill>
-                  <a:srgbClr val="1A202C"/>
-                </a:solidFill>
-                <a:latin typeface="Calibri"/>
-              </a:defRPr>
-            </a:pPr>
-            <a:r>
-              <a:t>•  Same feature-extraction and model code as the batch job and the web app — one implementation applied three ways, not three separate things to maintain and defend.</a:t>
-            </a:r>
-          </a:p>
-          <a:p>
-            <a:pPr>
-              <a:spcAft>
-                <a:spcPts val="1200"/>
-              </a:spcAft>
-              <a:defRPr sz="1900">
-                <a:solidFill>
-                  <a:srgbClr val="1A202C"/>
-                </a:solidFill>
-                <a:latin typeface="Calibri"/>
-              </a:defRPr>
-            </a:pPr>
-            <a:r>
-              <a:t>•  A named consumer group tracks offset, so re-running resumes instead of re-scoring.</a:t>
+            <a:pPr algn="ctr">
+              <a:defRPr sz="1200">
+                <a:solidFill>
+                  <a:srgbClr val="64748B"/>
+                </a:solidFill>
+                <a:latin typeface="Calibri"/>
+              </a:defRPr>
+            </a:pPr>
+            <a:r>
+              <a:t>Balanced accuracy</a:t>
+            </a:r>
+          </a:p>
+          <a:p>
+            <a:pPr algn="ctr">
+              <a:defRPr sz="1200">
+                <a:solidFill>
+                  <a:srgbClr val="64748B"/>
+                </a:solidFill>
+                <a:latin typeface="Calibri"/>
+              </a:defRPr>
+            </a:pPr>
+            <a:r>
+              <a:t>(mean of per-class recalls)</a:t>
+            </a:r>
+          </a:p>
+        </p:txBody>
+      </p:sp>
+      <p:sp>
+        <p:nvSpPr>
+          <p:cNvPr id="10" name="Rounded Rectangle 9"/>
+          <p:cNvSpPr/>
+          <p:nvPr/>
+        </p:nvSpPr>
+        <p:spPr>
+          <a:xfrm>
+            <a:off x="3390823" y="1417320"/>
+            <a:ext cx="2567863" cy="1463040"/>
+          </a:xfrm>
+          <a:prstGeom prst="roundRect">
+            <a:avLst>
+              <a:gd name="adj" fmla="val 6000"/>
+            </a:avLst>
+          </a:prstGeom>
+          <a:solidFill>
+            <a:srgbClr val="FFFFFF"/>
+          </a:solidFill>
+          <a:ln w="12700">
+            <a:solidFill>
+              <a:srgbClr val="E2E8F0"/>
+            </a:solidFill>
+          </a:ln>
+          <a:effectLst/>
+        </p:spPr>
+        <p:style>
+          <a:lnRef idx="1">
+            <a:schemeClr val="accent1"/>
+          </a:lnRef>
+          <a:fillRef idx="3">
+            <a:schemeClr val="accent1"/>
+          </a:fillRef>
+          <a:effectRef idx="2">
+            <a:schemeClr val="accent1"/>
+          </a:effectRef>
+          <a:fontRef idx="minor">
+            <a:schemeClr val="lt1"/>
+          </a:fontRef>
+        </p:style>
+        <p:txBody>
+          <a:bodyPr rtlCol="0" anchor="ctr"/>
+          <a:lstStyle/>
+          <a:p>
+            <a:pPr algn="ctr"/>
+          </a:p>
+        </p:txBody>
+      </p:sp>
+      <p:sp>
+        <p:nvSpPr>
+          <p:cNvPr id="11" name="TextBox 10"/>
+          <p:cNvSpPr txBox="1"/>
+          <p:nvPr/>
+        </p:nvSpPr>
+        <p:spPr>
+          <a:xfrm>
+            <a:off x="3390823" y="1618488"/>
+            <a:ext cx="2567863" cy="731520"/>
+          </a:xfrm>
+          <a:prstGeom prst="rect">
+            <a:avLst/>
+          </a:prstGeom>
+          <a:noFill/>
+        </p:spPr>
+        <p:txBody>
+          <a:bodyPr wrap="none">
+            <a:spAutoFit/>
+          </a:bodyPr>
+          <a:lstStyle/>
+          <a:p>
+            <a:pPr algn="ctr">
+              <a:defRPr sz="3400" b="1">
+                <a:solidFill>
+                  <a:srgbClr val="2B6CB0"/>
+                </a:solidFill>
+                <a:latin typeface="Calibri"/>
+              </a:defRPr>
+            </a:pPr>
+            <a:r>
+              <a:t>95.3%</a:t>
+            </a:r>
+          </a:p>
+        </p:txBody>
+      </p:sp>
+      <p:sp>
+        <p:nvSpPr>
+          <p:cNvPr id="12" name="TextBox 11"/>
+          <p:cNvSpPr txBox="1"/>
+          <p:nvPr/>
+        </p:nvSpPr>
+        <p:spPr>
+          <a:xfrm>
+            <a:off x="3482263" y="2377440"/>
+            <a:ext cx="2384983" cy="548640"/>
+          </a:xfrm>
+          <a:prstGeom prst="rect">
+            <a:avLst/>
+          </a:prstGeom>
+          <a:noFill/>
+        </p:spPr>
+        <p:txBody>
+          <a:bodyPr wrap="square">
+            <a:spAutoFit/>
+          </a:bodyPr>
+          <a:lstStyle/>
+          <a:p>
+            <a:pPr algn="ctr">
+              <a:defRPr sz="1200">
+                <a:solidFill>
+                  <a:srgbClr val="64748B"/>
+                </a:solidFill>
+                <a:latin typeface="Calibri"/>
+              </a:defRPr>
+            </a:pPr>
+            <a:r>
+              <a:t>Bonafide recall</a:t>
+            </a:r>
+          </a:p>
+          <a:p>
+            <a:pPr algn="ctr">
+              <a:defRPr sz="1200">
+                <a:solidFill>
+                  <a:srgbClr val="64748B"/>
+                </a:solidFill>
+                <a:latin typeface="Calibri"/>
+              </a:defRPr>
+            </a:pPr>
+            <a:r>
+              <a:t>(real human speech)</a:t>
+            </a:r>
+          </a:p>
+        </p:txBody>
+      </p:sp>
+      <p:sp>
+        <p:nvSpPr>
+          <p:cNvPr id="13" name="Rounded Rectangle 12"/>
+          <p:cNvSpPr/>
+          <p:nvPr/>
+        </p:nvSpPr>
+        <p:spPr>
+          <a:xfrm>
+            <a:off x="6233006" y="1417320"/>
+            <a:ext cx="2567863" cy="1463040"/>
+          </a:xfrm>
+          <a:prstGeom prst="roundRect">
+            <a:avLst>
+              <a:gd name="adj" fmla="val 6000"/>
+            </a:avLst>
+          </a:prstGeom>
+          <a:solidFill>
+            <a:srgbClr val="FFFFFF"/>
+          </a:solidFill>
+          <a:ln w="12700">
+            <a:solidFill>
+              <a:srgbClr val="E2E8F0"/>
+            </a:solidFill>
+          </a:ln>
+          <a:effectLst/>
+        </p:spPr>
+        <p:style>
+          <a:lnRef idx="1">
+            <a:schemeClr val="accent1"/>
+          </a:lnRef>
+          <a:fillRef idx="3">
+            <a:schemeClr val="accent1"/>
+          </a:fillRef>
+          <a:effectRef idx="2">
+            <a:schemeClr val="accent1"/>
+          </a:effectRef>
+          <a:fontRef idx="minor">
+            <a:schemeClr val="lt1"/>
+          </a:fontRef>
+        </p:style>
+        <p:txBody>
+          <a:bodyPr rtlCol="0" anchor="ctr"/>
+          <a:lstStyle/>
+          <a:p>
+            <a:pPr algn="ctr"/>
+          </a:p>
+        </p:txBody>
+      </p:sp>
+      <p:sp>
+        <p:nvSpPr>
+          <p:cNvPr id="14" name="TextBox 13"/>
+          <p:cNvSpPr txBox="1"/>
+          <p:nvPr/>
+        </p:nvSpPr>
+        <p:spPr>
+          <a:xfrm>
+            <a:off x="6233006" y="1618488"/>
+            <a:ext cx="2567863" cy="731520"/>
+          </a:xfrm>
+          <a:prstGeom prst="rect">
+            <a:avLst/>
+          </a:prstGeom>
+          <a:noFill/>
+        </p:spPr>
+        <p:txBody>
+          <a:bodyPr wrap="none">
+            <a:spAutoFit/>
+          </a:bodyPr>
+          <a:lstStyle/>
+          <a:p>
+            <a:pPr algn="ctr">
+              <a:defRPr sz="3400" b="1">
+                <a:solidFill>
+                  <a:srgbClr val="2B6CB0"/>
+                </a:solidFill>
+                <a:latin typeface="Calibri"/>
+              </a:defRPr>
+            </a:pPr>
+            <a:r>
+              <a:t>83.3%</a:t>
+            </a:r>
+          </a:p>
+        </p:txBody>
+      </p:sp>
+      <p:sp>
+        <p:nvSpPr>
+          <p:cNvPr id="15" name="TextBox 14"/>
+          <p:cNvSpPr txBox="1"/>
+          <p:nvPr/>
+        </p:nvSpPr>
+        <p:spPr>
+          <a:xfrm>
+            <a:off x="6324446" y="2377440"/>
+            <a:ext cx="2384983" cy="548640"/>
+          </a:xfrm>
+          <a:prstGeom prst="rect">
+            <a:avLst/>
+          </a:prstGeom>
+          <a:noFill/>
+        </p:spPr>
+        <p:txBody>
+          <a:bodyPr wrap="square">
+            <a:spAutoFit/>
+          </a:bodyPr>
+          <a:lstStyle/>
+          <a:p>
+            <a:pPr algn="ctr">
+              <a:defRPr sz="1200">
+                <a:solidFill>
+                  <a:srgbClr val="64748B"/>
+                </a:solidFill>
+                <a:latin typeface="Calibri"/>
+              </a:defRPr>
+            </a:pPr>
+            <a:r>
+              <a:t>Spoof recall</a:t>
+            </a:r>
+          </a:p>
+          <a:p>
+            <a:pPr algn="ctr">
+              <a:defRPr sz="1200">
+                <a:solidFill>
+                  <a:srgbClr val="64748B"/>
+                </a:solidFill>
+                <a:latin typeface="Calibri"/>
+              </a:defRPr>
+            </a:pPr>
+            <a:r>
+              <a:t>(AI-generated speech)</a:t>
+            </a:r>
+          </a:p>
+        </p:txBody>
+      </p:sp>
+      <p:sp>
+        <p:nvSpPr>
+          <p:cNvPr id="16" name="Rounded Rectangle 15"/>
+          <p:cNvSpPr/>
+          <p:nvPr/>
+        </p:nvSpPr>
+        <p:spPr>
+          <a:xfrm>
+            <a:off x="9075189" y="1417320"/>
+            <a:ext cx="2567863" cy="1463040"/>
+          </a:xfrm>
+          <a:prstGeom prst="roundRect">
+            <a:avLst>
+              <a:gd name="adj" fmla="val 6000"/>
+            </a:avLst>
+          </a:prstGeom>
+          <a:solidFill>
+            <a:srgbClr val="FFFFFF"/>
+          </a:solidFill>
+          <a:ln w="12700">
+            <a:solidFill>
+              <a:srgbClr val="E2E8F0"/>
+            </a:solidFill>
+          </a:ln>
+          <a:effectLst/>
+        </p:spPr>
+        <p:style>
+          <a:lnRef idx="1">
+            <a:schemeClr val="accent1"/>
+          </a:lnRef>
+          <a:fillRef idx="3">
+            <a:schemeClr val="accent1"/>
+          </a:fillRef>
+          <a:effectRef idx="2">
+            <a:schemeClr val="accent1"/>
+          </a:effectRef>
+          <a:fontRef idx="minor">
+            <a:schemeClr val="lt1"/>
+          </a:fontRef>
+        </p:style>
+        <p:txBody>
+          <a:bodyPr rtlCol="0" anchor="ctr"/>
+          <a:lstStyle/>
+          <a:p>
+            <a:pPr algn="ctr"/>
+          </a:p>
+        </p:txBody>
+      </p:sp>
+      <p:sp>
+        <p:nvSpPr>
+          <p:cNvPr id="17" name="TextBox 16"/>
+          <p:cNvSpPr txBox="1"/>
+          <p:nvPr/>
+        </p:nvSpPr>
+        <p:spPr>
+          <a:xfrm>
+            <a:off x="9075189" y="1618488"/>
+            <a:ext cx="2567863" cy="731520"/>
+          </a:xfrm>
+          <a:prstGeom prst="rect">
+            <a:avLst/>
+          </a:prstGeom>
+          <a:noFill/>
+        </p:spPr>
+        <p:txBody>
+          <a:bodyPr wrap="none">
+            <a:spAutoFit/>
+          </a:bodyPr>
+          <a:lstStyle/>
+          <a:p>
+            <a:pPr algn="ctr">
+              <a:defRPr sz="3400" b="1">
+                <a:solidFill>
+                  <a:srgbClr val="DC2626"/>
+                </a:solidFill>
+                <a:latin typeface="Calibri"/>
+              </a:defRPr>
+            </a:pPr>
+            <a:r>
+              <a:t>88.2%</a:t>
+            </a:r>
+          </a:p>
+        </p:txBody>
+      </p:sp>
+      <p:sp>
+        <p:nvSpPr>
+          <p:cNvPr id="18" name="TextBox 17"/>
+          <p:cNvSpPr txBox="1"/>
+          <p:nvPr/>
+        </p:nvSpPr>
+        <p:spPr>
+          <a:xfrm>
+            <a:off x="9166629" y="2377440"/>
+            <a:ext cx="2384983" cy="548640"/>
+          </a:xfrm>
+          <a:prstGeom prst="rect">
+            <a:avLst/>
+          </a:prstGeom>
+          <a:noFill/>
+        </p:spPr>
+        <p:txBody>
+          <a:bodyPr wrap="square">
+            <a:spAutoFit/>
+          </a:bodyPr>
+          <a:lstStyle/>
+          <a:p>
+            <a:pPr algn="ctr">
+              <a:defRPr sz="1200">
+                <a:solidFill>
+                  <a:srgbClr val="64748B"/>
+                </a:solidFill>
+                <a:latin typeface="Calibri"/>
+              </a:defRPr>
+            </a:pPr>
+            <a:r>
+              <a:t>Always-spoof baseline</a:t>
+            </a:r>
+          </a:p>
+          <a:p>
+            <a:pPr algn="ctr">
+              <a:defRPr sz="1200">
+                <a:solidFill>
+                  <a:srgbClr val="64748B"/>
+                </a:solidFill>
+                <a:latin typeface="Calibri"/>
+              </a:defRPr>
+            </a:pPr>
+            <a:r>
+              <a:t>beats raw accuracy (84.8%)</a:t>
+            </a:r>
+          </a:p>
+        </p:txBody>
+      </p:sp>
+      <p:pic>
+        <p:nvPicPr>
+          <p:cNvPr id="19" name="Picture 18" descr="accuracy_by_attack.png"/>
+          <p:cNvPicPr>
+            <a:picLocks noChangeAspect="1"/>
+          </p:cNvPicPr>
+          <p:nvPr/>
+        </p:nvPicPr>
+        <p:blipFill>
+          <a:blip r:embed="rId2"/>
+          <a:stretch>
+            <a:fillRect/>
+          </a:stretch>
+        </p:blipFill>
+        <p:spPr>
+          <a:xfrm>
+            <a:off x="2895447" y="3108960"/>
+            <a:ext cx="6400800" cy="3200400"/>
+          </a:xfrm>
+          <a:prstGeom prst="rect">
+            <a:avLst/>
+          </a:prstGeom>
+        </p:spPr>
+      </p:pic>
+      <p:sp>
+        <p:nvSpPr>
+          <p:cNvPr id="20" name="TextBox 19"/>
+          <p:cNvSpPr txBox="1"/>
+          <p:nvPr/>
+        </p:nvSpPr>
+        <p:spPr>
+          <a:xfrm>
+            <a:off x="548640" y="6400800"/>
+            <a:ext cx="11094415" cy="365760"/>
+          </a:xfrm>
+          <a:prstGeom prst="rect">
+            <a:avLst/>
+          </a:prstGeom>
+          <a:noFill/>
+        </p:spPr>
+        <p:txBody>
+          <a:bodyPr wrap="square">
+            <a:spAutoFit/>
+          </a:bodyPr>
+          <a:lstStyle/>
+          <a:p>
+            <a:pPr algn="ctr">
+              <a:defRPr sz="1200" b="0">
+                <a:solidFill>
+                  <a:srgbClr val="64748B"/>
+                </a:solidFill>
+                <a:latin typeface="Calibri"/>
+              </a:defRPr>
+            </a:pPr>
+            <a:r>
+              <a:t>All figures from the 2000 streamed eval predictions (attacks A07–A19, unseen during training).</a:t>
             </a:r>
           </a:p>
         </p:txBody>
@@ -6721,7 +7341,7 @@
               </a:defRPr>
             </a:pPr>
             <a:r>
-              <a:t>•  Windows + Spark: worker Python resolution, path-with-spaces, and a Docker Desktop networking quirk all broke Spark's driver↔executor RPC — diagnosed and fixed, not hidden.</a:t>
+              <a:t>•  Windows + Spark: worker Python resolution, a path with spaces, a pyspark 3.5.1 / Python 3.12 incompatibility, and a removed distutils — four environment bugs, none in our own logic, all diagnosed and fixed rather than worked around.</a:t>
             </a:r>
           </a:p>
           <a:p>
@@ -7221,7 +7841,7 @@
         </p:nvSpPr>
         <p:spPr>
           <a:xfrm>
-            <a:off x="914400" y="3246120"/>
+            <a:off x="914400" y="3794760"/>
             <a:ext cx="7315200" cy="457200"/>
           </a:xfrm>
           <a:prstGeom prst="rect">
@@ -7248,64 +7868,6 @@
                 <a:hlinkClick r:id="rId2"/>
               </a:rPr>
               <a:t>github.com/HadarBaum/asvspoof-voice-ai</a:t>
-            </a:r>
-          </a:p>
-        </p:txBody>
-      </p:sp>
-      <p:sp>
-        <p:nvSpPr>
-          <p:cNvPr id="6" name="Rounded Rectangle 5">
-            <a:hlinkClick r:id="rId3"/>
-          </p:cNvPr>
-          <p:cNvSpPr/>
-          <p:nvPr/>
-        </p:nvSpPr>
-        <p:spPr>
-          <a:xfrm>
-            <a:off x="914400" y="3931920"/>
-            <a:ext cx="3291840" cy="594360"/>
-          </a:xfrm>
-          <a:prstGeom prst="roundRect">
-            <a:avLst>
-              <a:gd name="adj" fmla="val 6000"/>
-            </a:avLst>
-          </a:prstGeom>
-          <a:solidFill>
-            <a:srgbClr val="0D9488"/>
-          </a:solidFill>
-          <a:ln>
-            <a:noFill/>
-          </a:ln>
-          <a:effectLst/>
-        </p:spPr>
-        <p:style>
-          <a:lnRef idx="1">
-            <a:schemeClr val="accent1"/>
-          </a:lnRef>
-          <a:fillRef idx="3">
-            <a:schemeClr val="accent1"/>
-          </a:fillRef>
-          <a:effectRef idx="2">
-            <a:schemeClr val="accent1"/>
-          </a:effectRef>
-          <a:fontRef idx="minor">
-            <a:schemeClr val="lt1"/>
-          </a:fontRef>
-        </p:style>
-        <p:txBody>
-          <a:bodyPr rtlCol="0" anchor="ctr" wrap="square"/>
-          <a:lstStyle/>
-          <a:p>
-            <a:pPr algn="ctr">
-              <a:defRPr sz="1700" b="1">
-                <a:solidFill>
-                  <a:srgbClr val="FFFFFF"/>
-                </a:solidFill>
-                <a:latin typeface="Calibri"/>
-              </a:defRPr>
-            </a:pPr>
-            <a:r>
-              <a:t>▶  Open the live demo</a:t>
             </a:r>
           </a:p>
         </p:txBody>

--- a/docs/slides/slides.pptx
+++ b/docs/slides/slides.pptx
@@ -3939,8 +3939,8 @@
         </p:nvSpPr>
         <p:spPr>
           <a:xfrm>
-            <a:off x="548640" y="3154680"/>
-            <a:ext cx="11094415" cy="1051560"/>
+            <a:off x="548640" y="3090672"/>
+            <a:ext cx="11094415" cy="731520"/>
           </a:xfrm>
           <a:prstGeom prst="rect">
             <a:avLst/>
@@ -3957,7 +3957,7 @@
               <a:spcAft>
                 <a:spcPts val="1200"/>
               </a:spcAft>
-              <a:defRPr sz="1500">
+              <a:defRPr sz="1400">
                 <a:solidFill>
                   <a:srgbClr val="1A202C"/>
                 </a:solidFill>
@@ -3965,7 +3965,7 @@
               </a:defRPr>
             </a:pPr>
             <a:r>
-              <a:t>•  Dev accuracy at the default threshold (94.3%) looked strong, but the model was quietly biased toward the majority class: it caught spoof reliably, bonafide much less so.</a:t>
+              <a:t>•  Dev accuracy at 0.5 looked strong (94.3%), but the model was quietly biased to the majority class.</a:t>
             </a:r>
           </a:p>
           <a:p>
@@ -3973,7 +3973,7 @@
               <a:spcAft>
                 <a:spcPts val="1200"/>
               </a:spcAft>
-              <a:defRPr sz="1500">
+              <a:defRPr sz="1400">
                 <a:solidFill>
                   <a:srgbClr val="1A202C"/>
                 </a:solidFill>
@@ -3981,7 +3981,7 @@
               </a:defRPr>
             </a:pPr>
             <a:r>
-              <a:t>•  Fix: the model artifact now stores its own EER-optimal decision threshold, used everywhere (streaming consumer, web app) instead of scikit-learn's default 0.5.</a:t>
+              <a:t>•  Fix: the artifact stores its own EER-optimal threshold, used everywhere instead of the default 0.5.</a:t>
             </a:r>
           </a:p>
         </p:txBody>
@@ -3995,8 +3995,8 @@
           <p:nvPr/>
         </p:nvGraphicFramePr>
         <p:xfrm>
-          <a:off x="548640" y="4343400"/>
-          <a:ext cx="11094414" cy="3017520"/>
+          <a:off x="548640" y="4251960"/>
+          <a:ext cx="11094414" cy="2523744"/>
         </p:xfrm>
         <a:graphic>
           <a:graphicData uri="http://schemas.openxmlformats.org/drawingml/2006/table">
@@ -4005,18 +4005,18 @@
                 <a:tableStyleId>{5C22544A-7EE6-4342-B048-85BDC9FD1C3A}</a:tableStyleId>
               </a:tblPr>
               <a:tblGrid>
-                <a:gridCol w="5034440"/>
+                <a:gridCol w="5220901"/>
+                <a:gridCol w="2890141"/>
                 <a:gridCol w="2983372"/>
-                <a:gridCol w="3076602"/>
               </a:tblGrid>
-              <a:tr h="502920">
+              <a:tr h="420624">
                 <a:tc>
                   <a:txBody>
                     <a:bodyPr/>
                     <a:lstStyle/>
                     <a:p>
                       <a:pPr>
-                        <a:defRPr sz="1400" b="1">
+                        <a:defRPr sz="1200" b="1">
                           <a:solidFill>
                             <a:srgbClr val="FFFFFF"/>
                           </a:solidFill>
@@ -4040,7 +4040,7 @@
                     <a:lstStyle/>
                     <a:p>
                       <a:pPr>
-                        <a:defRPr sz="1400" b="1">
+                        <a:defRPr sz="1200" b="1">
                           <a:solidFill>
                             <a:srgbClr val="FFFFFF"/>
                           </a:solidFill>
@@ -4064,7 +4064,7 @@
                     <a:lstStyle/>
                     <a:p>
                       <a:pPr>
-                        <a:defRPr sz="1400" b="1">
+                        <a:defRPr sz="1200" b="1">
                           <a:solidFill>
                             <a:srgbClr val="FFFFFF"/>
                           </a:solidFill>
@@ -4083,14 +4083,14 @@
                   </a:tcPr>
                 </a:tc>
               </a:tr>
-              <a:tr h="502920">
+              <a:tr h="420624">
                 <a:tc>
                   <a:txBody>
                     <a:bodyPr/>
                     <a:lstStyle/>
                     <a:p>
                       <a:pPr>
-                        <a:defRPr sz="1500" b="0">
+                        <a:defRPr sz="1300" b="0">
                           <a:solidFill>
                             <a:srgbClr val="1A202C"/>
                           </a:solidFill>
@@ -4098,7 +4098,7 @@
                         </a:defRPr>
                       </a:pPr>
                       <a:r>
-                        <a:t>Bonafide recall — real speech kept</a:t>
+                        <a:t>Bonafide recall (real speech kept)</a:t>
                       </a:r>
                     </a:p>
                   </a:txBody>
@@ -4114,7 +4114,7 @@
                     <a:lstStyle/>
                     <a:p>
                       <a:pPr>
-                        <a:defRPr sz="1500" b="0">
+                        <a:defRPr sz="1300" b="0">
                           <a:solidFill>
                             <a:srgbClr val="1A202C"/>
                           </a:solidFill>
@@ -4138,7 +4138,7 @@
                     <a:lstStyle/>
                     <a:p>
                       <a:pPr>
-                        <a:defRPr sz="1500" b="0">
+                        <a:defRPr sz="1300" b="0">
                           <a:solidFill>
                             <a:srgbClr val="1A202C"/>
                           </a:solidFill>
@@ -4157,14 +4157,14 @@
                   </a:tcPr>
                 </a:tc>
               </a:tr>
-              <a:tr h="502920">
+              <a:tr h="420624">
                 <a:tc>
                   <a:txBody>
                     <a:bodyPr/>
                     <a:lstStyle/>
                     <a:p>
                       <a:pPr>
-                        <a:defRPr sz="1500" b="0">
+                        <a:defRPr sz="1300" b="0">
                           <a:solidFill>
                             <a:srgbClr val="1A202C"/>
                           </a:solidFill>
@@ -4172,7 +4172,7 @@
                         </a:defRPr>
                       </a:pPr>
                       <a:r>
-                        <a:t>Bonafide precision — cost of the fix</a:t>
+                        <a:t>Bonafide precision (the cost)</a:t>
                       </a:r>
                     </a:p>
                   </a:txBody>
@@ -4188,7 +4188,7 @@
                     <a:lstStyle/>
                     <a:p>
                       <a:pPr>
-                        <a:defRPr sz="1500" b="0">
+                        <a:defRPr sz="1300" b="0">
                           <a:solidFill>
                             <a:srgbClr val="1A202C"/>
                           </a:solidFill>
@@ -4212,7 +4212,7 @@
                     <a:lstStyle/>
                     <a:p>
                       <a:pPr>
-                        <a:defRPr sz="1500" b="0">
+                        <a:defRPr sz="1300" b="0">
                           <a:solidFill>
                             <a:srgbClr val="1A202C"/>
                           </a:solidFill>
@@ -4231,14 +4231,14 @@
                   </a:tcPr>
                 </a:tc>
               </a:tr>
-              <a:tr h="502920">
+              <a:tr h="420624">
                 <a:tc>
                   <a:txBody>
                     <a:bodyPr/>
                     <a:lstStyle/>
                     <a:p>
                       <a:pPr>
-                        <a:defRPr sz="1500" b="0">
+                        <a:defRPr sz="1300" b="0">
                           <a:solidFill>
                             <a:srgbClr val="1A202C"/>
                           </a:solidFill>
@@ -4246,7 +4246,7 @@
                         </a:defRPr>
                       </a:pPr>
                       <a:r>
-                        <a:t>Spoof recall — attacks still caught</a:t>
+                        <a:t>Spoof recall (attacks caught)</a:t>
                       </a:r>
                     </a:p>
                   </a:txBody>
@@ -4262,7 +4262,7 @@
                     <a:lstStyle/>
                     <a:p>
                       <a:pPr>
-                        <a:defRPr sz="1500" b="0">
+                        <a:defRPr sz="1300" b="0">
                           <a:solidFill>
                             <a:srgbClr val="1A202C"/>
                           </a:solidFill>
@@ -4286,7 +4286,7 @@
                     <a:lstStyle/>
                     <a:p>
                       <a:pPr>
-                        <a:defRPr sz="1500" b="0">
+                        <a:defRPr sz="1300" b="0">
                           <a:solidFill>
                             <a:srgbClr val="1A202C"/>
                           </a:solidFill>
@@ -4305,14 +4305,14 @@
                   </a:tcPr>
                 </a:tc>
               </a:tr>
-              <a:tr h="502920">
+              <a:tr h="420624">
                 <a:tc>
                   <a:txBody>
                     <a:bodyPr/>
                     <a:lstStyle/>
                     <a:p>
                       <a:pPr>
-                        <a:defRPr sz="1500" b="0">
+                        <a:defRPr sz="1300" b="0">
                           <a:solidFill>
                             <a:srgbClr val="1A202C"/>
                           </a:solidFill>
@@ -4336,7 +4336,7 @@
                     <a:lstStyle/>
                     <a:p>
                       <a:pPr>
-                        <a:defRPr sz="1500" b="0">
+                        <a:defRPr sz="1300" b="0">
                           <a:solidFill>
                             <a:srgbClr val="1A202C"/>
                           </a:solidFill>
@@ -4360,7 +4360,7 @@
                     <a:lstStyle/>
                     <a:p>
                       <a:pPr>
-                        <a:defRPr sz="1500" b="0">
+                        <a:defRPr sz="1300" b="0">
                           <a:solidFill>
                             <a:srgbClr val="1A202C"/>
                           </a:solidFill>
@@ -4379,14 +4379,14 @@
                   </a:tcPr>
                 </a:tc>
               </a:tr>
-              <a:tr h="502920">
+              <a:tr h="420624">
                 <a:tc>
                   <a:txBody>
                     <a:bodyPr/>
                     <a:lstStyle/>
                     <a:p>
                       <a:pPr>
-                        <a:defRPr sz="1500" b="1">
+                        <a:defRPr sz="1300" b="1">
                           <a:solidFill>
                             <a:srgbClr val="0D9488"/>
                           </a:solidFill>
@@ -4394,7 +4394,7 @@
                         </a:defRPr>
                       </a:pPr>
                       <a:r>
-                        <a:t>Balanced accuracy — the honest headline</a:t>
+                        <a:t>Balanced accuracy (the honest headline)</a:t>
                       </a:r>
                     </a:p>
                   </a:txBody>
@@ -4410,7 +4410,7 @@
                     <a:lstStyle/>
                     <a:p>
                       <a:pPr>
-                        <a:defRPr sz="1500" b="1">
+                        <a:defRPr sz="1300" b="1">
                           <a:solidFill>
                             <a:srgbClr val="0D9488"/>
                           </a:solidFill>
@@ -4434,7 +4434,7 @@
                     <a:lstStyle/>
                     <a:p>
                       <a:pPr>
-                        <a:defRPr sz="1500" b="1">
+                        <a:defRPr sz="1300" b="1">
                           <a:solidFill>
                             <a:srgbClr val="0D9488"/>
                           </a:solidFill>
@@ -8794,7 +8794,7 @@
               </a:defRPr>
             </a:pPr>
             <a:r>
-              <a:t>Both from the streamed eval predictions. Left: true vs. predicted counts. Right: confidence on correct vs. incorrect calls — some are confidently wrong.</a:t>
+              <a:t>Both from the streamed eval predictions. Left: true vs. predicted counts. Right: confidence on correct vs. incorrect calls.</a:t>
             </a:r>
           </a:p>
         </p:txBody>
@@ -13400,7 +13400,7 @@
               <a:spcAft>
                 <a:spcPts val="1200"/>
               </a:spcAft>
-              <a:defRPr sz="1700">
+              <a:defRPr sz="1500">
                 <a:solidFill>
                   <a:srgbClr val="1A202C"/>
                 </a:solidFill>
@@ -13416,7 +13416,7 @@
               <a:spcAft>
                 <a:spcPts val="1200"/>
               </a:spcAft>
-              <a:defRPr sz="1700">
+              <a:defRPr sz="1500">
                 <a:solidFill>
                   <a:srgbClr val="1A202C"/>
                 </a:solidFill>
@@ -13432,7 +13432,7 @@
               <a:spcAft>
                 <a:spcPts val="1200"/>
               </a:spcAft>
-              <a:defRPr sz="1700">
+              <a:defRPr sz="1500">
                 <a:solidFill>
                   <a:srgbClr val="1A202C"/>
                 </a:solidFill>
@@ -13448,7 +13448,7 @@
               <a:spcAft>
                 <a:spcPts val="1200"/>
               </a:spcAft>
-              <a:defRPr sz="1700">
+              <a:defRPr sz="1500">
                 <a:solidFill>
                   <a:srgbClr val="1A202C"/>
                 </a:solidFill>
@@ -13464,7 +13464,7 @@
               <a:spcAft>
                 <a:spcPts val="1200"/>
               </a:spcAft>
-              <a:defRPr sz="1700">
+              <a:defRPr sz="1500">
                 <a:solidFill>
                   <a:srgbClr val="1A202C"/>
                 </a:solidFill>
@@ -16491,8 +16491,8 @@
         </p:nvSpPr>
         <p:spPr>
           <a:xfrm>
-            <a:off x="548640" y="5257800"/>
-            <a:ext cx="11094415" cy="1143000"/>
+            <a:off x="548640" y="5230368"/>
+            <a:ext cx="11094415" cy="1170432"/>
           </a:xfrm>
           <a:prstGeom prst="rect">
             <a:avLst/>
@@ -16509,7 +16509,7 @@
               <a:spcAft>
                 <a:spcPts val="1200"/>
               </a:spcAft>
-              <a:defRPr sz="1300">
+              <a:defRPr sz="1200">
                 <a:solidFill>
                   <a:srgbClr val="1A202C"/>
                 </a:solidFill>
@@ -16525,7 +16525,7 @@
               <a:spcAft>
                 <a:spcPts val="1200"/>
               </a:spcAft>
-              <a:defRPr sz="1300">
+              <a:defRPr sz="1200">
                 <a:solidFill>
                   <a:srgbClr val="1A202C"/>
                 </a:solidFill>
@@ -16541,7 +16541,7 @@
               <a:spcAft>
                 <a:spcPts val="1200"/>
               </a:spcAft>
-              <a:defRPr sz="1300">
+              <a:defRPr sz="1200">
                 <a:solidFill>
                   <a:srgbClr val="1A202C"/>
                 </a:solidFill>

--- a/docs/slides/slides.pptx
+++ b/docs/slides/slides.pptx
@@ -18250,7 +18250,7 @@
                         </a:defRPr>
                       </a:pPr>
                       <a:r>
-                        <a:t>12.31%</a:t>
+                        <a:t>9.09%</a:t>
                       </a:r>
                     </a:p>
                   </a:txBody>
@@ -18274,7 +18274,7 @@
                         </a:defRPr>
                       </a:pPr>
                       <a:r>
-                        <a:t>0.951</a:t>
+                        <a:t>0.969</a:t>
                       </a:r>
                     </a:p>
                   </a:txBody>
@@ -18417,7 +18417,7 @@
         <p:spPr>
           <a:xfrm>
             <a:off x="548640" y="3657600"/>
-            <a:ext cx="11094415" cy="914400"/>
+            <a:ext cx="11094415" cy="868680"/>
           </a:xfrm>
           <a:prstGeom prst="rect">
             <a:avLst/>
@@ -18434,7 +18434,7 @@
               <a:spcAft>
                 <a:spcPts val="1200"/>
               </a:spcAft>
-              <a:defRPr sz="1600">
+              <a:defRPr sz="1300">
                 <a:solidFill>
                   <a:srgbClr val="1A202C"/>
                 </a:solidFill>
@@ -18442,7 +18442,7 @@
               </a:defRPr>
             </a:pPr>
             <a:r>
-              <a:t>•  Selection metric is EER — the metric the ASVspoof challenge itself is scored on, not raw accuracy, which looked strong while quietly failing bonafide clips (see the next two slides).</a:t>
+              <a:t>•  A statistical tie on EER — the gap is ~3 clips in 2,548. Gradient Boosting is deployed for calibration and cost: 80.2% bonafide recall at the default threshold vs. 26.6%, 283KB vs. 29.7MB on disk, 0.55ms vs. 27.6ms per clip.</a:t>
             </a:r>
           </a:p>
         </p:txBody>
@@ -19593,7 +19593,7 @@
               </a:defRPr>
             </a:pPr>
             <a:r>
-              <a:t>The metric the ASVspoof challenge itself is scored on</a:t>
+              <a:t>A secondary ASVspoof2019 metric - min t-DCF was the primary one</a:t>
             </a:r>
           </a:p>
         </p:txBody>
@@ -19732,7 +19732,7 @@
               </a:defRPr>
             </a:pPr>
             <a:r>
-              <a:t>•  Lower EER = better separation between the two classes. 0% would mean a threshold exists with zero errors of either kind; this project's deployed model scores 9.26%.</a:t>
+              <a:t>•  Lower EER = better separation. 0% would mean a threshold exists with zero errors of either kind; this project's deployed model scores 9.26%. EER was a secondary ASVspoof2019 metric (min t-DCF was primary) - we use it because it needs no cost model.</a:t>
             </a:r>
           </a:p>
         </p:txBody>

--- a/docs/slides/slides.pptx
+++ b/docs/slides/slides.pptx
@@ -11208,6 +11208,22 @@
             </a:pPr>
             <a:r>
               <a:t>•  Windows + Spark: worker Python resolution, a path with spaces, a pyspark 3.5.1 / Python 3.12 incompatibility, and a removed distutils — four environment bugs, none in our own logic, all diagnosed and fixed rather than worked around.</a:t>
+            </a:r>
+          </a:p>
+          <a:p>
+            <a:pPr>
+              <a:spcAft>
+                <a:spcPts val="1200"/>
+              </a:spcAft>
+              <a:defRPr sz="1800">
+                <a:solidFill>
+                  <a:srgbClr val="1A202C"/>
+                </a:solidFill>
+                <a:latin typeface="Calibri"/>
+              </a:defRPr>
+            </a:pPr>
+            <a:r>
+              <a:t>•  A bug in our own code: Random Forest was reweighted twice — class_weight and sample_weight multiply in sklearn, turning 8.8:1 into 78:1.</a:t>
             </a:r>
           </a:p>
           <a:p>

--- a/docs/slides/slides.pptx
+++ b/docs/slides/slides.pptx
@@ -24,6 +24,7 @@
     <p:sldId id="272" r:id="rId23"/>
     <p:sldId id="273" r:id="rId24"/>
     <p:sldId id="274" r:id="rId25"/>
+    <p:sldId id="275" r:id="rId26"/>
   </p:sldIdLst>
   <p:sldSz cx="12191695" cy="6858000" type="screen4x3"/>
   <p:notesSz cx="6858000" cy="9144000"/>
@@ -3491,7 +3492,7 @@
               </a:defRPr>
             </a:pPr>
             <a:r>
-              <a:t>Results on dev — the accuracy paradox, found and fixed</a:t>
+              <a:t>Fix 1 — switching the model</a:t>
             </a:r>
           </a:p>
         </p:txBody>
@@ -3499,6 +3500,42 @@
       <p:sp>
         <p:nvSpPr>
           <p:cNvPr id="5" name="TextBox 4"/>
+          <p:cNvSpPr txBox="1"/>
+          <p:nvPr/>
+        </p:nvSpPr>
+        <p:spPr>
+          <a:xfrm>
+            <a:off x="548640" y="658368"/>
+            <a:ext cx="11094415" cy="365760"/>
+          </a:xfrm>
+          <a:prstGeom prst="rect">
+            <a:avLst/>
+          </a:prstGeom>
+          <a:noFill/>
+        </p:spPr>
+        <p:txBody>
+          <a:bodyPr wrap="none">
+            <a:spAutoFit/>
+          </a:bodyPr>
+          <a:lstStyle/>
+          <a:p>
+            <a:pPr>
+              <a:defRPr sz="1300">
+                <a:solidFill>
+                  <a:srgbClr val="CBD5E1"/>
+                </a:solidFill>
+                <a:latin typeface="Calibri"/>
+              </a:defRPr>
+            </a:pPr>
+            <a:r>
+              <a:t>Same 0.5 threshold, better-calibrated probabilities</a:t>
+            </a:r>
+          </a:p>
+        </p:txBody>
+      </p:sp>
+      <p:sp>
+        <p:nvSpPr>
+          <p:cNvPr id="6" name="TextBox 5"/>
           <p:cNvSpPr txBox="1"/>
           <p:nvPr/>
         </p:nvSpPr>
@@ -3534,7 +3571,7 @@
       </p:sp>
       <p:sp>
         <p:nvSpPr>
-          <p:cNvPr id="6" name="Rounded Rectangle 5"/>
+          <p:cNvPr id="7" name="Rounded Rectangle 6"/>
           <p:cNvSpPr/>
           <p:nvPr/>
         </p:nvSpPr>
@@ -3582,7 +3619,7 @@
       </p:sp>
       <p:sp>
         <p:nvSpPr>
-          <p:cNvPr id="7" name="TextBox 6"/>
+          <p:cNvPr id="8" name="TextBox 7"/>
           <p:cNvSpPr txBox="1"/>
           <p:nvPr/>
         </p:nvSpPr>
@@ -3611,14 +3648,14 @@
               </a:defRPr>
             </a:pPr>
             <a:r>
-              <a:t>80%</a:t>
-            </a:r>
-          </a:p>
-        </p:txBody>
-      </p:sp>
-      <p:sp>
-        <p:nvSpPr>
-          <p:cNvPr id="8" name="TextBox 7"/>
+              <a:t>26.6%</a:t>
+            </a:r>
+          </a:p>
+        </p:txBody>
+      </p:sp>
+      <p:sp>
+        <p:nvSpPr>
+          <p:cNvPr id="9" name="TextBox 8"/>
           <p:cNvSpPr txBox="1"/>
           <p:nvPr/>
         </p:nvSpPr>
@@ -3647,7 +3684,7 @@
               </a:defRPr>
             </a:pPr>
             <a:r>
-              <a:t>Bonafide recall</a:t>
+              <a:t>Random Forest</a:t>
             </a:r>
           </a:p>
           <a:p>
@@ -3660,14 +3697,14 @@
               </a:defRPr>
             </a:pPr>
             <a:r>
-              <a:t>at default 0.5 threshold</a:t>
-            </a:r>
-          </a:p>
-        </p:txBody>
-      </p:sp>
-      <p:sp>
-        <p:nvSpPr>
-          <p:cNvPr id="9" name="Rounded Rectangle 8"/>
+              <a:t>bonafide recall @ 0.5</a:t>
+            </a:r>
+          </a:p>
+        </p:txBody>
+      </p:sp>
+      <p:sp>
+        <p:nvSpPr>
+          <p:cNvPr id="10" name="Rounded Rectangle 9"/>
           <p:cNvSpPr/>
           <p:nvPr/>
         </p:nvSpPr>
@@ -3715,7 +3752,7 @@
       </p:sp>
       <p:sp>
         <p:nvSpPr>
-          <p:cNvPr id="10" name="TextBox 9"/>
+          <p:cNvPr id="11" name="TextBox 10"/>
           <p:cNvSpPr txBox="1"/>
           <p:nvPr/>
         </p:nvSpPr>
@@ -3744,14 +3781,14 @@
               </a:defRPr>
             </a:pPr>
             <a:r>
-              <a:t>91%</a:t>
-            </a:r>
-          </a:p>
-        </p:txBody>
-      </p:sp>
-      <p:sp>
-        <p:nvSpPr>
-          <p:cNvPr id="11" name="TextBox 10"/>
+              <a:t>80.2%</a:t>
+            </a:r>
+          </a:p>
+        </p:txBody>
+      </p:sp>
+      <p:sp>
+        <p:nvSpPr>
+          <p:cNvPr id="12" name="TextBox 11"/>
           <p:cNvSpPr txBox="1"/>
           <p:nvPr/>
         </p:nvSpPr>
@@ -3780,7 +3817,7 @@
               </a:defRPr>
             </a:pPr>
             <a:r>
-              <a:t>Bonafide recall</a:t>
+              <a:t>Gradient Boosting</a:t>
             </a:r>
           </a:p>
           <a:p>
@@ -3793,14 +3830,14 @@
               </a:defRPr>
             </a:pPr>
             <a:r>
-              <a:t>at deployed EER threshold</a:t>
-            </a:r>
-          </a:p>
-        </p:txBody>
-      </p:sp>
-      <p:sp>
-        <p:nvSpPr>
-          <p:cNvPr id="12" name="Rounded Rectangle 11"/>
+              <a:t>bonafide recall @ 0.5</a:t>
+            </a:r>
+          </a:p>
+        </p:txBody>
+      </p:sp>
+      <p:sp>
+        <p:nvSpPr>
+          <p:cNvPr id="13" name="Rounded Rectangle 12"/>
           <p:cNvSpPr/>
           <p:nvPr/>
         </p:nvSpPr>
@@ -3848,7 +3885,7 @@
       </p:sp>
       <p:sp>
         <p:nvSpPr>
-          <p:cNvPr id="13" name="TextBox 12"/>
+          <p:cNvPr id="14" name="TextBox 13"/>
           <p:cNvSpPr txBox="1"/>
           <p:nvPr/>
         </p:nvSpPr>
@@ -3877,14 +3914,14 @@
               </a:defRPr>
             </a:pPr>
             <a:r>
-              <a:t>9.3%</a:t>
-            </a:r>
-          </a:p>
-        </p:txBody>
-      </p:sp>
-      <p:sp>
-        <p:nvSpPr>
-          <p:cNvPr id="14" name="TextBox 13"/>
+              <a:t>+54 pts</a:t>
+            </a:r>
+          </a:p>
+        </p:txBody>
+      </p:sp>
+      <p:sp>
+        <p:nvSpPr>
+          <p:cNvPr id="15" name="TextBox 14"/>
           <p:cNvSpPr txBox="1"/>
           <p:nvPr/>
         </p:nvSpPr>
@@ -3913,7 +3950,7 @@
               </a:defRPr>
             </a:pPr>
             <a:r>
-              <a:t>Equal Error Rate</a:t>
+              <a:t>From the model choice alone</a:t>
             </a:r>
           </a:p>
           <a:p>
@@ -3926,62 +3963,7 @@
               </a:defRPr>
             </a:pPr>
             <a:r>
-              <a:t>(ASVspoof's own metric)</a:t>
-            </a:r>
-          </a:p>
-        </p:txBody>
-      </p:sp>
-      <p:sp>
-        <p:nvSpPr>
-          <p:cNvPr id="15" name="TextBox 14"/>
-          <p:cNvSpPr txBox="1"/>
-          <p:nvPr/>
-        </p:nvSpPr>
-        <p:spPr>
-          <a:xfrm>
-            <a:off x="548640" y="3090672"/>
-            <a:ext cx="11094415" cy="731520"/>
-          </a:xfrm>
-          <a:prstGeom prst="rect">
-            <a:avLst/>
-          </a:prstGeom>
-          <a:noFill/>
-        </p:spPr>
-        <p:txBody>
-          <a:bodyPr wrap="square">
-            <a:spAutoFit/>
-          </a:bodyPr>
-          <a:lstStyle/>
-          <a:p>
-            <a:pPr>
-              <a:spcAft>
-                <a:spcPts val="1200"/>
-              </a:spcAft>
-              <a:defRPr sz="1400">
-                <a:solidFill>
-                  <a:srgbClr val="1A202C"/>
-                </a:solidFill>
-                <a:latin typeface="Calibri"/>
-              </a:defRPr>
-            </a:pPr>
-            <a:r>
-              <a:t>•  Dev accuracy at 0.5 looked strong (94.3%), but the model was quietly biased to the majority class.</a:t>
-            </a:r>
-          </a:p>
-          <a:p>
-            <a:pPr>
-              <a:spcAft>
-                <a:spcPts val="1200"/>
-              </a:spcAft>
-              <a:defRPr sz="1400">
-                <a:solidFill>
-                  <a:srgbClr val="1A202C"/>
-                </a:solidFill>
-                <a:latin typeface="Calibri"/>
-              </a:defRPr>
-            </a:pPr>
-            <a:r>
-              <a:t>•  Fix: the artifact stores its own EER-optimal threshold, used everywhere instead of the default 0.5.</a:t>
+              <a:t>no threshold change</a:t>
             </a:r>
           </a:p>
         </p:txBody>
@@ -3995,7 +3977,1025 @@
           <p:nvPr/>
         </p:nvGraphicFramePr>
         <p:xfrm>
-          <a:off x="548640" y="4251960"/>
+          <a:off x="548640" y="3200400"/>
+          <a:ext cx="11094414" cy="1371600"/>
+        </p:xfrm>
+        <a:graphic>
+          <a:graphicData uri="http://schemas.openxmlformats.org/drawingml/2006/table">
+            <a:tbl>
+              <a:tblPr firstRow="1" bandRow="1">
+                <a:tableStyleId>{5C22544A-7EE6-4342-B048-85BDC9FD1C3A}</a:tableStyleId>
+              </a:tblPr>
+              <a:tblGrid>
+                <a:gridCol w="3962291"/>
+                <a:gridCol w="2641527"/>
+                <a:gridCol w="2641527"/>
+                <a:gridCol w="1849069"/>
+              </a:tblGrid>
+              <a:tr h="457200">
+                <a:tc>
+                  <a:txBody>
+                    <a:bodyPr/>
+                    <a:lstStyle/>
+                    <a:p>
+                      <a:pPr>
+                        <a:defRPr sz="1400" b="1">
+                          <a:solidFill>
+                            <a:srgbClr val="FFFFFF"/>
+                          </a:solidFill>
+                          <a:latin typeface="Calibri"/>
+                        </a:defRPr>
+                      </a:pPr>
+                      <a:r>
+                        <a:t>Model</a:t>
+                      </a:r>
+                    </a:p>
+                  </a:txBody>
+                  <a:tcPr anchor="ctr" marL="109728" marR="109728">
+                    <a:solidFill>
+                      <a:srgbClr val="0F2942"/>
+                    </a:solidFill>
+                  </a:tcPr>
+                </a:tc>
+                <a:tc>
+                  <a:txBody>
+                    <a:bodyPr/>
+                    <a:lstStyle/>
+                    <a:p>
+                      <a:pPr>
+                        <a:defRPr sz="1400" b="1">
+                          <a:solidFill>
+                            <a:srgbClr val="FFFFFF"/>
+                          </a:solidFill>
+                          <a:latin typeface="Calibri"/>
+                        </a:defRPr>
+                      </a:pPr>
+                      <a:r>
+                        <a:t>EER (lower is better)</a:t>
+                      </a:r>
+                    </a:p>
+                  </a:txBody>
+                  <a:tcPr anchor="ctr" marL="109728" marR="109728">
+                    <a:solidFill>
+                      <a:srgbClr val="0F2942"/>
+                    </a:solidFill>
+                  </a:tcPr>
+                </a:tc>
+                <a:tc>
+                  <a:txBody>
+                    <a:bodyPr/>
+                    <a:lstStyle/>
+                    <a:p>
+                      <a:pPr>
+                        <a:defRPr sz="1400" b="1">
+                          <a:solidFill>
+                            <a:srgbClr val="FFFFFF"/>
+                          </a:solidFill>
+                          <a:latin typeface="Calibri"/>
+                        </a:defRPr>
+                      </a:pPr>
+                      <a:r>
+                        <a:t>ROC-AUC</a:t>
+                      </a:r>
+                    </a:p>
+                  </a:txBody>
+                  <a:tcPr anchor="ctr" marL="109728" marR="109728">
+                    <a:solidFill>
+                      <a:srgbClr val="0F2942"/>
+                    </a:solidFill>
+                  </a:tcPr>
+                </a:tc>
+                <a:tc>
+                  <a:txBody>
+                    <a:bodyPr/>
+                    <a:lstStyle/>
+                    <a:p>
+                      <a:pPr>
+                        <a:defRPr sz="1400" b="1">
+                          <a:solidFill>
+                            <a:srgbClr val="FFFFFF"/>
+                          </a:solidFill>
+                          <a:latin typeface="Calibri"/>
+                        </a:defRPr>
+                      </a:pPr>
+                      <a:r>
+                        <a:t>Deployed</a:t>
+                      </a:r>
+                    </a:p>
+                  </a:txBody>
+                  <a:tcPr anchor="ctr" marL="109728" marR="109728">
+                    <a:solidFill>
+                      <a:srgbClr val="0F2942"/>
+                    </a:solidFill>
+                  </a:tcPr>
+                </a:tc>
+              </a:tr>
+              <a:tr h="457200">
+                <a:tc>
+                  <a:txBody>
+                    <a:bodyPr/>
+                    <a:lstStyle/>
+                    <a:p>
+                      <a:pPr>
+                        <a:defRPr sz="1500" b="0">
+                          <a:solidFill>
+                            <a:srgbClr val="1A202C"/>
+                          </a:solidFill>
+                          <a:latin typeface="Calibri"/>
+                        </a:defRPr>
+                      </a:pPr>
+                      <a:r>
+                        <a:t>Random Forest</a:t>
+                      </a:r>
+                    </a:p>
+                  </a:txBody>
+                  <a:tcPr anchor="ctr" marL="109728" marR="109728">
+                    <a:solidFill>
+                      <a:srgbClr val="FFFFFF"/>
+                    </a:solidFill>
+                  </a:tcPr>
+                </a:tc>
+                <a:tc>
+                  <a:txBody>
+                    <a:bodyPr/>
+                    <a:lstStyle/>
+                    <a:p>
+                      <a:pPr>
+                        <a:defRPr sz="1500" b="0">
+                          <a:solidFill>
+                            <a:srgbClr val="1A202C"/>
+                          </a:solidFill>
+                          <a:latin typeface="Calibri"/>
+                        </a:defRPr>
+                      </a:pPr>
+                      <a:r>
+                        <a:t>9.09%</a:t>
+                      </a:r>
+                    </a:p>
+                  </a:txBody>
+                  <a:tcPr anchor="ctr" marL="109728" marR="109728">
+                    <a:solidFill>
+                      <a:srgbClr val="FFFFFF"/>
+                    </a:solidFill>
+                  </a:tcPr>
+                </a:tc>
+                <a:tc>
+                  <a:txBody>
+                    <a:bodyPr/>
+                    <a:lstStyle/>
+                    <a:p>
+                      <a:pPr>
+                        <a:defRPr sz="1500" b="0">
+                          <a:solidFill>
+                            <a:srgbClr val="1A202C"/>
+                          </a:solidFill>
+                          <a:latin typeface="Calibri"/>
+                        </a:defRPr>
+                      </a:pPr>
+                      <a:r>
+                        <a:t>0.969</a:t>
+                      </a:r>
+                    </a:p>
+                  </a:txBody>
+                  <a:tcPr anchor="ctr" marL="109728" marR="109728">
+                    <a:solidFill>
+                      <a:srgbClr val="FFFFFF"/>
+                    </a:solidFill>
+                  </a:tcPr>
+                </a:tc>
+                <a:tc>
+                  <a:txBody>
+                    <a:bodyPr/>
+                    <a:lstStyle/>
+                    <a:p>
+                      <a:pPr>
+                        <a:defRPr sz="1500" b="0">
+                          <a:solidFill>
+                            <a:srgbClr val="1A202C"/>
+                          </a:solidFill>
+                          <a:latin typeface="Calibri"/>
+                        </a:defRPr>
+                      </a:pPr>
+                    </a:p>
+                  </a:txBody>
+                  <a:tcPr anchor="ctr" marL="109728" marR="109728">
+                    <a:solidFill>
+                      <a:srgbClr val="FFFFFF"/>
+                    </a:solidFill>
+                  </a:tcPr>
+                </a:tc>
+              </a:tr>
+              <a:tr h="457200">
+                <a:tc>
+                  <a:txBody>
+                    <a:bodyPr/>
+                    <a:lstStyle/>
+                    <a:p>
+                      <a:pPr>
+                        <a:defRPr sz="1500" b="1">
+                          <a:solidFill>
+                            <a:srgbClr val="0D9488"/>
+                          </a:solidFill>
+                          <a:latin typeface="Calibri"/>
+                        </a:defRPr>
+                      </a:pPr>
+                      <a:r>
+                        <a:t>Gradient Boosting</a:t>
+                      </a:r>
+                    </a:p>
+                  </a:txBody>
+                  <a:tcPr anchor="ctr" marL="109728" marR="109728">
+                    <a:solidFill>
+                      <a:srgbClr val="E6FFFA"/>
+                    </a:solidFill>
+                  </a:tcPr>
+                </a:tc>
+                <a:tc>
+                  <a:txBody>
+                    <a:bodyPr/>
+                    <a:lstStyle/>
+                    <a:p>
+                      <a:pPr>
+                        <a:defRPr sz="1500" b="1">
+                          <a:solidFill>
+                            <a:srgbClr val="0D9488"/>
+                          </a:solidFill>
+                          <a:latin typeface="Calibri"/>
+                        </a:defRPr>
+                      </a:pPr>
+                      <a:r>
+                        <a:t>9.26%</a:t>
+                      </a:r>
+                    </a:p>
+                  </a:txBody>
+                  <a:tcPr anchor="ctr" marL="109728" marR="109728">
+                    <a:solidFill>
+                      <a:srgbClr val="E6FFFA"/>
+                    </a:solidFill>
+                  </a:tcPr>
+                </a:tc>
+                <a:tc>
+                  <a:txBody>
+                    <a:bodyPr/>
+                    <a:lstStyle/>
+                    <a:p>
+                      <a:pPr>
+                        <a:defRPr sz="1500" b="1">
+                          <a:solidFill>
+                            <a:srgbClr val="0D9488"/>
+                          </a:solidFill>
+                          <a:latin typeface="Calibri"/>
+                        </a:defRPr>
+                      </a:pPr>
+                      <a:r>
+                        <a:t>0.970</a:t>
+                      </a:r>
+                    </a:p>
+                  </a:txBody>
+                  <a:tcPr anchor="ctr" marL="109728" marR="109728">
+                    <a:solidFill>
+                      <a:srgbClr val="E6FFFA"/>
+                    </a:solidFill>
+                  </a:tcPr>
+                </a:tc>
+                <a:tc>
+                  <a:txBody>
+                    <a:bodyPr/>
+                    <a:lstStyle/>
+                    <a:p>
+                      <a:pPr>
+                        <a:defRPr sz="1500" b="1">
+                          <a:solidFill>
+                            <a:srgbClr val="0D9488"/>
+                          </a:solidFill>
+                          <a:latin typeface="Calibri"/>
+                        </a:defRPr>
+                      </a:pPr>
+                      <a:r>
+                        <a:t>✓</a:t>
+                      </a:r>
+                    </a:p>
+                  </a:txBody>
+                  <a:tcPr anchor="ctr" marL="109728" marR="109728">
+                    <a:solidFill>
+                      <a:srgbClr val="E6FFFA"/>
+                    </a:solidFill>
+                  </a:tcPr>
+                </a:tc>
+              </a:tr>
+            </a:tbl>
+          </a:graphicData>
+        </a:graphic>
+      </p:graphicFrame>
+      <p:sp>
+        <p:nvSpPr>
+          <p:cNvPr id="17" name="TextBox 16"/>
+          <p:cNvSpPr txBox="1"/>
+          <p:nvPr/>
+        </p:nvSpPr>
+        <p:spPr>
+          <a:xfrm>
+            <a:off x="548640" y="4800600"/>
+            <a:ext cx="11094415" cy="914400"/>
+          </a:xfrm>
+          <a:prstGeom prst="rect">
+            <a:avLst/>
+          </a:prstGeom>
+          <a:noFill/>
+        </p:spPr>
+        <p:txBody>
+          <a:bodyPr wrap="square">
+            <a:spAutoFit/>
+          </a:bodyPr>
+          <a:lstStyle/>
+          <a:p>
+            <a:pPr>
+              <a:spcAft>
+                <a:spcPts val="1200"/>
+              </a:spcAft>
+              <a:defRPr sz="1300">
+                <a:solidFill>
+                  <a:srgbClr val="1A202C"/>
+                </a:solidFill>
+                <a:latin typeface="Calibri"/>
+              </a:defRPr>
+            </a:pPr>
+            <a:r>
+              <a:t>•  A statistical tie on EER — the gap is ~3 clips in 2,548 — so the deployed model is pinned, not picked by lowest EER. Gradient Boosting is kept for calibration and deployment cost: 283KB vs. 29.7MB on disk, 0.55ms vs. 27.6ms per clip.</a:t>
+            </a:r>
+          </a:p>
+        </p:txBody>
+      </p:sp>
+    </p:spTree>
+  </p:cSld>
+  <p:clrMapOvr>
+    <a:masterClrMapping/>
+  </p:clrMapOvr>
+</p:sld>
+</file>
+
+<file path=ppt/slides/slide11.xml><?xml version="1.0" encoding="utf-8"?>
+<p:sld xmlns:a="http://schemas.openxmlformats.org/drawingml/2006/main" xmlns:p="http://schemas.openxmlformats.org/presentationml/2006/main" xmlns:r="http://schemas.openxmlformats.org/officeDocument/2006/relationships">
+  <p:cSld>
+    <p:bg>
+      <p:bgPr>
+        <a:solidFill>
+          <a:srgbClr val="F7F9FB"/>
+        </a:solidFill>
+        <a:effectLst/>
+      </p:bgPr>
+    </p:bg>
+    <p:spTree>
+      <p:nvGrpSpPr>
+        <p:cNvPr id="1" name=""/>
+        <p:cNvGrpSpPr/>
+        <p:nvPr/>
+      </p:nvGrpSpPr>
+      <p:grpSpPr/>
+      <p:sp>
+        <p:nvSpPr>
+          <p:cNvPr id="2" name="Rectangle 1"/>
+          <p:cNvSpPr/>
+          <p:nvPr/>
+        </p:nvSpPr>
+        <p:spPr>
+          <a:xfrm>
+            <a:off x="0" y="0"/>
+            <a:ext cx="12191695" cy="1051560"/>
+          </a:xfrm>
+          <a:prstGeom prst="rect">
+            <a:avLst/>
+          </a:prstGeom>
+          <a:solidFill>
+            <a:srgbClr val="0F2942"/>
+          </a:solidFill>
+          <a:ln>
+            <a:noFill/>
+          </a:ln>
+          <a:effectLst/>
+        </p:spPr>
+        <p:style>
+          <a:lnRef idx="1">
+            <a:schemeClr val="accent1"/>
+          </a:lnRef>
+          <a:fillRef idx="3">
+            <a:schemeClr val="accent1"/>
+          </a:fillRef>
+          <a:effectRef idx="2">
+            <a:schemeClr val="accent1"/>
+          </a:effectRef>
+          <a:fontRef idx="minor">
+            <a:schemeClr val="lt1"/>
+          </a:fontRef>
+        </p:style>
+        <p:txBody>
+          <a:bodyPr rtlCol="0" anchor="ctr"/>
+          <a:lstStyle/>
+          <a:p>
+            <a:pPr algn="ctr"/>
+          </a:p>
+        </p:txBody>
+      </p:sp>
+      <p:sp>
+        <p:nvSpPr>
+          <p:cNvPr id="3" name="Rectangle 2"/>
+          <p:cNvSpPr/>
+          <p:nvPr/>
+        </p:nvSpPr>
+        <p:spPr>
+          <a:xfrm>
+            <a:off x="0" y="1051560"/>
+            <a:ext cx="2103120" cy="63500"/>
+          </a:xfrm>
+          <a:prstGeom prst="rect">
+            <a:avLst/>
+          </a:prstGeom>
+          <a:solidFill>
+            <a:srgbClr val="0D9488"/>
+          </a:solidFill>
+          <a:ln>
+            <a:noFill/>
+          </a:ln>
+          <a:effectLst/>
+        </p:spPr>
+        <p:style>
+          <a:lnRef idx="1">
+            <a:schemeClr val="accent1"/>
+          </a:lnRef>
+          <a:fillRef idx="3">
+            <a:schemeClr val="accent1"/>
+          </a:fillRef>
+          <a:effectRef idx="2">
+            <a:schemeClr val="accent1"/>
+          </a:effectRef>
+          <a:fontRef idx="minor">
+            <a:schemeClr val="lt1"/>
+          </a:fontRef>
+        </p:style>
+        <p:txBody>
+          <a:bodyPr rtlCol="0" anchor="ctr"/>
+          <a:lstStyle/>
+          <a:p>
+            <a:pPr algn="ctr"/>
+          </a:p>
+        </p:txBody>
+      </p:sp>
+      <p:sp>
+        <p:nvSpPr>
+          <p:cNvPr id="4" name="TextBox 3"/>
+          <p:cNvSpPr txBox="1"/>
+          <p:nvPr/>
+        </p:nvSpPr>
+        <p:spPr>
+          <a:xfrm>
+            <a:off x="548640" y="146304"/>
+            <a:ext cx="11094415" cy="640080"/>
+          </a:xfrm>
+          <a:prstGeom prst="rect">
+            <a:avLst/>
+          </a:prstGeom>
+          <a:noFill/>
+        </p:spPr>
+        <p:txBody>
+          <a:bodyPr wrap="square">
+            <a:spAutoFit/>
+          </a:bodyPr>
+          <a:lstStyle/>
+          <a:p>
+            <a:pPr>
+              <a:defRPr sz="3000" b="1">
+                <a:solidFill>
+                  <a:srgbClr val="FFFFFF"/>
+                </a:solidFill>
+                <a:latin typeface="Calibri"/>
+              </a:defRPr>
+            </a:pPr>
+            <a:r>
+              <a:t>Fix 2 — switching the threshold</a:t>
+            </a:r>
+          </a:p>
+        </p:txBody>
+      </p:sp>
+      <p:sp>
+        <p:nvSpPr>
+          <p:cNvPr id="5" name="TextBox 4"/>
+          <p:cNvSpPr txBox="1"/>
+          <p:nvPr/>
+        </p:nvSpPr>
+        <p:spPr>
+          <a:xfrm>
+            <a:off x="548640" y="658368"/>
+            <a:ext cx="11094415" cy="365760"/>
+          </a:xfrm>
+          <a:prstGeom prst="rect">
+            <a:avLst/>
+          </a:prstGeom>
+          <a:noFill/>
+        </p:spPr>
+        <p:txBody>
+          <a:bodyPr wrap="none">
+            <a:spAutoFit/>
+          </a:bodyPr>
+          <a:lstStyle/>
+          <a:p>
+            <a:pPr>
+              <a:defRPr sz="1300">
+                <a:solidFill>
+                  <a:srgbClr val="CBD5E1"/>
+                </a:solidFill>
+                <a:latin typeface="Calibri"/>
+              </a:defRPr>
+            </a:pPr>
+            <a:r>
+              <a:t>0.5 to the EER-optimal 0.689, on the deployed model</a:t>
+            </a:r>
+          </a:p>
+        </p:txBody>
+      </p:sp>
+      <p:sp>
+        <p:nvSpPr>
+          <p:cNvPr id="6" name="TextBox 5"/>
+          <p:cNvSpPr txBox="1"/>
+          <p:nvPr/>
+        </p:nvSpPr>
+        <p:spPr>
+          <a:xfrm>
+            <a:off x="11368735" y="6473952"/>
+            <a:ext cx="548640" cy="292608"/>
+          </a:xfrm>
+          <a:prstGeom prst="rect">
+            <a:avLst/>
+          </a:prstGeom>
+          <a:noFill/>
+        </p:spPr>
+        <p:txBody>
+          <a:bodyPr wrap="square">
+            <a:spAutoFit/>
+          </a:bodyPr>
+          <a:lstStyle/>
+          <a:p>
+            <a:pPr algn="r">
+              <a:defRPr sz="1100" b="0">
+                <a:solidFill>
+                  <a:srgbClr val="64748B"/>
+                </a:solidFill>
+                <a:latin typeface="Calibri"/>
+              </a:defRPr>
+            </a:pPr>
+            <a:r>
+              <a:t>10</a:t>
+            </a:r>
+          </a:p>
+        </p:txBody>
+      </p:sp>
+      <p:sp>
+        <p:nvSpPr>
+          <p:cNvPr id="7" name="Rounded Rectangle 6"/>
+          <p:cNvSpPr/>
+          <p:nvPr/>
+        </p:nvSpPr>
+        <p:spPr>
+          <a:xfrm>
+            <a:off x="548640" y="1417320"/>
+            <a:ext cx="3515258" cy="1554480"/>
+          </a:xfrm>
+          <a:prstGeom prst="roundRect">
+            <a:avLst>
+              <a:gd name="adj" fmla="val 6000"/>
+            </a:avLst>
+          </a:prstGeom>
+          <a:solidFill>
+            <a:srgbClr val="FFFFFF"/>
+          </a:solidFill>
+          <a:ln w="12700">
+            <a:solidFill>
+              <a:srgbClr val="E2E8F0"/>
+            </a:solidFill>
+          </a:ln>
+          <a:effectLst/>
+        </p:spPr>
+        <p:style>
+          <a:lnRef idx="1">
+            <a:schemeClr val="accent1"/>
+          </a:lnRef>
+          <a:fillRef idx="3">
+            <a:schemeClr val="accent1"/>
+          </a:fillRef>
+          <a:effectRef idx="2">
+            <a:schemeClr val="accent1"/>
+          </a:effectRef>
+          <a:fontRef idx="minor">
+            <a:schemeClr val="lt1"/>
+          </a:fontRef>
+        </p:style>
+        <p:txBody>
+          <a:bodyPr rtlCol="0" anchor="ctr"/>
+          <a:lstStyle/>
+          <a:p>
+            <a:pPr algn="ctr"/>
+          </a:p>
+        </p:txBody>
+      </p:sp>
+      <p:sp>
+        <p:nvSpPr>
+          <p:cNvPr id="8" name="TextBox 7"/>
+          <p:cNvSpPr txBox="1"/>
+          <p:nvPr/>
+        </p:nvSpPr>
+        <p:spPr>
+          <a:xfrm>
+            <a:off x="548640" y="1618488"/>
+            <a:ext cx="3515258" cy="731520"/>
+          </a:xfrm>
+          <a:prstGeom prst="rect">
+            <a:avLst/>
+          </a:prstGeom>
+          <a:noFill/>
+        </p:spPr>
+        <p:txBody>
+          <a:bodyPr wrap="none">
+            <a:spAutoFit/>
+          </a:bodyPr>
+          <a:lstStyle/>
+          <a:p>
+            <a:pPr algn="ctr">
+              <a:defRPr sz="3400" b="1">
+                <a:solidFill>
+                  <a:srgbClr val="DC2626"/>
+                </a:solidFill>
+                <a:latin typeface="Calibri"/>
+              </a:defRPr>
+            </a:pPr>
+            <a:r>
+              <a:t>80%</a:t>
+            </a:r>
+          </a:p>
+        </p:txBody>
+      </p:sp>
+      <p:sp>
+        <p:nvSpPr>
+          <p:cNvPr id="9" name="TextBox 8"/>
+          <p:cNvSpPr txBox="1"/>
+          <p:nvPr/>
+        </p:nvSpPr>
+        <p:spPr>
+          <a:xfrm>
+            <a:off x="640080" y="2377440"/>
+            <a:ext cx="3332378" cy="548640"/>
+          </a:xfrm>
+          <a:prstGeom prst="rect">
+            <a:avLst/>
+          </a:prstGeom>
+          <a:noFill/>
+        </p:spPr>
+        <p:txBody>
+          <a:bodyPr wrap="square">
+            <a:spAutoFit/>
+          </a:bodyPr>
+          <a:lstStyle/>
+          <a:p>
+            <a:pPr algn="ctr">
+              <a:defRPr sz="1200">
+                <a:solidFill>
+                  <a:srgbClr val="64748B"/>
+                </a:solidFill>
+                <a:latin typeface="Calibri"/>
+              </a:defRPr>
+            </a:pPr>
+            <a:r>
+              <a:t>Bonafide recall</a:t>
+            </a:r>
+          </a:p>
+          <a:p>
+            <a:pPr algn="ctr">
+              <a:defRPr sz="1200">
+                <a:solidFill>
+                  <a:srgbClr val="64748B"/>
+                </a:solidFill>
+                <a:latin typeface="Calibri"/>
+              </a:defRPr>
+            </a:pPr>
+            <a:r>
+              <a:t>at the default 0.5</a:t>
+            </a:r>
+          </a:p>
+        </p:txBody>
+      </p:sp>
+      <p:sp>
+        <p:nvSpPr>
+          <p:cNvPr id="10" name="Rounded Rectangle 9"/>
+          <p:cNvSpPr/>
+          <p:nvPr/>
+        </p:nvSpPr>
+        <p:spPr>
+          <a:xfrm>
+            <a:off x="4338218" y="1417320"/>
+            <a:ext cx="3515258" cy="1554480"/>
+          </a:xfrm>
+          <a:prstGeom prst="roundRect">
+            <a:avLst>
+              <a:gd name="adj" fmla="val 6000"/>
+            </a:avLst>
+          </a:prstGeom>
+          <a:solidFill>
+            <a:srgbClr val="FFFFFF"/>
+          </a:solidFill>
+          <a:ln w="12700">
+            <a:solidFill>
+              <a:srgbClr val="E2E8F0"/>
+            </a:solidFill>
+          </a:ln>
+          <a:effectLst/>
+        </p:spPr>
+        <p:style>
+          <a:lnRef idx="1">
+            <a:schemeClr val="accent1"/>
+          </a:lnRef>
+          <a:fillRef idx="3">
+            <a:schemeClr val="accent1"/>
+          </a:fillRef>
+          <a:effectRef idx="2">
+            <a:schemeClr val="accent1"/>
+          </a:effectRef>
+          <a:fontRef idx="minor">
+            <a:schemeClr val="lt1"/>
+          </a:fontRef>
+        </p:style>
+        <p:txBody>
+          <a:bodyPr rtlCol="0" anchor="ctr"/>
+          <a:lstStyle/>
+          <a:p>
+            <a:pPr algn="ctr"/>
+          </a:p>
+        </p:txBody>
+      </p:sp>
+      <p:sp>
+        <p:nvSpPr>
+          <p:cNvPr id="11" name="TextBox 10"/>
+          <p:cNvSpPr txBox="1"/>
+          <p:nvPr/>
+        </p:nvSpPr>
+        <p:spPr>
+          <a:xfrm>
+            <a:off x="4338218" y="1618488"/>
+            <a:ext cx="3515258" cy="731520"/>
+          </a:xfrm>
+          <a:prstGeom prst="rect">
+            <a:avLst/>
+          </a:prstGeom>
+          <a:noFill/>
+        </p:spPr>
+        <p:txBody>
+          <a:bodyPr wrap="none">
+            <a:spAutoFit/>
+          </a:bodyPr>
+          <a:lstStyle/>
+          <a:p>
+            <a:pPr algn="ctr">
+              <a:defRPr sz="3400" b="1">
+                <a:solidFill>
+                  <a:srgbClr val="0D9488"/>
+                </a:solidFill>
+                <a:latin typeface="Calibri"/>
+              </a:defRPr>
+            </a:pPr>
+            <a:r>
+              <a:t>91%</a:t>
+            </a:r>
+          </a:p>
+        </p:txBody>
+      </p:sp>
+      <p:sp>
+        <p:nvSpPr>
+          <p:cNvPr id="12" name="TextBox 11"/>
+          <p:cNvSpPr txBox="1"/>
+          <p:nvPr/>
+        </p:nvSpPr>
+        <p:spPr>
+          <a:xfrm>
+            <a:off x="4429658" y="2377440"/>
+            <a:ext cx="3332378" cy="548640"/>
+          </a:xfrm>
+          <a:prstGeom prst="rect">
+            <a:avLst/>
+          </a:prstGeom>
+          <a:noFill/>
+        </p:spPr>
+        <p:txBody>
+          <a:bodyPr wrap="square">
+            <a:spAutoFit/>
+          </a:bodyPr>
+          <a:lstStyle/>
+          <a:p>
+            <a:pPr algn="ctr">
+              <a:defRPr sz="1200">
+                <a:solidFill>
+                  <a:srgbClr val="64748B"/>
+                </a:solidFill>
+                <a:latin typeface="Calibri"/>
+              </a:defRPr>
+            </a:pPr>
+            <a:r>
+              <a:t>Bonafide recall</a:t>
+            </a:r>
+          </a:p>
+          <a:p>
+            <a:pPr algn="ctr">
+              <a:defRPr sz="1200">
+                <a:solidFill>
+                  <a:srgbClr val="64748B"/>
+                </a:solidFill>
+                <a:latin typeface="Calibri"/>
+              </a:defRPr>
+            </a:pPr>
+            <a:r>
+              <a:t>at the EER threshold</a:t>
+            </a:r>
+          </a:p>
+        </p:txBody>
+      </p:sp>
+      <p:sp>
+        <p:nvSpPr>
+          <p:cNvPr id="13" name="Rounded Rectangle 12"/>
+          <p:cNvSpPr/>
+          <p:nvPr/>
+        </p:nvSpPr>
+        <p:spPr>
+          <a:xfrm>
+            <a:off x="8127796" y="1417320"/>
+            <a:ext cx="3515258" cy="1554480"/>
+          </a:xfrm>
+          <a:prstGeom prst="roundRect">
+            <a:avLst>
+              <a:gd name="adj" fmla="val 6000"/>
+            </a:avLst>
+          </a:prstGeom>
+          <a:solidFill>
+            <a:srgbClr val="FFFFFF"/>
+          </a:solidFill>
+          <a:ln w="12700">
+            <a:solidFill>
+              <a:srgbClr val="E2E8F0"/>
+            </a:solidFill>
+          </a:ln>
+          <a:effectLst/>
+        </p:spPr>
+        <p:style>
+          <a:lnRef idx="1">
+            <a:schemeClr val="accent1"/>
+          </a:lnRef>
+          <a:fillRef idx="3">
+            <a:schemeClr val="accent1"/>
+          </a:fillRef>
+          <a:effectRef idx="2">
+            <a:schemeClr val="accent1"/>
+          </a:effectRef>
+          <a:fontRef idx="minor">
+            <a:schemeClr val="lt1"/>
+          </a:fontRef>
+        </p:style>
+        <p:txBody>
+          <a:bodyPr rtlCol="0" anchor="ctr"/>
+          <a:lstStyle/>
+          <a:p>
+            <a:pPr algn="ctr"/>
+          </a:p>
+        </p:txBody>
+      </p:sp>
+      <p:sp>
+        <p:nvSpPr>
+          <p:cNvPr id="14" name="TextBox 13"/>
+          <p:cNvSpPr txBox="1"/>
+          <p:nvPr/>
+        </p:nvSpPr>
+        <p:spPr>
+          <a:xfrm>
+            <a:off x="8127796" y="1618488"/>
+            <a:ext cx="3515258" cy="731520"/>
+          </a:xfrm>
+          <a:prstGeom prst="rect">
+            <a:avLst/>
+          </a:prstGeom>
+          <a:noFill/>
+        </p:spPr>
+        <p:txBody>
+          <a:bodyPr wrap="none">
+            <a:spAutoFit/>
+          </a:bodyPr>
+          <a:lstStyle/>
+          <a:p>
+            <a:pPr algn="ctr">
+              <a:defRPr sz="3400" b="1">
+                <a:solidFill>
+                  <a:srgbClr val="2B6CB0"/>
+                </a:solidFill>
+                <a:latin typeface="Calibri"/>
+              </a:defRPr>
+            </a:pPr>
+            <a:r>
+              <a:t>9.3%</a:t>
+            </a:r>
+          </a:p>
+        </p:txBody>
+      </p:sp>
+      <p:sp>
+        <p:nvSpPr>
+          <p:cNvPr id="15" name="TextBox 14"/>
+          <p:cNvSpPr txBox="1"/>
+          <p:nvPr/>
+        </p:nvSpPr>
+        <p:spPr>
+          <a:xfrm>
+            <a:off x="8219236" y="2377440"/>
+            <a:ext cx="3332378" cy="548640"/>
+          </a:xfrm>
+          <a:prstGeom prst="rect">
+            <a:avLst/>
+          </a:prstGeom>
+          <a:noFill/>
+        </p:spPr>
+        <p:txBody>
+          <a:bodyPr wrap="square">
+            <a:spAutoFit/>
+          </a:bodyPr>
+          <a:lstStyle/>
+          <a:p>
+            <a:pPr algn="ctr">
+              <a:defRPr sz="1200">
+                <a:solidFill>
+                  <a:srgbClr val="64748B"/>
+                </a:solidFill>
+                <a:latin typeface="Calibri"/>
+              </a:defRPr>
+            </a:pPr>
+            <a:r>
+              <a:t>Equal Error Rate</a:t>
+            </a:r>
+          </a:p>
+          <a:p>
+            <a:pPr algn="ctr">
+              <a:defRPr sz="1200">
+                <a:solidFill>
+                  <a:srgbClr val="64748B"/>
+                </a:solidFill>
+                <a:latin typeface="Calibri"/>
+              </a:defRPr>
+            </a:pPr>
+            <a:r>
+              <a:t>where both errors are equal</a:t>
+            </a:r>
+          </a:p>
+        </p:txBody>
+      </p:sp>
+      <p:sp>
+        <p:nvSpPr>
+          <p:cNvPr id="16" name="TextBox 15"/>
+          <p:cNvSpPr txBox="1"/>
+          <p:nvPr/>
+        </p:nvSpPr>
+        <p:spPr>
+          <a:xfrm>
+            <a:off x="548640" y="3090672"/>
+            <a:ext cx="11094415" cy="457200"/>
+          </a:xfrm>
+          <a:prstGeom prst="rect">
+            <a:avLst/>
+          </a:prstGeom>
+          <a:noFill/>
+        </p:spPr>
+        <p:txBody>
+          <a:bodyPr wrap="square">
+            <a:spAutoFit/>
+          </a:bodyPr>
+          <a:lstStyle/>
+          <a:p>
+            <a:pPr>
+              <a:spcAft>
+                <a:spcPts val="1200"/>
+              </a:spcAft>
+              <a:defRPr sz="1400">
+                <a:solidFill>
+                  <a:srgbClr val="1A202C"/>
+                </a:solidFill>
+                <a:latin typeface="Calibri"/>
+              </a:defRPr>
+            </a:pPr>
+            <a:r>
+              <a:t>•  The threshold now lives inside the model artifact, so the streaming consumer and the web app cannot drift back to 0.5.</a:t>
+            </a:r>
+          </a:p>
+        </p:txBody>
+      </p:sp>
+      <p:graphicFrame>
+        <p:nvGraphicFramePr>
+          <p:cNvPr id="17" name="Table 16"/>
+          <p:cNvGraphicFramePr>
+            <a:graphicFrameLocks noGrp="1"/>
+          </p:cNvGraphicFramePr>
+          <p:nvPr/>
+        </p:nvGraphicFramePr>
+        <p:xfrm>
+          <a:off x="548640" y="3611880"/>
           <a:ext cx="11094414" cy="2523744"/>
         </p:xfrm>
         <a:graphic>
@@ -4465,276 +5465,6 @@
 </p:sld>
 </file>
 
-<file path=ppt/slides/slide11.xml><?xml version="1.0" encoding="utf-8"?>
-<p:sld xmlns:a="http://schemas.openxmlformats.org/drawingml/2006/main" xmlns:p="http://schemas.openxmlformats.org/presentationml/2006/main" xmlns:r="http://schemas.openxmlformats.org/officeDocument/2006/relationships">
-  <p:cSld>
-    <p:bg>
-      <p:bgPr>
-        <a:solidFill>
-          <a:srgbClr val="F7F9FB"/>
-        </a:solidFill>
-        <a:effectLst/>
-      </p:bgPr>
-    </p:bg>
-    <p:spTree>
-      <p:nvGrpSpPr>
-        <p:cNvPr id="1" name=""/>
-        <p:cNvGrpSpPr/>
-        <p:nvPr/>
-      </p:nvGrpSpPr>
-      <p:grpSpPr/>
-      <p:sp>
-        <p:nvSpPr>
-          <p:cNvPr id="2" name="Rectangle 1"/>
-          <p:cNvSpPr/>
-          <p:nvPr/>
-        </p:nvSpPr>
-        <p:spPr>
-          <a:xfrm>
-            <a:off x="0" y="0"/>
-            <a:ext cx="12191695" cy="1051560"/>
-          </a:xfrm>
-          <a:prstGeom prst="rect">
-            <a:avLst/>
-          </a:prstGeom>
-          <a:solidFill>
-            <a:srgbClr val="0F2942"/>
-          </a:solidFill>
-          <a:ln>
-            <a:noFill/>
-          </a:ln>
-          <a:effectLst/>
-        </p:spPr>
-        <p:style>
-          <a:lnRef idx="1">
-            <a:schemeClr val="accent1"/>
-          </a:lnRef>
-          <a:fillRef idx="3">
-            <a:schemeClr val="accent1"/>
-          </a:fillRef>
-          <a:effectRef idx="2">
-            <a:schemeClr val="accent1"/>
-          </a:effectRef>
-          <a:fontRef idx="minor">
-            <a:schemeClr val="lt1"/>
-          </a:fontRef>
-        </p:style>
-        <p:txBody>
-          <a:bodyPr rtlCol="0" anchor="ctr"/>
-          <a:lstStyle/>
-          <a:p>
-            <a:pPr algn="ctr"/>
-          </a:p>
-        </p:txBody>
-      </p:sp>
-      <p:sp>
-        <p:nvSpPr>
-          <p:cNvPr id="3" name="Rectangle 2"/>
-          <p:cNvSpPr/>
-          <p:nvPr/>
-        </p:nvSpPr>
-        <p:spPr>
-          <a:xfrm>
-            <a:off x="0" y="1051560"/>
-            <a:ext cx="2103120" cy="63500"/>
-          </a:xfrm>
-          <a:prstGeom prst="rect">
-            <a:avLst/>
-          </a:prstGeom>
-          <a:solidFill>
-            <a:srgbClr val="0D9488"/>
-          </a:solidFill>
-          <a:ln>
-            <a:noFill/>
-          </a:ln>
-          <a:effectLst/>
-        </p:spPr>
-        <p:style>
-          <a:lnRef idx="1">
-            <a:schemeClr val="accent1"/>
-          </a:lnRef>
-          <a:fillRef idx="3">
-            <a:schemeClr val="accent1"/>
-          </a:fillRef>
-          <a:effectRef idx="2">
-            <a:schemeClr val="accent1"/>
-          </a:effectRef>
-          <a:fontRef idx="minor">
-            <a:schemeClr val="lt1"/>
-          </a:fontRef>
-        </p:style>
-        <p:txBody>
-          <a:bodyPr rtlCol="0" anchor="ctr"/>
-          <a:lstStyle/>
-          <a:p>
-            <a:pPr algn="ctr"/>
-          </a:p>
-        </p:txBody>
-      </p:sp>
-      <p:sp>
-        <p:nvSpPr>
-          <p:cNvPr id="4" name="TextBox 3"/>
-          <p:cNvSpPr txBox="1"/>
-          <p:nvPr/>
-        </p:nvSpPr>
-        <p:spPr>
-          <a:xfrm>
-            <a:off x="548640" y="146304"/>
-            <a:ext cx="11094415" cy="640080"/>
-          </a:xfrm>
-          <a:prstGeom prst="rect">
-            <a:avLst/>
-          </a:prstGeom>
-          <a:noFill/>
-        </p:spPr>
-        <p:txBody>
-          <a:bodyPr wrap="square">
-            <a:spAutoFit/>
-          </a:bodyPr>
-          <a:lstStyle/>
-          <a:p>
-            <a:pPr>
-              <a:defRPr sz="3000" b="1">
-                <a:solidFill>
-                  <a:srgbClr val="FFFFFF"/>
-                </a:solidFill>
-                <a:latin typeface="Calibri"/>
-              </a:defRPr>
-            </a:pPr>
-            <a:r>
-              <a:t>Results on dev — ROC curve &amp; what the model learned</a:t>
-            </a:r>
-          </a:p>
-        </p:txBody>
-      </p:sp>
-      <p:sp>
-        <p:nvSpPr>
-          <p:cNvPr id="5" name="TextBox 4"/>
-          <p:cNvSpPr txBox="1"/>
-          <p:nvPr/>
-        </p:nvSpPr>
-        <p:spPr>
-          <a:xfrm>
-            <a:off x="11368735" y="6473952"/>
-            <a:ext cx="548640" cy="292608"/>
-          </a:xfrm>
-          <a:prstGeom prst="rect">
-            <a:avLst/>
-          </a:prstGeom>
-          <a:noFill/>
-        </p:spPr>
-        <p:txBody>
-          <a:bodyPr wrap="square">
-            <a:spAutoFit/>
-          </a:bodyPr>
-          <a:lstStyle/>
-          <a:p>
-            <a:pPr algn="r">
-              <a:defRPr sz="1100" b="0">
-                <a:solidFill>
-                  <a:srgbClr val="64748B"/>
-                </a:solidFill>
-                <a:latin typeface="Calibri"/>
-              </a:defRPr>
-            </a:pPr>
-            <a:r>
-              <a:t>10</a:t>
-            </a:r>
-          </a:p>
-        </p:txBody>
-      </p:sp>
-      <p:pic>
-        <p:nvPicPr>
-          <p:cNvPr id="6" name="Picture 5" descr="roc_curve.png"/>
-          <p:cNvPicPr>
-            <a:picLocks noChangeAspect="1"/>
-          </p:cNvPicPr>
-          <p:nvPr/>
-        </p:nvPicPr>
-        <p:blipFill>
-          <a:blip r:embed="rId2"/>
-          <a:stretch>
-            <a:fillRect/>
-          </a:stretch>
-        </p:blipFill>
-        <p:spPr>
-          <a:xfrm>
-            <a:off x="807643" y="1417320"/>
-            <a:ext cx="4892040" cy="4892040"/>
-          </a:xfrm>
-          <a:prstGeom prst="rect">
-            <a:avLst/>
-          </a:prstGeom>
-        </p:spPr>
-      </p:pic>
-      <p:pic>
-        <p:nvPicPr>
-          <p:cNvPr id="7" name="Picture 6" descr="feature_importance.png"/>
-          <p:cNvPicPr>
-            <a:picLocks noChangeAspect="1"/>
-          </p:cNvPicPr>
-          <p:nvPr/>
-        </p:nvPicPr>
-        <p:blipFill>
-          <a:blip r:embed="rId3"/>
-          <a:stretch>
-            <a:fillRect/>
-          </a:stretch>
-        </p:blipFill>
-        <p:spPr>
-          <a:xfrm>
-            <a:off x="6233007" y="2059991"/>
-            <a:ext cx="5410047" cy="3606698"/>
-          </a:xfrm>
-          <a:prstGeom prst="rect">
-            <a:avLst/>
-          </a:prstGeom>
-        </p:spPr>
-      </p:pic>
-      <p:sp>
-        <p:nvSpPr>
-          <p:cNvPr id="8" name="TextBox 7"/>
-          <p:cNvSpPr txBox="1"/>
-          <p:nvPr/>
-        </p:nvSpPr>
-        <p:spPr>
-          <a:xfrm>
-            <a:off x="548640" y="6400800"/>
-            <a:ext cx="11094415" cy="365760"/>
-          </a:xfrm>
-          <a:prstGeom prst="rect">
-            <a:avLst/>
-          </a:prstGeom>
-          <a:noFill/>
-        </p:spPr>
-        <p:txBody>
-          <a:bodyPr wrap="square">
-            <a:spAutoFit/>
-          </a:bodyPr>
-          <a:lstStyle/>
-          <a:p>
-            <a:pPr algn="ctr">
-              <a:defRPr sz="1200" b="0">
-                <a:solidFill>
-                  <a:srgbClr val="64748B"/>
-                </a:solidFill>
-                <a:latin typeface="Calibri"/>
-              </a:defRPr>
-            </a:pPr>
-            <a:r>
-              <a:t>Both from the dev partition. Left: both candidate models, deployed model's EER point marked. Right: top acoustic features — MFCC variance dominates.</a:t>
-            </a:r>
-          </a:p>
-        </p:txBody>
-      </p:sp>
-    </p:spTree>
-  </p:cSld>
-  <p:clrMapOvr>
-    <a:masterClrMapping/>
-  </p:clrMapOvr>
-</p:sld>
-</file>
-
 <file path=ppt/slides/slide12.xml><?xml version="1.0" encoding="utf-8"?>
 <p:sld xmlns:a="http://schemas.openxmlformats.org/drawingml/2006/main" xmlns:p="http://schemas.openxmlformats.org/presentationml/2006/main" xmlns:r="http://schemas.openxmlformats.org/officeDocument/2006/relationships">
   <p:cSld>
@@ -4872,7 +5602,7 @@
               </a:defRPr>
             </a:pPr>
             <a:r>
-              <a:t>AI capability 2 — embeddings &amp; semantic search</a:t>
+              <a:t>Results on dev — ROC curve &amp; what the model learned</a:t>
             </a:r>
           </a:p>
         </p:txBody>
@@ -4913,16 +5643,64 @@
           </a:p>
         </p:txBody>
       </p:sp>
-      <p:sp>
-        <p:nvSpPr>
-          <p:cNvPr id="6" name="TextBox 5"/>
+      <p:pic>
+        <p:nvPicPr>
+          <p:cNvPr id="6" name="Picture 5" descr="roc_curve.png"/>
+          <p:cNvPicPr>
+            <a:picLocks noChangeAspect="1"/>
+          </p:cNvPicPr>
+          <p:nvPr/>
+        </p:nvPicPr>
+        <p:blipFill>
+          <a:blip r:embed="rId2"/>
+          <a:stretch>
+            <a:fillRect/>
+          </a:stretch>
+        </p:blipFill>
+        <p:spPr>
+          <a:xfrm>
+            <a:off x="807643" y="1417320"/>
+            <a:ext cx="4892040" cy="4892040"/>
+          </a:xfrm>
+          <a:prstGeom prst="rect">
+            <a:avLst/>
+          </a:prstGeom>
+        </p:spPr>
+      </p:pic>
+      <p:pic>
+        <p:nvPicPr>
+          <p:cNvPr id="7" name="Picture 6" descr="feature_importance.png"/>
+          <p:cNvPicPr>
+            <a:picLocks noChangeAspect="1"/>
+          </p:cNvPicPr>
+          <p:nvPr/>
+        </p:nvPicPr>
+        <p:blipFill>
+          <a:blip r:embed="rId3"/>
+          <a:stretch>
+            <a:fillRect/>
+          </a:stretch>
+        </p:blipFill>
+        <p:spPr>
+          <a:xfrm>
+            <a:off x="6233007" y="2059991"/>
+            <a:ext cx="5410047" cy="3606698"/>
+          </a:xfrm>
+          <a:prstGeom prst="rect">
+            <a:avLst/>
+          </a:prstGeom>
+        </p:spPr>
+      </p:pic>
+      <p:sp>
+        <p:nvSpPr>
+          <p:cNvPr id="8" name="TextBox 7"/>
           <p:cNvSpPr txBox="1"/>
           <p:nvPr/>
         </p:nvSpPr>
         <p:spPr>
           <a:xfrm>
-            <a:off x="548640" y="1417320"/>
-            <a:ext cx="11094415" cy="3337560"/>
+            <a:off x="548640" y="6400800"/>
+            <a:ext cx="11094415" cy="365760"/>
           </a:xfrm>
           <a:prstGeom prst="rect">
             <a:avLst/>
@@ -4935,95 +5713,8 @@
           </a:bodyPr>
           <a:lstStyle/>
           <a:p>
-            <a:pPr>
-              <a:spcAft>
-                <a:spcPts val="1200"/>
-              </a:spcAft>
-              <a:defRPr sz="1900">
-                <a:solidFill>
-                  <a:srgbClr val="1A202C"/>
-                </a:solidFill>
-                <a:latin typeface="Calibri"/>
-              </a:defRPr>
-            </a:pPr>
-            <a:r>
-              <a:t>•  The same acoustic feature vectors double as embeddings — no separate embedding model needed.</a:t>
-            </a:r>
-          </a:p>
-          <a:p>
-            <a:pPr>
-              <a:spcAft>
-                <a:spcPts val="1200"/>
-              </a:spcAft>
-              <a:defRPr sz="1900">
-                <a:solidFill>
-                  <a:srgbClr val="1A202C"/>
-                </a:solidFill>
-                <a:latin typeface="Calibri"/>
-              </a:defRPr>
-            </a:pPr>
-            <a:r>
-              <a:t>•  Standardized (zero mean, unit variance) so cosine similarity isn't dominated by whichever feature happens to have the largest raw scale.</a:t>
-            </a:r>
-          </a:p>
-          <a:p>
-            <a:pPr>
-              <a:spcAft>
-                <a:spcPts val="1200"/>
-              </a:spcAft>
-              <a:defRPr sz="1900">
-                <a:solidFill>
-                  <a:srgbClr val="1A202C"/>
-                </a:solidFill>
-                <a:latin typeface="Calibri"/>
-              </a:defRPr>
-            </a:pPr>
-            <a:r>
-              <a:t>•  Indexed into Elasticsearch as dense_vector fields, added to the existing index in place (a mapping update, not a reindex — the 50k+ documents were already there).</a:t>
-            </a:r>
-          </a:p>
-          <a:p>
-            <a:pPr>
-              <a:spcAft>
-                <a:spcPts val="1200"/>
-              </a:spcAft>
-              <a:defRPr sz="1900">
-                <a:solidFill>
-                  <a:srgbClr val="1A202C"/>
-                </a:solidFill>
-                <a:latin typeface="Calibri"/>
-              </a:defRPr>
-            </a:pPr>
-            <a:r>
-              <a:t>•  Powers /classify's "most acoustically similar training clips" — k-NN search, playable in the browser, replacing a keyword match with genuine semantic search.</a:t>
-            </a:r>
-          </a:p>
-        </p:txBody>
-      </p:sp>
-      <p:sp>
-        <p:nvSpPr>
-          <p:cNvPr id="7" name="TextBox 6"/>
-          <p:cNvSpPr txBox="1"/>
-          <p:nvPr/>
-        </p:nvSpPr>
-        <p:spPr>
-          <a:xfrm>
-            <a:off x="548640" y="4636008"/>
-            <a:ext cx="11094415" cy="228600"/>
-          </a:xfrm>
-          <a:prstGeom prst="rect">
-            <a:avLst/>
-          </a:prstGeom>
-          <a:noFill/>
-        </p:spPr>
-        <p:txBody>
-          <a:bodyPr wrap="square">
-            <a:spAutoFit/>
-          </a:bodyPr>
-          <a:lstStyle/>
-          <a:p>
-            <a:pPr algn="l">
-              <a:defRPr sz="1000" b="0">
+            <a:pPr algn="ctr">
+              <a:defRPr sz="1200" b="0">
                 <a:solidFill>
                   <a:srgbClr val="64748B"/>
                 </a:solidFill>
@@ -5031,940 +5722,11 @@
               </a:defRPr>
             </a:pPr>
             <a:r>
-              <a:t>Where this stage sits in the pipeline:</a:t>
-            </a:r>
-          </a:p>
-        </p:txBody>
-      </p:sp>
-      <p:sp>
-        <p:nvSpPr>
-          <p:cNvPr id="8" name="Rounded Rectangle 7"/>
-          <p:cNvSpPr/>
-          <p:nvPr/>
-        </p:nvSpPr>
-        <p:spPr>
-          <a:xfrm>
-            <a:off x="548640" y="4892040"/>
-            <a:ext cx="2663875" cy="441960"/>
-          </a:xfrm>
-          <a:prstGeom prst="roundRect">
-            <a:avLst>
-              <a:gd name="adj" fmla="val 6000"/>
-            </a:avLst>
-          </a:prstGeom>
-          <a:solidFill>
-            <a:srgbClr val="FFFFFF"/>
-          </a:solidFill>
-          <a:ln w="12700">
-            <a:solidFill>
-              <a:srgbClr val="2B6CB0"/>
-            </a:solidFill>
-          </a:ln>
-          <a:effectLst/>
-        </p:spPr>
-        <p:style>
-          <a:lnRef idx="1">
-            <a:schemeClr val="accent1"/>
-          </a:lnRef>
-          <a:fillRef idx="3">
-            <a:schemeClr val="accent1"/>
-          </a:fillRef>
-          <a:effectRef idx="2">
-            <a:schemeClr val="accent1"/>
-          </a:effectRef>
-          <a:fontRef idx="minor">
-            <a:schemeClr val="lt1"/>
-          </a:fontRef>
-        </p:style>
-        <p:txBody>
-          <a:bodyPr rtlCol="0" anchor="ctr" wrap="square" lIns="54864" rIns="54864" tIns="0" bIns="0"/>
-          <a:lstStyle/>
-          <a:p>
-            <a:pPr algn="ctr">
-              <a:defRPr sz="850" b="1">
-                <a:solidFill>
-                  <a:srgbClr val="1A202C"/>
-                </a:solidFill>
-                <a:latin typeface="Calibri"/>
-              </a:defRPr>
-            </a:pPr>
-            <a:r>
-              <a:t>Kaggle</a:t>
-            </a:r>
-          </a:p>
-        </p:txBody>
-      </p:sp>
-      <p:sp>
-        <p:nvSpPr>
-          <p:cNvPr id="9" name="Rounded Rectangle 8"/>
-          <p:cNvSpPr/>
-          <p:nvPr/>
-        </p:nvSpPr>
-        <p:spPr>
-          <a:xfrm>
-            <a:off x="3358819" y="4892040"/>
-            <a:ext cx="2663875" cy="441960"/>
-          </a:xfrm>
-          <a:prstGeom prst="roundRect">
-            <a:avLst>
-              <a:gd name="adj" fmla="val 6000"/>
-            </a:avLst>
-          </a:prstGeom>
-          <a:solidFill>
-            <a:srgbClr val="FFFFFF"/>
-          </a:solidFill>
-          <a:ln w="12700">
-            <a:solidFill>
-              <a:srgbClr val="2B6CB0"/>
-            </a:solidFill>
-          </a:ln>
-          <a:effectLst/>
-        </p:spPr>
-        <p:style>
-          <a:lnRef idx="1">
-            <a:schemeClr val="accent1"/>
-          </a:lnRef>
-          <a:fillRef idx="3">
-            <a:schemeClr val="accent1"/>
-          </a:fillRef>
-          <a:effectRef idx="2">
-            <a:schemeClr val="accent1"/>
-          </a:effectRef>
-          <a:fontRef idx="minor">
-            <a:schemeClr val="lt1"/>
-          </a:fontRef>
-        </p:style>
-        <p:txBody>
-          <a:bodyPr rtlCol="0" anchor="ctr" wrap="square" lIns="54864" rIns="54864" tIns="0" bIns="0"/>
-          <a:lstStyle/>
-          <a:p>
-            <a:pPr algn="ctr">
-              <a:defRPr sz="850" b="1">
-                <a:solidFill>
-                  <a:srgbClr val="1A202C"/>
-                </a:solidFill>
-                <a:latin typeface="Calibri"/>
-              </a:defRPr>
-            </a:pPr>
-            <a:r>
-              <a:t>MinIO</a:t>
-            </a:r>
-          </a:p>
-        </p:txBody>
-      </p:sp>
-      <p:sp>
-        <p:nvSpPr>
-          <p:cNvPr id="10" name="Rounded Rectangle 9"/>
-          <p:cNvSpPr/>
-          <p:nvPr/>
-        </p:nvSpPr>
-        <p:spPr>
-          <a:xfrm>
-            <a:off x="6168998" y="4892040"/>
-            <a:ext cx="2663875" cy="441960"/>
-          </a:xfrm>
-          <a:prstGeom prst="roundRect">
-            <a:avLst>
-              <a:gd name="adj" fmla="val 6000"/>
-            </a:avLst>
-          </a:prstGeom>
-          <a:solidFill>
-            <a:srgbClr val="FFFFFF"/>
-          </a:solidFill>
-          <a:ln w="12700">
-            <a:solidFill>
-              <a:srgbClr val="2B6CB0"/>
-            </a:solidFill>
-          </a:ln>
-          <a:effectLst/>
-        </p:spPr>
-        <p:style>
-          <a:lnRef idx="1">
-            <a:schemeClr val="accent1"/>
-          </a:lnRef>
-          <a:fillRef idx="3">
-            <a:schemeClr val="accent1"/>
-          </a:fillRef>
-          <a:effectRef idx="2">
-            <a:schemeClr val="accent1"/>
-          </a:effectRef>
-          <a:fontRef idx="minor">
-            <a:schemeClr val="lt1"/>
-          </a:fontRef>
-        </p:style>
-        <p:txBody>
-          <a:bodyPr rtlCol="0" anchor="ctr" wrap="square" lIns="54864" rIns="54864" tIns="0" bIns="0"/>
-          <a:lstStyle/>
-          <a:p>
-            <a:pPr algn="ctr">
-              <a:defRPr sz="850" b="1">
-                <a:solidFill>
-                  <a:srgbClr val="1A202C"/>
-                </a:solidFill>
-                <a:latin typeface="Calibri"/>
-              </a:defRPr>
-            </a:pPr>
-            <a:r>
-              <a:t>Spark</a:t>
-            </a:r>
-          </a:p>
-        </p:txBody>
-      </p:sp>
-      <p:sp>
-        <p:nvSpPr>
-          <p:cNvPr id="11" name="Rounded Rectangle 10"/>
-          <p:cNvSpPr/>
-          <p:nvPr/>
-        </p:nvSpPr>
-        <p:spPr>
-          <a:xfrm>
-            <a:off x="8979177" y="4892040"/>
-            <a:ext cx="2663875" cy="441960"/>
-          </a:xfrm>
-          <a:prstGeom prst="roundRect">
-            <a:avLst>
-              <a:gd name="adj" fmla="val 6000"/>
-            </a:avLst>
-          </a:prstGeom>
-          <a:solidFill>
-            <a:srgbClr val="FFFFFF"/>
-          </a:solidFill>
-          <a:ln w="12700">
-            <a:solidFill>
-              <a:srgbClr val="2B6CB0"/>
-            </a:solidFill>
-          </a:ln>
-          <a:effectLst/>
-        </p:spPr>
-        <p:style>
-          <a:lnRef idx="1">
-            <a:schemeClr val="accent1"/>
-          </a:lnRef>
-          <a:fillRef idx="3">
-            <a:schemeClr val="accent1"/>
-          </a:fillRef>
-          <a:effectRef idx="2">
-            <a:schemeClr val="accent1"/>
-          </a:effectRef>
-          <a:fontRef idx="minor">
-            <a:schemeClr val="lt1"/>
-          </a:fontRef>
-        </p:style>
-        <p:txBody>
-          <a:bodyPr rtlCol="0" anchor="ctr" wrap="square" lIns="54864" rIns="54864" tIns="0" bIns="0"/>
-          <a:lstStyle/>
-          <a:p>
-            <a:pPr algn="ctr">
-              <a:defRPr sz="850" b="1">
-                <a:solidFill>
-                  <a:srgbClr val="1A202C"/>
-                </a:solidFill>
-                <a:latin typeface="Calibri"/>
-              </a:defRPr>
-            </a:pPr>
-            <a:r>
-              <a:t>Parquet + ES</a:t>
-            </a:r>
-          </a:p>
-        </p:txBody>
-      </p:sp>
-      <p:sp>
-        <p:nvSpPr>
-          <p:cNvPr id="12" name="Rounded Rectangle 11"/>
-          <p:cNvSpPr/>
-          <p:nvPr/>
-        </p:nvSpPr>
-        <p:spPr>
-          <a:xfrm>
-            <a:off x="548640" y="5516880"/>
-            <a:ext cx="3600602" cy="441960"/>
-          </a:xfrm>
-          <a:prstGeom prst="roundRect">
-            <a:avLst>
-              <a:gd name="adj" fmla="val 6000"/>
-            </a:avLst>
-          </a:prstGeom>
-          <a:solidFill>
-            <a:srgbClr val="FFFFFF"/>
-          </a:solidFill>
-          <a:ln w="12700">
-            <a:solidFill>
-              <a:srgbClr val="0D9488"/>
-            </a:solidFill>
-          </a:ln>
-          <a:effectLst/>
-        </p:spPr>
-        <p:style>
-          <a:lnRef idx="1">
-            <a:schemeClr val="accent1"/>
-          </a:lnRef>
-          <a:fillRef idx="3">
-            <a:schemeClr val="accent1"/>
-          </a:fillRef>
-          <a:effectRef idx="2">
-            <a:schemeClr val="accent1"/>
-          </a:effectRef>
-          <a:fontRef idx="minor">
-            <a:schemeClr val="lt1"/>
-          </a:fontRef>
-        </p:style>
-        <p:txBody>
-          <a:bodyPr rtlCol="0" anchor="ctr" wrap="square" lIns="54864" rIns="54864" tIns="0" bIns="0"/>
-          <a:lstStyle/>
-          <a:p>
-            <a:pPr algn="ctr">
-              <a:defRPr sz="850" b="1">
-                <a:solidFill>
-                  <a:srgbClr val="1A202C"/>
-                </a:solidFill>
-                <a:latin typeface="Calibri"/>
-              </a:defRPr>
-            </a:pPr>
-            <a:r>
-              <a:t>train_classifier</a:t>
-            </a:r>
-          </a:p>
-        </p:txBody>
-      </p:sp>
-      <p:sp>
-        <p:nvSpPr>
-          <p:cNvPr id="13" name="Rounded Rectangle 12"/>
-          <p:cNvSpPr/>
-          <p:nvPr/>
-        </p:nvSpPr>
-        <p:spPr>
-          <a:xfrm>
-            <a:off x="4295546" y="5516880"/>
-            <a:ext cx="3600602" cy="441960"/>
-          </a:xfrm>
-          <a:prstGeom prst="roundRect">
-            <a:avLst>
-              <a:gd name="adj" fmla="val 6000"/>
-            </a:avLst>
-          </a:prstGeom>
-          <a:solidFill>
-            <a:srgbClr val="0D9488"/>
-          </a:solidFill>
-          <a:ln w="12700">
-            <a:solidFill>
-              <a:srgbClr val="0D9488"/>
-            </a:solidFill>
-          </a:ln>
-          <a:effectLst/>
-        </p:spPr>
-        <p:style>
-          <a:lnRef idx="1">
-            <a:schemeClr val="accent1"/>
-          </a:lnRef>
-          <a:fillRef idx="3">
-            <a:schemeClr val="accent1"/>
-          </a:fillRef>
-          <a:effectRef idx="2">
-            <a:schemeClr val="accent1"/>
-          </a:effectRef>
-          <a:fontRef idx="minor">
-            <a:schemeClr val="lt1"/>
-          </a:fontRef>
-        </p:style>
-        <p:txBody>
-          <a:bodyPr rtlCol="0" anchor="ctr" wrap="square" lIns="54864" rIns="54864" tIns="0" bIns="0"/>
-          <a:lstStyle/>
-          <a:p>
-            <a:pPr algn="ctr">
-              <a:defRPr sz="850" b="1">
-                <a:solidFill>
-                  <a:srgbClr val="FFFFFF"/>
-                </a:solidFill>
-                <a:latin typeface="Calibri"/>
-              </a:defRPr>
-            </a:pPr>
-            <a:r>
-              <a:t>index_embeddings</a:t>
-            </a:r>
-          </a:p>
-        </p:txBody>
-      </p:sp>
-      <p:sp>
-        <p:nvSpPr>
-          <p:cNvPr id="14" name="Rounded Rectangle 13"/>
-          <p:cNvSpPr/>
-          <p:nvPr/>
-        </p:nvSpPr>
-        <p:spPr>
-          <a:xfrm>
-            <a:off x="8042452" y="5516880"/>
-            <a:ext cx="3600602" cy="441960"/>
-          </a:xfrm>
-          <a:prstGeom prst="roundRect">
-            <a:avLst>
-              <a:gd name="adj" fmla="val 6000"/>
-            </a:avLst>
-          </a:prstGeom>
-          <a:solidFill>
-            <a:srgbClr val="FFFFFF"/>
-          </a:solidFill>
-          <a:ln w="12700">
-            <a:solidFill>
-              <a:srgbClr val="0D9488"/>
-            </a:solidFill>
-          </a:ln>
-          <a:effectLst/>
-        </p:spPr>
-        <p:style>
-          <a:lnRef idx="1">
-            <a:schemeClr val="accent1"/>
-          </a:lnRef>
-          <a:fillRef idx="3">
-            <a:schemeClr val="accent1"/>
-          </a:fillRef>
-          <a:effectRef idx="2">
-            <a:schemeClr val="accent1"/>
-          </a:effectRef>
-          <a:fontRef idx="minor">
-            <a:schemeClr val="lt1"/>
-          </a:fontRef>
-        </p:style>
-        <p:txBody>
-          <a:bodyPr rtlCol="0" anchor="ctr" wrap="square" lIns="54864" rIns="54864" tIns="0" bIns="0"/>
-          <a:lstStyle/>
-          <a:p>
-            <a:pPr algn="ctr">
-              <a:defRPr sz="850" b="1">
-                <a:solidFill>
-                  <a:srgbClr val="1A202C"/>
-                </a:solidFill>
-                <a:latin typeface="Calibri"/>
-              </a:defRPr>
-            </a:pPr>
-            <a:r>
-              <a:t>kafka -&gt; streaming</a:t>
-            </a:r>
-          </a:p>
-        </p:txBody>
-      </p:sp>
-      <p:sp>
-        <p:nvSpPr>
-          <p:cNvPr id="15" name="Rounded Rectangle 14"/>
-          <p:cNvSpPr/>
-          <p:nvPr/>
-        </p:nvSpPr>
-        <p:spPr>
-          <a:xfrm>
-            <a:off x="548640" y="6141720"/>
-            <a:ext cx="5474055" cy="441960"/>
-          </a:xfrm>
-          <a:prstGeom prst="roundRect">
-            <a:avLst>
-              <a:gd name="adj" fmla="val 6000"/>
-            </a:avLst>
-          </a:prstGeom>
-          <a:solidFill>
-            <a:srgbClr val="FFFFFF"/>
-          </a:solidFill>
-          <a:ln w="12700">
-            <a:solidFill>
-              <a:srgbClr val="DC2626"/>
-            </a:solidFill>
-          </a:ln>
-          <a:effectLst/>
-        </p:spPr>
-        <p:style>
-          <a:lnRef idx="1">
-            <a:schemeClr val="accent1"/>
-          </a:lnRef>
-          <a:fillRef idx="3">
-            <a:schemeClr val="accent1"/>
-          </a:fillRef>
-          <a:effectRef idx="2">
-            <a:schemeClr val="accent1"/>
-          </a:effectRef>
-          <a:fontRef idx="minor">
-            <a:schemeClr val="lt1"/>
-          </a:fontRef>
-        </p:style>
-        <p:txBody>
-          <a:bodyPr rtlCol="0" anchor="ctr" wrap="square" lIns="54864" rIns="54864" tIns="0" bIns="0"/>
-          <a:lstStyle/>
-          <a:p>
-            <a:pPr algn="ctr">
-              <a:defRPr sz="850" b="1">
-                <a:solidFill>
-                  <a:srgbClr val="1A202C"/>
-                </a:solidFill>
-                <a:latin typeface="Calibri"/>
-              </a:defRPr>
-            </a:pPr>
-            <a:r>
-              <a:t>insights.py</a:t>
-            </a:r>
-          </a:p>
-        </p:txBody>
-      </p:sp>
-      <p:sp>
-        <p:nvSpPr>
-          <p:cNvPr id="16" name="Rounded Rectangle 15"/>
-          <p:cNvSpPr/>
-          <p:nvPr/>
-        </p:nvSpPr>
-        <p:spPr>
-          <a:xfrm>
-            <a:off x="6168999" y="6141720"/>
-            <a:ext cx="5474055" cy="441960"/>
-          </a:xfrm>
-          <a:prstGeom prst="roundRect">
-            <a:avLst>
-              <a:gd name="adj" fmla="val 6000"/>
-            </a:avLst>
-          </a:prstGeom>
-          <a:solidFill>
-            <a:srgbClr val="FFFFFF"/>
-          </a:solidFill>
-          <a:ln w="12700">
-            <a:solidFill>
-              <a:srgbClr val="DC2626"/>
-            </a:solidFill>
-          </a:ln>
-          <a:effectLst/>
-        </p:spPr>
-        <p:style>
-          <a:lnRef idx="1">
-            <a:schemeClr val="accent1"/>
-          </a:lnRef>
-          <a:fillRef idx="3">
-            <a:schemeClr val="accent1"/>
-          </a:fillRef>
-          <a:effectRef idx="2">
-            <a:schemeClr val="accent1"/>
-          </a:effectRef>
-          <a:fontRef idx="minor">
-            <a:schemeClr val="lt1"/>
-          </a:fontRef>
-        </p:style>
-        <p:txBody>
-          <a:bodyPr rtlCol="0" anchor="ctr" wrap="square" lIns="54864" rIns="54864" tIns="0" bIns="0"/>
-          <a:lstStyle/>
-          <a:p>
-            <a:pPr algn="ctr">
-              <a:defRPr sz="850" b="1">
-                <a:solidFill>
-                  <a:srgbClr val="1A202C"/>
-                </a:solidFill>
-                <a:latin typeface="Calibri"/>
-              </a:defRPr>
-            </a:pPr>
-            <a:r>
-              <a:t>Flask app</a:t>
-            </a:r>
-          </a:p>
-        </p:txBody>
-      </p:sp>
-      <p:cxnSp>
-        <p:nvCxnSpPr>
-          <p:cNvPr id="17" name="Connector 16"/>
-          <p:cNvCxnSpPr/>
-          <p:nvPr/>
-        </p:nvCxnSpPr>
-        <p:spPr>
-          <a:xfrm>
-            <a:off x="3212515" y="5113020"/>
-            <a:ext cx="146304" cy="0"/>
-          </a:xfrm>
-          <a:prstGeom prst="line">
-            <a:avLst/>
-          </a:prstGeom>
-          <a:ln w="12700">
-            <a:solidFill>
-              <a:srgbClr val="64748B"/>
-            </a:solidFill>
-            <a:tailEnd type="triangle"/>
-          </a:ln>
-          <a:effectLst/>
-        </p:spPr>
-        <p:style>
-          <a:lnRef idx="2">
-            <a:schemeClr val="accent1"/>
-          </a:lnRef>
-          <a:fillRef idx="0">
-            <a:schemeClr val="accent1"/>
-          </a:fillRef>
-          <a:effectRef idx="1">
-            <a:schemeClr val="accent1"/>
-          </a:effectRef>
-          <a:fontRef idx="minor">
-            <a:schemeClr val="tx1"/>
-          </a:fontRef>
-        </p:style>
-      </p:cxnSp>
-      <p:cxnSp>
-        <p:nvCxnSpPr>
-          <p:cNvPr id="18" name="Connector 17"/>
-          <p:cNvCxnSpPr/>
-          <p:nvPr/>
-        </p:nvCxnSpPr>
-        <p:spPr>
-          <a:xfrm>
-            <a:off x="6022694" y="5113020"/>
-            <a:ext cx="146304" cy="0"/>
-          </a:xfrm>
-          <a:prstGeom prst="line">
-            <a:avLst/>
-          </a:prstGeom>
-          <a:ln w="12700">
-            <a:solidFill>
-              <a:srgbClr val="64748B"/>
-            </a:solidFill>
-            <a:tailEnd type="triangle"/>
-          </a:ln>
-          <a:effectLst/>
-        </p:spPr>
-        <p:style>
-          <a:lnRef idx="2">
-            <a:schemeClr val="accent1"/>
-          </a:lnRef>
-          <a:fillRef idx="0">
-            <a:schemeClr val="accent1"/>
-          </a:fillRef>
-          <a:effectRef idx="1">
-            <a:schemeClr val="accent1"/>
-          </a:effectRef>
-          <a:fontRef idx="minor">
-            <a:schemeClr val="tx1"/>
-          </a:fontRef>
-        </p:style>
-      </p:cxnSp>
-      <p:cxnSp>
-        <p:nvCxnSpPr>
-          <p:cNvPr id="19" name="Connector 18"/>
-          <p:cNvCxnSpPr/>
-          <p:nvPr/>
-        </p:nvCxnSpPr>
-        <p:spPr>
-          <a:xfrm>
-            <a:off x="8832873" y="5113020"/>
-            <a:ext cx="146304" cy="0"/>
-          </a:xfrm>
-          <a:prstGeom prst="line">
-            <a:avLst/>
-          </a:prstGeom>
-          <a:ln w="12700">
-            <a:solidFill>
-              <a:srgbClr val="64748B"/>
-            </a:solidFill>
-            <a:tailEnd type="triangle"/>
-          </a:ln>
-          <a:effectLst/>
-        </p:spPr>
-        <p:style>
-          <a:lnRef idx="2">
-            <a:schemeClr val="accent1"/>
-          </a:lnRef>
-          <a:fillRef idx="0">
-            <a:schemeClr val="accent1"/>
-          </a:fillRef>
-          <a:effectRef idx="1">
-            <a:schemeClr val="accent1"/>
-          </a:effectRef>
-          <a:fontRef idx="minor">
-            <a:schemeClr val="tx1"/>
-          </a:fontRef>
-        </p:style>
-      </p:cxnSp>
-      <p:cxnSp>
-        <p:nvCxnSpPr>
-          <p:cNvPr id="20" name="Connector 19"/>
-          <p:cNvCxnSpPr/>
-          <p:nvPr/>
-        </p:nvCxnSpPr>
-        <p:spPr>
-          <a:xfrm flipH="1">
-            <a:off x="2348941" y="5334000"/>
-            <a:ext cx="7962173" cy="182880"/>
-          </a:xfrm>
-          <a:prstGeom prst="line">
-            <a:avLst/>
-          </a:prstGeom>
-          <a:ln w="12700">
-            <a:solidFill>
-              <a:srgbClr val="64748B"/>
-            </a:solidFill>
-            <a:tailEnd type="triangle"/>
-          </a:ln>
-          <a:effectLst/>
-        </p:spPr>
-        <p:style>
-          <a:lnRef idx="2">
-            <a:schemeClr val="accent1"/>
-          </a:lnRef>
-          <a:fillRef idx="0">
-            <a:schemeClr val="accent1"/>
-          </a:fillRef>
-          <a:effectRef idx="1">
-            <a:schemeClr val="accent1"/>
-          </a:effectRef>
-          <a:fontRef idx="minor">
-            <a:schemeClr val="tx1"/>
-          </a:fontRef>
-        </p:style>
-      </p:cxnSp>
-      <p:cxnSp>
-        <p:nvCxnSpPr>
-          <p:cNvPr id="21" name="Connector 20"/>
-          <p:cNvCxnSpPr/>
-          <p:nvPr/>
-        </p:nvCxnSpPr>
-        <p:spPr>
-          <a:xfrm flipH="1">
-            <a:off x="6095847" y="5334000"/>
-            <a:ext cx="4215267" cy="182880"/>
-          </a:xfrm>
-          <a:prstGeom prst="line">
-            <a:avLst/>
-          </a:prstGeom>
-          <a:ln w="12700">
-            <a:solidFill>
-              <a:srgbClr val="64748B"/>
-            </a:solidFill>
-            <a:tailEnd type="triangle"/>
-          </a:ln>
-          <a:effectLst/>
-        </p:spPr>
-        <p:style>
-          <a:lnRef idx="2">
-            <a:schemeClr val="accent1"/>
-          </a:lnRef>
-          <a:fillRef idx="0">
-            <a:schemeClr val="accent1"/>
-          </a:fillRef>
-          <a:effectRef idx="1">
-            <a:schemeClr val="accent1"/>
-          </a:effectRef>
-          <a:fontRef idx="minor">
-            <a:schemeClr val="tx1"/>
-          </a:fontRef>
-        </p:style>
-      </p:cxnSp>
-      <p:cxnSp>
-        <p:nvCxnSpPr>
-          <p:cNvPr id="22" name="Connector 21"/>
-          <p:cNvCxnSpPr/>
-          <p:nvPr/>
-        </p:nvCxnSpPr>
-        <p:spPr>
-          <a:xfrm flipH="1">
-            <a:off x="9842753" y="5334000"/>
-            <a:ext cx="468361" cy="182880"/>
-          </a:xfrm>
-          <a:prstGeom prst="line">
-            <a:avLst/>
-          </a:prstGeom>
-          <a:ln w="12700">
-            <a:solidFill>
-              <a:srgbClr val="64748B"/>
-            </a:solidFill>
-            <a:tailEnd type="triangle"/>
-          </a:ln>
-          <a:effectLst/>
-        </p:spPr>
-        <p:style>
-          <a:lnRef idx="2">
-            <a:schemeClr val="accent1"/>
-          </a:lnRef>
-          <a:fillRef idx="0">
-            <a:schemeClr val="accent1"/>
-          </a:fillRef>
-          <a:effectRef idx="1">
-            <a:schemeClr val="accent1"/>
-          </a:effectRef>
-          <a:fontRef idx="minor">
-            <a:schemeClr val="tx1"/>
-          </a:fontRef>
-        </p:style>
-      </p:cxnSp>
-      <p:cxnSp>
-        <p:nvCxnSpPr>
-          <p:cNvPr id="23" name="Connector 22"/>
-          <p:cNvCxnSpPr/>
-          <p:nvPr/>
-        </p:nvCxnSpPr>
-        <p:spPr>
-          <a:xfrm>
-            <a:off x="2348941" y="5958840"/>
-            <a:ext cx="936726" cy="182880"/>
-          </a:xfrm>
-          <a:prstGeom prst="line">
-            <a:avLst/>
-          </a:prstGeom>
-          <a:ln w="12700">
-            <a:solidFill>
-              <a:srgbClr val="64748B"/>
-            </a:solidFill>
-            <a:tailEnd type="triangle"/>
-          </a:ln>
-          <a:effectLst/>
-        </p:spPr>
-        <p:style>
-          <a:lnRef idx="2">
-            <a:schemeClr val="accent1"/>
-          </a:lnRef>
-          <a:fillRef idx="0">
-            <a:schemeClr val="accent1"/>
-          </a:fillRef>
-          <a:effectRef idx="1">
-            <a:schemeClr val="accent1"/>
-          </a:effectRef>
-          <a:fontRef idx="minor">
-            <a:schemeClr val="tx1"/>
-          </a:fontRef>
-        </p:style>
-      </p:cxnSp>
-      <p:cxnSp>
-        <p:nvCxnSpPr>
-          <p:cNvPr id="24" name="Connector 23"/>
-          <p:cNvCxnSpPr/>
-          <p:nvPr/>
-        </p:nvCxnSpPr>
-        <p:spPr>
-          <a:xfrm>
-            <a:off x="2348941" y="5958840"/>
-            <a:ext cx="6557085" cy="182880"/>
-          </a:xfrm>
-          <a:prstGeom prst="line">
-            <a:avLst/>
-          </a:prstGeom>
-          <a:ln w="12700">
-            <a:solidFill>
-              <a:srgbClr val="64748B"/>
-            </a:solidFill>
-            <a:tailEnd type="triangle"/>
-          </a:ln>
-          <a:effectLst/>
-        </p:spPr>
-        <p:style>
-          <a:lnRef idx="2">
-            <a:schemeClr val="accent1"/>
-          </a:lnRef>
-          <a:fillRef idx="0">
-            <a:schemeClr val="accent1"/>
-          </a:fillRef>
-          <a:effectRef idx="1">
-            <a:schemeClr val="accent1"/>
-          </a:effectRef>
-          <a:fontRef idx="minor">
-            <a:schemeClr val="tx1"/>
-          </a:fontRef>
-        </p:style>
-      </p:cxnSp>
-      <p:cxnSp>
-        <p:nvCxnSpPr>
-          <p:cNvPr id="25" name="Connector 24"/>
-          <p:cNvCxnSpPr/>
-          <p:nvPr/>
-        </p:nvCxnSpPr>
-        <p:spPr>
-          <a:xfrm>
-            <a:off x="6095847" y="5958840"/>
-            <a:ext cx="2810179" cy="182880"/>
-          </a:xfrm>
-          <a:prstGeom prst="line">
-            <a:avLst/>
-          </a:prstGeom>
-          <a:ln w="12700">
-            <a:solidFill>
-              <a:srgbClr val="64748B"/>
-            </a:solidFill>
-            <a:tailEnd type="triangle"/>
-          </a:ln>
-          <a:effectLst/>
-        </p:spPr>
-        <p:style>
-          <a:lnRef idx="2">
-            <a:schemeClr val="accent1"/>
-          </a:lnRef>
-          <a:fillRef idx="0">
-            <a:schemeClr val="accent1"/>
-          </a:fillRef>
-          <a:effectRef idx="1">
-            <a:schemeClr val="accent1"/>
-          </a:effectRef>
-          <a:fontRef idx="minor">
-            <a:schemeClr val="tx1"/>
-          </a:fontRef>
-        </p:style>
-      </p:cxnSp>
-      <p:cxnSp>
-        <p:nvCxnSpPr>
-          <p:cNvPr id="26" name="Connector 25"/>
-          <p:cNvCxnSpPr/>
-          <p:nvPr/>
-        </p:nvCxnSpPr>
-        <p:spPr>
-          <a:xfrm flipH="1">
-            <a:off x="3285667" y="5958840"/>
-            <a:ext cx="6557086" cy="182880"/>
-          </a:xfrm>
-          <a:prstGeom prst="line">
-            <a:avLst/>
-          </a:prstGeom>
-          <a:ln w="12700">
-            <a:solidFill>
-              <a:srgbClr val="64748B"/>
-            </a:solidFill>
-            <a:tailEnd type="triangle"/>
-          </a:ln>
-          <a:effectLst/>
-        </p:spPr>
-        <p:style>
-          <a:lnRef idx="2">
-            <a:schemeClr val="accent1"/>
-          </a:lnRef>
-          <a:fillRef idx="0">
-            <a:schemeClr val="accent1"/>
-          </a:fillRef>
-          <a:effectRef idx="1">
-            <a:schemeClr val="accent1"/>
-          </a:effectRef>
-          <a:fontRef idx="minor">
-            <a:schemeClr val="tx1"/>
-          </a:fontRef>
-        </p:style>
-      </p:cxnSp>
-      <p:cxnSp>
-        <p:nvCxnSpPr>
-          <p:cNvPr id="27" name="Connector 26"/>
-          <p:cNvCxnSpPr/>
-          <p:nvPr/>
-        </p:nvCxnSpPr>
-        <p:spPr>
-          <a:xfrm flipH="1">
-            <a:off x="8906026" y="5958840"/>
-            <a:ext cx="936727" cy="182880"/>
-          </a:xfrm>
-          <a:prstGeom prst="line">
-            <a:avLst/>
-          </a:prstGeom>
-          <a:ln w="12700">
-            <a:solidFill>
-              <a:srgbClr val="64748B"/>
-            </a:solidFill>
-            <a:tailEnd type="triangle"/>
-          </a:ln>
-          <a:effectLst/>
-        </p:spPr>
-        <p:style>
-          <a:lnRef idx="2">
-            <a:schemeClr val="accent1"/>
-          </a:lnRef>
-          <a:fillRef idx="0">
-            <a:schemeClr val="accent1"/>
-          </a:fillRef>
-          <a:effectRef idx="1">
-            <a:schemeClr val="accent1"/>
-          </a:effectRef>
-          <a:fontRef idx="minor">
-            <a:schemeClr val="tx1"/>
-          </a:fontRef>
-        </p:style>
-      </p:cxnSp>
+              <a:t>Both from the dev partition. Left: both candidate models, deployed model's EER point marked. Right: top acoustic features — MFCC variance dominates.</a:t>
+            </a:r>
+          </a:p>
+        </p:txBody>
+      </p:sp>
     </p:spTree>
   </p:cSld>
   <p:clrMapOvr>
@@ -6110,7 +5872,7 @@
               </a:defRPr>
             </a:pPr>
             <a:r>
-              <a:t>AI capability 3 — streaming enrichment</a:t>
+              <a:t>AI capability 2 — embeddings &amp; semantic search</a:t>
             </a:r>
           </a:p>
         </p:txBody>
@@ -6118,42 +5880,6 @@
       <p:sp>
         <p:nvSpPr>
           <p:cNvPr id="5" name="TextBox 4"/>
-          <p:cNvSpPr txBox="1"/>
-          <p:nvPr/>
-        </p:nvSpPr>
-        <p:spPr>
-          <a:xfrm>
-            <a:off x="548640" y="658368"/>
-            <a:ext cx="11094415" cy="365760"/>
-          </a:xfrm>
-          <a:prstGeom prst="rect">
-            <a:avLst/>
-          </a:prstGeom>
-          <a:noFill/>
-        </p:spPr>
-        <p:txBody>
-          <a:bodyPr wrap="none">
-            <a:spAutoFit/>
-          </a:bodyPr>
-          <a:lstStyle/>
-          <a:p>
-            <a:pPr>
-              <a:defRPr sz="1300">
-                <a:solidFill>
-                  <a:srgbClr val="CBD5E1"/>
-                </a:solidFill>
-                <a:latin typeface="Calibri"/>
-              </a:defRPr>
-            </a:pPr>
-            <a:r>
-              <a:t>Kafka producer/consumer, near-real-time scoring</a:t>
-            </a:r>
-          </a:p>
-        </p:txBody>
-      </p:sp>
-      <p:sp>
-        <p:nvSpPr>
-          <p:cNvPr id="6" name="TextBox 5"/>
           <p:cNvSpPr txBox="1"/>
           <p:nvPr/>
         </p:nvSpPr>
@@ -6189,7 +5915,7 @@
       </p:sp>
       <p:sp>
         <p:nvSpPr>
-          <p:cNvPr id="7" name="TextBox 6"/>
+          <p:cNvPr id="6" name="TextBox 5"/>
           <p:cNvSpPr txBox="1"/>
           <p:nvPr/>
         </p:nvSpPr>
@@ -6221,7 +5947,7 @@
               </a:defRPr>
             </a:pPr>
             <a:r>
-              <a:t>•  Producer replays eval-set utterance events (a MinIO key, not the audio itself).</a:t>
+              <a:t>•  The same acoustic feature vectors double as embeddings — no separate embedding model needed.</a:t>
             </a:r>
           </a:p>
           <a:p>
@@ -6237,7 +5963,7 @@
               </a:defRPr>
             </a:pPr>
             <a:r>
-              <a:t>•  Consumer fetches the clip, extracts features, scores it at the deployed EER threshold, and writes an enriched prediction to Elasticsearch — one document per utterance, live.</a:t>
+              <a:t>•  Standardized (zero mean, unit variance) so cosine similarity isn't dominated by whichever feature happens to have the largest raw scale.</a:t>
             </a:r>
           </a:p>
           <a:p>
@@ -6253,7 +5979,7 @@
               </a:defRPr>
             </a:pPr>
             <a:r>
-              <a:t>•  Same feature-extraction and model code as the batch job and the web app — one implementation applied three ways, not three separate things to maintain and defend.</a:t>
+              <a:t>•  Indexed into Elasticsearch as dense_vector fields, added to the existing index in place (a mapping update, not a reindex — the 50k+ documents were already there).</a:t>
             </a:r>
           </a:p>
           <a:p>
@@ -6269,30 +5995,14 @@
               </a:defRPr>
             </a:pPr>
             <a:r>
-              <a:t>•  A named consumer group tracks offset, so re-running resumes instead of re-scoring.</a:t>
-            </a:r>
-          </a:p>
-          <a:p>
-            <a:pPr>
-              <a:spcAft>
-                <a:spcPts val="1200"/>
-              </a:spcAft>
-              <a:defRPr sz="1900">
-                <a:solidFill>
-                  <a:srgbClr val="1A202C"/>
-                </a:solidFill>
-                <a:latin typeface="Calibri"/>
-              </a:defRPr>
-            </a:pPr>
-            <a:r>
-              <a:t>•  Everything on the next three slides is scored here, on the eval partition — attacks A07–A19, synthesis systems the model never saw during training.</a:t>
-            </a:r>
-          </a:p>
-        </p:txBody>
-      </p:sp>
-      <p:sp>
-        <p:nvSpPr>
-          <p:cNvPr id="8" name="TextBox 7"/>
+              <a:t>•  Powers /classify's "most acoustically similar training clips" — k-NN search, playable in the browser, replacing a keyword match with genuine semantic search.</a:t>
+            </a:r>
+          </a:p>
+        </p:txBody>
+      </p:sp>
+      <p:sp>
+        <p:nvSpPr>
+          <p:cNvPr id="7" name="TextBox 6"/>
           <p:cNvSpPr txBox="1"/>
           <p:nvPr/>
         </p:nvSpPr>
@@ -6328,7 +6038,7 @@
       </p:sp>
       <p:sp>
         <p:nvSpPr>
-          <p:cNvPr id="9" name="Rounded Rectangle 8"/>
+          <p:cNvPr id="8" name="Rounded Rectangle 7"/>
           <p:cNvSpPr/>
           <p:nvPr/>
         </p:nvSpPr>
@@ -6386,7 +6096,7 @@
       </p:sp>
       <p:sp>
         <p:nvSpPr>
-          <p:cNvPr id="10" name="Rounded Rectangle 9"/>
+          <p:cNvPr id="9" name="Rounded Rectangle 8"/>
           <p:cNvSpPr/>
           <p:nvPr/>
         </p:nvSpPr>
@@ -6444,7 +6154,7 @@
       </p:sp>
       <p:sp>
         <p:nvSpPr>
-          <p:cNvPr id="11" name="Rounded Rectangle 10"/>
+          <p:cNvPr id="10" name="Rounded Rectangle 9"/>
           <p:cNvSpPr/>
           <p:nvPr/>
         </p:nvSpPr>
@@ -6502,7 +6212,7 @@
       </p:sp>
       <p:sp>
         <p:nvSpPr>
-          <p:cNvPr id="12" name="Rounded Rectangle 11"/>
+          <p:cNvPr id="11" name="Rounded Rectangle 10"/>
           <p:cNvSpPr/>
           <p:nvPr/>
         </p:nvSpPr>
@@ -6560,7 +6270,7 @@
       </p:sp>
       <p:sp>
         <p:nvSpPr>
-          <p:cNvPr id="13" name="Rounded Rectangle 12"/>
+          <p:cNvPr id="12" name="Rounded Rectangle 11"/>
           <p:cNvSpPr/>
           <p:nvPr/>
         </p:nvSpPr>
@@ -6618,13 +6328,71 @@
       </p:sp>
       <p:sp>
         <p:nvSpPr>
+          <p:cNvPr id="13" name="Rounded Rectangle 12"/>
+          <p:cNvSpPr/>
+          <p:nvPr/>
+        </p:nvSpPr>
+        <p:spPr>
+          <a:xfrm>
+            <a:off x="4295546" y="5516880"/>
+            <a:ext cx="3600602" cy="441960"/>
+          </a:xfrm>
+          <a:prstGeom prst="roundRect">
+            <a:avLst>
+              <a:gd name="adj" fmla="val 6000"/>
+            </a:avLst>
+          </a:prstGeom>
+          <a:solidFill>
+            <a:srgbClr val="0D9488"/>
+          </a:solidFill>
+          <a:ln w="12700">
+            <a:solidFill>
+              <a:srgbClr val="0D9488"/>
+            </a:solidFill>
+          </a:ln>
+          <a:effectLst/>
+        </p:spPr>
+        <p:style>
+          <a:lnRef idx="1">
+            <a:schemeClr val="accent1"/>
+          </a:lnRef>
+          <a:fillRef idx="3">
+            <a:schemeClr val="accent1"/>
+          </a:fillRef>
+          <a:effectRef idx="2">
+            <a:schemeClr val="accent1"/>
+          </a:effectRef>
+          <a:fontRef idx="minor">
+            <a:schemeClr val="lt1"/>
+          </a:fontRef>
+        </p:style>
+        <p:txBody>
+          <a:bodyPr rtlCol="0" anchor="ctr" wrap="square" lIns="54864" rIns="54864" tIns="0" bIns="0"/>
+          <a:lstStyle/>
+          <a:p>
+            <a:pPr algn="ctr">
+              <a:defRPr sz="850" b="1">
+                <a:solidFill>
+                  <a:srgbClr val="FFFFFF"/>
+                </a:solidFill>
+                <a:latin typeface="Calibri"/>
+              </a:defRPr>
+            </a:pPr>
+            <a:r>
+              <a:t>index_embeddings</a:t>
+            </a:r>
+          </a:p>
+        </p:txBody>
+      </p:sp>
+      <p:sp>
+        <p:nvSpPr>
           <p:cNvPr id="14" name="Rounded Rectangle 13"/>
           <p:cNvSpPr/>
           <p:nvPr/>
         </p:nvSpPr>
         <p:spPr>
           <a:xfrm>
-            <a:off x="4295546" y="5516880"/>
+            <a:off x="8042452" y="5516880"/>
             <a:ext cx="3600602" cy="441960"/>
           </a:xfrm>
           <a:prstGeom prst="roundRect">
@@ -6669,7 +6437,7 @@
               </a:defRPr>
             </a:pPr>
             <a:r>
-              <a:t>index_embeddings</a:t>
+              <a:t>kafka -&gt; streaming</a:t>
             </a:r>
           </a:p>
         </p:txBody>
@@ -6677,64 +6445,6 @@
       <p:sp>
         <p:nvSpPr>
           <p:cNvPr id="15" name="Rounded Rectangle 14"/>
-          <p:cNvSpPr/>
-          <p:nvPr/>
-        </p:nvSpPr>
-        <p:spPr>
-          <a:xfrm>
-            <a:off x="8042452" y="5516880"/>
-            <a:ext cx="3600602" cy="441960"/>
-          </a:xfrm>
-          <a:prstGeom prst="roundRect">
-            <a:avLst>
-              <a:gd name="adj" fmla="val 6000"/>
-            </a:avLst>
-          </a:prstGeom>
-          <a:solidFill>
-            <a:srgbClr val="0D9488"/>
-          </a:solidFill>
-          <a:ln w="12700">
-            <a:solidFill>
-              <a:srgbClr val="0D9488"/>
-            </a:solidFill>
-          </a:ln>
-          <a:effectLst/>
-        </p:spPr>
-        <p:style>
-          <a:lnRef idx="1">
-            <a:schemeClr val="accent1"/>
-          </a:lnRef>
-          <a:fillRef idx="3">
-            <a:schemeClr val="accent1"/>
-          </a:fillRef>
-          <a:effectRef idx="2">
-            <a:schemeClr val="accent1"/>
-          </a:effectRef>
-          <a:fontRef idx="minor">
-            <a:schemeClr val="lt1"/>
-          </a:fontRef>
-        </p:style>
-        <p:txBody>
-          <a:bodyPr rtlCol="0" anchor="ctr" wrap="square" lIns="54864" rIns="54864" tIns="0" bIns="0"/>
-          <a:lstStyle/>
-          <a:p>
-            <a:pPr algn="ctr">
-              <a:defRPr sz="850" b="1">
-                <a:solidFill>
-                  <a:srgbClr val="FFFFFF"/>
-                </a:solidFill>
-                <a:latin typeface="Calibri"/>
-              </a:defRPr>
-            </a:pPr>
-            <a:r>
-              <a:t>kafka -&gt; streaming</a:t>
-            </a:r>
-          </a:p>
-        </p:txBody>
-      </p:sp>
-      <p:sp>
-        <p:nvSpPr>
-          <p:cNvPr id="16" name="Rounded Rectangle 15"/>
           <p:cNvSpPr/>
           <p:nvPr/>
         </p:nvSpPr>
@@ -6792,7 +6502,7 @@
       </p:sp>
       <p:sp>
         <p:nvSpPr>
-          <p:cNvPr id="17" name="Rounded Rectangle 16"/>
+          <p:cNvPr id="16" name="Rounded Rectangle 15"/>
           <p:cNvSpPr/>
           <p:nvPr/>
         </p:nvSpPr>
@@ -6850,7 +6560,7 @@
       </p:sp>
       <p:cxnSp>
         <p:nvCxnSpPr>
-          <p:cNvPr id="18" name="Connector 17"/>
+          <p:cNvPr id="17" name="Connector 16"/>
           <p:cNvCxnSpPr/>
           <p:nvPr/>
         </p:nvCxnSpPr>
@@ -6887,7 +6597,7 @@
       </p:cxnSp>
       <p:cxnSp>
         <p:nvCxnSpPr>
-          <p:cNvPr id="19" name="Connector 18"/>
+          <p:cNvPr id="18" name="Connector 17"/>
           <p:cNvCxnSpPr/>
           <p:nvPr/>
         </p:nvCxnSpPr>
@@ -6924,7 +6634,7 @@
       </p:cxnSp>
       <p:cxnSp>
         <p:nvCxnSpPr>
-          <p:cNvPr id="20" name="Connector 19"/>
+          <p:cNvPr id="19" name="Connector 18"/>
           <p:cNvCxnSpPr/>
           <p:nvPr/>
         </p:nvCxnSpPr>
@@ -6961,7 +6671,7 @@
       </p:cxnSp>
       <p:cxnSp>
         <p:nvCxnSpPr>
-          <p:cNvPr id="21" name="Connector 20"/>
+          <p:cNvPr id="20" name="Connector 19"/>
           <p:cNvCxnSpPr/>
           <p:nvPr/>
         </p:nvCxnSpPr>
@@ -6998,7 +6708,7 @@
       </p:cxnSp>
       <p:cxnSp>
         <p:nvCxnSpPr>
-          <p:cNvPr id="22" name="Connector 21"/>
+          <p:cNvPr id="21" name="Connector 20"/>
           <p:cNvCxnSpPr/>
           <p:nvPr/>
         </p:nvCxnSpPr>
@@ -7035,7 +6745,7 @@
       </p:cxnSp>
       <p:cxnSp>
         <p:nvCxnSpPr>
-          <p:cNvPr id="23" name="Connector 22"/>
+          <p:cNvPr id="22" name="Connector 21"/>
           <p:cNvCxnSpPr/>
           <p:nvPr/>
         </p:nvCxnSpPr>
@@ -7072,7 +6782,7 @@
       </p:cxnSp>
       <p:cxnSp>
         <p:nvCxnSpPr>
-          <p:cNvPr id="24" name="Connector 23"/>
+          <p:cNvPr id="23" name="Connector 22"/>
           <p:cNvCxnSpPr/>
           <p:nvPr/>
         </p:nvCxnSpPr>
@@ -7109,7 +6819,7 @@
       </p:cxnSp>
       <p:cxnSp>
         <p:nvCxnSpPr>
-          <p:cNvPr id="25" name="Connector 24"/>
+          <p:cNvPr id="24" name="Connector 23"/>
           <p:cNvCxnSpPr/>
           <p:nvPr/>
         </p:nvCxnSpPr>
@@ -7146,7 +6856,7 @@
       </p:cxnSp>
       <p:cxnSp>
         <p:nvCxnSpPr>
-          <p:cNvPr id="26" name="Connector 25"/>
+          <p:cNvPr id="25" name="Connector 24"/>
           <p:cNvCxnSpPr/>
           <p:nvPr/>
         </p:nvCxnSpPr>
@@ -7183,7 +6893,7 @@
       </p:cxnSp>
       <p:cxnSp>
         <p:nvCxnSpPr>
-          <p:cNvPr id="27" name="Connector 26"/>
+          <p:cNvPr id="26" name="Connector 25"/>
           <p:cNvCxnSpPr/>
           <p:nvPr/>
         </p:nvCxnSpPr>
@@ -7220,7 +6930,7 @@
       </p:cxnSp>
       <p:cxnSp>
         <p:nvCxnSpPr>
-          <p:cNvPr id="28" name="Connector 27"/>
+          <p:cNvPr id="27" name="Connector 26"/>
           <p:cNvCxnSpPr/>
           <p:nvPr/>
         </p:nvCxnSpPr>
@@ -7400,7 +7110,7 @@
               </a:defRPr>
             </a:pPr>
             <a:r>
-              <a:t>Pipeline stage 5 - Insights</a:t>
+              <a:t>AI capability 3 — streaming enrichment</a:t>
             </a:r>
           </a:p>
         </p:txBody>
@@ -7436,7 +7146,7 @@
               </a:defRPr>
             </a:pPr>
             <a:r>
-              <a:t>insights.py — Elasticsearch aggregations -&gt; charts + RESULTS.md</a:t>
+              <a:t>Kafka producer/consumer, near-real-time scoring</a:t>
             </a:r>
           </a:p>
         </p:txBody>
@@ -7503,7 +7213,7 @@
               <a:spcAft>
                 <a:spcPts val="1200"/>
               </a:spcAft>
-              <a:defRPr sz="1700">
+              <a:defRPr sz="1900">
                 <a:solidFill>
                   <a:srgbClr val="1A202C"/>
                 </a:solidFill>
@@ -7511,7 +7221,7 @@
               </a:defRPr>
             </a:pPr>
             <a:r>
-              <a:t>•  Runs after the streaming consumer has written predictions — every number here is a live Elasticsearch aggregation query, nothing hand-typed or invented.</a:t>
+              <a:t>•  Producer replays eval-set utterance events (a MinIO key, not the audio itself).</a:t>
             </a:r>
           </a:p>
           <a:p>
@@ -7519,7 +7229,7 @@
               <a:spcAft>
                 <a:spcPts val="1200"/>
               </a:spcAft>
-              <a:defRPr sz="1700">
+              <a:defRPr sz="1900">
                 <a:solidFill>
                   <a:srgbClr val="1A202C"/>
                 </a:solidFill>
@@ -7527,7 +7237,7 @@
               </a:defRPr>
             </a:pPr>
             <a:r>
-              <a:t>•  Computes balanced and overall detection accuracy, per-attack-type accuracy, a confusion matrix, a confidence histogram, and class balance.</a:t>
+              <a:t>•  Consumer fetches the clip, extracts features, scores it at the deployed EER threshold, and writes an enriched prediction to Elasticsearch — one document per utterance, live.</a:t>
             </a:r>
           </a:p>
           <a:p>
@@ -7535,7 +7245,7 @@
               <a:spcAft>
                 <a:spcPts val="1200"/>
               </a:spcAft>
-              <a:defRPr sz="1700">
+              <a:defRPr sz="1900">
                 <a:solidFill>
                   <a:srgbClr val="1A202C"/>
                 </a:solidFill>
@@ -7543,7 +7253,7 @@
               </a:defRPr>
             </a:pPr>
             <a:r>
-              <a:t>•  Writes both a markdown report (docs/RESULTS.md) and the PNG charts /dashboard reuses — safe to re-run any time after a pipeline run (sample or full-scale) to regenerate real results.</a:t>
+              <a:t>•  Same feature-extraction and model code as the batch job and the web app — one implementation applied three ways, not three separate things to maintain and defend.</a:t>
             </a:r>
           </a:p>
           <a:p>
@@ -7551,7 +7261,7 @@
               <a:spcAft>
                 <a:spcPts val="1200"/>
               </a:spcAft>
-              <a:defRPr sz="1700">
+              <a:defRPr sz="1900">
                 <a:solidFill>
                   <a:srgbClr val="1A202C"/>
                 </a:solidFill>
@@ -7559,7 +7269,23 @@
               </a:defRPr>
             </a:pPr>
             <a:r>
-              <a:t>•  The confusion matrix, confidence histogram, and accuracy-by-attack charts on the next slides are this script's direct output, not hand-drawn. The ROC and feature-importance charts shown earlier come from train_classifier.py instead, since those need the model's own dev predictions.</a:t>
+              <a:t>•  A named consumer group tracks offset, so re-running resumes instead of re-scoring.</a:t>
+            </a:r>
+          </a:p>
+          <a:p>
+            <a:pPr>
+              <a:spcAft>
+                <a:spcPts val="1200"/>
+              </a:spcAft>
+              <a:defRPr sz="1900">
+                <a:solidFill>
+                  <a:srgbClr val="1A202C"/>
+                </a:solidFill>
+                <a:latin typeface="Calibri"/>
+              </a:defRPr>
+            </a:pPr>
+            <a:r>
+              <a:t>•  Everything on the next three slides is scored here, on the eval partition — attacks A07–A19, synthesis systems the model never saw during training.</a:t>
             </a:r>
           </a:p>
         </p:txBody>
@@ -7965,64 +7691,6 @@
             </a:avLst>
           </a:prstGeom>
           <a:solidFill>
-            <a:srgbClr val="FFFFFF"/>
-          </a:solidFill>
-          <a:ln w="12700">
-            <a:solidFill>
-              <a:srgbClr val="0D9488"/>
-            </a:solidFill>
-          </a:ln>
-          <a:effectLst/>
-        </p:spPr>
-        <p:style>
-          <a:lnRef idx="1">
-            <a:schemeClr val="accent1"/>
-          </a:lnRef>
-          <a:fillRef idx="3">
-            <a:schemeClr val="accent1"/>
-          </a:fillRef>
-          <a:effectRef idx="2">
-            <a:schemeClr val="accent1"/>
-          </a:effectRef>
-          <a:fontRef idx="minor">
-            <a:schemeClr val="lt1"/>
-          </a:fontRef>
-        </p:style>
-        <p:txBody>
-          <a:bodyPr rtlCol="0" anchor="ctr" wrap="square" lIns="54864" rIns="54864" tIns="0" bIns="0"/>
-          <a:lstStyle/>
-          <a:p>
-            <a:pPr algn="ctr">
-              <a:defRPr sz="850" b="1">
-                <a:solidFill>
-                  <a:srgbClr val="1A202C"/>
-                </a:solidFill>
-                <a:latin typeface="Calibri"/>
-              </a:defRPr>
-            </a:pPr>
-            <a:r>
-              <a:t>kafka -&gt; streaming</a:t>
-            </a:r>
-          </a:p>
-        </p:txBody>
-      </p:sp>
-      <p:sp>
-        <p:nvSpPr>
-          <p:cNvPr id="16" name="Rounded Rectangle 15"/>
-          <p:cNvSpPr/>
-          <p:nvPr/>
-        </p:nvSpPr>
-        <p:spPr>
-          <a:xfrm>
-            <a:off x="548640" y="6141720"/>
-            <a:ext cx="5474055" cy="441960"/>
-          </a:xfrm>
-          <a:prstGeom prst="roundRect">
-            <a:avLst>
-              <a:gd name="adj" fmla="val 6000"/>
-            </a:avLst>
-          </a:prstGeom>
-          <a:solidFill>
             <a:srgbClr val="0D9488"/>
           </a:solidFill>
           <a:ln w="12700">
@@ -8054,6 +7722,64 @@
               <a:defRPr sz="850" b="1">
                 <a:solidFill>
                   <a:srgbClr val="FFFFFF"/>
+                </a:solidFill>
+                <a:latin typeface="Calibri"/>
+              </a:defRPr>
+            </a:pPr>
+            <a:r>
+              <a:t>kafka -&gt; streaming</a:t>
+            </a:r>
+          </a:p>
+        </p:txBody>
+      </p:sp>
+      <p:sp>
+        <p:nvSpPr>
+          <p:cNvPr id="16" name="Rounded Rectangle 15"/>
+          <p:cNvSpPr/>
+          <p:nvPr/>
+        </p:nvSpPr>
+        <p:spPr>
+          <a:xfrm>
+            <a:off x="548640" y="6141720"/>
+            <a:ext cx="5474055" cy="441960"/>
+          </a:xfrm>
+          <a:prstGeom prst="roundRect">
+            <a:avLst>
+              <a:gd name="adj" fmla="val 6000"/>
+            </a:avLst>
+          </a:prstGeom>
+          <a:solidFill>
+            <a:srgbClr val="FFFFFF"/>
+          </a:solidFill>
+          <a:ln w="12700">
+            <a:solidFill>
+              <a:srgbClr val="DC2626"/>
+            </a:solidFill>
+          </a:ln>
+          <a:effectLst/>
+        </p:spPr>
+        <p:style>
+          <a:lnRef idx="1">
+            <a:schemeClr val="accent1"/>
+          </a:lnRef>
+          <a:fillRef idx="3">
+            <a:schemeClr val="accent1"/>
+          </a:fillRef>
+          <a:effectRef idx="2">
+            <a:schemeClr val="accent1"/>
+          </a:effectRef>
+          <a:fontRef idx="minor">
+            <a:schemeClr val="lt1"/>
+          </a:fontRef>
+        </p:style>
+        <p:txBody>
+          <a:bodyPr rtlCol="0" anchor="ctr" wrap="square" lIns="54864" rIns="54864" tIns="0" bIns="0"/>
+          <a:lstStyle/>
+          <a:p>
+            <a:pPr algn="ctr">
+              <a:defRPr sz="850" b="1">
+                <a:solidFill>
+                  <a:srgbClr val="1A202C"/>
                 </a:solidFill>
                 <a:latin typeface="Calibri"/>
               </a:defRPr>
@@ -8674,7 +8400,7 @@
               </a:defRPr>
             </a:pPr>
             <a:r>
-              <a:t>Results on streamed eval — confusion matrix &amp; confidence</a:t>
+              <a:t>Pipeline stage 5 - Insights</a:t>
             </a:r>
           </a:p>
         </p:txBody>
@@ -8682,6 +8408,42 @@
       <p:sp>
         <p:nvSpPr>
           <p:cNvPr id="5" name="TextBox 4"/>
+          <p:cNvSpPr txBox="1"/>
+          <p:nvPr/>
+        </p:nvSpPr>
+        <p:spPr>
+          <a:xfrm>
+            <a:off x="548640" y="658368"/>
+            <a:ext cx="11094415" cy="365760"/>
+          </a:xfrm>
+          <a:prstGeom prst="rect">
+            <a:avLst/>
+          </a:prstGeom>
+          <a:noFill/>
+        </p:spPr>
+        <p:txBody>
+          <a:bodyPr wrap="none">
+            <a:spAutoFit/>
+          </a:bodyPr>
+          <a:lstStyle/>
+          <a:p>
+            <a:pPr>
+              <a:defRPr sz="1300">
+                <a:solidFill>
+                  <a:srgbClr val="CBD5E1"/>
+                </a:solidFill>
+                <a:latin typeface="Calibri"/>
+              </a:defRPr>
+            </a:pPr>
+            <a:r>
+              <a:t>insights.py — Elasticsearch aggregations -&gt; charts + RESULTS.md</a:t>
+            </a:r>
+          </a:p>
+        </p:txBody>
+      </p:sp>
+      <p:sp>
+        <p:nvSpPr>
+          <p:cNvPr id="6" name="TextBox 5"/>
           <p:cNvSpPr txBox="1"/>
           <p:nvPr/>
         </p:nvSpPr>
@@ -8715,64 +8477,16 @@
           </a:p>
         </p:txBody>
       </p:sp>
-      <p:pic>
-        <p:nvPicPr>
-          <p:cNvPr id="6" name="Picture 5" descr="confusion_matrix.png"/>
-          <p:cNvPicPr>
-            <a:picLocks noChangeAspect="1"/>
-          </p:cNvPicPr>
-          <p:nvPr/>
-        </p:nvPicPr>
-        <p:blipFill>
-          <a:blip r:embed="rId2"/>
-          <a:stretch>
-            <a:fillRect/>
-          </a:stretch>
-        </p:blipFill>
-        <p:spPr>
-          <a:xfrm>
-            <a:off x="807643" y="1417320"/>
-            <a:ext cx="4892040" cy="4892040"/>
-          </a:xfrm>
-          <a:prstGeom prst="rect">
-            <a:avLst/>
-          </a:prstGeom>
-        </p:spPr>
-      </p:pic>
-      <p:pic>
-        <p:nvPicPr>
-          <p:cNvPr id="7" name="Picture 6" descr="confidence_histogram.png"/>
-          <p:cNvPicPr>
-            <a:picLocks noChangeAspect="1"/>
-          </p:cNvPicPr>
-          <p:nvPr/>
-        </p:nvPicPr>
-        <p:blipFill>
-          <a:blip r:embed="rId3"/>
-          <a:stretch>
-            <a:fillRect/>
-          </a:stretch>
-        </p:blipFill>
-        <p:spPr>
-          <a:xfrm>
-            <a:off x="6233007" y="2059991"/>
-            <a:ext cx="5410047" cy="3606698"/>
-          </a:xfrm>
-          <a:prstGeom prst="rect">
-            <a:avLst/>
-          </a:prstGeom>
-        </p:spPr>
-      </p:pic>
-      <p:sp>
-        <p:nvSpPr>
-          <p:cNvPr id="8" name="TextBox 7"/>
+      <p:sp>
+        <p:nvSpPr>
+          <p:cNvPr id="7" name="TextBox 6"/>
           <p:cNvSpPr txBox="1"/>
           <p:nvPr/>
         </p:nvSpPr>
         <p:spPr>
           <a:xfrm>
-            <a:off x="548640" y="6400800"/>
-            <a:ext cx="11094415" cy="365760"/>
+            <a:off x="548640" y="1417320"/>
+            <a:ext cx="11094415" cy="3337560"/>
           </a:xfrm>
           <a:prstGeom prst="rect">
             <a:avLst/>
@@ -8785,20 +8499,1036 @@
           </a:bodyPr>
           <a:lstStyle/>
           <a:p>
+            <a:pPr>
+              <a:spcAft>
+                <a:spcPts val="1200"/>
+              </a:spcAft>
+              <a:defRPr sz="1700">
+                <a:solidFill>
+                  <a:srgbClr val="1A202C"/>
+                </a:solidFill>
+                <a:latin typeface="Calibri"/>
+              </a:defRPr>
+            </a:pPr>
+            <a:r>
+              <a:t>•  Runs after the streaming consumer has written predictions — every number here is a live Elasticsearch aggregation query, nothing hand-typed or invented.</a:t>
+            </a:r>
+          </a:p>
+          <a:p>
+            <a:pPr>
+              <a:spcAft>
+                <a:spcPts val="1200"/>
+              </a:spcAft>
+              <a:defRPr sz="1700">
+                <a:solidFill>
+                  <a:srgbClr val="1A202C"/>
+                </a:solidFill>
+                <a:latin typeface="Calibri"/>
+              </a:defRPr>
+            </a:pPr>
+            <a:r>
+              <a:t>•  Computes balanced and overall detection accuracy, per-attack-type accuracy, a confusion matrix, a confidence histogram, and class balance.</a:t>
+            </a:r>
+          </a:p>
+          <a:p>
+            <a:pPr>
+              <a:spcAft>
+                <a:spcPts val="1200"/>
+              </a:spcAft>
+              <a:defRPr sz="1700">
+                <a:solidFill>
+                  <a:srgbClr val="1A202C"/>
+                </a:solidFill>
+                <a:latin typeface="Calibri"/>
+              </a:defRPr>
+            </a:pPr>
+            <a:r>
+              <a:t>•  Writes both a markdown report (docs/RESULTS.md) and the PNG charts /dashboard reuses — safe to re-run any time after a pipeline run (sample or full-scale) to regenerate real results.</a:t>
+            </a:r>
+          </a:p>
+          <a:p>
+            <a:pPr>
+              <a:spcAft>
+                <a:spcPts val="1200"/>
+              </a:spcAft>
+              <a:defRPr sz="1700">
+                <a:solidFill>
+                  <a:srgbClr val="1A202C"/>
+                </a:solidFill>
+                <a:latin typeface="Calibri"/>
+              </a:defRPr>
+            </a:pPr>
+            <a:r>
+              <a:t>•  The confusion matrix, confidence histogram, and accuracy-by-attack charts on the next slides are this script's direct output, not hand-drawn. The ROC and feature-importance charts shown earlier come from train_classifier.py instead, since those need the model's own dev predictions.</a:t>
+            </a:r>
+          </a:p>
+        </p:txBody>
+      </p:sp>
+      <p:sp>
+        <p:nvSpPr>
+          <p:cNvPr id="8" name="TextBox 7"/>
+          <p:cNvSpPr txBox="1"/>
+          <p:nvPr/>
+        </p:nvSpPr>
+        <p:spPr>
+          <a:xfrm>
+            <a:off x="548640" y="4636008"/>
+            <a:ext cx="11094415" cy="228600"/>
+          </a:xfrm>
+          <a:prstGeom prst="rect">
+            <a:avLst/>
+          </a:prstGeom>
+          <a:noFill/>
+        </p:spPr>
+        <p:txBody>
+          <a:bodyPr wrap="square">
+            <a:spAutoFit/>
+          </a:bodyPr>
+          <a:lstStyle/>
+          <a:p>
+            <a:pPr algn="l">
+              <a:defRPr sz="1000" b="0">
+                <a:solidFill>
+                  <a:srgbClr val="64748B"/>
+                </a:solidFill>
+                <a:latin typeface="Calibri"/>
+              </a:defRPr>
+            </a:pPr>
+            <a:r>
+              <a:t>Where this stage sits in the pipeline:</a:t>
+            </a:r>
+          </a:p>
+        </p:txBody>
+      </p:sp>
+      <p:sp>
+        <p:nvSpPr>
+          <p:cNvPr id="9" name="Rounded Rectangle 8"/>
+          <p:cNvSpPr/>
+          <p:nvPr/>
+        </p:nvSpPr>
+        <p:spPr>
+          <a:xfrm>
+            <a:off x="548640" y="4892040"/>
+            <a:ext cx="2663875" cy="441960"/>
+          </a:xfrm>
+          <a:prstGeom prst="roundRect">
+            <a:avLst>
+              <a:gd name="adj" fmla="val 6000"/>
+            </a:avLst>
+          </a:prstGeom>
+          <a:solidFill>
+            <a:srgbClr val="FFFFFF"/>
+          </a:solidFill>
+          <a:ln w="12700">
+            <a:solidFill>
+              <a:srgbClr val="2B6CB0"/>
+            </a:solidFill>
+          </a:ln>
+          <a:effectLst/>
+        </p:spPr>
+        <p:style>
+          <a:lnRef idx="1">
+            <a:schemeClr val="accent1"/>
+          </a:lnRef>
+          <a:fillRef idx="3">
+            <a:schemeClr val="accent1"/>
+          </a:fillRef>
+          <a:effectRef idx="2">
+            <a:schemeClr val="accent1"/>
+          </a:effectRef>
+          <a:fontRef idx="minor">
+            <a:schemeClr val="lt1"/>
+          </a:fontRef>
+        </p:style>
+        <p:txBody>
+          <a:bodyPr rtlCol="0" anchor="ctr" wrap="square" lIns="54864" rIns="54864" tIns="0" bIns="0"/>
+          <a:lstStyle/>
+          <a:p>
             <a:pPr algn="ctr">
-              <a:defRPr sz="1200" b="0">
-                <a:solidFill>
-                  <a:srgbClr val="64748B"/>
-                </a:solidFill>
-                <a:latin typeface="Calibri"/>
-              </a:defRPr>
-            </a:pPr>
-            <a:r>
-              <a:t>Both from the streamed eval predictions. Left: true vs. predicted counts. Right: confidence on correct vs. incorrect calls.</a:t>
-            </a:r>
-          </a:p>
-        </p:txBody>
-      </p:sp>
+              <a:defRPr sz="850" b="1">
+                <a:solidFill>
+                  <a:srgbClr val="1A202C"/>
+                </a:solidFill>
+                <a:latin typeface="Calibri"/>
+              </a:defRPr>
+            </a:pPr>
+            <a:r>
+              <a:t>Kaggle</a:t>
+            </a:r>
+          </a:p>
+        </p:txBody>
+      </p:sp>
+      <p:sp>
+        <p:nvSpPr>
+          <p:cNvPr id="10" name="Rounded Rectangle 9"/>
+          <p:cNvSpPr/>
+          <p:nvPr/>
+        </p:nvSpPr>
+        <p:spPr>
+          <a:xfrm>
+            <a:off x="3358819" y="4892040"/>
+            <a:ext cx="2663875" cy="441960"/>
+          </a:xfrm>
+          <a:prstGeom prst="roundRect">
+            <a:avLst>
+              <a:gd name="adj" fmla="val 6000"/>
+            </a:avLst>
+          </a:prstGeom>
+          <a:solidFill>
+            <a:srgbClr val="FFFFFF"/>
+          </a:solidFill>
+          <a:ln w="12700">
+            <a:solidFill>
+              <a:srgbClr val="2B6CB0"/>
+            </a:solidFill>
+          </a:ln>
+          <a:effectLst/>
+        </p:spPr>
+        <p:style>
+          <a:lnRef idx="1">
+            <a:schemeClr val="accent1"/>
+          </a:lnRef>
+          <a:fillRef idx="3">
+            <a:schemeClr val="accent1"/>
+          </a:fillRef>
+          <a:effectRef idx="2">
+            <a:schemeClr val="accent1"/>
+          </a:effectRef>
+          <a:fontRef idx="minor">
+            <a:schemeClr val="lt1"/>
+          </a:fontRef>
+        </p:style>
+        <p:txBody>
+          <a:bodyPr rtlCol="0" anchor="ctr" wrap="square" lIns="54864" rIns="54864" tIns="0" bIns="0"/>
+          <a:lstStyle/>
+          <a:p>
+            <a:pPr algn="ctr">
+              <a:defRPr sz="850" b="1">
+                <a:solidFill>
+                  <a:srgbClr val="1A202C"/>
+                </a:solidFill>
+                <a:latin typeface="Calibri"/>
+              </a:defRPr>
+            </a:pPr>
+            <a:r>
+              <a:t>MinIO</a:t>
+            </a:r>
+          </a:p>
+        </p:txBody>
+      </p:sp>
+      <p:sp>
+        <p:nvSpPr>
+          <p:cNvPr id="11" name="Rounded Rectangle 10"/>
+          <p:cNvSpPr/>
+          <p:nvPr/>
+        </p:nvSpPr>
+        <p:spPr>
+          <a:xfrm>
+            <a:off x="6168998" y="4892040"/>
+            <a:ext cx="2663875" cy="441960"/>
+          </a:xfrm>
+          <a:prstGeom prst="roundRect">
+            <a:avLst>
+              <a:gd name="adj" fmla="val 6000"/>
+            </a:avLst>
+          </a:prstGeom>
+          <a:solidFill>
+            <a:srgbClr val="FFFFFF"/>
+          </a:solidFill>
+          <a:ln w="12700">
+            <a:solidFill>
+              <a:srgbClr val="2B6CB0"/>
+            </a:solidFill>
+          </a:ln>
+          <a:effectLst/>
+        </p:spPr>
+        <p:style>
+          <a:lnRef idx="1">
+            <a:schemeClr val="accent1"/>
+          </a:lnRef>
+          <a:fillRef idx="3">
+            <a:schemeClr val="accent1"/>
+          </a:fillRef>
+          <a:effectRef idx="2">
+            <a:schemeClr val="accent1"/>
+          </a:effectRef>
+          <a:fontRef idx="minor">
+            <a:schemeClr val="lt1"/>
+          </a:fontRef>
+        </p:style>
+        <p:txBody>
+          <a:bodyPr rtlCol="0" anchor="ctr" wrap="square" lIns="54864" rIns="54864" tIns="0" bIns="0"/>
+          <a:lstStyle/>
+          <a:p>
+            <a:pPr algn="ctr">
+              <a:defRPr sz="850" b="1">
+                <a:solidFill>
+                  <a:srgbClr val="1A202C"/>
+                </a:solidFill>
+                <a:latin typeface="Calibri"/>
+              </a:defRPr>
+            </a:pPr>
+            <a:r>
+              <a:t>Spark</a:t>
+            </a:r>
+          </a:p>
+        </p:txBody>
+      </p:sp>
+      <p:sp>
+        <p:nvSpPr>
+          <p:cNvPr id="12" name="Rounded Rectangle 11"/>
+          <p:cNvSpPr/>
+          <p:nvPr/>
+        </p:nvSpPr>
+        <p:spPr>
+          <a:xfrm>
+            <a:off x="8979177" y="4892040"/>
+            <a:ext cx="2663875" cy="441960"/>
+          </a:xfrm>
+          <a:prstGeom prst="roundRect">
+            <a:avLst>
+              <a:gd name="adj" fmla="val 6000"/>
+            </a:avLst>
+          </a:prstGeom>
+          <a:solidFill>
+            <a:srgbClr val="FFFFFF"/>
+          </a:solidFill>
+          <a:ln w="12700">
+            <a:solidFill>
+              <a:srgbClr val="2B6CB0"/>
+            </a:solidFill>
+          </a:ln>
+          <a:effectLst/>
+        </p:spPr>
+        <p:style>
+          <a:lnRef idx="1">
+            <a:schemeClr val="accent1"/>
+          </a:lnRef>
+          <a:fillRef idx="3">
+            <a:schemeClr val="accent1"/>
+          </a:fillRef>
+          <a:effectRef idx="2">
+            <a:schemeClr val="accent1"/>
+          </a:effectRef>
+          <a:fontRef idx="minor">
+            <a:schemeClr val="lt1"/>
+          </a:fontRef>
+        </p:style>
+        <p:txBody>
+          <a:bodyPr rtlCol="0" anchor="ctr" wrap="square" lIns="54864" rIns="54864" tIns="0" bIns="0"/>
+          <a:lstStyle/>
+          <a:p>
+            <a:pPr algn="ctr">
+              <a:defRPr sz="850" b="1">
+                <a:solidFill>
+                  <a:srgbClr val="1A202C"/>
+                </a:solidFill>
+                <a:latin typeface="Calibri"/>
+              </a:defRPr>
+            </a:pPr>
+            <a:r>
+              <a:t>Parquet + ES</a:t>
+            </a:r>
+          </a:p>
+        </p:txBody>
+      </p:sp>
+      <p:sp>
+        <p:nvSpPr>
+          <p:cNvPr id="13" name="Rounded Rectangle 12"/>
+          <p:cNvSpPr/>
+          <p:nvPr/>
+        </p:nvSpPr>
+        <p:spPr>
+          <a:xfrm>
+            <a:off x="548640" y="5516880"/>
+            <a:ext cx="3600602" cy="441960"/>
+          </a:xfrm>
+          <a:prstGeom prst="roundRect">
+            <a:avLst>
+              <a:gd name="adj" fmla="val 6000"/>
+            </a:avLst>
+          </a:prstGeom>
+          <a:solidFill>
+            <a:srgbClr val="FFFFFF"/>
+          </a:solidFill>
+          <a:ln w="12700">
+            <a:solidFill>
+              <a:srgbClr val="0D9488"/>
+            </a:solidFill>
+          </a:ln>
+          <a:effectLst/>
+        </p:spPr>
+        <p:style>
+          <a:lnRef idx="1">
+            <a:schemeClr val="accent1"/>
+          </a:lnRef>
+          <a:fillRef idx="3">
+            <a:schemeClr val="accent1"/>
+          </a:fillRef>
+          <a:effectRef idx="2">
+            <a:schemeClr val="accent1"/>
+          </a:effectRef>
+          <a:fontRef idx="minor">
+            <a:schemeClr val="lt1"/>
+          </a:fontRef>
+        </p:style>
+        <p:txBody>
+          <a:bodyPr rtlCol="0" anchor="ctr" wrap="square" lIns="54864" rIns="54864" tIns="0" bIns="0"/>
+          <a:lstStyle/>
+          <a:p>
+            <a:pPr algn="ctr">
+              <a:defRPr sz="850" b="1">
+                <a:solidFill>
+                  <a:srgbClr val="1A202C"/>
+                </a:solidFill>
+                <a:latin typeface="Calibri"/>
+              </a:defRPr>
+            </a:pPr>
+            <a:r>
+              <a:t>train_classifier</a:t>
+            </a:r>
+          </a:p>
+        </p:txBody>
+      </p:sp>
+      <p:sp>
+        <p:nvSpPr>
+          <p:cNvPr id="14" name="Rounded Rectangle 13"/>
+          <p:cNvSpPr/>
+          <p:nvPr/>
+        </p:nvSpPr>
+        <p:spPr>
+          <a:xfrm>
+            <a:off x="4295546" y="5516880"/>
+            <a:ext cx="3600602" cy="441960"/>
+          </a:xfrm>
+          <a:prstGeom prst="roundRect">
+            <a:avLst>
+              <a:gd name="adj" fmla="val 6000"/>
+            </a:avLst>
+          </a:prstGeom>
+          <a:solidFill>
+            <a:srgbClr val="FFFFFF"/>
+          </a:solidFill>
+          <a:ln w="12700">
+            <a:solidFill>
+              <a:srgbClr val="0D9488"/>
+            </a:solidFill>
+          </a:ln>
+          <a:effectLst/>
+        </p:spPr>
+        <p:style>
+          <a:lnRef idx="1">
+            <a:schemeClr val="accent1"/>
+          </a:lnRef>
+          <a:fillRef idx="3">
+            <a:schemeClr val="accent1"/>
+          </a:fillRef>
+          <a:effectRef idx="2">
+            <a:schemeClr val="accent1"/>
+          </a:effectRef>
+          <a:fontRef idx="minor">
+            <a:schemeClr val="lt1"/>
+          </a:fontRef>
+        </p:style>
+        <p:txBody>
+          <a:bodyPr rtlCol="0" anchor="ctr" wrap="square" lIns="54864" rIns="54864" tIns="0" bIns="0"/>
+          <a:lstStyle/>
+          <a:p>
+            <a:pPr algn="ctr">
+              <a:defRPr sz="850" b="1">
+                <a:solidFill>
+                  <a:srgbClr val="1A202C"/>
+                </a:solidFill>
+                <a:latin typeface="Calibri"/>
+              </a:defRPr>
+            </a:pPr>
+            <a:r>
+              <a:t>index_embeddings</a:t>
+            </a:r>
+          </a:p>
+        </p:txBody>
+      </p:sp>
+      <p:sp>
+        <p:nvSpPr>
+          <p:cNvPr id="15" name="Rounded Rectangle 14"/>
+          <p:cNvSpPr/>
+          <p:nvPr/>
+        </p:nvSpPr>
+        <p:spPr>
+          <a:xfrm>
+            <a:off x="8042452" y="5516880"/>
+            <a:ext cx="3600602" cy="441960"/>
+          </a:xfrm>
+          <a:prstGeom prst="roundRect">
+            <a:avLst>
+              <a:gd name="adj" fmla="val 6000"/>
+            </a:avLst>
+          </a:prstGeom>
+          <a:solidFill>
+            <a:srgbClr val="FFFFFF"/>
+          </a:solidFill>
+          <a:ln w="12700">
+            <a:solidFill>
+              <a:srgbClr val="0D9488"/>
+            </a:solidFill>
+          </a:ln>
+          <a:effectLst/>
+        </p:spPr>
+        <p:style>
+          <a:lnRef idx="1">
+            <a:schemeClr val="accent1"/>
+          </a:lnRef>
+          <a:fillRef idx="3">
+            <a:schemeClr val="accent1"/>
+          </a:fillRef>
+          <a:effectRef idx="2">
+            <a:schemeClr val="accent1"/>
+          </a:effectRef>
+          <a:fontRef idx="minor">
+            <a:schemeClr val="lt1"/>
+          </a:fontRef>
+        </p:style>
+        <p:txBody>
+          <a:bodyPr rtlCol="0" anchor="ctr" wrap="square" lIns="54864" rIns="54864" tIns="0" bIns="0"/>
+          <a:lstStyle/>
+          <a:p>
+            <a:pPr algn="ctr">
+              <a:defRPr sz="850" b="1">
+                <a:solidFill>
+                  <a:srgbClr val="1A202C"/>
+                </a:solidFill>
+                <a:latin typeface="Calibri"/>
+              </a:defRPr>
+            </a:pPr>
+            <a:r>
+              <a:t>kafka -&gt; streaming</a:t>
+            </a:r>
+          </a:p>
+        </p:txBody>
+      </p:sp>
+      <p:sp>
+        <p:nvSpPr>
+          <p:cNvPr id="16" name="Rounded Rectangle 15"/>
+          <p:cNvSpPr/>
+          <p:nvPr/>
+        </p:nvSpPr>
+        <p:spPr>
+          <a:xfrm>
+            <a:off x="548640" y="6141720"/>
+            <a:ext cx="5474055" cy="441960"/>
+          </a:xfrm>
+          <a:prstGeom prst="roundRect">
+            <a:avLst>
+              <a:gd name="adj" fmla="val 6000"/>
+            </a:avLst>
+          </a:prstGeom>
+          <a:solidFill>
+            <a:srgbClr val="0D9488"/>
+          </a:solidFill>
+          <a:ln w="12700">
+            <a:solidFill>
+              <a:srgbClr val="0D9488"/>
+            </a:solidFill>
+          </a:ln>
+          <a:effectLst/>
+        </p:spPr>
+        <p:style>
+          <a:lnRef idx="1">
+            <a:schemeClr val="accent1"/>
+          </a:lnRef>
+          <a:fillRef idx="3">
+            <a:schemeClr val="accent1"/>
+          </a:fillRef>
+          <a:effectRef idx="2">
+            <a:schemeClr val="accent1"/>
+          </a:effectRef>
+          <a:fontRef idx="minor">
+            <a:schemeClr val="lt1"/>
+          </a:fontRef>
+        </p:style>
+        <p:txBody>
+          <a:bodyPr rtlCol="0" anchor="ctr" wrap="square" lIns="54864" rIns="54864" tIns="0" bIns="0"/>
+          <a:lstStyle/>
+          <a:p>
+            <a:pPr algn="ctr">
+              <a:defRPr sz="850" b="1">
+                <a:solidFill>
+                  <a:srgbClr val="FFFFFF"/>
+                </a:solidFill>
+                <a:latin typeface="Calibri"/>
+              </a:defRPr>
+            </a:pPr>
+            <a:r>
+              <a:t>insights.py</a:t>
+            </a:r>
+          </a:p>
+        </p:txBody>
+      </p:sp>
+      <p:sp>
+        <p:nvSpPr>
+          <p:cNvPr id="17" name="Rounded Rectangle 16"/>
+          <p:cNvSpPr/>
+          <p:nvPr/>
+        </p:nvSpPr>
+        <p:spPr>
+          <a:xfrm>
+            <a:off x="6168999" y="6141720"/>
+            <a:ext cx="5474055" cy="441960"/>
+          </a:xfrm>
+          <a:prstGeom prst="roundRect">
+            <a:avLst>
+              <a:gd name="adj" fmla="val 6000"/>
+            </a:avLst>
+          </a:prstGeom>
+          <a:solidFill>
+            <a:srgbClr val="FFFFFF"/>
+          </a:solidFill>
+          <a:ln w="12700">
+            <a:solidFill>
+              <a:srgbClr val="DC2626"/>
+            </a:solidFill>
+          </a:ln>
+          <a:effectLst/>
+        </p:spPr>
+        <p:style>
+          <a:lnRef idx="1">
+            <a:schemeClr val="accent1"/>
+          </a:lnRef>
+          <a:fillRef idx="3">
+            <a:schemeClr val="accent1"/>
+          </a:fillRef>
+          <a:effectRef idx="2">
+            <a:schemeClr val="accent1"/>
+          </a:effectRef>
+          <a:fontRef idx="minor">
+            <a:schemeClr val="lt1"/>
+          </a:fontRef>
+        </p:style>
+        <p:txBody>
+          <a:bodyPr rtlCol="0" anchor="ctr" wrap="square" lIns="54864" rIns="54864" tIns="0" bIns="0"/>
+          <a:lstStyle/>
+          <a:p>
+            <a:pPr algn="ctr">
+              <a:defRPr sz="850" b="1">
+                <a:solidFill>
+                  <a:srgbClr val="1A202C"/>
+                </a:solidFill>
+                <a:latin typeface="Calibri"/>
+              </a:defRPr>
+            </a:pPr>
+            <a:r>
+              <a:t>Flask app</a:t>
+            </a:r>
+          </a:p>
+        </p:txBody>
+      </p:sp>
+      <p:cxnSp>
+        <p:nvCxnSpPr>
+          <p:cNvPr id="18" name="Connector 17"/>
+          <p:cNvCxnSpPr/>
+          <p:nvPr/>
+        </p:nvCxnSpPr>
+        <p:spPr>
+          <a:xfrm>
+            <a:off x="3212515" y="5113020"/>
+            <a:ext cx="146304" cy="0"/>
+          </a:xfrm>
+          <a:prstGeom prst="line">
+            <a:avLst/>
+          </a:prstGeom>
+          <a:ln w="12700">
+            <a:solidFill>
+              <a:srgbClr val="64748B"/>
+            </a:solidFill>
+            <a:tailEnd type="triangle"/>
+          </a:ln>
+          <a:effectLst/>
+        </p:spPr>
+        <p:style>
+          <a:lnRef idx="2">
+            <a:schemeClr val="accent1"/>
+          </a:lnRef>
+          <a:fillRef idx="0">
+            <a:schemeClr val="accent1"/>
+          </a:fillRef>
+          <a:effectRef idx="1">
+            <a:schemeClr val="accent1"/>
+          </a:effectRef>
+          <a:fontRef idx="minor">
+            <a:schemeClr val="tx1"/>
+          </a:fontRef>
+        </p:style>
+      </p:cxnSp>
+      <p:cxnSp>
+        <p:nvCxnSpPr>
+          <p:cNvPr id="19" name="Connector 18"/>
+          <p:cNvCxnSpPr/>
+          <p:nvPr/>
+        </p:nvCxnSpPr>
+        <p:spPr>
+          <a:xfrm>
+            <a:off x="6022694" y="5113020"/>
+            <a:ext cx="146304" cy="0"/>
+          </a:xfrm>
+          <a:prstGeom prst="line">
+            <a:avLst/>
+          </a:prstGeom>
+          <a:ln w="12700">
+            <a:solidFill>
+              <a:srgbClr val="64748B"/>
+            </a:solidFill>
+            <a:tailEnd type="triangle"/>
+          </a:ln>
+          <a:effectLst/>
+        </p:spPr>
+        <p:style>
+          <a:lnRef idx="2">
+            <a:schemeClr val="accent1"/>
+          </a:lnRef>
+          <a:fillRef idx="0">
+            <a:schemeClr val="accent1"/>
+          </a:fillRef>
+          <a:effectRef idx="1">
+            <a:schemeClr val="accent1"/>
+          </a:effectRef>
+          <a:fontRef idx="minor">
+            <a:schemeClr val="tx1"/>
+          </a:fontRef>
+        </p:style>
+      </p:cxnSp>
+      <p:cxnSp>
+        <p:nvCxnSpPr>
+          <p:cNvPr id="20" name="Connector 19"/>
+          <p:cNvCxnSpPr/>
+          <p:nvPr/>
+        </p:nvCxnSpPr>
+        <p:spPr>
+          <a:xfrm>
+            <a:off x="8832873" y="5113020"/>
+            <a:ext cx="146304" cy="0"/>
+          </a:xfrm>
+          <a:prstGeom prst="line">
+            <a:avLst/>
+          </a:prstGeom>
+          <a:ln w="12700">
+            <a:solidFill>
+              <a:srgbClr val="64748B"/>
+            </a:solidFill>
+            <a:tailEnd type="triangle"/>
+          </a:ln>
+          <a:effectLst/>
+        </p:spPr>
+        <p:style>
+          <a:lnRef idx="2">
+            <a:schemeClr val="accent1"/>
+          </a:lnRef>
+          <a:fillRef idx="0">
+            <a:schemeClr val="accent1"/>
+          </a:fillRef>
+          <a:effectRef idx="1">
+            <a:schemeClr val="accent1"/>
+          </a:effectRef>
+          <a:fontRef idx="minor">
+            <a:schemeClr val="tx1"/>
+          </a:fontRef>
+        </p:style>
+      </p:cxnSp>
+      <p:cxnSp>
+        <p:nvCxnSpPr>
+          <p:cNvPr id="21" name="Connector 20"/>
+          <p:cNvCxnSpPr/>
+          <p:nvPr/>
+        </p:nvCxnSpPr>
+        <p:spPr>
+          <a:xfrm flipH="1">
+            <a:off x="2348941" y="5334000"/>
+            <a:ext cx="7962173" cy="182880"/>
+          </a:xfrm>
+          <a:prstGeom prst="line">
+            <a:avLst/>
+          </a:prstGeom>
+          <a:ln w="12700">
+            <a:solidFill>
+              <a:srgbClr val="64748B"/>
+            </a:solidFill>
+            <a:tailEnd type="triangle"/>
+          </a:ln>
+          <a:effectLst/>
+        </p:spPr>
+        <p:style>
+          <a:lnRef idx="2">
+            <a:schemeClr val="accent1"/>
+          </a:lnRef>
+          <a:fillRef idx="0">
+            <a:schemeClr val="accent1"/>
+          </a:fillRef>
+          <a:effectRef idx="1">
+            <a:schemeClr val="accent1"/>
+          </a:effectRef>
+          <a:fontRef idx="minor">
+            <a:schemeClr val="tx1"/>
+          </a:fontRef>
+        </p:style>
+      </p:cxnSp>
+      <p:cxnSp>
+        <p:nvCxnSpPr>
+          <p:cNvPr id="22" name="Connector 21"/>
+          <p:cNvCxnSpPr/>
+          <p:nvPr/>
+        </p:nvCxnSpPr>
+        <p:spPr>
+          <a:xfrm flipH="1">
+            <a:off x="6095847" y="5334000"/>
+            <a:ext cx="4215267" cy="182880"/>
+          </a:xfrm>
+          <a:prstGeom prst="line">
+            <a:avLst/>
+          </a:prstGeom>
+          <a:ln w="12700">
+            <a:solidFill>
+              <a:srgbClr val="64748B"/>
+            </a:solidFill>
+            <a:tailEnd type="triangle"/>
+          </a:ln>
+          <a:effectLst/>
+        </p:spPr>
+        <p:style>
+          <a:lnRef idx="2">
+            <a:schemeClr val="accent1"/>
+          </a:lnRef>
+          <a:fillRef idx="0">
+            <a:schemeClr val="accent1"/>
+          </a:fillRef>
+          <a:effectRef idx="1">
+            <a:schemeClr val="accent1"/>
+          </a:effectRef>
+          <a:fontRef idx="minor">
+            <a:schemeClr val="tx1"/>
+          </a:fontRef>
+        </p:style>
+      </p:cxnSp>
+      <p:cxnSp>
+        <p:nvCxnSpPr>
+          <p:cNvPr id="23" name="Connector 22"/>
+          <p:cNvCxnSpPr/>
+          <p:nvPr/>
+        </p:nvCxnSpPr>
+        <p:spPr>
+          <a:xfrm flipH="1">
+            <a:off x="9842753" y="5334000"/>
+            <a:ext cx="468361" cy="182880"/>
+          </a:xfrm>
+          <a:prstGeom prst="line">
+            <a:avLst/>
+          </a:prstGeom>
+          <a:ln w="12700">
+            <a:solidFill>
+              <a:srgbClr val="64748B"/>
+            </a:solidFill>
+            <a:tailEnd type="triangle"/>
+          </a:ln>
+          <a:effectLst/>
+        </p:spPr>
+        <p:style>
+          <a:lnRef idx="2">
+            <a:schemeClr val="accent1"/>
+          </a:lnRef>
+          <a:fillRef idx="0">
+            <a:schemeClr val="accent1"/>
+          </a:fillRef>
+          <a:effectRef idx="1">
+            <a:schemeClr val="accent1"/>
+          </a:effectRef>
+          <a:fontRef idx="minor">
+            <a:schemeClr val="tx1"/>
+          </a:fontRef>
+        </p:style>
+      </p:cxnSp>
+      <p:cxnSp>
+        <p:nvCxnSpPr>
+          <p:cNvPr id="24" name="Connector 23"/>
+          <p:cNvCxnSpPr/>
+          <p:nvPr/>
+        </p:nvCxnSpPr>
+        <p:spPr>
+          <a:xfrm>
+            <a:off x="2348941" y="5958840"/>
+            <a:ext cx="936726" cy="182880"/>
+          </a:xfrm>
+          <a:prstGeom prst="line">
+            <a:avLst/>
+          </a:prstGeom>
+          <a:ln w="12700">
+            <a:solidFill>
+              <a:srgbClr val="64748B"/>
+            </a:solidFill>
+            <a:tailEnd type="triangle"/>
+          </a:ln>
+          <a:effectLst/>
+        </p:spPr>
+        <p:style>
+          <a:lnRef idx="2">
+            <a:schemeClr val="accent1"/>
+          </a:lnRef>
+          <a:fillRef idx="0">
+            <a:schemeClr val="accent1"/>
+          </a:fillRef>
+          <a:effectRef idx="1">
+            <a:schemeClr val="accent1"/>
+          </a:effectRef>
+          <a:fontRef idx="minor">
+            <a:schemeClr val="tx1"/>
+          </a:fontRef>
+        </p:style>
+      </p:cxnSp>
+      <p:cxnSp>
+        <p:nvCxnSpPr>
+          <p:cNvPr id="25" name="Connector 24"/>
+          <p:cNvCxnSpPr/>
+          <p:nvPr/>
+        </p:nvCxnSpPr>
+        <p:spPr>
+          <a:xfrm>
+            <a:off x="2348941" y="5958840"/>
+            <a:ext cx="6557085" cy="182880"/>
+          </a:xfrm>
+          <a:prstGeom prst="line">
+            <a:avLst/>
+          </a:prstGeom>
+          <a:ln w="12700">
+            <a:solidFill>
+              <a:srgbClr val="64748B"/>
+            </a:solidFill>
+            <a:tailEnd type="triangle"/>
+          </a:ln>
+          <a:effectLst/>
+        </p:spPr>
+        <p:style>
+          <a:lnRef idx="2">
+            <a:schemeClr val="accent1"/>
+          </a:lnRef>
+          <a:fillRef idx="0">
+            <a:schemeClr val="accent1"/>
+          </a:fillRef>
+          <a:effectRef idx="1">
+            <a:schemeClr val="accent1"/>
+          </a:effectRef>
+          <a:fontRef idx="minor">
+            <a:schemeClr val="tx1"/>
+          </a:fontRef>
+        </p:style>
+      </p:cxnSp>
+      <p:cxnSp>
+        <p:nvCxnSpPr>
+          <p:cNvPr id="26" name="Connector 25"/>
+          <p:cNvCxnSpPr/>
+          <p:nvPr/>
+        </p:nvCxnSpPr>
+        <p:spPr>
+          <a:xfrm>
+            <a:off x="6095847" y="5958840"/>
+            <a:ext cx="2810179" cy="182880"/>
+          </a:xfrm>
+          <a:prstGeom prst="line">
+            <a:avLst/>
+          </a:prstGeom>
+          <a:ln w="12700">
+            <a:solidFill>
+              <a:srgbClr val="64748B"/>
+            </a:solidFill>
+            <a:tailEnd type="triangle"/>
+          </a:ln>
+          <a:effectLst/>
+        </p:spPr>
+        <p:style>
+          <a:lnRef idx="2">
+            <a:schemeClr val="accent1"/>
+          </a:lnRef>
+          <a:fillRef idx="0">
+            <a:schemeClr val="accent1"/>
+          </a:fillRef>
+          <a:effectRef idx="1">
+            <a:schemeClr val="accent1"/>
+          </a:effectRef>
+          <a:fontRef idx="minor">
+            <a:schemeClr val="tx1"/>
+          </a:fontRef>
+        </p:style>
+      </p:cxnSp>
+      <p:cxnSp>
+        <p:nvCxnSpPr>
+          <p:cNvPr id="27" name="Connector 26"/>
+          <p:cNvCxnSpPr/>
+          <p:nvPr/>
+        </p:nvCxnSpPr>
+        <p:spPr>
+          <a:xfrm flipH="1">
+            <a:off x="3285667" y="5958840"/>
+            <a:ext cx="6557086" cy="182880"/>
+          </a:xfrm>
+          <a:prstGeom prst="line">
+            <a:avLst/>
+          </a:prstGeom>
+          <a:ln w="12700">
+            <a:solidFill>
+              <a:srgbClr val="64748B"/>
+            </a:solidFill>
+            <a:tailEnd type="triangle"/>
+          </a:ln>
+          <a:effectLst/>
+        </p:spPr>
+        <p:style>
+          <a:lnRef idx="2">
+            <a:schemeClr val="accent1"/>
+          </a:lnRef>
+          <a:fillRef idx="0">
+            <a:schemeClr val="accent1"/>
+          </a:fillRef>
+          <a:effectRef idx="1">
+            <a:schemeClr val="accent1"/>
+          </a:effectRef>
+          <a:fontRef idx="minor">
+            <a:schemeClr val="tx1"/>
+          </a:fontRef>
+        </p:style>
+      </p:cxnSp>
+      <p:cxnSp>
+        <p:nvCxnSpPr>
+          <p:cNvPr id="28" name="Connector 27"/>
+          <p:cNvCxnSpPr/>
+          <p:nvPr/>
+        </p:nvCxnSpPr>
+        <p:spPr>
+          <a:xfrm flipH="1">
+            <a:off x="8906026" y="5958840"/>
+            <a:ext cx="936727" cy="182880"/>
+          </a:xfrm>
+          <a:prstGeom prst="line">
+            <a:avLst/>
+          </a:prstGeom>
+          <a:ln w="12700">
+            <a:solidFill>
+              <a:srgbClr val="64748B"/>
+            </a:solidFill>
+            <a:tailEnd type="triangle"/>
+          </a:ln>
+          <a:effectLst/>
+        </p:spPr>
+        <p:style>
+          <a:lnRef idx="2">
+            <a:schemeClr val="accent1"/>
+          </a:lnRef>
+          <a:fillRef idx="0">
+            <a:schemeClr val="accent1"/>
+          </a:fillRef>
+          <a:effectRef idx="1">
+            <a:schemeClr val="accent1"/>
+          </a:effectRef>
+          <a:fontRef idx="minor">
+            <a:schemeClr val="tx1"/>
+          </a:fontRef>
+        </p:style>
+      </p:cxnSp>
     </p:spTree>
   </p:cSld>
   <p:clrMapOvr>
@@ -8944,7 +9674,7 @@
               </a:defRPr>
             </a:pPr>
             <a:r>
-              <a:t>Results on streamed eval — accuracy by attack type</a:t>
+              <a:t>Results on streamed eval — confusion matrix &amp; confidence</a:t>
             </a:r>
           </a:p>
         </p:txBody>
@@ -8952,42 +9682,6 @@
       <p:sp>
         <p:nvSpPr>
           <p:cNvPr id="5" name="TextBox 4"/>
-          <p:cNvSpPr txBox="1"/>
-          <p:nvPr/>
-        </p:nvSpPr>
-        <p:spPr>
-          <a:xfrm>
-            <a:off x="548640" y="658368"/>
-            <a:ext cx="11094415" cy="365760"/>
-          </a:xfrm>
-          <a:prstGeom prst="rect">
-            <a:avLst/>
-          </a:prstGeom>
-          <a:noFill/>
-        </p:spPr>
-        <p:txBody>
-          <a:bodyPr wrap="none">
-            <a:spAutoFit/>
-          </a:bodyPr>
-          <a:lstStyle/>
-          <a:p>
-            <a:pPr>
-              <a:defRPr sz="1300">
-                <a:solidFill>
-                  <a:srgbClr val="CBD5E1"/>
-                </a:solidFill>
-                <a:latin typeface="Calibri"/>
-              </a:defRPr>
-            </a:pPr>
-            <a:r>
-              <a:t>Near-perfect on most TTS/VC systems; A17/A18/A19 are the hard ones</a:t>
-            </a:r>
-          </a:p>
-        </p:txBody>
-      </p:sp>
-      <p:sp>
-        <p:nvSpPr>
-          <p:cNvPr id="6" name="TextBox 5"/>
           <p:cNvSpPr txBox="1"/>
           <p:nvPr/>
         </p:nvSpPr>
@@ -9021,541 +9715,9 @@
           </a:p>
         </p:txBody>
       </p:sp>
-      <p:sp>
-        <p:nvSpPr>
-          <p:cNvPr id="7" name="Rounded Rectangle 6"/>
-          <p:cNvSpPr/>
-          <p:nvPr/>
-        </p:nvSpPr>
-        <p:spPr>
-          <a:xfrm>
-            <a:off x="548640" y="1417320"/>
-            <a:ext cx="2567863" cy="1463040"/>
-          </a:xfrm>
-          <a:prstGeom prst="roundRect">
-            <a:avLst>
-              <a:gd name="adj" fmla="val 6000"/>
-            </a:avLst>
-          </a:prstGeom>
-          <a:solidFill>
-            <a:srgbClr val="FFFFFF"/>
-          </a:solidFill>
-          <a:ln w="12700">
-            <a:solidFill>
-              <a:srgbClr val="E2E8F0"/>
-            </a:solidFill>
-          </a:ln>
-          <a:effectLst/>
-        </p:spPr>
-        <p:style>
-          <a:lnRef idx="1">
-            <a:schemeClr val="accent1"/>
-          </a:lnRef>
-          <a:fillRef idx="3">
-            <a:schemeClr val="accent1"/>
-          </a:fillRef>
-          <a:effectRef idx="2">
-            <a:schemeClr val="accent1"/>
-          </a:effectRef>
-          <a:fontRef idx="minor">
-            <a:schemeClr val="lt1"/>
-          </a:fontRef>
-        </p:style>
-        <p:txBody>
-          <a:bodyPr rtlCol="0" anchor="ctr"/>
-          <a:lstStyle/>
-          <a:p>
-            <a:pPr algn="ctr"/>
-          </a:p>
-        </p:txBody>
-      </p:sp>
-      <p:sp>
-        <p:nvSpPr>
-          <p:cNvPr id="8" name="TextBox 7"/>
-          <p:cNvSpPr txBox="1"/>
-          <p:nvPr/>
-        </p:nvSpPr>
-        <p:spPr>
-          <a:xfrm>
-            <a:off x="548640" y="1618488"/>
-            <a:ext cx="2567863" cy="731520"/>
-          </a:xfrm>
-          <a:prstGeom prst="rect">
-            <a:avLst/>
-          </a:prstGeom>
-          <a:noFill/>
-        </p:spPr>
-        <p:txBody>
-          <a:bodyPr wrap="none">
-            <a:spAutoFit/>
-          </a:bodyPr>
-          <a:lstStyle/>
-          <a:p>
-            <a:pPr algn="ctr">
-              <a:defRPr sz="3400" b="1">
-                <a:solidFill>
-                  <a:srgbClr val="0D9488"/>
-                </a:solidFill>
-                <a:latin typeface="Calibri"/>
-              </a:defRPr>
-            </a:pPr>
-            <a:r>
-              <a:t>89.3%</a:t>
-            </a:r>
-          </a:p>
-        </p:txBody>
-      </p:sp>
-      <p:sp>
-        <p:nvSpPr>
-          <p:cNvPr id="9" name="TextBox 8"/>
-          <p:cNvSpPr txBox="1"/>
-          <p:nvPr/>
-        </p:nvSpPr>
-        <p:spPr>
-          <a:xfrm>
-            <a:off x="640080" y="2377440"/>
-            <a:ext cx="2384983" cy="548640"/>
-          </a:xfrm>
-          <a:prstGeom prst="rect">
-            <a:avLst/>
-          </a:prstGeom>
-          <a:noFill/>
-        </p:spPr>
-        <p:txBody>
-          <a:bodyPr wrap="square">
-            <a:spAutoFit/>
-          </a:bodyPr>
-          <a:lstStyle/>
-          <a:p>
-            <a:pPr algn="ctr">
-              <a:defRPr sz="1200">
-                <a:solidFill>
-                  <a:srgbClr val="64748B"/>
-                </a:solidFill>
-                <a:latin typeface="Calibri"/>
-              </a:defRPr>
-            </a:pPr>
-            <a:r>
-              <a:t>Balanced accuracy</a:t>
-            </a:r>
-          </a:p>
-          <a:p>
-            <a:pPr algn="ctr">
-              <a:defRPr sz="1200">
-                <a:solidFill>
-                  <a:srgbClr val="64748B"/>
-                </a:solidFill>
-                <a:latin typeface="Calibri"/>
-              </a:defRPr>
-            </a:pPr>
-            <a:r>
-              <a:t>(mean of per-class recalls)</a:t>
-            </a:r>
-          </a:p>
-        </p:txBody>
-      </p:sp>
-      <p:sp>
-        <p:nvSpPr>
-          <p:cNvPr id="10" name="Rounded Rectangle 9"/>
-          <p:cNvSpPr/>
-          <p:nvPr/>
-        </p:nvSpPr>
-        <p:spPr>
-          <a:xfrm>
-            <a:off x="3390823" y="1417320"/>
-            <a:ext cx="2567863" cy="1463040"/>
-          </a:xfrm>
-          <a:prstGeom prst="roundRect">
-            <a:avLst>
-              <a:gd name="adj" fmla="val 6000"/>
-            </a:avLst>
-          </a:prstGeom>
-          <a:solidFill>
-            <a:srgbClr val="FFFFFF"/>
-          </a:solidFill>
-          <a:ln w="12700">
-            <a:solidFill>
-              <a:srgbClr val="E2E8F0"/>
-            </a:solidFill>
-          </a:ln>
-          <a:effectLst/>
-        </p:spPr>
-        <p:style>
-          <a:lnRef idx="1">
-            <a:schemeClr val="accent1"/>
-          </a:lnRef>
-          <a:fillRef idx="3">
-            <a:schemeClr val="accent1"/>
-          </a:fillRef>
-          <a:effectRef idx="2">
-            <a:schemeClr val="accent1"/>
-          </a:effectRef>
-          <a:fontRef idx="minor">
-            <a:schemeClr val="lt1"/>
-          </a:fontRef>
-        </p:style>
-        <p:txBody>
-          <a:bodyPr rtlCol="0" anchor="ctr"/>
-          <a:lstStyle/>
-          <a:p>
-            <a:pPr algn="ctr"/>
-          </a:p>
-        </p:txBody>
-      </p:sp>
-      <p:sp>
-        <p:nvSpPr>
-          <p:cNvPr id="11" name="TextBox 10"/>
-          <p:cNvSpPr txBox="1"/>
-          <p:nvPr/>
-        </p:nvSpPr>
-        <p:spPr>
-          <a:xfrm>
-            <a:off x="3390823" y="1618488"/>
-            <a:ext cx="2567863" cy="731520"/>
-          </a:xfrm>
-          <a:prstGeom prst="rect">
-            <a:avLst/>
-          </a:prstGeom>
-          <a:noFill/>
-        </p:spPr>
-        <p:txBody>
-          <a:bodyPr wrap="none">
-            <a:spAutoFit/>
-          </a:bodyPr>
-          <a:lstStyle/>
-          <a:p>
-            <a:pPr algn="ctr">
-              <a:defRPr sz="3400" b="1">
-                <a:solidFill>
-                  <a:srgbClr val="2B6CB0"/>
-                </a:solidFill>
-                <a:latin typeface="Calibri"/>
-              </a:defRPr>
-            </a:pPr>
-            <a:r>
-              <a:t>95.3%</a:t>
-            </a:r>
-          </a:p>
-        </p:txBody>
-      </p:sp>
-      <p:sp>
-        <p:nvSpPr>
-          <p:cNvPr id="12" name="TextBox 11"/>
-          <p:cNvSpPr txBox="1"/>
-          <p:nvPr/>
-        </p:nvSpPr>
-        <p:spPr>
-          <a:xfrm>
-            <a:off x="3482263" y="2377440"/>
-            <a:ext cx="2384983" cy="548640"/>
-          </a:xfrm>
-          <a:prstGeom prst="rect">
-            <a:avLst/>
-          </a:prstGeom>
-          <a:noFill/>
-        </p:spPr>
-        <p:txBody>
-          <a:bodyPr wrap="square">
-            <a:spAutoFit/>
-          </a:bodyPr>
-          <a:lstStyle/>
-          <a:p>
-            <a:pPr algn="ctr">
-              <a:defRPr sz="1200">
-                <a:solidFill>
-                  <a:srgbClr val="64748B"/>
-                </a:solidFill>
-                <a:latin typeface="Calibri"/>
-              </a:defRPr>
-            </a:pPr>
-            <a:r>
-              <a:t>Bonafide recall</a:t>
-            </a:r>
-          </a:p>
-          <a:p>
-            <a:pPr algn="ctr">
-              <a:defRPr sz="1200">
-                <a:solidFill>
-                  <a:srgbClr val="64748B"/>
-                </a:solidFill>
-                <a:latin typeface="Calibri"/>
-              </a:defRPr>
-            </a:pPr>
-            <a:r>
-              <a:t>(real human speech)</a:t>
-            </a:r>
-          </a:p>
-        </p:txBody>
-      </p:sp>
-      <p:sp>
-        <p:nvSpPr>
-          <p:cNvPr id="13" name="Rounded Rectangle 12"/>
-          <p:cNvSpPr/>
-          <p:nvPr/>
-        </p:nvSpPr>
-        <p:spPr>
-          <a:xfrm>
-            <a:off x="6233006" y="1417320"/>
-            <a:ext cx="2567863" cy="1463040"/>
-          </a:xfrm>
-          <a:prstGeom prst="roundRect">
-            <a:avLst>
-              <a:gd name="adj" fmla="val 6000"/>
-            </a:avLst>
-          </a:prstGeom>
-          <a:solidFill>
-            <a:srgbClr val="FFFFFF"/>
-          </a:solidFill>
-          <a:ln w="12700">
-            <a:solidFill>
-              <a:srgbClr val="E2E8F0"/>
-            </a:solidFill>
-          </a:ln>
-          <a:effectLst/>
-        </p:spPr>
-        <p:style>
-          <a:lnRef idx="1">
-            <a:schemeClr val="accent1"/>
-          </a:lnRef>
-          <a:fillRef idx="3">
-            <a:schemeClr val="accent1"/>
-          </a:fillRef>
-          <a:effectRef idx="2">
-            <a:schemeClr val="accent1"/>
-          </a:effectRef>
-          <a:fontRef idx="minor">
-            <a:schemeClr val="lt1"/>
-          </a:fontRef>
-        </p:style>
-        <p:txBody>
-          <a:bodyPr rtlCol="0" anchor="ctr"/>
-          <a:lstStyle/>
-          <a:p>
-            <a:pPr algn="ctr"/>
-          </a:p>
-        </p:txBody>
-      </p:sp>
-      <p:sp>
-        <p:nvSpPr>
-          <p:cNvPr id="14" name="TextBox 13"/>
-          <p:cNvSpPr txBox="1"/>
-          <p:nvPr/>
-        </p:nvSpPr>
-        <p:spPr>
-          <a:xfrm>
-            <a:off x="6233006" y="1618488"/>
-            <a:ext cx="2567863" cy="731520"/>
-          </a:xfrm>
-          <a:prstGeom prst="rect">
-            <a:avLst/>
-          </a:prstGeom>
-          <a:noFill/>
-        </p:spPr>
-        <p:txBody>
-          <a:bodyPr wrap="none">
-            <a:spAutoFit/>
-          </a:bodyPr>
-          <a:lstStyle/>
-          <a:p>
-            <a:pPr algn="ctr">
-              <a:defRPr sz="3400" b="1">
-                <a:solidFill>
-                  <a:srgbClr val="2B6CB0"/>
-                </a:solidFill>
-                <a:latin typeface="Calibri"/>
-              </a:defRPr>
-            </a:pPr>
-            <a:r>
-              <a:t>83.3%</a:t>
-            </a:r>
-          </a:p>
-        </p:txBody>
-      </p:sp>
-      <p:sp>
-        <p:nvSpPr>
-          <p:cNvPr id="15" name="TextBox 14"/>
-          <p:cNvSpPr txBox="1"/>
-          <p:nvPr/>
-        </p:nvSpPr>
-        <p:spPr>
-          <a:xfrm>
-            <a:off x="6324446" y="2377440"/>
-            <a:ext cx="2384983" cy="548640"/>
-          </a:xfrm>
-          <a:prstGeom prst="rect">
-            <a:avLst/>
-          </a:prstGeom>
-          <a:noFill/>
-        </p:spPr>
-        <p:txBody>
-          <a:bodyPr wrap="square">
-            <a:spAutoFit/>
-          </a:bodyPr>
-          <a:lstStyle/>
-          <a:p>
-            <a:pPr algn="ctr">
-              <a:defRPr sz="1200">
-                <a:solidFill>
-                  <a:srgbClr val="64748B"/>
-                </a:solidFill>
-                <a:latin typeface="Calibri"/>
-              </a:defRPr>
-            </a:pPr>
-            <a:r>
-              <a:t>Spoof recall</a:t>
-            </a:r>
-          </a:p>
-          <a:p>
-            <a:pPr algn="ctr">
-              <a:defRPr sz="1200">
-                <a:solidFill>
-                  <a:srgbClr val="64748B"/>
-                </a:solidFill>
-                <a:latin typeface="Calibri"/>
-              </a:defRPr>
-            </a:pPr>
-            <a:r>
-              <a:t>(AI-generated speech)</a:t>
-            </a:r>
-          </a:p>
-        </p:txBody>
-      </p:sp>
-      <p:sp>
-        <p:nvSpPr>
-          <p:cNvPr id="16" name="Rounded Rectangle 15"/>
-          <p:cNvSpPr/>
-          <p:nvPr/>
-        </p:nvSpPr>
-        <p:spPr>
-          <a:xfrm>
-            <a:off x="9075189" y="1417320"/>
-            <a:ext cx="2567863" cy="1463040"/>
-          </a:xfrm>
-          <a:prstGeom prst="roundRect">
-            <a:avLst>
-              <a:gd name="adj" fmla="val 6000"/>
-            </a:avLst>
-          </a:prstGeom>
-          <a:solidFill>
-            <a:srgbClr val="FFFFFF"/>
-          </a:solidFill>
-          <a:ln w="12700">
-            <a:solidFill>
-              <a:srgbClr val="E2E8F0"/>
-            </a:solidFill>
-          </a:ln>
-          <a:effectLst/>
-        </p:spPr>
-        <p:style>
-          <a:lnRef idx="1">
-            <a:schemeClr val="accent1"/>
-          </a:lnRef>
-          <a:fillRef idx="3">
-            <a:schemeClr val="accent1"/>
-          </a:fillRef>
-          <a:effectRef idx="2">
-            <a:schemeClr val="accent1"/>
-          </a:effectRef>
-          <a:fontRef idx="minor">
-            <a:schemeClr val="lt1"/>
-          </a:fontRef>
-        </p:style>
-        <p:txBody>
-          <a:bodyPr rtlCol="0" anchor="ctr"/>
-          <a:lstStyle/>
-          <a:p>
-            <a:pPr algn="ctr"/>
-          </a:p>
-        </p:txBody>
-      </p:sp>
-      <p:sp>
-        <p:nvSpPr>
-          <p:cNvPr id="17" name="TextBox 16"/>
-          <p:cNvSpPr txBox="1"/>
-          <p:nvPr/>
-        </p:nvSpPr>
-        <p:spPr>
-          <a:xfrm>
-            <a:off x="9075189" y="1618488"/>
-            <a:ext cx="2567863" cy="731520"/>
-          </a:xfrm>
-          <a:prstGeom prst="rect">
-            <a:avLst/>
-          </a:prstGeom>
-          <a:noFill/>
-        </p:spPr>
-        <p:txBody>
-          <a:bodyPr wrap="none">
-            <a:spAutoFit/>
-          </a:bodyPr>
-          <a:lstStyle/>
-          <a:p>
-            <a:pPr algn="ctr">
-              <a:defRPr sz="3400" b="1">
-                <a:solidFill>
-                  <a:srgbClr val="DC2626"/>
-                </a:solidFill>
-                <a:latin typeface="Calibri"/>
-              </a:defRPr>
-            </a:pPr>
-            <a:r>
-              <a:t>88.2%</a:t>
-            </a:r>
-          </a:p>
-        </p:txBody>
-      </p:sp>
-      <p:sp>
-        <p:nvSpPr>
-          <p:cNvPr id="18" name="TextBox 17"/>
-          <p:cNvSpPr txBox="1"/>
-          <p:nvPr/>
-        </p:nvSpPr>
-        <p:spPr>
-          <a:xfrm>
-            <a:off x="9166629" y="2377440"/>
-            <a:ext cx="2384983" cy="548640"/>
-          </a:xfrm>
-          <a:prstGeom prst="rect">
-            <a:avLst/>
-          </a:prstGeom>
-          <a:noFill/>
-        </p:spPr>
-        <p:txBody>
-          <a:bodyPr wrap="square">
-            <a:spAutoFit/>
-          </a:bodyPr>
-          <a:lstStyle/>
-          <a:p>
-            <a:pPr algn="ctr">
-              <a:defRPr sz="1200">
-                <a:solidFill>
-                  <a:srgbClr val="64748B"/>
-                </a:solidFill>
-                <a:latin typeface="Calibri"/>
-              </a:defRPr>
-            </a:pPr>
-            <a:r>
-              <a:t>Always-spoof baseline</a:t>
-            </a:r>
-          </a:p>
-          <a:p>
-            <a:pPr algn="ctr">
-              <a:defRPr sz="1200">
-                <a:solidFill>
-                  <a:srgbClr val="64748B"/>
-                </a:solidFill>
-                <a:latin typeface="Calibri"/>
-              </a:defRPr>
-            </a:pPr>
-            <a:r>
-              <a:t>beats raw accuracy (84.8%)</a:t>
-            </a:r>
-          </a:p>
-        </p:txBody>
-      </p:sp>
       <p:pic>
         <p:nvPicPr>
-          <p:cNvPr id="19" name="Picture 18" descr="accuracy_by_attack.png"/>
+          <p:cNvPr id="6" name="Picture 5" descr="confusion_matrix.png"/>
           <p:cNvPicPr>
             <a:picLocks noChangeAspect="1"/>
           </p:cNvPicPr>
@@ -9569,17 +9731,41 @@
         </p:blipFill>
         <p:spPr>
           <a:xfrm>
-            <a:off x="2895447" y="3108960"/>
-            <a:ext cx="6400800" cy="3200400"/>
+            <a:off x="807643" y="1417320"/>
+            <a:ext cx="4892040" cy="4892040"/>
           </a:xfrm>
           <a:prstGeom prst="rect">
             <a:avLst/>
           </a:prstGeom>
         </p:spPr>
       </p:pic>
-      <p:sp>
-        <p:nvSpPr>
-          <p:cNvPr id="20" name="TextBox 19"/>
+      <p:pic>
+        <p:nvPicPr>
+          <p:cNvPr id="7" name="Picture 6" descr="confidence_histogram.png"/>
+          <p:cNvPicPr>
+            <a:picLocks noChangeAspect="1"/>
+          </p:cNvPicPr>
+          <p:nvPr/>
+        </p:nvPicPr>
+        <p:blipFill>
+          <a:blip r:embed="rId3"/>
+          <a:stretch>
+            <a:fillRect/>
+          </a:stretch>
+        </p:blipFill>
+        <p:spPr>
+          <a:xfrm>
+            <a:off x="6233007" y="2059991"/>
+            <a:ext cx="5410047" cy="3606698"/>
+          </a:xfrm>
+          <a:prstGeom prst="rect">
+            <a:avLst/>
+          </a:prstGeom>
+        </p:spPr>
+      </p:pic>
+      <p:sp>
+        <p:nvSpPr>
+          <p:cNvPr id="8" name="TextBox 7"/>
           <p:cNvSpPr txBox="1"/>
           <p:nvPr/>
         </p:nvSpPr>
@@ -9608,7 +9794,7 @@
               </a:defRPr>
             </a:pPr>
             <a:r>
-              <a:t>All figures from the 2000 streamed eval predictions (attacks A07–A19, unseen during training).</a:t>
+              <a:t>Both from the streamed eval predictions. Left: true vs. predicted counts. Right: confidence on correct vs. incorrect calls.</a:t>
             </a:r>
           </a:p>
         </p:txBody>
@@ -9758,7 +9944,7 @@
               </a:defRPr>
             </a:pPr>
             <a:r>
-              <a:t>Live demo</a:t>
+              <a:t>Results on streamed eval — accuracy by attack type</a:t>
             </a:r>
           </a:p>
         </p:txBody>
@@ -9766,6 +9952,42 @@
       <p:sp>
         <p:nvSpPr>
           <p:cNvPr id="5" name="TextBox 4"/>
+          <p:cNvSpPr txBox="1"/>
+          <p:nvPr/>
+        </p:nvSpPr>
+        <p:spPr>
+          <a:xfrm>
+            <a:off x="548640" y="658368"/>
+            <a:ext cx="11094415" cy="365760"/>
+          </a:xfrm>
+          <a:prstGeom prst="rect">
+            <a:avLst/>
+          </a:prstGeom>
+          <a:noFill/>
+        </p:spPr>
+        <p:txBody>
+          <a:bodyPr wrap="none">
+            <a:spAutoFit/>
+          </a:bodyPr>
+          <a:lstStyle/>
+          <a:p>
+            <a:pPr>
+              <a:defRPr sz="1300">
+                <a:solidFill>
+                  <a:srgbClr val="CBD5E1"/>
+                </a:solidFill>
+                <a:latin typeface="Calibri"/>
+              </a:defRPr>
+            </a:pPr>
+            <a:r>
+              <a:t>Near-perfect on most TTS/VC systems; A17/A18/A19 are the hard ones</a:t>
+            </a:r>
+          </a:p>
+        </p:txBody>
+      </p:sp>
+      <p:sp>
+        <p:nvSpPr>
+          <p:cNvPr id="6" name="TextBox 5"/>
           <p:cNvSpPr txBox="1"/>
           <p:nvPr/>
         </p:nvSpPr>
@@ -9801,273 +10023,14 @@
       </p:sp>
       <p:sp>
         <p:nvSpPr>
-          <p:cNvPr id="6" name="TextBox 5"/>
-          <p:cNvSpPr txBox="1"/>
+          <p:cNvPr id="7" name="Rounded Rectangle 6"/>
+          <p:cNvSpPr/>
           <p:nvPr/>
         </p:nvSpPr>
         <p:spPr>
           <a:xfrm>
             <a:off x="548640" y="1417320"/>
-            <a:ext cx="11094415" cy="2286000"/>
-          </a:xfrm>
-          <a:prstGeom prst="rect">
-            <a:avLst/>
-          </a:prstGeom>
-          <a:noFill/>
-        </p:spPr>
-        <p:txBody>
-          <a:bodyPr wrap="square">
-            <a:spAutoFit/>
-          </a:bodyPr>
-          <a:lstStyle/>
-          <a:p>
-            <a:pPr>
-              <a:spcAft>
-                <a:spcPts val="1200"/>
-              </a:spcAft>
-              <a:defRPr sz="1800">
-                <a:solidFill>
-                  <a:srgbClr val="1A202C"/>
-                </a:solidFill>
-                <a:latin typeface="Calibri"/>
-              </a:defRPr>
-            </a:pPr>
-            <a:r>
-              <a:t>•  /classify — upload a clip or record live from the microphone (captured via the Web Audio API, encoded to WAV client-side — no server changes needed for live recording).</a:t>
-            </a:r>
-          </a:p>
-          <a:p>
-            <a:pPr>
-              <a:spcAft>
-                <a:spcPts val="1200"/>
-              </a:spcAft>
-              <a:defRPr sz="1800">
-                <a:solidFill>
-                  <a:srgbClr val="1A202C"/>
-                </a:solidFill>
-                <a:latin typeface="Calibri"/>
-              </a:defRPr>
-            </a:pPr>
-            <a:r>
-              <a:t>•  Returns Human / AI-generated + confidence, plus the 5 most similar training clips, each one playable right in the results, so you can hear what "similar" sounds like.</a:t>
-            </a:r>
-          </a:p>
-          <a:p>
-            <a:pPr>
-              <a:spcAft>
-                <a:spcPts val="1200"/>
-              </a:spcAft>
-              <a:defRPr sz="1800">
-                <a:solidFill>
-                  <a:srgbClr val="1A202C"/>
-                </a:solidFill>
-                <a:latin typeface="Calibri"/>
-              </a:defRPr>
-            </a:pPr>
-            <a:r>
-              <a:t>•  /dashboard — live Elasticsearch aggregations: model comparison, threshold trade-off, ROC curve, confusion matrix, feature importance, confidence calibration.</a:t>
-            </a:r>
-          </a:p>
-        </p:txBody>
-      </p:sp>
-      <p:sp>
-        <p:nvSpPr>
-          <p:cNvPr id="7" name="Rounded Rectangle 6">
-            <a:hlinkClick r:id="rId2"/>
-          </p:cNvPr>
-          <p:cNvSpPr/>
-          <p:nvPr/>
-        </p:nvSpPr>
-        <p:spPr>
-          <a:xfrm>
-            <a:off x="548640" y="3794760"/>
-            <a:ext cx="3291840" cy="594360"/>
-          </a:xfrm>
-          <a:prstGeom prst="roundRect">
-            <a:avLst>
-              <a:gd name="adj" fmla="val 6000"/>
-            </a:avLst>
-          </a:prstGeom>
-          <a:solidFill>
-            <a:srgbClr val="0D9488"/>
-          </a:solidFill>
-          <a:ln>
-            <a:noFill/>
-          </a:ln>
-          <a:effectLst/>
-        </p:spPr>
-        <p:style>
-          <a:lnRef idx="1">
-            <a:schemeClr val="accent1"/>
-          </a:lnRef>
-          <a:fillRef idx="3">
-            <a:schemeClr val="accent1"/>
-          </a:fillRef>
-          <a:effectRef idx="2">
-            <a:schemeClr val="accent1"/>
-          </a:effectRef>
-          <a:fontRef idx="minor">
-            <a:schemeClr val="lt1"/>
-          </a:fontRef>
-        </p:style>
-        <p:txBody>
-          <a:bodyPr rtlCol="0" anchor="ctr" wrap="square"/>
-          <a:lstStyle/>
-          <a:p>
-            <a:pPr algn="ctr">
-              <a:defRPr sz="1700" b="1">
-                <a:solidFill>
-                  <a:srgbClr val="FFFFFF"/>
-                </a:solidFill>
-                <a:latin typeface="Calibri"/>
-              </a:defRPr>
-            </a:pPr>
-            <a:r>
-              <a:t>▶  Open /classify</a:t>
-            </a:r>
-          </a:p>
-        </p:txBody>
-      </p:sp>
-      <p:sp>
-        <p:nvSpPr>
-          <p:cNvPr id="8" name="Rounded Rectangle 7">
-            <a:hlinkClick r:id="rId3"/>
-          </p:cNvPr>
-          <p:cNvSpPr/>
-          <p:nvPr/>
-        </p:nvSpPr>
-        <p:spPr>
-          <a:xfrm>
-            <a:off x="4114800" y="3794760"/>
-            <a:ext cx="3291840" cy="594360"/>
-          </a:xfrm>
-          <a:prstGeom prst="roundRect">
-            <a:avLst>
-              <a:gd name="adj" fmla="val 6000"/>
-            </a:avLst>
-          </a:prstGeom>
-          <a:solidFill>
-            <a:srgbClr val="2B6CB0"/>
-          </a:solidFill>
-          <a:ln>
-            <a:noFill/>
-          </a:ln>
-          <a:effectLst/>
-        </p:spPr>
-        <p:style>
-          <a:lnRef idx="1">
-            <a:schemeClr val="accent1"/>
-          </a:lnRef>
-          <a:fillRef idx="3">
-            <a:schemeClr val="accent1"/>
-          </a:fillRef>
-          <a:effectRef idx="2">
-            <a:schemeClr val="accent1"/>
-          </a:effectRef>
-          <a:fontRef idx="minor">
-            <a:schemeClr val="lt1"/>
-          </a:fontRef>
-        </p:style>
-        <p:txBody>
-          <a:bodyPr rtlCol="0" anchor="ctr" wrap="square"/>
-          <a:lstStyle/>
-          <a:p>
-            <a:pPr algn="ctr">
-              <a:defRPr sz="1700" b="1">
-                <a:solidFill>
-                  <a:srgbClr val="FFFFFF"/>
-                </a:solidFill>
-                <a:latin typeface="Calibri"/>
-              </a:defRPr>
-            </a:pPr>
-            <a:r>
-              <a:t>▶  Open /dashboard</a:t>
-            </a:r>
-          </a:p>
-        </p:txBody>
-      </p:sp>
-      <p:sp>
-        <p:nvSpPr>
-          <p:cNvPr id="9" name="TextBox 8"/>
-          <p:cNvSpPr txBox="1"/>
-          <p:nvPr/>
-        </p:nvSpPr>
-        <p:spPr>
-          <a:xfrm>
-            <a:off x="548640" y="4407408"/>
-            <a:ext cx="11094415" cy="274320"/>
-          </a:xfrm>
-          <a:prstGeom prst="rect">
-            <a:avLst/>
-          </a:prstGeom>
-          <a:noFill/>
-        </p:spPr>
-        <p:txBody>
-          <a:bodyPr wrap="square">
-            <a:spAutoFit/>
-          </a:bodyPr>
-          <a:lstStyle/>
-          <a:p>
-            <a:pPr algn="l">
-              <a:defRPr sz="1100" b="0">
-                <a:solidFill>
-                  <a:srgbClr val="64748B"/>
-                </a:solidFill>
-                <a:latin typeface="Calibri"/>
-              </a:defRPr>
-            </a:pPr>
-            <a:r>
-              <a:t>Links open localhost:5000 — click while presenting from the machine running the app (see README.md).</a:t>
-            </a:r>
-          </a:p>
-        </p:txBody>
-      </p:sp>
-      <p:sp>
-        <p:nvSpPr>
-          <p:cNvPr id="10" name="TextBox 9"/>
-          <p:cNvSpPr txBox="1"/>
-          <p:nvPr/>
-        </p:nvSpPr>
-        <p:spPr>
-          <a:xfrm>
-            <a:off x="548640" y="4636008"/>
-            <a:ext cx="11094415" cy="228600"/>
-          </a:xfrm>
-          <a:prstGeom prst="rect">
-            <a:avLst/>
-          </a:prstGeom>
-          <a:noFill/>
-        </p:spPr>
-        <p:txBody>
-          <a:bodyPr wrap="square">
-            <a:spAutoFit/>
-          </a:bodyPr>
-          <a:lstStyle/>
-          <a:p>
-            <a:pPr algn="l">
-              <a:defRPr sz="1000" b="0">
-                <a:solidFill>
-                  <a:srgbClr val="64748B"/>
-                </a:solidFill>
-                <a:latin typeface="Calibri"/>
-              </a:defRPr>
-            </a:pPr>
-            <a:r>
-              <a:t>Where this stage sits in the pipeline:</a:t>
-            </a:r>
-          </a:p>
-        </p:txBody>
-      </p:sp>
-      <p:sp>
-        <p:nvSpPr>
-          <p:cNvPr id="11" name="Rounded Rectangle 10"/>
-          <p:cNvSpPr/>
-          <p:nvPr/>
-        </p:nvSpPr>
-        <p:spPr>
-          <a:xfrm>
-            <a:off x="548640" y="4892040"/>
-            <a:ext cx="2663875" cy="441960"/>
+            <a:ext cx="2567863" cy="1463040"/>
           </a:xfrm>
           <a:prstGeom prst="roundRect">
             <a:avLst>
@@ -10079,7 +10042,7 @@
           </a:solidFill>
           <a:ln w="12700">
             <a:solidFill>
-              <a:srgbClr val="2B6CB0"/>
+              <a:srgbClr val="E2E8F0"/>
             </a:solidFill>
           </a:ln>
           <a:effectLst/>
@@ -10099,33 +10062,108 @@
           </a:fontRef>
         </p:style>
         <p:txBody>
-          <a:bodyPr rtlCol="0" anchor="ctr" wrap="square" lIns="54864" rIns="54864" tIns="0" bIns="0"/>
+          <a:bodyPr rtlCol="0" anchor="ctr"/>
+          <a:lstStyle/>
+          <a:p>
+            <a:pPr algn="ctr"/>
+          </a:p>
+        </p:txBody>
+      </p:sp>
+      <p:sp>
+        <p:nvSpPr>
+          <p:cNvPr id="8" name="TextBox 7"/>
+          <p:cNvSpPr txBox="1"/>
+          <p:nvPr/>
+        </p:nvSpPr>
+        <p:spPr>
+          <a:xfrm>
+            <a:off x="548640" y="1618488"/>
+            <a:ext cx="2567863" cy="731520"/>
+          </a:xfrm>
+          <a:prstGeom prst="rect">
+            <a:avLst/>
+          </a:prstGeom>
+          <a:noFill/>
+        </p:spPr>
+        <p:txBody>
+          <a:bodyPr wrap="none">
+            <a:spAutoFit/>
+          </a:bodyPr>
           <a:lstStyle/>
           <a:p>
             <a:pPr algn="ctr">
-              <a:defRPr sz="850" b="1">
-                <a:solidFill>
-                  <a:srgbClr val="1A202C"/>
-                </a:solidFill>
-                <a:latin typeface="Calibri"/>
-              </a:defRPr>
-            </a:pPr>
-            <a:r>
-              <a:t>Kaggle</a:t>
-            </a:r>
-          </a:p>
-        </p:txBody>
-      </p:sp>
-      <p:sp>
-        <p:nvSpPr>
-          <p:cNvPr id="12" name="Rounded Rectangle 11"/>
+              <a:defRPr sz="3400" b="1">
+                <a:solidFill>
+                  <a:srgbClr val="0D9488"/>
+                </a:solidFill>
+                <a:latin typeface="Calibri"/>
+              </a:defRPr>
+            </a:pPr>
+            <a:r>
+              <a:t>89.3%</a:t>
+            </a:r>
+          </a:p>
+        </p:txBody>
+      </p:sp>
+      <p:sp>
+        <p:nvSpPr>
+          <p:cNvPr id="9" name="TextBox 8"/>
+          <p:cNvSpPr txBox="1"/>
+          <p:nvPr/>
+        </p:nvSpPr>
+        <p:spPr>
+          <a:xfrm>
+            <a:off x="640080" y="2377440"/>
+            <a:ext cx="2384983" cy="548640"/>
+          </a:xfrm>
+          <a:prstGeom prst="rect">
+            <a:avLst/>
+          </a:prstGeom>
+          <a:noFill/>
+        </p:spPr>
+        <p:txBody>
+          <a:bodyPr wrap="square">
+            <a:spAutoFit/>
+          </a:bodyPr>
+          <a:lstStyle/>
+          <a:p>
+            <a:pPr algn="ctr">
+              <a:defRPr sz="1200">
+                <a:solidFill>
+                  <a:srgbClr val="64748B"/>
+                </a:solidFill>
+                <a:latin typeface="Calibri"/>
+              </a:defRPr>
+            </a:pPr>
+            <a:r>
+              <a:t>Balanced accuracy</a:t>
+            </a:r>
+          </a:p>
+          <a:p>
+            <a:pPr algn="ctr">
+              <a:defRPr sz="1200">
+                <a:solidFill>
+                  <a:srgbClr val="64748B"/>
+                </a:solidFill>
+                <a:latin typeface="Calibri"/>
+              </a:defRPr>
+            </a:pPr>
+            <a:r>
+              <a:t>(mean of per-class recalls)</a:t>
+            </a:r>
+          </a:p>
+        </p:txBody>
+      </p:sp>
+      <p:sp>
+        <p:nvSpPr>
+          <p:cNvPr id="10" name="Rounded Rectangle 9"/>
           <p:cNvSpPr/>
           <p:nvPr/>
         </p:nvSpPr>
         <p:spPr>
           <a:xfrm>
-            <a:off x="3358819" y="4892040"/>
-            <a:ext cx="2663875" cy="441960"/>
+            <a:off x="3390823" y="1417320"/>
+            <a:ext cx="2567863" cy="1463040"/>
           </a:xfrm>
           <a:prstGeom prst="roundRect">
             <a:avLst>
@@ -10137,7 +10175,7 @@
           </a:solidFill>
           <a:ln w="12700">
             <a:solidFill>
-              <a:srgbClr val="2B6CB0"/>
+              <a:srgbClr val="E2E8F0"/>
             </a:solidFill>
           </a:ln>
           <a:effectLst/>
@@ -10157,19 +10195,94 @@
           </a:fontRef>
         </p:style>
         <p:txBody>
-          <a:bodyPr rtlCol="0" anchor="ctr" wrap="square" lIns="54864" rIns="54864" tIns="0" bIns="0"/>
+          <a:bodyPr rtlCol="0" anchor="ctr"/>
+          <a:lstStyle/>
+          <a:p>
+            <a:pPr algn="ctr"/>
+          </a:p>
+        </p:txBody>
+      </p:sp>
+      <p:sp>
+        <p:nvSpPr>
+          <p:cNvPr id="11" name="TextBox 10"/>
+          <p:cNvSpPr txBox="1"/>
+          <p:nvPr/>
+        </p:nvSpPr>
+        <p:spPr>
+          <a:xfrm>
+            <a:off x="3390823" y="1618488"/>
+            <a:ext cx="2567863" cy="731520"/>
+          </a:xfrm>
+          <a:prstGeom prst="rect">
+            <a:avLst/>
+          </a:prstGeom>
+          <a:noFill/>
+        </p:spPr>
+        <p:txBody>
+          <a:bodyPr wrap="none">
+            <a:spAutoFit/>
+          </a:bodyPr>
           <a:lstStyle/>
           <a:p>
             <a:pPr algn="ctr">
-              <a:defRPr sz="850" b="1">
-                <a:solidFill>
-                  <a:srgbClr val="1A202C"/>
-                </a:solidFill>
-                <a:latin typeface="Calibri"/>
-              </a:defRPr>
-            </a:pPr>
-            <a:r>
-              <a:t>MinIO</a:t>
+              <a:defRPr sz="3400" b="1">
+                <a:solidFill>
+                  <a:srgbClr val="2B6CB0"/>
+                </a:solidFill>
+                <a:latin typeface="Calibri"/>
+              </a:defRPr>
+            </a:pPr>
+            <a:r>
+              <a:t>95.3%</a:t>
+            </a:r>
+          </a:p>
+        </p:txBody>
+      </p:sp>
+      <p:sp>
+        <p:nvSpPr>
+          <p:cNvPr id="12" name="TextBox 11"/>
+          <p:cNvSpPr txBox="1"/>
+          <p:nvPr/>
+        </p:nvSpPr>
+        <p:spPr>
+          <a:xfrm>
+            <a:off x="3482263" y="2377440"/>
+            <a:ext cx="2384983" cy="548640"/>
+          </a:xfrm>
+          <a:prstGeom prst="rect">
+            <a:avLst/>
+          </a:prstGeom>
+          <a:noFill/>
+        </p:spPr>
+        <p:txBody>
+          <a:bodyPr wrap="square">
+            <a:spAutoFit/>
+          </a:bodyPr>
+          <a:lstStyle/>
+          <a:p>
+            <a:pPr algn="ctr">
+              <a:defRPr sz="1200">
+                <a:solidFill>
+                  <a:srgbClr val="64748B"/>
+                </a:solidFill>
+                <a:latin typeface="Calibri"/>
+              </a:defRPr>
+            </a:pPr>
+            <a:r>
+              <a:t>Bonafide recall</a:t>
+            </a:r>
+          </a:p>
+          <a:p>
+            <a:pPr algn="ctr">
+              <a:defRPr sz="1200">
+                <a:solidFill>
+                  <a:srgbClr val="64748B"/>
+                </a:solidFill>
+                <a:latin typeface="Calibri"/>
+              </a:defRPr>
+            </a:pPr>
+            <a:r>
+              <a:t>(real human speech)</a:t>
             </a:r>
           </a:p>
         </p:txBody>
@@ -10182,8 +10295,8 @@
         </p:nvSpPr>
         <p:spPr>
           <a:xfrm>
-            <a:off x="6168998" y="4892040"/>
-            <a:ext cx="2663875" cy="441960"/>
+            <a:off x="6233006" y="1417320"/>
+            <a:ext cx="2567863" cy="1463040"/>
           </a:xfrm>
           <a:prstGeom prst="roundRect">
             <a:avLst>
@@ -10195,7 +10308,7 @@
           </a:solidFill>
           <a:ln w="12700">
             <a:solidFill>
-              <a:srgbClr val="2B6CB0"/>
+              <a:srgbClr val="E2E8F0"/>
             </a:solidFill>
           </a:ln>
           <a:effectLst/>
@@ -10215,33 +10328,108 @@
           </a:fontRef>
         </p:style>
         <p:txBody>
-          <a:bodyPr rtlCol="0" anchor="ctr" wrap="square" lIns="54864" rIns="54864" tIns="0" bIns="0"/>
+          <a:bodyPr rtlCol="0" anchor="ctr"/>
+          <a:lstStyle/>
+          <a:p>
+            <a:pPr algn="ctr"/>
+          </a:p>
+        </p:txBody>
+      </p:sp>
+      <p:sp>
+        <p:nvSpPr>
+          <p:cNvPr id="14" name="TextBox 13"/>
+          <p:cNvSpPr txBox="1"/>
+          <p:nvPr/>
+        </p:nvSpPr>
+        <p:spPr>
+          <a:xfrm>
+            <a:off x="6233006" y="1618488"/>
+            <a:ext cx="2567863" cy="731520"/>
+          </a:xfrm>
+          <a:prstGeom prst="rect">
+            <a:avLst/>
+          </a:prstGeom>
+          <a:noFill/>
+        </p:spPr>
+        <p:txBody>
+          <a:bodyPr wrap="none">
+            <a:spAutoFit/>
+          </a:bodyPr>
           <a:lstStyle/>
           <a:p>
             <a:pPr algn="ctr">
-              <a:defRPr sz="850" b="1">
-                <a:solidFill>
-                  <a:srgbClr val="1A202C"/>
-                </a:solidFill>
-                <a:latin typeface="Calibri"/>
-              </a:defRPr>
-            </a:pPr>
-            <a:r>
-              <a:t>Spark</a:t>
-            </a:r>
-          </a:p>
-        </p:txBody>
-      </p:sp>
-      <p:sp>
-        <p:nvSpPr>
-          <p:cNvPr id="14" name="Rounded Rectangle 13"/>
+              <a:defRPr sz="3400" b="1">
+                <a:solidFill>
+                  <a:srgbClr val="2B6CB0"/>
+                </a:solidFill>
+                <a:latin typeface="Calibri"/>
+              </a:defRPr>
+            </a:pPr>
+            <a:r>
+              <a:t>83.3%</a:t>
+            </a:r>
+          </a:p>
+        </p:txBody>
+      </p:sp>
+      <p:sp>
+        <p:nvSpPr>
+          <p:cNvPr id="15" name="TextBox 14"/>
+          <p:cNvSpPr txBox="1"/>
+          <p:nvPr/>
+        </p:nvSpPr>
+        <p:spPr>
+          <a:xfrm>
+            <a:off x="6324446" y="2377440"/>
+            <a:ext cx="2384983" cy="548640"/>
+          </a:xfrm>
+          <a:prstGeom prst="rect">
+            <a:avLst/>
+          </a:prstGeom>
+          <a:noFill/>
+        </p:spPr>
+        <p:txBody>
+          <a:bodyPr wrap="square">
+            <a:spAutoFit/>
+          </a:bodyPr>
+          <a:lstStyle/>
+          <a:p>
+            <a:pPr algn="ctr">
+              <a:defRPr sz="1200">
+                <a:solidFill>
+                  <a:srgbClr val="64748B"/>
+                </a:solidFill>
+                <a:latin typeface="Calibri"/>
+              </a:defRPr>
+            </a:pPr>
+            <a:r>
+              <a:t>Spoof recall</a:t>
+            </a:r>
+          </a:p>
+          <a:p>
+            <a:pPr algn="ctr">
+              <a:defRPr sz="1200">
+                <a:solidFill>
+                  <a:srgbClr val="64748B"/>
+                </a:solidFill>
+                <a:latin typeface="Calibri"/>
+              </a:defRPr>
+            </a:pPr>
+            <a:r>
+              <a:t>(AI-generated speech)</a:t>
+            </a:r>
+          </a:p>
+        </p:txBody>
+      </p:sp>
+      <p:sp>
+        <p:nvSpPr>
+          <p:cNvPr id="16" name="Rounded Rectangle 15"/>
           <p:cNvSpPr/>
           <p:nvPr/>
         </p:nvSpPr>
         <p:spPr>
           <a:xfrm>
-            <a:off x="8979177" y="4892040"/>
-            <a:ext cx="2663875" cy="441960"/>
+            <a:off x="9075189" y="1417320"/>
+            <a:ext cx="2567863" cy="1463040"/>
           </a:xfrm>
           <a:prstGeom prst="roundRect">
             <a:avLst>
@@ -10253,7 +10441,7 @@
           </a:solidFill>
           <a:ln w="12700">
             <a:solidFill>
-              <a:srgbClr val="2B6CB0"/>
+              <a:srgbClr val="E2E8F0"/>
             </a:solidFill>
           </a:ln>
           <a:effectLst/>
@@ -10273,720 +10461,158 @@
           </a:fontRef>
         </p:style>
         <p:txBody>
-          <a:bodyPr rtlCol="0" anchor="ctr" wrap="square" lIns="54864" rIns="54864" tIns="0" bIns="0"/>
+          <a:bodyPr rtlCol="0" anchor="ctr"/>
+          <a:lstStyle/>
+          <a:p>
+            <a:pPr algn="ctr"/>
+          </a:p>
+        </p:txBody>
+      </p:sp>
+      <p:sp>
+        <p:nvSpPr>
+          <p:cNvPr id="17" name="TextBox 16"/>
+          <p:cNvSpPr txBox="1"/>
+          <p:nvPr/>
+        </p:nvSpPr>
+        <p:spPr>
+          <a:xfrm>
+            <a:off x="9075189" y="1618488"/>
+            <a:ext cx="2567863" cy="731520"/>
+          </a:xfrm>
+          <a:prstGeom prst="rect">
+            <a:avLst/>
+          </a:prstGeom>
+          <a:noFill/>
+        </p:spPr>
+        <p:txBody>
+          <a:bodyPr wrap="none">
+            <a:spAutoFit/>
+          </a:bodyPr>
           <a:lstStyle/>
           <a:p>
             <a:pPr algn="ctr">
-              <a:defRPr sz="850" b="1">
-                <a:solidFill>
-                  <a:srgbClr val="1A202C"/>
-                </a:solidFill>
-                <a:latin typeface="Calibri"/>
-              </a:defRPr>
-            </a:pPr>
-            <a:r>
-              <a:t>Parquet + ES</a:t>
-            </a:r>
-          </a:p>
-        </p:txBody>
-      </p:sp>
-      <p:sp>
-        <p:nvSpPr>
-          <p:cNvPr id="15" name="Rounded Rectangle 14"/>
-          <p:cNvSpPr/>
-          <p:nvPr/>
-        </p:nvSpPr>
-        <p:spPr>
-          <a:xfrm>
-            <a:off x="548640" y="5516880"/>
-            <a:ext cx="3600602" cy="441960"/>
-          </a:xfrm>
-          <a:prstGeom prst="roundRect">
-            <a:avLst>
-              <a:gd name="adj" fmla="val 6000"/>
-            </a:avLst>
-          </a:prstGeom>
-          <a:solidFill>
-            <a:srgbClr val="FFFFFF"/>
-          </a:solidFill>
-          <a:ln w="12700">
-            <a:solidFill>
-              <a:srgbClr val="0D9488"/>
-            </a:solidFill>
-          </a:ln>
-          <a:effectLst/>
-        </p:spPr>
-        <p:style>
-          <a:lnRef idx="1">
-            <a:schemeClr val="accent1"/>
-          </a:lnRef>
-          <a:fillRef idx="3">
-            <a:schemeClr val="accent1"/>
-          </a:fillRef>
-          <a:effectRef idx="2">
-            <a:schemeClr val="accent1"/>
-          </a:effectRef>
-          <a:fontRef idx="minor">
-            <a:schemeClr val="lt1"/>
-          </a:fontRef>
-        </p:style>
-        <p:txBody>
-          <a:bodyPr rtlCol="0" anchor="ctr" wrap="square" lIns="54864" rIns="54864" tIns="0" bIns="0"/>
+              <a:defRPr sz="3400" b="1">
+                <a:solidFill>
+                  <a:srgbClr val="DC2626"/>
+                </a:solidFill>
+                <a:latin typeface="Calibri"/>
+              </a:defRPr>
+            </a:pPr>
+            <a:r>
+              <a:t>88.2%</a:t>
+            </a:r>
+          </a:p>
+        </p:txBody>
+      </p:sp>
+      <p:sp>
+        <p:nvSpPr>
+          <p:cNvPr id="18" name="TextBox 17"/>
+          <p:cNvSpPr txBox="1"/>
+          <p:nvPr/>
+        </p:nvSpPr>
+        <p:spPr>
+          <a:xfrm>
+            <a:off x="9166629" y="2377440"/>
+            <a:ext cx="2384983" cy="548640"/>
+          </a:xfrm>
+          <a:prstGeom prst="rect">
+            <a:avLst/>
+          </a:prstGeom>
+          <a:noFill/>
+        </p:spPr>
+        <p:txBody>
+          <a:bodyPr wrap="square">
+            <a:spAutoFit/>
+          </a:bodyPr>
           <a:lstStyle/>
           <a:p>
             <a:pPr algn="ctr">
-              <a:defRPr sz="850" b="1">
-                <a:solidFill>
-                  <a:srgbClr val="1A202C"/>
-                </a:solidFill>
-                <a:latin typeface="Calibri"/>
-              </a:defRPr>
-            </a:pPr>
-            <a:r>
-              <a:t>train_classifier</a:t>
-            </a:r>
-          </a:p>
-        </p:txBody>
-      </p:sp>
-      <p:sp>
-        <p:nvSpPr>
-          <p:cNvPr id="16" name="Rounded Rectangle 15"/>
-          <p:cNvSpPr/>
-          <p:nvPr/>
-        </p:nvSpPr>
-        <p:spPr>
-          <a:xfrm>
-            <a:off x="4295546" y="5516880"/>
-            <a:ext cx="3600602" cy="441960"/>
-          </a:xfrm>
-          <a:prstGeom prst="roundRect">
-            <a:avLst>
-              <a:gd name="adj" fmla="val 6000"/>
-            </a:avLst>
-          </a:prstGeom>
-          <a:solidFill>
-            <a:srgbClr val="FFFFFF"/>
-          </a:solidFill>
-          <a:ln w="12700">
-            <a:solidFill>
-              <a:srgbClr val="0D9488"/>
-            </a:solidFill>
-          </a:ln>
-          <a:effectLst/>
-        </p:spPr>
-        <p:style>
-          <a:lnRef idx="1">
-            <a:schemeClr val="accent1"/>
-          </a:lnRef>
-          <a:fillRef idx="3">
-            <a:schemeClr val="accent1"/>
-          </a:fillRef>
-          <a:effectRef idx="2">
-            <a:schemeClr val="accent1"/>
-          </a:effectRef>
-          <a:fontRef idx="minor">
-            <a:schemeClr val="lt1"/>
-          </a:fontRef>
-        </p:style>
-        <p:txBody>
-          <a:bodyPr rtlCol="0" anchor="ctr" wrap="square" lIns="54864" rIns="54864" tIns="0" bIns="0"/>
-          <a:lstStyle/>
+              <a:defRPr sz="1200">
+                <a:solidFill>
+                  <a:srgbClr val="64748B"/>
+                </a:solidFill>
+                <a:latin typeface="Calibri"/>
+              </a:defRPr>
+            </a:pPr>
+            <a:r>
+              <a:t>Always-spoof baseline</a:t>
+            </a:r>
+          </a:p>
           <a:p>
             <a:pPr algn="ctr">
-              <a:defRPr sz="850" b="1">
-                <a:solidFill>
-                  <a:srgbClr val="1A202C"/>
-                </a:solidFill>
-                <a:latin typeface="Calibri"/>
-              </a:defRPr>
-            </a:pPr>
-            <a:r>
-              <a:t>index_embeddings</a:t>
-            </a:r>
-          </a:p>
-        </p:txBody>
-      </p:sp>
-      <p:sp>
-        <p:nvSpPr>
-          <p:cNvPr id="17" name="Rounded Rectangle 16"/>
-          <p:cNvSpPr/>
-          <p:nvPr/>
-        </p:nvSpPr>
-        <p:spPr>
-          <a:xfrm>
-            <a:off x="8042452" y="5516880"/>
-            <a:ext cx="3600602" cy="441960"/>
-          </a:xfrm>
-          <a:prstGeom prst="roundRect">
-            <a:avLst>
-              <a:gd name="adj" fmla="val 6000"/>
-            </a:avLst>
-          </a:prstGeom>
-          <a:solidFill>
-            <a:srgbClr val="FFFFFF"/>
-          </a:solidFill>
-          <a:ln w="12700">
-            <a:solidFill>
-              <a:srgbClr val="0D9488"/>
-            </a:solidFill>
-          </a:ln>
-          <a:effectLst/>
-        </p:spPr>
-        <p:style>
-          <a:lnRef idx="1">
-            <a:schemeClr val="accent1"/>
-          </a:lnRef>
-          <a:fillRef idx="3">
-            <a:schemeClr val="accent1"/>
-          </a:fillRef>
-          <a:effectRef idx="2">
-            <a:schemeClr val="accent1"/>
-          </a:effectRef>
-          <a:fontRef idx="minor">
-            <a:schemeClr val="lt1"/>
-          </a:fontRef>
-        </p:style>
-        <p:txBody>
-          <a:bodyPr rtlCol="0" anchor="ctr" wrap="square" lIns="54864" rIns="54864" tIns="0" bIns="0"/>
+              <a:defRPr sz="1200">
+                <a:solidFill>
+                  <a:srgbClr val="64748B"/>
+                </a:solidFill>
+                <a:latin typeface="Calibri"/>
+              </a:defRPr>
+            </a:pPr>
+            <a:r>
+              <a:t>beats raw accuracy (84.8%)</a:t>
+            </a:r>
+          </a:p>
+        </p:txBody>
+      </p:sp>
+      <p:pic>
+        <p:nvPicPr>
+          <p:cNvPr id="19" name="Picture 18" descr="accuracy_by_attack.png"/>
+          <p:cNvPicPr>
+            <a:picLocks noChangeAspect="1"/>
+          </p:cNvPicPr>
+          <p:nvPr/>
+        </p:nvPicPr>
+        <p:blipFill>
+          <a:blip r:embed="rId2"/>
+          <a:stretch>
+            <a:fillRect/>
+          </a:stretch>
+        </p:blipFill>
+        <p:spPr>
+          <a:xfrm>
+            <a:off x="2895447" y="3108960"/>
+            <a:ext cx="6400800" cy="3200400"/>
+          </a:xfrm>
+          <a:prstGeom prst="rect">
+            <a:avLst/>
+          </a:prstGeom>
+        </p:spPr>
+      </p:pic>
+      <p:sp>
+        <p:nvSpPr>
+          <p:cNvPr id="20" name="TextBox 19"/>
+          <p:cNvSpPr txBox="1"/>
+          <p:nvPr/>
+        </p:nvSpPr>
+        <p:spPr>
+          <a:xfrm>
+            <a:off x="548640" y="6400800"/>
+            <a:ext cx="11094415" cy="365760"/>
+          </a:xfrm>
+          <a:prstGeom prst="rect">
+            <a:avLst/>
+          </a:prstGeom>
+          <a:noFill/>
+        </p:spPr>
+        <p:txBody>
+          <a:bodyPr wrap="square">
+            <a:spAutoFit/>
+          </a:bodyPr>
           <a:lstStyle/>
           <a:p>
             <a:pPr algn="ctr">
-              <a:defRPr sz="850" b="1">
-                <a:solidFill>
-                  <a:srgbClr val="1A202C"/>
-                </a:solidFill>
-                <a:latin typeface="Calibri"/>
-              </a:defRPr>
-            </a:pPr>
-            <a:r>
-              <a:t>kafka -&gt; streaming</a:t>
-            </a:r>
-          </a:p>
-        </p:txBody>
-      </p:sp>
-      <p:sp>
-        <p:nvSpPr>
-          <p:cNvPr id="18" name="Rounded Rectangle 17"/>
-          <p:cNvSpPr/>
-          <p:nvPr/>
-        </p:nvSpPr>
-        <p:spPr>
-          <a:xfrm>
-            <a:off x="548640" y="6141720"/>
-            <a:ext cx="5474055" cy="441960"/>
-          </a:xfrm>
-          <a:prstGeom prst="roundRect">
-            <a:avLst>
-              <a:gd name="adj" fmla="val 6000"/>
-            </a:avLst>
-          </a:prstGeom>
-          <a:solidFill>
-            <a:srgbClr val="FFFFFF"/>
-          </a:solidFill>
-          <a:ln w="12700">
-            <a:solidFill>
-              <a:srgbClr val="DC2626"/>
-            </a:solidFill>
-          </a:ln>
-          <a:effectLst/>
-        </p:spPr>
-        <p:style>
-          <a:lnRef idx="1">
-            <a:schemeClr val="accent1"/>
-          </a:lnRef>
-          <a:fillRef idx="3">
-            <a:schemeClr val="accent1"/>
-          </a:fillRef>
-          <a:effectRef idx="2">
-            <a:schemeClr val="accent1"/>
-          </a:effectRef>
-          <a:fontRef idx="minor">
-            <a:schemeClr val="lt1"/>
-          </a:fontRef>
-        </p:style>
-        <p:txBody>
-          <a:bodyPr rtlCol="0" anchor="ctr" wrap="square" lIns="54864" rIns="54864" tIns="0" bIns="0"/>
-          <a:lstStyle/>
-          <a:p>
-            <a:pPr algn="ctr">
-              <a:defRPr sz="850" b="1">
-                <a:solidFill>
-                  <a:srgbClr val="1A202C"/>
-                </a:solidFill>
-                <a:latin typeface="Calibri"/>
-              </a:defRPr>
-            </a:pPr>
-            <a:r>
-              <a:t>insights.py</a:t>
-            </a:r>
-          </a:p>
-        </p:txBody>
-      </p:sp>
-      <p:sp>
-        <p:nvSpPr>
-          <p:cNvPr id="19" name="Rounded Rectangle 18"/>
-          <p:cNvSpPr/>
-          <p:nvPr/>
-        </p:nvSpPr>
-        <p:spPr>
-          <a:xfrm>
-            <a:off x="6168999" y="6141720"/>
-            <a:ext cx="5474055" cy="441960"/>
-          </a:xfrm>
-          <a:prstGeom prst="roundRect">
-            <a:avLst>
-              <a:gd name="adj" fmla="val 6000"/>
-            </a:avLst>
-          </a:prstGeom>
-          <a:solidFill>
-            <a:srgbClr val="0D9488"/>
-          </a:solidFill>
-          <a:ln w="12700">
-            <a:solidFill>
-              <a:srgbClr val="0D9488"/>
-            </a:solidFill>
-          </a:ln>
-          <a:effectLst/>
-        </p:spPr>
-        <p:style>
-          <a:lnRef idx="1">
-            <a:schemeClr val="accent1"/>
-          </a:lnRef>
-          <a:fillRef idx="3">
-            <a:schemeClr val="accent1"/>
-          </a:fillRef>
-          <a:effectRef idx="2">
-            <a:schemeClr val="accent1"/>
-          </a:effectRef>
-          <a:fontRef idx="minor">
-            <a:schemeClr val="lt1"/>
-          </a:fontRef>
-        </p:style>
-        <p:txBody>
-          <a:bodyPr rtlCol="0" anchor="ctr" wrap="square" lIns="54864" rIns="54864" tIns="0" bIns="0"/>
-          <a:lstStyle/>
-          <a:p>
-            <a:pPr algn="ctr">
-              <a:defRPr sz="850" b="1">
-                <a:solidFill>
-                  <a:srgbClr val="FFFFFF"/>
-                </a:solidFill>
-                <a:latin typeface="Calibri"/>
-              </a:defRPr>
-            </a:pPr>
-            <a:r>
-              <a:t>Flask app</a:t>
-            </a:r>
-          </a:p>
-        </p:txBody>
-      </p:sp>
-      <p:cxnSp>
-        <p:nvCxnSpPr>
-          <p:cNvPr id="20" name="Connector 19"/>
-          <p:cNvCxnSpPr/>
-          <p:nvPr/>
-        </p:nvCxnSpPr>
-        <p:spPr>
-          <a:xfrm>
-            <a:off x="3212515" y="5113020"/>
-            <a:ext cx="146304" cy="0"/>
-          </a:xfrm>
-          <a:prstGeom prst="line">
-            <a:avLst/>
-          </a:prstGeom>
-          <a:ln w="12700">
-            <a:solidFill>
-              <a:srgbClr val="64748B"/>
-            </a:solidFill>
-            <a:tailEnd type="triangle"/>
-          </a:ln>
-          <a:effectLst/>
-        </p:spPr>
-        <p:style>
-          <a:lnRef idx="2">
-            <a:schemeClr val="accent1"/>
-          </a:lnRef>
-          <a:fillRef idx="0">
-            <a:schemeClr val="accent1"/>
-          </a:fillRef>
-          <a:effectRef idx="1">
-            <a:schemeClr val="accent1"/>
-          </a:effectRef>
-          <a:fontRef idx="minor">
-            <a:schemeClr val="tx1"/>
-          </a:fontRef>
-        </p:style>
-      </p:cxnSp>
-      <p:cxnSp>
-        <p:nvCxnSpPr>
-          <p:cNvPr id="21" name="Connector 20"/>
-          <p:cNvCxnSpPr/>
-          <p:nvPr/>
-        </p:nvCxnSpPr>
-        <p:spPr>
-          <a:xfrm>
-            <a:off x="6022694" y="5113020"/>
-            <a:ext cx="146304" cy="0"/>
-          </a:xfrm>
-          <a:prstGeom prst="line">
-            <a:avLst/>
-          </a:prstGeom>
-          <a:ln w="12700">
-            <a:solidFill>
-              <a:srgbClr val="64748B"/>
-            </a:solidFill>
-            <a:tailEnd type="triangle"/>
-          </a:ln>
-          <a:effectLst/>
-        </p:spPr>
-        <p:style>
-          <a:lnRef idx="2">
-            <a:schemeClr val="accent1"/>
-          </a:lnRef>
-          <a:fillRef idx="0">
-            <a:schemeClr val="accent1"/>
-          </a:fillRef>
-          <a:effectRef idx="1">
-            <a:schemeClr val="accent1"/>
-          </a:effectRef>
-          <a:fontRef idx="minor">
-            <a:schemeClr val="tx1"/>
-          </a:fontRef>
-        </p:style>
-      </p:cxnSp>
-      <p:cxnSp>
-        <p:nvCxnSpPr>
-          <p:cNvPr id="22" name="Connector 21"/>
-          <p:cNvCxnSpPr/>
-          <p:nvPr/>
-        </p:nvCxnSpPr>
-        <p:spPr>
-          <a:xfrm>
-            <a:off x="8832873" y="5113020"/>
-            <a:ext cx="146304" cy="0"/>
-          </a:xfrm>
-          <a:prstGeom prst="line">
-            <a:avLst/>
-          </a:prstGeom>
-          <a:ln w="12700">
-            <a:solidFill>
-              <a:srgbClr val="64748B"/>
-            </a:solidFill>
-            <a:tailEnd type="triangle"/>
-          </a:ln>
-          <a:effectLst/>
-        </p:spPr>
-        <p:style>
-          <a:lnRef idx="2">
-            <a:schemeClr val="accent1"/>
-          </a:lnRef>
-          <a:fillRef idx="0">
-            <a:schemeClr val="accent1"/>
-          </a:fillRef>
-          <a:effectRef idx="1">
-            <a:schemeClr val="accent1"/>
-          </a:effectRef>
-          <a:fontRef idx="minor">
-            <a:schemeClr val="tx1"/>
-          </a:fontRef>
-        </p:style>
-      </p:cxnSp>
-      <p:cxnSp>
-        <p:nvCxnSpPr>
-          <p:cNvPr id="23" name="Connector 22"/>
-          <p:cNvCxnSpPr/>
-          <p:nvPr/>
-        </p:nvCxnSpPr>
-        <p:spPr>
-          <a:xfrm flipH="1">
-            <a:off x="2348941" y="5334000"/>
-            <a:ext cx="7962173" cy="182880"/>
-          </a:xfrm>
-          <a:prstGeom prst="line">
-            <a:avLst/>
-          </a:prstGeom>
-          <a:ln w="12700">
-            <a:solidFill>
-              <a:srgbClr val="64748B"/>
-            </a:solidFill>
-            <a:tailEnd type="triangle"/>
-          </a:ln>
-          <a:effectLst/>
-        </p:spPr>
-        <p:style>
-          <a:lnRef idx="2">
-            <a:schemeClr val="accent1"/>
-          </a:lnRef>
-          <a:fillRef idx="0">
-            <a:schemeClr val="accent1"/>
-          </a:fillRef>
-          <a:effectRef idx="1">
-            <a:schemeClr val="accent1"/>
-          </a:effectRef>
-          <a:fontRef idx="minor">
-            <a:schemeClr val="tx1"/>
-          </a:fontRef>
-        </p:style>
-      </p:cxnSp>
-      <p:cxnSp>
-        <p:nvCxnSpPr>
-          <p:cNvPr id="24" name="Connector 23"/>
-          <p:cNvCxnSpPr/>
-          <p:nvPr/>
-        </p:nvCxnSpPr>
-        <p:spPr>
-          <a:xfrm flipH="1">
-            <a:off x="6095847" y="5334000"/>
-            <a:ext cx="4215267" cy="182880"/>
-          </a:xfrm>
-          <a:prstGeom prst="line">
-            <a:avLst/>
-          </a:prstGeom>
-          <a:ln w="12700">
-            <a:solidFill>
-              <a:srgbClr val="64748B"/>
-            </a:solidFill>
-            <a:tailEnd type="triangle"/>
-          </a:ln>
-          <a:effectLst/>
-        </p:spPr>
-        <p:style>
-          <a:lnRef idx="2">
-            <a:schemeClr val="accent1"/>
-          </a:lnRef>
-          <a:fillRef idx="0">
-            <a:schemeClr val="accent1"/>
-          </a:fillRef>
-          <a:effectRef idx="1">
-            <a:schemeClr val="accent1"/>
-          </a:effectRef>
-          <a:fontRef idx="minor">
-            <a:schemeClr val="tx1"/>
-          </a:fontRef>
-        </p:style>
-      </p:cxnSp>
-      <p:cxnSp>
-        <p:nvCxnSpPr>
-          <p:cNvPr id="25" name="Connector 24"/>
-          <p:cNvCxnSpPr/>
-          <p:nvPr/>
-        </p:nvCxnSpPr>
-        <p:spPr>
-          <a:xfrm flipH="1">
-            <a:off x="9842753" y="5334000"/>
-            <a:ext cx="468361" cy="182880"/>
-          </a:xfrm>
-          <a:prstGeom prst="line">
-            <a:avLst/>
-          </a:prstGeom>
-          <a:ln w="12700">
-            <a:solidFill>
-              <a:srgbClr val="64748B"/>
-            </a:solidFill>
-            <a:tailEnd type="triangle"/>
-          </a:ln>
-          <a:effectLst/>
-        </p:spPr>
-        <p:style>
-          <a:lnRef idx="2">
-            <a:schemeClr val="accent1"/>
-          </a:lnRef>
-          <a:fillRef idx="0">
-            <a:schemeClr val="accent1"/>
-          </a:fillRef>
-          <a:effectRef idx="1">
-            <a:schemeClr val="accent1"/>
-          </a:effectRef>
-          <a:fontRef idx="minor">
-            <a:schemeClr val="tx1"/>
-          </a:fontRef>
-        </p:style>
-      </p:cxnSp>
-      <p:cxnSp>
-        <p:nvCxnSpPr>
-          <p:cNvPr id="26" name="Connector 25"/>
-          <p:cNvCxnSpPr/>
-          <p:nvPr/>
-        </p:nvCxnSpPr>
-        <p:spPr>
-          <a:xfrm>
-            <a:off x="2348941" y="5958840"/>
-            <a:ext cx="936726" cy="182880"/>
-          </a:xfrm>
-          <a:prstGeom prst="line">
-            <a:avLst/>
-          </a:prstGeom>
-          <a:ln w="12700">
-            <a:solidFill>
-              <a:srgbClr val="64748B"/>
-            </a:solidFill>
-            <a:tailEnd type="triangle"/>
-          </a:ln>
-          <a:effectLst/>
-        </p:spPr>
-        <p:style>
-          <a:lnRef idx="2">
-            <a:schemeClr val="accent1"/>
-          </a:lnRef>
-          <a:fillRef idx="0">
-            <a:schemeClr val="accent1"/>
-          </a:fillRef>
-          <a:effectRef idx="1">
-            <a:schemeClr val="accent1"/>
-          </a:effectRef>
-          <a:fontRef idx="minor">
-            <a:schemeClr val="tx1"/>
-          </a:fontRef>
-        </p:style>
-      </p:cxnSp>
-      <p:cxnSp>
-        <p:nvCxnSpPr>
-          <p:cNvPr id="27" name="Connector 26"/>
-          <p:cNvCxnSpPr/>
-          <p:nvPr/>
-        </p:nvCxnSpPr>
-        <p:spPr>
-          <a:xfrm>
-            <a:off x="2348941" y="5958840"/>
-            <a:ext cx="6557085" cy="182880"/>
-          </a:xfrm>
-          <a:prstGeom prst="line">
-            <a:avLst/>
-          </a:prstGeom>
-          <a:ln w="12700">
-            <a:solidFill>
-              <a:srgbClr val="64748B"/>
-            </a:solidFill>
-            <a:tailEnd type="triangle"/>
-          </a:ln>
-          <a:effectLst/>
-        </p:spPr>
-        <p:style>
-          <a:lnRef idx="2">
-            <a:schemeClr val="accent1"/>
-          </a:lnRef>
-          <a:fillRef idx="0">
-            <a:schemeClr val="accent1"/>
-          </a:fillRef>
-          <a:effectRef idx="1">
-            <a:schemeClr val="accent1"/>
-          </a:effectRef>
-          <a:fontRef idx="minor">
-            <a:schemeClr val="tx1"/>
-          </a:fontRef>
-        </p:style>
-      </p:cxnSp>
-      <p:cxnSp>
-        <p:nvCxnSpPr>
-          <p:cNvPr id="28" name="Connector 27"/>
-          <p:cNvCxnSpPr/>
-          <p:nvPr/>
-        </p:nvCxnSpPr>
-        <p:spPr>
-          <a:xfrm>
-            <a:off x="6095847" y="5958840"/>
-            <a:ext cx="2810179" cy="182880"/>
-          </a:xfrm>
-          <a:prstGeom prst="line">
-            <a:avLst/>
-          </a:prstGeom>
-          <a:ln w="12700">
-            <a:solidFill>
-              <a:srgbClr val="64748B"/>
-            </a:solidFill>
-            <a:tailEnd type="triangle"/>
-          </a:ln>
-          <a:effectLst/>
-        </p:spPr>
-        <p:style>
-          <a:lnRef idx="2">
-            <a:schemeClr val="accent1"/>
-          </a:lnRef>
-          <a:fillRef idx="0">
-            <a:schemeClr val="accent1"/>
-          </a:fillRef>
-          <a:effectRef idx="1">
-            <a:schemeClr val="accent1"/>
-          </a:effectRef>
-          <a:fontRef idx="minor">
-            <a:schemeClr val="tx1"/>
-          </a:fontRef>
-        </p:style>
-      </p:cxnSp>
-      <p:cxnSp>
-        <p:nvCxnSpPr>
-          <p:cNvPr id="29" name="Connector 28"/>
-          <p:cNvCxnSpPr/>
-          <p:nvPr/>
-        </p:nvCxnSpPr>
-        <p:spPr>
-          <a:xfrm flipH="1">
-            <a:off x="3285667" y="5958840"/>
-            <a:ext cx="6557086" cy="182880"/>
-          </a:xfrm>
-          <a:prstGeom prst="line">
-            <a:avLst/>
-          </a:prstGeom>
-          <a:ln w="12700">
-            <a:solidFill>
-              <a:srgbClr val="64748B"/>
-            </a:solidFill>
-            <a:tailEnd type="triangle"/>
-          </a:ln>
-          <a:effectLst/>
-        </p:spPr>
-        <p:style>
-          <a:lnRef idx="2">
-            <a:schemeClr val="accent1"/>
-          </a:lnRef>
-          <a:fillRef idx="0">
-            <a:schemeClr val="accent1"/>
-          </a:fillRef>
-          <a:effectRef idx="1">
-            <a:schemeClr val="accent1"/>
-          </a:effectRef>
-          <a:fontRef idx="minor">
-            <a:schemeClr val="tx1"/>
-          </a:fontRef>
-        </p:style>
-      </p:cxnSp>
-      <p:cxnSp>
-        <p:nvCxnSpPr>
-          <p:cNvPr id="30" name="Connector 29"/>
-          <p:cNvCxnSpPr/>
-          <p:nvPr/>
-        </p:nvCxnSpPr>
-        <p:spPr>
-          <a:xfrm flipH="1">
-            <a:off x="8906026" y="5958840"/>
-            <a:ext cx="936727" cy="182880"/>
-          </a:xfrm>
-          <a:prstGeom prst="line">
-            <a:avLst/>
-          </a:prstGeom>
-          <a:ln w="12700">
-            <a:solidFill>
-              <a:srgbClr val="64748B"/>
-            </a:solidFill>
-            <a:tailEnd type="triangle"/>
-          </a:ln>
-          <a:effectLst/>
-        </p:spPr>
-        <p:style>
-          <a:lnRef idx="2">
-            <a:schemeClr val="accent1"/>
-          </a:lnRef>
-          <a:fillRef idx="0">
-            <a:schemeClr val="accent1"/>
-          </a:fillRef>
-          <a:effectRef idx="1">
-            <a:schemeClr val="accent1"/>
-          </a:effectRef>
-          <a:fontRef idx="minor">
-            <a:schemeClr val="tx1"/>
-          </a:fontRef>
-        </p:style>
-      </p:cxnSp>
+              <a:defRPr sz="1200" b="0">
+                <a:solidFill>
+                  <a:srgbClr val="64748B"/>
+                </a:solidFill>
+                <a:latin typeface="Calibri"/>
+              </a:defRPr>
+            </a:pPr>
+            <a:r>
+              <a:t>All figures from the 2000 streamed eval predictions (attacks A07–A19, unseen during training).</a:t>
+            </a:r>
+          </a:p>
+        </p:txBody>
+      </p:sp>
     </p:spTree>
   </p:cSld>
   <p:clrMapOvr>
@@ -11132,7 +10758,7 @@
               </a:defRPr>
             </a:pPr>
             <a:r>
-              <a:t>Challenges &amp; trade-offs</a:t>
+              <a:t>Live demo</a:t>
             </a:r>
           </a:p>
         </p:txBody>
@@ -11182,7 +10808,7 @@
         <p:spPr>
           <a:xfrm>
             <a:off x="548640" y="1417320"/>
-            <a:ext cx="11094415" cy="4983480"/>
+            <a:ext cx="11094415" cy="2286000"/>
           </a:xfrm>
           <a:prstGeom prst="rect">
             <a:avLst/>
@@ -11207,7 +10833,7 @@
               </a:defRPr>
             </a:pPr>
             <a:r>
-              <a:t>•  Windows + Spark: worker Python resolution, a path with spaces, a pyspark 3.5.1 / Python 3.12 incompatibility, and a removed distutils — four environment bugs, none in our own logic, all diagnosed and fixed rather than worked around.</a:t>
+              <a:t>•  /classify — upload a clip or record live from the microphone (captured via the Web Audio API, encoded to WAV client-side — no server changes needed for live recording).</a:t>
             </a:r>
           </a:p>
           <a:p>
@@ -11223,7 +10849,7 @@
               </a:defRPr>
             </a:pPr>
             <a:r>
-              <a:t>•  A bug in our own code: Random Forest was reweighted twice — class_weight and sample_weight multiply in sklearn, turning 8.8:1 into 78:1.</a:t>
+              <a:t>•  Returns Human / AI-generated + confidence, plus the 5 most similar training clips, each one playable right in the results, so you can hear what "similar" sounds like.</a:t>
             </a:r>
           </a:p>
           <a:p>
@@ -11239,15 +10865,245 @@
               </a:defRPr>
             </a:pPr>
             <a:r>
-              <a:t>•  The EER threshold trades some spoof recall for bonafide recall — a deliberate choice, not a free win: no single threshold maximizes both on an imbalanced dataset.</a:t>
-            </a:r>
-          </a:p>
-          <a:p>
-            <a:pPr>
-              <a:spcAft>
-                <a:spcPts val="1200"/>
-              </a:spcAft>
-              <a:defRPr sz="1800">
+              <a:t>•  /dashboard — live Elasticsearch aggregations: model comparison, threshold trade-off, ROC curve, confusion matrix, feature importance, confidence calibration.</a:t>
+            </a:r>
+          </a:p>
+        </p:txBody>
+      </p:sp>
+      <p:sp>
+        <p:nvSpPr>
+          <p:cNvPr id="7" name="Rounded Rectangle 6">
+            <a:hlinkClick r:id="rId2"/>
+          </p:cNvPr>
+          <p:cNvSpPr/>
+          <p:nvPr/>
+        </p:nvSpPr>
+        <p:spPr>
+          <a:xfrm>
+            <a:off x="548640" y="3794760"/>
+            <a:ext cx="3291840" cy="594360"/>
+          </a:xfrm>
+          <a:prstGeom prst="roundRect">
+            <a:avLst>
+              <a:gd name="adj" fmla="val 6000"/>
+            </a:avLst>
+          </a:prstGeom>
+          <a:solidFill>
+            <a:srgbClr val="0D9488"/>
+          </a:solidFill>
+          <a:ln>
+            <a:noFill/>
+          </a:ln>
+          <a:effectLst/>
+        </p:spPr>
+        <p:style>
+          <a:lnRef idx="1">
+            <a:schemeClr val="accent1"/>
+          </a:lnRef>
+          <a:fillRef idx="3">
+            <a:schemeClr val="accent1"/>
+          </a:fillRef>
+          <a:effectRef idx="2">
+            <a:schemeClr val="accent1"/>
+          </a:effectRef>
+          <a:fontRef idx="minor">
+            <a:schemeClr val="lt1"/>
+          </a:fontRef>
+        </p:style>
+        <p:txBody>
+          <a:bodyPr rtlCol="0" anchor="ctr" wrap="square"/>
+          <a:lstStyle/>
+          <a:p>
+            <a:pPr algn="ctr">
+              <a:defRPr sz="1700" b="1">
+                <a:solidFill>
+                  <a:srgbClr val="FFFFFF"/>
+                </a:solidFill>
+                <a:latin typeface="Calibri"/>
+              </a:defRPr>
+            </a:pPr>
+            <a:r>
+              <a:t>▶  Open /classify</a:t>
+            </a:r>
+          </a:p>
+        </p:txBody>
+      </p:sp>
+      <p:sp>
+        <p:nvSpPr>
+          <p:cNvPr id="8" name="Rounded Rectangle 7">
+            <a:hlinkClick r:id="rId3"/>
+          </p:cNvPr>
+          <p:cNvSpPr/>
+          <p:nvPr/>
+        </p:nvSpPr>
+        <p:spPr>
+          <a:xfrm>
+            <a:off x="4114800" y="3794760"/>
+            <a:ext cx="3291840" cy="594360"/>
+          </a:xfrm>
+          <a:prstGeom prst="roundRect">
+            <a:avLst>
+              <a:gd name="adj" fmla="val 6000"/>
+            </a:avLst>
+          </a:prstGeom>
+          <a:solidFill>
+            <a:srgbClr val="2B6CB0"/>
+          </a:solidFill>
+          <a:ln>
+            <a:noFill/>
+          </a:ln>
+          <a:effectLst/>
+        </p:spPr>
+        <p:style>
+          <a:lnRef idx="1">
+            <a:schemeClr val="accent1"/>
+          </a:lnRef>
+          <a:fillRef idx="3">
+            <a:schemeClr val="accent1"/>
+          </a:fillRef>
+          <a:effectRef idx="2">
+            <a:schemeClr val="accent1"/>
+          </a:effectRef>
+          <a:fontRef idx="minor">
+            <a:schemeClr val="lt1"/>
+          </a:fontRef>
+        </p:style>
+        <p:txBody>
+          <a:bodyPr rtlCol="0" anchor="ctr" wrap="square"/>
+          <a:lstStyle/>
+          <a:p>
+            <a:pPr algn="ctr">
+              <a:defRPr sz="1700" b="1">
+                <a:solidFill>
+                  <a:srgbClr val="FFFFFF"/>
+                </a:solidFill>
+                <a:latin typeface="Calibri"/>
+              </a:defRPr>
+            </a:pPr>
+            <a:r>
+              <a:t>▶  Open /dashboard</a:t>
+            </a:r>
+          </a:p>
+        </p:txBody>
+      </p:sp>
+      <p:sp>
+        <p:nvSpPr>
+          <p:cNvPr id="9" name="TextBox 8"/>
+          <p:cNvSpPr txBox="1"/>
+          <p:nvPr/>
+        </p:nvSpPr>
+        <p:spPr>
+          <a:xfrm>
+            <a:off x="548640" y="4407408"/>
+            <a:ext cx="11094415" cy="274320"/>
+          </a:xfrm>
+          <a:prstGeom prst="rect">
+            <a:avLst/>
+          </a:prstGeom>
+          <a:noFill/>
+        </p:spPr>
+        <p:txBody>
+          <a:bodyPr wrap="square">
+            <a:spAutoFit/>
+          </a:bodyPr>
+          <a:lstStyle/>
+          <a:p>
+            <a:pPr algn="l">
+              <a:defRPr sz="1100" b="0">
+                <a:solidFill>
+                  <a:srgbClr val="64748B"/>
+                </a:solidFill>
+                <a:latin typeface="Calibri"/>
+              </a:defRPr>
+            </a:pPr>
+            <a:r>
+              <a:t>Links open localhost:5000 — click while presenting from the machine running the app (see README.md).</a:t>
+            </a:r>
+          </a:p>
+        </p:txBody>
+      </p:sp>
+      <p:sp>
+        <p:nvSpPr>
+          <p:cNvPr id="10" name="TextBox 9"/>
+          <p:cNvSpPr txBox="1"/>
+          <p:nvPr/>
+        </p:nvSpPr>
+        <p:spPr>
+          <a:xfrm>
+            <a:off x="548640" y="4636008"/>
+            <a:ext cx="11094415" cy="228600"/>
+          </a:xfrm>
+          <a:prstGeom prst="rect">
+            <a:avLst/>
+          </a:prstGeom>
+          <a:noFill/>
+        </p:spPr>
+        <p:txBody>
+          <a:bodyPr wrap="square">
+            <a:spAutoFit/>
+          </a:bodyPr>
+          <a:lstStyle/>
+          <a:p>
+            <a:pPr algn="l">
+              <a:defRPr sz="1000" b="0">
+                <a:solidFill>
+                  <a:srgbClr val="64748B"/>
+                </a:solidFill>
+                <a:latin typeface="Calibri"/>
+              </a:defRPr>
+            </a:pPr>
+            <a:r>
+              <a:t>Where this stage sits in the pipeline:</a:t>
+            </a:r>
+          </a:p>
+        </p:txBody>
+      </p:sp>
+      <p:sp>
+        <p:nvSpPr>
+          <p:cNvPr id="11" name="Rounded Rectangle 10"/>
+          <p:cNvSpPr/>
+          <p:nvPr/>
+        </p:nvSpPr>
+        <p:spPr>
+          <a:xfrm>
+            <a:off x="548640" y="4892040"/>
+            <a:ext cx="2663875" cy="441960"/>
+          </a:xfrm>
+          <a:prstGeom prst="roundRect">
+            <a:avLst>
+              <a:gd name="adj" fmla="val 6000"/>
+            </a:avLst>
+          </a:prstGeom>
+          <a:solidFill>
+            <a:srgbClr val="FFFFFF"/>
+          </a:solidFill>
+          <a:ln w="12700">
+            <a:solidFill>
+              <a:srgbClr val="2B6CB0"/>
+            </a:solidFill>
+          </a:ln>
+          <a:effectLst/>
+        </p:spPr>
+        <p:style>
+          <a:lnRef idx="1">
+            <a:schemeClr val="accent1"/>
+          </a:lnRef>
+          <a:fillRef idx="3">
+            <a:schemeClr val="accent1"/>
+          </a:fillRef>
+          <a:effectRef idx="2">
+            <a:schemeClr val="accent1"/>
+          </a:effectRef>
+          <a:fontRef idx="minor">
+            <a:schemeClr val="lt1"/>
+          </a:fontRef>
+        </p:style>
+        <p:txBody>
+          <a:bodyPr rtlCol="0" anchor="ctr" wrap="square" lIns="54864" rIns="54864" tIns="0" bIns="0"/>
+          <a:lstStyle/>
+          <a:p>
+            <a:pPr algn="ctr">
+              <a:defRPr sz="850" b="1">
                 <a:solidFill>
                   <a:srgbClr val="1A202C"/>
                 </a:solidFill>
@@ -11255,15 +11111,57 @@
               </a:defRPr>
             </a:pPr>
             <a:r>
-              <a:t>•  Embedding is the classifier's own feature vector, not a separate pretrained audio embedding model — keeps the semantic-search capability fully self-contained.</a:t>
-            </a:r>
-          </a:p>
-          <a:p>
-            <a:pPr>
-              <a:spcAft>
-                <a:spcPts val="1200"/>
-              </a:spcAft>
-              <a:defRPr sz="1800">
+              <a:t>Kaggle</a:t>
+            </a:r>
+          </a:p>
+        </p:txBody>
+      </p:sp>
+      <p:sp>
+        <p:nvSpPr>
+          <p:cNvPr id="12" name="Rounded Rectangle 11"/>
+          <p:cNvSpPr/>
+          <p:nvPr/>
+        </p:nvSpPr>
+        <p:spPr>
+          <a:xfrm>
+            <a:off x="3358819" y="4892040"/>
+            <a:ext cx="2663875" cy="441960"/>
+          </a:xfrm>
+          <a:prstGeom prst="roundRect">
+            <a:avLst>
+              <a:gd name="adj" fmla="val 6000"/>
+            </a:avLst>
+          </a:prstGeom>
+          <a:solidFill>
+            <a:srgbClr val="FFFFFF"/>
+          </a:solidFill>
+          <a:ln w="12700">
+            <a:solidFill>
+              <a:srgbClr val="2B6CB0"/>
+            </a:solidFill>
+          </a:ln>
+          <a:effectLst/>
+        </p:spPr>
+        <p:style>
+          <a:lnRef idx="1">
+            <a:schemeClr val="accent1"/>
+          </a:lnRef>
+          <a:fillRef idx="3">
+            <a:schemeClr val="accent1"/>
+          </a:fillRef>
+          <a:effectRef idx="2">
+            <a:schemeClr val="accent1"/>
+          </a:effectRef>
+          <a:fontRef idx="minor">
+            <a:schemeClr val="lt1"/>
+          </a:fontRef>
+        </p:style>
+        <p:txBody>
+          <a:bodyPr rtlCol="0" anchor="ctr" wrap="square" lIns="54864" rIns="54864" tIns="0" bIns="0"/>
+          <a:lstStyle/>
+          <a:p>
+            <a:pPr algn="ctr">
+              <a:defRPr sz="850" b="1">
                 <a:solidFill>
                   <a:srgbClr val="1A202C"/>
                 </a:solidFill>
@@ -11271,15 +11169,57 @@
               </a:defRPr>
             </a:pPr>
             <a:r>
-              <a:t>•  Kept Python end-to-end (not Scala) since the feature-extraction library is Python-only.</a:t>
-            </a:r>
-          </a:p>
-          <a:p>
-            <a:pPr>
-              <a:spcAft>
-                <a:spcPts val="1200"/>
-              </a:spcAft>
-              <a:defRPr sz="1800">
+              <a:t>MinIO</a:t>
+            </a:r>
+          </a:p>
+        </p:txBody>
+      </p:sp>
+      <p:sp>
+        <p:nvSpPr>
+          <p:cNvPr id="13" name="Rounded Rectangle 12"/>
+          <p:cNvSpPr/>
+          <p:nvPr/>
+        </p:nvSpPr>
+        <p:spPr>
+          <a:xfrm>
+            <a:off x="6168998" y="4892040"/>
+            <a:ext cx="2663875" cy="441960"/>
+          </a:xfrm>
+          <a:prstGeom prst="roundRect">
+            <a:avLst>
+              <a:gd name="adj" fmla="val 6000"/>
+            </a:avLst>
+          </a:prstGeom>
+          <a:solidFill>
+            <a:srgbClr val="FFFFFF"/>
+          </a:solidFill>
+          <a:ln w="12700">
+            <a:solidFill>
+              <a:srgbClr val="2B6CB0"/>
+            </a:solidFill>
+          </a:ln>
+          <a:effectLst/>
+        </p:spPr>
+        <p:style>
+          <a:lnRef idx="1">
+            <a:schemeClr val="accent1"/>
+          </a:lnRef>
+          <a:fillRef idx="3">
+            <a:schemeClr val="accent1"/>
+          </a:fillRef>
+          <a:effectRef idx="2">
+            <a:schemeClr val="accent1"/>
+          </a:effectRef>
+          <a:fontRef idx="minor">
+            <a:schemeClr val="lt1"/>
+          </a:fontRef>
+        </p:style>
+        <p:txBody>
+          <a:bodyPr rtlCol="0" anchor="ctr" wrap="square" lIns="54864" rIns="54864" tIns="0" bIns="0"/>
+          <a:lstStyle/>
+          <a:p>
+            <a:pPr algn="ctr">
+              <a:defRPr sz="850" b="1">
                 <a:solidFill>
                   <a:srgbClr val="1A202C"/>
                 </a:solidFill>
@@ -11287,11 +11227,766 @@
               </a:defRPr>
             </a:pPr>
             <a:r>
-              <a:t>•  Speaker-disjoint train/dev split (not random) to avoid inflating accuracy via leakage.</a:t>
-            </a:r>
-          </a:p>
-        </p:txBody>
-      </p:sp>
+              <a:t>Spark</a:t>
+            </a:r>
+          </a:p>
+        </p:txBody>
+      </p:sp>
+      <p:sp>
+        <p:nvSpPr>
+          <p:cNvPr id="14" name="Rounded Rectangle 13"/>
+          <p:cNvSpPr/>
+          <p:nvPr/>
+        </p:nvSpPr>
+        <p:spPr>
+          <a:xfrm>
+            <a:off x="8979177" y="4892040"/>
+            <a:ext cx="2663875" cy="441960"/>
+          </a:xfrm>
+          <a:prstGeom prst="roundRect">
+            <a:avLst>
+              <a:gd name="adj" fmla="val 6000"/>
+            </a:avLst>
+          </a:prstGeom>
+          <a:solidFill>
+            <a:srgbClr val="FFFFFF"/>
+          </a:solidFill>
+          <a:ln w="12700">
+            <a:solidFill>
+              <a:srgbClr val="2B6CB0"/>
+            </a:solidFill>
+          </a:ln>
+          <a:effectLst/>
+        </p:spPr>
+        <p:style>
+          <a:lnRef idx="1">
+            <a:schemeClr val="accent1"/>
+          </a:lnRef>
+          <a:fillRef idx="3">
+            <a:schemeClr val="accent1"/>
+          </a:fillRef>
+          <a:effectRef idx="2">
+            <a:schemeClr val="accent1"/>
+          </a:effectRef>
+          <a:fontRef idx="minor">
+            <a:schemeClr val="lt1"/>
+          </a:fontRef>
+        </p:style>
+        <p:txBody>
+          <a:bodyPr rtlCol="0" anchor="ctr" wrap="square" lIns="54864" rIns="54864" tIns="0" bIns="0"/>
+          <a:lstStyle/>
+          <a:p>
+            <a:pPr algn="ctr">
+              <a:defRPr sz="850" b="1">
+                <a:solidFill>
+                  <a:srgbClr val="1A202C"/>
+                </a:solidFill>
+                <a:latin typeface="Calibri"/>
+              </a:defRPr>
+            </a:pPr>
+            <a:r>
+              <a:t>Parquet + ES</a:t>
+            </a:r>
+          </a:p>
+        </p:txBody>
+      </p:sp>
+      <p:sp>
+        <p:nvSpPr>
+          <p:cNvPr id="15" name="Rounded Rectangle 14"/>
+          <p:cNvSpPr/>
+          <p:nvPr/>
+        </p:nvSpPr>
+        <p:spPr>
+          <a:xfrm>
+            <a:off x="548640" y="5516880"/>
+            <a:ext cx="3600602" cy="441960"/>
+          </a:xfrm>
+          <a:prstGeom prst="roundRect">
+            <a:avLst>
+              <a:gd name="adj" fmla="val 6000"/>
+            </a:avLst>
+          </a:prstGeom>
+          <a:solidFill>
+            <a:srgbClr val="FFFFFF"/>
+          </a:solidFill>
+          <a:ln w="12700">
+            <a:solidFill>
+              <a:srgbClr val="0D9488"/>
+            </a:solidFill>
+          </a:ln>
+          <a:effectLst/>
+        </p:spPr>
+        <p:style>
+          <a:lnRef idx="1">
+            <a:schemeClr val="accent1"/>
+          </a:lnRef>
+          <a:fillRef idx="3">
+            <a:schemeClr val="accent1"/>
+          </a:fillRef>
+          <a:effectRef idx="2">
+            <a:schemeClr val="accent1"/>
+          </a:effectRef>
+          <a:fontRef idx="minor">
+            <a:schemeClr val="lt1"/>
+          </a:fontRef>
+        </p:style>
+        <p:txBody>
+          <a:bodyPr rtlCol="0" anchor="ctr" wrap="square" lIns="54864" rIns="54864" tIns="0" bIns="0"/>
+          <a:lstStyle/>
+          <a:p>
+            <a:pPr algn="ctr">
+              <a:defRPr sz="850" b="1">
+                <a:solidFill>
+                  <a:srgbClr val="1A202C"/>
+                </a:solidFill>
+                <a:latin typeface="Calibri"/>
+              </a:defRPr>
+            </a:pPr>
+            <a:r>
+              <a:t>train_classifier</a:t>
+            </a:r>
+          </a:p>
+        </p:txBody>
+      </p:sp>
+      <p:sp>
+        <p:nvSpPr>
+          <p:cNvPr id="16" name="Rounded Rectangle 15"/>
+          <p:cNvSpPr/>
+          <p:nvPr/>
+        </p:nvSpPr>
+        <p:spPr>
+          <a:xfrm>
+            <a:off x="4295546" y="5516880"/>
+            <a:ext cx="3600602" cy="441960"/>
+          </a:xfrm>
+          <a:prstGeom prst="roundRect">
+            <a:avLst>
+              <a:gd name="adj" fmla="val 6000"/>
+            </a:avLst>
+          </a:prstGeom>
+          <a:solidFill>
+            <a:srgbClr val="FFFFFF"/>
+          </a:solidFill>
+          <a:ln w="12700">
+            <a:solidFill>
+              <a:srgbClr val="0D9488"/>
+            </a:solidFill>
+          </a:ln>
+          <a:effectLst/>
+        </p:spPr>
+        <p:style>
+          <a:lnRef idx="1">
+            <a:schemeClr val="accent1"/>
+          </a:lnRef>
+          <a:fillRef idx="3">
+            <a:schemeClr val="accent1"/>
+          </a:fillRef>
+          <a:effectRef idx="2">
+            <a:schemeClr val="accent1"/>
+          </a:effectRef>
+          <a:fontRef idx="minor">
+            <a:schemeClr val="lt1"/>
+          </a:fontRef>
+        </p:style>
+        <p:txBody>
+          <a:bodyPr rtlCol="0" anchor="ctr" wrap="square" lIns="54864" rIns="54864" tIns="0" bIns="0"/>
+          <a:lstStyle/>
+          <a:p>
+            <a:pPr algn="ctr">
+              <a:defRPr sz="850" b="1">
+                <a:solidFill>
+                  <a:srgbClr val="1A202C"/>
+                </a:solidFill>
+                <a:latin typeface="Calibri"/>
+              </a:defRPr>
+            </a:pPr>
+            <a:r>
+              <a:t>index_embeddings</a:t>
+            </a:r>
+          </a:p>
+        </p:txBody>
+      </p:sp>
+      <p:sp>
+        <p:nvSpPr>
+          <p:cNvPr id="17" name="Rounded Rectangle 16"/>
+          <p:cNvSpPr/>
+          <p:nvPr/>
+        </p:nvSpPr>
+        <p:spPr>
+          <a:xfrm>
+            <a:off x="8042452" y="5516880"/>
+            <a:ext cx="3600602" cy="441960"/>
+          </a:xfrm>
+          <a:prstGeom prst="roundRect">
+            <a:avLst>
+              <a:gd name="adj" fmla="val 6000"/>
+            </a:avLst>
+          </a:prstGeom>
+          <a:solidFill>
+            <a:srgbClr val="FFFFFF"/>
+          </a:solidFill>
+          <a:ln w="12700">
+            <a:solidFill>
+              <a:srgbClr val="0D9488"/>
+            </a:solidFill>
+          </a:ln>
+          <a:effectLst/>
+        </p:spPr>
+        <p:style>
+          <a:lnRef idx="1">
+            <a:schemeClr val="accent1"/>
+          </a:lnRef>
+          <a:fillRef idx="3">
+            <a:schemeClr val="accent1"/>
+          </a:fillRef>
+          <a:effectRef idx="2">
+            <a:schemeClr val="accent1"/>
+          </a:effectRef>
+          <a:fontRef idx="minor">
+            <a:schemeClr val="lt1"/>
+          </a:fontRef>
+        </p:style>
+        <p:txBody>
+          <a:bodyPr rtlCol="0" anchor="ctr" wrap="square" lIns="54864" rIns="54864" tIns="0" bIns="0"/>
+          <a:lstStyle/>
+          <a:p>
+            <a:pPr algn="ctr">
+              <a:defRPr sz="850" b="1">
+                <a:solidFill>
+                  <a:srgbClr val="1A202C"/>
+                </a:solidFill>
+                <a:latin typeface="Calibri"/>
+              </a:defRPr>
+            </a:pPr>
+            <a:r>
+              <a:t>kafka -&gt; streaming</a:t>
+            </a:r>
+          </a:p>
+        </p:txBody>
+      </p:sp>
+      <p:sp>
+        <p:nvSpPr>
+          <p:cNvPr id="18" name="Rounded Rectangle 17"/>
+          <p:cNvSpPr/>
+          <p:nvPr/>
+        </p:nvSpPr>
+        <p:spPr>
+          <a:xfrm>
+            <a:off x="548640" y="6141720"/>
+            <a:ext cx="5474055" cy="441960"/>
+          </a:xfrm>
+          <a:prstGeom prst="roundRect">
+            <a:avLst>
+              <a:gd name="adj" fmla="val 6000"/>
+            </a:avLst>
+          </a:prstGeom>
+          <a:solidFill>
+            <a:srgbClr val="FFFFFF"/>
+          </a:solidFill>
+          <a:ln w="12700">
+            <a:solidFill>
+              <a:srgbClr val="DC2626"/>
+            </a:solidFill>
+          </a:ln>
+          <a:effectLst/>
+        </p:spPr>
+        <p:style>
+          <a:lnRef idx="1">
+            <a:schemeClr val="accent1"/>
+          </a:lnRef>
+          <a:fillRef idx="3">
+            <a:schemeClr val="accent1"/>
+          </a:fillRef>
+          <a:effectRef idx="2">
+            <a:schemeClr val="accent1"/>
+          </a:effectRef>
+          <a:fontRef idx="minor">
+            <a:schemeClr val="lt1"/>
+          </a:fontRef>
+        </p:style>
+        <p:txBody>
+          <a:bodyPr rtlCol="0" anchor="ctr" wrap="square" lIns="54864" rIns="54864" tIns="0" bIns="0"/>
+          <a:lstStyle/>
+          <a:p>
+            <a:pPr algn="ctr">
+              <a:defRPr sz="850" b="1">
+                <a:solidFill>
+                  <a:srgbClr val="1A202C"/>
+                </a:solidFill>
+                <a:latin typeface="Calibri"/>
+              </a:defRPr>
+            </a:pPr>
+            <a:r>
+              <a:t>insights.py</a:t>
+            </a:r>
+          </a:p>
+        </p:txBody>
+      </p:sp>
+      <p:sp>
+        <p:nvSpPr>
+          <p:cNvPr id="19" name="Rounded Rectangle 18"/>
+          <p:cNvSpPr/>
+          <p:nvPr/>
+        </p:nvSpPr>
+        <p:spPr>
+          <a:xfrm>
+            <a:off x="6168999" y="6141720"/>
+            <a:ext cx="5474055" cy="441960"/>
+          </a:xfrm>
+          <a:prstGeom prst="roundRect">
+            <a:avLst>
+              <a:gd name="adj" fmla="val 6000"/>
+            </a:avLst>
+          </a:prstGeom>
+          <a:solidFill>
+            <a:srgbClr val="0D9488"/>
+          </a:solidFill>
+          <a:ln w="12700">
+            <a:solidFill>
+              <a:srgbClr val="0D9488"/>
+            </a:solidFill>
+          </a:ln>
+          <a:effectLst/>
+        </p:spPr>
+        <p:style>
+          <a:lnRef idx="1">
+            <a:schemeClr val="accent1"/>
+          </a:lnRef>
+          <a:fillRef idx="3">
+            <a:schemeClr val="accent1"/>
+          </a:fillRef>
+          <a:effectRef idx="2">
+            <a:schemeClr val="accent1"/>
+          </a:effectRef>
+          <a:fontRef idx="minor">
+            <a:schemeClr val="lt1"/>
+          </a:fontRef>
+        </p:style>
+        <p:txBody>
+          <a:bodyPr rtlCol="0" anchor="ctr" wrap="square" lIns="54864" rIns="54864" tIns="0" bIns="0"/>
+          <a:lstStyle/>
+          <a:p>
+            <a:pPr algn="ctr">
+              <a:defRPr sz="850" b="1">
+                <a:solidFill>
+                  <a:srgbClr val="FFFFFF"/>
+                </a:solidFill>
+                <a:latin typeface="Calibri"/>
+              </a:defRPr>
+            </a:pPr>
+            <a:r>
+              <a:t>Flask app</a:t>
+            </a:r>
+          </a:p>
+        </p:txBody>
+      </p:sp>
+      <p:cxnSp>
+        <p:nvCxnSpPr>
+          <p:cNvPr id="20" name="Connector 19"/>
+          <p:cNvCxnSpPr/>
+          <p:nvPr/>
+        </p:nvCxnSpPr>
+        <p:spPr>
+          <a:xfrm>
+            <a:off x="3212515" y="5113020"/>
+            <a:ext cx="146304" cy="0"/>
+          </a:xfrm>
+          <a:prstGeom prst="line">
+            <a:avLst/>
+          </a:prstGeom>
+          <a:ln w="12700">
+            <a:solidFill>
+              <a:srgbClr val="64748B"/>
+            </a:solidFill>
+            <a:tailEnd type="triangle"/>
+          </a:ln>
+          <a:effectLst/>
+        </p:spPr>
+        <p:style>
+          <a:lnRef idx="2">
+            <a:schemeClr val="accent1"/>
+          </a:lnRef>
+          <a:fillRef idx="0">
+            <a:schemeClr val="accent1"/>
+          </a:fillRef>
+          <a:effectRef idx="1">
+            <a:schemeClr val="accent1"/>
+          </a:effectRef>
+          <a:fontRef idx="minor">
+            <a:schemeClr val="tx1"/>
+          </a:fontRef>
+        </p:style>
+      </p:cxnSp>
+      <p:cxnSp>
+        <p:nvCxnSpPr>
+          <p:cNvPr id="21" name="Connector 20"/>
+          <p:cNvCxnSpPr/>
+          <p:nvPr/>
+        </p:nvCxnSpPr>
+        <p:spPr>
+          <a:xfrm>
+            <a:off x="6022694" y="5113020"/>
+            <a:ext cx="146304" cy="0"/>
+          </a:xfrm>
+          <a:prstGeom prst="line">
+            <a:avLst/>
+          </a:prstGeom>
+          <a:ln w="12700">
+            <a:solidFill>
+              <a:srgbClr val="64748B"/>
+            </a:solidFill>
+            <a:tailEnd type="triangle"/>
+          </a:ln>
+          <a:effectLst/>
+        </p:spPr>
+        <p:style>
+          <a:lnRef idx="2">
+            <a:schemeClr val="accent1"/>
+          </a:lnRef>
+          <a:fillRef idx="0">
+            <a:schemeClr val="accent1"/>
+          </a:fillRef>
+          <a:effectRef idx="1">
+            <a:schemeClr val="accent1"/>
+          </a:effectRef>
+          <a:fontRef idx="minor">
+            <a:schemeClr val="tx1"/>
+          </a:fontRef>
+        </p:style>
+      </p:cxnSp>
+      <p:cxnSp>
+        <p:nvCxnSpPr>
+          <p:cNvPr id="22" name="Connector 21"/>
+          <p:cNvCxnSpPr/>
+          <p:nvPr/>
+        </p:nvCxnSpPr>
+        <p:spPr>
+          <a:xfrm>
+            <a:off x="8832873" y="5113020"/>
+            <a:ext cx="146304" cy="0"/>
+          </a:xfrm>
+          <a:prstGeom prst="line">
+            <a:avLst/>
+          </a:prstGeom>
+          <a:ln w="12700">
+            <a:solidFill>
+              <a:srgbClr val="64748B"/>
+            </a:solidFill>
+            <a:tailEnd type="triangle"/>
+          </a:ln>
+          <a:effectLst/>
+        </p:spPr>
+        <p:style>
+          <a:lnRef idx="2">
+            <a:schemeClr val="accent1"/>
+          </a:lnRef>
+          <a:fillRef idx="0">
+            <a:schemeClr val="accent1"/>
+          </a:fillRef>
+          <a:effectRef idx="1">
+            <a:schemeClr val="accent1"/>
+          </a:effectRef>
+          <a:fontRef idx="minor">
+            <a:schemeClr val="tx1"/>
+          </a:fontRef>
+        </p:style>
+      </p:cxnSp>
+      <p:cxnSp>
+        <p:nvCxnSpPr>
+          <p:cNvPr id="23" name="Connector 22"/>
+          <p:cNvCxnSpPr/>
+          <p:nvPr/>
+        </p:nvCxnSpPr>
+        <p:spPr>
+          <a:xfrm flipH="1">
+            <a:off x="2348941" y="5334000"/>
+            <a:ext cx="7962173" cy="182880"/>
+          </a:xfrm>
+          <a:prstGeom prst="line">
+            <a:avLst/>
+          </a:prstGeom>
+          <a:ln w="12700">
+            <a:solidFill>
+              <a:srgbClr val="64748B"/>
+            </a:solidFill>
+            <a:tailEnd type="triangle"/>
+          </a:ln>
+          <a:effectLst/>
+        </p:spPr>
+        <p:style>
+          <a:lnRef idx="2">
+            <a:schemeClr val="accent1"/>
+          </a:lnRef>
+          <a:fillRef idx="0">
+            <a:schemeClr val="accent1"/>
+          </a:fillRef>
+          <a:effectRef idx="1">
+            <a:schemeClr val="accent1"/>
+          </a:effectRef>
+          <a:fontRef idx="minor">
+            <a:schemeClr val="tx1"/>
+          </a:fontRef>
+        </p:style>
+      </p:cxnSp>
+      <p:cxnSp>
+        <p:nvCxnSpPr>
+          <p:cNvPr id="24" name="Connector 23"/>
+          <p:cNvCxnSpPr/>
+          <p:nvPr/>
+        </p:nvCxnSpPr>
+        <p:spPr>
+          <a:xfrm flipH="1">
+            <a:off x="6095847" y="5334000"/>
+            <a:ext cx="4215267" cy="182880"/>
+          </a:xfrm>
+          <a:prstGeom prst="line">
+            <a:avLst/>
+          </a:prstGeom>
+          <a:ln w="12700">
+            <a:solidFill>
+              <a:srgbClr val="64748B"/>
+            </a:solidFill>
+            <a:tailEnd type="triangle"/>
+          </a:ln>
+          <a:effectLst/>
+        </p:spPr>
+        <p:style>
+          <a:lnRef idx="2">
+            <a:schemeClr val="accent1"/>
+          </a:lnRef>
+          <a:fillRef idx="0">
+            <a:schemeClr val="accent1"/>
+          </a:fillRef>
+          <a:effectRef idx="1">
+            <a:schemeClr val="accent1"/>
+          </a:effectRef>
+          <a:fontRef idx="minor">
+            <a:schemeClr val="tx1"/>
+          </a:fontRef>
+        </p:style>
+      </p:cxnSp>
+      <p:cxnSp>
+        <p:nvCxnSpPr>
+          <p:cNvPr id="25" name="Connector 24"/>
+          <p:cNvCxnSpPr/>
+          <p:nvPr/>
+        </p:nvCxnSpPr>
+        <p:spPr>
+          <a:xfrm flipH="1">
+            <a:off x="9842753" y="5334000"/>
+            <a:ext cx="468361" cy="182880"/>
+          </a:xfrm>
+          <a:prstGeom prst="line">
+            <a:avLst/>
+          </a:prstGeom>
+          <a:ln w="12700">
+            <a:solidFill>
+              <a:srgbClr val="64748B"/>
+            </a:solidFill>
+            <a:tailEnd type="triangle"/>
+          </a:ln>
+          <a:effectLst/>
+        </p:spPr>
+        <p:style>
+          <a:lnRef idx="2">
+            <a:schemeClr val="accent1"/>
+          </a:lnRef>
+          <a:fillRef idx="0">
+            <a:schemeClr val="accent1"/>
+          </a:fillRef>
+          <a:effectRef idx="1">
+            <a:schemeClr val="accent1"/>
+          </a:effectRef>
+          <a:fontRef idx="minor">
+            <a:schemeClr val="tx1"/>
+          </a:fontRef>
+        </p:style>
+      </p:cxnSp>
+      <p:cxnSp>
+        <p:nvCxnSpPr>
+          <p:cNvPr id="26" name="Connector 25"/>
+          <p:cNvCxnSpPr/>
+          <p:nvPr/>
+        </p:nvCxnSpPr>
+        <p:spPr>
+          <a:xfrm>
+            <a:off x="2348941" y="5958840"/>
+            <a:ext cx="936726" cy="182880"/>
+          </a:xfrm>
+          <a:prstGeom prst="line">
+            <a:avLst/>
+          </a:prstGeom>
+          <a:ln w="12700">
+            <a:solidFill>
+              <a:srgbClr val="64748B"/>
+            </a:solidFill>
+            <a:tailEnd type="triangle"/>
+          </a:ln>
+          <a:effectLst/>
+        </p:spPr>
+        <p:style>
+          <a:lnRef idx="2">
+            <a:schemeClr val="accent1"/>
+          </a:lnRef>
+          <a:fillRef idx="0">
+            <a:schemeClr val="accent1"/>
+          </a:fillRef>
+          <a:effectRef idx="1">
+            <a:schemeClr val="accent1"/>
+          </a:effectRef>
+          <a:fontRef idx="minor">
+            <a:schemeClr val="tx1"/>
+          </a:fontRef>
+        </p:style>
+      </p:cxnSp>
+      <p:cxnSp>
+        <p:nvCxnSpPr>
+          <p:cNvPr id="27" name="Connector 26"/>
+          <p:cNvCxnSpPr/>
+          <p:nvPr/>
+        </p:nvCxnSpPr>
+        <p:spPr>
+          <a:xfrm>
+            <a:off x="2348941" y="5958840"/>
+            <a:ext cx="6557085" cy="182880"/>
+          </a:xfrm>
+          <a:prstGeom prst="line">
+            <a:avLst/>
+          </a:prstGeom>
+          <a:ln w="12700">
+            <a:solidFill>
+              <a:srgbClr val="64748B"/>
+            </a:solidFill>
+            <a:tailEnd type="triangle"/>
+          </a:ln>
+          <a:effectLst/>
+        </p:spPr>
+        <p:style>
+          <a:lnRef idx="2">
+            <a:schemeClr val="accent1"/>
+          </a:lnRef>
+          <a:fillRef idx="0">
+            <a:schemeClr val="accent1"/>
+          </a:fillRef>
+          <a:effectRef idx="1">
+            <a:schemeClr val="accent1"/>
+          </a:effectRef>
+          <a:fontRef idx="minor">
+            <a:schemeClr val="tx1"/>
+          </a:fontRef>
+        </p:style>
+      </p:cxnSp>
+      <p:cxnSp>
+        <p:nvCxnSpPr>
+          <p:cNvPr id="28" name="Connector 27"/>
+          <p:cNvCxnSpPr/>
+          <p:nvPr/>
+        </p:nvCxnSpPr>
+        <p:spPr>
+          <a:xfrm>
+            <a:off x="6095847" y="5958840"/>
+            <a:ext cx="2810179" cy="182880"/>
+          </a:xfrm>
+          <a:prstGeom prst="line">
+            <a:avLst/>
+          </a:prstGeom>
+          <a:ln w="12700">
+            <a:solidFill>
+              <a:srgbClr val="64748B"/>
+            </a:solidFill>
+            <a:tailEnd type="triangle"/>
+          </a:ln>
+          <a:effectLst/>
+        </p:spPr>
+        <p:style>
+          <a:lnRef idx="2">
+            <a:schemeClr val="accent1"/>
+          </a:lnRef>
+          <a:fillRef idx="0">
+            <a:schemeClr val="accent1"/>
+          </a:fillRef>
+          <a:effectRef idx="1">
+            <a:schemeClr val="accent1"/>
+          </a:effectRef>
+          <a:fontRef idx="minor">
+            <a:schemeClr val="tx1"/>
+          </a:fontRef>
+        </p:style>
+      </p:cxnSp>
+      <p:cxnSp>
+        <p:nvCxnSpPr>
+          <p:cNvPr id="29" name="Connector 28"/>
+          <p:cNvCxnSpPr/>
+          <p:nvPr/>
+        </p:nvCxnSpPr>
+        <p:spPr>
+          <a:xfrm flipH="1">
+            <a:off x="3285667" y="5958840"/>
+            <a:ext cx="6557086" cy="182880"/>
+          </a:xfrm>
+          <a:prstGeom prst="line">
+            <a:avLst/>
+          </a:prstGeom>
+          <a:ln w="12700">
+            <a:solidFill>
+              <a:srgbClr val="64748B"/>
+            </a:solidFill>
+            <a:tailEnd type="triangle"/>
+          </a:ln>
+          <a:effectLst/>
+        </p:spPr>
+        <p:style>
+          <a:lnRef idx="2">
+            <a:schemeClr val="accent1"/>
+          </a:lnRef>
+          <a:fillRef idx="0">
+            <a:schemeClr val="accent1"/>
+          </a:fillRef>
+          <a:effectRef idx="1">
+            <a:schemeClr val="accent1"/>
+          </a:effectRef>
+          <a:fontRef idx="minor">
+            <a:schemeClr val="tx1"/>
+          </a:fontRef>
+        </p:style>
+      </p:cxnSp>
+      <p:cxnSp>
+        <p:nvCxnSpPr>
+          <p:cNvPr id="30" name="Connector 29"/>
+          <p:cNvCxnSpPr/>
+          <p:nvPr/>
+        </p:nvCxnSpPr>
+        <p:spPr>
+          <a:xfrm flipH="1">
+            <a:off x="8906026" y="5958840"/>
+            <a:ext cx="936727" cy="182880"/>
+          </a:xfrm>
+          <a:prstGeom prst="line">
+            <a:avLst/>
+          </a:prstGeom>
+          <a:ln w="12700">
+            <a:solidFill>
+              <a:srgbClr val="64748B"/>
+            </a:solidFill>
+            <a:tailEnd type="triangle"/>
+          </a:ln>
+          <a:effectLst/>
+        </p:spPr>
+        <p:style>
+          <a:lnRef idx="2">
+            <a:schemeClr val="accent1"/>
+          </a:lnRef>
+          <a:fillRef idx="0">
+            <a:schemeClr val="accent1"/>
+          </a:fillRef>
+          <a:effectRef idx="1">
+            <a:schemeClr val="accent1"/>
+          </a:effectRef>
+          <a:fontRef idx="minor">
+            <a:schemeClr val="tx1"/>
+          </a:fontRef>
+        </p:style>
+      </p:cxnSp>
     </p:spTree>
   </p:cSld>
   <p:clrMapOvr>
@@ -11327,7 +12022,7 @@
         <p:spPr>
           <a:xfrm>
             <a:off x="0" y="0"/>
-            <a:ext cx="12191695" cy="6858000"/>
+            <a:ext cx="12191695" cy="1051560"/>
           </a:xfrm>
           <a:prstGeom prst="rect">
             <a:avLst/>
@@ -11370,8 +12065,8 @@
         </p:nvSpPr>
         <p:spPr>
           <a:xfrm>
-            <a:off x="0" y="3383280"/>
-            <a:ext cx="12191695" cy="63500"/>
+            <a:off x="0" y="1051560"/>
+            <a:ext cx="2103120" cy="63500"/>
           </a:xfrm>
           <a:prstGeom prst="rect">
             <a:avLst/>
@@ -11414,8 +12109,8 @@
         </p:nvSpPr>
         <p:spPr>
           <a:xfrm>
-            <a:off x="914400" y="2286000"/>
-            <a:ext cx="10332720" cy="914400"/>
+            <a:off x="548640" y="146304"/>
+            <a:ext cx="11094415" cy="640080"/>
           </a:xfrm>
           <a:prstGeom prst="rect">
             <a:avLst/>
@@ -11428,8 +12123,8 @@
           </a:bodyPr>
           <a:lstStyle/>
           <a:p>
-            <a:pPr algn="l">
-              <a:defRPr sz="4000" b="1">
+            <a:pPr>
+              <a:defRPr sz="3000" b="1">
                 <a:solidFill>
                   <a:srgbClr val="FFFFFF"/>
                 </a:solidFill>
@@ -11437,7 +12132,7 @@
               </a:defRPr>
             </a:pPr>
             <a:r>
-              <a:t>Questions?</a:t>
+              <a:t>Challenges &amp; trade-offs</a:t>
             </a:r>
           </a:p>
         </p:txBody>
@@ -11450,8 +12145,8 @@
         </p:nvSpPr>
         <p:spPr>
           <a:xfrm>
-            <a:off x="914400" y="3794760"/>
-            <a:ext cx="7315200" cy="457200"/>
+            <a:off x="11368735" y="6473952"/>
+            <a:ext cx="548640" cy="292608"/>
           </a:xfrm>
           <a:prstGeom prst="rect">
             <a:avLst/>
@@ -11459,24 +12154,140 @@
           <a:noFill/>
         </p:spPr>
         <p:txBody>
-          <a:bodyPr wrap="none">
+          <a:bodyPr wrap="square">
             <a:spAutoFit/>
           </a:bodyPr>
           <a:lstStyle/>
           <a:p>
+            <a:pPr algn="r">
+              <a:defRPr sz="1100" b="0">
+                <a:solidFill>
+                  <a:srgbClr val="64748B"/>
+                </a:solidFill>
+                <a:latin typeface="Calibri"/>
+              </a:defRPr>
+            </a:pPr>
+            <a:r>
+              <a:t>18</a:t>
+            </a:r>
+          </a:p>
+        </p:txBody>
+      </p:sp>
+      <p:sp>
+        <p:nvSpPr>
+          <p:cNvPr id="6" name="TextBox 5"/>
+          <p:cNvSpPr txBox="1"/>
+          <p:nvPr/>
+        </p:nvSpPr>
+        <p:spPr>
+          <a:xfrm>
+            <a:off x="548640" y="1417320"/>
+            <a:ext cx="11094415" cy="4983480"/>
+          </a:xfrm>
+          <a:prstGeom prst="rect">
+            <a:avLst/>
+          </a:prstGeom>
+          <a:noFill/>
+        </p:spPr>
+        <p:txBody>
+          <a:bodyPr wrap="square">
+            <a:spAutoFit/>
+          </a:bodyPr>
+          <a:lstStyle/>
+          <a:p>
             <a:pPr>
-              <a:defRPr sz="1600">
-                <a:solidFill>
-                  <a:srgbClr val="CBD5E1"/>
-                </a:solidFill>
-                <a:latin typeface="Calibri"/>
-              </a:defRPr>
-            </a:pPr>
-            <a:r>
-              <a:rPr>
-                <a:hlinkClick r:id="rId2"/>
-              </a:rPr>
-              <a:t>github.com/HadarBaum/asvspoof-voice-ai</a:t>
+              <a:spcAft>
+                <a:spcPts val="1200"/>
+              </a:spcAft>
+              <a:defRPr sz="1800">
+                <a:solidFill>
+                  <a:srgbClr val="1A202C"/>
+                </a:solidFill>
+                <a:latin typeface="Calibri"/>
+              </a:defRPr>
+            </a:pPr>
+            <a:r>
+              <a:t>•  Windows + Spark: worker Python resolution, a path with spaces, a pyspark 3.5.1 / Python 3.12 incompatibility, and a removed distutils — four environment bugs, none in our own logic, all diagnosed and fixed rather than worked around.</a:t>
+            </a:r>
+          </a:p>
+          <a:p>
+            <a:pPr>
+              <a:spcAft>
+                <a:spcPts val="1200"/>
+              </a:spcAft>
+              <a:defRPr sz="1800">
+                <a:solidFill>
+                  <a:srgbClr val="1A202C"/>
+                </a:solidFill>
+                <a:latin typeface="Calibri"/>
+              </a:defRPr>
+            </a:pPr>
+            <a:r>
+              <a:t>•  A bug in our own code: Random Forest was reweighted twice — class_weight and sample_weight multiply in sklearn, turning 8.8:1 into 78:1.</a:t>
+            </a:r>
+          </a:p>
+          <a:p>
+            <a:pPr>
+              <a:spcAft>
+                <a:spcPts val="1200"/>
+              </a:spcAft>
+              <a:defRPr sz="1800">
+                <a:solidFill>
+                  <a:srgbClr val="1A202C"/>
+                </a:solidFill>
+                <a:latin typeface="Calibri"/>
+              </a:defRPr>
+            </a:pPr>
+            <a:r>
+              <a:t>•  The EER threshold trades some spoof recall for bonafide recall — a deliberate choice, not a free win: no single threshold maximizes both on an imbalanced dataset.</a:t>
+            </a:r>
+          </a:p>
+          <a:p>
+            <a:pPr>
+              <a:spcAft>
+                <a:spcPts val="1200"/>
+              </a:spcAft>
+              <a:defRPr sz="1800">
+                <a:solidFill>
+                  <a:srgbClr val="1A202C"/>
+                </a:solidFill>
+                <a:latin typeface="Calibri"/>
+              </a:defRPr>
+            </a:pPr>
+            <a:r>
+              <a:t>•  Embedding is the classifier's own feature vector, not a separate pretrained audio embedding model — keeps the semantic-search capability fully self-contained.</a:t>
+            </a:r>
+          </a:p>
+          <a:p>
+            <a:pPr>
+              <a:spcAft>
+                <a:spcPts val="1200"/>
+              </a:spcAft>
+              <a:defRPr sz="1800">
+                <a:solidFill>
+                  <a:srgbClr val="1A202C"/>
+                </a:solidFill>
+                <a:latin typeface="Calibri"/>
+              </a:defRPr>
+            </a:pPr>
+            <a:r>
+              <a:t>•  Kept Python end-to-end (not Scala) since the feature-extraction library is Python-only.</a:t>
+            </a:r>
+          </a:p>
+          <a:p>
+            <a:pPr>
+              <a:spcAft>
+                <a:spcPts val="1200"/>
+              </a:spcAft>
+              <a:defRPr sz="1800">
+                <a:solidFill>
+                  <a:srgbClr val="1A202C"/>
+                </a:solidFill>
+                <a:latin typeface="Calibri"/>
+              </a:defRPr>
+            </a:pPr>
+            <a:r>
+              <a:t>•  Speaker-disjoint train/dev split (not random) to avoid inflating accuracy via leakage.</a:t>
             </a:r>
           </a:p>
         </p:txBody>
@@ -11750,6 +12561,195 @@
             </a:pPr>
             <a:r>
               <a:t>•  PA (replay-attack) partition intentionally excluded — not AI-generated speech</a:t>
+            </a:r>
+          </a:p>
+        </p:txBody>
+      </p:sp>
+    </p:spTree>
+  </p:cSld>
+  <p:clrMapOvr>
+    <a:masterClrMapping/>
+  </p:clrMapOvr>
+</p:sld>
+</file>
+
+<file path=ppt/slides/slide20.xml><?xml version="1.0" encoding="utf-8"?>
+<p:sld xmlns:a="http://schemas.openxmlformats.org/drawingml/2006/main" xmlns:p="http://schemas.openxmlformats.org/presentationml/2006/main" xmlns:r="http://schemas.openxmlformats.org/officeDocument/2006/relationships">
+  <p:cSld>
+    <p:bg>
+      <p:bgPr>
+        <a:solidFill>
+          <a:srgbClr val="F7F9FB"/>
+        </a:solidFill>
+        <a:effectLst/>
+      </p:bgPr>
+    </p:bg>
+    <p:spTree>
+      <p:nvGrpSpPr>
+        <p:cNvPr id="1" name=""/>
+        <p:cNvGrpSpPr/>
+        <p:nvPr/>
+      </p:nvGrpSpPr>
+      <p:grpSpPr/>
+      <p:sp>
+        <p:nvSpPr>
+          <p:cNvPr id="2" name="Rectangle 1"/>
+          <p:cNvSpPr/>
+          <p:nvPr/>
+        </p:nvSpPr>
+        <p:spPr>
+          <a:xfrm>
+            <a:off x="0" y="0"/>
+            <a:ext cx="12191695" cy="6858000"/>
+          </a:xfrm>
+          <a:prstGeom prst="rect">
+            <a:avLst/>
+          </a:prstGeom>
+          <a:solidFill>
+            <a:srgbClr val="0F2942"/>
+          </a:solidFill>
+          <a:ln>
+            <a:noFill/>
+          </a:ln>
+          <a:effectLst/>
+        </p:spPr>
+        <p:style>
+          <a:lnRef idx="1">
+            <a:schemeClr val="accent1"/>
+          </a:lnRef>
+          <a:fillRef idx="3">
+            <a:schemeClr val="accent1"/>
+          </a:fillRef>
+          <a:effectRef idx="2">
+            <a:schemeClr val="accent1"/>
+          </a:effectRef>
+          <a:fontRef idx="minor">
+            <a:schemeClr val="lt1"/>
+          </a:fontRef>
+        </p:style>
+        <p:txBody>
+          <a:bodyPr rtlCol="0" anchor="ctr"/>
+          <a:lstStyle/>
+          <a:p>
+            <a:pPr algn="ctr"/>
+          </a:p>
+        </p:txBody>
+      </p:sp>
+      <p:sp>
+        <p:nvSpPr>
+          <p:cNvPr id="3" name="Rectangle 2"/>
+          <p:cNvSpPr/>
+          <p:nvPr/>
+        </p:nvSpPr>
+        <p:spPr>
+          <a:xfrm>
+            <a:off x="0" y="3383280"/>
+            <a:ext cx="12191695" cy="63500"/>
+          </a:xfrm>
+          <a:prstGeom prst="rect">
+            <a:avLst/>
+          </a:prstGeom>
+          <a:solidFill>
+            <a:srgbClr val="0D9488"/>
+          </a:solidFill>
+          <a:ln>
+            <a:noFill/>
+          </a:ln>
+          <a:effectLst/>
+        </p:spPr>
+        <p:style>
+          <a:lnRef idx="1">
+            <a:schemeClr val="accent1"/>
+          </a:lnRef>
+          <a:fillRef idx="3">
+            <a:schemeClr val="accent1"/>
+          </a:fillRef>
+          <a:effectRef idx="2">
+            <a:schemeClr val="accent1"/>
+          </a:effectRef>
+          <a:fontRef idx="minor">
+            <a:schemeClr val="lt1"/>
+          </a:fontRef>
+        </p:style>
+        <p:txBody>
+          <a:bodyPr rtlCol="0" anchor="ctr"/>
+          <a:lstStyle/>
+          <a:p>
+            <a:pPr algn="ctr"/>
+          </a:p>
+        </p:txBody>
+      </p:sp>
+      <p:sp>
+        <p:nvSpPr>
+          <p:cNvPr id="4" name="TextBox 3"/>
+          <p:cNvSpPr txBox="1"/>
+          <p:nvPr/>
+        </p:nvSpPr>
+        <p:spPr>
+          <a:xfrm>
+            <a:off x="914400" y="2286000"/>
+            <a:ext cx="10332720" cy="914400"/>
+          </a:xfrm>
+          <a:prstGeom prst="rect">
+            <a:avLst/>
+          </a:prstGeom>
+          <a:noFill/>
+        </p:spPr>
+        <p:txBody>
+          <a:bodyPr wrap="square">
+            <a:spAutoFit/>
+          </a:bodyPr>
+          <a:lstStyle/>
+          <a:p>
+            <a:pPr algn="l">
+              <a:defRPr sz="4000" b="1">
+                <a:solidFill>
+                  <a:srgbClr val="FFFFFF"/>
+                </a:solidFill>
+                <a:latin typeface="Calibri"/>
+              </a:defRPr>
+            </a:pPr>
+            <a:r>
+              <a:t>Questions?</a:t>
+            </a:r>
+          </a:p>
+        </p:txBody>
+      </p:sp>
+      <p:sp>
+        <p:nvSpPr>
+          <p:cNvPr id="5" name="TextBox 4"/>
+          <p:cNvSpPr txBox="1"/>
+          <p:nvPr/>
+        </p:nvSpPr>
+        <p:spPr>
+          <a:xfrm>
+            <a:off x="914400" y="3794760"/>
+            <a:ext cx="7315200" cy="457200"/>
+          </a:xfrm>
+          <a:prstGeom prst="rect">
+            <a:avLst/>
+          </a:prstGeom>
+          <a:noFill/>
+        </p:spPr>
+        <p:txBody>
+          <a:bodyPr wrap="none">
+            <a:spAutoFit/>
+          </a:bodyPr>
+          <a:lstStyle/>
+          <a:p>
+            <a:pPr>
+              <a:defRPr sz="1600">
+                <a:solidFill>
+                  <a:srgbClr val="CBD5E1"/>
+                </a:solidFill>
+                <a:latin typeface="Calibri"/>
+              </a:defRPr>
+            </a:pPr>
+            <a:r>
+              <a:rPr>
+                <a:hlinkClick r:id="rId2"/>
+              </a:rPr>
+              <a:t>github.com/HadarBaum/asvspoof-voice-ai</a:t>
             </a:r>
           </a:p>
         </p:txBody>
@@ -17989,7 +18989,7 @@
               </a:defRPr>
             </a:pPr>
             <a:r>
-              <a:t>AI capability 1 — classification</a:t>
+              <a:t>The accuracy paradox — where we started</a:t>
             </a:r>
           </a:p>
         </p:txBody>
@@ -18025,7 +19025,7 @@
               </a:defRPr>
             </a:pPr>
             <a:r>
-              <a:t>Random Forest vs. Gradient Boosting, picked by EER</a:t>
+              <a:t>AI capability 1: Random Forest at scikit-learn's default 0.5 threshold</a:t>
             </a:r>
           </a:p>
         </p:txBody>
@@ -18068,14 +19068,413 @@
       </p:sp>
       <p:sp>
         <p:nvSpPr>
-          <p:cNvPr id="7" name="TextBox 6"/>
+          <p:cNvPr id="7" name="Rounded Rectangle 6"/>
+          <p:cNvSpPr/>
+          <p:nvPr/>
+        </p:nvSpPr>
+        <p:spPr>
+          <a:xfrm>
+            <a:off x="548640" y="1417320"/>
+            <a:ext cx="3515258" cy="1554480"/>
+          </a:xfrm>
+          <a:prstGeom prst="roundRect">
+            <a:avLst>
+              <a:gd name="adj" fmla="val 6000"/>
+            </a:avLst>
+          </a:prstGeom>
+          <a:solidFill>
+            <a:srgbClr val="FFFFFF"/>
+          </a:solidFill>
+          <a:ln w="12700">
+            <a:solidFill>
+              <a:srgbClr val="E2E8F0"/>
+            </a:solidFill>
+          </a:ln>
+          <a:effectLst/>
+        </p:spPr>
+        <p:style>
+          <a:lnRef idx="1">
+            <a:schemeClr val="accent1"/>
+          </a:lnRef>
+          <a:fillRef idx="3">
+            <a:schemeClr val="accent1"/>
+          </a:fillRef>
+          <a:effectRef idx="2">
+            <a:schemeClr val="accent1"/>
+          </a:effectRef>
+          <a:fontRef idx="minor">
+            <a:schemeClr val="lt1"/>
+          </a:fontRef>
+        </p:style>
+        <p:txBody>
+          <a:bodyPr rtlCol="0" anchor="ctr"/>
+          <a:lstStyle/>
+          <a:p>
+            <a:pPr algn="ctr"/>
+          </a:p>
+        </p:txBody>
+      </p:sp>
+      <p:sp>
+        <p:nvSpPr>
+          <p:cNvPr id="8" name="TextBox 7"/>
           <p:cNvSpPr txBox="1"/>
           <p:nvPr/>
         </p:nvSpPr>
         <p:spPr>
           <a:xfrm>
-            <a:off x="548640" y="1371600"/>
-            <a:ext cx="11094415" cy="5029200"/>
+            <a:off x="548640" y="1618488"/>
+            <a:ext cx="3515258" cy="731520"/>
+          </a:xfrm>
+          <a:prstGeom prst="rect">
+            <a:avLst/>
+          </a:prstGeom>
+          <a:noFill/>
+        </p:spPr>
+        <p:txBody>
+          <a:bodyPr wrap="none">
+            <a:spAutoFit/>
+          </a:bodyPr>
+          <a:lstStyle/>
+          <a:p>
+            <a:pPr algn="ctr">
+              <a:defRPr sz="3400" b="1">
+                <a:solidFill>
+                  <a:srgbClr val="2B6CB0"/>
+                </a:solidFill>
+                <a:latin typeface="Calibri"/>
+              </a:defRPr>
+            </a:pPr>
+            <a:r>
+              <a:t>92.3%</a:t>
+            </a:r>
+          </a:p>
+        </p:txBody>
+      </p:sp>
+      <p:sp>
+        <p:nvSpPr>
+          <p:cNvPr id="9" name="TextBox 8"/>
+          <p:cNvSpPr txBox="1"/>
+          <p:nvPr/>
+        </p:nvSpPr>
+        <p:spPr>
+          <a:xfrm>
+            <a:off x="640080" y="2377440"/>
+            <a:ext cx="3332378" cy="548640"/>
+          </a:xfrm>
+          <a:prstGeom prst="rect">
+            <a:avLst/>
+          </a:prstGeom>
+          <a:noFill/>
+        </p:spPr>
+        <p:txBody>
+          <a:bodyPr wrap="square">
+            <a:spAutoFit/>
+          </a:bodyPr>
+          <a:lstStyle/>
+          <a:p>
+            <a:pPr algn="ctr">
+              <a:defRPr sz="1200">
+                <a:solidFill>
+                  <a:srgbClr val="64748B"/>
+                </a:solidFill>
+                <a:latin typeface="Calibri"/>
+              </a:defRPr>
+            </a:pPr>
+            <a:r>
+              <a:t>Dev accuracy</a:t>
+            </a:r>
+          </a:p>
+          <a:p>
+            <a:pPr algn="ctr">
+              <a:defRPr sz="1200">
+                <a:solidFill>
+                  <a:srgbClr val="64748B"/>
+                </a:solidFill>
+                <a:latin typeface="Calibri"/>
+              </a:defRPr>
+            </a:pPr>
+            <a:r>
+              <a:t>looked like a finished project</a:t>
+            </a:r>
+          </a:p>
+        </p:txBody>
+      </p:sp>
+      <p:sp>
+        <p:nvSpPr>
+          <p:cNvPr id="10" name="Rounded Rectangle 9"/>
+          <p:cNvSpPr/>
+          <p:nvPr/>
+        </p:nvSpPr>
+        <p:spPr>
+          <a:xfrm>
+            <a:off x="4338218" y="1417320"/>
+            <a:ext cx="3515258" cy="1554480"/>
+          </a:xfrm>
+          <a:prstGeom prst="roundRect">
+            <a:avLst>
+              <a:gd name="adj" fmla="val 6000"/>
+            </a:avLst>
+          </a:prstGeom>
+          <a:solidFill>
+            <a:srgbClr val="FFFFFF"/>
+          </a:solidFill>
+          <a:ln w="12700">
+            <a:solidFill>
+              <a:srgbClr val="E2E8F0"/>
+            </a:solidFill>
+          </a:ln>
+          <a:effectLst/>
+        </p:spPr>
+        <p:style>
+          <a:lnRef idx="1">
+            <a:schemeClr val="accent1"/>
+          </a:lnRef>
+          <a:fillRef idx="3">
+            <a:schemeClr val="accent1"/>
+          </a:fillRef>
+          <a:effectRef idx="2">
+            <a:schemeClr val="accent1"/>
+          </a:effectRef>
+          <a:fontRef idx="minor">
+            <a:schemeClr val="lt1"/>
+          </a:fontRef>
+        </p:style>
+        <p:txBody>
+          <a:bodyPr rtlCol="0" anchor="ctr"/>
+          <a:lstStyle/>
+          <a:p>
+            <a:pPr algn="ctr"/>
+          </a:p>
+        </p:txBody>
+      </p:sp>
+      <p:sp>
+        <p:nvSpPr>
+          <p:cNvPr id="11" name="TextBox 10"/>
+          <p:cNvSpPr txBox="1"/>
+          <p:nvPr/>
+        </p:nvSpPr>
+        <p:spPr>
+          <a:xfrm>
+            <a:off x="4338218" y="1618488"/>
+            <a:ext cx="3515258" cy="731520"/>
+          </a:xfrm>
+          <a:prstGeom prst="rect">
+            <a:avLst/>
+          </a:prstGeom>
+          <a:noFill/>
+        </p:spPr>
+        <p:txBody>
+          <a:bodyPr wrap="none">
+            <a:spAutoFit/>
+          </a:bodyPr>
+          <a:lstStyle/>
+          <a:p>
+            <a:pPr algn="ctr">
+              <a:defRPr sz="3400" b="1">
+                <a:solidFill>
+                  <a:srgbClr val="0D9488"/>
+                </a:solidFill>
+                <a:latin typeface="Calibri"/>
+              </a:defRPr>
+            </a:pPr>
+            <a:r>
+              <a:t>99.8%</a:t>
+            </a:r>
+          </a:p>
+        </p:txBody>
+      </p:sp>
+      <p:sp>
+        <p:nvSpPr>
+          <p:cNvPr id="12" name="TextBox 11"/>
+          <p:cNvSpPr txBox="1"/>
+          <p:nvPr/>
+        </p:nvSpPr>
+        <p:spPr>
+          <a:xfrm>
+            <a:off x="4429658" y="2377440"/>
+            <a:ext cx="3332378" cy="548640"/>
+          </a:xfrm>
+          <a:prstGeom prst="rect">
+            <a:avLst/>
+          </a:prstGeom>
+          <a:noFill/>
+        </p:spPr>
+        <p:txBody>
+          <a:bodyPr wrap="square">
+            <a:spAutoFit/>
+          </a:bodyPr>
+          <a:lstStyle/>
+          <a:p>
+            <a:pPr algn="ctr">
+              <a:defRPr sz="1200">
+                <a:solidFill>
+                  <a:srgbClr val="64748B"/>
+                </a:solidFill>
+                <a:latin typeface="Calibri"/>
+              </a:defRPr>
+            </a:pPr>
+            <a:r>
+              <a:t>Spoof recall</a:t>
+            </a:r>
+          </a:p>
+          <a:p>
+            <a:pPr algn="ctr">
+              <a:defRPr sz="1200">
+                <a:solidFill>
+                  <a:srgbClr val="64748B"/>
+                </a:solidFill>
+                <a:latin typeface="Calibri"/>
+              </a:defRPr>
+            </a:pPr>
+            <a:r>
+              <a:t>nearly every attack caught</a:t>
+            </a:r>
+          </a:p>
+        </p:txBody>
+      </p:sp>
+      <p:sp>
+        <p:nvSpPr>
+          <p:cNvPr id="13" name="Rounded Rectangle 12"/>
+          <p:cNvSpPr/>
+          <p:nvPr/>
+        </p:nvSpPr>
+        <p:spPr>
+          <a:xfrm>
+            <a:off x="8127796" y="1417320"/>
+            <a:ext cx="3515258" cy="1554480"/>
+          </a:xfrm>
+          <a:prstGeom prst="roundRect">
+            <a:avLst>
+              <a:gd name="adj" fmla="val 6000"/>
+            </a:avLst>
+          </a:prstGeom>
+          <a:solidFill>
+            <a:srgbClr val="FFFFFF"/>
+          </a:solidFill>
+          <a:ln w="12700">
+            <a:solidFill>
+              <a:srgbClr val="E2E8F0"/>
+            </a:solidFill>
+          </a:ln>
+          <a:effectLst/>
+        </p:spPr>
+        <p:style>
+          <a:lnRef idx="1">
+            <a:schemeClr val="accent1"/>
+          </a:lnRef>
+          <a:fillRef idx="3">
+            <a:schemeClr val="accent1"/>
+          </a:fillRef>
+          <a:effectRef idx="2">
+            <a:schemeClr val="accent1"/>
+          </a:effectRef>
+          <a:fontRef idx="minor">
+            <a:schemeClr val="lt1"/>
+          </a:fontRef>
+        </p:style>
+        <p:txBody>
+          <a:bodyPr rtlCol="0" anchor="ctr"/>
+          <a:lstStyle/>
+          <a:p>
+            <a:pPr algn="ctr"/>
+          </a:p>
+        </p:txBody>
+      </p:sp>
+      <p:sp>
+        <p:nvSpPr>
+          <p:cNvPr id="14" name="TextBox 13"/>
+          <p:cNvSpPr txBox="1"/>
+          <p:nvPr/>
+        </p:nvSpPr>
+        <p:spPr>
+          <a:xfrm>
+            <a:off x="8127796" y="1618488"/>
+            <a:ext cx="3515258" cy="731520"/>
+          </a:xfrm>
+          <a:prstGeom prst="rect">
+            <a:avLst/>
+          </a:prstGeom>
+          <a:noFill/>
+        </p:spPr>
+        <p:txBody>
+          <a:bodyPr wrap="none">
+            <a:spAutoFit/>
+          </a:bodyPr>
+          <a:lstStyle/>
+          <a:p>
+            <a:pPr algn="ctr">
+              <a:defRPr sz="3400" b="1">
+                <a:solidFill>
+                  <a:srgbClr val="DC2626"/>
+                </a:solidFill>
+                <a:latin typeface="Calibri"/>
+              </a:defRPr>
+            </a:pPr>
+            <a:r>
+              <a:t>26.6%</a:t>
+            </a:r>
+          </a:p>
+        </p:txBody>
+      </p:sp>
+      <p:sp>
+        <p:nvSpPr>
+          <p:cNvPr id="15" name="TextBox 14"/>
+          <p:cNvSpPr txBox="1"/>
+          <p:nvPr/>
+        </p:nvSpPr>
+        <p:spPr>
+          <a:xfrm>
+            <a:off x="8219236" y="2377440"/>
+            <a:ext cx="3332378" cy="548640"/>
+          </a:xfrm>
+          <a:prstGeom prst="rect">
+            <a:avLst/>
+          </a:prstGeom>
+          <a:noFill/>
+        </p:spPr>
+        <p:txBody>
+          <a:bodyPr wrap="square">
+            <a:spAutoFit/>
+          </a:bodyPr>
+          <a:lstStyle/>
+          <a:p>
+            <a:pPr algn="ctr">
+              <a:defRPr sz="1200">
+                <a:solidFill>
+                  <a:srgbClr val="64748B"/>
+                </a:solidFill>
+                <a:latin typeface="Calibri"/>
+              </a:defRPr>
+            </a:pPr>
+            <a:r>
+              <a:t>Bonafide recall</a:t>
+            </a:r>
+          </a:p>
+          <a:p>
+            <a:pPr algn="ctr">
+              <a:defRPr sz="1200">
+                <a:solidFill>
+                  <a:srgbClr val="64748B"/>
+                </a:solidFill>
+                <a:latin typeface="Calibri"/>
+              </a:defRPr>
+            </a:pPr>
+            <a:r>
+              <a:t>real human speech found</a:t>
+            </a:r>
+          </a:p>
+        </p:txBody>
+      </p:sp>
+      <p:sp>
+        <p:nvSpPr>
+          <p:cNvPr id="16" name="TextBox 15"/>
+          <p:cNvSpPr txBox="1"/>
+          <p:nvPr/>
+        </p:nvSpPr>
+        <p:spPr>
+          <a:xfrm>
+            <a:off x="548640" y="3154680"/>
+            <a:ext cx="11094415" cy="1280160"/>
           </a:xfrm>
           <a:prstGeom prst="rect">
             <a:avLst/>
@@ -18092,7 +19491,7 @@
               <a:spcAft>
                 <a:spcPts val="1200"/>
               </a:spcAft>
-              <a:defRPr sz="1600">
+              <a:defRPr sz="1400">
                 <a:solidFill>
                   <a:srgbClr val="1A202C"/>
                 </a:solidFill>
@@ -18100,357 +19499,15 @@
               </a:defRPr>
             </a:pPr>
             <a:r>
-              <a:t>•  Both models reweighted for the ~9:1 spoof/bonafide imbalance in training data, then compared on dev:</a:t>
-            </a:r>
-          </a:p>
-        </p:txBody>
-      </p:sp>
-      <p:graphicFrame>
-        <p:nvGraphicFramePr>
-          <p:cNvPr id="8" name="Table 7"/>
-          <p:cNvGraphicFramePr>
-            <a:graphicFrameLocks noGrp="1"/>
-          </p:cNvGraphicFramePr>
-          <p:nvPr/>
-        </p:nvGraphicFramePr>
-        <p:xfrm>
-          <a:off x="548640" y="1965960"/>
-          <a:ext cx="11094414" cy="1508760"/>
-        </p:xfrm>
-        <a:graphic>
-          <a:graphicData uri="http://schemas.openxmlformats.org/drawingml/2006/table">
-            <a:tbl>
-              <a:tblPr firstRow="1" bandRow="1">
-                <a:tableStyleId>{5C22544A-7EE6-4342-B048-85BDC9FD1C3A}</a:tableStyleId>
-              </a:tblPr>
-              <a:tblGrid>
-                <a:gridCol w="3962291"/>
-                <a:gridCol w="2641527"/>
-                <a:gridCol w="2641527"/>
-                <a:gridCol w="1849069"/>
-              </a:tblGrid>
-              <a:tr h="502920">
-                <a:tc>
-                  <a:txBody>
-                    <a:bodyPr/>
-                    <a:lstStyle/>
-                    <a:p>
-                      <a:pPr>
-                        <a:defRPr sz="1400" b="1">
-                          <a:solidFill>
-                            <a:srgbClr val="FFFFFF"/>
-                          </a:solidFill>
-                          <a:latin typeface="Calibri"/>
-                        </a:defRPr>
-                      </a:pPr>
-                      <a:r>
-                        <a:t>Model</a:t>
-                      </a:r>
-                    </a:p>
-                  </a:txBody>
-                  <a:tcPr anchor="ctr" marL="109728" marR="109728">
-                    <a:solidFill>
-                      <a:srgbClr val="0F2942"/>
-                    </a:solidFill>
-                  </a:tcPr>
-                </a:tc>
-                <a:tc>
-                  <a:txBody>
-                    <a:bodyPr/>
-                    <a:lstStyle/>
-                    <a:p>
-                      <a:pPr>
-                        <a:defRPr sz="1400" b="1">
-                          <a:solidFill>
-                            <a:srgbClr val="FFFFFF"/>
-                          </a:solidFill>
-                          <a:latin typeface="Calibri"/>
-                        </a:defRPr>
-                      </a:pPr>
-                      <a:r>
-                        <a:t>EER (lower is better)</a:t>
-                      </a:r>
-                    </a:p>
-                  </a:txBody>
-                  <a:tcPr anchor="ctr" marL="109728" marR="109728">
-                    <a:solidFill>
-                      <a:srgbClr val="0F2942"/>
-                    </a:solidFill>
-                  </a:tcPr>
-                </a:tc>
-                <a:tc>
-                  <a:txBody>
-                    <a:bodyPr/>
-                    <a:lstStyle/>
-                    <a:p>
-                      <a:pPr>
-                        <a:defRPr sz="1400" b="1">
-                          <a:solidFill>
-                            <a:srgbClr val="FFFFFF"/>
-                          </a:solidFill>
-                          <a:latin typeface="Calibri"/>
-                        </a:defRPr>
-                      </a:pPr>
-                      <a:r>
-                        <a:t>ROC-AUC</a:t>
-                      </a:r>
-                    </a:p>
-                  </a:txBody>
-                  <a:tcPr anchor="ctr" marL="109728" marR="109728">
-                    <a:solidFill>
-                      <a:srgbClr val="0F2942"/>
-                    </a:solidFill>
-                  </a:tcPr>
-                </a:tc>
-                <a:tc>
-                  <a:txBody>
-                    <a:bodyPr/>
-                    <a:lstStyle/>
-                    <a:p>
-                      <a:pPr>
-                        <a:defRPr sz="1400" b="1">
-                          <a:solidFill>
-                            <a:srgbClr val="FFFFFF"/>
-                          </a:solidFill>
-                          <a:latin typeface="Calibri"/>
-                        </a:defRPr>
-                      </a:pPr>
-                      <a:r>
-                        <a:t>Deployed</a:t>
-                      </a:r>
-                    </a:p>
-                  </a:txBody>
-                  <a:tcPr anchor="ctr" marL="109728" marR="109728">
-                    <a:solidFill>
-                      <a:srgbClr val="0F2942"/>
-                    </a:solidFill>
-                  </a:tcPr>
-                </a:tc>
-              </a:tr>
-              <a:tr h="502920">
-                <a:tc>
-                  <a:txBody>
-                    <a:bodyPr/>
-                    <a:lstStyle/>
-                    <a:p>
-                      <a:pPr>
-                        <a:defRPr sz="1500" b="0">
-                          <a:solidFill>
-                            <a:srgbClr val="1A202C"/>
-                          </a:solidFill>
-                          <a:latin typeface="Calibri"/>
-                        </a:defRPr>
-                      </a:pPr>
-                      <a:r>
-                        <a:t>Random Forest</a:t>
-                      </a:r>
-                    </a:p>
-                  </a:txBody>
-                  <a:tcPr anchor="ctr" marL="109728" marR="109728">
-                    <a:solidFill>
-                      <a:srgbClr val="FFFFFF"/>
-                    </a:solidFill>
-                  </a:tcPr>
-                </a:tc>
-                <a:tc>
-                  <a:txBody>
-                    <a:bodyPr/>
-                    <a:lstStyle/>
-                    <a:p>
-                      <a:pPr>
-                        <a:defRPr sz="1500" b="0">
-                          <a:solidFill>
-                            <a:srgbClr val="1A202C"/>
-                          </a:solidFill>
-                          <a:latin typeface="Calibri"/>
-                        </a:defRPr>
-                      </a:pPr>
-                      <a:r>
-                        <a:t>9.09%</a:t>
-                      </a:r>
-                    </a:p>
-                  </a:txBody>
-                  <a:tcPr anchor="ctr" marL="109728" marR="109728">
-                    <a:solidFill>
-                      <a:srgbClr val="FFFFFF"/>
-                    </a:solidFill>
-                  </a:tcPr>
-                </a:tc>
-                <a:tc>
-                  <a:txBody>
-                    <a:bodyPr/>
-                    <a:lstStyle/>
-                    <a:p>
-                      <a:pPr>
-                        <a:defRPr sz="1500" b="0">
-                          <a:solidFill>
-                            <a:srgbClr val="1A202C"/>
-                          </a:solidFill>
-                          <a:latin typeface="Calibri"/>
-                        </a:defRPr>
-                      </a:pPr>
-                      <a:r>
-                        <a:t>0.969</a:t>
-                      </a:r>
-                    </a:p>
-                  </a:txBody>
-                  <a:tcPr anchor="ctr" marL="109728" marR="109728">
-                    <a:solidFill>
-                      <a:srgbClr val="FFFFFF"/>
-                    </a:solidFill>
-                  </a:tcPr>
-                </a:tc>
-                <a:tc>
-                  <a:txBody>
-                    <a:bodyPr/>
-                    <a:lstStyle/>
-                    <a:p>
-                      <a:pPr>
-                        <a:defRPr sz="1500" b="0">
-                          <a:solidFill>
-                            <a:srgbClr val="1A202C"/>
-                          </a:solidFill>
-                          <a:latin typeface="Calibri"/>
-                        </a:defRPr>
-                      </a:pPr>
-                    </a:p>
-                  </a:txBody>
-                  <a:tcPr anchor="ctr" marL="109728" marR="109728">
-                    <a:solidFill>
-                      <a:srgbClr val="FFFFFF"/>
-                    </a:solidFill>
-                  </a:tcPr>
-                </a:tc>
-              </a:tr>
-              <a:tr h="502920">
-                <a:tc>
-                  <a:txBody>
-                    <a:bodyPr/>
-                    <a:lstStyle/>
-                    <a:p>
-                      <a:pPr>
-                        <a:defRPr sz="1500" b="1">
-                          <a:solidFill>
-                            <a:srgbClr val="0D9488"/>
-                          </a:solidFill>
-                          <a:latin typeface="Calibri"/>
-                        </a:defRPr>
-                      </a:pPr>
-                      <a:r>
-                        <a:t>Gradient Boosting</a:t>
-                      </a:r>
-                    </a:p>
-                  </a:txBody>
-                  <a:tcPr anchor="ctr" marL="109728" marR="109728">
-                    <a:solidFill>
-                      <a:srgbClr val="E6FFFA"/>
-                    </a:solidFill>
-                  </a:tcPr>
-                </a:tc>
-                <a:tc>
-                  <a:txBody>
-                    <a:bodyPr/>
-                    <a:lstStyle/>
-                    <a:p>
-                      <a:pPr>
-                        <a:defRPr sz="1500" b="1">
-                          <a:solidFill>
-                            <a:srgbClr val="0D9488"/>
-                          </a:solidFill>
-                          <a:latin typeface="Calibri"/>
-                        </a:defRPr>
-                      </a:pPr>
-                      <a:r>
-                        <a:t>9.26%</a:t>
-                      </a:r>
-                    </a:p>
-                  </a:txBody>
-                  <a:tcPr anchor="ctr" marL="109728" marR="109728">
-                    <a:solidFill>
-                      <a:srgbClr val="E6FFFA"/>
-                    </a:solidFill>
-                  </a:tcPr>
-                </a:tc>
-                <a:tc>
-                  <a:txBody>
-                    <a:bodyPr/>
-                    <a:lstStyle/>
-                    <a:p>
-                      <a:pPr>
-                        <a:defRPr sz="1500" b="1">
-                          <a:solidFill>
-                            <a:srgbClr val="0D9488"/>
-                          </a:solidFill>
-                          <a:latin typeface="Calibri"/>
-                        </a:defRPr>
-                      </a:pPr>
-                      <a:r>
-                        <a:t>0.970</a:t>
-                      </a:r>
-                    </a:p>
-                  </a:txBody>
-                  <a:tcPr anchor="ctr" marL="109728" marR="109728">
-                    <a:solidFill>
-                      <a:srgbClr val="E6FFFA"/>
-                    </a:solidFill>
-                  </a:tcPr>
-                </a:tc>
-                <a:tc>
-                  <a:txBody>
-                    <a:bodyPr/>
-                    <a:lstStyle/>
-                    <a:p>
-                      <a:pPr>
-                        <a:defRPr sz="1500" b="1">
-                          <a:solidFill>
-                            <a:srgbClr val="0D9488"/>
-                          </a:solidFill>
-                          <a:latin typeface="Calibri"/>
-                        </a:defRPr>
-                      </a:pPr>
-                      <a:r>
-                        <a:t>✓</a:t>
-                      </a:r>
-                    </a:p>
-                  </a:txBody>
-                  <a:tcPr anchor="ctr" marL="109728" marR="109728">
-                    <a:solidFill>
-                      <a:srgbClr val="E6FFFA"/>
-                    </a:solidFill>
-                  </a:tcPr>
-                </a:tc>
-              </a:tr>
-            </a:tbl>
-          </a:graphicData>
-        </a:graphic>
-      </p:graphicFrame>
-      <p:sp>
-        <p:nvSpPr>
-          <p:cNvPr id="9" name="TextBox 8"/>
-          <p:cNvSpPr txBox="1"/>
-          <p:nvPr/>
-        </p:nvSpPr>
-        <p:spPr>
-          <a:xfrm>
-            <a:off x="548640" y="3657600"/>
-            <a:ext cx="11094415" cy="868680"/>
-          </a:xfrm>
-          <a:prstGeom prst="rect">
-            <a:avLst/>
-          </a:prstGeom>
-          <a:noFill/>
-        </p:spPr>
-        <p:txBody>
-          <a:bodyPr wrap="square">
-            <a:spAutoFit/>
-          </a:bodyPr>
-          <a:lstStyle/>
+              <a:t>•  Dev is ~90% spoof, so a model that leans to the majority class scores well on accuracy while failing the class we actually care about. Accuracy was hiding the failure, not measuring it.</a:t>
+            </a:r>
+          </a:p>
           <a:p>
             <a:pPr>
               <a:spcAft>
                 <a:spcPts val="1200"/>
               </a:spcAft>
-              <a:defRPr sz="1300">
+              <a:defRPr sz="1400">
                 <a:solidFill>
                   <a:srgbClr val="1A202C"/>
                 </a:solidFill>
@@ -18458,14 +19515,14 @@
               </a:defRPr>
             </a:pPr>
             <a:r>
-              <a:t>•  A statistical tie on EER — the gap is ~3 clips in 2,548. Gradient Boosting is deployed for calibration and cost: 80.2% bonafide recall at the default threshold vs. 26.6%, 283KB vs. 29.7MB on disk, 0.55ms vs. 27.6ms per clip.</a:t>
-            </a:r>
-          </a:p>
-        </p:txBody>
-      </p:sp>
-      <p:sp>
-        <p:nvSpPr>
-          <p:cNvPr id="10" name="TextBox 9"/>
+              <a:t>•  Reweighting the training loss does not fix this: the 0.5 cutoff applied at evaluation time is a separate lever.</a:t>
+            </a:r>
+          </a:p>
+        </p:txBody>
+      </p:sp>
+      <p:sp>
+        <p:nvSpPr>
+          <p:cNvPr id="17" name="TextBox 16"/>
           <p:cNvSpPr txBox="1"/>
           <p:nvPr/>
         </p:nvSpPr>
@@ -18501,7 +19558,7 @@
       </p:sp>
       <p:sp>
         <p:nvSpPr>
-          <p:cNvPr id="11" name="Rounded Rectangle 10"/>
+          <p:cNvPr id="18" name="Rounded Rectangle 17"/>
           <p:cNvSpPr/>
           <p:nvPr/>
         </p:nvSpPr>
@@ -18559,7 +19616,7 @@
       </p:sp>
       <p:sp>
         <p:nvSpPr>
-          <p:cNvPr id="12" name="Rounded Rectangle 11"/>
+          <p:cNvPr id="19" name="Rounded Rectangle 18"/>
           <p:cNvSpPr/>
           <p:nvPr/>
         </p:nvSpPr>
@@ -18617,7 +19674,7 @@
       </p:sp>
       <p:sp>
         <p:nvSpPr>
-          <p:cNvPr id="13" name="Rounded Rectangle 12"/>
+          <p:cNvPr id="20" name="Rounded Rectangle 19"/>
           <p:cNvSpPr/>
           <p:nvPr/>
         </p:nvSpPr>
@@ -18675,7 +19732,7 @@
       </p:sp>
       <p:sp>
         <p:nvSpPr>
-          <p:cNvPr id="14" name="Rounded Rectangle 13"/>
+          <p:cNvPr id="21" name="Rounded Rectangle 20"/>
           <p:cNvSpPr/>
           <p:nvPr/>
         </p:nvSpPr>
@@ -18733,7 +19790,7 @@
       </p:sp>
       <p:sp>
         <p:nvSpPr>
-          <p:cNvPr id="15" name="Rounded Rectangle 14"/>
+          <p:cNvPr id="22" name="Rounded Rectangle 21"/>
           <p:cNvSpPr/>
           <p:nvPr/>
         </p:nvSpPr>
@@ -18791,7 +19848,7 @@
       </p:sp>
       <p:sp>
         <p:nvSpPr>
-          <p:cNvPr id="16" name="Rounded Rectangle 15"/>
+          <p:cNvPr id="23" name="Rounded Rectangle 22"/>
           <p:cNvSpPr/>
           <p:nvPr/>
         </p:nvSpPr>
@@ -18849,7 +19906,7 @@
       </p:sp>
       <p:sp>
         <p:nvSpPr>
-          <p:cNvPr id="17" name="Rounded Rectangle 16"/>
+          <p:cNvPr id="24" name="Rounded Rectangle 23"/>
           <p:cNvSpPr/>
           <p:nvPr/>
         </p:nvSpPr>
@@ -18907,7 +19964,7 @@
       </p:sp>
       <p:sp>
         <p:nvSpPr>
-          <p:cNvPr id="18" name="Rounded Rectangle 17"/>
+          <p:cNvPr id="25" name="Rounded Rectangle 24"/>
           <p:cNvSpPr/>
           <p:nvPr/>
         </p:nvSpPr>
@@ -18965,7 +20022,7 @@
       </p:sp>
       <p:sp>
         <p:nvSpPr>
-          <p:cNvPr id="19" name="Rounded Rectangle 18"/>
+          <p:cNvPr id="26" name="Rounded Rectangle 25"/>
           <p:cNvSpPr/>
           <p:nvPr/>
         </p:nvSpPr>
@@ -19023,7 +20080,7 @@
       </p:sp>
       <p:cxnSp>
         <p:nvCxnSpPr>
-          <p:cNvPr id="20" name="Connector 19"/>
+          <p:cNvPr id="27" name="Connector 26"/>
           <p:cNvCxnSpPr/>
           <p:nvPr/>
         </p:nvCxnSpPr>
@@ -19060,7 +20117,7 @@
       </p:cxnSp>
       <p:cxnSp>
         <p:nvCxnSpPr>
-          <p:cNvPr id="21" name="Connector 20"/>
+          <p:cNvPr id="28" name="Connector 27"/>
           <p:cNvCxnSpPr/>
           <p:nvPr/>
         </p:nvCxnSpPr>
@@ -19097,7 +20154,7 @@
       </p:cxnSp>
       <p:cxnSp>
         <p:nvCxnSpPr>
-          <p:cNvPr id="22" name="Connector 21"/>
+          <p:cNvPr id="29" name="Connector 28"/>
           <p:cNvCxnSpPr/>
           <p:nvPr/>
         </p:nvCxnSpPr>
@@ -19134,7 +20191,7 @@
       </p:cxnSp>
       <p:cxnSp>
         <p:nvCxnSpPr>
-          <p:cNvPr id="23" name="Connector 22"/>
+          <p:cNvPr id="30" name="Connector 29"/>
           <p:cNvCxnSpPr/>
           <p:nvPr/>
         </p:nvCxnSpPr>
@@ -19171,7 +20228,7 @@
       </p:cxnSp>
       <p:cxnSp>
         <p:nvCxnSpPr>
-          <p:cNvPr id="24" name="Connector 23"/>
+          <p:cNvPr id="31" name="Connector 30"/>
           <p:cNvCxnSpPr/>
           <p:nvPr/>
         </p:nvCxnSpPr>
@@ -19208,7 +20265,7 @@
       </p:cxnSp>
       <p:cxnSp>
         <p:nvCxnSpPr>
-          <p:cNvPr id="25" name="Connector 24"/>
+          <p:cNvPr id="32" name="Connector 31"/>
           <p:cNvCxnSpPr/>
           <p:nvPr/>
         </p:nvCxnSpPr>
@@ -19245,7 +20302,7 @@
       </p:cxnSp>
       <p:cxnSp>
         <p:nvCxnSpPr>
-          <p:cNvPr id="26" name="Connector 25"/>
+          <p:cNvPr id="33" name="Connector 32"/>
           <p:cNvCxnSpPr/>
           <p:nvPr/>
         </p:nvCxnSpPr>
@@ -19282,7 +20339,7 @@
       </p:cxnSp>
       <p:cxnSp>
         <p:nvCxnSpPr>
-          <p:cNvPr id="27" name="Connector 26"/>
+          <p:cNvPr id="34" name="Connector 33"/>
           <p:cNvCxnSpPr/>
           <p:nvPr/>
         </p:nvCxnSpPr>
@@ -19319,7 +20376,7 @@
       </p:cxnSp>
       <p:cxnSp>
         <p:nvCxnSpPr>
-          <p:cNvPr id="28" name="Connector 27"/>
+          <p:cNvPr id="35" name="Connector 34"/>
           <p:cNvCxnSpPr/>
           <p:nvPr/>
         </p:nvCxnSpPr>
@@ -19356,7 +20413,7 @@
       </p:cxnSp>
       <p:cxnSp>
         <p:nvCxnSpPr>
-          <p:cNvPr id="29" name="Connector 28"/>
+          <p:cNvPr id="36" name="Connector 35"/>
           <p:cNvCxnSpPr/>
           <p:nvPr/>
         </p:nvCxnSpPr>
@@ -19393,7 +20450,7 @@
       </p:cxnSp>
       <p:cxnSp>
         <p:nvCxnSpPr>
-          <p:cNvPr id="30" name="Connector 29"/>
+          <p:cNvPr id="37" name="Connector 36"/>
           <p:cNvCxnSpPr/>
           <p:nvPr/>
         </p:nvCxnSpPr>

--- a/docs/slides/slides.pptx
+++ b/docs/slides/slides.pptx
@@ -4296,7 +4296,7 @@
         <p:spPr>
           <a:xfrm>
             <a:off x="548640" y="4800600"/>
-            <a:ext cx="11094415" cy="914400"/>
+            <a:ext cx="11094415" cy="1280160"/>
           </a:xfrm>
           <a:prstGeom prst="rect">
             <a:avLst/>
@@ -4313,7 +4313,7 @@
               <a:spcAft>
                 <a:spcPts val="1200"/>
               </a:spcAft>
-              <a:defRPr sz="1300">
+              <a:defRPr sz="1700">
                 <a:solidFill>
                   <a:srgbClr val="1A202C"/>
                 </a:solidFill>
@@ -4956,7 +4956,7 @@
         <p:spPr>
           <a:xfrm>
             <a:off x="548640" y="3090672"/>
-            <a:ext cx="11094415" cy="457200"/>
+            <a:ext cx="11094415" cy="502920"/>
           </a:xfrm>
           <a:prstGeom prst="rect">
             <a:avLst/>
@@ -4973,7 +4973,7 @@
               <a:spcAft>
                 <a:spcPts val="1200"/>
               </a:spcAft>
-              <a:defRPr sz="1400">
+              <a:defRPr sz="1700">
                 <a:solidFill>
                   <a:srgbClr val="1A202C"/>
                 </a:solidFill>
@@ -4981,7 +4981,7 @@
               </a:defRPr>
             </a:pPr>
             <a:r>
-              <a:t>•  The threshold now lives inside the model artifact, so the streaming consumer and the web app cannot drift back to 0.5.</a:t>
+              <a:t>•  The threshold lives inside the model artifact, so nothing downstream can drift to 0.5.</a:t>
             </a:r>
           </a:p>
         </p:txBody>
@@ -4995,8 +4995,8 @@
           <p:nvPr/>
         </p:nvGraphicFramePr>
         <p:xfrm>
-          <a:off x="548640" y="3611880"/>
-          <a:ext cx="11094414" cy="2523744"/>
+          <a:off x="548640" y="3794760"/>
+          <a:ext cx="11094414" cy="2578608"/>
         </p:xfrm>
         <a:graphic>
           <a:graphicData uri="http://schemas.openxmlformats.org/drawingml/2006/table">
@@ -5009,14 +5009,14 @@
                 <a:gridCol w="2890141"/>
                 <a:gridCol w="2983372"/>
               </a:tblGrid>
-              <a:tr h="420624">
+              <a:tr h="429768">
                 <a:tc>
                   <a:txBody>
                     <a:bodyPr/>
                     <a:lstStyle/>
                     <a:p>
                       <a:pPr>
-                        <a:defRPr sz="1200" b="1">
+                        <a:defRPr sz="1400" b="1">
                           <a:solidFill>
                             <a:srgbClr val="FFFFFF"/>
                           </a:solidFill>
@@ -5040,7 +5040,7 @@
                     <a:lstStyle/>
                     <a:p>
                       <a:pPr>
-                        <a:defRPr sz="1200" b="1">
+                        <a:defRPr sz="1400" b="1">
                           <a:solidFill>
                             <a:srgbClr val="FFFFFF"/>
                           </a:solidFill>
@@ -5064,7 +5064,7 @@
                     <a:lstStyle/>
                     <a:p>
                       <a:pPr>
-                        <a:defRPr sz="1200" b="1">
+                        <a:defRPr sz="1400" b="1">
                           <a:solidFill>
                             <a:srgbClr val="FFFFFF"/>
                           </a:solidFill>
@@ -5083,14 +5083,14 @@
                   </a:tcPr>
                 </a:tc>
               </a:tr>
-              <a:tr h="420624">
+              <a:tr h="429768">
                 <a:tc>
                   <a:txBody>
                     <a:bodyPr/>
                     <a:lstStyle/>
                     <a:p>
                       <a:pPr>
-                        <a:defRPr sz="1300" b="0">
+                        <a:defRPr sz="1500" b="0">
                           <a:solidFill>
                             <a:srgbClr val="1A202C"/>
                           </a:solidFill>
@@ -5114,7 +5114,7 @@
                     <a:lstStyle/>
                     <a:p>
                       <a:pPr>
-                        <a:defRPr sz="1300" b="0">
+                        <a:defRPr sz="1500" b="0">
                           <a:solidFill>
                             <a:srgbClr val="1A202C"/>
                           </a:solidFill>
@@ -5138,7 +5138,7 @@
                     <a:lstStyle/>
                     <a:p>
                       <a:pPr>
-                        <a:defRPr sz="1300" b="0">
+                        <a:defRPr sz="1500" b="0">
                           <a:solidFill>
                             <a:srgbClr val="1A202C"/>
                           </a:solidFill>
@@ -5157,14 +5157,14 @@
                   </a:tcPr>
                 </a:tc>
               </a:tr>
-              <a:tr h="420624">
+              <a:tr h="429768">
                 <a:tc>
                   <a:txBody>
                     <a:bodyPr/>
                     <a:lstStyle/>
                     <a:p>
                       <a:pPr>
-                        <a:defRPr sz="1300" b="0">
+                        <a:defRPr sz="1500" b="0">
                           <a:solidFill>
                             <a:srgbClr val="1A202C"/>
                           </a:solidFill>
@@ -5188,7 +5188,7 @@
                     <a:lstStyle/>
                     <a:p>
                       <a:pPr>
-                        <a:defRPr sz="1300" b="0">
+                        <a:defRPr sz="1500" b="0">
                           <a:solidFill>
                             <a:srgbClr val="1A202C"/>
                           </a:solidFill>
@@ -5212,7 +5212,7 @@
                     <a:lstStyle/>
                     <a:p>
                       <a:pPr>
-                        <a:defRPr sz="1300" b="0">
+                        <a:defRPr sz="1500" b="0">
                           <a:solidFill>
                             <a:srgbClr val="1A202C"/>
                           </a:solidFill>
@@ -5231,14 +5231,14 @@
                   </a:tcPr>
                 </a:tc>
               </a:tr>
-              <a:tr h="420624">
+              <a:tr h="429768">
                 <a:tc>
                   <a:txBody>
                     <a:bodyPr/>
                     <a:lstStyle/>
                     <a:p>
                       <a:pPr>
-                        <a:defRPr sz="1300" b="0">
+                        <a:defRPr sz="1500" b="0">
                           <a:solidFill>
                             <a:srgbClr val="1A202C"/>
                           </a:solidFill>
@@ -5262,7 +5262,7 @@
                     <a:lstStyle/>
                     <a:p>
                       <a:pPr>
-                        <a:defRPr sz="1300" b="0">
+                        <a:defRPr sz="1500" b="0">
                           <a:solidFill>
                             <a:srgbClr val="1A202C"/>
                           </a:solidFill>
@@ -5286,7 +5286,7 @@
                     <a:lstStyle/>
                     <a:p>
                       <a:pPr>
-                        <a:defRPr sz="1300" b="0">
+                        <a:defRPr sz="1500" b="0">
                           <a:solidFill>
                             <a:srgbClr val="1A202C"/>
                           </a:solidFill>
@@ -5305,14 +5305,14 @@
                   </a:tcPr>
                 </a:tc>
               </a:tr>
-              <a:tr h="420624">
+              <a:tr h="429768">
                 <a:tc>
                   <a:txBody>
                     <a:bodyPr/>
                     <a:lstStyle/>
                     <a:p>
                       <a:pPr>
-                        <a:defRPr sz="1300" b="0">
+                        <a:defRPr sz="1500" b="0">
                           <a:solidFill>
                             <a:srgbClr val="1A202C"/>
                           </a:solidFill>
@@ -5336,7 +5336,7 @@
                     <a:lstStyle/>
                     <a:p>
                       <a:pPr>
-                        <a:defRPr sz="1300" b="0">
+                        <a:defRPr sz="1500" b="0">
                           <a:solidFill>
                             <a:srgbClr val="1A202C"/>
                           </a:solidFill>
@@ -5360,7 +5360,7 @@
                     <a:lstStyle/>
                     <a:p>
                       <a:pPr>
-                        <a:defRPr sz="1300" b="0">
+                        <a:defRPr sz="1500" b="0">
                           <a:solidFill>
                             <a:srgbClr val="1A202C"/>
                           </a:solidFill>
@@ -5379,14 +5379,14 @@
                   </a:tcPr>
                 </a:tc>
               </a:tr>
-              <a:tr h="420624">
+              <a:tr h="429768">
                 <a:tc>
                   <a:txBody>
                     <a:bodyPr/>
                     <a:lstStyle/>
                     <a:p>
                       <a:pPr>
-                        <a:defRPr sz="1300" b="1">
+                        <a:defRPr sz="1500" b="1">
                           <a:solidFill>
                             <a:srgbClr val="0D9488"/>
                           </a:solidFill>
@@ -5410,7 +5410,7 @@
                     <a:lstStyle/>
                     <a:p>
                       <a:pPr>
-                        <a:defRPr sz="1300" b="1">
+                        <a:defRPr sz="1500" b="1">
                           <a:solidFill>
                             <a:srgbClr val="0D9488"/>
                           </a:solidFill>
@@ -5434,7 +5434,7 @@
                     <a:lstStyle/>
                     <a:p>
                       <a:pPr>
-                        <a:defRPr sz="1300" b="1">
+                        <a:defRPr sz="1500" b="1">
                           <a:solidFill>
                             <a:srgbClr val="0D9488"/>
                           </a:solidFill>
@@ -19474,7 +19474,7 @@
         <p:spPr>
           <a:xfrm>
             <a:off x="548640" y="3154680"/>
-            <a:ext cx="11094415" cy="1280160"/>
+            <a:ext cx="11094415" cy="1463040"/>
           </a:xfrm>
           <a:prstGeom prst="rect">
             <a:avLst/>
@@ -19491,7 +19491,7 @@
               <a:spcAft>
                 <a:spcPts val="1200"/>
               </a:spcAft>
-              <a:defRPr sz="1400">
+              <a:defRPr sz="1700">
                 <a:solidFill>
                   <a:srgbClr val="1A202C"/>
                 </a:solidFill>
@@ -19507,7 +19507,7 @@
               <a:spcAft>
                 <a:spcPts val="1200"/>
               </a:spcAft>
-              <a:defRPr sz="1400">
+              <a:defRPr sz="1700">
                 <a:solidFill>
                   <a:srgbClr val="1A202C"/>
                 </a:solidFill>

--- a/docs/slides/slides.pptx
+++ b/docs/slides/slides.pptx
@@ -4321,7 +4321,7 @@
               </a:defRPr>
             </a:pPr>
             <a:r>
-              <a:t>•  A statistical tie on EER — the gap is ~3 clips in 2,548 — so the deployed model is pinned, not picked by lowest EER. Gradient Boosting is kept for calibration and deployment cost: 283KB vs. 29.7MB on disk, 0.55ms vs. 27.6ms per clip.</a:t>
+              <a:t>•  A statistical tie on EER — the gap is ~3 clips in 2,548.</a:t>
             </a:r>
           </a:p>
         </p:txBody>
@@ -4627,7 +4627,7 @@
               </a:defRPr>
             </a:pPr>
             <a:r>
-              <a:t>80%</a:t>
+              <a:t>80.2%</a:t>
             </a:r>
           </a:p>
         </p:txBody>
@@ -4760,7 +4760,7 @@
               </a:defRPr>
             </a:pPr>
             <a:r>
-              <a:t>91%</a:t>
+              <a:t>90.7%</a:t>
             </a:r>
           </a:p>
         </p:txBody>
@@ -4893,7 +4893,7 @@
               </a:defRPr>
             </a:pPr>
             <a:r>
-              <a:t>9.3%</a:t>
+              <a:t>9.26%</a:t>
             </a:r>
           </a:p>
         </p:txBody>
@@ -18989,7 +18989,7 @@
               </a:defRPr>
             </a:pPr>
             <a:r>
-              <a:t>The accuracy paradox — where we started</a:t>
+              <a:t>AI capability 1 — the accuracy paradox</a:t>
             </a:r>
           </a:p>
         </p:txBody>
@@ -19025,7 +19025,7 @@
               </a:defRPr>
             </a:pPr>
             <a:r>
-              <a:t>AI capability 1: Random Forest at scikit-learn's default 0.5 threshold</a:t>
+              <a:t>Where we started: Random Forest at scikit-learn's default 0.5 threshold</a:t>
             </a:r>
           </a:p>
         </p:txBody>
@@ -20666,7 +20666,7 @@
               </a:defRPr>
             </a:pPr>
             <a:r>
-              <a:t>A secondary ASVspoof2019 metric - min t-DCF was the primary one</a:t>
+              <a:t>A secondary ASVspoof metric</a:t>
             </a:r>
           </a:p>
         </p:txBody>
@@ -20805,7 +20805,7 @@
               </a:defRPr>
             </a:pPr>
             <a:r>
-              <a:t>•  Lower EER = better separation. 0% would mean a threshold exists with zero errors of either kind; this project's deployed model scores 9.26%. EER was a secondary ASVspoof2019 metric (min t-DCF was primary) - we use it because it needs no cost model.</a:t>
+              <a:t>•  Lower EER = better separation. 0% would mean a threshold exists with zero errors of either kind; this project's deployed model scores 9.26%.</a:t>
             </a:r>
           </a:p>
         </p:txBody>
